--- a/docs/submission/APAR_COMPETITION_DECK.pptx
+++ b/docs/submission/APAR_COMPETITION_DECK.pptx
@@ -2,23 +2,23 @@
 <file path=ppt/presentation.xml><?xml version="1.0" encoding="utf-8"?>
 <p:presentation xmlns:p="http://schemas.openxmlformats.org/presentationml/2006/main">
   <p:sldMasterIdLst>
-    <p:sldMasterId xmlns:r="http://schemas.openxmlformats.org/officeDocument/2006/relationships" id="2147483648" r:id="R02d913897b314c27"/>
+    <p:sldMasterId xmlns:r="http://schemas.openxmlformats.org/officeDocument/2006/relationships" id="2147483648" r:id="R6de035bce60e4c6e"/>
   </p:sldMasterIdLst>
   <p:notesMasterIdLst>
-    <p:notesMasterId xmlns:r="http://schemas.openxmlformats.org/officeDocument/2006/relationships" r:id="R3a29b7e0b19a42f5"/>
+    <p:notesMasterId xmlns:r="http://schemas.openxmlformats.org/officeDocument/2006/relationships" r:id="R86a577ec95fb4c55"/>
   </p:notesMasterIdLst>
   <p:sldIdLst>
-    <p:sldId xmlns:r="http://schemas.openxmlformats.org/officeDocument/2006/relationships" id="256" r:id="R020848e99c84498c"/>
-    <p:sldId xmlns:r="http://schemas.openxmlformats.org/officeDocument/2006/relationships" id="257" r:id="Ra8797c1f8dda44a6"/>
-    <p:sldId xmlns:r="http://schemas.openxmlformats.org/officeDocument/2006/relationships" id="258" r:id="Rdab4d753da724fba"/>
-    <p:sldId xmlns:r="http://schemas.openxmlformats.org/officeDocument/2006/relationships" id="259" r:id="Ra2395c9433354e6d"/>
-    <p:sldId xmlns:r="http://schemas.openxmlformats.org/officeDocument/2006/relationships" id="260" r:id="Rec0910144a3c432a"/>
-    <p:sldId xmlns:r="http://schemas.openxmlformats.org/officeDocument/2006/relationships" id="261" r:id="R6667b5fa8431404b"/>
-    <p:sldId xmlns:r="http://schemas.openxmlformats.org/officeDocument/2006/relationships" id="262" r:id="R7759c6e7de4748f2"/>
-    <p:sldId xmlns:r="http://schemas.openxmlformats.org/officeDocument/2006/relationships" id="263" r:id="R4fff6b740c524eb3"/>
-    <p:sldId xmlns:r="http://schemas.openxmlformats.org/officeDocument/2006/relationships" id="264" r:id="R0255c460728a40d2"/>
-    <p:sldId xmlns:r="http://schemas.openxmlformats.org/officeDocument/2006/relationships" id="265" r:id="Ra46d26e5451c4ee6"/>
-    <p:sldId xmlns:r="http://schemas.openxmlformats.org/officeDocument/2006/relationships" id="266" r:id="R3ce18a431b3b4ba4"/>
+    <p:sldId xmlns:r="http://schemas.openxmlformats.org/officeDocument/2006/relationships" id="256" r:id="R8d378467961b4106"/>
+    <p:sldId xmlns:r="http://schemas.openxmlformats.org/officeDocument/2006/relationships" id="257" r:id="R91221f5c0d7f41a4"/>
+    <p:sldId xmlns:r="http://schemas.openxmlformats.org/officeDocument/2006/relationships" id="258" r:id="R5fe8e43696814853"/>
+    <p:sldId xmlns:r="http://schemas.openxmlformats.org/officeDocument/2006/relationships" id="259" r:id="R32484c3fd1c14f3d"/>
+    <p:sldId xmlns:r="http://schemas.openxmlformats.org/officeDocument/2006/relationships" id="260" r:id="R7905ed7a9aed4077"/>
+    <p:sldId xmlns:r="http://schemas.openxmlformats.org/officeDocument/2006/relationships" id="261" r:id="Raeaa1307aee34239"/>
+    <p:sldId xmlns:r="http://schemas.openxmlformats.org/officeDocument/2006/relationships" id="262" r:id="Rb1fe0839282f4967"/>
+    <p:sldId xmlns:r="http://schemas.openxmlformats.org/officeDocument/2006/relationships" id="263" r:id="R17d87d617202444f"/>
+    <p:sldId xmlns:r="http://schemas.openxmlformats.org/officeDocument/2006/relationships" id="264" r:id="R1a3446fc21484cba"/>
+    <p:sldId xmlns:r="http://schemas.openxmlformats.org/officeDocument/2006/relationships" id="265" r:id="Rf51f319ef10244db"/>
+    <p:sldId xmlns:r="http://schemas.openxmlformats.org/officeDocument/2006/relationships" id="266" r:id="R1ce8f8f696c04e47"/>
   </p:sldIdLst>
   <p:sldSz cx="12192000" cy="6858000"/>
   <p:notesSz cx="6858000" cy="9144000"/>
@@ -1520,7 +1520,7 @@
   </p:cSld>
   <p:clrMap bg1="lt1" tx1="dk1" bg2="lt2" tx2="dk2" accent1="accent1" accent2="accent2" accent3="accent3" accent4="accent4" accent5="accent5" accent6="accent6" hlink="hlink" folHlink="folHlink"/>
   <p:sldLayoutIdLst>
-    <p:sldLayoutId xmlns:r="http://schemas.openxmlformats.org/officeDocument/2006/relationships" id="2147483649" r:id="R62e4b0c6ee3945f2"/>
+    <p:sldLayoutId xmlns:r="http://schemas.openxmlformats.org/officeDocument/2006/relationships" id="2147483649" r:id="R15cd6fcb91ad4273"/>
   </p:sldLayoutIdLst>
   <p:txStyles>
     <p:titleStyle>
@@ -2053,7 +2053,7 @@
     <p:bg>
       <p:bgPr>
         <a:solidFill xmlns:a="http://schemas.openxmlformats.org/drawingml/2006/main">
-          <a:srgbClr val="F8F7F3"/>
+          <a:srgbClr val="0A0907"/>
         </a:solidFill>
       </p:bgPr>
     </p:bg>
@@ -2101,6 +2101,7 @@
           <a:lstStyle xmlns:a="http://schemas.openxmlformats.org/drawingml/2006/main"/>
           <a:p xmlns:a="http://schemas.openxmlformats.org/drawingml/2006/main">
             <a:pPr algn="l">
+              <a:buNone/>
               <a:defRPr sz="975" b="1">
                 <a:solidFill>
                   <a:srgbClr val="E9652E"/>
@@ -2111,13 +2112,13 @@
               </a:defRPr>
             </a:pPr>
             <a:r>
-              <a:rPr sz="975" b="1">
-                <a:solidFill>
-                  <a:srgbClr val="E9652E"/>
-                </a:solidFill>
-                <a:latin typeface="Arial"/>
-                <a:ea typeface="Arial"/>
-                <a:cs typeface="Arial"/>
+              <a:rPr sz="825" b="1">
+                <a:solidFill>
+                  <a:srgbClr val="F19A68"/>
+                </a:solidFill>
+                <a:latin typeface="Menlo"/>
+                <a:ea typeface="Menlo"/>
+                <a:cs typeface="Menlo"/>
               </a:rPr>
               <a:t>MASTERCARD INNOVATION CHALLENGE 2026</a:t>
             </a:r>
@@ -2159,6 +2160,7 @@
           <a:lstStyle xmlns:a="http://schemas.openxmlformats.org/drawingml/2006/main"/>
           <a:p xmlns:a="http://schemas.openxmlformats.org/drawingml/2006/main">
             <a:pPr algn="l">
+              <a:buNone/>
               <a:defRPr sz="3600" b="1">
                 <a:solidFill>
                   <a:srgbClr val="171714"/>
@@ -2169,36 +2171,37 @@
               </a:defRPr>
             </a:pPr>
             <a:r>
-              <a:rPr sz="3600" b="1">
+              <a:rPr sz="3750" b="0">
+                <a:solidFill>
+                  <a:srgbClr val="F1E9DC"/>
+                </a:solidFill>
+                <a:latin typeface="Georgia"/>
+                <a:ea typeface="Georgia"/>
+                <a:cs typeface="Georgia"/>
+              </a:rPr>
+              <a:t>Assure the campaign,</a:t>
+            </a:r>
+          </a:p>
+          <a:p xmlns:a="http://schemas.openxmlformats.org/drawingml/2006/main">
+            <a:pPr algn="l">
+              <a:buNone/>
+              <a:defRPr sz="3600" b="1">
                 <a:solidFill>
                   <a:srgbClr val="171714"/>
                 </a:solidFill>
                 <a:latin typeface="Arial"/>
                 <a:ea typeface="Arial"/>
                 <a:cs typeface="Arial"/>
-              </a:rPr>
-              <a:t>Assure the campaign,</a:t>
-            </a:r>
-          </a:p>
-          <a:p xmlns:a="http://schemas.openxmlformats.org/drawingml/2006/main">
-            <a:pPr algn="l">
-              <a:defRPr sz="3600" b="1">
-                <a:solidFill>
-                  <a:srgbClr val="171714"/>
-                </a:solidFill>
-                <a:latin typeface="Arial"/>
-                <a:ea typeface="Arial"/>
-                <a:cs typeface="Arial"/>
-              </a:defRPr>
-            </a:pPr>
-            <a:r>
-              <a:rPr sz="3600" b="1">
-                <a:solidFill>
-                  <a:srgbClr val="171714"/>
-                </a:solidFill>
-                <a:latin typeface="Arial"/>
-                <a:ea typeface="Arial"/>
-                <a:cs typeface="Arial"/>
+              </a:defRPr>
+            </a:pPr>
+            <a:r>
+              <a:rPr sz="3750" b="0">
+                <a:solidFill>
+                  <a:srgbClr val="F1E9DC"/>
+                </a:solidFill>
+                <a:latin typeface="Georgia"/>
+                <a:ea typeface="Georgia"/>
+                <a:cs typeface="Georgia"/>
               </a:rPr>
               <a:t>not just the transaction.</a:t>
             </a:r>
@@ -2240,6 +2243,7 @@
           <a:lstStyle xmlns:a="http://schemas.openxmlformats.org/drawingml/2006/main"/>
           <a:p xmlns:a="http://schemas.openxmlformats.org/drawingml/2006/main">
             <a:pPr algn="l">
+              <a:buNone/>
               <a:defRPr sz="1725" b="0">
                 <a:solidFill>
                   <a:srgbClr val="686863"/>
@@ -2250,9 +2254,9 @@
               </a:defRPr>
             </a:pPr>
             <a:r>
-              <a:rPr sz="1725" b="0">
-                <a:solidFill>
-                  <a:srgbClr val="686863"/>
+              <a:rPr sz="1575" b="0">
+                <a:solidFill>
+                  <a:srgbClr val="C8BDAE"/>
                 </a:solidFill>
                 <a:latin typeface="Arial"/>
                 <a:ea typeface="Arial"/>
@@ -2288,11 +2292,11 @@
             </a:avLst>
           </a:prstGeom>
           <a:solidFill xmlns:a="http://schemas.openxmlformats.org/drawingml/2006/main">
-            <a:srgbClr val="FCE5DA"/>
+            <a:srgbClr val="211B14"/>
           </a:solidFill>
           <a:ln xmlns:a="http://schemas.openxmlformats.org/drawingml/2006/main" w="9525">
             <a:solidFill>
-              <a:srgbClr val="FCE5DA"/>
+              <a:srgbClr val="E8793D"/>
             </a:solidFill>
             <a:prstDash val="solid"/>
           </a:ln>
@@ -2328,11 +2332,12 @@
         </p:spPr>
         <p:txBody>
           <a:bodyPr xmlns:a="http://schemas.openxmlformats.org/drawingml/2006/main" anchor="t">
-            <a:normAutofit fontScale="66667"/>
+            <a:normAutofit fontScale="78788"/>
           </a:bodyPr>
           <a:lstStyle xmlns:a="http://schemas.openxmlformats.org/drawingml/2006/main"/>
           <a:p xmlns:a="http://schemas.openxmlformats.org/drawingml/2006/main">
             <a:pPr algn="ctr">
+              <a:buNone/>
               <a:defRPr sz="975" b="1">
                 <a:solidFill>
                   <a:srgbClr val="E9652E"/>
@@ -2343,13 +2348,13 @@
               </a:defRPr>
             </a:pPr>
             <a:r>
-              <a:rPr sz="975" b="1">
-                <a:solidFill>
-                  <a:srgbClr val="E9652E"/>
-                </a:solidFill>
-                <a:latin typeface="Arial"/>
-                <a:ea typeface="Arial"/>
-                <a:cs typeface="Arial"/>
+              <a:rPr sz="825" b="1">
+                <a:solidFill>
+                  <a:srgbClr val="F19A68"/>
+                </a:solidFill>
+                <a:latin typeface="Menlo"/>
+                <a:ea typeface="Menlo"/>
+                <a:cs typeface="Menlo"/>
               </a:rPr>
               <a:t>SYNTHETIC • OFFLINE • REPLAYABLE</a:t>
             </a:r>
@@ -2391,6 +2396,7 @@
           <a:lstStyle xmlns:a="http://schemas.openxmlformats.org/drawingml/2006/main"/>
           <a:p xmlns:a="http://schemas.openxmlformats.org/drawingml/2006/main">
             <a:pPr algn="l">
+              <a:buNone/>
               <a:defRPr sz="1200" b="0">
                 <a:solidFill>
                   <a:srgbClr val="686863"/>
@@ -2401,9 +2407,9 @@
               </a:defRPr>
             </a:pPr>
             <a:r>
-              <a:rPr sz="1200" b="0">
-                <a:solidFill>
-                  <a:srgbClr val="686863"/>
+              <a:rPr sz="1050" b="0">
+                <a:solidFill>
+                  <a:srgbClr val="9C9183"/>
                 </a:solidFill>
                 <a:latin typeface="Arial"/>
                 <a:ea typeface="Arial"/>
@@ -2439,11 +2445,11 @@
             </a:avLst>
           </a:prstGeom>
           <a:solidFill xmlns:a="http://schemas.openxmlformats.org/drawingml/2006/main">
-            <a:srgbClr val="FFFFFF"/>
+            <a:srgbClr val="14110D"/>
           </a:solidFill>
           <a:ln xmlns:a="http://schemas.openxmlformats.org/drawingml/2006/main" w="9525">
             <a:solidFill>
-              <a:srgbClr val="D7D6CF"/>
+              <a:srgbClr val="6B5F50"/>
             </a:solidFill>
             <a:prstDash val="solid"/>
           </a:ln>
@@ -2451,14 +2457,14 @@
       </p:sp>
       <p:pic>
         <p:nvPicPr>
-          <p:cNvPr id="16" name=""/>
+          <p:cNvPr id="18" name=""/>
           <p:cNvPicPr>
             <a:picLocks xmlns:a="http://schemas.openxmlformats.org/drawingml/2006/main" noChangeAspect="1"/>
           </p:cNvPicPr>
           <p:nvPr/>
         </p:nvPicPr>
         <p:blipFill>
-          <a:blip xmlns:r="http://schemas.openxmlformats.org/officeDocument/2006/relationships" xmlns:a="http://schemas.openxmlformats.org/drawingml/2006/main" r:embed="R5390e276e10b4434"/>
+          <a:blip xmlns:r="http://schemas.openxmlformats.org/officeDocument/2006/relationships" xmlns:a="http://schemas.openxmlformats.org/drawingml/2006/main" r:embed="Rc6105b72098c4972"/>
           <a:srcRect xmlns:a="http://schemas.openxmlformats.org/drawingml/2006/main" l="0" t="16347" r="0" b="16347"/>
           <a:stretch xmlns:a="http://schemas.openxmlformats.org/drawingml/2006/main">
             <a:fillRect l="0" t="0" r="0" b="0"/>
@@ -2469,10 +2475,8 @@
             <a:off x="6324600" y="457200"/>
             <a:ext cx="5467350" cy="5657850"/>
           </a:xfrm>
-          <a:prstGeom xmlns:a="http://schemas.openxmlformats.org/drawingml/2006/main" prst="roundRect">
-            <a:avLst>
-              <a:gd name="adj" fmla="val 1394"/>
-            </a:avLst>
+          <a:prstGeom xmlns:a="http://schemas.openxmlformats.org/drawingml/2006/main" prst="rect">
+            <a:avLst/>
           </a:prstGeom>
         </p:spPr>
       </p:pic>
@@ -2492,7 +2496,7 @@
     <p:bg>
       <p:bgPr>
         <a:solidFill xmlns:a="http://schemas.openxmlformats.org/drawingml/2006/main">
-          <a:srgbClr val="F8F7F3"/>
+          <a:srgbClr val="0A0907"/>
         </a:solidFill>
       </p:bgPr>
     </p:bg>
@@ -2540,6 +2544,7 @@
           <a:lstStyle xmlns:a="http://schemas.openxmlformats.org/drawingml/2006/main"/>
           <a:p xmlns:a="http://schemas.openxmlformats.org/drawingml/2006/main">
             <a:pPr algn="l">
+              <a:buNone/>
               <a:defRPr sz="975" b="1">
                 <a:solidFill>
                   <a:srgbClr val="E9652E"/>
@@ -2550,13 +2555,13 @@
               </a:defRPr>
             </a:pPr>
             <a:r>
-              <a:rPr sz="975" b="1">
-                <a:solidFill>
-                  <a:srgbClr val="E9652E"/>
-                </a:solidFill>
-                <a:latin typeface="Arial"/>
-                <a:ea typeface="Arial"/>
-                <a:cs typeface="Arial"/>
+              <a:rPr sz="825" b="1">
+                <a:solidFill>
+                  <a:srgbClr val="F19A68"/>
+                </a:solidFill>
+                <a:latin typeface="Menlo"/>
+                <a:ea typeface="Menlo"/>
+                <a:cs typeface="Menlo"/>
               </a:rPr>
               <a:t>ADAPTIVE PAYMENT ASSURANCE RANGE</a:t>
             </a:r>
@@ -2598,6 +2603,7 @@
           <a:lstStyle xmlns:a="http://schemas.openxmlformats.org/drawingml/2006/main"/>
           <a:p xmlns:a="http://schemas.openxmlformats.org/drawingml/2006/main">
             <a:pPr algn="l">
+              <a:buNone/>
               <a:defRPr sz="2850" b="1">
                 <a:solidFill>
                   <a:srgbClr val="171714"/>
@@ -2608,13 +2614,13 @@
               </a:defRPr>
             </a:pPr>
             <a:r>
-              <a:rPr sz="2850" b="1">
-                <a:solidFill>
-                  <a:srgbClr val="171714"/>
-                </a:solidFill>
-                <a:latin typeface="Arial"/>
-                <a:ea typeface="Arial"/>
-                <a:cs typeface="Arial"/>
+              <a:rPr sz="2925" b="0">
+                <a:solidFill>
+                  <a:srgbClr val="F1E9DC"/>
+                </a:solidFill>
+                <a:latin typeface="Georgia"/>
+                <a:ea typeface="Georgia"/>
+                <a:cs typeface="Georgia"/>
               </a:rPr>
               <a:t>A sharp claim boundary makes the demo credible</a:t>
             </a:r>
@@ -2651,11 +2657,12 @@
         </p:spPr>
         <p:txBody>
           <a:bodyPr xmlns:a="http://schemas.openxmlformats.org/drawingml/2006/main" anchor="t">
-            <a:normAutofit fontScale="79487"/>
+            <a:normAutofit fontScale="93939"/>
           </a:bodyPr>
           <a:lstStyle xmlns:a="http://schemas.openxmlformats.org/drawingml/2006/main"/>
           <a:p xmlns:a="http://schemas.openxmlformats.org/drawingml/2006/main">
             <a:pPr algn="r">
+              <a:buNone/>
               <a:defRPr sz="975" b="0">
                 <a:solidFill>
                   <a:srgbClr val="686863"/>
@@ -2666,13 +2673,13 @@
               </a:defRPr>
             </a:pPr>
             <a:r>
-              <a:rPr sz="975" b="0">
-                <a:solidFill>
-                  <a:srgbClr val="686863"/>
-                </a:solidFill>
-                <a:latin typeface="Arial"/>
-                <a:ea typeface="Arial"/>
-                <a:cs typeface="Arial"/>
+              <a:rPr sz="825" b="0">
+                <a:solidFill>
+                  <a:srgbClr val="9C9183"/>
+                </a:solidFill>
+                <a:latin typeface="Menlo"/>
+                <a:ea typeface="Menlo"/>
+                <a:cs typeface="Menlo"/>
               </a:rPr>
               <a:t>10</a:t>
             </a:r>
@@ -2702,11 +2709,11 @@
             <a:avLst/>
           </a:prstGeom>
           <a:solidFill xmlns:a="http://schemas.openxmlformats.org/drawingml/2006/main">
-            <a:srgbClr val="D7D6CF"/>
+            <a:srgbClr val="3F382E"/>
           </a:solidFill>
           <a:ln xmlns:a="http://schemas.openxmlformats.org/drawingml/2006/main" w="0">
             <a:solidFill>
-              <a:srgbClr val="D7D6CF"/>
+              <a:srgbClr val="3F382E"/>
             </a:solidFill>
             <a:prstDash val="solid"/>
           </a:ln>
@@ -2737,11 +2744,11 @@
             </a:avLst>
           </a:prstGeom>
           <a:solidFill xmlns:a="http://schemas.openxmlformats.org/drawingml/2006/main">
-            <a:srgbClr val="DFF1E7"/>
+            <a:srgbClr val="20382A"/>
           </a:solidFill>
-          <a:ln xmlns:a="http://schemas.openxmlformats.org/drawingml/2006/main" w="9525">
+          <a:ln xmlns:a="http://schemas.openxmlformats.org/drawingml/2006/main" w="19050">
             <a:solidFill>
-              <a:srgbClr val="176A4B"/>
+              <a:srgbClr val="75B78E"/>
             </a:solidFill>
             <a:prstDash val="solid"/>
           </a:ln>
@@ -2772,11 +2779,11 @@
             </a:avLst>
           </a:prstGeom>
           <a:solidFill xmlns:a="http://schemas.openxmlformats.org/drawingml/2006/main">
-            <a:srgbClr val="FCE5DA"/>
+            <a:srgbClr val="2B1512"/>
           </a:solidFill>
-          <a:ln xmlns:a="http://schemas.openxmlformats.org/drawingml/2006/main" w="9525">
+          <a:ln xmlns:a="http://schemas.openxmlformats.org/drawingml/2006/main" w="19050">
             <a:solidFill>
-              <a:srgbClr val="E9652E"/>
+              <a:srgbClr val="E35E54"/>
             </a:solidFill>
             <a:prstDash val="solid"/>
           </a:ln>
@@ -2817,6 +2824,7 @@
           <a:lstStyle xmlns:a="http://schemas.openxmlformats.org/drawingml/2006/main"/>
           <a:p xmlns:a="http://schemas.openxmlformats.org/drawingml/2006/main">
             <a:pPr algn="l">
+              <a:buNone/>
               <a:defRPr sz="1275" b="1">
                 <a:solidFill>
                   <a:srgbClr val="176A4B"/>
@@ -2827,13 +2835,13 @@
               </a:defRPr>
             </a:pPr>
             <a:r>
-              <a:rPr sz="1275" b="1">
-                <a:solidFill>
-                  <a:srgbClr val="176A4B"/>
-                </a:solidFill>
-                <a:latin typeface="Arial"/>
-                <a:ea typeface="Arial"/>
-                <a:cs typeface="Arial"/>
+              <a:rPr sz="1050" b="1">
+                <a:solidFill>
+                  <a:srgbClr val="75B78E"/>
+                </a:solidFill>
+                <a:latin typeface="Menlo"/>
+                <a:ea typeface="Menlo"/>
+                <a:cs typeface="Menlo"/>
               </a:rPr>
               <a:t>WHAT WE PROVE</a:t>
             </a:r>
@@ -2875,6 +2883,7 @@
           <a:lstStyle xmlns:a="http://schemas.openxmlformats.org/drawingml/2006/main"/>
           <a:p xmlns:a="http://schemas.openxmlformats.org/drawingml/2006/main">
             <a:pPr algn="l">
+              <a:buNone/>
               <a:defRPr sz="1275" b="1">
                 <a:solidFill>
                   <a:srgbClr val="E9652E"/>
@@ -2885,13 +2894,13 @@
               </a:defRPr>
             </a:pPr>
             <a:r>
-              <a:rPr sz="1275" b="1">
-                <a:solidFill>
-                  <a:srgbClr val="E9652E"/>
-                </a:solidFill>
-                <a:latin typeface="Arial"/>
-                <a:ea typeface="Arial"/>
-                <a:cs typeface="Arial"/>
+              <a:rPr sz="1050" b="1">
+                <a:solidFill>
+                  <a:srgbClr val="F28A80"/>
+                </a:solidFill>
+                <a:latin typeface="Menlo"/>
+                <a:ea typeface="Menlo"/>
+                <a:cs typeface="Menlo"/>
               </a:rPr>
               <a:t>WHAT WE DO NOT CLAIM</a:t>
             </a:r>
@@ -2928,11 +2937,12 @@
         </p:spPr>
         <p:txBody>
           <a:bodyPr xmlns:a="http://schemas.openxmlformats.org/drawingml/2006/main" anchor="t">
-            <a:normAutofit fontScale="63575"/>
+            <a:normAutofit fontScale="67315"/>
           </a:bodyPr>
           <a:lstStyle xmlns:a="http://schemas.openxmlformats.org/drawingml/2006/main"/>
           <a:p xmlns:a="http://schemas.openxmlformats.org/drawingml/2006/main">
             <a:pPr algn="l">
+              <a:buNone/>
               <a:defRPr sz="1350" b="1">
                 <a:solidFill>
                   <a:srgbClr val="176A4B"/>
@@ -2943,9 +2953,9 @@
               </a:defRPr>
             </a:pPr>
             <a:r>
-              <a:rPr sz="1350" b="1">
-                <a:solidFill>
-                  <a:srgbClr val="176A4B"/>
+              <a:rPr sz="1275" b="1">
+                <a:solidFill>
+                  <a:srgbClr val="75B78E"/>
                 </a:solidFill>
                 <a:latin typeface="Arial"/>
                 <a:ea typeface="Arial"/>
@@ -2991,6 +3001,7 @@
           <a:lstStyle xmlns:a="http://schemas.openxmlformats.org/drawingml/2006/main"/>
           <a:p xmlns:a="http://schemas.openxmlformats.org/drawingml/2006/main">
             <a:pPr algn="l">
+              <a:buNone/>
               <a:defRPr sz="1350" b="1">
                 <a:solidFill>
                   <a:srgbClr val="171714"/>
@@ -3001,9 +3012,9 @@
               </a:defRPr>
             </a:pPr>
             <a:r>
-              <a:rPr sz="1350" b="1">
-                <a:solidFill>
-                  <a:srgbClr val="171714"/>
+              <a:rPr sz="1275" b="1">
+                <a:solidFill>
+                  <a:srgbClr val="F1E9DC"/>
                 </a:solidFill>
                 <a:latin typeface="Arial"/>
                 <a:ea typeface="Arial"/>
@@ -3044,11 +3055,12 @@
         </p:spPr>
         <p:txBody>
           <a:bodyPr xmlns:a="http://schemas.openxmlformats.org/drawingml/2006/main" anchor="t">
-            <a:normAutofit fontScale="63575"/>
+            <a:normAutofit fontScale="67315"/>
           </a:bodyPr>
           <a:lstStyle xmlns:a="http://schemas.openxmlformats.org/drawingml/2006/main"/>
           <a:p xmlns:a="http://schemas.openxmlformats.org/drawingml/2006/main">
             <a:pPr algn="l">
+              <a:buNone/>
               <a:defRPr sz="1350" b="1">
                 <a:solidFill>
                   <a:srgbClr val="176A4B"/>
@@ -3059,9 +3071,9 @@
               </a:defRPr>
             </a:pPr>
             <a:r>
-              <a:rPr sz="1350" b="1">
-                <a:solidFill>
-                  <a:srgbClr val="176A4B"/>
+              <a:rPr sz="1275" b="1">
+                <a:solidFill>
+                  <a:srgbClr val="75B78E"/>
                 </a:solidFill>
                 <a:latin typeface="Arial"/>
                 <a:ea typeface="Arial"/>
@@ -3107,6 +3119,7 @@
           <a:lstStyle xmlns:a="http://schemas.openxmlformats.org/drawingml/2006/main"/>
           <a:p xmlns:a="http://schemas.openxmlformats.org/drawingml/2006/main">
             <a:pPr algn="l">
+              <a:buNone/>
               <a:defRPr sz="1350" b="1">
                 <a:solidFill>
                   <a:srgbClr val="171714"/>
@@ -3117,9 +3130,9 @@
               </a:defRPr>
             </a:pPr>
             <a:r>
-              <a:rPr sz="1350" b="1">
-                <a:solidFill>
-                  <a:srgbClr val="171714"/>
+              <a:rPr sz="1275" b="1">
+                <a:solidFill>
+                  <a:srgbClr val="F1E9DC"/>
                 </a:solidFill>
                 <a:latin typeface="Arial"/>
                 <a:ea typeface="Arial"/>
@@ -3160,11 +3173,12 @@
         </p:spPr>
         <p:txBody>
           <a:bodyPr xmlns:a="http://schemas.openxmlformats.org/drawingml/2006/main" anchor="t">
-            <a:normAutofit fontScale="63575"/>
+            <a:normAutofit fontScale="67315"/>
           </a:bodyPr>
           <a:lstStyle xmlns:a="http://schemas.openxmlformats.org/drawingml/2006/main"/>
           <a:p xmlns:a="http://schemas.openxmlformats.org/drawingml/2006/main">
             <a:pPr algn="l">
+              <a:buNone/>
               <a:defRPr sz="1350" b="1">
                 <a:solidFill>
                   <a:srgbClr val="176A4B"/>
@@ -3175,9 +3189,9 @@
               </a:defRPr>
             </a:pPr>
             <a:r>
-              <a:rPr sz="1350" b="1">
-                <a:solidFill>
-                  <a:srgbClr val="176A4B"/>
+              <a:rPr sz="1275" b="1">
+                <a:solidFill>
+                  <a:srgbClr val="75B78E"/>
                 </a:solidFill>
                 <a:latin typeface="Arial"/>
                 <a:ea typeface="Arial"/>
@@ -3223,6 +3237,7 @@
           <a:lstStyle xmlns:a="http://schemas.openxmlformats.org/drawingml/2006/main"/>
           <a:p xmlns:a="http://schemas.openxmlformats.org/drawingml/2006/main">
             <a:pPr algn="l">
+              <a:buNone/>
               <a:defRPr sz="1350" b="1">
                 <a:solidFill>
                   <a:srgbClr val="171714"/>
@@ -3233,9 +3248,9 @@
               </a:defRPr>
             </a:pPr>
             <a:r>
-              <a:rPr sz="1350" b="1">
-                <a:solidFill>
-                  <a:srgbClr val="171714"/>
+              <a:rPr sz="1275" b="1">
+                <a:solidFill>
+                  <a:srgbClr val="F1E9DC"/>
                 </a:solidFill>
                 <a:latin typeface="Arial"/>
                 <a:ea typeface="Arial"/>
@@ -3276,11 +3291,12 @@
         </p:spPr>
         <p:txBody>
           <a:bodyPr xmlns:a="http://schemas.openxmlformats.org/drawingml/2006/main" anchor="t">
-            <a:normAutofit fontScale="63575"/>
+            <a:normAutofit fontScale="67315"/>
           </a:bodyPr>
           <a:lstStyle xmlns:a="http://schemas.openxmlformats.org/drawingml/2006/main"/>
           <a:p xmlns:a="http://schemas.openxmlformats.org/drawingml/2006/main">
             <a:pPr algn="l">
+              <a:buNone/>
               <a:defRPr sz="1350" b="1">
                 <a:solidFill>
                   <a:srgbClr val="176A4B"/>
@@ -3291,9 +3307,9 @@
               </a:defRPr>
             </a:pPr>
             <a:r>
-              <a:rPr sz="1350" b="1">
-                <a:solidFill>
-                  <a:srgbClr val="176A4B"/>
+              <a:rPr sz="1275" b="1">
+                <a:solidFill>
+                  <a:srgbClr val="75B78E"/>
                 </a:solidFill>
                 <a:latin typeface="Arial"/>
                 <a:ea typeface="Arial"/>
@@ -3339,6 +3355,7 @@
           <a:lstStyle xmlns:a="http://schemas.openxmlformats.org/drawingml/2006/main"/>
           <a:p xmlns:a="http://schemas.openxmlformats.org/drawingml/2006/main">
             <a:pPr algn="l">
+              <a:buNone/>
               <a:defRPr sz="1350" b="1">
                 <a:solidFill>
                   <a:srgbClr val="171714"/>
@@ -3349,9 +3366,9 @@
               </a:defRPr>
             </a:pPr>
             <a:r>
-              <a:rPr sz="1350" b="1">
-                <a:solidFill>
-                  <a:srgbClr val="171714"/>
+              <a:rPr sz="1275" b="1">
+                <a:solidFill>
+                  <a:srgbClr val="F1E9DC"/>
                 </a:solidFill>
                 <a:latin typeface="Arial"/>
                 <a:ea typeface="Arial"/>
@@ -3392,11 +3409,12 @@
         </p:spPr>
         <p:txBody>
           <a:bodyPr xmlns:a="http://schemas.openxmlformats.org/drawingml/2006/main" anchor="t">
-            <a:normAutofit fontScale="63575"/>
+            <a:normAutofit fontScale="67315"/>
           </a:bodyPr>
           <a:lstStyle xmlns:a="http://schemas.openxmlformats.org/drawingml/2006/main"/>
           <a:p xmlns:a="http://schemas.openxmlformats.org/drawingml/2006/main">
             <a:pPr algn="l">
+              <a:buNone/>
               <a:defRPr sz="1350" b="1">
                 <a:solidFill>
                   <a:srgbClr val="176A4B"/>
@@ -3407,9 +3425,9 @@
               </a:defRPr>
             </a:pPr>
             <a:r>
-              <a:rPr sz="1350" b="1">
-                <a:solidFill>
-                  <a:srgbClr val="176A4B"/>
+              <a:rPr sz="1275" b="1">
+                <a:solidFill>
+                  <a:srgbClr val="75B78E"/>
                 </a:solidFill>
                 <a:latin typeface="Arial"/>
                 <a:ea typeface="Arial"/>
@@ -3455,6 +3473,7 @@
           <a:lstStyle xmlns:a="http://schemas.openxmlformats.org/drawingml/2006/main"/>
           <a:p xmlns:a="http://schemas.openxmlformats.org/drawingml/2006/main">
             <a:pPr algn="l">
+              <a:buNone/>
               <a:defRPr sz="1350" b="1">
                 <a:solidFill>
                   <a:srgbClr val="171714"/>
@@ -3465,9 +3484,9 @@
               </a:defRPr>
             </a:pPr>
             <a:r>
-              <a:rPr sz="1350" b="1">
-                <a:solidFill>
-                  <a:srgbClr val="171714"/>
+              <a:rPr sz="1275" b="1">
+                <a:solidFill>
+                  <a:srgbClr val="F1E9DC"/>
                 </a:solidFill>
                 <a:latin typeface="Arial"/>
                 <a:ea typeface="Arial"/>
@@ -3508,11 +3527,12 @@
         </p:spPr>
         <p:txBody>
           <a:bodyPr xmlns:a="http://schemas.openxmlformats.org/drawingml/2006/main" anchor="t">
-            <a:normAutofit fontScale="68066"/>
+            <a:normAutofit fontScale="74872"/>
           </a:bodyPr>
           <a:lstStyle xmlns:a="http://schemas.openxmlformats.org/drawingml/2006/main"/>
           <a:p xmlns:a="http://schemas.openxmlformats.org/drawingml/2006/main">
             <a:pPr algn="l">
+              <a:buNone/>
               <a:defRPr sz="1650" b="1">
                 <a:solidFill>
                   <a:srgbClr val="A43C2E"/>
@@ -3523,9 +3543,9 @@
               </a:defRPr>
             </a:pPr>
             <a:r>
-              <a:rPr sz="1650" b="1">
-                <a:solidFill>
-                  <a:srgbClr val="A43C2E"/>
+              <a:rPr sz="1500" b="1">
+                <a:solidFill>
+                  <a:srgbClr val="F28A80"/>
                 </a:solidFill>
                 <a:latin typeface="Arial"/>
                 <a:ea typeface="Arial"/>
@@ -3571,6 +3591,7 @@
           <a:lstStyle xmlns:a="http://schemas.openxmlformats.org/drawingml/2006/main"/>
           <a:p xmlns:a="http://schemas.openxmlformats.org/drawingml/2006/main">
             <a:pPr algn="l">
+              <a:buNone/>
               <a:defRPr sz="1350" b="1">
                 <a:solidFill>
                   <a:srgbClr val="171714"/>
@@ -3581,9 +3602,9 @@
               </a:defRPr>
             </a:pPr>
             <a:r>
-              <a:rPr sz="1350" b="1">
-                <a:solidFill>
-                  <a:srgbClr val="171714"/>
+              <a:rPr sz="1275" b="1">
+                <a:solidFill>
+                  <a:srgbClr val="F1E9DC"/>
                 </a:solidFill>
                 <a:latin typeface="Arial"/>
                 <a:ea typeface="Arial"/>
@@ -3624,11 +3645,12 @@
         </p:spPr>
         <p:txBody>
           <a:bodyPr xmlns:a="http://schemas.openxmlformats.org/drawingml/2006/main" anchor="t">
-            <a:normAutofit fontScale="68066"/>
+            <a:normAutofit fontScale="74872"/>
           </a:bodyPr>
           <a:lstStyle xmlns:a="http://schemas.openxmlformats.org/drawingml/2006/main"/>
           <a:p xmlns:a="http://schemas.openxmlformats.org/drawingml/2006/main">
             <a:pPr algn="l">
+              <a:buNone/>
               <a:defRPr sz="1650" b="1">
                 <a:solidFill>
                   <a:srgbClr val="A43C2E"/>
@@ -3639,9 +3661,9 @@
               </a:defRPr>
             </a:pPr>
             <a:r>
-              <a:rPr sz="1650" b="1">
-                <a:solidFill>
-                  <a:srgbClr val="A43C2E"/>
+              <a:rPr sz="1500" b="1">
+                <a:solidFill>
+                  <a:srgbClr val="F28A80"/>
                 </a:solidFill>
                 <a:latin typeface="Arial"/>
                 <a:ea typeface="Arial"/>
@@ -3687,6 +3709,7 @@
           <a:lstStyle xmlns:a="http://schemas.openxmlformats.org/drawingml/2006/main"/>
           <a:p xmlns:a="http://schemas.openxmlformats.org/drawingml/2006/main">
             <a:pPr algn="l">
+              <a:buNone/>
               <a:defRPr sz="1350" b="1">
                 <a:solidFill>
                   <a:srgbClr val="171714"/>
@@ -3697,9 +3720,9 @@
               </a:defRPr>
             </a:pPr>
             <a:r>
-              <a:rPr sz="1350" b="1">
-                <a:solidFill>
-                  <a:srgbClr val="171714"/>
+              <a:rPr sz="1275" b="1">
+                <a:solidFill>
+                  <a:srgbClr val="F1E9DC"/>
                 </a:solidFill>
                 <a:latin typeface="Arial"/>
                 <a:ea typeface="Arial"/>
@@ -3740,11 +3763,12 @@
         </p:spPr>
         <p:txBody>
           <a:bodyPr xmlns:a="http://schemas.openxmlformats.org/drawingml/2006/main" anchor="t">
-            <a:normAutofit fontScale="68066"/>
+            <a:normAutofit fontScale="74872"/>
           </a:bodyPr>
           <a:lstStyle xmlns:a="http://schemas.openxmlformats.org/drawingml/2006/main"/>
           <a:p xmlns:a="http://schemas.openxmlformats.org/drawingml/2006/main">
             <a:pPr algn="l">
+              <a:buNone/>
               <a:defRPr sz="1650" b="1">
                 <a:solidFill>
                   <a:srgbClr val="A43C2E"/>
@@ -3755,9 +3779,9 @@
               </a:defRPr>
             </a:pPr>
             <a:r>
-              <a:rPr sz="1650" b="1">
-                <a:solidFill>
-                  <a:srgbClr val="A43C2E"/>
+              <a:rPr sz="1500" b="1">
+                <a:solidFill>
+                  <a:srgbClr val="F28A80"/>
                 </a:solidFill>
                 <a:latin typeface="Arial"/>
                 <a:ea typeface="Arial"/>
@@ -3803,6 +3827,7 @@
           <a:lstStyle xmlns:a="http://schemas.openxmlformats.org/drawingml/2006/main"/>
           <a:p xmlns:a="http://schemas.openxmlformats.org/drawingml/2006/main">
             <a:pPr algn="l">
+              <a:buNone/>
               <a:defRPr sz="1350" b="1">
                 <a:solidFill>
                   <a:srgbClr val="171714"/>
@@ -3813,9 +3838,9 @@
               </a:defRPr>
             </a:pPr>
             <a:r>
-              <a:rPr sz="1350" b="1">
-                <a:solidFill>
-                  <a:srgbClr val="171714"/>
+              <a:rPr sz="1275" b="1">
+                <a:solidFill>
+                  <a:srgbClr val="F1E9DC"/>
                 </a:solidFill>
                 <a:latin typeface="Arial"/>
                 <a:ea typeface="Arial"/>
@@ -3856,11 +3881,12 @@
         </p:spPr>
         <p:txBody>
           <a:bodyPr xmlns:a="http://schemas.openxmlformats.org/drawingml/2006/main" anchor="t">
-            <a:normAutofit fontScale="68066"/>
+            <a:normAutofit fontScale="74872"/>
           </a:bodyPr>
           <a:lstStyle xmlns:a="http://schemas.openxmlformats.org/drawingml/2006/main"/>
           <a:p xmlns:a="http://schemas.openxmlformats.org/drawingml/2006/main">
             <a:pPr algn="l">
+              <a:buNone/>
               <a:defRPr sz="1650" b="1">
                 <a:solidFill>
                   <a:srgbClr val="A43C2E"/>
@@ -3871,9 +3897,9 @@
               </a:defRPr>
             </a:pPr>
             <a:r>
-              <a:rPr sz="1650" b="1">
-                <a:solidFill>
-                  <a:srgbClr val="A43C2E"/>
+              <a:rPr sz="1500" b="1">
+                <a:solidFill>
+                  <a:srgbClr val="F28A80"/>
                 </a:solidFill>
                 <a:latin typeface="Arial"/>
                 <a:ea typeface="Arial"/>
@@ -3919,6 +3945,7 @@
           <a:lstStyle xmlns:a="http://schemas.openxmlformats.org/drawingml/2006/main"/>
           <a:p xmlns:a="http://schemas.openxmlformats.org/drawingml/2006/main">
             <a:pPr algn="l">
+              <a:buNone/>
               <a:defRPr sz="1350" b="1">
                 <a:solidFill>
                   <a:srgbClr val="171714"/>
@@ -3929,9 +3956,9 @@
               </a:defRPr>
             </a:pPr>
             <a:r>
-              <a:rPr sz="1350" b="1">
-                <a:solidFill>
-                  <a:srgbClr val="171714"/>
+              <a:rPr sz="1275" b="1">
+                <a:solidFill>
+                  <a:srgbClr val="F1E9DC"/>
                 </a:solidFill>
                 <a:latin typeface="Arial"/>
                 <a:ea typeface="Arial"/>
@@ -3972,11 +3999,12 @@
         </p:spPr>
         <p:txBody>
           <a:bodyPr xmlns:a="http://schemas.openxmlformats.org/drawingml/2006/main" anchor="t">
-            <a:normAutofit fontScale="68066"/>
+            <a:normAutofit fontScale="74872"/>
           </a:bodyPr>
           <a:lstStyle xmlns:a="http://schemas.openxmlformats.org/drawingml/2006/main"/>
           <a:p xmlns:a="http://schemas.openxmlformats.org/drawingml/2006/main">
             <a:pPr algn="l">
+              <a:buNone/>
               <a:defRPr sz="1650" b="1">
                 <a:solidFill>
                   <a:srgbClr val="A43C2E"/>
@@ -3987,9 +4015,9 @@
               </a:defRPr>
             </a:pPr>
             <a:r>
-              <a:rPr sz="1650" b="1">
-                <a:solidFill>
-                  <a:srgbClr val="A43C2E"/>
+              <a:rPr sz="1500" b="1">
+                <a:solidFill>
+                  <a:srgbClr val="F28A80"/>
                 </a:solidFill>
                 <a:latin typeface="Arial"/>
                 <a:ea typeface="Arial"/>
@@ -4035,6 +4063,7 @@
           <a:lstStyle xmlns:a="http://schemas.openxmlformats.org/drawingml/2006/main"/>
           <a:p xmlns:a="http://schemas.openxmlformats.org/drawingml/2006/main">
             <a:pPr algn="l">
+              <a:buNone/>
               <a:defRPr sz="1350" b="1">
                 <a:solidFill>
                   <a:srgbClr val="171714"/>
@@ -4045,9 +4074,9 @@
               </a:defRPr>
             </a:pPr>
             <a:r>
-              <a:rPr sz="1350" b="1">
-                <a:solidFill>
-                  <a:srgbClr val="171714"/>
+              <a:rPr sz="1275" b="1">
+                <a:solidFill>
+                  <a:srgbClr val="F1E9DC"/>
                 </a:solidFill>
                 <a:latin typeface="Arial"/>
                 <a:ea typeface="Arial"/>
@@ -4088,11 +4117,12 @@
         </p:spPr>
         <p:txBody>
           <a:bodyPr xmlns:a="http://schemas.openxmlformats.org/drawingml/2006/main" anchor="t">
-            <a:normAutofit fontScale="84722"/>
+            <a:normAutofit fontScale="92424"/>
           </a:bodyPr>
           <a:lstStyle xmlns:a="http://schemas.openxmlformats.org/drawingml/2006/main"/>
           <a:p xmlns:a="http://schemas.openxmlformats.org/drawingml/2006/main">
             <a:pPr algn="ctr">
+              <a:buNone/>
               <a:defRPr sz="1800" b="1">
                 <a:solidFill>
                   <a:srgbClr val="171714"/>
@@ -4103,13 +4133,13 @@
               </a:defRPr>
             </a:pPr>
             <a:r>
-              <a:rPr sz="1800" b="1">
-                <a:solidFill>
-                  <a:srgbClr val="171714"/>
-                </a:solidFill>
-                <a:latin typeface="Arial"/>
-                <a:ea typeface="Arial"/>
-                <a:cs typeface="Arial"/>
+              <a:rPr sz="1650" b="0">
+                <a:solidFill>
+                  <a:srgbClr val="F1E9DC"/>
+                </a:solidFill>
+                <a:latin typeface="Georgia"/>
+                <a:ea typeface="Georgia"/>
+                <a:cs typeface="Georgia"/>
               </a:rPr>
               <a:t>Synthetic evidence before assertion.</a:t>
             </a:r>
@@ -4132,7 +4162,7 @@
     <p:bg>
       <p:bgPr>
         <a:solidFill xmlns:a="http://schemas.openxmlformats.org/drawingml/2006/main">
-          <a:srgbClr val="F8F7F3"/>
+          <a:srgbClr val="0A0907"/>
         </a:solidFill>
       </p:bgPr>
     </p:bg>
@@ -4180,6 +4210,7 @@
           <a:lstStyle xmlns:a="http://schemas.openxmlformats.org/drawingml/2006/main"/>
           <a:p xmlns:a="http://schemas.openxmlformats.org/drawingml/2006/main">
             <a:pPr algn="l">
+              <a:buNone/>
               <a:defRPr sz="975" b="1">
                 <a:solidFill>
                   <a:srgbClr val="E9652E"/>
@@ -4190,13 +4221,13 @@
               </a:defRPr>
             </a:pPr>
             <a:r>
-              <a:rPr sz="975" b="1">
-                <a:solidFill>
-                  <a:srgbClr val="E9652E"/>
-                </a:solidFill>
-                <a:latin typeface="Arial"/>
-                <a:ea typeface="Arial"/>
-                <a:cs typeface="Arial"/>
+              <a:rPr sz="825" b="1">
+                <a:solidFill>
+                  <a:srgbClr val="F19A68"/>
+                </a:solidFill>
+                <a:latin typeface="Menlo"/>
+                <a:ea typeface="Menlo"/>
+                <a:cs typeface="Menlo"/>
               </a:rPr>
               <a:t>ADAPTIVE PAYMENT ASSURANCE RANGE</a:t>
             </a:r>
@@ -4219,25 +4250,26 @@
         </p:nvSpPr>
         <p:spPr>
           <a:xfrm xmlns:a="http://schemas.openxmlformats.org/drawingml/2006/main">
-            <a:off x="400050" y="571500"/>
-            <a:ext cx="10572750" cy="666750"/>
-          </a:xfrm>
-          <a:prstGeom xmlns:a="http://schemas.openxmlformats.org/drawingml/2006/main" prst="rect">
-            <a:avLst/>
-          </a:prstGeom>
-          <a:noFill xmlns:a="http://schemas.openxmlformats.org/drawingml/2006/main"/>
-          <a:ln xmlns:a="http://schemas.openxmlformats.org/drawingml/2006/main" w="0">
-            <a:noFill/>
-            <a:prstDash val="solid"/>
-          </a:ln>
-        </p:spPr>
-        <p:txBody>
-          <a:bodyPr xmlns:a="http://schemas.openxmlformats.org/drawingml/2006/main" anchor="t">
-            <a:normAutofit fontScale="98967"/>
+            <a:off x="400050" y="552450"/>
+            <a:ext cx="10668000" cy="685800"/>
+          </a:xfrm>
+          <a:prstGeom xmlns:a="http://schemas.openxmlformats.org/drawingml/2006/main" prst="rect">
+            <a:avLst/>
+          </a:prstGeom>
+          <a:noFill xmlns:a="http://schemas.openxmlformats.org/drawingml/2006/main"/>
+          <a:ln xmlns:a="http://schemas.openxmlformats.org/drawingml/2006/main" w="0">
+            <a:noFill/>
+            <a:prstDash val="solid"/>
+          </a:ln>
+        </p:spPr>
+        <p:txBody>
+          <a:bodyPr xmlns:a="http://schemas.openxmlformats.org/drawingml/2006/main" anchor="t">
+            <a:normAutofit fontScale="100000"/>
           </a:bodyPr>
           <a:lstStyle xmlns:a="http://schemas.openxmlformats.org/drawingml/2006/main"/>
           <a:p xmlns:a="http://schemas.openxmlformats.org/drawingml/2006/main">
             <a:pPr algn="l">
+              <a:buNone/>
               <a:defRPr sz="2850" b="1">
                 <a:solidFill>
                   <a:srgbClr val="171714"/>
@@ -4248,13 +4280,13 @@
               </a:defRPr>
             </a:pPr>
             <a:r>
-              <a:rPr sz="2850" b="1">
-                <a:solidFill>
-                  <a:srgbClr val="171714"/>
-                </a:solidFill>
-                <a:latin typeface="Arial"/>
-                <a:ea typeface="Arial"/>
-                <a:cs typeface="Arial"/>
+              <a:rPr sz="2625" b="0">
+                <a:solidFill>
+                  <a:srgbClr val="F1E9DC"/>
+                </a:solidFill>
+                <a:latin typeface="Georgia"/>
+                <a:ea typeface="Georgia"/>
+                <a:cs typeface="Georgia"/>
               </a:rPr>
               <a:t>From competition prototype to governed payment assurance</a:t>
             </a:r>
@@ -4291,11 +4323,12 @@
         </p:spPr>
         <p:txBody>
           <a:bodyPr xmlns:a="http://schemas.openxmlformats.org/drawingml/2006/main" anchor="t">
-            <a:normAutofit fontScale="79487"/>
+            <a:normAutofit fontScale="93939"/>
           </a:bodyPr>
           <a:lstStyle xmlns:a="http://schemas.openxmlformats.org/drawingml/2006/main"/>
           <a:p xmlns:a="http://schemas.openxmlformats.org/drawingml/2006/main">
             <a:pPr algn="r">
+              <a:buNone/>
               <a:defRPr sz="975" b="0">
                 <a:solidFill>
                   <a:srgbClr val="686863"/>
@@ -4306,13 +4339,13 @@
               </a:defRPr>
             </a:pPr>
             <a:r>
-              <a:rPr sz="975" b="0">
-                <a:solidFill>
-                  <a:srgbClr val="686863"/>
-                </a:solidFill>
-                <a:latin typeface="Arial"/>
-                <a:ea typeface="Arial"/>
-                <a:cs typeface="Arial"/>
+              <a:rPr sz="825" b="0">
+                <a:solidFill>
+                  <a:srgbClr val="9C9183"/>
+                </a:solidFill>
+                <a:latin typeface="Menlo"/>
+                <a:ea typeface="Menlo"/>
+                <a:cs typeface="Menlo"/>
               </a:rPr>
               <a:t>11</a:t>
             </a:r>
@@ -4335,18 +4368,18 @@
         </p:nvSpPr>
         <p:spPr>
           <a:xfrm xmlns:a="http://schemas.openxmlformats.org/drawingml/2006/main">
-            <a:off x="400050" y="1266825"/>
+            <a:off x="400050" y="1409700"/>
             <a:ext cx="11391900" cy="9525"/>
           </a:xfrm>
           <a:prstGeom xmlns:a="http://schemas.openxmlformats.org/drawingml/2006/main" prst="rect">
             <a:avLst/>
           </a:prstGeom>
           <a:solidFill xmlns:a="http://schemas.openxmlformats.org/drawingml/2006/main">
-            <a:srgbClr val="D7D6CF"/>
+            <a:srgbClr val="3F382E"/>
           </a:solidFill>
           <a:ln xmlns:a="http://schemas.openxmlformats.org/drawingml/2006/main" w="0">
             <a:solidFill>
-              <a:srgbClr val="D7D6CF"/>
+              <a:srgbClr val="3F382E"/>
             </a:solidFill>
             <a:prstDash val="solid"/>
           </a:ln>
@@ -4377,11 +4410,11 @@
             </a:avLst>
           </a:prstGeom>
           <a:solidFill xmlns:a="http://schemas.openxmlformats.org/drawingml/2006/main">
-            <a:srgbClr val="FCE5DA"/>
+            <a:srgbClr val="211B14"/>
           </a:solidFill>
-          <a:ln xmlns:a="http://schemas.openxmlformats.org/drawingml/2006/main" w="9525">
+          <a:ln xmlns:a="http://schemas.openxmlformats.org/drawingml/2006/main" w="19050">
             <a:solidFill>
-              <a:srgbClr val="E9652E"/>
+              <a:srgbClr val="E8793D"/>
             </a:solidFill>
             <a:prstDash val="solid"/>
           </a:ln>
@@ -4422,6 +4455,7 @@
           <a:lstStyle xmlns:a="http://schemas.openxmlformats.org/drawingml/2006/main"/>
           <a:p xmlns:a="http://schemas.openxmlformats.org/drawingml/2006/main">
             <a:pPr algn="l">
+              <a:buNone/>
               <a:defRPr sz="1050" b="1">
                 <a:solidFill>
                   <a:srgbClr val="E9652E"/>
@@ -4432,13 +4466,13 @@
               </a:defRPr>
             </a:pPr>
             <a:r>
-              <a:rPr sz="1050" b="1">
-                <a:solidFill>
-                  <a:srgbClr val="E9652E"/>
-                </a:solidFill>
-                <a:latin typeface="Arial"/>
-                <a:ea typeface="Arial"/>
-                <a:cs typeface="Arial"/>
+              <a:rPr sz="900" b="1">
+                <a:solidFill>
+                  <a:srgbClr val="F19A68"/>
+                </a:solidFill>
+                <a:latin typeface="Menlo"/>
+                <a:ea typeface="Menlo"/>
+                <a:cs typeface="Menlo"/>
               </a:rPr>
               <a:t>1</a:t>
             </a:r>
@@ -4480,6 +4514,7 @@
           <a:lstStyle xmlns:a="http://schemas.openxmlformats.org/drawingml/2006/main"/>
           <a:p xmlns:a="http://schemas.openxmlformats.org/drawingml/2006/main">
             <a:pPr algn="l">
+              <a:buNone/>
               <a:defRPr sz="1350" b="1">
                 <a:solidFill>
                   <a:srgbClr val="171714"/>
@@ -4490,13 +4525,13 @@
               </a:defRPr>
             </a:pPr>
             <a:r>
-              <a:rPr sz="1350" b="1">
-                <a:solidFill>
-                  <a:srgbClr val="171714"/>
-                </a:solidFill>
-                <a:latin typeface="Arial"/>
-                <a:ea typeface="Arial"/>
-                <a:cs typeface="Arial"/>
+              <a:rPr sz="1125" b="1">
+                <a:solidFill>
+                  <a:srgbClr val="F1E9DC"/>
+                </a:solidFill>
+                <a:latin typeface="Menlo"/>
+                <a:ea typeface="Menlo"/>
+                <a:cs typeface="Menlo"/>
               </a:rPr>
               <a:t>OFFLINE REPLAY</a:t>
             </a:r>
@@ -4538,6 +4573,7 @@
           <a:lstStyle xmlns:a="http://schemas.openxmlformats.org/drawingml/2006/main"/>
           <a:p xmlns:a="http://schemas.openxmlformats.org/drawingml/2006/main">
             <a:pPr algn="l">
+              <a:buNone/>
               <a:defRPr sz="1200" b="0">
                 <a:solidFill>
                   <a:srgbClr val="686863"/>
@@ -4550,7 +4586,7 @@
             <a:r>
               <a:rPr sz="1200" b="0">
                 <a:solidFill>
-                  <a:srgbClr val="686863"/>
+                  <a:srgbClr val="C8BDAE"/>
                 </a:solidFill>
                 <a:latin typeface="Arial"/>
                 <a:ea typeface="Arial"/>
@@ -4596,6 +4632,7 @@
           <a:lstStyle xmlns:a="http://schemas.openxmlformats.org/drawingml/2006/main"/>
           <a:p xmlns:a="http://schemas.openxmlformats.org/drawingml/2006/main">
             <a:pPr algn="ctr">
+              <a:buNone/>
               <a:defRPr sz="1650" b="1">
                 <a:solidFill>
                   <a:srgbClr val="E9652E"/>
@@ -4608,7 +4645,7 @@
             <a:r>
               <a:rPr sz="1650" b="1">
                 <a:solidFill>
-                  <a:srgbClr val="E9652E"/>
+                  <a:srgbClr val="C8BDAE"/>
                 </a:solidFill>
                 <a:latin typeface="Arial"/>
                 <a:ea typeface="Arial"/>
@@ -4644,11 +4681,11 @@
             </a:avLst>
           </a:prstGeom>
           <a:solidFill xmlns:a="http://schemas.openxmlformats.org/drawingml/2006/main">
-            <a:srgbClr val="FFFFFF"/>
+            <a:srgbClr val="14110D"/>
           </a:solidFill>
           <a:ln xmlns:a="http://schemas.openxmlformats.org/drawingml/2006/main" w="9525">
             <a:solidFill>
-              <a:srgbClr val="D7D6CF"/>
+              <a:srgbClr val="6B5F50"/>
             </a:solidFill>
             <a:prstDash val="solid"/>
           </a:ln>
@@ -4689,6 +4726,7 @@
           <a:lstStyle xmlns:a="http://schemas.openxmlformats.org/drawingml/2006/main"/>
           <a:p xmlns:a="http://schemas.openxmlformats.org/drawingml/2006/main">
             <a:pPr algn="l">
+              <a:buNone/>
               <a:defRPr sz="1050" b="1">
                 <a:solidFill>
                   <a:srgbClr val="E9652E"/>
@@ -4699,13 +4737,13 @@
               </a:defRPr>
             </a:pPr>
             <a:r>
-              <a:rPr sz="1050" b="1">
-                <a:solidFill>
-                  <a:srgbClr val="E9652E"/>
-                </a:solidFill>
-                <a:latin typeface="Arial"/>
-                <a:ea typeface="Arial"/>
-                <a:cs typeface="Arial"/>
+              <a:rPr sz="900" b="1">
+                <a:solidFill>
+                  <a:srgbClr val="F19A68"/>
+                </a:solidFill>
+                <a:latin typeface="Menlo"/>
+                <a:ea typeface="Menlo"/>
+                <a:cs typeface="Menlo"/>
               </a:rPr>
               <a:t>2</a:t>
             </a:r>
@@ -4747,6 +4785,7 @@
           <a:lstStyle xmlns:a="http://schemas.openxmlformats.org/drawingml/2006/main"/>
           <a:p xmlns:a="http://schemas.openxmlformats.org/drawingml/2006/main">
             <a:pPr algn="l">
+              <a:buNone/>
               <a:defRPr sz="1350" b="1">
                 <a:solidFill>
                   <a:srgbClr val="171714"/>
@@ -4757,13 +4796,13 @@
               </a:defRPr>
             </a:pPr>
             <a:r>
-              <a:rPr sz="1350" b="1">
-                <a:solidFill>
-                  <a:srgbClr val="171714"/>
-                </a:solidFill>
-                <a:latin typeface="Arial"/>
-                <a:ea typeface="Arial"/>
-                <a:cs typeface="Arial"/>
+              <a:rPr sz="1125" b="1">
+                <a:solidFill>
+                  <a:srgbClr val="F1E9DC"/>
+                </a:solidFill>
+                <a:latin typeface="Menlo"/>
+                <a:ea typeface="Menlo"/>
+                <a:cs typeface="Menlo"/>
               </a:rPr>
               <a:t>SHADOW MODE</a:t>
             </a:r>
@@ -4805,6 +4844,7 @@
           <a:lstStyle xmlns:a="http://schemas.openxmlformats.org/drawingml/2006/main"/>
           <a:p xmlns:a="http://schemas.openxmlformats.org/drawingml/2006/main">
             <a:pPr algn="l">
+              <a:buNone/>
               <a:defRPr sz="1200" b="0">
                 <a:solidFill>
                   <a:srgbClr val="686863"/>
@@ -4817,7 +4857,7 @@
             <a:r>
               <a:rPr sz="1200" b="0">
                 <a:solidFill>
-                  <a:srgbClr val="686863"/>
+                  <a:srgbClr val="C8BDAE"/>
                 </a:solidFill>
                 <a:latin typeface="Arial"/>
                 <a:ea typeface="Arial"/>
@@ -4863,6 +4903,7 @@
           <a:lstStyle xmlns:a="http://schemas.openxmlformats.org/drawingml/2006/main"/>
           <a:p xmlns:a="http://schemas.openxmlformats.org/drawingml/2006/main">
             <a:pPr algn="ctr">
+              <a:buNone/>
               <a:defRPr sz="1650" b="1">
                 <a:solidFill>
                   <a:srgbClr val="E9652E"/>
@@ -4875,7 +4916,7 @@
             <a:r>
               <a:rPr sz="1650" b="1">
                 <a:solidFill>
-                  <a:srgbClr val="E9652E"/>
+                  <a:srgbClr val="C8BDAE"/>
                 </a:solidFill>
                 <a:latin typeface="Arial"/>
                 <a:ea typeface="Arial"/>
@@ -4911,11 +4952,11 @@
             </a:avLst>
           </a:prstGeom>
           <a:solidFill xmlns:a="http://schemas.openxmlformats.org/drawingml/2006/main">
-            <a:srgbClr val="FFFFFF"/>
+            <a:srgbClr val="14110D"/>
           </a:solidFill>
           <a:ln xmlns:a="http://schemas.openxmlformats.org/drawingml/2006/main" w="9525">
             <a:solidFill>
-              <a:srgbClr val="D7D6CF"/>
+              <a:srgbClr val="6B5F50"/>
             </a:solidFill>
             <a:prstDash val="solid"/>
           </a:ln>
@@ -4956,6 +4997,7 @@
           <a:lstStyle xmlns:a="http://schemas.openxmlformats.org/drawingml/2006/main"/>
           <a:p xmlns:a="http://schemas.openxmlformats.org/drawingml/2006/main">
             <a:pPr algn="l">
+              <a:buNone/>
               <a:defRPr sz="1050" b="1">
                 <a:solidFill>
                   <a:srgbClr val="E9652E"/>
@@ -4966,13 +5008,13 @@
               </a:defRPr>
             </a:pPr>
             <a:r>
-              <a:rPr sz="1050" b="1">
-                <a:solidFill>
-                  <a:srgbClr val="E9652E"/>
-                </a:solidFill>
-                <a:latin typeface="Arial"/>
-                <a:ea typeface="Arial"/>
-                <a:cs typeface="Arial"/>
+              <a:rPr sz="900" b="1">
+                <a:solidFill>
+                  <a:srgbClr val="F19A68"/>
+                </a:solidFill>
+                <a:latin typeface="Menlo"/>
+                <a:ea typeface="Menlo"/>
+                <a:cs typeface="Menlo"/>
               </a:rPr>
               <a:t>3</a:t>
             </a:r>
@@ -5014,6 +5056,7 @@
           <a:lstStyle xmlns:a="http://schemas.openxmlformats.org/drawingml/2006/main"/>
           <a:p xmlns:a="http://schemas.openxmlformats.org/drawingml/2006/main">
             <a:pPr algn="l">
+              <a:buNone/>
               <a:defRPr sz="1350" b="1">
                 <a:solidFill>
                   <a:srgbClr val="171714"/>
@@ -5024,13 +5067,13 @@
               </a:defRPr>
             </a:pPr>
             <a:r>
-              <a:rPr sz="1350" b="1">
-                <a:solidFill>
-                  <a:srgbClr val="171714"/>
-                </a:solidFill>
-                <a:latin typeface="Arial"/>
-                <a:ea typeface="Arial"/>
-                <a:cs typeface="Arial"/>
+              <a:rPr sz="1125" b="1">
+                <a:solidFill>
+                  <a:srgbClr val="F1E9DC"/>
+                </a:solidFill>
+                <a:latin typeface="Menlo"/>
+                <a:ea typeface="Menlo"/>
+                <a:cs typeface="Menlo"/>
               </a:rPr>
               <a:t>ASSISTED OPS</a:t>
             </a:r>
@@ -5072,6 +5115,7 @@
           <a:lstStyle xmlns:a="http://schemas.openxmlformats.org/drawingml/2006/main"/>
           <a:p xmlns:a="http://schemas.openxmlformats.org/drawingml/2006/main">
             <a:pPr algn="l">
+              <a:buNone/>
               <a:defRPr sz="1200" b="0">
                 <a:solidFill>
                   <a:srgbClr val="686863"/>
@@ -5084,7 +5128,7 @@
             <a:r>
               <a:rPr sz="1200" b="0">
                 <a:solidFill>
-                  <a:srgbClr val="686863"/>
+                  <a:srgbClr val="C8BDAE"/>
                 </a:solidFill>
                 <a:latin typeface="Arial"/>
                 <a:ea typeface="Arial"/>
@@ -5130,6 +5174,7 @@
           <a:lstStyle xmlns:a="http://schemas.openxmlformats.org/drawingml/2006/main"/>
           <a:p xmlns:a="http://schemas.openxmlformats.org/drawingml/2006/main">
             <a:pPr algn="ctr">
+              <a:buNone/>
               <a:defRPr sz="1650" b="1">
                 <a:solidFill>
                   <a:srgbClr val="E9652E"/>
@@ -5142,7 +5187,7 @@
             <a:r>
               <a:rPr sz="1650" b="1">
                 <a:solidFill>
-                  <a:srgbClr val="E9652E"/>
+                  <a:srgbClr val="C8BDAE"/>
                 </a:solidFill>
                 <a:latin typeface="Arial"/>
                 <a:ea typeface="Arial"/>
@@ -5178,11 +5223,11 @@
             </a:avLst>
           </a:prstGeom>
           <a:solidFill xmlns:a="http://schemas.openxmlformats.org/drawingml/2006/main">
-            <a:srgbClr val="FFFFFF"/>
+            <a:srgbClr val="14110D"/>
           </a:solidFill>
           <a:ln xmlns:a="http://schemas.openxmlformats.org/drawingml/2006/main" w="9525">
             <a:solidFill>
-              <a:srgbClr val="D7D6CF"/>
+              <a:srgbClr val="6B5F50"/>
             </a:solidFill>
             <a:prstDash val="solid"/>
           </a:ln>
@@ -5223,6 +5268,7 @@
           <a:lstStyle xmlns:a="http://schemas.openxmlformats.org/drawingml/2006/main"/>
           <a:p xmlns:a="http://schemas.openxmlformats.org/drawingml/2006/main">
             <a:pPr algn="l">
+              <a:buNone/>
               <a:defRPr sz="1050" b="1">
                 <a:solidFill>
                   <a:srgbClr val="E9652E"/>
@@ -5233,13 +5279,13 @@
               </a:defRPr>
             </a:pPr>
             <a:r>
-              <a:rPr sz="1050" b="1">
-                <a:solidFill>
-                  <a:srgbClr val="E9652E"/>
-                </a:solidFill>
-                <a:latin typeface="Arial"/>
-                <a:ea typeface="Arial"/>
-                <a:cs typeface="Arial"/>
+              <a:rPr sz="900" b="1">
+                <a:solidFill>
+                  <a:srgbClr val="F19A68"/>
+                </a:solidFill>
+                <a:latin typeface="Menlo"/>
+                <a:ea typeface="Menlo"/>
+                <a:cs typeface="Menlo"/>
               </a:rPr>
               <a:t>4</a:t>
             </a:r>
@@ -5281,6 +5327,7 @@
           <a:lstStyle xmlns:a="http://schemas.openxmlformats.org/drawingml/2006/main"/>
           <a:p xmlns:a="http://schemas.openxmlformats.org/drawingml/2006/main">
             <a:pPr algn="l">
+              <a:buNone/>
               <a:defRPr sz="1350" b="1">
                 <a:solidFill>
                   <a:srgbClr val="171714"/>
@@ -5291,13 +5338,13 @@
               </a:defRPr>
             </a:pPr>
             <a:r>
-              <a:rPr sz="1350" b="1">
-                <a:solidFill>
-                  <a:srgbClr val="171714"/>
-                </a:solidFill>
-                <a:latin typeface="Arial"/>
-                <a:ea typeface="Arial"/>
-                <a:cs typeface="Arial"/>
+              <a:rPr sz="1125" b="1">
+                <a:solidFill>
+                  <a:srgbClr val="F1E9DC"/>
+                </a:solidFill>
+                <a:latin typeface="Menlo"/>
+                <a:ea typeface="Menlo"/>
+                <a:cs typeface="Menlo"/>
               </a:rPr>
               <a:t>CHALLENGER</a:t>
             </a:r>
@@ -5339,6 +5386,7 @@
           <a:lstStyle xmlns:a="http://schemas.openxmlformats.org/drawingml/2006/main"/>
           <a:p xmlns:a="http://schemas.openxmlformats.org/drawingml/2006/main">
             <a:pPr algn="l">
+              <a:buNone/>
               <a:defRPr sz="1200" b="0">
                 <a:solidFill>
                   <a:srgbClr val="686863"/>
@@ -5351,7 +5399,7 @@
             <a:r>
               <a:rPr sz="1200" b="0">
                 <a:solidFill>
-                  <a:srgbClr val="686863"/>
+                  <a:srgbClr val="C8BDAE"/>
                 </a:solidFill>
                 <a:latin typeface="Arial"/>
                 <a:ea typeface="Arial"/>
@@ -5397,6 +5445,7 @@
           <a:lstStyle xmlns:a="http://schemas.openxmlformats.org/drawingml/2006/main"/>
           <a:p xmlns:a="http://schemas.openxmlformats.org/drawingml/2006/main">
             <a:pPr algn="ctr">
+              <a:buNone/>
               <a:defRPr sz="1650" b="1">
                 <a:solidFill>
                   <a:srgbClr val="E9652E"/>
@@ -5409,7 +5458,7 @@
             <a:r>
               <a:rPr sz="1650" b="1">
                 <a:solidFill>
-                  <a:srgbClr val="E9652E"/>
+                  <a:srgbClr val="C8BDAE"/>
                 </a:solidFill>
                 <a:latin typeface="Arial"/>
                 <a:ea typeface="Arial"/>
@@ -5445,11 +5494,11 @@
             </a:avLst>
           </a:prstGeom>
           <a:solidFill xmlns:a="http://schemas.openxmlformats.org/drawingml/2006/main">
-            <a:srgbClr val="FFFFFF"/>
+            <a:srgbClr val="14110D"/>
           </a:solidFill>
           <a:ln xmlns:a="http://schemas.openxmlformats.org/drawingml/2006/main" w="9525">
             <a:solidFill>
-              <a:srgbClr val="D7D6CF"/>
+              <a:srgbClr val="6B5F50"/>
             </a:solidFill>
             <a:prstDash val="solid"/>
           </a:ln>
@@ -5490,6 +5539,7 @@
           <a:lstStyle xmlns:a="http://schemas.openxmlformats.org/drawingml/2006/main"/>
           <a:p xmlns:a="http://schemas.openxmlformats.org/drawingml/2006/main">
             <a:pPr algn="l">
+              <a:buNone/>
               <a:defRPr sz="1050" b="1">
                 <a:solidFill>
                   <a:srgbClr val="E9652E"/>
@@ -5500,13 +5550,13 @@
               </a:defRPr>
             </a:pPr>
             <a:r>
-              <a:rPr sz="1050" b="1">
-                <a:solidFill>
-                  <a:srgbClr val="E9652E"/>
-                </a:solidFill>
-                <a:latin typeface="Arial"/>
-                <a:ea typeface="Arial"/>
-                <a:cs typeface="Arial"/>
+              <a:rPr sz="900" b="1">
+                <a:solidFill>
+                  <a:srgbClr val="F19A68"/>
+                </a:solidFill>
+                <a:latin typeface="Menlo"/>
+                <a:ea typeface="Menlo"/>
+                <a:cs typeface="Menlo"/>
               </a:rPr>
               <a:t>5</a:t>
             </a:r>
@@ -5543,11 +5593,12 @@
         </p:spPr>
         <p:txBody>
           <a:bodyPr xmlns:a="http://schemas.openxmlformats.org/drawingml/2006/main" anchor="t">
-            <a:normAutofit fontScale="92947"/>
+            <a:normAutofit fontScale="100000"/>
           </a:bodyPr>
           <a:lstStyle xmlns:a="http://schemas.openxmlformats.org/drawingml/2006/main"/>
           <a:p xmlns:a="http://schemas.openxmlformats.org/drawingml/2006/main">
             <a:pPr algn="l">
+              <a:buNone/>
               <a:defRPr sz="1350" b="1">
                 <a:solidFill>
                   <a:srgbClr val="171714"/>
@@ -5558,13 +5609,13 @@
               </a:defRPr>
             </a:pPr>
             <a:r>
-              <a:rPr sz="1350" b="1">
-                <a:solidFill>
-                  <a:srgbClr val="171714"/>
-                </a:solidFill>
-                <a:latin typeface="Arial"/>
-                <a:ea typeface="Arial"/>
-                <a:cs typeface="Arial"/>
+              <a:rPr sz="1125" b="1">
+                <a:solidFill>
+                  <a:srgbClr val="F1E9DC"/>
+                </a:solidFill>
+                <a:latin typeface="Menlo"/>
+                <a:ea typeface="Menlo"/>
+                <a:cs typeface="Menlo"/>
               </a:rPr>
               <a:t>GOVERNED SCALE</a:t>
             </a:r>
@@ -5606,6 +5657,7 @@
           <a:lstStyle xmlns:a="http://schemas.openxmlformats.org/drawingml/2006/main"/>
           <a:p xmlns:a="http://schemas.openxmlformats.org/drawingml/2006/main">
             <a:pPr algn="l">
+              <a:buNone/>
               <a:defRPr sz="1200" b="0">
                 <a:solidFill>
                   <a:srgbClr val="686863"/>
@@ -5618,7 +5670,7 @@
             <a:r>
               <a:rPr sz="1200" b="0">
                 <a:solidFill>
-                  <a:srgbClr val="686863"/>
+                  <a:srgbClr val="C8BDAE"/>
                 </a:solidFill>
                 <a:latin typeface="Arial"/>
                 <a:ea typeface="Arial"/>
@@ -5654,11 +5706,11 @@
             </a:avLst>
           </a:prstGeom>
           <a:solidFill xmlns:a="http://schemas.openxmlformats.org/drawingml/2006/main">
-            <a:srgbClr val="171714"/>
+            <a:srgbClr val="19150F"/>
           </a:solidFill>
           <a:ln xmlns:a="http://schemas.openxmlformats.org/drawingml/2006/main" w="9525">
             <a:solidFill>
-              <a:srgbClr val="171714"/>
+              <a:srgbClr val="6B5F50"/>
             </a:solidFill>
             <a:prstDash val="solid"/>
           </a:ln>
@@ -5694,11 +5746,12 @@
         </p:spPr>
         <p:txBody>
           <a:bodyPr xmlns:a="http://schemas.openxmlformats.org/drawingml/2006/main" anchor="t">
-            <a:normAutofit fontScale="88333"/>
+            <a:normAutofit fontScale="92982"/>
           </a:bodyPr>
           <a:lstStyle xmlns:a="http://schemas.openxmlformats.org/drawingml/2006/main"/>
           <a:p xmlns:a="http://schemas.openxmlformats.org/drawingml/2006/main">
             <a:pPr algn="l">
+              <a:buNone/>
               <a:defRPr sz="3000" b="1">
                 <a:solidFill>
                   <a:srgbClr val="FFFFFF"/>
@@ -5709,13 +5762,13 @@
               </a:defRPr>
             </a:pPr>
             <a:r>
-              <a:rPr sz="3000" b="1">
-                <a:solidFill>
-                  <a:srgbClr val="FFFFFF"/>
-                </a:solidFill>
-                <a:latin typeface="Arial"/>
-                <a:ea typeface="Arial"/>
-                <a:cs typeface="Arial"/>
+              <a:rPr sz="2850" b="0">
+                <a:solidFill>
+                  <a:srgbClr val="F1E9DC"/>
+                </a:solidFill>
+                <a:latin typeface="Georgia"/>
+                <a:ea typeface="Georgia"/>
+                <a:cs typeface="Georgia"/>
               </a:rPr>
               <a:t>APAR</a:t>
             </a:r>
@@ -5757,6 +5810,7 @@
           <a:lstStyle xmlns:a="http://schemas.openxmlformats.org/drawingml/2006/main"/>
           <a:p xmlns:a="http://schemas.openxmlformats.org/drawingml/2006/main">
             <a:pPr algn="l">
+              <a:buNone/>
               <a:defRPr sz="2250" b="1">
                 <a:solidFill>
                   <a:srgbClr val="FFFFFF"/>
@@ -5767,36 +5821,37 @@
               </a:defRPr>
             </a:pPr>
             <a:r>
-              <a:rPr sz="2250" b="1">
+              <a:rPr sz="2100" b="0">
+                <a:solidFill>
+                  <a:srgbClr val="F1E9DC"/>
+                </a:solidFill>
+                <a:latin typeface="Georgia"/>
+                <a:ea typeface="Georgia"/>
+                <a:cs typeface="Georgia"/>
+              </a:rPr>
+              <a:t>Assure the campaign. Verify the intent.</a:t>
+            </a:r>
+          </a:p>
+          <a:p xmlns:a="http://schemas.openxmlformats.org/drawingml/2006/main">
+            <a:pPr algn="l">
+              <a:buNone/>
+              <a:defRPr sz="2250" b="1">
                 <a:solidFill>
                   <a:srgbClr val="FFFFFF"/>
                 </a:solidFill>
                 <a:latin typeface="Arial"/>
                 <a:ea typeface="Arial"/>
                 <a:cs typeface="Arial"/>
-              </a:rPr>
-              <a:t>Assure the campaign. Verify the intent.</a:t>
-            </a:r>
-          </a:p>
-          <a:p xmlns:a="http://schemas.openxmlformats.org/drawingml/2006/main">
-            <a:pPr algn="l">
-              <a:defRPr sz="2250" b="1">
-                <a:solidFill>
-                  <a:srgbClr val="FFFFFF"/>
-                </a:solidFill>
-                <a:latin typeface="Arial"/>
-                <a:ea typeface="Arial"/>
-                <a:cs typeface="Arial"/>
-              </a:defRPr>
-            </a:pPr>
-            <a:r>
-              <a:rPr sz="2250" b="1">
-                <a:solidFill>
-                  <a:srgbClr val="FFFFFF"/>
-                </a:solidFill>
-                <a:latin typeface="Arial"/>
-                <a:ea typeface="Arial"/>
-                <a:cs typeface="Arial"/>
+              </a:defRPr>
+            </a:pPr>
+            <a:r>
+              <a:rPr sz="2100" b="0">
+                <a:solidFill>
+                  <a:srgbClr val="F1E9DC"/>
+                </a:solidFill>
+                <a:latin typeface="Georgia"/>
+                <a:ea typeface="Georgia"/>
+                <a:cs typeface="Georgia"/>
               </a:rPr>
               <a:t>Promote only the evidence.</a:t>
             </a:r>
@@ -5828,11 +5883,11 @@
             </a:avLst>
           </a:prstGeom>
           <a:solidFill xmlns:a="http://schemas.openxmlformats.org/drawingml/2006/main">
-            <a:srgbClr val="DFF1E7"/>
+            <a:srgbClr val="20382A"/>
           </a:solidFill>
           <a:ln xmlns:a="http://schemas.openxmlformats.org/drawingml/2006/main" w="9525">
             <a:solidFill>
-              <a:srgbClr val="DFF1E7"/>
+              <a:srgbClr val="75B78E"/>
             </a:solidFill>
             <a:prstDash val="solid"/>
           </a:ln>
@@ -5868,11 +5923,12 @@
         </p:spPr>
         <p:txBody>
           <a:bodyPr xmlns:a="http://schemas.openxmlformats.org/drawingml/2006/main" anchor="t">
-            <a:normAutofit fontScale="66667"/>
+            <a:normAutofit fontScale="86667"/>
           </a:bodyPr>
           <a:lstStyle xmlns:a="http://schemas.openxmlformats.org/drawingml/2006/main"/>
           <a:p xmlns:a="http://schemas.openxmlformats.org/drawingml/2006/main">
             <a:pPr algn="ctr">
+              <a:buNone/>
               <a:defRPr sz="975" b="1">
                 <a:solidFill>
                   <a:srgbClr val="176A4B"/>
@@ -5883,13 +5939,13 @@
               </a:defRPr>
             </a:pPr>
             <a:r>
-              <a:rPr sz="975" b="1">
-                <a:solidFill>
-                  <a:srgbClr val="176A4B"/>
-                </a:solidFill>
-                <a:latin typeface="Arial"/>
-                <a:ea typeface="Arial"/>
-                <a:cs typeface="Arial"/>
+              <a:rPr sz="750" b="1">
+                <a:solidFill>
+                  <a:srgbClr val="75B78E"/>
+                </a:solidFill>
+                <a:latin typeface="Menlo"/>
+                <a:ea typeface="Menlo"/>
+                <a:cs typeface="Menlo"/>
               </a:rPr>
               <a:t>DEMO READY</a:t>
             </a:r>
@@ -5926,11 +5982,12 @@
         </p:spPr>
         <p:txBody>
           <a:bodyPr xmlns:a="http://schemas.openxmlformats.org/drawingml/2006/main" anchor="t">
-            <a:normAutofit fontScale="91111"/>
+            <a:normAutofit fontScale="100000"/>
           </a:bodyPr>
           <a:lstStyle xmlns:a="http://schemas.openxmlformats.org/drawingml/2006/main"/>
           <a:p xmlns:a="http://schemas.openxmlformats.org/drawingml/2006/main">
             <a:pPr algn="l">
+              <a:buNone/>
               <a:defRPr sz="1125" b="0">
                 <a:solidFill>
                   <a:srgbClr val="686863"/>
@@ -5941,13 +5998,13 @@
               </a:defRPr>
             </a:pPr>
             <a:r>
-              <a:rPr sz="1125" b="0">
-                <a:solidFill>
-                  <a:srgbClr val="686863"/>
-                </a:solidFill>
-                <a:latin typeface="Arial"/>
-                <a:ea typeface="Arial"/>
-                <a:cs typeface="Arial"/>
+              <a:rPr sz="825" b="0">
+                <a:solidFill>
+                  <a:srgbClr val="9C9183"/>
+                </a:solidFill>
+                <a:latin typeface="Menlo"/>
+                <a:ea typeface="Menlo"/>
+                <a:cs typeface="Menlo"/>
               </a:rPr>
               <a:t>Adaptive Payment Assurance Range  •  Dylan Moraes</a:t>
             </a:r>
@@ -5970,7 +6027,7 @@
     <p:bg>
       <p:bgPr>
         <a:solidFill xmlns:a="http://schemas.openxmlformats.org/drawingml/2006/main">
-          <a:srgbClr val="F8F7F3"/>
+          <a:srgbClr val="0A0907"/>
         </a:solidFill>
       </p:bgPr>
     </p:bg>
@@ -6018,6 +6075,7 @@
           <a:lstStyle xmlns:a="http://schemas.openxmlformats.org/drawingml/2006/main"/>
           <a:p xmlns:a="http://schemas.openxmlformats.org/drawingml/2006/main">
             <a:pPr algn="l">
+              <a:buNone/>
               <a:defRPr sz="975" b="1">
                 <a:solidFill>
                   <a:srgbClr val="E9652E"/>
@@ -6028,13 +6086,13 @@
               </a:defRPr>
             </a:pPr>
             <a:r>
-              <a:rPr sz="975" b="1">
-                <a:solidFill>
-                  <a:srgbClr val="E9652E"/>
-                </a:solidFill>
-                <a:latin typeface="Arial"/>
-                <a:ea typeface="Arial"/>
-                <a:cs typeface="Arial"/>
+              <a:rPr sz="825" b="1">
+                <a:solidFill>
+                  <a:srgbClr val="F19A68"/>
+                </a:solidFill>
+                <a:latin typeface="Menlo"/>
+                <a:ea typeface="Menlo"/>
+                <a:cs typeface="Menlo"/>
               </a:rPr>
               <a:t>ADAPTIVE PAYMENT ASSURANCE RANGE</a:t>
             </a:r>
@@ -6076,6 +6134,7 @@
           <a:lstStyle xmlns:a="http://schemas.openxmlformats.org/drawingml/2006/main"/>
           <a:p xmlns:a="http://schemas.openxmlformats.org/drawingml/2006/main">
             <a:pPr algn="l">
+              <a:buNone/>
               <a:defRPr sz="2850" b="1">
                 <a:solidFill>
                   <a:srgbClr val="171714"/>
@@ -6086,13 +6145,13 @@
               </a:defRPr>
             </a:pPr>
             <a:r>
-              <a:rPr sz="2850" b="1">
-                <a:solidFill>
-                  <a:srgbClr val="171714"/>
-                </a:solidFill>
-                <a:latin typeface="Arial"/>
-                <a:ea typeface="Arial"/>
-                <a:cs typeface="Arial"/>
+              <a:rPr sz="2925" b="0">
+                <a:solidFill>
+                  <a:srgbClr val="F1E9DC"/>
+                </a:solidFill>
+                <a:latin typeface="Georgia"/>
+                <a:ea typeface="Georgia"/>
+                <a:cs typeface="Georgia"/>
               </a:rPr>
               <a:t>GenAI changes the operating model of fraud</a:t>
             </a:r>
@@ -6134,6 +6193,7 @@
           <a:lstStyle xmlns:a="http://schemas.openxmlformats.org/drawingml/2006/main"/>
           <a:p xmlns:a="http://schemas.openxmlformats.org/drawingml/2006/main">
             <a:pPr algn="r">
+              <a:buNone/>
               <a:defRPr sz="975" b="0">
                 <a:solidFill>
                   <a:srgbClr val="686863"/>
@@ -6144,13 +6204,13 @@
               </a:defRPr>
             </a:pPr>
             <a:r>
-              <a:rPr sz="975" b="0">
-                <a:solidFill>
-                  <a:srgbClr val="686863"/>
-                </a:solidFill>
-                <a:latin typeface="Arial"/>
-                <a:ea typeface="Arial"/>
-                <a:cs typeface="Arial"/>
+              <a:rPr sz="975" b="1">
+                <a:solidFill>
+                  <a:srgbClr val="F19A68"/>
+                </a:solidFill>
+                <a:latin typeface="Menlo"/>
+                <a:ea typeface="Menlo"/>
+                <a:cs typeface="Menlo"/>
               </a:rPr>
               <a:t>02</a:t>
             </a:r>
@@ -6180,11 +6240,11 @@
             <a:avLst/>
           </a:prstGeom>
           <a:solidFill xmlns:a="http://schemas.openxmlformats.org/drawingml/2006/main">
-            <a:srgbClr val="D7D6CF"/>
+            <a:srgbClr val="3F382E"/>
           </a:solidFill>
           <a:ln xmlns:a="http://schemas.openxmlformats.org/drawingml/2006/main" w="0">
             <a:solidFill>
-              <a:srgbClr val="D7D6CF"/>
+              <a:srgbClr val="3F382E"/>
             </a:solidFill>
             <a:prstDash val="solid"/>
           </a:ln>
@@ -6215,11 +6275,11 @@
             </a:avLst>
           </a:prstGeom>
           <a:solidFill xmlns:a="http://schemas.openxmlformats.org/drawingml/2006/main">
-            <a:srgbClr val="FFFFFF"/>
+            <a:srgbClr val="14110D"/>
           </a:solidFill>
           <a:ln xmlns:a="http://schemas.openxmlformats.org/drawingml/2006/main" w="9525">
             <a:solidFill>
-              <a:srgbClr val="D7D6CF"/>
+              <a:srgbClr val="6B5F50"/>
             </a:solidFill>
             <a:prstDash val="solid"/>
           </a:ln>
@@ -6260,6 +6320,7 @@
           <a:lstStyle xmlns:a="http://schemas.openxmlformats.org/drawingml/2006/main"/>
           <a:p xmlns:a="http://schemas.openxmlformats.org/drawingml/2006/main">
             <a:pPr algn="l">
+              <a:buNone/>
               <a:defRPr sz="1125" b="1">
                 <a:solidFill>
                   <a:srgbClr val="E9652E"/>
@@ -6270,13 +6331,13 @@
               </a:defRPr>
             </a:pPr>
             <a:r>
-              <a:rPr sz="1125" b="1">
-                <a:solidFill>
-                  <a:srgbClr val="E9652E"/>
-                </a:solidFill>
-                <a:latin typeface="Arial"/>
-                <a:ea typeface="Arial"/>
-                <a:cs typeface="Arial"/>
+              <a:rPr sz="975" b="1">
+                <a:solidFill>
+                  <a:srgbClr val="F19A68"/>
+                </a:solidFill>
+                <a:latin typeface="Menlo"/>
+                <a:ea typeface="Menlo"/>
+                <a:cs typeface="Menlo"/>
               </a:rPr>
               <a:t>01</a:t>
             </a:r>
@@ -6313,11 +6374,12 @@
         </p:spPr>
         <p:txBody>
           <a:bodyPr xmlns:a="http://schemas.openxmlformats.org/drawingml/2006/main" anchor="t">
-            <a:normAutofit fontScale="92424"/>
+            <a:normAutofit fontScale="100000"/>
           </a:bodyPr>
           <a:lstStyle xmlns:a="http://schemas.openxmlformats.org/drawingml/2006/main"/>
           <a:p xmlns:a="http://schemas.openxmlformats.org/drawingml/2006/main">
             <a:pPr algn="l">
+              <a:buNone/>
               <a:defRPr sz="1650" b="1">
                 <a:solidFill>
                   <a:srgbClr val="171714"/>
@@ -6328,9 +6390,9 @@
               </a:defRPr>
             </a:pPr>
             <a:r>
-              <a:rPr sz="1650" b="1">
-                <a:solidFill>
-                  <a:srgbClr val="171714"/>
+              <a:rPr sz="1500" b="1">
+                <a:solidFill>
+                  <a:srgbClr val="F1E9DC"/>
                 </a:solidFill>
                 <a:latin typeface="Arial"/>
                 <a:ea typeface="Arial"/>
@@ -6376,6 +6438,7 @@
           <a:lstStyle xmlns:a="http://schemas.openxmlformats.org/drawingml/2006/main"/>
           <a:p xmlns:a="http://schemas.openxmlformats.org/drawingml/2006/main">
             <a:pPr algn="l">
+              <a:buNone/>
               <a:defRPr sz="1425" b="0">
                 <a:solidFill>
                   <a:srgbClr val="686863"/>
@@ -6386,32 +6449,33 @@
               </a:defRPr>
             </a:pPr>
             <a:r>
-              <a:rPr sz="1425" b="0">
+              <a:rPr sz="1275" b="0">
+                <a:solidFill>
+                  <a:srgbClr val="9C9183"/>
+                </a:solidFill>
+                <a:latin typeface="Arial"/>
+                <a:ea typeface="Arial"/>
+                <a:cs typeface="Arial"/>
+              </a:rPr>
+              <a:t>Victim-specific</a:t>
+            </a:r>
+          </a:p>
+          <a:p xmlns:a="http://schemas.openxmlformats.org/drawingml/2006/main">
+            <a:pPr algn="l">
+              <a:buNone/>
+              <a:defRPr sz="1425" b="0">
                 <a:solidFill>
                   <a:srgbClr val="686863"/>
                 </a:solidFill>
                 <a:latin typeface="Arial"/>
                 <a:ea typeface="Arial"/>
                 <a:cs typeface="Arial"/>
-              </a:rPr>
-              <a:t>Victim-specific</a:t>
-            </a:r>
-          </a:p>
-          <a:p xmlns:a="http://schemas.openxmlformats.org/drawingml/2006/main">
-            <a:pPr algn="l">
-              <a:defRPr sz="1425" b="0">
-                <a:solidFill>
-                  <a:srgbClr val="686863"/>
-                </a:solidFill>
-                <a:latin typeface="Arial"/>
-                <a:ea typeface="Arial"/>
-                <a:cs typeface="Arial"/>
-              </a:defRPr>
-            </a:pPr>
-            <a:r>
-              <a:rPr sz="1425" b="0">
-                <a:solidFill>
-                  <a:srgbClr val="686863"/>
+              </a:defRPr>
+            </a:pPr>
+            <a:r>
+              <a:rPr sz="1275" b="0">
+                <a:solidFill>
+                  <a:srgbClr val="9C9183"/>
                 </a:solidFill>
                 <a:latin typeface="Arial"/>
                 <a:ea typeface="Arial"/>
@@ -6452,11 +6516,12 @@
         </p:spPr>
         <p:txBody>
           <a:bodyPr xmlns:a="http://schemas.openxmlformats.org/drawingml/2006/main" anchor="t">
-            <a:normAutofit fontScale="45516"/>
+            <a:normAutofit fontScale="53102"/>
           </a:bodyPr>
           <a:lstStyle xmlns:a="http://schemas.openxmlformats.org/drawingml/2006/main"/>
           <a:p xmlns:a="http://schemas.openxmlformats.org/drawingml/2006/main">
             <a:pPr algn="ctr">
+              <a:buNone/>
               <a:defRPr sz="2100" b="1">
                 <a:solidFill>
                   <a:srgbClr val="E9652E"/>
@@ -6467,9 +6532,9 @@
               </a:defRPr>
             </a:pPr>
             <a:r>
-              <a:rPr sz="2100" b="1">
-                <a:solidFill>
-                  <a:srgbClr val="E9652E"/>
+              <a:rPr sz="1800" b="1">
+                <a:solidFill>
+                  <a:srgbClr val="E8793D"/>
                 </a:solidFill>
                 <a:latin typeface="Arial"/>
                 <a:ea typeface="Arial"/>
@@ -6505,11 +6570,11 @@
             </a:avLst>
           </a:prstGeom>
           <a:solidFill xmlns:a="http://schemas.openxmlformats.org/drawingml/2006/main">
-            <a:srgbClr val="FFFFFF"/>
+            <a:srgbClr val="14110D"/>
           </a:solidFill>
           <a:ln xmlns:a="http://schemas.openxmlformats.org/drawingml/2006/main" w="9525">
             <a:solidFill>
-              <a:srgbClr val="D7D6CF"/>
+              <a:srgbClr val="6B5F50"/>
             </a:solidFill>
             <a:prstDash val="solid"/>
           </a:ln>
@@ -6550,6 +6615,7 @@
           <a:lstStyle xmlns:a="http://schemas.openxmlformats.org/drawingml/2006/main"/>
           <a:p xmlns:a="http://schemas.openxmlformats.org/drawingml/2006/main">
             <a:pPr algn="l">
+              <a:buNone/>
               <a:defRPr sz="1125" b="1">
                 <a:solidFill>
                   <a:srgbClr val="E9652E"/>
@@ -6560,13 +6626,13 @@
               </a:defRPr>
             </a:pPr>
             <a:r>
-              <a:rPr sz="1125" b="1">
-                <a:solidFill>
-                  <a:srgbClr val="E9652E"/>
-                </a:solidFill>
-                <a:latin typeface="Arial"/>
-                <a:ea typeface="Arial"/>
-                <a:cs typeface="Arial"/>
+              <a:rPr sz="975" b="1">
+                <a:solidFill>
+                  <a:srgbClr val="F19A68"/>
+                </a:solidFill>
+                <a:latin typeface="Menlo"/>
+                <a:ea typeface="Menlo"/>
+                <a:cs typeface="Menlo"/>
               </a:rPr>
               <a:t>02</a:t>
             </a:r>
@@ -6603,11 +6669,12 @@
         </p:spPr>
         <p:txBody>
           <a:bodyPr xmlns:a="http://schemas.openxmlformats.org/drawingml/2006/main" anchor="t">
-            <a:normAutofit fontScale="92424"/>
+            <a:normAutofit fontScale="100000"/>
           </a:bodyPr>
           <a:lstStyle xmlns:a="http://schemas.openxmlformats.org/drawingml/2006/main"/>
           <a:p xmlns:a="http://schemas.openxmlformats.org/drawingml/2006/main">
             <a:pPr algn="l">
+              <a:buNone/>
               <a:defRPr sz="1650" b="1">
                 <a:solidFill>
                   <a:srgbClr val="171714"/>
@@ -6618,9 +6685,9 @@
               </a:defRPr>
             </a:pPr>
             <a:r>
-              <a:rPr sz="1650" b="1">
-                <a:solidFill>
-                  <a:srgbClr val="171714"/>
+              <a:rPr sz="1500" b="1">
+                <a:solidFill>
+                  <a:srgbClr val="F1E9DC"/>
                 </a:solidFill>
                 <a:latin typeface="Arial"/>
                 <a:ea typeface="Arial"/>
@@ -6666,6 +6733,7 @@
           <a:lstStyle xmlns:a="http://schemas.openxmlformats.org/drawingml/2006/main"/>
           <a:p xmlns:a="http://schemas.openxmlformats.org/drawingml/2006/main">
             <a:pPr algn="l">
+              <a:buNone/>
               <a:defRPr sz="1425" b="0">
                 <a:solidFill>
                   <a:srgbClr val="686863"/>
@@ -6676,32 +6744,33 @@
               </a:defRPr>
             </a:pPr>
             <a:r>
-              <a:rPr sz="1425" b="0">
+              <a:rPr sz="1275" b="0">
+                <a:solidFill>
+                  <a:srgbClr val="9C9183"/>
+                </a:solidFill>
+                <a:latin typeface="Arial"/>
+                <a:ea typeface="Arial"/>
+                <a:cs typeface="Arial"/>
+              </a:rPr>
+              <a:t>Faster adaptation</a:t>
+            </a:r>
+          </a:p>
+          <a:p xmlns:a="http://schemas.openxmlformats.org/drawingml/2006/main">
+            <a:pPr algn="l">
+              <a:buNone/>
+              <a:defRPr sz="1425" b="0">
                 <a:solidFill>
                   <a:srgbClr val="686863"/>
                 </a:solidFill>
                 <a:latin typeface="Arial"/>
                 <a:ea typeface="Arial"/>
                 <a:cs typeface="Arial"/>
-              </a:rPr>
-              <a:t>Faster adaptation</a:t>
-            </a:r>
-          </a:p>
-          <a:p xmlns:a="http://schemas.openxmlformats.org/drawingml/2006/main">
-            <a:pPr algn="l">
-              <a:defRPr sz="1425" b="0">
-                <a:solidFill>
-                  <a:srgbClr val="686863"/>
-                </a:solidFill>
-                <a:latin typeface="Arial"/>
-                <a:ea typeface="Arial"/>
-                <a:cs typeface="Arial"/>
-              </a:defRPr>
-            </a:pPr>
-            <a:r>
-              <a:rPr sz="1425" b="0">
-                <a:solidFill>
-                  <a:srgbClr val="686863"/>
+              </a:defRPr>
+            </a:pPr>
+            <a:r>
+              <a:rPr sz="1275" b="0">
+                <a:solidFill>
+                  <a:srgbClr val="9C9183"/>
                 </a:solidFill>
                 <a:latin typeface="Arial"/>
                 <a:ea typeface="Arial"/>
@@ -6742,11 +6811,12 @@
         </p:spPr>
         <p:txBody>
           <a:bodyPr xmlns:a="http://schemas.openxmlformats.org/drawingml/2006/main" anchor="t">
-            <a:normAutofit fontScale="45516"/>
+            <a:normAutofit fontScale="53102"/>
           </a:bodyPr>
           <a:lstStyle xmlns:a="http://schemas.openxmlformats.org/drawingml/2006/main"/>
           <a:p xmlns:a="http://schemas.openxmlformats.org/drawingml/2006/main">
             <a:pPr algn="ctr">
+              <a:buNone/>
               <a:defRPr sz="2100" b="1">
                 <a:solidFill>
                   <a:srgbClr val="E9652E"/>
@@ -6757,9 +6827,9 @@
               </a:defRPr>
             </a:pPr>
             <a:r>
-              <a:rPr sz="2100" b="1">
-                <a:solidFill>
-                  <a:srgbClr val="E9652E"/>
+              <a:rPr sz="1800" b="1">
+                <a:solidFill>
+                  <a:srgbClr val="E8793D"/>
                 </a:solidFill>
                 <a:latin typeface="Arial"/>
                 <a:ea typeface="Arial"/>
@@ -6795,11 +6865,11 @@
             </a:avLst>
           </a:prstGeom>
           <a:solidFill xmlns:a="http://schemas.openxmlformats.org/drawingml/2006/main">
-            <a:srgbClr val="FCE5DA"/>
+            <a:srgbClr val="211B14"/>
           </a:solidFill>
-          <a:ln xmlns:a="http://schemas.openxmlformats.org/drawingml/2006/main" w="9525">
+          <a:ln xmlns:a="http://schemas.openxmlformats.org/drawingml/2006/main" w="19050">
             <a:solidFill>
-              <a:srgbClr val="E9652E"/>
+              <a:srgbClr val="E8793D"/>
             </a:solidFill>
             <a:prstDash val="solid"/>
           </a:ln>
@@ -6840,6 +6910,7 @@
           <a:lstStyle xmlns:a="http://schemas.openxmlformats.org/drawingml/2006/main"/>
           <a:p xmlns:a="http://schemas.openxmlformats.org/drawingml/2006/main">
             <a:pPr algn="l">
+              <a:buNone/>
               <a:defRPr sz="1125" b="1">
                 <a:solidFill>
                   <a:srgbClr val="E9652E"/>
@@ -6850,13 +6921,13 @@
               </a:defRPr>
             </a:pPr>
             <a:r>
-              <a:rPr sz="1125" b="1">
-                <a:solidFill>
-                  <a:srgbClr val="E9652E"/>
-                </a:solidFill>
-                <a:latin typeface="Arial"/>
-                <a:ea typeface="Arial"/>
-                <a:cs typeface="Arial"/>
+              <a:rPr sz="975" b="1">
+                <a:solidFill>
+                  <a:srgbClr val="F19A68"/>
+                </a:solidFill>
+                <a:latin typeface="Menlo"/>
+                <a:ea typeface="Menlo"/>
+                <a:cs typeface="Menlo"/>
               </a:rPr>
               <a:t>03</a:t>
             </a:r>
@@ -6893,11 +6964,12 @@
         </p:spPr>
         <p:txBody>
           <a:bodyPr xmlns:a="http://schemas.openxmlformats.org/drawingml/2006/main" anchor="t">
-            <a:normAutofit fontScale="92424"/>
+            <a:normAutofit fontScale="100000"/>
           </a:bodyPr>
           <a:lstStyle xmlns:a="http://schemas.openxmlformats.org/drawingml/2006/main"/>
           <a:p xmlns:a="http://schemas.openxmlformats.org/drawingml/2006/main">
             <a:pPr algn="l">
+              <a:buNone/>
               <a:defRPr sz="1650" b="1">
                 <a:solidFill>
                   <a:srgbClr val="171714"/>
@@ -6908,9 +6980,9 @@
               </a:defRPr>
             </a:pPr>
             <a:r>
-              <a:rPr sz="1650" b="1">
-                <a:solidFill>
-                  <a:srgbClr val="171714"/>
+              <a:rPr sz="1500" b="1">
+                <a:solidFill>
+                  <a:srgbClr val="F1E9DC"/>
                 </a:solidFill>
                 <a:latin typeface="Arial"/>
                 <a:ea typeface="Arial"/>
@@ -6956,6 +7028,7 @@
           <a:lstStyle xmlns:a="http://schemas.openxmlformats.org/drawingml/2006/main"/>
           <a:p xmlns:a="http://schemas.openxmlformats.org/drawingml/2006/main">
             <a:pPr algn="l">
+              <a:buNone/>
               <a:defRPr sz="1425" b="0">
                 <a:solidFill>
                   <a:srgbClr val="686863"/>
@@ -6966,32 +7039,33 @@
               </a:defRPr>
             </a:pPr>
             <a:r>
-              <a:rPr sz="1425" b="0">
+              <a:rPr sz="1275" b="0">
+                <a:solidFill>
+                  <a:srgbClr val="9C9183"/>
+                </a:solidFill>
+                <a:latin typeface="Arial"/>
+                <a:ea typeface="Arial"/>
+                <a:cs typeface="Arial"/>
+              </a:rPr>
+              <a:t>Many entities, rails,</a:t>
+            </a:r>
+          </a:p>
+          <a:p xmlns:a="http://schemas.openxmlformats.org/drawingml/2006/main">
+            <a:pPr algn="l">
+              <a:buNone/>
+              <a:defRPr sz="1425" b="0">
                 <a:solidFill>
                   <a:srgbClr val="686863"/>
                 </a:solidFill>
                 <a:latin typeface="Arial"/>
                 <a:ea typeface="Arial"/>
                 <a:cs typeface="Arial"/>
-              </a:rPr>
-              <a:t>Many entities, rails,</a:t>
-            </a:r>
-          </a:p>
-          <a:p xmlns:a="http://schemas.openxmlformats.org/drawingml/2006/main">
-            <a:pPr algn="l">
-              <a:defRPr sz="1425" b="0">
-                <a:solidFill>
-                  <a:srgbClr val="686863"/>
-                </a:solidFill>
-                <a:latin typeface="Arial"/>
-                <a:ea typeface="Arial"/>
-                <a:cs typeface="Arial"/>
-              </a:defRPr>
-            </a:pPr>
-            <a:r>
-              <a:rPr sz="1425" b="0">
-                <a:solidFill>
-                  <a:srgbClr val="686863"/>
+              </a:defRPr>
+            </a:pPr>
+            <a:r>
+              <a:rPr sz="1275" b="0">
+                <a:solidFill>
+                  <a:srgbClr val="9C9183"/>
                 </a:solidFill>
                 <a:latin typeface="Arial"/>
                 <a:ea typeface="Arial"/>
@@ -7032,11 +7106,12 @@
         </p:spPr>
         <p:txBody>
           <a:bodyPr xmlns:a="http://schemas.openxmlformats.org/drawingml/2006/main" anchor="t">
-            <a:normAutofit fontScale="45516"/>
+            <a:normAutofit fontScale="53102"/>
           </a:bodyPr>
           <a:lstStyle xmlns:a="http://schemas.openxmlformats.org/drawingml/2006/main"/>
           <a:p xmlns:a="http://schemas.openxmlformats.org/drawingml/2006/main">
             <a:pPr algn="ctr">
+              <a:buNone/>
               <a:defRPr sz="2100" b="1">
                 <a:solidFill>
                   <a:srgbClr val="E9652E"/>
@@ -7047,9 +7122,9 @@
               </a:defRPr>
             </a:pPr>
             <a:r>
-              <a:rPr sz="2100" b="1">
-                <a:solidFill>
-                  <a:srgbClr val="E9652E"/>
+              <a:rPr sz="1800" b="1">
+                <a:solidFill>
+                  <a:srgbClr val="E8793D"/>
                 </a:solidFill>
                 <a:latin typeface="Arial"/>
                 <a:ea typeface="Arial"/>
@@ -7085,11 +7160,11 @@
             </a:avLst>
           </a:prstGeom>
           <a:solidFill xmlns:a="http://schemas.openxmlformats.org/drawingml/2006/main">
-            <a:srgbClr val="FFFFFF"/>
+            <a:srgbClr val="14110D"/>
           </a:solidFill>
           <a:ln xmlns:a="http://schemas.openxmlformats.org/drawingml/2006/main" w="9525">
             <a:solidFill>
-              <a:srgbClr val="D7D6CF"/>
+              <a:srgbClr val="6B5F50"/>
             </a:solidFill>
             <a:prstDash val="solid"/>
           </a:ln>
@@ -7130,6 +7205,7 @@
           <a:lstStyle xmlns:a="http://schemas.openxmlformats.org/drawingml/2006/main"/>
           <a:p xmlns:a="http://schemas.openxmlformats.org/drawingml/2006/main">
             <a:pPr algn="l">
+              <a:buNone/>
               <a:defRPr sz="1125" b="1">
                 <a:solidFill>
                   <a:srgbClr val="E9652E"/>
@@ -7140,13 +7216,13 @@
               </a:defRPr>
             </a:pPr>
             <a:r>
-              <a:rPr sz="1125" b="1">
-                <a:solidFill>
-                  <a:srgbClr val="E9652E"/>
-                </a:solidFill>
-                <a:latin typeface="Arial"/>
-                <a:ea typeface="Arial"/>
-                <a:cs typeface="Arial"/>
+              <a:rPr sz="975" b="1">
+                <a:solidFill>
+                  <a:srgbClr val="F19A68"/>
+                </a:solidFill>
+                <a:latin typeface="Menlo"/>
+                <a:ea typeface="Menlo"/>
+                <a:cs typeface="Menlo"/>
               </a:rPr>
               <a:t>04</a:t>
             </a:r>
@@ -7183,11 +7259,12 @@
         </p:spPr>
         <p:txBody>
           <a:bodyPr xmlns:a="http://schemas.openxmlformats.org/drawingml/2006/main" anchor="t">
-            <a:normAutofit fontScale="92424"/>
+            <a:normAutofit fontScale="100000"/>
           </a:bodyPr>
           <a:lstStyle xmlns:a="http://schemas.openxmlformats.org/drawingml/2006/main"/>
           <a:p xmlns:a="http://schemas.openxmlformats.org/drawingml/2006/main">
             <a:pPr algn="l">
+              <a:buNone/>
               <a:defRPr sz="1650" b="1">
                 <a:solidFill>
                   <a:srgbClr val="171714"/>
@@ -7198,9 +7275,9 @@
               </a:defRPr>
             </a:pPr>
             <a:r>
-              <a:rPr sz="1650" b="1">
-                <a:solidFill>
-                  <a:srgbClr val="171714"/>
+              <a:rPr sz="1500" b="1">
+                <a:solidFill>
+                  <a:srgbClr val="F1E9DC"/>
                 </a:solidFill>
                 <a:latin typeface="Arial"/>
                 <a:ea typeface="Arial"/>
@@ -7246,6 +7323,7 @@
           <a:lstStyle xmlns:a="http://schemas.openxmlformats.org/drawingml/2006/main"/>
           <a:p xmlns:a="http://schemas.openxmlformats.org/drawingml/2006/main">
             <a:pPr algn="l">
+              <a:buNone/>
               <a:defRPr sz="1425" b="0">
                 <a:solidFill>
                   <a:srgbClr val="686863"/>
@@ -7256,32 +7334,33 @@
               </a:defRPr>
             </a:pPr>
             <a:r>
-              <a:rPr sz="1425" b="0">
+              <a:rPr sz="1275" b="0">
+                <a:solidFill>
+                  <a:srgbClr val="9C9183"/>
+                </a:solidFill>
+                <a:latin typeface="Arial"/>
+                <a:ea typeface="Arial"/>
+                <a:cs typeface="Arial"/>
+              </a:rPr>
+              <a:t>Agents can act</a:t>
+            </a:r>
+          </a:p>
+          <a:p xmlns:a="http://schemas.openxmlformats.org/drawingml/2006/main">
+            <a:pPr algn="l">
+              <a:buNone/>
+              <a:defRPr sz="1425" b="0">
                 <a:solidFill>
                   <a:srgbClr val="686863"/>
                 </a:solidFill>
                 <a:latin typeface="Arial"/>
                 <a:ea typeface="Arial"/>
                 <a:cs typeface="Arial"/>
-              </a:rPr>
-              <a:t>Agents can act</a:t>
-            </a:r>
-          </a:p>
-          <a:p xmlns:a="http://schemas.openxmlformats.org/drawingml/2006/main">
-            <a:pPr algn="l">
-              <a:defRPr sz="1425" b="0">
-                <a:solidFill>
-                  <a:srgbClr val="686863"/>
-                </a:solidFill>
-                <a:latin typeface="Arial"/>
-                <a:ea typeface="Arial"/>
-                <a:cs typeface="Arial"/>
-              </a:defRPr>
-            </a:pPr>
-            <a:r>
-              <a:rPr sz="1425" b="0">
-                <a:solidFill>
-                  <a:srgbClr val="686863"/>
+              </a:defRPr>
+            </a:pPr>
+            <a:r>
+              <a:rPr sz="1275" b="0">
+                <a:solidFill>
+                  <a:srgbClr val="9C9183"/>
                 </a:solidFill>
                 <a:latin typeface="Arial"/>
                 <a:ea typeface="Arial"/>
@@ -7317,11 +7396,11 @@
             </a:avLst>
           </a:prstGeom>
           <a:solidFill xmlns:a="http://schemas.openxmlformats.org/drawingml/2006/main">
-            <a:srgbClr val="171714"/>
+            <a:srgbClr val="19150F"/>
           </a:solidFill>
           <a:ln xmlns:a="http://schemas.openxmlformats.org/drawingml/2006/main" w="9525">
             <a:solidFill>
-              <a:srgbClr val="171714"/>
+              <a:srgbClr val="6B5F50"/>
             </a:solidFill>
             <a:prstDash val="solid"/>
           </a:ln>
@@ -7357,11 +7436,12 @@
         </p:spPr>
         <p:txBody>
           <a:bodyPr xmlns:a="http://schemas.openxmlformats.org/drawingml/2006/main" anchor="t">
-            <a:normAutofit fontScale="98246"/>
+            <a:normAutofit fontScale="100000"/>
           </a:bodyPr>
           <a:lstStyle xmlns:a="http://schemas.openxmlformats.org/drawingml/2006/main"/>
           <a:p xmlns:a="http://schemas.openxmlformats.org/drawingml/2006/main">
             <a:pPr algn="l">
+              <a:buNone/>
               <a:defRPr sz="1425" b="0">
                 <a:solidFill>
                   <a:srgbClr val="BDBDB7"/>
@@ -7372,9 +7452,9 @@
               </a:defRPr>
             </a:pPr>
             <a:r>
-              <a:rPr sz="1425" b="0">
-                <a:solidFill>
-                  <a:srgbClr val="BDBDB7"/>
+              <a:rPr sz="1200" b="0">
+                <a:solidFill>
+                  <a:srgbClr val="9C9183"/>
                 </a:solidFill>
                 <a:latin typeface="Arial"/>
                 <a:ea typeface="Arial"/>
@@ -7415,11 +7495,12 @@
         </p:spPr>
         <p:txBody>
           <a:bodyPr xmlns:a="http://schemas.openxmlformats.org/drawingml/2006/main" anchor="t">
-            <a:normAutofit fontScale="84615"/>
+            <a:normAutofit fontScale="91667"/>
           </a:bodyPr>
           <a:lstStyle xmlns:a="http://schemas.openxmlformats.org/drawingml/2006/main"/>
           <a:p xmlns:a="http://schemas.openxmlformats.org/drawingml/2006/main">
             <a:pPr algn="ctr">
+              <a:buNone/>
               <a:defRPr sz="1950" b="1">
                 <a:solidFill>
                   <a:srgbClr val="E9652E"/>
@@ -7430,9 +7511,9 @@
               </a:defRPr>
             </a:pPr>
             <a:r>
-              <a:rPr sz="1950" b="1">
-                <a:solidFill>
-                  <a:srgbClr val="E9652E"/>
+              <a:rPr sz="1800" b="1">
+                <a:solidFill>
+                  <a:srgbClr val="E8793D"/>
                 </a:solidFill>
                 <a:latin typeface="Arial"/>
                 <a:ea typeface="Arial"/>
@@ -7473,11 +7554,12 @@
         </p:spPr>
         <p:txBody>
           <a:bodyPr xmlns:a="http://schemas.openxmlformats.org/drawingml/2006/main" anchor="t">
-            <a:normAutofit fontScale="94734"/>
+            <a:normAutofit fontScale="100000"/>
           </a:bodyPr>
           <a:lstStyle xmlns:a="http://schemas.openxmlformats.org/drawingml/2006/main"/>
           <a:p xmlns:a="http://schemas.openxmlformats.org/drawingml/2006/main">
             <a:pPr algn="l">
+              <a:buNone/>
               <a:defRPr sz="2100" b="1">
                 <a:solidFill>
                   <a:srgbClr val="FFFFFF"/>
@@ -7488,13 +7570,13 @@
               </a:defRPr>
             </a:pPr>
             <a:r>
-              <a:rPr sz="2100" b="1">
-                <a:solidFill>
-                  <a:srgbClr val="FFFFFF"/>
-                </a:solidFill>
-                <a:latin typeface="Arial"/>
-                <a:ea typeface="Arial"/>
-                <a:cs typeface="Arial"/>
+              <a:rPr sz="2100" b="0">
+                <a:solidFill>
+                  <a:srgbClr val="F1E9DC"/>
+                </a:solidFill>
+                <a:latin typeface="Georgia"/>
+                <a:ea typeface="Georgia"/>
+                <a:cs typeface="Georgia"/>
               </a:rPr>
               <a:t>Campaign-aware assurance system</a:t>
             </a:r>
@@ -7531,11 +7613,12 @@
         </p:spPr>
         <p:txBody>
           <a:bodyPr xmlns:a="http://schemas.openxmlformats.org/drawingml/2006/main" anchor="t">
-            <a:normAutofit fontScale="85417"/>
+            <a:normAutofit fontScale="100000"/>
           </a:bodyPr>
           <a:lstStyle xmlns:a="http://schemas.openxmlformats.org/drawingml/2006/main"/>
           <a:p xmlns:a="http://schemas.openxmlformats.org/drawingml/2006/main">
             <a:pPr algn="l">
+              <a:buNone/>
               <a:defRPr sz="1200" b="0">
                 <a:solidFill>
                   <a:srgbClr val="DADAD4"/>
@@ -7546,13 +7629,13 @@
               </a:defRPr>
             </a:pPr>
             <a:r>
-              <a:rPr sz="1200" b="0">
-                <a:solidFill>
-                  <a:srgbClr val="DADAD4"/>
-                </a:solidFill>
-                <a:latin typeface="Arial"/>
-                <a:ea typeface="Arial"/>
-                <a:cs typeface="Arial"/>
+              <a:rPr sz="900" b="0">
+                <a:solidFill>
+                  <a:srgbClr val="C8BDAE"/>
+                </a:solidFill>
+                <a:latin typeface="Menlo"/>
+                <a:ea typeface="Menlo"/>
+                <a:cs typeface="Menlo"/>
               </a:rPr>
               <a:t>Behavior + lifecycle + economics + authority + governance</a:t>
             </a:r>
@@ -7575,7 +7658,7 @@
     <p:bg>
       <p:bgPr>
         <a:solidFill xmlns:a="http://schemas.openxmlformats.org/drawingml/2006/main">
-          <a:srgbClr val="F8F7F3"/>
+          <a:srgbClr val="0A0907"/>
         </a:solidFill>
       </p:bgPr>
     </p:bg>
@@ -7623,6 +7706,7 @@
           <a:lstStyle xmlns:a="http://schemas.openxmlformats.org/drawingml/2006/main"/>
           <a:p xmlns:a="http://schemas.openxmlformats.org/drawingml/2006/main">
             <a:pPr algn="l">
+              <a:buNone/>
               <a:defRPr sz="975" b="1">
                 <a:solidFill>
                   <a:srgbClr val="E9652E"/>
@@ -7633,13 +7717,13 @@
               </a:defRPr>
             </a:pPr>
             <a:r>
-              <a:rPr sz="975" b="1">
-                <a:solidFill>
-                  <a:srgbClr val="E9652E"/>
-                </a:solidFill>
-                <a:latin typeface="Arial"/>
-                <a:ea typeface="Arial"/>
-                <a:cs typeface="Arial"/>
+              <a:rPr sz="825" b="1">
+                <a:solidFill>
+                  <a:srgbClr val="F19A68"/>
+                </a:solidFill>
+                <a:latin typeface="Menlo"/>
+                <a:ea typeface="Menlo"/>
+                <a:cs typeface="Menlo"/>
               </a:rPr>
               <a:t>ADAPTIVE PAYMENT ASSURANCE RANGE</a:t>
             </a:r>
@@ -7681,6 +7765,7 @@
           <a:lstStyle xmlns:a="http://schemas.openxmlformats.org/drawingml/2006/main"/>
           <a:p xmlns:a="http://schemas.openxmlformats.org/drawingml/2006/main">
             <a:pPr algn="l">
+              <a:buNone/>
               <a:defRPr sz="2850" b="1">
                 <a:solidFill>
                   <a:srgbClr val="171714"/>
@@ -7691,13 +7776,13 @@
               </a:defRPr>
             </a:pPr>
             <a:r>
-              <a:rPr sz="2850" b="1">
-                <a:solidFill>
-                  <a:srgbClr val="171714"/>
-                </a:solidFill>
-                <a:latin typeface="Arial"/>
-                <a:ea typeface="Arial"/>
-                <a:cs typeface="Arial"/>
+              <a:rPr sz="2925" b="0">
+                <a:solidFill>
+                  <a:srgbClr val="F1E9DC"/>
+                </a:solidFill>
+                <a:latin typeface="Georgia"/>
+                <a:ea typeface="Georgia"/>
+                <a:cs typeface="Georgia"/>
               </a:rPr>
               <a:t>One assurance loop connects five control planes</a:t>
             </a:r>
@@ -7734,11 +7819,12 @@
         </p:spPr>
         <p:txBody>
           <a:bodyPr xmlns:a="http://schemas.openxmlformats.org/drawingml/2006/main" anchor="t">
-            <a:normAutofit fontScale="79487"/>
+            <a:normAutofit fontScale="93939"/>
           </a:bodyPr>
           <a:lstStyle xmlns:a="http://schemas.openxmlformats.org/drawingml/2006/main"/>
           <a:p xmlns:a="http://schemas.openxmlformats.org/drawingml/2006/main">
             <a:pPr algn="r">
+              <a:buNone/>
               <a:defRPr sz="975" b="0">
                 <a:solidFill>
                   <a:srgbClr val="686863"/>
@@ -7749,13 +7835,13 @@
               </a:defRPr>
             </a:pPr>
             <a:r>
-              <a:rPr sz="975" b="0">
-                <a:solidFill>
-                  <a:srgbClr val="686863"/>
-                </a:solidFill>
-                <a:latin typeface="Arial"/>
-                <a:ea typeface="Arial"/>
-                <a:cs typeface="Arial"/>
+              <a:rPr sz="825" b="0">
+                <a:solidFill>
+                  <a:srgbClr val="9C9183"/>
+                </a:solidFill>
+                <a:latin typeface="Menlo"/>
+                <a:ea typeface="Menlo"/>
+                <a:cs typeface="Menlo"/>
               </a:rPr>
               <a:t>03</a:t>
             </a:r>
@@ -7785,11 +7871,11 @@
             <a:avLst/>
           </a:prstGeom>
           <a:solidFill xmlns:a="http://schemas.openxmlformats.org/drawingml/2006/main">
-            <a:srgbClr val="D7D6CF"/>
+            <a:srgbClr val="3F382E"/>
           </a:solidFill>
           <a:ln xmlns:a="http://schemas.openxmlformats.org/drawingml/2006/main" w="0">
             <a:solidFill>
-              <a:srgbClr val="D7D6CF"/>
+              <a:srgbClr val="3F382E"/>
             </a:solidFill>
             <a:prstDash val="solid"/>
           </a:ln>
@@ -7820,11 +7906,11 @@
             </a:avLst>
           </a:prstGeom>
           <a:solidFill xmlns:a="http://schemas.openxmlformats.org/drawingml/2006/main">
-            <a:srgbClr val="DDEBF0"/>
+            <a:srgbClr val="14110D"/>
           </a:solidFill>
           <a:ln xmlns:a="http://schemas.openxmlformats.org/drawingml/2006/main" w="9525">
             <a:solidFill>
-              <a:srgbClr val="255D73"/>
+              <a:srgbClr val="6B5F50"/>
             </a:solidFill>
             <a:prstDash val="solid"/>
           </a:ln>
@@ -7860,11 +7946,12 @@
         </p:spPr>
         <p:txBody>
           <a:bodyPr xmlns:a="http://schemas.openxmlformats.org/drawingml/2006/main" anchor="t">
-            <a:normAutofit fontScale="97619"/>
+            <a:normAutofit fontScale="100000"/>
           </a:bodyPr>
           <a:lstStyle xmlns:a="http://schemas.openxmlformats.org/drawingml/2006/main"/>
           <a:p xmlns:a="http://schemas.openxmlformats.org/drawingml/2006/main">
             <a:pPr algn="l">
+              <a:buNone/>
               <a:defRPr sz="1050" b="1">
                 <a:solidFill>
                   <a:srgbClr val="255D73"/>
@@ -7875,13 +7962,13 @@
               </a:defRPr>
             </a:pPr>
             <a:r>
-              <a:rPr sz="1050" b="1">
-                <a:solidFill>
-                  <a:srgbClr val="255D73"/>
-                </a:solidFill>
-                <a:latin typeface="Arial"/>
-                <a:ea typeface="Arial"/>
-                <a:cs typeface="Arial"/>
+              <a:rPr sz="900" b="1">
+                <a:solidFill>
+                  <a:srgbClr val="F19A68"/>
+                </a:solidFill>
+                <a:latin typeface="Menlo"/>
+                <a:ea typeface="Menlo"/>
+                <a:cs typeface="Menlo"/>
               </a:rPr>
               <a:t>IDENTIFY</a:t>
             </a:r>
@@ -7918,11 +8005,12 @@
         </p:spPr>
         <p:txBody>
           <a:bodyPr xmlns:a="http://schemas.openxmlformats.org/drawingml/2006/main" anchor="t">
-            <a:normAutofit fontScale="91414"/>
+            <a:normAutofit fontScale="100000"/>
           </a:bodyPr>
           <a:lstStyle xmlns:a="http://schemas.openxmlformats.org/drawingml/2006/main"/>
           <a:p xmlns:a="http://schemas.openxmlformats.org/drawingml/2006/main">
             <a:pPr algn="l">
+              <a:buNone/>
               <a:defRPr sz="1650" b="1">
                 <a:solidFill>
                   <a:srgbClr val="171714"/>
@@ -7933,32 +8021,33 @@
               </a:defRPr>
             </a:pPr>
             <a:r>
-              <a:rPr sz="1650" b="1">
+              <a:rPr sz="1500" b="1">
+                <a:solidFill>
+                  <a:srgbClr val="F1E9DC"/>
+                </a:solidFill>
+                <a:latin typeface="Arial"/>
+                <a:ea typeface="Arial"/>
+                <a:cs typeface="Arial"/>
+              </a:rPr>
+              <a:t>Evidence + sources</a:t>
+            </a:r>
+          </a:p>
+          <a:p xmlns:a="http://schemas.openxmlformats.org/drawingml/2006/main">
+            <a:pPr algn="l">
+              <a:buNone/>
+              <a:defRPr sz="1650" b="1">
                 <a:solidFill>
                   <a:srgbClr val="171714"/>
                 </a:solidFill>
                 <a:latin typeface="Arial"/>
                 <a:ea typeface="Arial"/>
                 <a:cs typeface="Arial"/>
-              </a:rPr>
-              <a:t>Evidence + sources</a:t>
-            </a:r>
-          </a:p>
-          <a:p xmlns:a="http://schemas.openxmlformats.org/drawingml/2006/main">
-            <a:pPr algn="l">
-              <a:defRPr sz="1650" b="1">
-                <a:solidFill>
-                  <a:srgbClr val="171714"/>
-                </a:solidFill>
-                <a:latin typeface="Arial"/>
-                <a:ea typeface="Arial"/>
-                <a:cs typeface="Arial"/>
-              </a:defRPr>
-            </a:pPr>
-            <a:r>
-              <a:rPr sz="1650" b="1">
-                <a:solidFill>
-                  <a:srgbClr val="171714"/>
+              </a:defRPr>
+            </a:pPr>
+            <a:r>
+              <a:rPr sz="1500" b="1">
+                <a:solidFill>
+                  <a:srgbClr val="F1E9DC"/>
                 </a:solidFill>
                 <a:latin typeface="Arial"/>
                 <a:ea typeface="Arial"/>
@@ -7999,11 +8088,12 @@
         </p:spPr>
         <p:txBody>
           <a:bodyPr xmlns:a="http://schemas.openxmlformats.org/drawingml/2006/main" anchor="t">
-            <a:normAutofit fontScale="44769"/>
+            <a:normAutofit fontScale="48839"/>
           </a:bodyPr>
           <a:lstStyle xmlns:a="http://schemas.openxmlformats.org/drawingml/2006/main"/>
           <a:p xmlns:a="http://schemas.openxmlformats.org/drawingml/2006/main">
             <a:pPr algn="ctr">
+              <a:buNone/>
               <a:defRPr sz="1800" b="1">
                 <a:solidFill>
                   <a:srgbClr val="E9652E"/>
@@ -8014,9 +8104,9 @@
               </a:defRPr>
             </a:pPr>
             <a:r>
-              <a:rPr sz="1800" b="1">
-                <a:solidFill>
-                  <a:srgbClr val="E9652E"/>
+              <a:rPr sz="1650" b="1">
+                <a:solidFill>
+                  <a:srgbClr val="E8793D"/>
                 </a:solidFill>
                 <a:latin typeface="Arial"/>
                 <a:ea typeface="Arial"/>
@@ -8052,11 +8142,11 @@
             </a:avLst>
           </a:prstGeom>
           <a:solidFill xmlns:a="http://schemas.openxmlformats.org/drawingml/2006/main">
-            <a:srgbClr val="FCE5DA"/>
+            <a:srgbClr val="14110D"/>
           </a:solidFill>
           <a:ln xmlns:a="http://schemas.openxmlformats.org/drawingml/2006/main" w="9525">
             <a:solidFill>
-              <a:srgbClr val="E9652E"/>
+              <a:srgbClr val="6B5F50"/>
             </a:solidFill>
             <a:prstDash val="solid"/>
           </a:ln>
@@ -8092,11 +8182,12 @@
         </p:spPr>
         <p:txBody>
           <a:bodyPr xmlns:a="http://schemas.openxmlformats.org/drawingml/2006/main" anchor="t">
-            <a:normAutofit fontScale="97619"/>
+            <a:normAutofit fontScale="100000"/>
           </a:bodyPr>
           <a:lstStyle xmlns:a="http://schemas.openxmlformats.org/drawingml/2006/main"/>
           <a:p xmlns:a="http://schemas.openxmlformats.org/drawingml/2006/main">
             <a:pPr algn="l">
+              <a:buNone/>
               <a:defRPr sz="1050" b="1">
                 <a:solidFill>
                   <a:srgbClr val="E9652E"/>
@@ -8107,13 +8198,13 @@
               </a:defRPr>
             </a:pPr>
             <a:r>
-              <a:rPr sz="1050" b="1">
-                <a:solidFill>
-                  <a:srgbClr val="E9652E"/>
-                </a:solidFill>
-                <a:latin typeface="Arial"/>
-                <a:ea typeface="Arial"/>
-                <a:cs typeface="Arial"/>
+              <a:rPr sz="900" b="1">
+                <a:solidFill>
+                  <a:srgbClr val="F19A68"/>
+                </a:solidFill>
+                <a:latin typeface="Menlo"/>
+                <a:ea typeface="Menlo"/>
+                <a:cs typeface="Menlo"/>
               </a:rPr>
               <a:t>GENERATE</a:t>
             </a:r>
@@ -8150,11 +8241,12 @@
         </p:spPr>
         <p:txBody>
           <a:bodyPr xmlns:a="http://schemas.openxmlformats.org/drawingml/2006/main" anchor="t">
-            <a:normAutofit fontScale="91414"/>
+            <a:normAutofit fontScale="100000"/>
           </a:bodyPr>
           <a:lstStyle xmlns:a="http://schemas.openxmlformats.org/drawingml/2006/main"/>
           <a:p xmlns:a="http://schemas.openxmlformats.org/drawingml/2006/main">
             <a:pPr algn="l">
+              <a:buNone/>
               <a:defRPr sz="1650" b="1">
                 <a:solidFill>
                   <a:srgbClr val="171714"/>
@@ -8165,32 +8257,33 @@
               </a:defRPr>
             </a:pPr>
             <a:r>
-              <a:rPr sz="1650" b="1">
+              <a:rPr sz="1500" b="1">
+                <a:solidFill>
+                  <a:srgbClr val="F1E9DC"/>
+                </a:solidFill>
+                <a:latin typeface="Arial"/>
+                <a:ea typeface="Arial"/>
+                <a:cs typeface="Arial"/>
+              </a:rPr>
+              <a:t>Rail + ledger-correct</a:t>
+            </a:r>
+          </a:p>
+          <a:p xmlns:a="http://schemas.openxmlformats.org/drawingml/2006/main">
+            <a:pPr algn="l">
+              <a:buNone/>
+              <a:defRPr sz="1650" b="1">
                 <a:solidFill>
                   <a:srgbClr val="171714"/>
                 </a:solidFill>
                 <a:latin typeface="Arial"/>
                 <a:ea typeface="Arial"/>
                 <a:cs typeface="Arial"/>
-              </a:rPr>
-              <a:t>Rail + ledger-correct</a:t>
-            </a:r>
-          </a:p>
-          <a:p xmlns:a="http://schemas.openxmlformats.org/drawingml/2006/main">
-            <a:pPr algn="l">
-              <a:defRPr sz="1650" b="1">
-                <a:solidFill>
-                  <a:srgbClr val="171714"/>
-                </a:solidFill>
-                <a:latin typeface="Arial"/>
-                <a:ea typeface="Arial"/>
-                <a:cs typeface="Arial"/>
-              </a:defRPr>
-            </a:pPr>
-            <a:r>
-              <a:rPr sz="1650" b="1">
-                <a:solidFill>
-                  <a:srgbClr val="171714"/>
+              </a:defRPr>
+            </a:pPr>
+            <a:r>
+              <a:rPr sz="1500" b="1">
+                <a:solidFill>
+                  <a:srgbClr val="F1E9DC"/>
                 </a:solidFill>
                 <a:latin typeface="Arial"/>
                 <a:ea typeface="Arial"/>
@@ -8231,11 +8324,12 @@
         </p:spPr>
         <p:txBody>
           <a:bodyPr xmlns:a="http://schemas.openxmlformats.org/drawingml/2006/main" anchor="t">
-            <a:normAutofit fontScale="44769"/>
+            <a:normAutofit fontScale="48839"/>
           </a:bodyPr>
           <a:lstStyle xmlns:a="http://schemas.openxmlformats.org/drawingml/2006/main"/>
           <a:p xmlns:a="http://schemas.openxmlformats.org/drawingml/2006/main">
             <a:pPr algn="ctr">
+              <a:buNone/>
               <a:defRPr sz="1800" b="1">
                 <a:solidFill>
                   <a:srgbClr val="E9652E"/>
@@ -8246,9 +8340,9 @@
               </a:defRPr>
             </a:pPr>
             <a:r>
-              <a:rPr sz="1800" b="1">
-                <a:solidFill>
-                  <a:srgbClr val="E9652E"/>
+              <a:rPr sz="1650" b="1">
+                <a:solidFill>
+                  <a:srgbClr val="E8793D"/>
                 </a:solidFill>
                 <a:latin typeface="Arial"/>
                 <a:ea typeface="Arial"/>
@@ -8284,11 +8378,11 @@
             </a:avLst>
           </a:prstGeom>
           <a:solidFill xmlns:a="http://schemas.openxmlformats.org/drawingml/2006/main">
-            <a:srgbClr val="DFF1E7"/>
+            <a:srgbClr val="20382A"/>
           </a:solidFill>
-          <a:ln xmlns:a="http://schemas.openxmlformats.org/drawingml/2006/main" w="9525">
+          <a:ln xmlns:a="http://schemas.openxmlformats.org/drawingml/2006/main" w="19050">
             <a:solidFill>
-              <a:srgbClr val="176A4B"/>
+              <a:srgbClr val="75B78E"/>
             </a:solidFill>
             <a:prstDash val="solid"/>
           </a:ln>
@@ -8324,11 +8418,12 @@
         </p:spPr>
         <p:txBody>
           <a:bodyPr xmlns:a="http://schemas.openxmlformats.org/drawingml/2006/main" anchor="t">
-            <a:normAutofit fontScale="97619"/>
+            <a:normAutofit fontScale="100000"/>
           </a:bodyPr>
           <a:lstStyle xmlns:a="http://schemas.openxmlformats.org/drawingml/2006/main"/>
           <a:p xmlns:a="http://schemas.openxmlformats.org/drawingml/2006/main">
             <a:pPr algn="l">
+              <a:buNone/>
               <a:defRPr sz="1050" b="1">
                 <a:solidFill>
                   <a:srgbClr val="176A4B"/>
@@ -8339,13 +8434,13 @@
               </a:defRPr>
             </a:pPr>
             <a:r>
-              <a:rPr sz="1050" b="1">
-                <a:solidFill>
-                  <a:srgbClr val="176A4B"/>
-                </a:solidFill>
-                <a:latin typeface="Arial"/>
-                <a:ea typeface="Arial"/>
-                <a:cs typeface="Arial"/>
+              <a:rPr sz="900" b="1">
+                <a:solidFill>
+                  <a:srgbClr val="75B78E"/>
+                </a:solidFill>
+                <a:latin typeface="Menlo"/>
+                <a:ea typeface="Menlo"/>
+                <a:cs typeface="Menlo"/>
               </a:rPr>
               <a:t>DEFEND</a:t>
             </a:r>
@@ -8382,11 +8477,12 @@
         </p:spPr>
         <p:txBody>
           <a:bodyPr xmlns:a="http://schemas.openxmlformats.org/drawingml/2006/main" anchor="t">
-            <a:normAutofit fontScale="91414"/>
+            <a:normAutofit fontScale="100000"/>
           </a:bodyPr>
           <a:lstStyle xmlns:a="http://schemas.openxmlformats.org/drawingml/2006/main"/>
           <a:p xmlns:a="http://schemas.openxmlformats.org/drawingml/2006/main">
             <a:pPr algn="l">
+              <a:buNone/>
               <a:defRPr sz="1650" b="1">
                 <a:solidFill>
                   <a:srgbClr val="171714"/>
@@ -8397,32 +8493,33 @@
               </a:defRPr>
             </a:pPr>
             <a:r>
-              <a:rPr sz="1650" b="1">
+              <a:rPr sz="1500" b="1">
+                <a:solidFill>
+                  <a:srgbClr val="F1E9DC"/>
+                </a:solidFill>
+                <a:latin typeface="Arial"/>
+                <a:ea typeface="Arial"/>
+                <a:cs typeface="Arial"/>
+              </a:rPr>
+              <a:t>Rules + calibrated</a:t>
+            </a:r>
+          </a:p>
+          <a:p xmlns:a="http://schemas.openxmlformats.org/drawingml/2006/main">
+            <a:pPr algn="l">
+              <a:buNone/>
+              <a:defRPr sz="1650" b="1">
                 <a:solidFill>
                   <a:srgbClr val="171714"/>
                 </a:solidFill>
                 <a:latin typeface="Arial"/>
                 <a:ea typeface="Arial"/>
                 <a:cs typeface="Arial"/>
-              </a:rPr>
-              <a:t>Rules + calibrated</a:t>
-            </a:r>
-          </a:p>
-          <a:p xmlns:a="http://schemas.openxmlformats.org/drawingml/2006/main">
-            <a:pPr algn="l">
-              <a:defRPr sz="1650" b="1">
-                <a:solidFill>
-                  <a:srgbClr val="171714"/>
-                </a:solidFill>
-                <a:latin typeface="Arial"/>
-                <a:ea typeface="Arial"/>
-                <a:cs typeface="Arial"/>
-              </a:defRPr>
-            </a:pPr>
-            <a:r>
-              <a:rPr sz="1650" b="1">
-                <a:solidFill>
-                  <a:srgbClr val="171714"/>
+              </a:defRPr>
+            </a:pPr>
+            <a:r>
+              <a:rPr sz="1500" b="1">
+                <a:solidFill>
+                  <a:srgbClr val="F1E9DC"/>
                 </a:solidFill>
                 <a:latin typeface="Arial"/>
                 <a:ea typeface="Arial"/>
@@ -8463,11 +8560,12 @@
         </p:spPr>
         <p:txBody>
           <a:bodyPr xmlns:a="http://schemas.openxmlformats.org/drawingml/2006/main" anchor="t">
-            <a:normAutofit fontScale="44769"/>
+            <a:normAutofit fontScale="48839"/>
           </a:bodyPr>
           <a:lstStyle xmlns:a="http://schemas.openxmlformats.org/drawingml/2006/main"/>
           <a:p xmlns:a="http://schemas.openxmlformats.org/drawingml/2006/main">
             <a:pPr algn="ctr">
+              <a:buNone/>
               <a:defRPr sz="1800" b="1">
                 <a:solidFill>
                   <a:srgbClr val="E9652E"/>
@@ -8478,9 +8576,9 @@
               </a:defRPr>
             </a:pPr>
             <a:r>
-              <a:rPr sz="1800" b="1">
-                <a:solidFill>
-                  <a:srgbClr val="E9652E"/>
+              <a:rPr sz="1650" b="1">
+                <a:solidFill>
+                  <a:srgbClr val="E8793D"/>
                 </a:solidFill>
                 <a:latin typeface="Arial"/>
                 <a:ea typeface="Arial"/>
@@ -8516,11 +8614,11 @@
             </a:avLst>
           </a:prstGeom>
           <a:solidFill xmlns:a="http://schemas.openxmlformats.org/drawingml/2006/main">
-            <a:srgbClr val="DDEBF0"/>
+            <a:srgbClr val="14110D"/>
           </a:solidFill>
           <a:ln xmlns:a="http://schemas.openxmlformats.org/drawingml/2006/main" w="9525">
             <a:solidFill>
-              <a:srgbClr val="255D73"/>
+              <a:srgbClr val="6B5F50"/>
             </a:solidFill>
             <a:prstDash val="solid"/>
           </a:ln>
@@ -8556,11 +8654,12 @@
         </p:spPr>
         <p:txBody>
           <a:bodyPr xmlns:a="http://schemas.openxmlformats.org/drawingml/2006/main" anchor="t">
-            <a:normAutofit fontScale="97619"/>
+            <a:normAutofit fontScale="100000"/>
           </a:bodyPr>
           <a:lstStyle xmlns:a="http://schemas.openxmlformats.org/drawingml/2006/main"/>
           <a:p xmlns:a="http://schemas.openxmlformats.org/drawingml/2006/main">
             <a:pPr algn="l">
+              <a:buNone/>
               <a:defRPr sz="1050" b="1">
                 <a:solidFill>
                   <a:srgbClr val="255D73"/>
@@ -8571,13 +8670,13 @@
               </a:defRPr>
             </a:pPr>
             <a:r>
-              <a:rPr sz="1050" b="1">
-                <a:solidFill>
-                  <a:srgbClr val="255D73"/>
-                </a:solidFill>
-                <a:latin typeface="Arial"/>
-                <a:ea typeface="Arial"/>
-                <a:cs typeface="Arial"/>
+              <a:rPr sz="900" b="1">
+                <a:solidFill>
+                  <a:srgbClr val="F19A68"/>
+                </a:solidFill>
+                <a:latin typeface="Menlo"/>
+                <a:ea typeface="Menlo"/>
+                <a:cs typeface="Menlo"/>
               </a:rPr>
               <a:t>VERIFY</a:t>
             </a:r>
@@ -8614,11 +8713,12 @@
         </p:spPr>
         <p:txBody>
           <a:bodyPr xmlns:a="http://schemas.openxmlformats.org/drawingml/2006/main" anchor="t">
-            <a:normAutofit fontScale="97357"/>
+            <a:normAutofit fontScale="100000"/>
           </a:bodyPr>
           <a:lstStyle xmlns:a="http://schemas.openxmlformats.org/drawingml/2006/main"/>
           <a:p xmlns:a="http://schemas.openxmlformats.org/drawingml/2006/main">
             <a:pPr algn="l">
+              <a:buNone/>
               <a:defRPr sz="1650" b="1">
                 <a:solidFill>
                   <a:srgbClr val="171714"/>
@@ -8629,32 +8729,33 @@
               </a:defRPr>
             </a:pPr>
             <a:r>
-              <a:rPr sz="1650" b="1">
+              <a:rPr sz="1500" b="1">
+                <a:solidFill>
+                  <a:srgbClr val="F1E9DC"/>
+                </a:solidFill>
+                <a:latin typeface="Arial"/>
+                <a:ea typeface="Arial"/>
+                <a:cs typeface="Arial"/>
+              </a:rPr>
+              <a:t>Identity + intent</a:t>
+            </a:r>
+          </a:p>
+          <a:p xmlns:a="http://schemas.openxmlformats.org/drawingml/2006/main">
+            <a:pPr algn="l">
+              <a:buNone/>
+              <a:defRPr sz="1650" b="1">
                 <a:solidFill>
                   <a:srgbClr val="171714"/>
                 </a:solidFill>
                 <a:latin typeface="Arial"/>
                 <a:ea typeface="Arial"/>
                 <a:cs typeface="Arial"/>
-              </a:rPr>
-              <a:t>Identity + intent</a:t>
-            </a:r>
-          </a:p>
-          <a:p xmlns:a="http://schemas.openxmlformats.org/drawingml/2006/main">
-            <a:pPr algn="l">
-              <a:defRPr sz="1650" b="1">
-                <a:solidFill>
-                  <a:srgbClr val="171714"/>
-                </a:solidFill>
-                <a:latin typeface="Arial"/>
-                <a:ea typeface="Arial"/>
-                <a:cs typeface="Arial"/>
-              </a:defRPr>
-            </a:pPr>
-            <a:r>
-              <a:rPr sz="1650" b="1">
-                <a:solidFill>
-                  <a:srgbClr val="171714"/>
+              </a:defRPr>
+            </a:pPr>
+            <a:r>
+              <a:rPr sz="1500" b="1">
+                <a:solidFill>
+                  <a:srgbClr val="F1E9DC"/>
                 </a:solidFill>
                 <a:latin typeface="Arial"/>
                 <a:ea typeface="Arial"/>
@@ -8695,11 +8796,12 @@
         </p:spPr>
         <p:txBody>
           <a:bodyPr xmlns:a="http://schemas.openxmlformats.org/drawingml/2006/main" anchor="t">
-            <a:normAutofit fontScale="44769"/>
+            <a:normAutofit fontScale="48839"/>
           </a:bodyPr>
           <a:lstStyle xmlns:a="http://schemas.openxmlformats.org/drawingml/2006/main"/>
           <a:p xmlns:a="http://schemas.openxmlformats.org/drawingml/2006/main">
             <a:pPr algn="ctr">
+              <a:buNone/>
               <a:defRPr sz="1800" b="1">
                 <a:solidFill>
                   <a:srgbClr val="E9652E"/>
@@ -8710,9 +8812,9 @@
               </a:defRPr>
             </a:pPr>
             <a:r>
-              <a:rPr sz="1800" b="1">
-                <a:solidFill>
-                  <a:srgbClr val="E9652E"/>
+              <a:rPr sz="1650" b="1">
+                <a:solidFill>
+                  <a:srgbClr val="E8793D"/>
                 </a:solidFill>
                 <a:latin typeface="Arial"/>
                 <a:ea typeface="Arial"/>
@@ -8748,11 +8850,11 @@
             </a:avLst>
           </a:prstGeom>
           <a:solidFill xmlns:a="http://schemas.openxmlformats.org/drawingml/2006/main">
-            <a:srgbClr val="EEECE5"/>
+            <a:srgbClr val="14110D"/>
           </a:solidFill>
           <a:ln xmlns:a="http://schemas.openxmlformats.org/drawingml/2006/main" w="9525">
             <a:solidFill>
-              <a:srgbClr val="171714"/>
+              <a:srgbClr val="6B5F50"/>
             </a:solidFill>
             <a:prstDash val="solid"/>
           </a:ln>
@@ -8788,11 +8890,12 @@
         </p:spPr>
         <p:txBody>
           <a:bodyPr xmlns:a="http://schemas.openxmlformats.org/drawingml/2006/main" anchor="t">
-            <a:normAutofit fontScale="97619"/>
+            <a:normAutofit fontScale="100000"/>
           </a:bodyPr>
           <a:lstStyle xmlns:a="http://schemas.openxmlformats.org/drawingml/2006/main"/>
           <a:p xmlns:a="http://schemas.openxmlformats.org/drawingml/2006/main">
             <a:pPr algn="l">
+              <a:buNone/>
               <a:defRPr sz="1050" b="1">
                 <a:solidFill>
                   <a:srgbClr val="171714"/>
@@ -8803,13 +8906,13 @@
               </a:defRPr>
             </a:pPr>
             <a:r>
-              <a:rPr sz="1050" b="1">
-                <a:solidFill>
-                  <a:srgbClr val="171714"/>
-                </a:solidFill>
-                <a:latin typeface="Arial"/>
-                <a:ea typeface="Arial"/>
-                <a:cs typeface="Arial"/>
+              <a:rPr sz="900" b="1">
+                <a:solidFill>
+                  <a:srgbClr val="F19A68"/>
+                </a:solidFill>
+                <a:latin typeface="Menlo"/>
+                <a:ea typeface="Menlo"/>
+                <a:cs typeface="Menlo"/>
               </a:rPr>
               <a:t>GOVERN</a:t>
             </a:r>
@@ -8846,11 +8949,12 @@
         </p:spPr>
         <p:txBody>
           <a:bodyPr xmlns:a="http://schemas.openxmlformats.org/drawingml/2006/main" anchor="t">
-            <a:normAutofit fontScale="91414"/>
+            <a:normAutofit fontScale="100000"/>
           </a:bodyPr>
           <a:lstStyle xmlns:a="http://schemas.openxmlformats.org/drawingml/2006/main"/>
           <a:p xmlns:a="http://schemas.openxmlformats.org/drawingml/2006/main">
             <a:pPr algn="l">
+              <a:buNone/>
               <a:defRPr sz="1650" b="1">
                 <a:solidFill>
                   <a:srgbClr val="171714"/>
@@ -8861,32 +8965,33 @@
               </a:defRPr>
             </a:pPr>
             <a:r>
-              <a:rPr sz="1650" b="1">
+              <a:rPr sz="1500" b="1">
+                <a:solidFill>
+                  <a:srgbClr val="F1E9DC"/>
+                </a:solidFill>
+                <a:latin typeface="Arial"/>
+                <a:ea typeface="Arial"/>
+                <a:cs typeface="Arial"/>
+              </a:rPr>
+              <a:t>Controls + human</a:t>
+            </a:r>
+          </a:p>
+          <a:p xmlns:a="http://schemas.openxmlformats.org/drawingml/2006/main">
+            <a:pPr algn="l">
+              <a:buNone/>
+              <a:defRPr sz="1650" b="1">
                 <a:solidFill>
                   <a:srgbClr val="171714"/>
                 </a:solidFill>
                 <a:latin typeface="Arial"/>
                 <a:ea typeface="Arial"/>
                 <a:cs typeface="Arial"/>
-              </a:rPr>
-              <a:t>Controls + human</a:t>
-            </a:r>
-          </a:p>
-          <a:p xmlns:a="http://schemas.openxmlformats.org/drawingml/2006/main">
-            <a:pPr algn="l">
-              <a:defRPr sz="1650" b="1">
-                <a:solidFill>
-                  <a:srgbClr val="171714"/>
-                </a:solidFill>
-                <a:latin typeface="Arial"/>
-                <a:ea typeface="Arial"/>
-                <a:cs typeface="Arial"/>
-              </a:defRPr>
-            </a:pPr>
-            <a:r>
-              <a:rPr sz="1650" b="1">
-                <a:solidFill>
-                  <a:srgbClr val="171714"/>
+              </a:defRPr>
+            </a:pPr>
+            <a:r>
+              <a:rPr sz="1500" b="1">
+                <a:solidFill>
+                  <a:srgbClr val="F1E9DC"/>
                 </a:solidFill>
                 <a:latin typeface="Arial"/>
                 <a:ea typeface="Arial"/>
@@ -8920,11 +9025,11 @@
             <a:avLst/>
           </a:prstGeom>
           <a:solidFill xmlns:a="http://schemas.openxmlformats.org/drawingml/2006/main">
-            <a:srgbClr val="E9652E"/>
+            <a:srgbClr val="6B5F50"/>
           </a:solidFill>
           <a:ln xmlns:a="http://schemas.openxmlformats.org/drawingml/2006/main" w="0">
             <a:solidFill>
-              <a:srgbClr val="E9652E"/>
+              <a:srgbClr val="6B5F50"/>
             </a:solidFill>
             <a:prstDash val="solid"/>
           </a:ln>
@@ -8953,11 +9058,11 @@
             <a:avLst/>
           </a:prstGeom>
           <a:solidFill xmlns:a="http://schemas.openxmlformats.org/drawingml/2006/main">
-            <a:srgbClr val="E9652E"/>
+            <a:srgbClr val="E8793D"/>
           </a:solidFill>
           <a:ln xmlns:a="http://schemas.openxmlformats.org/drawingml/2006/main" w="0">
             <a:solidFill>
-              <a:srgbClr val="E9652E"/>
+              <a:srgbClr val="E8793D"/>
             </a:solidFill>
             <a:prstDash val="solid"/>
           </a:ln>
@@ -8986,11 +9091,11 @@
             <a:avLst/>
           </a:prstGeom>
           <a:solidFill xmlns:a="http://schemas.openxmlformats.org/drawingml/2006/main">
-            <a:srgbClr val="E9652E"/>
+            <a:srgbClr val="E8793D"/>
           </a:solidFill>
           <a:ln xmlns:a="http://schemas.openxmlformats.org/drawingml/2006/main" w="0">
             <a:solidFill>
-              <a:srgbClr val="E9652E"/>
+              <a:srgbClr val="E8793D"/>
             </a:solidFill>
             <a:prstDash val="solid"/>
           </a:ln>
@@ -9019,11 +9124,11 @@
             <a:avLst/>
           </a:prstGeom>
           <a:solidFill xmlns:a="http://schemas.openxmlformats.org/drawingml/2006/main">
-            <a:srgbClr val="E9652E"/>
+            <a:srgbClr val="E8793D"/>
           </a:solidFill>
           <a:ln xmlns:a="http://schemas.openxmlformats.org/drawingml/2006/main" w="0">
             <a:solidFill>
-              <a:srgbClr val="E9652E"/>
+              <a:srgbClr val="E8793D"/>
             </a:solidFill>
             <a:prstDash val="solid"/>
           </a:ln>
@@ -9052,11 +9157,11 @@
             <a:avLst/>
           </a:prstGeom>
           <a:solidFill xmlns:a="http://schemas.openxmlformats.org/drawingml/2006/main">
-            <a:srgbClr val="E9652E"/>
+            <a:srgbClr val="E8793D"/>
           </a:solidFill>
           <a:ln xmlns:a="http://schemas.openxmlformats.org/drawingml/2006/main" w="0">
             <a:solidFill>
-              <a:srgbClr val="E9652E"/>
+              <a:srgbClr val="E8793D"/>
             </a:solidFill>
             <a:prstDash val="solid"/>
           </a:ln>
@@ -9085,11 +9190,11 @@
             <a:avLst/>
           </a:prstGeom>
           <a:solidFill xmlns:a="http://schemas.openxmlformats.org/drawingml/2006/main">
-            <a:srgbClr val="E9652E"/>
+            <a:srgbClr val="E8793D"/>
           </a:solidFill>
           <a:ln xmlns:a="http://schemas.openxmlformats.org/drawingml/2006/main" w="0">
             <a:solidFill>
-              <a:srgbClr val="E9652E"/>
+              <a:srgbClr val="E8793D"/>
             </a:solidFill>
             <a:prstDash val="solid"/>
           </a:ln>
@@ -9125,11 +9230,12 @@
         </p:spPr>
         <p:txBody>
           <a:bodyPr xmlns:a="http://schemas.openxmlformats.org/drawingml/2006/main" anchor="t">
-            <a:normAutofit fontScale="96016"/>
+            <a:normAutofit fontScale="100000"/>
           </a:bodyPr>
           <a:lstStyle xmlns:a="http://schemas.openxmlformats.org/drawingml/2006/main"/>
           <a:p xmlns:a="http://schemas.openxmlformats.org/drawingml/2006/main">
             <a:pPr algn="ctr">
+              <a:buNone/>
               <a:defRPr sz="1650" b="0">
                 <a:solidFill>
                   <a:srgbClr val="686863"/>
@@ -9140,9 +9246,9 @@
               </a:defRPr>
             </a:pPr>
             <a:r>
-              <a:rPr sz="1650" b="0">
-                <a:solidFill>
-                  <a:srgbClr val="686863"/>
+              <a:rPr sz="1425" b="0">
+                <a:solidFill>
+                  <a:srgbClr val="C8BDAE"/>
                 </a:solidFill>
                 <a:latin typeface="Arial"/>
                 <a:ea typeface="Arial"/>
@@ -9169,7 +9275,7 @@
     <p:bg>
       <p:bgPr>
         <a:solidFill xmlns:a="http://schemas.openxmlformats.org/drawingml/2006/main">
-          <a:srgbClr val="F8F7F3"/>
+          <a:srgbClr val="0A0907"/>
         </a:solidFill>
       </p:bgPr>
     </p:bg>
@@ -9217,6 +9323,7 @@
           <a:lstStyle xmlns:a="http://schemas.openxmlformats.org/drawingml/2006/main"/>
           <a:p xmlns:a="http://schemas.openxmlformats.org/drawingml/2006/main">
             <a:pPr algn="l">
+              <a:buNone/>
               <a:defRPr sz="975" b="1">
                 <a:solidFill>
                   <a:srgbClr val="E9652E"/>
@@ -9227,13 +9334,13 @@
               </a:defRPr>
             </a:pPr>
             <a:r>
-              <a:rPr sz="975" b="1">
-                <a:solidFill>
-                  <a:srgbClr val="E9652E"/>
-                </a:solidFill>
-                <a:latin typeface="Arial"/>
-                <a:ea typeface="Arial"/>
-                <a:cs typeface="Arial"/>
+              <a:rPr sz="825" b="1">
+                <a:solidFill>
+                  <a:srgbClr val="F19A68"/>
+                </a:solidFill>
+                <a:latin typeface="Menlo"/>
+                <a:ea typeface="Menlo"/>
+                <a:cs typeface="Menlo"/>
               </a:rPr>
               <a:t>ADAPTIVE PAYMENT ASSURANCE RANGE</a:t>
             </a:r>
@@ -9275,6 +9382,7 @@
           <a:lstStyle xmlns:a="http://schemas.openxmlformats.org/drawingml/2006/main"/>
           <a:p xmlns:a="http://schemas.openxmlformats.org/drawingml/2006/main">
             <a:pPr algn="l">
+              <a:buNone/>
               <a:defRPr sz="2850" b="1">
                 <a:solidFill>
                   <a:srgbClr val="171714"/>
@@ -9285,13 +9393,13 @@
               </a:defRPr>
             </a:pPr>
             <a:r>
-              <a:rPr sz="2850" b="1">
-                <a:solidFill>
-                  <a:srgbClr val="171714"/>
-                </a:solidFill>
-                <a:latin typeface="Arial"/>
-                <a:ea typeface="Arial"/>
-                <a:cs typeface="Arial"/>
+              <a:rPr sz="2925" b="0">
+                <a:solidFill>
+                  <a:srgbClr val="F1E9DC"/>
+                </a:solidFill>
+                <a:latin typeface="Georgia"/>
+                <a:ea typeface="Georgia"/>
+                <a:cs typeface="Georgia"/>
               </a:rPr>
               <a:t>Failed experiments shaped the winning architecture</a:t>
             </a:r>
@@ -9328,11 +9436,12 @@
         </p:spPr>
         <p:txBody>
           <a:bodyPr xmlns:a="http://schemas.openxmlformats.org/drawingml/2006/main" anchor="t">
-            <a:normAutofit fontScale="79487"/>
+            <a:normAutofit fontScale="93939"/>
           </a:bodyPr>
           <a:lstStyle xmlns:a="http://schemas.openxmlformats.org/drawingml/2006/main"/>
           <a:p xmlns:a="http://schemas.openxmlformats.org/drawingml/2006/main">
             <a:pPr algn="r">
+              <a:buNone/>
               <a:defRPr sz="975" b="0">
                 <a:solidFill>
                   <a:srgbClr val="686863"/>
@@ -9343,13 +9452,13 @@
               </a:defRPr>
             </a:pPr>
             <a:r>
-              <a:rPr sz="975" b="0">
-                <a:solidFill>
-                  <a:srgbClr val="686863"/>
-                </a:solidFill>
-                <a:latin typeface="Arial"/>
-                <a:ea typeface="Arial"/>
-                <a:cs typeface="Arial"/>
+              <a:rPr sz="825" b="0">
+                <a:solidFill>
+                  <a:srgbClr val="9C9183"/>
+                </a:solidFill>
+                <a:latin typeface="Menlo"/>
+                <a:ea typeface="Menlo"/>
+                <a:cs typeface="Menlo"/>
               </a:rPr>
               <a:t>04</a:t>
             </a:r>
@@ -9379,11 +9488,11 @@
             <a:avLst/>
           </a:prstGeom>
           <a:solidFill xmlns:a="http://schemas.openxmlformats.org/drawingml/2006/main">
-            <a:srgbClr val="D7D6CF"/>
+            <a:srgbClr val="3F382E"/>
           </a:solidFill>
           <a:ln xmlns:a="http://schemas.openxmlformats.org/drawingml/2006/main" w="0">
             <a:solidFill>
-              <a:srgbClr val="D7D6CF"/>
+              <a:srgbClr val="3F382E"/>
             </a:solidFill>
             <a:prstDash val="solid"/>
           </a:ln>
@@ -9412,11 +9521,11 @@
             <a:avLst/>
           </a:prstGeom>
           <a:solidFill xmlns:a="http://schemas.openxmlformats.org/drawingml/2006/main">
-            <a:srgbClr val="D7D6CF"/>
+            <a:srgbClr val="6B5F50"/>
           </a:solidFill>
           <a:ln xmlns:a="http://schemas.openxmlformats.org/drawingml/2006/main" w="0">
             <a:solidFill>
-              <a:srgbClr val="D7D6CF"/>
+              <a:srgbClr val="6B5F50"/>
             </a:solidFill>
             <a:prstDash val="solid"/>
           </a:ln>
@@ -9447,11 +9556,11 @@
             </a:avLst>
           </a:prstGeom>
           <a:solidFill xmlns:a="http://schemas.openxmlformats.org/drawingml/2006/main">
-            <a:srgbClr val="FFFFFF"/>
+            <a:srgbClr val="14110D"/>
           </a:solidFill>
           <a:ln xmlns:a="http://schemas.openxmlformats.org/drawingml/2006/main" w="9525">
             <a:solidFill>
-              <a:srgbClr val="D7D6CF"/>
+              <a:srgbClr val="6B5F50"/>
             </a:solidFill>
             <a:prstDash val="solid"/>
           </a:ln>
@@ -9487,11 +9596,12 @@
         </p:spPr>
         <p:txBody>
           <a:bodyPr xmlns:a="http://schemas.openxmlformats.org/drawingml/2006/main" anchor="t">
-            <a:normAutofit fontScale="85714"/>
+            <a:normAutofit fontScale="100000"/>
           </a:bodyPr>
           <a:lstStyle xmlns:a="http://schemas.openxmlformats.org/drawingml/2006/main"/>
           <a:p xmlns:a="http://schemas.openxmlformats.org/drawingml/2006/main">
             <a:pPr algn="l">
+              <a:buNone/>
               <a:defRPr sz="1050" b="1">
                 <a:solidFill>
                   <a:srgbClr val="E9652E"/>
@@ -9502,13 +9612,13 @@
               </a:defRPr>
             </a:pPr>
             <a:r>
-              <a:rPr sz="1050" b="1">
-                <a:solidFill>
-                  <a:srgbClr val="E9652E"/>
-                </a:solidFill>
-                <a:latin typeface="Arial"/>
-                <a:ea typeface="Arial"/>
-                <a:cs typeface="Arial"/>
+              <a:rPr sz="900" b="1">
+                <a:solidFill>
+                  <a:srgbClr val="F19A68"/>
+                </a:solidFill>
+                <a:latin typeface="Menlo"/>
+                <a:ea typeface="Menlo"/>
+                <a:cs typeface="Menlo"/>
               </a:rPr>
               <a:t>V1</a:t>
             </a:r>
@@ -9545,11 +9655,12 @@
         </p:spPr>
         <p:txBody>
           <a:bodyPr xmlns:a="http://schemas.openxmlformats.org/drawingml/2006/main" anchor="t">
-            <a:normAutofit fontScale="93514"/>
+            <a:normAutofit fontScale="99015"/>
           </a:bodyPr>
           <a:lstStyle xmlns:a="http://schemas.openxmlformats.org/drawingml/2006/main"/>
           <a:p xmlns:a="http://schemas.openxmlformats.org/drawingml/2006/main">
             <a:pPr algn="l">
+              <a:buNone/>
               <a:defRPr sz="1350" b="1">
                 <a:solidFill>
                   <a:srgbClr val="171714"/>
@@ -9560,9 +9671,9 @@
               </a:defRPr>
             </a:pPr>
             <a:r>
-              <a:rPr sz="1350" b="1">
-                <a:solidFill>
-                  <a:srgbClr val="171714"/>
+              <a:rPr sz="1275" b="1">
+                <a:solidFill>
+                  <a:srgbClr val="F1E9DC"/>
                 </a:solidFill>
                 <a:latin typeface="Arial"/>
                 <a:ea typeface="Arial"/>
@@ -9608,6 +9719,7 @@
           <a:lstStyle xmlns:a="http://schemas.openxmlformats.org/drawingml/2006/main"/>
           <a:p xmlns:a="http://schemas.openxmlformats.org/drawingml/2006/main">
             <a:pPr algn="l">
+              <a:buNone/>
               <a:defRPr sz="1125" b="0">
                 <a:solidFill>
                   <a:srgbClr val="686863"/>
@@ -9618,32 +9730,33 @@
               </a:defRPr>
             </a:pPr>
             <a:r>
-              <a:rPr sz="1125" b="0">
+              <a:rPr sz="1050" b="0">
+                <a:solidFill>
+                  <a:srgbClr val="9C9183"/>
+                </a:solidFill>
+                <a:latin typeface="Arial"/>
+                <a:ea typeface="Arial"/>
+                <a:cs typeface="Arial"/>
+              </a:rPr>
+              <a:t>1.7857% review floor</a:t>
+            </a:r>
+          </a:p>
+          <a:p xmlns:a="http://schemas.openxmlformats.org/drawingml/2006/main">
+            <a:pPr algn="l">
+              <a:buNone/>
+              <a:defRPr sz="1125" b="0">
                 <a:solidFill>
                   <a:srgbClr val="686863"/>
                 </a:solidFill>
                 <a:latin typeface="Arial"/>
                 <a:ea typeface="Arial"/>
                 <a:cs typeface="Arial"/>
-              </a:rPr>
-              <a:t>1.7857% review floor</a:t>
-            </a:r>
-          </a:p>
-          <a:p xmlns:a="http://schemas.openxmlformats.org/drawingml/2006/main">
-            <a:pPr algn="l">
-              <a:defRPr sz="1125" b="0">
-                <a:solidFill>
-                  <a:srgbClr val="686863"/>
-                </a:solidFill>
-                <a:latin typeface="Arial"/>
-                <a:ea typeface="Arial"/>
-                <a:cs typeface="Arial"/>
-              </a:defRPr>
-            </a:pPr>
-            <a:r>
-              <a:rPr sz="1125" b="0">
-                <a:solidFill>
-                  <a:srgbClr val="686863"/>
+              </a:defRPr>
+            </a:pPr>
+            <a:r>
+              <a:rPr sz="1050" b="0">
+                <a:solidFill>
+                  <a:srgbClr val="9C9183"/>
                 </a:solidFill>
                 <a:latin typeface="Arial"/>
                 <a:ea typeface="Arial"/>
@@ -9677,11 +9790,11 @@
             <a:avLst/>
           </a:prstGeom>
           <a:solidFill xmlns:a="http://schemas.openxmlformats.org/drawingml/2006/main">
-            <a:srgbClr val="E9652E"/>
+            <a:srgbClr val="E8793D"/>
           </a:solidFill>
-          <a:ln xmlns:a="http://schemas.openxmlformats.org/drawingml/2006/main" w="28575">
+          <a:ln xmlns:a="http://schemas.openxmlformats.org/drawingml/2006/main" w="19050">
             <a:solidFill>
-              <a:srgbClr val="F8F7F3"/>
+              <a:srgbClr val="0A0907"/>
             </a:solidFill>
             <a:prstDash val="solid"/>
           </a:ln>
@@ -9712,11 +9825,11 @@
             </a:avLst>
           </a:prstGeom>
           <a:solidFill xmlns:a="http://schemas.openxmlformats.org/drawingml/2006/main">
-            <a:srgbClr val="FFFFFF"/>
+            <a:srgbClr val="14110D"/>
           </a:solidFill>
           <a:ln xmlns:a="http://schemas.openxmlformats.org/drawingml/2006/main" w="9525">
             <a:solidFill>
-              <a:srgbClr val="D7D6CF"/>
+              <a:srgbClr val="6B5F50"/>
             </a:solidFill>
             <a:prstDash val="solid"/>
           </a:ln>
@@ -9752,11 +9865,12 @@
         </p:spPr>
         <p:txBody>
           <a:bodyPr xmlns:a="http://schemas.openxmlformats.org/drawingml/2006/main" anchor="t">
-            <a:normAutofit fontScale="85714"/>
+            <a:normAutofit fontScale="100000"/>
           </a:bodyPr>
           <a:lstStyle xmlns:a="http://schemas.openxmlformats.org/drawingml/2006/main"/>
           <a:p xmlns:a="http://schemas.openxmlformats.org/drawingml/2006/main">
             <a:pPr algn="l">
+              <a:buNone/>
               <a:defRPr sz="1050" b="1">
                 <a:solidFill>
                   <a:srgbClr val="E9652E"/>
@@ -9767,13 +9881,13 @@
               </a:defRPr>
             </a:pPr>
             <a:r>
-              <a:rPr sz="1050" b="1">
-                <a:solidFill>
-                  <a:srgbClr val="E9652E"/>
-                </a:solidFill>
-                <a:latin typeface="Arial"/>
-                <a:ea typeface="Arial"/>
-                <a:cs typeface="Arial"/>
+              <a:rPr sz="900" b="1">
+                <a:solidFill>
+                  <a:srgbClr val="F19A68"/>
+                </a:solidFill>
+                <a:latin typeface="Menlo"/>
+                <a:ea typeface="Menlo"/>
+                <a:cs typeface="Menlo"/>
               </a:rPr>
               <a:t>V4</a:t>
             </a:r>
@@ -9810,11 +9924,12 @@
         </p:spPr>
         <p:txBody>
           <a:bodyPr xmlns:a="http://schemas.openxmlformats.org/drawingml/2006/main" anchor="t">
-            <a:normAutofit fontScale="65741"/>
+            <a:normAutofit fontScale="69608"/>
           </a:bodyPr>
           <a:lstStyle xmlns:a="http://schemas.openxmlformats.org/drawingml/2006/main"/>
           <a:p xmlns:a="http://schemas.openxmlformats.org/drawingml/2006/main">
             <a:pPr algn="l">
+              <a:buNone/>
               <a:defRPr sz="1350" b="1">
                 <a:solidFill>
                   <a:srgbClr val="171714"/>
@@ -9825,9 +9940,9 @@
               </a:defRPr>
             </a:pPr>
             <a:r>
-              <a:rPr sz="1350" b="1">
-                <a:solidFill>
-                  <a:srgbClr val="171714"/>
+              <a:rPr sz="1275" b="1">
+                <a:solidFill>
+                  <a:srgbClr val="F1E9DC"/>
                 </a:solidFill>
                 <a:latin typeface="Arial"/>
                 <a:ea typeface="Arial"/>
@@ -9873,6 +9988,7 @@
           <a:lstStyle xmlns:a="http://schemas.openxmlformats.org/drawingml/2006/main"/>
           <a:p xmlns:a="http://schemas.openxmlformats.org/drawingml/2006/main">
             <a:pPr algn="l">
+              <a:buNone/>
               <a:defRPr sz="1125" b="0">
                 <a:solidFill>
                   <a:srgbClr val="686863"/>
@@ -9883,32 +9999,33 @@
               </a:defRPr>
             </a:pPr>
             <a:r>
-              <a:rPr sz="1125" b="0">
+              <a:rPr sz="1050" b="0">
+                <a:solidFill>
+                  <a:srgbClr val="9C9183"/>
+                </a:solidFill>
+                <a:latin typeface="Arial"/>
+                <a:ea typeface="Arial"/>
+                <a:cs typeface="Arial"/>
+              </a:rPr>
+              <a:t>Calibration + alert time</a:t>
+            </a:r>
+          </a:p>
+          <a:p xmlns:a="http://schemas.openxmlformats.org/drawingml/2006/main">
+            <a:pPr algn="l">
+              <a:buNone/>
+              <a:defRPr sz="1125" b="0">
                 <a:solidFill>
                   <a:srgbClr val="686863"/>
                 </a:solidFill>
                 <a:latin typeface="Arial"/>
                 <a:ea typeface="Arial"/>
                 <a:cs typeface="Arial"/>
-              </a:rPr>
-              <a:t>Calibration + alert time</a:t>
-            </a:r>
-          </a:p>
-          <a:p xmlns:a="http://schemas.openxmlformats.org/drawingml/2006/main">
-            <a:pPr algn="l">
-              <a:defRPr sz="1125" b="0">
-                <a:solidFill>
-                  <a:srgbClr val="686863"/>
-                </a:solidFill>
-                <a:latin typeface="Arial"/>
-                <a:ea typeface="Arial"/>
-                <a:cs typeface="Arial"/>
-              </a:defRPr>
-            </a:pPr>
-            <a:r>
-              <a:rPr sz="1125" b="0">
-                <a:solidFill>
-                  <a:srgbClr val="686863"/>
+              </a:defRPr>
+            </a:pPr>
+            <a:r>
+              <a:rPr sz="1050" b="0">
+                <a:solidFill>
+                  <a:srgbClr val="9C9183"/>
                 </a:solidFill>
                 <a:latin typeface="Arial"/>
                 <a:ea typeface="Arial"/>
@@ -9942,11 +10059,11 @@
             <a:avLst/>
           </a:prstGeom>
           <a:solidFill xmlns:a="http://schemas.openxmlformats.org/drawingml/2006/main">
-            <a:srgbClr val="E9652E"/>
+            <a:srgbClr val="E8793D"/>
           </a:solidFill>
-          <a:ln xmlns:a="http://schemas.openxmlformats.org/drawingml/2006/main" w="28575">
+          <a:ln xmlns:a="http://schemas.openxmlformats.org/drawingml/2006/main" w="19050">
             <a:solidFill>
-              <a:srgbClr val="F8F7F3"/>
+              <a:srgbClr val="0A0907"/>
             </a:solidFill>
             <a:prstDash val="solid"/>
           </a:ln>
@@ -9977,11 +10094,11 @@
             </a:avLst>
           </a:prstGeom>
           <a:solidFill xmlns:a="http://schemas.openxmlformats.org/drawingml/2006/main">
-            <a:srgbClr val="FFFFFF"/>
+            <a:srgbClr val="14110D"/>
           </a:solidFill>
           <a:ln xmlns:a="http://schemas.openxmlformats.org/drawingml/2006/main" w="9525">
             <a:solidFill>
-              <a:srgbClr val="D7D6CF"/>
+              <a:srgbClr val="6B5F50"/>
             </a:solidFill>
             <a:prstDash val="solid"/>
           </a:ln>
@@ -10017,11 +10134,12 @@
         </p:spPr>
         <p:txBody>
           <a:bodyPr xmlns:a="http://schemas.openxmlformats.org/drawingml/2006/main" anchor="t">
-            <a:normAutofit fontScale="85714"/>
+            <a:normAutofit fontScale="100000"/>
           </a:bodyPr>
           <a:lstStyle xmlns:a="http://schemas.openxmlformats.org/drawingml/2006/main"/>
           <a:p xmlns:a="http://schemas.openxmlformats.org/drawingml/2006/main">
             <a:pPr algn="l">
+              <a:buNone/>
               <a:defRPr sz="1050" b="1">
                 <a:solidFill>
                   <a:srgbClr val="E9652E"/>
@@ -10032,13 +10150,13 @@
               </a:defRPr>
             </a:pPr>
             <a:r>
-              <a:rPr sz="1050" b="1">
-                <a:solidFill>
-                  <a:srgbClr val="E9652E"/>
-                </a:solidFill>
-                <a:latin typeface="Arial"/>
-                <a:ea typeface="Arial"/>
-                <a:cs typeface="Arial"/>
+              <a:rPr sz="900" b="1">
+                <a:solidFill>
+                  <a:srgbClr val="F19A68"/>
+                </a:solidFill>
+                <a:latin typeface="Menlo"/>
+                <a:ea typeface="Menlo"/>
+                <a:cs typeface="Menlo"/>
               </a:rPr>
               <a:t>V5a</a:t>
             </a:r>
@@ -10075,11 +10193,12 @@
         </p:spPr>
         <p:txBody>
           <a:bodyPr xmlns:a="http://schemas.openxmlformats.org/drawingml/2006/main" anchor="t">
-            <a:normAutofit fontScale="84192"/>
+            <a:normAutofit fontScale="89050"/>
           </a:bodyPr>
           <a:lstStyle xmlns:a="http://schemas.openxmlformats.org/drawingml/2006/main"/>
           <a:p xmlns:a="http://schemas.openxmlformats.org/drawingml/2006/main">
             <a:pPr algn="l">
+              <a:buNone/>
               <a:defRPr sz="1350" b="1">
                 <a:solidFill>
                   <a:srgbClr val="171714"/>
@@ -10090,9 +10209,9 @@
               </a:defRPr>
             </a:pPr>
             <a:r>
-              <a:rPr sz="1350" b="1">
-                <a:solidFill>
-                  <a:srgbClr val="171714"/>
+              <a:rPr sz="1275" b="1">
+                <a:solidFill>
+                  <a:srgbClr val="F1E9DC"/>
                 </a:solidFill>
                 <a:latin typeface="Arial"/>
                 <a:ea typeface="Arial"/>
@@ -10138,6 +10257,7 @@
           <a:lstStyle xmlns:a="http://schemas.openxmlformats.org/drawingml/2006/main"/>
           <a:p xmlns:a="http://schemas.openxmlformats.org/drawingml/2006/main">
             <a:pPr algn="l">
+              <a:buNone/>
               <a:defRPr sz="1125" b="0">
                 <a:solidFill>
                   <a:srgbClr val="686863"/>
@@ -10148,32 +10268,33 @@
               </a:defRPr>
             </a:pPr>
             <a:r>
-              <a:rPr sz="1125" b="0">
+              <a:rPr sz="1050" b="0">
+                <a:solidFill>
+                  <a:srgbClr val="9C9183"/>
+                </a:solidFill>
+                <a:latin typeface="Arial"/>
+                <a:ea typeface="Arial"/>
+                <a:cs typeface="Arial"/>
+              </a:rPr>
+              <a:t>Future graph leakage</a:t>
+            </a:r>
+          </a:p>
+          <a:p xmlns:a="http://schemas.openxmlformats.org/drawingml/2006/main">
+            <a:pPr algn="l">
+              <a:buNone/>
+              <a:defRPr sz="1125" b="0">
                 <a:solidFill>
                   <a:srgbClr val="686863"/>
                 </a:solidFill>
                 <a:latin typeface="Arial"/>
                 <a:ea typeface="Arial"/>
                 <a:cs typeface="Arial"/>
-              </a:rPr>
-              <a:t>Future graph leakage</a:t>
-            </a:r>
-          </a:p>
-          <a:p xmlns:a="http://schemas.openxmlformats.org/drawingml/2006/main">
-            <a:pPr algn="l">
-              <a:defRPr sz="1125" b="0">
-                <a:solidFill>
-                  <a:srgbClr val="686863"/>
-                </a:solidFill>
-                <a:latin typeface="Arial"/>
-                <a:ea typeface="Arial"/>
-                <a:cs typeface="Arial"/>
-              </a:defRPr>
-            </a:pPr>
-            <a:r>
-              <a:rPr sz="1125" b="0">
-                <a:solidFill>
-                  <a:srgbClr val="686863"/>
+              </a:defRPr>
+            </a:pPr>
+            <a:r>
+              <a:rPr sz="1050" b="0">
+                <a:solidFill>
+                  <a:srgbClr val="9C9183"/>
                 </a:solidFill>
                 <a:latin typeface="Arial"/>
                 <a:ea typeface="Arial"/>
@@ -10207,11 +10328,11 @@
             <a:avLst/>
           </a:prstGeom>
           <a:solidFill xmlns:a="http://schemas.openxmlformats.org/drawingml/2006/main">
-            <a:srgbClr val="E9652E"/>
+            <a:srgbClr val="E8793D"/>
           </a:solidFill>
-          <a:ln xmlns:a="http://schemas.openxmlformats.org/drawingml/2006/main" w="28575">
+          <a:ln xmlns:a="http://schemas.openxmlformats.org/drawingml/2006/main" w="19050">
             <a:solidFill>
-              <a:srgbClr val="F8F7F3"/>
+              <a:srgbClr val="0A0907"/>
             </a:solidFill>
             <a:prstDash val="solid"/>
           </a:ln>
@@ -10242,11 +10363,11 @@
             </a:avLst>
           </a:prstGeom>
           <a:solidFill xmlns:a="http://schemas.openxmlformats.org/drawingml/2006/main">
-            <a:srgbClr val="FFFFFF"/>
+            <a:srgbClr val="14110D"/>
           </a:solidFill>
           <a:ln xmlns:a="http://schemas.openxmlformats.org/drawingml/2006/main" w="9525">
             <a:solidFill>
-              <a:srgbClr val="D7D6CF"/>
+              <a:srgbClr val="6B5F50"/>
             </a:solidFill>
             <a:prstDash val="solid"/>
           </a:ln>
@@ -10282,11 +10403,12 @@
         </p:spPr>
         <p:txBody>
           <a:bodyPr xmlns:a="http://schemas.openxmlformats.org/drawingml/2006/main" anchor="t">
-            <a:normAutofit fontScale="85714"/>
+            <a:normAutofit fontScale="100000"/>
           </a:bodyPr>
           <a:lstStyle xmlns:a="http://schemas.openxmlformats.org/drawingml/2006/main"/>
           <a:p xmlns:a="http://schemas.openxmlformats.org/drawingml/2006/main">
             <a:pPr algn="l">
+              <a:buNone/>
               <a:defRPr sz="1050" b="1">
                 <a:solidFill>
                   <a:srgbClr val="E9652E"/>
@@ -10297,13 +10419,13 @@
               </a:defRPr>
             </a:pPr>
             <a:r>
-              <a:rPr sz="1050" b="1">
-                <a:solidFill>
-                  <a:srgbClr val="E9652E"/>
-                </a:solidFill>
-                <a:latin typeface="Arial"/>
-                <a:ea typeface="Arial"/>
-                <a:cs typeface="Arial"/>
+              <a:rPr sz="900" b="1">
+                <a:solidFill>
+                  <a:srgbClr val="F19A68"/>
+                </a:solidFill>
+                <a:latin typeface="Menlo"/>
+                <a:ea typeface="Menlo"/>
+                <a:cs typeface="Menlo"/>
               </a:rPr>
               <a:t>V5b</a:t>
             </a:r>
@@ -10345,6 +10467,7 @@
           <a:lstStyle xmlns:a="http://schemas.openxmlformats.org/drawingml/2006/main"/>
           <a:p xmlns:a="http://schemas.openxmlformats.org/drawingml/2006/main">
             <a:pPr algn="l">
+              <a:buNone/>
               <a:defRPr sz="1350" b="1">
                 <a:solidFill>
                   <a:srgbClr val="171714"/>
@@ -10355,9 +10478,9 @@
               </a:defRPr>
             </a:pPr>
             <a:r>
-              <a:rPr sz="1350" b="1">
-                <a:solidFill>
-                  <a:srgbClr val="171714"/>
+              <a:rPr sz="1275" b="1">
+                <a:solidFill>
+                  <a:srgbClr val="F1E9DC"/>
                 </a:solidFill>
                 <a:latin typeface="Arial"/>
                 <a:ea typeface="Arial"/>
@@ -10398,11 +10521,12 @@
         </p:spPr>
         <p:txBody>
           <a:bodyPr xmlns:a="http://schemas.openxmlformats.org/drawingml/2006/main" anchor="t">
-            <a:normAutofit fontScale="92810"/>
+            <a:normAutofit fontScale="99439"/>
           </a:bodyPr>
           <a:lstStyle xmlns:a="http://schemas.openxmlformats.org/drawingml/2006/main"/>
           <a:p xmlns:a="http://schemas.openxmlformats.org/drawingml/2006/main">
             <a:pPr algn="l">
+              <a:buNone/>
               <a:defRPr sz="1125" b="0">
                 <a:solidFill>
                   <a:srgbClr val="686863"/>
@@ -10413,32 +10537,33 @@
               </a:defRPr>
             </a:pPr>
             <a:r>
-              <a:rPr sz="1125" b="0">
+              <a:rPr sz="1050" b="0">
+                <a:solidFill>
+                  <a:srgbClr val="9C9183"/>
+                </a:solidFill>
+                <a:latin typeface="Arial"/>
+                <a:ea typeface="Arial"/>
+                <a:cs typeface="Arial"/>
+              </a:rPr>
+              <a:t>Generator → simulator →</a:t>
+            </a:r>
+          </a:p>
+          <a:p xmlns:a="http://schemas.openxmlformats.org/drawingml/2006/main">
+            <a:pPr algn="l">
+              <a:buNone/>
+              <a:defRPr sz="1125" b="0">
                 <a:solidFill>
                   <a:srgbClr val="686863"/>
                 </a:solidFill>
                 <a:latin typeface="Arial"/>
                 <a:ea typeface="Arial"/>
                 <a:cs typeface="Arial"/>
-              </a:rPr>
-              <a:t>Generator → simulator →</a:t>
-            </a:r>
-          </a:p>
-          <a:p xmlns:a="http://schemas.openxmlformats.org/drawingml/2006/main">
-            <a:pPr algn="l">
-              <a:defRPr sz="1125" b="0">
-                <a:solidFill>
-                  <a:srgbClr val="686863"/>
-                </a:solidFill>
-                <a:latin typeface="Arial"/>
-                <a:ea typeface="Arial"/>
-                <a:cs typeface="Arial"/>
-              </a:defRPr>
-            </a:pPr>
-            <a:r>
-              <a:rPr sz="1125" b="0">
-                <a:solidFill>
-                  <a:srgbClr val="686863"/>
+              </a:defRPr>
+            </a:pPr>
+            <a:r>
+              <a:rPr sz="1050" b="0">
+                <a:solidFill>
+                  <a:srgbClr val="9C9183"/>
                 </a:solidFill>
                 <a:latin typeface="Arial"/>
                 <a:ea typeface="Arial"/>
@@ -10472,11 +10597,11 @@
             <a:avLst/>
           </a:prstGeom>
           <a:solidFill xmlns:a="http://schemas.openxmlformats.org/drawingml/2006/main">
-            <a:srgbClr val="E9652E"/>
+            <a:srgbClr val="E8793D"/>
           </a:solidFill>
-          <a:ln xmlns:a="http://schemas.openxmlformats.org/drawingml/2006/main" w="28575">
+          <a:ln xmlns:a="http://schemas.openxmlformats.org/drawingml/2006/main" w="19050">
             <a:solidFill>
-              <a:srgbClr val="F8F7F3"/>
+              <a:srgbClr val="0A0907"/>
             </a:solidFill>
             <a:prstDash val="solid"/>
           </a:ln>
@@ -10507,11 +10632,11 @@
             </a:avLst>
           </a:prstGeom>
           <a:solidFill xmlns:a="http://schemas.openxmlformats.org/drawingml/2006/main">
-            <a:srgbClr val="DFF1E7"/>
+            <a:srgbClr val="20382A"/>
           </a:solidFill>
-          <a:ln xmlns:a="http://schemas.openxmlformats.org/drawingml/2006/main" w="9525">
+          <a:ln xmlns:a="http://schemas.openxmlformats.org/drawingml/2006/main" w="19050">
             <a:solidFill>
-              <a:srgbClr val="176A4B"/>
+              <a:srgbClr val="75B78E"/>
             </a:solidFill>
             <a:prstDash val="solid"/>
           </a:ln>
@@ -10547,11 +10672,12 @@
         </p:spPr>
         <p:txBody>
           <a:bodyPr xmlns:a="http://schemas.openxmlformats.org/drawingml/2006/main" anchor="t">
-            <a:normAutofit fontScale="85714"/>
+            <a:normAutofit fontScale="100000"/>
           </a:bodyPr>
           <a:lstStyle xmlns:a="http://schemas.openxmlformats.org/drawingml/2006/main"/>
           <a:p xmlns:a="http://schemas.openxmlformats.org/drawingml/2006/main">
             <a:pPr algn="l">
+              <a:buNone/>
               <a:defRPr sz="1050" b="1">
                 <a:solidFill>
                   <a:srgbClr val="176A4B"/>
@@ -10562,13 +10688,13 @@
               </a:defRPr>
             </a:pPr>
             <a:r>
-              <a:rPr sz="1050" b="1">
-                <a:solidFill>
-                  <a:srgbClr val="176A4B"/>
-                </a:solidFill>
-                <a:latin typeface="Arial"/>
-                <a:ea typeface="Arial"/>
-                <a:cs typeface="Arial"/>
+              <a:rPr sz="900" b="1">
+                <a:solidFill>
+                  <a:srgbClr val="75B78E"/>
+                </a:solidFill>
+                <a:latin typeface="Menlo"/>
+                <a:ea typeface="Menlo"/>
+                <a:cs typeface="Menlo"/>
               </a:rPr>
               <a:t>V5c</a:t>
             </a:r>
@@ -10605,11 +10731,12 @@
         </p:spPr>
         <p:txBody>
           <a:bodyPr xmlns:a="http://schemas.openxmlformats.org/drawingml/2006/main" anchor="t">
-            <a:normAutofit fontScale="94253"/>
+            <a:normAutofit fontScale="99797"/>
           </a:bodyPr>
           <a:lstStyle xmlns:a="http://schemas.openxmlformats.org/drawingml/2006/main"/>
           <a:p xmlns:a="http://schemas.openxmlformats.org/drawingml/2006/main">
             <a:pPr algn="l">
+              <a:buNone/>
               <a:defRPr sz="1350" b="1">
                 <a:solidFill>
                   <a:srgbClr val="171714"/>
@@ -10620,9 +10747,9 @@
               </a:defRPr>
             </a:pPr>
             <a:r>
-              <a:rPr sz="1350" b="1">
-                <a:solidFill>
-                  <a:srgbClr val="171714"/>
+              <a:rPr sz="1275" b="1">
+                <a:solidFill>
+                  <a:srgbClr val="F1E9DC"/>
                 </a:solidFill>
                 <a:latin typeface="Arial"/>
                 <a:ea typeface="Arial"/>
@@ -10668,6 +10795,7 @@
           <a:lstStyle xmlns:a="http://schemas.openxmlformats.org/drawingml/2006/main"/>
           <a:p xmlns:a="http://schemas.openxmlformats.org/drawingml/2006/main">
             <a:pPr algn="l">
+              <a:buNone/>
               <a:defRPr sz="1125" b="0">
                 <a:solidFill>
                   <a:srgbClr val="686863"/>
@@ -10678,32 +10806,33 @@
               </a:defRPr>
             </a:pPr>
             <a:r>
-              <a:rPr sz="1125" b="0">
+              <a:rPr sz="1050" b="0">
+                <a:solidFill>
+                  <a:srgbClr val="9C9183"/>
+                </a:solidFill>
+                <a:latin typeface="Arial"/>
+                <a:ea typeface="Arial"/>
+                <a:cs typeface="Arial"/>
+              </a:rPr>
+              <a:t>Best frontier;</a:t>
+            </a:r>
+          </a:p>
+          <a:p xmlns:a="http://schemas.openxmlformats.org/drawingml/2006/main">
+            <a:pPr algn="l">
+              <a:buNone/>
+              <a:defRPr sz="1125" b="0">
                 <a:solidFill>
                   <a:srgbClr val="686863"/>
                 </a:solidFill>
                 <a:latin typeface="Arial"/>
                 <a:ea typeface="Arial"/>
                 <a:cs typeface="Arial"/>
-              </a:rPr>
-              <a:t>Best frontier;</a:t>
-            </a:r>
-          </a:p>
-          <a:p xmlns:a="http://schemas.openxmlformats.org/drawingml/2006/main">
-            <a:pPr algn="l">
-              <a:defRPr sz="1125" b="0">
-                <a:solidFill>
-                  <a:srgbClr val="686863"/>
-                </a:solidFill>
-                <a:latin typeface="Arial"/>
-                <a:ea typeface="Arial"/>
-                <a:cs typeface="Arial"/>
-              </a:defRPr>
-            </a:pPr>
-            <a:r>
-              <a:rPr sz="1125" b="0">
-                <a:solidFill>
-                  <a:srgbClr val="686863"/>
+              </a:defRPr>
+            </a:pPr>
+            <a:r>
+              <a:rPr sz="1050" b="0">
+                <a:solidFill>
+                  <a:srgbClr val="9C9183"/>
                 </a:solidFill>
                 <a:latin typeface="Arial"/>
                 <a:ea typeface="Arial"/>
@@ -10737,11 +10866,11 @@
             <a:avLst/>
           </a:prstGeom>
           <a:solidFill xmlns:a="http://schemas.openxmlformats.org/drawingml/2006/main">
-            <a:srgbClr val="176A4B"/>
+            <a:srgbClr val="75B78E"/>
           </a:solidFill>
-          <a:ln xmlns:a="http://schemas.openxmlformats.org/drawingml/2006/main" w="28575">
+          <a:ln xmlns:a="http://schemas.openxmlformats.org/drawingml/2006/main" w="19050">
             <a:solidFill>
-              <a:srgbClr val="F8F7F3"/>
+              <a:srgbClr val="0A0907"/>
             </a:solidFill>
             <a:prstDash val="solid"/>
           </a:ln>
@@ -10782,6 +10911,7 @@
           <a:lstStyle xmlns:a="http://schemas.openxmlformats.org/drawingml/2006/main"/>
           <a:p xmlns:a="http://schemas.openxmlformats.org/drawingml/2006/main">
             <a:pPr algn="ctr">
+              <a:buNone/>
               <a:defRPr sz="1650" b="1">
                 <a:solidFill>
                   <a:srgbClr val="171714"/>
@@ -10792,13 +10922,13 @@
               </a:defRPr>
             </a:pPr>
             <a:r>
-              <a:rPr sz="1650" b="1">
-                <a:solidFill>
-                  <a:srgbClr val="171714"/>
-                </a:solidFill>
-                <a:latin typeface="Arial"/>
-                <a:ea typeface="Arial"/>
-                <a:cs typeface="Arial"/>
+              <a:rPr sz="1500" b="0">
+                <a:solidFill>
+                  <a:srgbClr val="F1E9DC"/>
+                </a:solidFill>
+                <a:latin typeface="Georgia"/>
+                <a:ea typeface="Georgia"/>
+                <a:cs typeface="Georgia"/>
               </a:rPr>
               <a:t>Novelty: not a single algorithm—an evidence-governed loop that learns from its own failure modes.</a:t>
             </a:r>
@@ -10821,7 +10951,7 @@
     <p:bg>
       <p:bgPr>
         <a:solidFill xmlns:a="http://schemas.openxmlformats.org/drawingml/2006/main">
-          <a:srgbClr val="F8F7F3"/>
+          <a:srgbClr val="0A0907"/>
         </a:solidFill>
       </p:bgPr>
     </p:bg>
@@ -10869,6 +10999,7 @@
           <a:lstStyle xmlns:a="http://schemas.openxmlformats.org/drawingml/2006/main"/>
           <a:p xmlns:a="http://schemas.openxmlformats.org/drawingml/2006/main">
             <a:pPr algn="l">
+              <a:buNone/>
               <a:defRPr sz="975" b="1">
                 <a:solidFill>
                   <a:srgbClr val="E9652E"/>
@@ -10879,13 +11010,13 @@
               </a:defRPr>
             </a:pPr>
             <a:r>
-              <a:rPr sz="975" b="1">
-                <a:solidFill>
-                  <a:srgbClr val="E9652E"/>
-                </a:solidFill>
-                <a:latin typeface="Arial"/>
-                <a:ea typeface="Arial"/>
-                <a:cs typeface="Arial"/>
+              <a:rPr sz="825" b="1">
+                <a:solidFill>
+                  <a:srgbClr val="F19A68"/>
+                </a:solidFill>
+                <a:latin typeface="Menlo"/>
+                <a:ea typeface="Menlo"/>
+                <a:cs typeface="Menlo"/>
               </a:rPr>
               <a:t>ADAPTIVE PAYMENT ASSURANCE RANGE</a:t>
             </a:r>
@@ -10927,6 +11058,7 @@
           <a:lstStyle xmlns:a="http://schemas.openxmlformats.org/drawingml/2006/main"/>
           <a:p xmlns:a="http://schemas.openxmlformats.org/drawingml/2006/main">
             <a:pPr algn="l">
+              <a:buNone/>
               <a:defRPr sz="2850" b="1">
                 <a:solidFill>
                   <a:srgbClr val="171714"/>
@@ -10937,13 +11069,13 @@
               </a:defRPr>
             </a:pPr>
             <a:r>
-              <a:rPr sz="2850" b="1">
-                <a:solidFill>
-                  <a:srgbClr val="171714"/>
-                </a:solidFill>
-                <a:latin typeface="Arial"/>
-                <a:ea typeface="Arial"/>
-                <a:cs typeface="Arial"/>
+              <a:rPr sz="2925" b="0">
+                <a:solidFill>
+                  <a:srgbClr val="F1E9DC"/>
+                </a:solidFill>
+                <a:latin typeface="Georgia"/>
+                <a:ea typeface="Georgia"/>
+                <a:cs typeface="Georgia"/>
               </a:rPr>
               <a:t>Graph context wins the operational frontier</a:t>
             </a:r>
@@ -10980,11 +11112,12 @@
         </p:spPr>
         <p:txBody>
           <a:bodyPr xmlns:a="http://schemas.openxmlformats.org/drawingml/2006/main" anchor="t">
-            <a:normAutofit fontScale="79487"/>
+            <a:normAutofit fontScale="93939"/>
           </a:bodyPr>
           <a:lstStyle xmlns:a="http://schemas.openxmlformats.org/drawingml/2006/main"/>
           <a:p xmlns:a="http://schemas.openxmlformats.org/drawingml/2006/main">
             <a:pPr algn="r">
+              <a:buNone/>
               <a:defRPr sz="975" b="0">
                 <a:solidFill>
                   <a:srgbClr val="686863"/>
@@ -10995,13 +11128,13 @@
               </a:defRPr>
             </a:pPr>
             <a:r>
-              <a:rPr sz="975" b="0">
-                <a:solidFill>
-                  <a:srgbClr val="686863"/>
-                </a:solidFill>
-                <a:latin typeface="Arial"/>
-                <a:ea typeface="Arial"/>
-                <a:cs typeface="Arial"/>
+              <a:rPr sz="825" b="0">
+                <a:solidFill>
+                  <a:srgbClr val="9C9183"/>
+                </a:solidFill>
+                <a:latin typeface="Menlo"/>
+                <a:ea typeface="Menlo"/>
+                <a:cs typeface="Menlo"/>
               </a:rPr>
               <a:t>05</a:t>
             </a:r>
@@ -11031,11 +11164,11 @@
             <a:avLst/>
           </a:prstGeom>
           <a:solidFill xmlns:a="http://schemas.openxmlformats.org/drawingml/2006/main">
-            <a:srgbClr val="D7D6CF"/>
+            <a:srgbClr val="3F382E"/>
           </a:solidFill>
           <a:ln xmlns:a="http://schemas.openxmlformats.org/drawingml/2006/main" w="0">
             <a:solidFill>
-              <a:srgbClr val="D7D6CF"/>
+              <a:srgbClr val="3F382E"/>
             </a:solidFill>
             <a:prstDash val="solid"/>
           </a:ln>
@@ -11071,11 +11204,12 @@
         </p:spPr>
         <p:txBody>
           <a:bodyPr xmlns:a="http://schemas.openxmlformats.org/drawingml/2006/main" anchor="t">
-            <a:normAutofit fontScale="91111"/>
+            <a:normAutofit fontScale="100000"/>
           </a:bodyPr>
           <a:lstStyle xmlns:a="http://schemas.openxmlformats.org/drawingml/2006/main"/>
           <a:p xmlns:a="http://schemas.openxmlformats.org/drawingml/2006/main">
             <a:pPr algn="l">
+              <a:buNone/>
               <a:defRPr sz="1125" b="1">
                 <a:solidFill>
                   <a:srgbClr val="E9652E"/>
@@ -11086,13 +11220,13 @@
               </a:defRPr>
             </a:pPr>
             <a:r>
-              <a:rPr sz="1125" b="1">
-                <a:solidFill>
-                  <a:srgbClr val="E9652E"/>
-                </a:solidFill>
-                <a:latin typeface="Arial"/>
-                <a:ea typeface="Arial"/>
-                <a:cs typeface="Arial"/>
+              <a:rPr sz="900" b="1">
+                <a:solidFill>
+                  <a:srgbClr val="F19A68"/>
+                </a:solidFill>
+                <a:latin typeface="Menlo"/>
+                <a:ea typeface="Menlo"/>
+                <a:cs typeface="Menlo"/>
               </a:rPr>
               <a:t>Verified recovered diagnostics — synthetic and non-authoritative</a:t>
             </a:r>
@@ -11124,11 +11258,11 @@
             </a:avLst>
           </a:prstGeom>
           <a:solidFill xmlns:a="http://schemas.openxmlformats.org/drawingml/2006/main">
-            <a:srgbClr val="171714"/>
+            <a:srgbClr val="211B14"/>
           </a:solidFill>
           <a:ln xmlns:a="http://schemas.openxmlformats.org/drawingml/2006/main" w="9525">
             <a:solidFill>
-              <a:srgbClr val="171714"/>
+              <a:srgbClr val="6B5F50"/>
             </a:solidFill>
             <a:prstDash val="solid"/>
           </a:ln>
@@ -11164,11 +11298,12 @@
         </p:spPr>
         <p:txBody>
           <a:bodyPr xmlns:a="http://schemas.openxmlformats.org/drawingml/2006/main" anchor="t">
-            <a:normAutofit fontScale="66667"/>
+            <a:normAutofit fontScale="78788"/>
           </a:bodyPr>
           <a:lstStyle xmlns:a="http://schemas.openxmlformats.org/drawingml/2006/main"/>
           <a:p xmlns:a="http://schemas.openxmlformats.org/drawingml/2006/main">
             <a:pPr algn="l">
+              <a:buNone/>
               <a:defRPr sz="975" b="1">
                 <a:solidFill>
                   <a:srgbClr val="FFFFFF"/>
@@ -11179,13 +11314,13 @@
               </a:defRPr>
             </a:pPr>
             <a:r>
-              <a:rPr sz="975" b="1">
-                <a:solidFill>
-                  <a:srgbClr val="FFFFFF"/>
-                </a:solidFill>
-                <a:latin typeface="Arial"/>
-                <a:ea typeface="Arial"/>
-                <a:cs typeface="Arial"/>
+              <a:rPr sz="825" b="1">
+                <a:solidFill>
+                  <a:srgbClr val="F1E9DC"/>
+                </a:solidFill>
+                <a:latin typeface="Menlo"/>
+                <a:ea typeface="Menlo"/>
+                <a:cs typeface="Menlo"/>
               </a:rPr>
               <a:t>ARM</a:t>
             </a:r>
@@ -11217,11 +11352,11 @@
             </a:avLst>
           </a:prstGeom>
           <a:solidFill xmlns:a="http://schemas.openxmlformats.org/drawingml/2006/main">
-            <a:srgbClr val="171714"/>
+            <a:srgbClr val="211B14"/>
           </a:solidFill>
           <a:ln xmlns:a="http://schemas.openxmlformats.org/drawingml/2006/main" w="9525">
             <a:solidFill>
-              <a:srgbClr val="171714"/>
+              <a:srgbClr val="6B5F50"/>
             </a:solidFill>
             <a:prstDash val="solid"/>
           </a:ln>
@@ -11257,11 +11392,12 @@
         </p:spPr>
         <p:txBody>
           <a:bodyPr xmlns:a="http://schemas.openxmlformats.org/drawingml/2006/main" anchor="t">
-            <a:normAutofit fontScale="66667"/>
+            <a:normAutofit fontScale="78788"/>
           </a:bodyPr>
           <a:lstStyle xmlns:a="http://schemas.openxmlformats.org/drawingml/2006/main"/>
           <a:p xmlns:a="http://schemas.openxmlformats.org/drawingml/2006/main">
             <a:pPr algn="l">
+              <a:buNone/>
               <a:defRPr sz="975" b="1">
                 <a:solidFill>
                   <a:srgbClr val="FFFFFF"/>
@@ -11272,13 +11408,13 @@
               </a:defRPr>
             </a:pPr>
             <a:r>
-              <a:rPr sz="975" b="1">
-                <a:solidFill>
-                  <a:srgbClr val="FFFFFF"/>
-                </a:solidFill>
-                <a:latin typeface="Arial"/>
-                <a:ea typeface="Arial"/>
-                <a:cs typeface="Arial"/>
+              <a:rPr sz="825" b="1">
+                <a:solidFill>
+                  <a:srgbClr val="F1E9DC"/>
+                </a:solidFill>
+                <a:latin typeface="Menlo"/>
+                <a:ea typeface="Menlo"/>
+                <a:cs typeface="Menlo"/>
               </a:rPr>
               <a:t>RECALL %</a:t>
             </a:r>
@@ -11310,11 +11446,11 @@
             </a:avLst>
           </a:prstGeom>
           <a:solidFill xmlns:a="http://schemas.openxmlformats.org/drawingml/2006/main">
-            <a:srgbClr val="171714"/>
+            <a:srgbClr val="211B14"/>
           </a:solidFill>
           <a:ln xmlns:a="http://schemas.openxmlformats.org/drawingml/2006/main" w="9525">
             <a:solidFill>
-              <a:srgbClr val="171714"/>
+              <a:srgbClr val="6B5F50"/>
             </a:solidFill>
             <a:prstDash val="solid"/>
           </a:ln>
@@ -11350,11 +11486,12 @@
         </p:spPr>
         <p:txBody>
           <a:bodyPr xmlns:a="http://schemas.openxmlformats.org/drawingml/2006/main" anchor="t">
-            <a:normAutofit fontScale="66667"/>
+            <a:normAutofit fontScale="78788"/>
           </a:bodyPr>
           <a:lstStyle xmlns:a="http://schemas.openxmlformats.org/drawingml/2006/main"/>
           <a:p xmlns:a="http://schemas.openxmlformats.org/drawingml/2006/main">
             <a:pPr algn="l">
+              <a:buNone/>
               <a:defRPr sz="975" b="1">
                 <a:solidFill>
                   <a:srgbClr val="FFFFFF"/>
@@ -11365,13 +11502,13 @@
               </a:defRPr>
             </a:pPr>
             <a:r>
-              <a:rPr sz="975" b="1">
-                <a:solidFill>
-                  <a:srgbClr val="FFFFFF"/>
-                </a:solidFill>
-                <a:latin typeface="Arial"/>
-                <a:ea typeface="Arial"/>
-                <a:cs typeface="Arial"/>
+              <a:rPr sz="825" b="1">
+                <a:solidFill>
+                  <a:srgbClr val="F1E9DC"/>
+                </a:solidFill>
+                <a:latin typeface="Menlo"/>
+                <a:ea typeface="Menlo"/>
+                <a:cs typeface="Menlo"/>
               </a:rPr>
               <a:t>PRECISION %</a:t>
             </a:r>
@@ -11403,11 +11540,11 @@
             </a:avLst>
           </a:prstGeom>
           <a:solidFill xmlns:a="http://schemas.openxmlformats.org/drawingml/2006/main">
-            <a:srgbClr val="171714"/>
+            <a:srgbClr val="211B14"/>
           </a:solidFill>
           <a:ln xmlns:a="http://schemas.openxmlformats.org/drawingml/2006/main" w="9525">
             <a:solidFill>
-              <a:srgbClr val="171714"/>
+              <a:srgbClr val="6B5F50"/>
             </a:solidFill>
             <a:prstDash val="solid"/>
           </a:ln>
@@ -11443,11 +11580,12 @@
         </p:spPr>
         <p:txBody>
           <a:bodyPr xmlns:a="http://schemas.openxmlformats.org/drawingml/2006/main" anchor="t">
-            <a:normAutofit fontScale="66667"/>
+            <a:normAutofit fontScale="78788"/>
           </a:bodyPr>
           <a:lstStyle xmlns:a="http://schemas.openxmlformats.org/drawingml/2006/main"/>
           <a:p xmlns:a="http://schemas.openxmlformats.org/drawingml/2006/main">
             <a:pPr algn="l">
+              <a:buNone/>
               <a:defRPr sz="975" b="1">
                 <a:solidFill>
                   <a:srgbClr val="FFFFFF"/>
@@ -11458,13 +11596,13 @@
               </a:defRPr>
             </a:pPr>
             <a:r>
-              <a:rPr sz="975" b="1">
-                <a:solidFill>
-                  <a:srgbClr val="FFFFFF"/>
-                </a:solidFill>
-                <a:latin typeface="Arial"/>
-                <a:ea typeface="Arial"/>
-                <a:cs typeface="Arial"/>
+              <a:rPr sz="825" b="1">
+                <a:solidFill>
+                  <a:srgbClr val="F1E9DC"/>
+                </a:solidFill>
+                <a:latin typeface="Menlo"/>
+                <a:ea typeface="Menlo"/>
+                <a:cs typeface="Menlo"/>
               </a:rPr>
               <a:t>F1 %</a:t>
             </a:r>
@@ -11496,11 +11634,11 @@
             </a:avLst>
           </a:prstGeom>
           <a:solidFill xmlns:a="http://schemas.openxmlformats.org/drawingml/2006/main">
-            <a:srgbClr val="171714"/>
+            <a:srgbClr val="211B14"/>
           </a:solidFill>
           <a:ln xmlns:a="http://schemas.openxmlformats.org/drawingml/2006/main" w="9525">
             <a:solidFill>
-              <a:srgbClr val="171714"/>
+              <a:srgbClr val="6B5F50"/>
             </a:solidFill>
             <a:prstDash val="solid"/>
           </a:ln>
@@ -11536,11 +11674,12 @@
         </p:spPr>
         <p:txBody>
           <a:bodyPr xmlns:a="http://schemas.openxmlformats.org/drawingml/2006/main" anchor="t">
-            <a:normAutofit fontScale="66667"/>
+            <a:normAutofit fontScale="78788"/>
           </a:bodyPr>
           <a:lstStyle xmlns:a="http://schemas.openxmlformats.org/drawingml/2006/main"/>
           <a:p xmlns:a="http://schemas.openxmlformats.org/drawingml/2006/main">
             <a:pPr algn="l">
+              <a:buNone/>
               <a:defRPr sz="975" b="1">
                 <a:solidFill>
                   <a:srgbClr val="FFFFFF"/>
@@ -11551,13 +11690,13 @@
               </a:defRPr>
             </a:pPr>
             <a:r>
-              <a:rPr sz="975" b="1">
-                <a:solidFill>
-                  <a:srgbClr val="FFFFFF"/>
-                </a:solidFill>
-                <a:latin typeface="Arial"/>
-                <a:ea typeface="Arial"/>
-                <a:cs typeface="Arial"/>
+              <a:rPr sz="825" b="1">
+                <a:solidFill>
+                  <a:srgbClr val="F1E9DC"/>
+                </a:solidFill>
+                <a:latin typeface="Menlo"/>
+                <a:ea typeface="Menlo"/>
+                <a:cs typeface="Menlo"/>
               </a:rPr>
               <a:t>FALSE-DECLINE %</a:t>
             </a:r>
@@ -11589,11 +11728,11 @@
             </a:avLst>
           </a:prstGeom>
           <a:solidFill xmlns:a="http://schemas.openxmlformats.org/drawingml/2006/main">
-            <a:srgbClr val="171714"/>
+            <a:srgbClr val="211B14"/>
           </a:solidFill>
           <a:ln xmlns:a="http://schemas.openxmlformats.org/drawingml/2006/main" w="9525">
             <a:solidFill>
-              <a:srgbClr val="171714"/>
+              <a:srgbClr val="6B5F50"/>
             </a:solidFill>
             <a:prstDash val="solid"/>
           </a:ln>
@@ -11629,11 +11768,12 @@
         </p:spPr>
         <p:txBody>
           <a:bodyPr xmlns:a="http://schemas.openxmlformats.org/drawingml/2006/main" anchor="t">
-            <a:normAutofit fontScale="66667"/>
+            <a:normAutofit fontScale="78788"/>
           </a:bodyPr>
           <a:lstStyle xmlns:a="http://schemas.openxmlformats.org/drawingml/2006/main"/>
           <a:p xmlns:a="http://schemas.openxmlformats.org/drawingml/2006/main">
             <a:pPr algn="l">
+              <a:buNone/>
               <a:defRPr sz="975" b="1">
                 <a:solidFill>
                   <a:srgbClr val="FFFFFF"/>
@@ -11644,13 +11784,13 @@
               </a:defRPr>
             </a:pPr>
             <a:r>
-              <a:rPr sz="975" b="1">
-                <a:solidFill>
-                  <a:srgbClr val="FFFFFF"/>
-                </a:solidFill>
-                <a:latin typeface="Arial"/>
-                <a:ea typeface="Arial"/>
-                <a:cs typeface="Arial"/>
+              <a:rPr sz="825" b="1">
+                <a:solidFill>
+                  <a:srgbClr val="F1E9DC"/>
+                </a:solidFill>
+                <a:latin typeface="Menlo"/>
+                <a:ea typeface="Menlo"/>
+                <a:cs typeface="Menlo"/>
               </a:rPr>
               <a:t>P95 MS</a:t>
             </a:r>
@@ -11682,11 +11822,11 @@
             </a:avLst>
           </a:prstGeom>
           <a:solidFill xmlns:a="http://schemas.openxmlformats.org/drawingml/2006/main">
-            <a:srgbClr val="EEECE5"/>
+            <a:srgbClr val="100E0B"/>
           </a:solidFill>
           <a:ln xmlns:a="http://schemas.openxmlformats.org/drawingml/2006/main" w="9525">
             <a:solidFill>
-              <a:srgbClr val="D7D6CF"/>
+              <a:srgbClr val="3F382E"/>
             </a:solidFill>
             <a:prstDash val="solid"/>
           </a:ln>
@@ -11722,11 +11862,12 @@
         </p:spPr>
         <p:txBody>
           <a:bodyPr xmlns:a="http://schemas.openxmlformats.org/drawingml/2006/main" anchor="t">
-            <a:normAutofit fontScale="75490"/>
+            <a:normAutofit fontScale="85556"/>
           </a:bodyPr>
           <a:lstStyle xmlns:a="http://schemas.openxmlformats.org/drawingml/2006/main"/>
           <a:p xmlns:a="http://schemas.openxmlformats.org/drawingml/2006/main">
             <a:pPr algn="l">
+              <a:buNone/>
               <a:defRPr sz="1275" b="1">
                 <a:solidFill>
                   <a:srgbClr val="171714"/>
@@ -11737,9 +11878,9 @@
               </a:defRPr>
             </a:pPr>
             <a:r>
-              <a:rPr sz="1275" b="1">
-                <a:solidFill>
-                  <a:srgbClr val="171714"/>
+              <a:rPr sz="1125" b="0">
+                <a:solidFill>
+                  <a:srgbClr val="F1E9DC"/>
                 </a:solidFill>
                 <a:latin typeface="Arial"/>
                 <a:ea typeface="Arial"/>
@@ -11775,11 +11916,11 @@
             </a:avLst>
           </a:prstGeom>
           <a:solidFill xmlns:a="http://schemas.openxmlformats.org/drawingml/2006/main">
-            <a:srgbClr val="EEECE5"/>
+            <a:srgbClr val="100E0B"/>
           </a:solidFill>
           <a:ln xmlns:a="http://schemas.openxmlformats.org/drawingml/2006/main" w="9525">
             <a:solidFill>
-              <a:srgbClr val="D7D6CF"/>
+              <a:srgbClr val="3F382E"/>
             </a:solidFill>
             <a:prstDash val="solid"/>
           </a:ln>
@@ -11815,11 +11956,12 @@
         </p:spPr>
         <p:txBody>
           <a:bodyPr xmlns:a="http://schemas.openxmlformats.org/drawingml/2006/main" anchor="t">
-            <a:normAutofit fontScale="80208"/>
+            <a:normAutofit fontScale="85556"/>
           </a:bodyPr>
           <a:lstStyle xmlns:a="http://schemas.openxmlformats.org/drawingml/2006/main"/>
           <a:p xmlns:a="http://schemas.openxmlformats.org/drawingml/2006/main">
             <a:pPr algn="l">
+              <a:buNone/>
               <a:defRPr sz="1200" b="0">
                 <a:solidFill>
                   <a:srgbClr val="171714"/>
@@ -11830,13 +11972,13 @@
               </a:defRPr>
             </a:pPr>
             <a:r>
-              <a:rPr sz="1200" b="0">
-                <a:solidFill>
-                  <a:srgbClr val="171714"/>
-                </a:solidFill>
-                <a:latin typeface="Arial"/>
-                <a:ea typeface="Arial"/>
-                <a:cs typeface="Arial"/>
+              <a:rPr sz="1125" b="0">
+                <a:solidFill>
+                  <a:srgbClr val="F1E9DC"/>
+                </a:solidFill>
+                <a:latin typeface="Menlo"/>
+                <a:ea typeface="Menlo"/>
+                <a:cs typeface="Menlo"/>
               </a:rPr>
               <a:t>85.95</a:t>
             </a:r>
@@ -11868,11 +12010,11 @@
             </a:avLst>
           </a:prstGeom>
           <a:solidFill xmlns:a="http://schemas.openxmlformats.org/drawingml/2006/main">
-            <a:srgbClr val="EEECE5"/>
+            <a:srgbClr val="100E0B"/>
           </a:solidFill>
           <a:ln xmlns:a="http://schemas.openxmlformats.org/drawingml/2006/main" w="9525">
             <a:solidFill>
-              <a:srgbClr val="D7D6CF"/>
+              <a:srgbClr val="3F382E"/>
             </a:solidFill>
             <a:prstDash val="solid"/>
           </a:ln>
@@ -11908,11 +12050,12 @@
         </p:spPr>
         <p:txBody>
           <a:bodyPr xmlns:a="http://schemas.openxmlformats.org/drawingml/2006/main" anchor="t">
-            <a:normAutofit fontScale="80208"/>
+            <a:normAutofit fontScale="85556"/>
           </a:bodyPr>
           <a:lstStyle xmlns:a="http://schemas.openxmlformats.org/drawingml/2006/main"/>
           <a:p xmlns:a="http://schemas.openxmlformats.org/drawingml/2006/main">
             <a:pPr algn="l">
+              <a:buNone/>
               <a:defRPr sz="1200" b="0">
                 <a:solidFill>
                   <a:srgbClr val="171714"/>
@@ -11923,13 +12066,13 @@
               </a:defRPr>
             </a:pPr>
             <a:r>
-              <a:rPr sz="1200" b="0">
-                <a:solidFill>
-                  <a:srgbClr val="171714"/>
-                </a:solidFill>
-                <a:latin typeface="Arial"/>
-                <a:ea typeface="Arial"/>
-                <a:cs typeface="Arial"/>
+              <a:rPr sz="1125" b="0">
+                <a:solidFill>
+                  <a:srgbClr val="F1E9DC"/>
+                </a:solidFill>
+                <a:latin typeface="Menlo"/>
+                <a:ea typeface="Menlo"/>
+                <a:cs typeface="Menlo"/>
               </a:rPr>
               <a:t>14.88</a:t>
             </a:r>
@@ -11961,11 +12104,11 @@
             </a:avLst>
           </a:prstGeom>
           <a:solidFill xmlns:a="http://schemas.openxmlformats.org/drawingml/2006/main">
-            <a:srgbClr val="EEECE5"/>
+            <a:srgbClr val="100E0B"/>
           </a:solidFill>
           <a:ln xmlns:a="http://schemas.openxmlformats.org/drawingml/2006/main" w="9525">
             <a:solidFill>
-              <a:srgbClr val="D7D6CF"/>
+              <a:srgbClr val="3F382E"/>
             </a:solidFill>
             <a:prstDash val="solid"/>
           </a:ln>
@@ -12001,11 +12144,12 @@
         </p:spPr>
         <p:txBody>
           <a:bodyPr xmlns:a="http://schemas.openxmlformats.org/drawingml/2006/main" anchor="t">
-            <a:normAutofit fontScale="80208"/>
+            <a:normAutofit fontScale="85556"/>
           </a:bodyPr>
           <a:lstStyle xmlns:a="http://schemas.openxmlformats.org/drawingml/2006/main"/>
           <a:p xmlns:a="http://schemas.openxmlformats.org/drawingml/2006/main">
             <a:pPr algn="l">
+              <a:buNone/>
               <a:defRPr sz="1200" b="0">
                 <a:solidFill>
                   <a:srgbClr val="171714"/>
@@ -12016,13 +12160,13 @@
               </a:defRPr>
             </a:pPr>
             <a:r>
-              <a:rPr sz="1200" b="0">
-                <a:solidFill>
-                  <a:srgbClr val="171714"/>
-                </a:solidFill>
-                <a:latin typeface="Arial"/>
-                <a:ea typeface="Arial"/>
-                <a:cs typeface="Arial"/>
+              <a:rPr sz="1125" b="0">
+                <a:solidFill>
+                  <a:srgbClr val="F1E9DC"/>
+                </a:solidFill>
+                <a:latin typeface="Menlo"/>
+                <a:ea typeface="Menlo"/>
+                <a:cs typeface="Menlo"/>
               </a:rPr>
               <a:t>25.37</a:t>
             </a:r>
@@ -12054,11 +12198,11 @@
             </a:avLst>
           </a:prstGeom>
           <a:solidFill xmlns:a="http://schemas.openxmlformats.org/drawingml/2006/main">
-            <a:srgbClr val="EEECE5"/>
+            <a:srgbClr val="100E0B"/>
           </a:solidFill>
           <a:ln xmlns:a="http://schemas.openxmlformats.org/drawingml/2006/main" w="9525">
             <a:solidFill>
-              <a:srgbClr val="D7D6CF"/>
+              <a:srgbClr val="3F382E"/>
             </a:solidFill>
             <a:prstDash val="solid"/>
           </a:ln>
@@ -12094,11 +12238,12 @@
         </p:spPr>
         <p:txBody>
           <a:bodyPr xmlns:a="http://schemas.openxmlformats.org/drawingml/2006/main" anchor="t">
-            <a:normAutofit fontScale="80208"/>
+            <a:normAutofit fontScale="85556"/>
           </a:bodyPr>
           <a:lstStyle xmlns:a="http://schemas.openxmlformats.org/drawingml/2006/main"/>
           <a:p xmlns:a="http://schemas.openxmlformats.org/drawingml/2006/main">
             <a:pPr algn="l">
+              <a:buNone/>
               <a:defRPr sz="1200" b="0">
                 <a:solidFill>
                   <a:srgbClr val="171714"/>
@@ -12109,13 +12254,13 @@
               </a:defRPr>
             </a:pPr>
             <a:r>
-              <a:rPr sz="1200" b="0">
-                <a:solidFill>
-                  <a:srgbClr val="171714"/>
-                </a:solidFill>
-                <a:latin typeface="Arial"/>
-                <a:ea typeface="Arial"/>
-                <a:cs typeface="Arial"/>
+              <a:rPr sz="1125" b="0">
+                <a:solidFill>
+                  <a:srgbClr val="F1E9DC"/>
+                </a:solidFill>
+                <a:latin typeface="Menlo"/>
+                <a:ea typeface="Menlo"/>
+                <a:cs typeface="Menlo"/>
               </a:rPr>
               <a:t>87.44</a:t>
             </a:r>
@@ -12147,11 +12292,11 @@
             </a:avLst>
           </a:prstGeom>
           <a:solidFill xmlns:a="http://schemas.openxmlformats.org/drawingml/2006/main">
-            <a:srgbClr val="EEECE5"/>
+            <a:srgbClr val="100E0B"/>
           </a:solidFill>
           <a:ln xmlns:a="http://schemas.openxmlformats.org/drawingml/2006/main" w="9525">
             <a:solidFill>
-              <a:srgbClr val="D7D6CF"/>
+              <a:srgbClr val="3F382E"/>
             </a:solidFill>
             <a:prstDash val="solid"/>
           </a:ln>
@@ -12187,11 +12332,12 @@
         </p:spPr>
         <p:txBody>
           <a:bodyPr xmlns:a="http://schemas.openxmlformats.org/drawingml/2006/main" anchor="t">
-            <a:normAutofit fontScale="80208"/>
+            <a:normAutofit fontScale="85556"/>
           </a:bodyPr>
           <a:lstStyle xmlns:a="http://schemas.openxmlformats.org/drawingml/2006/main"/>
           <a:p xmlns:a="http://schemas.openxmlformats.org/drawingml/2006/main">
             <a:pPr algn="l">
+              <a:buNone/>
               <a:defRPr sz="1200" b="0">
                 <a:solidFill>
                   <a:srgbClr val="171714"/>
@@ -12202,13 +12348,13 @@
               </a:defRPr>
             </a:pPr>
             <a:r>
-              <a:rPr sz="1200" b="0">
-                <a:solidFill>
-                  <a:srgbClr val="171714"/>
-                </a:solidFill>
-                <a:latin typeface="Arial"/>
-                <a:ea typeface="Arial"/>
-                <a:cs typeface="Arial"/>
+              <a:rPr sz="1125" b="0">
+                <a:solidFill>
+                  <a:srgbClr val="F1E9DC"/>
+                </a:solidFill>
+                <a:latin typeface="Menlo"/>
+                <a:ea typeface="Menlo"/>
+                <a:cs typeface="Menlo"/>
               </a:rPr>
               <a:t>4.06</a:t>
             </a:r>
@@ -12240,11 +12386,11 @@
             </a:avLst>
           </a:prstGeom>
           <a:solidFill xmlns:a="http://schemas.openxmlformats.org/drawingml/2006/main">
-            <a:srgbClr val="FFFFFF"/>
+            <a:srgbClr val="14110D"/>
           </a:solidFill>
           <a:ln xmlns:a="http://schemas.openxmlformats.org/drawingml/2006/main" w="9525">
             <a:solidFill>
-              <a:srgbClr val="D7D6CF"/>
+              <a:srgbClr val="3F382E"/>
             </a:solidFill>
             <a:prstDash val="solid"/>
           </a:ln>
@@ -12280,11 +12426,12 @@
         </p:spPr>
         <p:txBody>
           <a:bodyPr xmlns:a="http://schemas.openxmlformats.org/drawingml/2006/main" anchor="t">
-            <a:normAutofit fontScale="75490"/>
+            <a:normAutofit fontScale="85556"/>
           </a:bodyPr>
           <a:lstStyle xmlns:a="http://schemas.openxmlformats.org/drawingml/2006/main"/>
           <a:p xmlns:a="http://schemas.openxmlformats.org/drawingml/2006/main">
             <a:pPr algn="l">
+              <a:buNone/>
               <a:defRPr sz="1275" b="1">
                 <a:solidFill>
                   <a:srgbClr val="171714"/>
@@ -12295,9 +12442,9 @@
               </a:defRPr>
             </a:pPr>
             <a:r>
-              <a:rPr sz="1275" b="1">
-                <a:solidFill>
-                  <a:srgbClr val="171714"/>
+              <a:rPr sz="1125" b="0">
+                <a:solidFill>
+                  <a:srgbClr val="F1E9DC"/>
                 </a:solidFill>
                 <a:latin typeface="Arial"/>
                 <a:ea typeface="Arial"/>
@@ -12333,11 +12480,11 @@
             </a:avLst>
           </a:prstGeom>
           <a:solidFill xmlns:a="http://schemas.openxmlformats.org/drawingml/2006/main">
-            <a:srgbClr val="FFFFFF"/>
+            <a:srgbClr val="14110D"/>
           </a:solidFill>
           <a:ln xmlns:a="http://schemas.openxmlformats.org/drawingml/2006/main" w="9525">
             <a:solidFill>
-              <a:srgbClr val="D7D6CF"/>
+              <a:srgbClr val="3F382E"/>
             </a:solidFill>
             <a:prstDash val="solid"/>
           </a:ln>
@@ -12373,11 +12520,12 @@
         </p:spPr>
         <p:txBody>
           <a:bodyPr xmlns:a="http://schemas.openxmlformats.org/drawingml/2006/main" anchor="t">
-            <a:normAutofit fontScale="80208"/>
+            <a:normAutofit fontScale="85556"/>
           </a:bodyPr>
           <a:lstStyle xmlns:a="http://schemas.openxmlformats.org/drawingml/2006/main"/>
           <a:p xmlns:a="http://schemas.openxmlformats.org/drawingml/2006/main">
             <a:pPr algn="l">
+              <a:buNone/>
               <a:defRPr sz="1200" b="0">
                 <a:solidFill>
                   <a:srgbClr val="171714"/>
@@ -12388,13 +12536,13 @@
               </a:defRPr>
             </a:pPr>
             <a:r>
-              <a:rPr sz="1200" b="0">
-                <a:solidFill>
-                  <a:srgbClr val="171714"/>
-                </a:solidFill>
-                <a:latin typeface="Arial"/>
-                <a:ea typeface="Arial"/>
-                <a:cs typeface="Arial"/>
+              <a:rPr sz="1125" b="0">
+                <a:solidFill>
+                  <a:srgbClr val="F1E9DC"/>
+                </a:solidFill>
+                <a:latin typeface="Menlo"/>
+                <a:ea typeface="Menlo"/>
+                <a:cs typeface="Menlo"/>
               </a:rPr>
               <a:t>99.74</a:t>
             </a:r>
@@ -12426,11 +12574,11 @@
             </a:avLst>
           </a:prstGeom>
           <a:solidFill xmlns:a="http://schemas.openxmlformats.org/drawingml/2006/main">
-            <a:srgbClr val="FFFFFF"/>
+            <a:srgbClr val="14110D"/>
           </a:solidFill>
           <a:ln xmlns:a="http://schemas.openxmlformats.org/drawingml/2006/main" w="9525">
             <a:solidFill>
-              <a:srgbClr val="D7D6CF"/>
+              <a:srgbClr val="3F382E"/>
             </a:solidFill>
             <a:prstDash val="solid"/>
           </a:ln>
@@ -12466,11 +12614,12 @@
         </p:spPr>
         <p:txBody>
           <a:bodyPr xmlns:a="http://schemas.openxmlformats.org/drawingml/2006/main" anchor="t">
-            <a:normAutofit fontScale="80208"/>
+            <a:normAutofit fontScale="85556"/>
           </a:bodyPr>
           <a:lstStyle xmlns:a="http://schemas.openxmlformats.org/drawingml/2006/main"/>
           <a:p xmlns:a="http://schemas.openxmlformats.org/drawingml/2006/main">
             <a:pPr algn="l">
+              <a:buNone/>
               <a:defRPr sz="1200" b="0">
                 <a:solidFill>
                   <a:srgbClr val="171714"/>
@@ -12481,13 +12630,13 @@
               </a:defRPr>
             </a:pPr>
             <a:r>
-              <a:rPr sz="1200" b="0">
-                <a:solidFill>
-                  <a:srgbClr val="171714"/>
-                </a:solidFill>
-                <a:latin typeface="Arial"/>
-                <a:ea typeface="Arial"/>
-                <a:cs typeface="Arial"/>
+              <a:rPr sz="1125" b="0">
+                <a:solidFill>
+                  <a:srgbClr val="F1E9DC"/>
+                </a:solidFill>
+                <a:latin typeface="Menlo"/>
+                <a:ea typeface="Menlo"/>
+                <a:cs typeface="Menlo"/>
               </a:rPr>
               <a:t>94.76</a:t>
             </a:r>
@@ -12519,11 +12668,11 @@
             </a:avLst>
           </a:prstGeom>
           <a:solidFill xmlns:a="http://schemas.openxmlformats.org/drawingml/2006/main">
-            <a:srgbClr val="FFFFFF"/>
+            <a:srgbClr val="14110D"/>
           </a:solidFill>
           <a:ln xmlns:a="http://schemas.openxmlformats.org/drawingml/2006/main" w="9525">
             <a:solidFill>
-              <a:srgbClr val="D7D6CF"/>
+              <a:srgbClr val="3F382E"/>
             </a:solidFill>
             <a:prstDash val="solid"/>
           </a:ln>
@@ -12559,11 +12708,12 @@
         </p:spPr>
         <p:txBody>
           <a:bodyPr xmlns:a="http://schemas.openxmlformats.org/drawingml/2006/main" anchor="t">
-            <a:normAutofit fontScale="80208"/>
+            <a:normAutofit fontScale="85556"/>
           </a:bodyPr>
           <a:lstStyle xmlns:a="http://schemas.openxmlformats.org/drawingml/2006/main"/>
           <a:p xmlns:a="http://schemas.openxmlformats.org/drawingml/2006/main">
             <a:pPr algn="l">
+              <a:buNone/>
               <a:defRPr sz="1200" b="0">
                 <a:solidFill>
                   <a:srgbClr val="171714"/>
@@ -12574,13 +12724,13 @@
               </a:defRPr>
             </a:pPr>
             <a:r>
-              <a:rPr sz="1200" b="0">
-                <a:solidFill>
-                  <a:srgbClr val="171714"/>
-                </a:solidFill>
-                <a:latin typeface="Arial"/>
-                <a:ea typeface="Arial"/>
-                <a:cs typeface="Arial"/>
+              <a:rPr sz="1125" b="0">
+                <a:solidFill>
+                  <a:srgbClr val="F1E9DC"/>
+                </a:solidFill>
+                <a:latin typeface="Menlo"/>
+                <a:ea typeface="Menlo"/>
+                <a:cs typeface="Menlo"/>
               </a:rPr>
               <a:t>97.19</a:t>
             </a:r>
@@ -12612,11 +12762,11 @@
             </a:avLst>
           </a:prstGeom>
           <a:solidFill xmlns:a="http://schemas.openxmlformats.org/drawingml/2006/main">
-            <a:srgbClr val="FFFFFF"/>
+            <a:srgbClr val="14110D"/>
           </a:solidFill>
           <a:ln xmlns:a="http://schemas.openxmlformats.org/drawingml/2006/main" w="9525">
             <a:solidFill>
-              <a:srgbClr val="D7D6CF"/>
+              <a:srgbClr val="3F382E"/>
             </a:solidFill>
             <a:prstDash val="solid"/>
           </a:ln>
@@ -12652,11 +12802,12 @@
         </p:spPr>
         <p:txBody>
           <a:bodyPr xmlns:a="http://schemas.openxmlformats.org/drawingml/2006/main" anchor="t">
-            <a:normAutofit fontScale="80208"/>
+            <a:normAutofit fontScale="85556"/>
           </a:bodyPr>
           <a:lstStyle xmlns:a="http://schemas.openxmlformats.org/drawingml/2006/main"/>
           <a:p xmlns:a="http://schemas.openxmlformats.org/drawingml/2006/main">
             <a:pPr algn="l">
+              <a:buNone/>
               <a:defRPr sz="1200" b="0">
                 <a:solidFill>
                   <a:srgbClr val="171714"/>
@@ -12667,13 +12818,13 @@
               </a:defRPr>
             </a:pPr>
             <a:r>
-              <a:rPr sz="1200" b="0">
-                <a:solidFill>
-                  <a:srgbClr val="171714"/>
-                </a:solidFill>
-                <a:latin typeface="Arial"/>
-                <a:ea typeface="Arial"/>
-                <a:cs typeface="Arial"/>
+              <a:rPr sz="1125" b="0">
+                <a:solidFill>
+                  <a:srgbClr val="F1E9DC"/>
+                </a:solidFill>
+                <a:latin typeface="Menlo"/>
+                <a:ea typeface="Menlo"/>
+                <a:cs typeface="Menlo"/>
               </a:rPr>
               <a:t>0.000</a:t>
             </a:r>
@@ -12705,11 +12856,11 @@
             </a:avLst>
           </a:prstGeom>
           <a:solidFill xmlns:a="http://schemas.openxmlformats.org/drawingml/2006/main">
-            <a:srgbClr val="FFFFFF"/>
+            <a:srgbClr val="14110D"/>
           </a:solidFill>
           <a:ln xmlns:a="http://schemas.openxmlformats.org/drawingml/2006/main" w="9525">
             <a:solidFill>
-              <a:srgbClr val="D7D6CF"/>
+              <a:srgbClr val="3F382E"/>
             </a:solidFill>
             <a:prstDash val="solid"/>
           </a:ln>
@@ -12745,11 +12896,12 @@
         </p:spPr>
         <p:txBody>
           <a:bodyPr xmlns:a="http://schemas.openxmlformats.org/drawingml/2006/main" anchor="t">
-            <a:normAutofit fontScale="80208"/>
+            <a:normAutofit fontScale="85556"/>
           </a:bodyPr>
           <a:lstStyle xmlns:a="http://schemas.openxmlformats.org/drawingml/2006/main"/>
           <a:p xmlns:a="http://schemas.openxmlformats.org/drawingml/2006/main">
             <a:pPr algn="l">
+              <a:buNone/>
               <a:defRPr sz="1200" b="0">
                 <a:solidFill>
                   <a:srgbClr val="171714"/>
@@ -12760,13 +12912,13 @@
               </a:defRPr>
             </a:pPr>
             <a:r>
-              <a:rPr sz="1200" b="0">
-                <a:solidFill>
-                  <a:srgbClr val="171714"/>
-                </a:solidFill>
-                <a:latin typeface="Arial"/>
-                <a:ea typeface="Arial"/>
-                <a:cs typeface="Arial"/>
+              <a:rPr sz="1125" b="0">
+                <a:solidFill>
+                  <a:srgbClr val="F1E9DC"/>
+                </a:solidFill>
+                <a:latin typeface="Menlo"/>
+                <a:ea typeface="Menlo"/>
+                <a:cs typeface="Menlo"/>
               </a:rPr>
               <a:t>3.38</a:t>
             </a:r>
@@ -12798,11 +12950,11 @@
             </a:avLst>
           </a:prstGeom>
           <a:solidFill xmlns:a="http://schemas.openxmlformats.org/drawingml/2006/main">
-            <a:srgbClr val="DFF1E7"/>
+            <a:srgbClr val="20382A"/>
           </a:solidFill>
           <a:ln xmlns:a="http://schemas.openxmlformats.org/drawingml/2006/main" w="9525">
             <a:solidFill>
-              <a:srgbClr val="176A4B"/>
+              <a:srgbClr val="75B78E"/>
             </a:solidFill>
             <a:prstDash val="solid"/>
           </a:ln>
@@ -12838,11 +12990,12 @@
         </p:spPr>
         <p:txBody>
           <a:bodyPr xmlns:a="http://schemas.openxmlformats.org/drawingml/2006/main" anchor="t">
-            <a:normAutofit fontScale="75490"/>
+            <a:normAutofit fontScale="85556"/>
           </a:bodyPr>
           <a:lstStyle xmlns:a="http://schemas.openxmlformats.org/drawingml/2006/main"/>
           <a:p xmlns:a="http://schemas.openxmlformats.org/drawingml/2006/main">
             <a:pPr algn="l">
+              <a:buNone/>
               <a:defRPr sz="1275" b="1">
                 <a:solidFill>
                   <a:srgbClr val="171714"/>
@@ -12853,9 +13006,9 @@
               </a:defRPr>
             </a:pPr>
             <a:r>
-              <a:rPr sz="1275" b="1">
-                <a:solidFill>
-                  <a:srgbClr val="171714"/>
+              <a:rPr sz="1125" b="1">
+                <a:solidFill>
+                  <a:srgbClr val="F1E9DC"/>
                 </a:solidFill>
                 <a:latin typeface="Arial"/>
                 <a:ea typeface="Arial"/>
@@ -12891,11 +13044,11 @@
             </a:avLst>
           </a:prstGeom>
           <a:solidFill xmlns:a="http://schemas.openxmlformats.org/drawingml/2006/main">
-            <a:srgbClr val="DFF1E7"/>
+            <a:srgbClr val="20382A"/>
           </a:solidFill>
           <a:ln xmlns:a="http://schemas.openxmlformats.org/drawingml/2006/main" w="9525">
             <a:solidFill>
-              <a:srgbClr val="176A4B"/>
+              <a:srgbClr val="75B78E"/>
             </a:solidFill>
             <a:prstDash val="solid"/>
           </a:ln>
@@ -12931,11 +13084,12 @@
         </p:spPr>
         <p:txBody>
           <a:bodyPr xmlns:a="http://schemas.openxmlformats.org/drawingml/2006/main" anchor="t">
-            <a:normAutofit fontScale="80208"/>
+            <a:normAutofit fontScale="85556"/>
           </a:bodyPr>
           <a:lstStyle xmlns:a="http://schemas.openxmlformats.org/drawingml/2006/main"/>
           <a:p xmlns:a="http://schemas.openxmlformats.org/drawingml/2006/main">
             <a:pPr algn="l">
+              <a:buNone/>
               <a:defRPr sz="1200" b="1">
                 <a:solidFill>
                   <a:srgbClr val="171714"/>
@@ -12946,13 +13100,13 @@
               </a:defRPr>
             </a:pPr>
             <a:r>
-              <a:rPr sz="1200" b="1">
-                <a:solidFill>
-                  <a:srgbClr val="171714"/>
-                </a:solidFill>
-                <a:latin typeface="Arial"/>
-                <a:ea typeface="Arial"/>
-                <a:cs typeface="Arial"/>
+              <a:rPr sz="1125" b="1">
+                <a:solidFill>
+                  <a:srgbClr val="F1E9DC"/>
+                </a:solidFill>
+                <a:latin typeface="Menlo"/>
+                <a:ea typeface="Menlo"/>
+                <a:cs typeface="Menlo"/>
               </a:rPr>
               <a:t>99.87</a:t>
             </a:r>
@@ -12984,11 +13138,11 @@
             </a:avLst>
           </a:prstGeom>
           <a:solidFill xmlns:a="http://schemas.openxmlformats.org/drawingml/2006/main">
-            <a:srgbClr val="DFF1E7"/>
+            <a:srgbClr val="20382A"/>
           </a:solidFill>
           <a:ln xmlns:a="http://schemas.openxmlformats.org/drawingml/2006/main" w="9525">
             <a:solidFill>
-              <a:srgbClr val="176A4B"/>
+              <a:srgbClr val="75B78E"/>
             </a:solidFill>
             <a:prstDash val="solid"/>
           </a:ln>
@@ -13024,11 +13178,12 @@
         </p:spPr>
         <p:txBody>
           <a:bodyPr xmlns:a="http://schemas.openxmlformats.org/drawingml/2006/main" anchor="t">
-            <a:normAutofit fontScale="80208"/>
+            <a:normAutofit fontScale="85556"/>
           </a:bodyPr>
           <a:lstStyle xmlns:a="http://schemas.openxmlformats.org/drawingml/2006/main"/>
           <a:p xmlns:a="http://schemas.openxmlformats.org/drawingml/2006/main">
             <a:pPr algn="l">
+              <a:buNone/>
               <a:defRPr sz="1200" b="1">
                 <a:solidFill>
                   <a:srgbClr val="171714"/>
@@ -13039,13 +13194,13 @@
               </a:defRPr>
             </a:pPr>
             <a:r>
-              <a:rPr sz="1200" b="1">
-                <a:solidFill>
-                  <a:srgbClr val="171714"/>
-                </a:solidFill>
-                <a:latin typeface="Arial"/>
-                <a:ea typeface="Arial"/>
-                <a:cs typeface="Arial"/>
+              <a:rPr sz="1125" b="1">
+                <a:solidFill>
+                  <a:srgbClr val="F1E9DC"/>
+                </a:solidFill>
+                <a:latin typeface="Menlo"/>
+                <a:ea typeface="Menlo"/>
+                <a:cs typeface="Menlo"/>
               </a:rPr>
               <a:t>95.88</a:t>
             </a:r>
@@ -13077,11 +13232,11 @@
             </a:avLst>
           </a:prstGeom>
           <a:solidFill xmlns:a="http://schemas.openxmlformats.org/drawingml/2006/main">
-            <a:srgbClr val="DFF1E7"/>
+            <a:srgbClr val="20382A"/>
           </a:solidFill>
           <a:ln xmlns:a="http://schemas.openxmlformats.org/drawingml/2006/main" w="9525">
             <a:solidFill>
-              <a:srgbClr val="176A4B"/>
+              <a:srgbClr val="75B78E"/>
             </a:solidFill>
             <a:prstDash val="solid"/>
           </a:ln>
@@ -13117,11 +13272,12 @@
         </p:spPr>
         <p:txBody>
           <a:bodyPr xmlns:a="http://schemas.openxmlformats.org/drawingml/2006/main" anchor="t">
-            <a:normAutofit fontScale="80208"/>
+            <a:normAutofit fontScale="85556"/>
           </a:bodyPr>
           <a:lstStyle xmlns:a="http://schemas.openxmlformats.org/drawingml/2006/main"/>
           <a:p xmlns:a="http://schemas.openxmlformats.org/drawingml/2006/main">
             <a:pPr algn="l">
+              <a:buNone/>
               <a:defRPr sz="1200" b="1">
                 <a:solidFill>
                   <a:srgbClr val="171714"/>
@@ -13132,13 +13288,13 @@
               </a:defRPr>
             </a:pPr>
             <a:r>
-              <a:rPr sz="1200" b="1">
-                <a:solidFill>
-                  <a:srgbClr val="171714"/>
-                </a:solidFill>
-                <a:latin typeface="Arial"/>
-                <a:ea typeface="Arial"/>
-                <a:cs typeface="Arial"/>
+              <a:rPr sz="1125" b="1">
+                <a:solidFill>
+                  <a:srgbClr val="F1E9DC"/>
+                </a:solidFill>
+                <a:latin typeface="Menlo"/>
+                <a:ea typeface="Menlo"/>
+                <a:cs typeface="Menlo"/>
               </a:rPr>
               <a:t>97.83</a:t>
             </a:r>
@@ -13170,11 +13326,11 @@
             </a:avLst>
           </a:prstGeom>
           <a:solidFill xmlns:a="http://schemas.openxmlformats.org/drawingml/2006/main">
-            <a:srgbClr val="DFF1E7"/>
+            <a:srgbClr val="20382A"/>
           </a:solidFill>
           <a:ln xmlns:a="http://schemas.openxmlformats.org/drawingml/2006/main" w="9525">
             <a:solidFill>
-              <a:srgbClr val="176A4B"/>
+              <a:srgbClr val="75B78E"/>
             </a:solidFill>
             <a:prstDash val="solid"/>
           </a:ln>
@@ -13210,11 +13366,12 @@
         </p:spPr>
         <p:txBody>
           <a:bodyPr xmlns:a="http://schemas.openxmlformats.org/drawingml/2006/main" anchor="t">
-            <a:normAutofit fontScale="80208"/>
+            <a:normAutofit fontScale="85556"/>
           </a:bodyPr>
           <a:lstStyle xmlns:a="http://schemas.openxmlformats.org/drawingml/2006/main"/>
           <a:p xmlns:a="http://schemas.openxmlformats.org/drawingml/2006/main">
             <a:pPr algn="l">
+              <a:buNone/>
               <a:defRPr sz="1200" b="1">
                 <a:solidFill>
                   <a:srgbClr val="171714"/>
@@ -13225,13 +13382,13 @@
               </a:defRPr>
             </a:pPr>
             <a:r>
-              <a:rPr sz="1200" b="1">
-                <a:solidFill>
-                  <a:srgbClr val="171714"/>
-                </a:solidFill>
-                <a:latin typeface="Arial"/>
-                <a:ea typeface="Arial"/>
-                <a:cs typeface="Arial"/>
+              <a:rPr sz="1125" b="1">
+                <a:solidFill>
+                  <a:srgbClr val="F1E9DC"/>
+                </a:solidFill>
+                <a:latin typeface="Menlo"/>
+                <a:ea typeface="Menlo"/>
+                <a:cs typeface="Menlo"/>
               </a:rPr>
               <a:t>0.0037</a:t>
             </a:r>
@@ -13263,11 +13420,11 @@
             </a:avLst>
           </a:prstGeom>
           <a:solidFill xmlns:a="http://schemas.openxmlformats.org/drawingml/2006/main">
-            <a:srgbClr val="DFF1E7"/>
+            <a:srgbClr val="20382A"/>
           </a:solidFill>
           <a:ln xmlns:a="http://schemas.openxmlformats.org/drawingml/2006/main" w="9525">
             <a:solidFill>
-              <a:srgbClr val="176A4B"/>
+              <a:srgbClr val="75B78E"/>
             </a:solidFill>
             <a:prstDash val="solid"/>
           </a:ln>
@@ -13303,11 +13460,12 @@
         </p:spPr>
         <p:txBody>
           <a:bodyPr xmlns:a="http://schemas.openxmlformats.org/drawingml/2006/main" anchor="t">
-            <a:normAutofit fontScale="80208"/>
+            <a:normAutofit fontScale="85556"/>
           </a:bodyPr>
           <a:lstStyle xmlns:a="http://schemas.openxmlformats.org/drawingml/2006/main"/>
           <a:p xmlns:a="http://schemas.openxmlformats.org/drawingml/2006/main">
             <a:pPr algn="l">
+              <a:buNone/>
               <a:defRPr sz="1200" b="1">
                 <a:solidFill>
                   <a:srgbClr val="171714"/>
@@ -13318,13 +13476,13 @@
               </a:defRPr>
             </a:pPr>
             <a:r>
-              <a:rPr sz="1200" b="1">
-                <a:solidFill>
-                  <a:srgbClr val="171714"/>
-                </a:solidFill>
-                <a:latin typeface="Arial"/>
-                <a:ea typeface="Arial"/>
-                <a:cs typeface="Arial"/>
+              <a:rPr sz="1125" b="1">
+                <a:solidFill>
+                  <a:srgbClr val="F1E9DC"/>
+                </a:solidFill>
+                <a:latin typeface="Menlo"/>
+                <a:ea typeface="Menlo"/>
+                <a:cs typeface="Menlo"/>
               </a:rPr>
               <a:t>3.54</a:t>
             </a:r>
@@ -13356,11 +13514,11 @@
             </a:avLst>
           </a:prstGeom>
           <a:solidFill xmlns:a="http://schemas.openxmlformats.org/drawingml/2006/main">
-            <a:srgbClr val="FFFFFF"/>
+            <a:srgbClr val="2B1512"/>
           </a:solidFill>
           <a:ln xmlns:a="http://schemas.openxmlformats.org/drawingml/2006/main" w="9525">
             <a:solidFill>
-              <a:srgbClr val="D7D6CF"/>
+              <a:srgbClr val="E35E54"/>
             </a:solidFill>
             <a:prstDash val="solid"/>
           </a:ln>
@@ -13396,11 +13554,12 @@
         </p:spPr>
         <p:txBody>
           <a:bodyPr xmlns:a="http://schemas.openxmlformats.org/drawingml/2006/main" anchor="t">
-            <a:normAutofit fontScale="75490"/>
+            <a:normAutofit fontScale="85556"/>
           </a:bodyPr>
           <a:lstStyle xmlns:a="http://schemas.openxmlformats.org/drawingml/2006/main"/>
           <a:p xmlns:a="http://schemas.openxmlformats.org/drawingml/2006/main">
             <a:pPr algn="l">
+              <a:buNone/>
               <a:defRPr sz="1275" b="1">
                 <a:solidFill>
                   <a:srgbClr val="171714"/>
@@ -13411,9 +13570,9 @@
               </a:defRPr>
             </a:pPr>
             <a:r>
-              <a:rPr sz="1275" b="1">
-                <a:solidFill>
-                  <a:srgbClr val="171714"/>
+              <a:rPr sz="1125" b="0">
+                <a:solidFill>
+                  <a:srgbClr val="F28A80"/>
                 </a:solidFill>
                 <a:latin typeface="Arial"/>
                 <a:ea typeface="Arial"/>
@@ -13449,11 +13608,11 @@
             </a:avLst>
           </a:prstGeom>
           <a:solidFill xmlns:a="http://schemas.openxmlformats.org/drawingml/2006/main">
-            <a:srgbClr val="FFFFFF"/>
+            <a:srgbClr val="2B1512"/>
           </a:solidFill>
           <a:ln xmlns:a="http://schemas.openxmlformats.org/drawingml/2006/main" w="9525">
             <a:solidFill>
-              <a:srgbClr val="D7D6CF"/>
+              <a:srgbClr val="E35E54"/>
             </a:solidFill>
             <a:prstDash val="solid"/>
           </a:ln>
@@ -13489,11 +13648,12 @@
         </p:spPr>
         <p:txBody>
           <a:bodyPr xmlns:a="http://schemas.openxmlformats.org/drawingml/2006/main" anchor="t">
-            <a:normAutofit fontScale="80208"/>
+            <a:normAutofit fontScale="85556"/>
           </a:bodyPr>
           <a:lstStyle xmlns:a="http://schemas.openxmlformats.org/drawingml/2006/main"/>
           <a:p xmlns:a="http://schemas.openxmlformats.org/drawingml/2006/main">
             <a:pPr algn="l">
+              <a:buNone/>
               <a:defRPr sz="1200" b="0">
                 <a:solidFill>
                   <a:srgbClr val="A43C2E"/>
@@ -13504,13 +13664,13 @@
               </a:defRPr>
             </a:pPr>
             <a:r>
-              <a:rPr sz="1200" b="0">
-                <a:solidFill>
-                  <a:srgbClr val="A43C2E"/>
-                </a:solidFill>
-                <a:latin typeface="Arial"/>
-                <a:ea typeface="Arial"/>
-                <a:cs typeface="Arial"/>
+              <a:rPr sz="1125" b="0">
+                <a:solidFill>
+                  <a:srgbClr val="F28A80"/>
+                </a:solidFill>
+                <a:latin typeface="Menlo"/>
+                <a:ea typeface="Menlo"/>
+                <a:cs typeface="Menlo"/>
               </a:rPr>
               <a:t>99.93</a:t>
             </a:r>
@@ -13542,11 +13702,11 @@
             </a:avLst>
           </a:prstGeom>
           <a:solidFill xmlns:a="http://schemas.openxmlformats.org/drawingml/2006/main">
-            <a:srgbClr val="FFFFFF"/>
+            <a:srgbClr val="2B1512"/>
           </a:solidFill>
           <a:ln xmlns:a="http://schemas.openxmlformats.org/drawingml/2006/main" w="9525">
             <a:solidFill>
-              <a:srgbClr val="D7D6CF"/>
+              <a:srgbClr val="E35E54"/>
             </a:solidFill>
             <a:prstDash val="solid"/>
           </a:ln>
@@ -13582,11 +13742,12 @@
         </p:spPr>
         <p:txBody>
           <a:bodyPr xmlns:a="http://schemas.openxmlformats.org/drawingml/2006/main" anchor="t">
-            <a:normAutofit fontScale="80208"/>
+            <a:normAutofit fontScale="85556"/>
           </a:bodyPr>
           <a:lstStyle xmlns:a="http://schemas.openxmlformats.org/drawingml/2006/main"/>
           <a:p xmlns:a="http://schemas.openxmlformats.org/drawingml/2006/main">
             <a:pPr algn="l">
+              <a:buNone/>
               <a:defRPr sz="1200" b="0">
                 <a:solidFill>
                   <a:srgbClr val="A43C2E"/>
@@ -13597,13 +13758,13 @@
               </a:defRPr>
             </a:pPr>
             <a:r>
-              <a:rPr sz="1200" b="0">
-                <a:solidFill>
-                  <a:srgbClr val="A43C2E"/>
-                </a:solidFill>
-                <a:latin typeface="Arial"/>
-                <a:ea typeface="Arial"/>
-                <a:cs typeface="Arial"/>
+              <a:rPr sz="1125" b="0">
+                <a:solidFill>
+                  <a:srgbClr val="F28A80"/>
+                </a:solidFill>
+                <a:latin typeface="Menlo"/>
+                <a:ea typeface="Menlo"/>
+                <a:cs typeface="Menlo"/>
               </a:rPr>
               <a:t>16.85</a:t>
             </a:r>
@@ -13635,11 +13796,11 @@
             </a:avLst>
           </a:prstGeom>
           <a:solidFill xmlns:a="http://schemas.openxmlformats.org/drawingml/2006/main">
-            <a:srgbClr val="FFFFFF"/>
+            <a:srgbClr val="2B1512"/>
           </a:solidFill>
           <a:ln xmlns:a="http://schemas.openxmlformats.org/drawingml/2006/main" w="9525">
             <a:solidFill>
-              <a:srgbClr val="D7D6CF"/>
+              <a:srgbClr val="E35E54"/>
             </a:solidFill>
             <a:prstDash val="solid"/>
           </a:ln>
@@ -13675,11 +13836,12 @@
         </p:spPr>
         <p:txBody>
           <a:bodyPr xmlns:a="http://schemas.openxmlformats.org/drawingml/2006/main" anchor="t">
-            <a:normAutofit fontScale="80208"/>
+            <a:normAutofit fontScale="85556"/>
           </a:bodyPr>
           <a:lstStyle xmlns:a="http://schemas.openxmlformats.org/drawingml/2006/main"/>
           <a:p xmlns:a="http://schemas.openxmlformats.org/drawingml/2006/main">
             <a:pPr algn="l">
+              <a:buNone/>
               <a:defRPr sz="1200" b="0">
                 <a:solidFill>
                   <a:srgbClr val="A43C2E"/>
@@ -13690,13 +13852,13 @@
               </a:defRPr>
             </a:pPr>
             <a:r>
-              <a:rPr sz="1200" b="0">
-                <a:solidFill>
-                  <a:srgbClr val="A43C2E"/>
-                </a:solidFill>
-                <a:latin typeface="Arial"/>
-                <a:ea typeface="Arial"/>
-                <a:cs typeface="Arial"/>
+              <a:rPr sz="1125" b="0">
+                <a:solidFill>
+                  <a:srgbClr val="F28A80"/>
+                </a:solidFill>
+                <a:latin typeface="Menlo"/>
+                <a:ea typeface="Menlo"/>
+                <a:cs typeface="Menlo"/>
               </a:rPr>
               <a:t>28.83</a:t>
             </a:r>
@@ -13728,11 +13890,11 @@
             </a:avLst>
           </a:prstGeom>
           <a:solidFill xmlns:a="http://schemas.openxmlformats.org/drawingml/2006/main">
-            <a:srgbClr val="FFFFFF"/>
+            <a:srgbClr val="2B1512"/>
           </a:solidFill>
           <a:ln xmlns:a="http://schemas.openxmlformats.org/drawingml/2006/main" w="9525">
             <a:solidFill>
-              <a:srgbClr val="D7D6CF"/>
+              <a:srgbClr val="E35E54"/>
             </a:solidFill>
             <a:prstDash val="solid"/>
           </a:ln>
@@ -13768,11 +13930,12 @@
         </p:spPr>
         <p:txBody>
           <a:bodyPr xmlns:a="http://schemas.openxmlformats.org/drawingml/2006/main" anchor="t">
-            <a:normAutofit fontScale="80208"/>
+            <a:normAutofit fontScale="85556"/>
           </a:bodyPr>
           <a:lstStyle xmlns:a="http://schemas.openxmlformats.org/drawingml/2006/main"/>
           <a:p xmlns:a="http://schemas.openxmlformats.org/drawingml/2006/main">
             <a:pPr algn="l">
+              <a:buNone/>
               <a:defRPr sz="1200" b="0">
                 <a:solidFill>
                   <a:srgbClr val="A43C2E"/>
@@ -13783,13 +13946,13 @@
               </a:defRPr>
             </a:pPr>
             <a:r>
-              <a:rPr sz="1200" b="0">
-                <a:solidFill>
-                  <a:srgbClr val="A43C2E"/>
-                </a:solidFill>
-                <a:latin typeface="Arial"/>
-                <a:ea typeface="Arial"/>
-                <a:cs typeface="Arial"/>
+              <a:rPr sz="1125" b="0">
+                <a:solidFill>
+                  <a:srgbClr val="F28A80"/>
+                </a:solidFill>
+                <a:latin typeface="Menlo"/>
+                <a:ea typeface="Menlo"/>
+                <a:cs typeface="Menlo"/>
               </a:rPr>
               <a:t>87.44</a:t>
             </a:r>
@@ -13821,11 +13984,11 @@
             </a:avLst>
           </a:prstGeom>
           <a:solidFill xmlns:a="http://schemas.openxmlformats.org/drawingml/2006/main">
-            <a:srgbClr val="FFFFFF"/>
+            <a:srgbClr val="2B1512"/>
           </a:solidFill>
           <a:ln xmlns:a="http://schemas.openxmlformats.org/drawingml/2006/main" w="9525">
             <a:solidFill>
-              <a:srgbClr val="D7D6CF"/>
+              <a:srgbClr val="E35E54"/>
             </a:solidFill>
             <a:prstDash val="solid"/>
           </a:ln>
@@ -13861,11 +14024,12 @@
         </p:spPr>
         <p:txBody>
           <a:bodyPr xmlns:a="http://schemas.openxmlformats.org/drawingml/2006/main" anchor="t">
-            <a:normAutofit fontScale="80208"/>
+            <a:normAutofit fontScale="85556"/>
           </a:bodyPr>
           <a:lstStyle xmlns:a="http://schemas.openxmlformats.org/drawingml/2006/main"/>
           <a:p xmlns:a="http://schemas.openxmlformats.org/drawingml/2006/main">
             <a:pPr algn="l">
+              <a:buNone/>
               <a:defRPr sz="1200" b="0">
                 <a:solidFill>
                   <a:srgbClr val="A43C2E"/>
@@ -13876,13 +14040,13 @@
               </a:defRPr>
             </a:pPr>
             <a:r>
-              <a:rPr sz="1200" b="0">
-                <a:solidFill>
-                  <a:srgbClr val="A43C2E"/>
-                </a:solidFill>
-                <a:latin typeface="Arial"/>
-                <a:ea typeface="Arial"/>
-                <a:cs typeface="Arial"/>
+              <a:rPr sz="1125" b="0">
+                <a:solidFill>
+                  <a:srgbClr val="F28A80"/>
+                </a:solidFill>
+                <a:latin typeface="Menlo"/>
+                <a:ea typeface="Menlo"/>
+                <a:cs typeface="Menlo"/>
               </a:rPr>
               <a:t>19.74</a:t>
             </a:r>
@@ -13914,11 +14078,11 @@
             </a:avLst>
           </a:prstGeom>
           <a:solidFill xmlns:a="http://schemas.openxmlformats.org/drawingml/2006/main">
-            <a:srgbClr val="FCE5DA"/>
+            <a:srgbClr val="211B14"/>
           </a:solidFill>
           <a:ln xmlns:a="http://schemas.openxmlformats.org/drawingml/2006/main" w="9525">
             <a:solidFill>
-              <a:srgbClr val="E9652E"/>
+              <a:srgbClr val="E8793D"/>
             </a:solidFill>
             <a:prstDash val="solid"/>
           </a:ln>
@@ -13954,11 +14118,12 @@
         </p:spPr>
         <p:txBody>
           <a:bodyPr xmlns:a="http://schemas.openxmlformats.org/drawingml/2006/main" anchor="t">
-            <a:normAutofit fontScale="76667"/>
-          </a:bodyPr>
-          <a:lstStyle xmlns:a="http://schemas.openxmlformats.org/drawingml/2006/main"/>
-          <a:p xmlns:a="http://schemas.openxmlformats.org/drawingml/2006/main">
-            <a:pPr algn="l">
+            <a:normAutofit fontScale="95833"/>
+          </a:bodyPr>
+          <a:lstStyle xmlns:a="http://schemas.openxmlformats.org/drawingml/2006/main"/>
+          <a:p xmlns:a="http://schemas.openxmlformats.org/drawingml/2006/main">
+            <a:pPr algn="ctr">
+              <a:buNone/>
               <a:defRPr sz="1500" b="1">
                 <a:solidFill>
                   <a:srgbClr val="E9652E"/>
@@ -13969,13 +14134,13 @@
               </a:defRPr>
             </a:pPr>
             <a:r>
-              <a:rPr sz="1500" b="1">
-                <a:solidFill>
-                  <a:srgbClr val="E9652E"/>
-                </a:solidFill>
-                <a:latin typeface="Arial"/>
-                <a:ea typeface="Arial"/>
-                <a:cs typeface="Arial"/>
+              <a:rPr sz="1200" b="1">
+                <a:solidFill>
+                  <a:srgbClr val="F19A68"/>
+                </a:solidFill>
+                <a:latin typeface="Menlo"/>
+                <a:ea typeface="Menlo"/>
+                <a:cs typeface="Menlo"/>
               </a:rPr>
               <a:t>Precision  +1.12 pts</a:t>
             </a:r>
@@ -14012,11 +14177,12 @@
         </p:spPr>
         <p:txBody>
           <a:bodyPr xmlns:a="http://schemas.openxmlformats.org/drawingml/2006/main" anchor="t">
-            <a:normAutofit fontScale="76667"/>
-          </a:bodyPr>
-          <a:lstStyle xmlns:a="http://schemas.openxmlformats.org/drawingml/2006/main"/>
-          <a:p xmlns:a="http://schemas.openxmlformats.org/drawingml/2006/main">
-            <a:pPr algn="l">
+            <a:normAutofit fontScale="95833"/>
+          </a:bodyPr>
+          <a:lstStyle xmlns:a="http://schemas.openxmlformats.org/drawingml/2006/main"/>
+          <a:p xmlns:a="http://schemas.openxmlformats.org/drawingml/2006/main">
+            <a:pPr algn="ctr">
+              <a:buNone/>
               <a:defRPr sz="1500" b="1">
                 <a:solidFill>
                   <a:srgbClr val="E9652E"/>
@@ -14027,13 +14193,13 @@
               </a:defRPr>
             </a:pPr>
             <a:r>
-              <a:rPr sz="1500" b="1">
-                <a:solidFill>
-                  <a:srgbClr val="E9652E"/>
-                </a:solidFill>
-                <a:latin typeface="Arial"/>
-                <a:ea typeface="Arial"/>
-                <a:cs typeface="Arial"/>
+              <a:rPr sz="1200" b="1">
+                <a:solidFill>
+                  <a:srgbClr val="F19A68"/>
+                </a:solidFill>
+                <a:latin typeface="Menlo"/>
+                <a:ea typeface="Menlo"/>
+                <a:cs typeface="Menlo"/>
               </a:rPr>
               <a:t>Challenge  −0.23 pts</a:t>
             </a:r>
@@ -14070,11 +14236,12 @@
         </p:spPr>
         <p:txBody>
           <a:bodyPr xmlns:a="http://schemas.openxmlformats.org/drawingml/2006/main" anchor="t">
-            <a:normAutofit fontScale="76667"/>
-          </a:bodyPr>
-          <a:lstStyle xmlns:a="http://schemas.openxmlformats.org/drawingml/2006/main"/>
-          <a:p xmlns:a="http://schemas.openxmlformats.org/drawingml/2006/main">
-            <a:pPr algn="l">
+            <a:normAutofit fontScale="95833"/>
+          </a:bodyPr>
+          <a:lstStyle xmlns:a="http://schemas.openxmlformats.org/drawingml/2006/main"/>
+          <a:p xmlns:a="http://schemas.openxmlformats.org/drawingml/2006/main">
+            <a:pPr algn="ctr">
+              <a:buNone/>
               <a:defRPr sz="1500" b="1">
                 <a:solidFill>
                   <a:srgbClr val="E9652E"/>
@@ -14085,13 +14252,13 @@
               </a:defRPr>
             </a:pPr>
             <a:r>
-              <a:rPr sz="1500" b="1">
-                <a:solidFill>
-                  <a:srgbClr val="E9652E"/>
-                </a:solidFill>
-                <a:latin typeface="Arial"/>
-                <a:ea typeface="Arial"/>
-                <a:cs typeface="Arial"/>
+              <a:rPr sz="1200" b="1">
+                <a:solidFill>
+                  <a:srgbClr val="F19A68"/>
+                </a:solidFill>
+                <a:latin typeface="Menlo"/>
+                <a:ea typeface="Menlo"/>
+                <a:cs typeface="Menlo"/>
               </a:rPr>
               <a:t>Latency  +0.16 ms p95</a:t>
             </a:r>
@@ -14114,7 +14281,7 @@
     <p:bg>
       <p:bgPr>
         <a:solidFill xmlns:a="http://schemas.openxmlformats.org/drawingml/2006/main">
-          <a:srgbClr val="F8F7F3"/>
+          <a:srgbClr val="0A0907"/>
         </a:solidFill>
       </p:bgPr>
     </p:bg>
@@ -14162,6 +14329,7 @@
           <a:lstStyle xmlns:a="http://schemas.openxmlformats.org/drawingml/2006/main"/>
           <a:p xmlns:a="http://schemas.openxmlformats.org/drawingml/2006/main">
             <a:pPr algn="l">
+              <a:buNone/>
               <a:defRPr sz="975" b="1">
                 <a:solidFill>
                   <a:srgbClr val="E9652E"/>
@@ -14172,13 +14340,13 @@
               </a:defRPr>
             </a:pPr>
             <a:r>
-              <a:rPr sz="975" b="1">
-                <a:solidFill>
-                  <a:srgbClr val="E9652E"/>
-                </a:solidFill>
-                <a:latin typeface="Arial"/>
-                <a:ea typeface="Arial"/>
-                <a:cs typeface="Arial"/>
+              <a:rPr sz="825" b="1">
+                <a:solidFill>
+                  <a:srgbClr val="F19A68"/>
+                </a:solidFill>
+                <a:latin typeface="Menlo"/>
+                <a:ea typeface="Menlo"/>
+                <a:cs typeface="Menlo"/>
               </a:rPr>
               <a:t>ADAPTIVE PAYMENT ASSURANCE RANGE</a:t>
             </a:r>
@@ -14220,6 +14388,7 @@
           <a:lstStyle xmlns:a="http://schemas.openxmlformats.org/drawingml/2006/main"/>
           <a:p xmlns:a="http://schemas.openxmlformats.org/drawingml/2006/main">
             <a:pPr algn="l">
+              <a:buNone/>
               <a:defRPr sz="2850" b="1">
                 <a:solidFill>
                   <a:srgbClr val="171714"/>
@@ -14230,13 +14399,13 @@
               </a:defRPr>
             </a:pPr>
             <a:r>
-              <a:rPr sz="2850" b="1">
-                <a:solidFill>
-                  <a:srgbClr val="171714"/>
-                </a:solidFill>
-                <a:latin typeface="Arial"/>
-                <a:ea typeface="Arial"/>
-                <a:cs typeface="Arial"/>
+              <a:rPr sz="2925" b="0">
+                <a:solidFill>
+                  <a:srgbClr val="F1E9DC"/>
+                </a:solidFill>
+                <a:latin typeface="Georgia"/>
+                <a:ea typeface="Georgia"/>
+                <a:cs typeface="Georgia"/>
               </a:rPr>
               <a:t>A small, portable model powers the live demo</a:t>
             </a:r>
@@ -14273,11 +14442,12 @@
         </p:spPr>
         <p:txBody>
           <a:bodyPr xmlns:a="http://schemas.openxmlformats.org/drawingml/2006/main" anchor="t">
-            <a:normAutofit fontScale="79487"/>
+            <a:normAutofit fontScale="93939"/>
           </a:bodyPr>
           <a:lstStyle xmlns:a="http://schemas.openxmlformats.org/drawingml/2006/main"/>
           <a:p xmlns:a="http://schemas.openxmlformats.org/drawingml/2006/main">
             <a:pPr algn="r">
+              <a:buNone/>
               <a:defRPr sz="975" b="0">
                 <a:solidFill>
                   <a:srgbClr val="686863"/>
@@ -14288,13 +14458,13 @@
               </a:defRPr>
             </a:pPr>
             <a:r>
-              <a:rPr sz="975" b="0">
-                <a:solidFill>
-                  <a:srgbClr val="686863"/>
-                </a:solidFill>
-                <a:latin typeface="Arial"/>
-                <a:ea typeface="Arial"/>
-                <a:cs typeface="Arial"/>
+              <a:rPr sz="825" b="0">
+                <a:solidFill>
+                  <a:srgbClr val="9C9183"/>
+                </a:solidFill>
+                <a:latin typeface="Menlo"/>
+                <a:ea typeface="Menlo"/>
+                <a:cs typeface="Menlo"/>
               </a:rPr>
               <a:t>06</a:t>
             </a:r>
@@ -14324,11 +14494,11 @@
             <a:avLst/>
           </a:prstGeom>
           <a:solidFill xmlns:a="http://schemas.openxmlformats.org/drawingml/2006/main">
-            <a:srgbClr val="D7D6CF"/>
+            <a:srgbClr val="3F382E"/>
           </a:solidFill>
           <a:ln xmlns:a="http://schemas.openxmlformats.org/drawingml/2006/main" w="0">
             <a:solidFill>
-              <a:srgbClr val="D7D6CF"/>
+              <a:srgbClr val="3F382E"/>
             </a:solidFill>
             <a:prstDash val="solid"/>
           </a:ln>
@@ -14359,11 +14529,11 @@
             </a:avLst>
           </a:prstGeom>
           <a:solidFill xmlns:a="http://schemas.openxmlformats.org/drawingml/2006/main">
-            <a:srgbClr val="FFFFFF"/>
+            <a:srgbClr val="14110D"/>
           </a:solidFill>
           <a:ln xmlns:a="http://schemas.openxmlformats.org/drawingml/2006/main" w="9525">
             <a:solidFill>
-              <a:srgbClr val="D7D6CF"/>
+              <a:srgbClr val="6B5F50"/>
             </a:solidFill>
             <a:prstDash val="solid"/>
           </a:ln>
@@ -14371,14 +14541,14 @@
       </p:sp>
       <p:pic>
         <p:nvPicPr>
-          <p:cNvPr id="25" name=""/>
+          <p:cNvPr id="27" name=""/>
           <p:cNvPicPr>
             <a:picLocks xmlns:a="http://schemas.openxmlformats.org/drawingml/2006/main" noChangeAspect="1"/>
           </p:cNvPicPr>
           <p:nvPr/>
         </p:nvPicPr>
         <p:blipFill>
-          <a:blip xmlns:r="http://schemas.openxmlformats.org/officeDocument/2006/relationships" xmlns:a="http://schemas.openxmlformats.org/drawingml/2006/main" r:embed="Rd606c18cd352450d"/>
+          <a:blip xmlns:r="http://schemas.openxmlformats.org/officeDocument/2006/relationships" xmlns:a="http://schemas.openxmlformats.org/drawingml/2006/main" r:embed="R707547b1984b4bfd"/>
           <a:srcRect xmlns:a="http://schemas.openxmlformats.org/drawingml/2006/main" l="0" t="33403" r="0" b="33403"/>
           <a:stretch xmlns:a="http://schemas.openxmlformats.org/drawingml/2006/main">
             <a:fillRect l="0" t="0" r="0" b="0"/>
@@ -14389,10 +14559,8 @@
             <a:off x="400050" y="1600200"/>
             <a:ext cx="7105650" cy="4229100"/>
           </a:xfrm>
-          <a:prstGeom xmlns:a="http://schemas.openxmlformats.org/drawingml/2006/main" prst="roundRect">
-            <a:avLst>
-              <a:gd name="adj" fmla="val 1802"/>
-            </a:avLst>
+          <a:prstGeom xmlns:a="http://schemas.openxmlformats.org/drawingml/2006/main" prst="rect">
+            <a:avLst/>
           </a:prstGeom>
         </p:spPr>
       </p:pic>
@@ -14421,11 +14589,11 @@
             </a:avLst>
           </a:prstGeom>
           <a:solidFill xmlns:a="http://schemas.openxmlformats.org/drawingml/2006/main">
-            <a:srgbClr val="FFFFFF"/>
+            <a:srgbClr val="14110D"/>
           </a:solidFill>
           <a:ln xmlns:a="http://schemas.openxmlformats.org/drawingml/2006/main" w="9525">
             <a:solidFill>
-              <a:srgbClr val="D7D6CF"/>
+              <a:srgbClr val="6B5F50"/>
             </a:solidFill>
             <a:prstDash val="solid"/>
           </a:ln>
@@ -14466,6 +14634,7 @@
           <a:lstStyle xmlns:a="http://schemas.openxmlformats.org/drawingml/2006/main"/>
           <a:p xmlns:a="http://schemas.openxmlformats.org/drawingml/2006/main">
             <a:pPr algn="l">
+              <a:buNone/>
               <a:defRPr sz="2325" b="1">
                 <a:solidFill>
                   <a:srgbClr val="E9652E"/>
@@ -14476,13 +14645,13 @@
               </a:defRPr>
             </a:pPr>
             <a:r>
-              <a:rPr sz="2325" b="1">
-                <a:solidFill>
-                  <a:srgbClr val="E9652E"/>
-                </a:solidFill>
-                <a:latin typeface="Arial"/>
-                <a:ea typeface="Arial"/>
-                <a:cs typeface="Arial"/>
+              <a:rPr sz="2325" b="0">
+                <a:solidFill>
+                  <a:srgbClr val="F19A68"/>
+                </a:solidFill>
+                <a:latin typeface="Georgia"/>
+                <a:ea typeface="Georgia"/>
+                <a:cs typeface="Georgia"/>
               </a:rPr>
               <a:t>3 ×</a:t>
             </a:r>
@@ -14524,6 +14693,7 @@
           <a:lstStyle xmlns:a="http://schemas.openxmlformats.org/drawingml/2006/main"/>
           <a:p xmlns:a="http://schemas.openxmlformats.org/drawingml/2006/main">
             <a:pPr algn="l">
+              <a:buNone/>
               <a:defRPr sz="1350" b="1">
                 <a:solidFill>
                   <a:srgbClr val="171714"/>
@@ -14534,9 +14704,9 @@
               </a:defRPr>
             </a:pPr>
             <a:r>
-              <a:rPr sz="1350" b="1">
-                <a:solidFill>
-                  <a:srgbClr val="171714"/>
+              <a:rPr sz="1275" b="1">
+                <a:solidFill>
+                  <a:srgbClr val="F1E9DC"/>
                 </a:solidFill>
                 <a:latin typeface="Arial"/>
                 <a:ea typeface="Arial"/>
@@ -14572,11 +14742,11 @@
             </a:avLst>
           </a:prstGeom>
           <a:solidFill xmlns:a="http://schemas.openxmlformats.org/drawingml/2006/main">
-            <a:srgbClr val="FFFFFF"/>
+            <a:srgbClr val="14110D"/>
           </a:solidFill>
           <a:ln xmlns:a="http://schemas.openxmlformats.org/drawingml/2006/main" w="9525">
             <a:solidFill>
-              <a:srgbClr val="D7D6CF"/>
+              <a:srgbClr val="6B5F50"/>
             </a:solidFill>
             <a:prstDash val="solid"/>
           </a:ln>
@@ -14617,6 +14787,7 @@
           <a:lstStyle xmlns:a="http://schemas.openxmlformats.org/drawingml/2006/main"/>
           <a:p xmlns:a="http://schemas.openxmlformats.org/drawingml/2006/main">
             <a:pPr algn="l">
+              <a:buNone/>
               <a:defRPr sz="2325" b="1">
                 <a:solidFill>
                   <a:srgbClr val="E9652E"/>
@@ -14627,13 +14798,13 @@
               </a:defRPr>
             </a:pPr>
             <a:r>
-              <a:rPr sz="2325" b="1">
-                <a:solidFill>
-                  <a:srgbClr val="E9652E"/>
-                </a:solidFill>
-                <a:latin typeface="Arial"/>
-                <a:ea typeface="Arial"/>
-                <a:cs typeface="Arial"/>
+              <a:rPr sz="2325" b="0">
+                <a:solidFill>
+                  <a:srgbClr val="F19A68"/>
+                </a:solidFill>
+                <a:latin typeface="Georgia"/>
+                <a:ea typeface="Georgia"/>
+                <a:cs typeface="Georgia"/>
               </a:rPr>
               <a:t>46</a:t>
             </a:r>
@@ -14675,6 +14846,7 @@
           <a:lstStyle xmlns:a="http://schemas.openxmlformats.org/drawingml/2006/main"/>
           <a:p xmlns:a="http://schemas.openxmlformats.org/drawingml/2006/main">
             <a:pPr algn="l">
+              <a:buNone/>
               <a:defRPr sz="1350" b="1">
                 <a:solidFill>
                   <a:srgbClr val="171714"/>
@@ -14685,9 +14857,9 @@
               </a:defRPr>
             </a:pPr>
             <a:r>
-              <a:rPr sz="1350" b="1">
-                <a:solidFill>
-                  <a:srgbClr val="171714"/>
+              <a:rPr sz="1275" b="1">
+                <a:solidFill>
+                  <a:srgbClr val="F1E9DC"/>
                 </a:solidFill>
                 <a:latin typeface="Arial"/>
                 <a:ea typeface="Arial"/>
@@ -14723,11 +14895,11 @@
             </a:avLst>
           </a:prstGeom>
           <a:solidFill xmlns:a="http://schemas.openxmlformats.org/drawingml/2006/main">
-            <a:srgbClr val="FFFFFF"/>
+            <a:srgbClr val="14110D"/>
           </a:solidFill>
           <a:ln xmlns:a="http://schemas.openxmlformats.org/drawingml/2006/main" w="9525">
             <a:solidFill>
-              <a:srgbClr val="D7D6CF"/>
+              <a:srgbClr val="6B5F50"/>
             </a:solidFill>
             <a:prstDash val="solid"/>
           </a:ln>
@@ -14768,6 +14940,7 @@
           <a:lstStyle xmlns:a="http://schemas.openxmlformats.org/drawingml/2006/main"/>
           <a:p xmlns:a="http://schemas.openxmlformats.org/drawingml/2006/main">
             <a:pPr algn="l">
+              <a:buNone/>
               <a:defRPr sz="2325" b="1">
                 <a:solidFill>
                   <a:srgbClr val="E9652E"/>
@@ -14778,13 +14951,13 @@
               </a:defRPr>
             </a:pPr>
             <a:r>
-              <a:rPr sz="2325" b="1">
-                <a:solidFill>
-                  <a:srgbClr val="E9652E"/>
-                </a:solidFill>
-                <a:latin typeface="Arial"/>
-                <a:ea typeface="Arial"/>
-                <a:cs typeface="Arial"/>
+              <a:rPr sz="2325" b="0">
+                <a:solidFill>
+                  <a:srgbClr val="F19A68"/>
+                </a:solidFill>
+                <a:latin typeface="Georgia"/>
+                <a:ea typeface="Georgia"/>
+                <a:cs typeface="Georgia"/>
               </a:rPr>
               <a:t>12</a:t>
             </a:r>
@@ -14826,6 +14999,7 @@
           <a:lstStyle xmlns:a="http://schemas.openxmlformats.org/drawingml/2006/main"/>
           <a:p xmlns:a="http://schemas.openxmlformats.org/drawingml/2006/main">
             <a:pPr algn="l">
+              <a:buNone/>
               <a:defRPr sz="1350" b="1">
                 <a:solidFill>
                   <a:srgbClr val="171714"/>
@@ -14836,9 +15010,9 @@
               </a:defRPr>
             </a:pPr>
             <a:r>
-              <a:rPr sz="1350" b="1">
-                <a:solidFill>
-                  <a:srgbClr val="171714"/>
+              <a:rPr sz="1275" b="1">
+                <a:solidFill>
+                  <a:srgbClr val="F1E9DC"/>
                 </a:solidFill>
                 <a:latin typeface="Arial"/>
                 <a:ea typeface="Arial"/>
@@ -14874,11 +15048,11 @@
             </a:avLst>
           </a:prstGeom>
           <a:solidFill xmlns:a="http://schemas.openxmlformats.org/drawingml/2006/main">
-            <a:srgbClr val="DFF1E7"/>
+            <a:srgbClr val="20382A"/>
           </a:solidFill>
-          <a:ln xmlns:a="http://schemas.openxmlformats.org/drawingml/2006/main" w="9525">
+          <a:ln xmlns:a="http://schemas.openxmlformats.org/drawingml/2006/main" w="19050">
             <a:solidFill>
-              <a:srgbClr val="176A4B"/>
+              <a:srgbClr val="75B78E"/>
             </a:solidFill>
             <a:prstDash val="solid"/>
           </a:ln>
@@ -14919,6 +15093,7 @@
           <a:lstStyle xmlns:a="http://schemas.openxmlformats.org/drawingml/2006/main"/>
           <a:p xmlns:a="http://schemas.openxmlformats.org/drawingml/2006/main">
             <a:pPr algn="l">
+              <a:buNone/>
               <a:defRPr sz="2325" b="1">
                 <a:solidFill>
                   <a:srgbClr val="176A4B"/>
@@ -14929,13 +15104,13 @@
               </a:defRPr>
             </a:pPr>
             <a:r>
-              <a:rPr sz="2325" b="1">
-                <a:solidFill>
-                  <a:srgbClr val="176A4B"/>
-                </a:solidFill>
-                <a:latin typeface="Arial"/>
-                <a:ea typeface="Arial"/>
-                <a:cs typeface="Arial"/>
+              <a:rPr sz="2325" b="0">
+                <a:solidFill>
+                  <a:srgbClr val="75B78E"/>
+                </a:solidFill>
+                <a:latin typeface="Georgia"/>
+                <a:ea typeface="Georgia"/>
+                <a:cs typeface="Georgia"/>
               </a:rPr>
               <a:t>0.0</a:t>
             </a:r>
@@ -14977,6 +15152,7 @@
           <a:lstStyle xmlns:a="http://schemas.openxmlformats.org/drawingml/2006/main"/>
           <a:p xmlns:a="http://schemas.openxmlformats.org/drawingml/2006/main">
             <a:pPr algn="l">
+              <a:buNone/>
               <a:defRPr sz="1350" b="1">
                 <a:solidFill>
                   <a:srgbClr val="171714"/>
@@ -14987,9 +15163,9 @@
               </a:defRPr>
             </a:pPr>
             <a:r>
-              <a:rPr sz="1350" b="1">
-                <a:solidFill>
-                  <a:srgbClr val="171714"/>
+              <a:rPr sz="1275" b="1">
+                <a:solidFill>
+                  <a:srgbClr val="F1E9DC"/>
                 </a:solidFill>
                 <a:latin typeface="Arial"/>
                 <a:ea typeface="Arial"/>
@@ -15016,7 +15192,7 @@
         </p:nvSpPr>
         <p:spPr>
           <a:xfrm xmlns:a="http://schemas.openxmlformats.org/drawingml/2006/main">
-            <a:off x="7905750" y="5638800"/>
+            <a:off x="7905750" y="5562600"/>
             <a:ext cx="3886200" cy="266700"/>
           </a:xfrm>
           <a:prstGeom xmlns:a="http://schemas.openxmlformats.org/drawingml/2006/main" prst="rect">
@@ -15035,6 +15211,7 @@
           <a:lstStyle xmlns:a="http://schemas.openxmlformats.org/drawingml/2006/main"/>
           <a:p xmlns:a="http://schemas.openxmlformats.org/drawingml/2006/main">
             <a:pPr algn="ctr">
+              <a:buNone/>
               <a:defRPr sz="1125" b="1">
                 <a:solidFill>
                   <a:srgbClr val="686863"/>
@@ -15045,13 +15222,13 @@
               </a:defRPr>
             </a:pPr>
             <a:r>
-              <a:rPr sz="1125" b="1">
-                <a:solidFill>
-                  <a:srgbClr val="686863"/>
-                </a:solidFill>
-                <a:latin typeface="Arial"/>
-                <a:ea typeface="Arial"/>
-                <a:cs typeface="Arial"/>
+              <a:rPr sz="900" b="1">
+                <a:solidFill>
+                  <a:srgbClr val="9C9183"/>
+                </a:solidFill>
+                <a:latin typeface="Menlo"/>
+                <a:ea typeface="Menlo"/>
+                <a:cs typeface="Menlo"/>
               </a:rPr>
               <a:t>Approve • Challenge • Review hold • Decline hold</a:t>
             </a:r>
@@ -15074,7 +15251,7 @@
     <p:bg>
       <p:bgPr>
         <a:solidFill xmlns:a="http://schemas.openxmlformats.org/drawingml/2006/main">
-          <a:srgbClr val="F8F7F3"/>
+          <a:srgbClr val="0A0907"/>
         </a:solidFill>
       </p:bgPr>
     </p:bg>
@@ -15122,6 +15299,7 @@
           <a:lstStyle xmlns:a="http://schemas.openxmlformats.org/drawingml/2006/main"/>
           <a:p xmlns:a="http://schemas.openxmlformats.org/drawingml/2006/main">
             <a:pPr algn="l">
+              <a:buNone/>
               <a:defRPr sz="975" b="1">
                 <a:solidFill>
                   <a:srgbClr val="E9652E"/>
@@ -15132,13 +15310,13 @@
               </a:defRPr>
             </a:pPr>
             <a:r>
-              <a:rPr sz="975" b="1">
-                <a:solidFill>
-                  <a:srgbClr val="E9652E"/>
-                </a:solidFill>
-                <a:latin typeface="Arial"/>
-                <a:ea typeface="Arial"/>
-                <a:cs typeface="Arial"/>
+              <a:rPr sz="825" b="1">
+                <a:solidFill>
+                  <a:srgbClr val="F19A68"/>
+                </a:solidFill>
+                <a:latin typeface="Menlo"/>
+                <a:ea typeface="Menlo"/>
+                <a:cs typeface="Menlo"/>
               </a:rPr>
               <a:t>ADAPTIVE PAYMENT ASSURANCE RANGE</a:t>
             </a:r>
@@ -15180,6 +15358,7 @@
           <a:lstStyle xmlns:a="http://schemas.openxmlformats.org/drawingml/2006/main"/>
           <a:p xmlns:a="http://schemas.openxmlformats.org/drawingml/2006/main">
             <a:pPr algn="l">
+              <a:buNone/>
               <a:defRPr sz="2850" b="1">
                 <a:solidFill>
                   <a:srgbClr val="171714"/>
@@ -15190,13 +15369,13 @@
               </a:defRPr>
             </a:pPr>
             <a:r>
-              <a:rPr sz="2850" b="1">
-                <a:solidFill>
-                  <a:srgbClr val="171714"/>
-                </a:solidFill>
-                <a:latin typeface="Arial"/>
-                <a:ea typeface="Arial"/>
-                <a:cs typeface="Arial"/>
+              <a:rPr sz="2925" b="0">
+                <a:solidFill>
+                  <a:srgbClr val="F1E9DC"/>
+                </a:solidFill>
+                <a:latin typeface="Georgia"/>
+                <a:ea typeface="Georgia"/>
+                <a:cs typeface="Georgia"/>
               </a:rPr>
               <a:t>Investigators see one campaign—not twelve alerts</a:t>
             </a:r>
@@ -15233,11 +15412,12 @@
         </p:spPr>
         <p:txBody>
           <a:bodyPr xmlns:a="http://schemas.openxmlformats.org/drawingml/2006/main" anchor="t">
-            <a:normAutofit fontScale="79487"/>
+            <a:normAutofit fontScale="93939"/>
           </a:bodyPr>
           <a:lstStyle xmlns:a="http://schemas.openxmlformats.org/drawingml/2006/main"/>
           <a:p xmlns:a="http://schemas.openxmlformats.org/drawingml/2006/main">
             <a:pPr algn="r">
+              <a:buNone/>
               <a:defRPr sz="975" b="0">
                 <a:solidFill>
                   <a:srgbClr val="686863"/>
@@ -15248,13 +15428,13 @@
               </a:defRPr>
             </a:pPr>
             <a:r>
-              <a:rPr sz="975" b="0">
-                <a:solidFill>
-                  <a:srgbClr val="686863"/>
-                </a:solidFill>
-                <a:latin typeface="Arial"/>
-                <a:ea typeface="Arial"/>
-                <a:cs typeface="Arial"/>
+              <a:rPr sz="825" b="0">
+                <a:solidFill>
+                  <a:srgbClr val="9C9183"/>
+                </a:solidFill>
+                <a:latin typeface="Menlo"/>
+                <a:ea typeface="Menlo"/>
+                <a:cs typeface="Menlo"/>
               </a:rPr>
               <a:t>07</a:t>
             </a:r>
@@ -15284,11 +15464,11 @@
             <a:avLst/>
           </a:prstGeom>
           <a:solidFill xmlns:a="http://schemas.openxmlformats.org/drawingml/2006/main">
-            <a:srgbClr val="D7D6CF"/>
+            <a:srgbClr val="3F382E"/>
           </a:solidFill>
           <a:ln xmlns:a="http://schemas.openxmlformats.org/drawingml/2006/main" w="0">
             <a:solidFill>
-              <a:srgbClr val="D7D6CF"/>
+              <a:srgbClr val="3F382E"/>
             </a:solidFill>
             <a:prstDash val="solid"/>
           </a:ln>
@@ -15319,11 +15499,11 @@
             </a:avLst>
           </a:prstGeom>
           <a:solidFill xmlns:a="http://schemas.openxmlformats.org/drawingml/2006/main">
-            <a:srgbClr val="FFFFFF"/>
+            <a:srgbClr val="14110D"/>
           </a:solidFill>
           <a:ln xmlns:a="http://schemas.openxmlformats.org/drawingml/2006/main" w="9525">
             <a:solidFill>
-              <a:srgbClr val="D7D6CF"/>
+              <a:srgbClr val="6B5F50"/>
             </a:solidFill>
             <a:prstDash val="solid"/>
           </a:ln>
@@ -15331,14 +15511,14 @@
       </p:sp>
       <p:pic>
         <p:nvPicPr>
-          <p:cNvPr id="22" name=""/>
+          <p:cNvPr id="24" name=""/>
           <p:cNvPicPr>
             <a:picLocks xmlns:a="http://schemas.openxmlformats.org/drawingml/2006/main" noChangeAspect="1"/>
           </p:cNvPicPr>
           <p:nvPr/>
         </p:nvPicPr>
         <p:blipFill>
-          <a:blip xmlns:r="http://schemas.openxmlformats.org/officeDocument/2006/relationships" xmlns:a="http://schemas.openxmlformats.org/drawingml/2006/main" r:embed="R6caac83fd1ba49b2"/>
+          <a:blip xmlns:r="http://schemas.openxmlformats.org/officeDocument/2006/relationships" xmlns:a="http://schemas.openxmlformats.org/drawingml/2006/main" r:embed="Rb5aa5534c50c4074"/>
           <a:srcRect xmlns:a="http://schemas.openxmlformats.org/drawingml/2006/main" l="0" t="29622" r="0" b="29622"/>
           <a:stretch xmlns:a="http://schemas.openxmlformats.org/drawingml/2006/main">
             <a:fillRect l="0" t="0" r="0" b="0"/>
@@ -15349,10 +15529,8 @@
             <a:off x="3752850" y="1524000"/>
             <a:ext cx="8039100" cy="4552950"/>
           </a:xfrm>
-          <a:prstGeom xmlns:a="http://schemas.openxmlformats.org/drawingml/2006/main" prst="roundRect">
-            <a:avLst>
-              <a:gd name="adj" fmla="val 1674"/>
-            </a:avLst>
+          <a:prstGeom xmlns:a="http://schemas.openxmlformats.org/drawingml/2006/main" prst="rect">
+            <a:avLst/>
           </a:prstGeom>
         </p:spPr>
       </p:pic>
@@ -15381,11 +15559,11 @@
             </a:avLst>
           </a:prstGeom>
           <a:solidFill xmlns:a="http://schemas.openxmlformats.org/drawingml/2006/main">
-            <a:srgbClr val="DFF1E7"/>
+            <a:srgbClr val="20382A"/>
           </a:solidFill>
           <a:ln xmlns:a="http://schemas.openxmlformats.org/drawingml/2006/main" w="9525">
             <a:solidFill>
-              <a:srgbClr val="DFF1E7"/>
+              <a:srgbClr val="75B78E"/>
             </a:solidFill>
             <a:prstDash val="solid"/>
           </a:ln>
@@ -15421,11 +15599,12 @@
         </p:spPr>
         <p:txBody>
           <a:bodyPr xmlns:a="http://schemas.openxmlformats.org/drawingml/2006/main" anchor="t">
-            <a:normAutofit fontScale="66667"/>
+            <a:normAutofit fontScale="86667"/>
           </a:bodyPr>
           <a:lstStyle xmlns:a="http://schemas.openxmlformats.org/drawingml/2006/main"/>
           <a:p xmlns:a="http://schemas.openxmlformats.org/drawingml/2006/main">
             <a:pPr algn="ctr">
+              <a:buNone/>
               <a:defRPr sz="975" b="1">
                 <a:solidFill>
                   <a:srgbClr val="176A4B"/>
@@ -15436,13 +15615,13 @@
               </a:defRPr>
             </a:pPr>
             <a:r>
-              <a:rPr sz="975" b="1">
-                <a:solidFill>
-                  <a:srgbClr val="176A4B"/>
-                </a:solidFill>
-                <a:latin typeface="Arial"/>
-                <a:ea typeface="Arial"/>
-                <a:cs typeface="Arial"/>
+              <a:rPr sz="750" b="1">
+                <a:solidFill>
+                  <a:srgbClr val="75B78E"/>
+                </a:solidFill>
+                <a:latin typeface="Menlo"/>
+                <a:ea typeface="Menlo"/>
+                <a:cs typeface="Menlo"/>
               </a:rPr>
               <a:t>CASE-CENTRIC</a:t>
             </a:r>
@@ -15484,6 +15663,7 @@
           <a:lstStyle xmlns:a="http://schemas.openxmlformats.org/drawingml/2006/main"/>
           <a:p xmlns:a="http://schemas.openxmlformats.org/drawingml/2006/main">
             <a:pPr algn="l">
+              <a:buNone/>
               <a:defRPr sz="3150" b="1">
                 <a:solidFill>
                   <a:srgbClr val="E9652E"/>
@@ -15494,13 +15674,13 @@
               </a:defRPr>
             </a:pPr>
             <a:r>
-              <a:rPr sz="3150" b="1">
-                <a:solidFill>
-                  <a:srgbClr val="E9652E"/>
-                </a:solidFill>
-                <a:latin typeface="Arial"/>
-                <a:ea typeface="Arial"/>
-                <a:cs typeface="Arial"/>
+              <a:rPr sz="3150" b="0">
+                <a:solidFill>
+                  <a:srgbClr val="F19A68"/>
+                </a:solidFill>
+                <a:latin typeface="Georgia"/>
+                <a:ea typeface="Georgia"/>
+                <a:cs typeface="Georgia"/>
               </a:rPr>
               <a:t>14</a:t>
             </a:r>
@@ -15537,11 +15717,12 @@
         </p:spPr>
         <p:txBody>
           <a:bodyPr xmlns:a="http://schemas.openxmlformats.org/drawingml/2006/main" anchor="t">
-            <a:normAutofit fontScale="80392"/>
+            <a:normAutofit fontScale="91111"/>
           </a:bodyPr>
           <a:lstStyle xmlns:a="http://schemas.openxmlformats.org/drawingml/2006/main"/>
           <a:p xmlns:a="http://schemas.openxmlformats.org/drawingml/2006/main">
             <a:pPr algn="l">
+              <a:buNone/>
               <a:defRPr sz="1275" b="0">
                 <a:solidFill>
                   <a:srgbClr val="686863"/>
@@ -15552,9 +15733,9 @@
               </a:defRPr>
             </a:pPr>
             <a:r>
-              <a:rPr sz="1275" b="0">
-                <a:solidFill>
-                  <a:srgbClr val="686863"/>
+              <a:rPr sz="1125" b="0">
+                <a:solidFill>
+                  <a:srgbClr val="9C9183"/>
                 </a:solidFill>
                 <a:latin typeface="Arial"/>
                 <a:ea typeface="Arial"/>
@@ -15600,6 +15781,7 @@
           <a:lstStyle xmlns:a="http://schemas.openxmlformats.org/drawingml/2006/main"/>
           <a:p xmlns:a="http://schemas.openxmlformats.org/drawingml/2006/main">
             <a:pPr algn="l">
+              <a:buNone/>
               <a:defRPr sz="3150" b="1">
                 <a:solidFill>
                   <a:srgbClr val="E9652E"/>
@@ -15610,13 +15792,13 @@
               </a:defRPr>
             </a:pPr>
             <a:r>
-              <a:rPr sz="3150" b="1">
-                <a:solidFill>
-                  <a:srgbClr val="E9652E"/>
-                </a:solidFill>
-                <a:latin typeface="Arial"/>
-                <a:ea typeface="Arial"/>
-                <a:cs typeface="Arial"/>
+              <a:rPr sz="3150" b="0">
+                <a:solidFill>
+                  <a:srgbClr val="F19A68"/>
+                </a:solidFill>
+                <a:latin typeface="Georgia"/>
+                <a:ea typeface="Georgia"/>
+                <a:cs typeface="Georgia"/>
               </a:rPr>
               <a:t>10</a:t>
             </a:r>
@@ -15653,11 +15835,12 @@
         </p:spPr>
         <p:txBody>
           <a:bodyPr xmlns:a="http://schemas.openxmlformats.org/drawingml/2006/main" anchor="t">
-            <a:normAutofit fontScale="80392"/>
+            <a:normAutofit fontScale="91111"/>
           </a:bodyPr>
           <a:lstStyle xmlns:a="http://schemas.openxmlformats.org/drawingml/2006/main"/>
           <a:p xmlns:a="http://schemas.openxmlformats.org/drawingml/2006/main">
             <a:pPr algn="l">
+              <a:buNone/>
               <a:defRPr sz="1275" b="0">
                 <a:solidFill>
                   <a:srgbClr val="686863"/>
@@ -15668,9 +15851,9 @@
               </a:defRPr>
             </a:pPr>
             <a:r>
-              <a:rPr sz="1275" b="0">
-                <a:solidFill>
-                  <a:srgbClr val="686863"/>
+              <a:rPr sz="1125" b="0">
+                <a:solidFill>
+                  <a:srgbClr val="9C9183"/>
                 </a:solidFill>
                 <a:latin typeface="Arial"/>
                 <a:ea typeface="Arial"/>
@@ -15716,6 +15899,7 @@
           <a:lstStyle xmlns:a="http://schemas.openxmlformats.org/drawingml/2006/main"/>
           <a:p xmlns:a="http://schemas.openxmlformats.org/drawingml/2006/main">
             <a:pPr algn="l">
+              <a:buNone/>
               <a:defRPr sz="3150" b="1">
                 <a:solidFill>
                   <a:srgbClr val="E9652E"/>
@@ -15726,13 +15910,13 @@
               </a:defRPr>
             </a:pPr>
             <a:r>
-              <a:rPr sz="3150" b="1">
-                <a:solidFill>
-                  <a:srgbClr val="E9652E"/>
-                </a:solidFill>
-                <a:latin typeface="Arial"/>
-                <a:ea typeface="Arial"/>
-                <a:cs typeface="Arial"/>
+              <a:rPr sz="3150" b="0">
+                <a:solidFill>
+                  <a:srgbClr val="F19A68"/>
+                </a:solidFill>
+                <a:latin typeface="Georgia"/>
+                <a:ea typeface="Georgia"/>
+                <a:cs typeface="Georgia"/>
               </a:rPr>
               <a:t>$500</a:t>
             </a:r>
@@ -15774,6 +15958,7 @@
           <a:lstStyle xmlns:a="http://schemas.openxmlformats.org/drawingml/2006/main"/>
           <a:p xmlns:a="http://schemas.openxmlformats.org/drawingml/2006/main">
             <a:pPr algn="l">
+              <a:buNone/>
               <a:defRPr sz="1275" b="0">
                 <a:solidFill>
                   <a:srgbClr val="686863"/>
@@ -15784,9 +15969,9 @@
               </a:defRPr>
             </a:pPr>
             <a:r>
-              <a:rPr sz="1275" b="0">
-                <a:solidFill>
-                  <a:srgbClr val="686863"/>
+              <a:rPr sz="1125" b="0">
+                <a:solidFill>
+                  <a:srgbClr val="9C9183"/>
                 </a:solidFill>
                 <a:latin typeface="Arial"/>
                 <a:ea typeface="Arial"/>
@@ -15822,11 +16007,11 @@
             </a:avLst>
           </a:prstGeom>
           <a:solidFill xmlns:a="http://schemas.openxmlformats.org/drawingml/2006/main">
-            <a:srgbClr val="EEECE5"/>
+            <a:srgbClr val="211B14"/>
           </a:solidFill>
           <a:ln xmlns:a="http://schemas.openxmlformats.org/drawingml/2006/main" w="9525">
             <a:solidFill>
-              <a:srgbClr val="D7D6CF"/>
+              <a:srgbClr val="6B5F50"/>
             </a:solidFill>
             <a:prstDash val="solid"/>
           </a:ln>
@@ -15862,11 +16047,12 @@
         </p:spPr>
         <p:txBody>
           <a:bodyPr xmlns:a="http://schemas.openxmlformats.org/drawingml/2006/main" anchor="t">
-            <a:normAutofit fontScale="80000"/>
-          </a:bodyPr>
-          <a:lstStyle xmlns:a="http://schemas.openxmlformats.org/drawingml/2006/main"/>
-          <a:p xmlns:a="http://schemas.openxmlformats.org/drawingml/2006/main">
-            <a:pPr algn="l">
+            <a:normAutofit fontScale="99468"/>
+          </a:bodyPr>
+          <a:lstStyle xmlns:a="http://schemas.openxmlformats.org/drawingml/2006/main"/>
+          <a:p xmlns:a="http://schemas.openxmlformats.org/drawingml/2006/main">
+            <a:pPr algn="ctr">
+              <a:buNone/>
               <a:defRPr sz="1125" b="1">
                 <a:solidFill>
                   <a:srgbClr val="171714"/>
@@ -15877,13 +16063,13 @@
               </a:defRPr>
             </a:pPr>
             <a:r>
-              <a:rPr sz="1125" b="1">
-                <a:solidFill>
-                  <a:srgbClr val="171714"/>
-                </a:solidFill>
-                <a:latin typeface="Arial"/>
-                <a:ea typeface="Arial"/>
-                <a:cs typeface="Arial"/>
+              <a:rPr sz="825" b="1">
+                <a:solidFill>
+                  <a:srgbClr val="C8BDAE"/>
+                </a:solidFill>
+                <a:latin typeface="Menlo"/>
+                <a:ea typeface="Menlo"/>
+                <a:cs typeface="Menlo"/>
               </a:rPr>
               <a:t>Analyst-time benefit: evidence pending</a:t>
             </a:r>
@@ -15906,7 +16092,7 @@
     <p:bg>
       <p:bgPr>
         <a:solidFill xmlns:a="http://schemas.openxmlformats.org/drawingml/2006/main">
-          <a:srgbClr val="F8F7F3"/>
+          <a:srgbClr val="0A0907"/>
         </a:solidFill>
       </p:bgPr>
     </p:bg>
@@ -15954,6 +16140,7 @@
           <a:lstStyle xmlns:a="http://schemas.openxmlformats.org/drawingml/2006/main"/>
           <a:p xmlns:a="http://schemas.openxmlformats.org/drawingml/2006/main">
             <a:pPr algn="l">
+              <a:buNone/>
               <a:defRPr sz="975" b="1">
                 <a:solidFill>
                   <a:srgbClr val="E9652E"/>
@@ -15964,13 +16151,13 @@
               </a:defRPr>
             </a:pPr>
             <a:r>
-              <a:rPr sz="975" b="1">
-                <a:solidFill>
-                  <a:srgbClr val="E9652E"/>
-                </a:solidFill>
-                <a:latin typeface="Arial"/>
-                <a:ea typeface="Arial"/>
-                <a:cs typeface="Arial"/>
+              <a:rPr sz="825" b="1">
+                <a:solidFill>
+                  <a:srgbClr val="F19A68"/>
+                </a:solidFill>
+                <a:latin typeface="Menlo"/>
+                <a:ea typeface="Menlo"/>
+                <a:cs typeface="Menlo"/>
               </a:rPr>
               <a:t>ADAPTIVE PAYMENT ASSURANCE RANGE</a:t>
             </a:r>
@@ -16012,6 +16199,7 @@
           <a:lstStyle xmlns:a="http://schemas.openxmlformats.org/drawingml/2006/main"/>
           <a:p xmlns:a="http://schemas.openxmlformats.org/drawingml/2006/main">
             <a:pPr algn="l">
+              <a:buNone/>
               <a:defRPr sz="2850" b="1">
                 <a:solidFill>
                   <a:srgbClr val="171714"/>
@@ -16022,13 +16210,13 @@
               </a:defRPr>
             </a:pPr>
             <a:r>
-              <a:rPr sz="2850" b="1">
-                <a:solidFill>
-                  <a:srgbClr val="171714"/>
-                </a:solidFill>
-                <a:latin typeface="Arial"/>
-                <a:ea typeface="Arial"/>
-                <a:cs typeface="Arial"/>
+              <a:rPr sz="2925" b="0">
+                <a:solidFill>
+                  <a:srgbClr val="F1E9DC"/>
+                </a:solidFill>
+                <a:latin typeface="Georgia"/>
+                <a:ea typeface="Georgia"/>
+                <a:cs typeface="Georgia"/>
               </a:rPr>
               <a:t>Agentic commerce needs proof before probability</a:t>
             </a:r>
@@ -16065,11 +16253,12 @@
         </p:spPr>
         <p:txBody>
           <a:bodyPr xmlns:a="http://schemas.openxmlformats.org/drawingml/2006/main" anchor="t">
-            <a:normAutofit fontScale="79487"/>
+            <a:normAutofit fontScale="93939"/>
           </a:bodyPr>
           <a:lstStyle xmlns:a="http://schemas.openxmlformats.org/drawingml/2006/main"/>
           <a:p xmlns:a="http://schemas.openxmlformats.org/drawingml/2006/main">
             <a:pPr algn="r">
+              <a:buNone/>
               <a:defRPr sz="975" b="0">
                 <a:solidFill>
                   <a:srgbClr val="686863"/>
@@ -16080,13 +16269,13 @@
               </a:defRPr>
             </a:pPr>
             <a:r>
-              <a:rPr sz="975" b="0">
-                <a:solidFill>
-                  <a:srgbClr val="686863"/>
-                </a:solidFill>
-                <a:latin typeface="Arial"/>
-                <a:ea typeface="Arial"/>
-                <a:cs typeface="Arial"/>
+              <a:rPr sz="825" b="0">
+                <a:solidFill>
+                  <a:srgbClr val="9C9183"/>
+                </a:solidFill>
+                <a:latin typeface="Menlo"/>
+                <a:ea typeface="Menlo"/>
+                <a:cs typeface="Menlo"/>
               </a:rPr>
               <a:t>08</a:t>
             </a:r>
@@ -16116,11 +16305,11 @@
             <a:avLst/>
           </a:prstGeom>
           <a:solidFill xmlns:a="http://schemas.openxmlformats.org/drawingml/2006/main">
-            <a:srgbClr val="D7D6CF"/>
+            <a:srgbClr val="3F382E"/>
           </a:solidFill>
           <a:ln xmlns:a="http://schemas.openxmlformats.org/drawingml/2006/main" w="0">
             <a:solidFill>
-              <a:srgbClr val="D7D6CF"/>
+              <a:srgbClr val="3F382E"/>
             </a:solidFill>
             <a:prstDash val="solid"/>
           </a:ln>
@@ -16151,11 +16340,11 @@
             </a:avLst>
           </a:prstGeom>
           <a:solidFill xmlns:a="http://schemas.openxmlformats.org/drawingml/2006/main">
-            <a:srgbClr val="FFFFFF"/>
+            <a:srgbClr val="14110D"/>
           </a:solidFill>
           <a:ln xmlns:a="http://schemas.openxmlformats.org/drawingml/2006/main" w="9525">
             <a:solidFill>
-              <a:srgbClr val="D7D6CF"/>
+              <a:srgbClr val="6B5F50"/>
             </a:solidFill>
             <a:prstDash val="solid"/>
           </a:ln>
@@ -16163,14 +16352,14 @@
       </p:sp>
       <p:pic>
         <p:nvPicPr>
-          <p:cNvPr id="39" name=""/>
+          <p:cNvPr id="41" name=""/>
           <p:cNvPicPr>
             <a:picLocks xmlns:a="http://schemas.openxmlformats.org/drawingml/2006/main" noChangeAspect="1"/>
           </p:cNvPicPr>
           <p:nvPr/>
         </p:nvPicPr>
         <p:blipFill>
-          <a:blip xmlns:r="http://schemas.openxmlformats.org/officeDocument/2006/relationships" xmlns:a="http://schemas.openxmlformats.org/drawingml/2006/main" r:embed="R943aa952ea554eb4"/>
+          <a:blip xmlns:r="http://schemas.openxmlformats.org/officeDocument/2006/relationships" xmlns:a="http://schemas.openxmlformats.org/drawingml/2006/main" r:embed="R8421a73664704653"/>
           <a:srcRect xmlns:a="http://schemas.openxmlformats.org/drawingml/2006/main" l="0" t="38568" r="0" b="38568"/>
           <a:stretch xmlns:a="http://schemas.openxmlformats.org/drawingml/2006/main">
             <a:fillRect l="0" t="0" r="0" b="0"/>
@@ -16181,10 +16370,8 @@
             <a:off x="8877300" y="1543050"/>
             <a:ext cx="2571750" cy="4572000"/>
           </a:xfrm>
-          <a:prstGeom xmlns:a="http://schemas.openxmlformats.org/drawingml/2006/main" prst="roundRect">
-            <a:avLst>
-              <a:gd name="adj" fmla="val 2963"/>
-            </a:avLst>
+          <a:prstGeom xmlns:a="http://schemas.openxmlformats.org/drawingml/2006/main" prst="rect">
+            <a:avLst/>
           </a:prstGeom>
         </p:spPr>
       </p:pic>
@@ -16213,11 +16400,11 @@
             </a:avLst>
           </a:prstGeom>
           <a:solidFill xmlns:a="http://schemas.openxmlformats.org/drawingml/2006/main">
-            <a:srgbClr val="FFFFFF"/>
+            <a:srgbClr val="14110D"/>
           </a:solidFill>
           <a:ln xmlns:a="http://schemas.openxmlformats.org/drawingml/2006/main" w="9525">
             <a:solidFill>
-              <a:srgbClr val="D7D6CF"/>
+              <a:srgbClr val="6B5F50"/>
             </a:solidFill>
             <a:prstDash val="solid"/>
           </a:ln>
@@ -16246,11 +16433,11 @@
             <a:avLst/>
           </a:prstGeom>
           <a:solidFill xmlns:a="http://schemas.openxmlformats.org/drawingml/2006/main">
-            <a:srgbClr val="DFF1E7"/>
+            <a:srgbClr val="20382A"/>
           </a:solidFill>
           <a:ln xmlns:a="http://schemas.openxmlformats.org/drawingml/2006/main" w="9525">
             <a:solidFill>
-              <a:srgbClr val="176A4B"/>
+              <a:srgbClr val="75B78E"/>
             </a:solidFill>
             <a:prstDash val="solid"/>
           </a:ln>
@@ -16291,6 +16478,7 @@
           <a:lstStyle xmlns:a="http://schemas.openxmlformats.org/drawingml/2006/main"/>
           <a:p xmlns:a="http://schemas.openxmlformats.org/drawingml/2006/main">
             <a:pPr algn="ctr">
+              <a:buNone/>
               <a:defRPr sz="1200" b="1">
                 <a:solidFill>
                   <a:srgbClr val="176A4B"/>
@@ -16303,7 +16491,7 @@
             <a:r>
               <a:rPr sz="1200" b="1">
                 <a:solidFill>
-                  <a:srgbClr val="176A4B"/>
+                  <a:srgbClr val="75B78E"/>
                 </a:solidFill>
                 <a:latin typeface="Arial"/>
                 <a:ea typeface="Arial"/>
@@ -16344,11 +16532,12 @@
         </p:spPr>
         <p:txBody>
           <a:bodyPr xmlns:a="http://schemas.openxmlformats.org/drawingml/2006/main" anchor="t">
-            <a:normAutofit fontScale="89474"/>
+            <a:normAutofit fontScale="94444"/>
           </a:bodyPr>
           <a:lstStyle xmlns:a="http://schemas.openxmlformats.org/drawingml/2006/main"/>
           <a:p xmlns:a="http://schemas.openxmlformats.org/drawingml/2006/main">
             <a:pPr algn="l">
+              <a:buNone/>
               <a:defRPr sz="1425" b="1">
                 <a:solidFill>
                   <a:srgbClr val="171714"/>
@@ -16359,9 +16548,9 @@
               </a:defRPr>
             </a:pPr>
             <a:r>
-              <a:rPr sz="1425" b="1">
-                <a:solidFill>
-                  <a:srgbClr val="171714"/>
+              <a:rPr sz="1350" b="1">
+                <a:solidFill>
+                  <a:srgbClr val="F1E9DC"/>
                 </a:solidFill>
                 <a:latin typeface="Arial"/>
                 <a:ea typeface="Arial"/>
@@ -16397,11 +16586,11 @@
             </a:avLst>
           </a:prstGeom>
           <a:solidFill xmlns:a="http://schemas.openxmlformats.org/drawingml/2006/main">
-            <a:srgbClr val="FFFFFF"/>
+            <a:srgbClr val="14110D"/>
           </a:solidFill>
           <a:ln xmlns:a="http://schemas.openxmlformats.org/drawingml/2006/main" w="9525">
             <a:solidFill>
-              <a:srgbClr val="D7D6CF"/>
+              <a:srgbClr val="6B5F50"/>
             </a:solidFill>
             <a:prstDash val="solid"/>
           </a:ln>
@@ -16430,11 +16619,11 @@
             <a:avLst/>
           </a:prstGeom>
           <a:solidFill xmlns:a="http://schemas.openxmlformats.org/drawingml/2006/main">
-            <a:srgbClr val="DFF1E7"/>
+            <a:srgbClr val="20382A"/>
           </a:solidFill>
           <a:ln xmlns:a="http://schemas.openxmlformats.org/drawingml/2006/main" w="9525">
             <a:solidFill>
-              <a:srgbClr val="176A4B"/>
+              <a:srgbClr val="75B78E"/>
             </a:solidFill>
             <a:prstDash val="solid"/>
           </a:ln>
@@ -16475,6 +16664,7 @@
           <a:lstStyle xmlns:a="http://schemas.openxmlformats.org/drawingml/2006/main"/>
           <a:p xmlns:a="http://schemas.openxmlformats.org/drawingml/2006/main">
             <a:pPr algn="ctr">
+              <a:buNone/>
               <a:defRPr sz="1200" b="1">
                 <a:solidFill>
                   <a:srgbClr val="176A4B"/>
@@ -16487,7 +16677,7 @@
             <a:r>
               <a:rPr sz="1200" b="1">
                 <a:solidFill>
-                  <a:srgbClr val="176A4B"/>
+                  <a:srgbClr val="75B78E"/>
                 </a:solidFill>
                 <a:latin typeface="Arial"/>
                 <a:ea typeface="Arial"/>
@@ -16528,11 +16718,12 @@
         </p:spPr>
         <p:txBody>
           <a:bodyPr xmlns:a="http://schemas.openxmlformats.org/drawingml/2006/main" anchor="t">
-            <a:normAutofit fontScale="89474"/>
+            <a:normAutofit fontScale="94444"/>
           </a:bodyPr>
           <a:lstStyle xmlns:a="http://schemas.openxmlformats.org/drawingml/2006/main"/>
           <a:p xmlns:a="http://schemas.openxmlformats.org/drawingml/2006/main">
             <a:pPr algn="l">
+              <a:buNone/>
               <a:defRPr sz="1425" b="1">
                 <a:solidFill>
                   <a:srgbClr val="171714"/>
@@ -16543,9 +16734,9 @@
               </a:defRPr>
             </a:pPr>
             <a:r>
-              <a:rPr sz="1425" b="1">
-                <a:solidFill>
-                  <a:srgbClr val="171714"/>
+              <a:rPr sz="1350" b="1">
+                <a:solidFill>
+                  <a:srgbClr val="F1E9DC"/>
                 </a:solidFill>
                 <a:latin typeface="Arial"/>
                 <a:ea typeface="Arial"/>
@@ -16581,11 +16772,11 @@
             </a:avLst>
           </a:prstGeom>
           <a:solidFill xmlns:a="http://schemas.openxmlformats.org/drawingml/2006/main">
-            <a:srgbClr val="FFFFFF"/>
+            <a:srgbClr val="14110D"/>
           </a:solidFill>
           <a:ln xmlns:a="http://schemas.openxmlformats.org/drawingml/2006/main" w="9525">
             <a:solidFill>
-              <a:srgbClr val="D7D6CF"/>
+              <a:srgbClr val="6B5F50"/>
             </a:solidFill>
             <a:prstDash val="solid"/>
           </a:ln>
@@ -16614,11 +16805,11 @@
             <a:avLst/>
           </a:prstGeom>
           <a:solidFill xmlns:a="http://schemas.openxmlformats.org/drawingml/2006/main">
-            <a:srgbClr val="DFF1E7"/>
+            <a:srgbClr val="20382A"/>
           </a:solidFill>
           <a:ln xmlns:a="http://schemas.openxmlformats.org/drawingml/2006/main" w="9525">
             <a:solidFill>
-              <a:srgbClr val="176A4B"/>
+              <a:srgbClr val="75B78E"/>
             </a:solidFill>
             <a:prstDash val="solid"/>
           </a:ln>
@@ -16659,6 +16850,7 @@
           <a:lstStyle xmlns:a="http://schemas.openxmlformats.org/drawingml/2006/main"/>
           <a:p xmlns:a="http://schemas.openxmlformats.org/drawingml/2006/main">
             <a:pPr algn="ctr">
+              <a:buNone/>
               <a:defRPr sz="1200" b="1">
                 <a:solidFill>
                   <a:srgbClr val="176A4B"/>
@@ -16671,7 +16863,7 @@
             <a:r>
               <a:rPr sz="1200" b="1">
                 <a:solidFill>
-                  <a:srgbClr val="176A4B"/>
+                  <a:srgbClr val="75B78E"/>
                 </a:solidFill>
                 <a:latin typeface="Arial"/>
                 <a:ea typeface="Arial"/>
@@ -16712,11 +16904,12 @@
         </p:spPr>
         <p:txBody>
           <a:bodyPr xmlns:a="http://schemas.openxmlformats.org/drawingml/2006/main" anchor="t">
-            <a:normAutofit fontScale="89474"/>
+            <a:normAutofit fontScale="94444"/>
           </a:bodyPr>
           <a:lstStyle xmlns:a="http://schemas.openxmlformats.org/drawingml/2006/main"/>
           <a:p xmlns:a="http://schemas.openxmlformats.org/drawingml/2006/main">
             <a:pPr algn="l">
+              <a:buNone/>
               <a:defRPr sz="1425" b="1">
                 <a:solidFill>
                   <a:srgbClr val="171714"/>
@@ -16727,9 +16920,9 @@
               </a:defRPr>
             </a:pPr>
             <a:r>
-              <a:rPr sz="1425" b="1">
-                <a:solidFill>
-                  <a:srgbClr val="171714"/>
+              <a:rPr sz="1350" b="1">
+                <a:solidFill>
+                  <a:srgbClr val="F1E9DC"/>
                 </a:solidFill>
                 <a:latin typeface="Arial"/>
                 <a:ea typeface="Arial"/>
@@ -16765,11 +16958,11 @@
             </a:avLst>
           </a:prstGeom>
           <a:solidFill xmlns:a="http://schemas.openxmlformats.org/drawingml/2006/main">
-            <a:srgbClr val="FFFFFF"/>
+            <a:srgbClr val="14110D"/>
           </a:solidFill>
           <a:ln xmlns:a="http://schemas.openxmlformats.org/drawingml/2006/main" w="9525">
             <a:solidFill>
-              <a:srgbClr val="D7D6CF"/>
+              <a:srgbClr val="6B5F50"/>
             </a:solidFill>
             <a:prstDash val="solid"/>
           </a:ln>
@@ -16798,11 +16991,11 @@
             <a:avLst/>
           </a:prstGeom>
           <a:solidFill xmlns:a="http://schemas.openxmlformats.org/drawingml/2006/main">
-            <a:srgbClr val="DFF1E7"/>
+            <a:srgbClr val="20382A"/>
           </a:solidFill>
           <a:ln xmlns:a="http://schemas.openxmlformats.org/drawingml/2006/main" w="9525">
             <a:solidFill>
-              <a:srgbClr val="176A4B"/>
+              <a:srgbClr val="75B78E"/>
             </a:solidFill>
             <a:prstDash val="solid"/>
           </a:ln>
@@ -16843,6 +17036,7 @@
           <a:lstStyle xmlns:a="http://schemas.openxmlformats.org/drawingml/2006/main"/>
           <a:p xmlns:a="http://schemas.openxmlformats.org/drawingml/2006/main">
             <a:pPr algn="ctr">
+              <a:buNone/>
               <a:defRPr sz="1200" b="1">
                 <a:solidFill>
                   <a:srgbClr val="176A4B"/>
@@ -16855,7 +17049,7 @@
             <a:r>
               <a:rPr sz="1200" b="1">
                 <a:solidFill>
-                  <a:srgbClr val="176A4B"/>
+                  <a:srgbClr val="75B78E"/>
                 </a:solidFill>
                 <a:latin typeface="Arial"/>
                 <a:ea typeface="Arial"/>
@@ -16896,11 +17090,12 @@
         </p:spPr>
         <p:txBody>
           <a:bodyPr xmlns:a="http://schemas.openxmlformats.org/drawingml/2006/main" anchor="t">
-            <a:normAutofit fontScale="89474"/>
+            <a:normAutofit fontScale="94444"/>
           </a:bodyPr>
           <a:lstStyle xmlns:a="http://schemas.openxmlformats.org/drawingml/2006/main"/>
           <a:p xmlns:a="http://schemas.openxmlformats.org/drawingml/2006/main">
             <a:pPr algn="l">
+              <a:buNone/>
               <a:defRPr sz="1425" b="1">
                 <a:solidFill>
                   <a:srgbClr val="171714"/>
@@ -16911,9 +17106,9 @@
               </a:defRPr>
             </a:pPr>
             <a:r>
-              <a:rPr sz="1425" b="1">
-                <a:solidFill>
-                  <a:srgbClr val="171714"/>
+              <a:rPr sz="1350" b="1">
+                <a:solidFill>
+                  <a:srgbClr val="F1E9DC"/>
                 </a:solidFill>
                 <a:latin typeface="Arial"/>
                 <a:ea typeface="Arial"/>
@@ -16949,11 +17144,11 @@
             </a:avLst>
           </a:prstGeom>
           <a:solidFill xmlns:a="http://schemas.openxmlformats.org/drawingml/2006/main">
-            <a:srgbClr val="FFFFFF"/>
+            <a:srgbClr val="14110D"/>
           </a:solidFill>
           <a:ln xmlns:a="http://schemas.openxmlformats.org/drawingml/2006/main" w="9525">
             <a:solidFill>
-              <a:srgbClr val="D7D6CF"/>
+              <a:srgbClr val="6B5F50"/>
             </a:solidFill>
             <a:prstDash val="solid"/>
           </a:ln>
@@ -16982,11 +17177,11 @@
             <a:avLst/>
           </a:prstGeom>
           <a:solidFill xmlns:a="http://schemas.openxmlformats.org/drawingml/2006/main">
-            <a:srgbClr val="DFF1E7"/>
+            <a:srgbClr val="20382A"/>
           </a:solidFill>
           <a:ln xmlns:a="http://schemas.openxmlformats.org/drawingml/2006/main" w="9525">
             <a:solidFill>
-              <a:srgbClr val="176A4B"/>
+              <a:srgbClr val="75B78E"/>
             </a:solidFill>
             <a:prstDash val="solid"/>
           </a:ln>
@@ -17027,6 +17222,7 @@
           <a:lstStyle xmlns:a="http://schemas.openxmlformats.org/drawingml/2006/main"/>
           <a:p xmlns:a="http://schemas.openxmlformats.org/drawingml/2006/main">
             <a:pPr algn="ctr">
+              <a:buNone/>
               <a:defRPr sz="1200" b="1">
                 <a:solidFill>
                   <a:srgbClr val="176A4B"/>
@@ -17039,7 +17235,7 @@
             <a:r>
               <a:rPr sz="1200" b="1">
                 <a:solidFill>
-                  <a:srgbClr val="176A4B"/>
+                  <a:srgbClr val="75B78E"/>
                 </a:solidFill>
                 <a:latin typeface="Arial"/>
                 <a:ea typeface="Arial"/>
@@ -17080,11 +17276,12 @@
         </p:spPr>
         <p:txBody>
           <a:bodyPr xmlns:a="http://schemas.openxmlformats.org/drawingml/2006/main" anchor="t">
-            <a:normAutofit fontScale="89474"/>
+            <a:normAutofit fontScale="94444"/>
           </a:bodyPr>
           <a:lstStyle xmlns:a="http://schemas.openxmlformats.org/drawingml/2006/main"/>
           <a:p xmlns:a="http://schemas.openxmlformats.org/drawingml/2006/main">
             <a:pPr algn="l">
+              <a:buNone/>
               <a:defRPr sz="1425" b="1">
                 <a:solidFill>
                   <a:srgbClr val="171714"/>
@@ -17095,9 +17292,9 @@
               </a:defRPr>
             </a:pPr>
             <a:r>
-              <a:rPr sz="1425" b="1">
-                <a:solidFill>
-                  <a:srgbClr val="171714"/>
+              <a:rPr sz="1350" b="1">
+                <a:solidFill>
+                  <a:srgbClr val="F1E9DC"/>
                 </a:solidFill>
                 <a:latin typeface="Arial"/>
                 <a:ea typeface="Arial"/>
@@ -17133,11 +17330,11 @@
             </a:avLst>
           </a:prstGeom>
           <a:solidFill xmlns:a="http://schemas.openxmlformats.org/drawingml/2006/main">
-            <a:srgbClr val="FFFFFF"/>
+            <a:srgbClr val="14110D"/>
           </a:solidFill>
           <a:ln xmlns:a="http://schemas.openxmlformats.org/drawingml/2006/main" w="9525">
             <a:solidFill>
-              <a:srgbClr val="D7D6CF"/>
+              <a:srgbClr val="6B5F50"/>
             </a:solidFill>
             <a:prstDash val="solid"/>
           </a:ln>
@@ -17166,11 +17363,11 @@
             <a:avLst/>
           </a:prstGeom>
           <a:solidFill xmlns:a="http://schemas.openxmlformats.org/drawingml/2006/main">
-            <a:srgbClr val="DFF1E7"/>
+            <a:srgbClr val="20382A"/>
           </a:solidFill>
           <a:ln xmlns:a="http://schemas.openxmlformats.org/drawingml/2006/main" w="9525">
             <a:solidFill>
-              <a:srgbClr val="176A4B"/>
+              <a:srgbClr val="75B78E"/>
             </a:solidFill>
             <a:prstDash val="solid"/>
           </a:ln>
@@ -17211,6 +17408,7 @@
           <a:lstStyle xmlns:a="http://schemas.openxmlformats.org/drawingml/2006/main"/>
           <a:p xmlns:a="http://schemas.openxmlformats.org/drawingml/2006/main">
             <a:pPr algn="ctr">
+              <a:buNone/>
               <a:defRPr sz="1200" b="1">
                 <a:solidFill>
                   <a:srgbClr val="176A4B"/>
@@ -17223,7 +17421,7 @@
             <a:r>
               <a:rPr sz="1200" b="1">
                 <a:solidFill>
-                  <a:srgbClr val="176A4B"/>
+                  <a:srgbClr val="75B78E"/>
                 </a:solidFill>
                 <a:latin typeface="Arial"/>
                 <a:ea typeface="Arial"/>
@@ -17264,11 +17462,12 @@
         </p:spPr>
         <p:txBody>
           <a:bodyPr xmlns:a="http://schemas.openxmlformats.org/drawingml/2006/main" anchor="t">
-            <a:normAutofit fontScale="89474"/>
+            <a:normAutofit fontScale="94444"/>
           </a:bodyPr>
           <a:lstStyle xmlns:a="http://schemas.openxmlformats.org/drawingml/2006/main"/>
           <a:p xmlns:a="http://schemas.openxmlformats.org/drawingml/2006/main">
             <a:pPr algn="l">
+              <a:buNone/>
               <a:defRPr sz="1425" b="1">
                 <a:solidFill>
                   <a:srgbClr val="171714"/>
@@ -17279,9 +17478,9 @@
               </a:defRPr>
             </a:pPr>
             <a:r>
-              <a:rPr sz="1425" b="1">
-                <a:solidFill>
-                  <a:srgbClr val="171714"/>
+              <a:rPr sz="1350" b="1">
+                <a:solidFill>
+                  <a:srgbClr val="F1E9DC"/>
                 </a:solidFill>
                 <a:latin typeface="Arial"/>
                 <a:ea typeface="Arial"/>
@@ -17317,11 +17516,11 @@
             </a:avLst>
           </a:prstGeom>
           <a:solidFill xmlns:a="http://schemas.openxmlformats.org/drawingml/2006/main">
-            <a:srgbClr val="171714"/>
+            <a:srgbClr val="211B14"/>
           </a:solidFill>
           <a:ln xmlns:a="http://schemas.openxmlformats.org/drawingml/2006/main" w="9525">
             <a:solidFill>
-              <a:srgbClr val="171714"/>
+              <a:srgbClr val="E35E54"/>
             </a:solidFill>
             <a:prstDash val="solid"/>
           </a:ln>
@@ -17357,11 +17556,12 @@
         </p:spPr>
         <p:txBody>
           <a:bodyPr xmlns:a="http://schemas.openxmlformats.org/drawingml/2006/main" anchor="t">
-            <a:normAutofit fontScale="92308"/>
+            <a:normAutofit fontScale="100000"/>
           </a:bodyPr>
           <a:lstStyle xmlns:a="http://schemas.openxmlformats.org/drawingml/2006/main"/>
           <a:p xmlns:a="http://schemas.openxmlformats.org/drawingml/2006/main">
             <a:pPr algn="l">
+              <a:buNone/>
               <a:defRPr sz="975" b="1">
                 <a:solidFill>
                   <a:srgbClr val="E9652E"/>
@@ -17372,13 +17572,13 @@
               </a:defRPr>
             </a:pPr>
             <a:r>
-              <a:rPr sz="975" b="1">
-                <a:solidFill>
-                  <a:srgbClr val="E9652E"/>
-                </a:solidFill>
-                <a:latin typeface="Arial"/>
-                <a:ea typeface="Arial"/>
-                <a:cs typeface="Arial"/>
+              <a:rPr sz="825" b="1">
+                <a:solidFill>
+                  <a:srgbClr val="F28A80"/>
+                </a:solidFill>
+                <a:latin typeface="Menlo"/>
+                <a:ea typeface="Menlo"/>
+                <a:cs typeface="Menlo"/>
               </a:rPr>
               <a:t>DEFINITIVE FAILURE</a:t>
             </a:r>
@@ -17415,11 +17615,12 @@
         </p:spPr>
         <p:txBody>
           <a:bodyPr xmlns:a="http://schemas.openxmlformats.org/drawingml/2006/main" anchor="t">
-            <a:normAutofit fontScale="91667"/>
+            <a:normAutofit fontScale="100000"/>
           </a:bodyPr>
           <a:lstStyle xmlns:a="http://schemas.openxmlformats.org/drawingml/2006/main"/>
           <a:p xmlns:a="http://schemas.openxmlformats.org/drawingml/2006/main">
             <a:pPr algn="l">
+              <a:buNone/>
               <a:defRPr sz="1800" b="1">
                 <a:solidFill>
                   <a:srgbClr val="FFFFFF"/>
@@ -17430,13 +17631,13 @@
               </a:defRPr>
             </a:pPr>
             <a:r>
-              <a:rPr sz="1800" b="1">
-                <a:solidFill>
-                  <a:srgbClr val="FFFFFF"/>
-                </a:solidFill>
-                <a:latin typeface="Arial"/>
-                <a:ea typeface="Arial"/>
-                <a:cs typeface="Arial"/>
+              <a:rPr sz="1500" b="1">
+                <a:solidFill>
+                  <a:srgbClr val="F1E9DC"/>
+                </a:solidFill>
+                <a:latin typeface="Menlo"/>
+                <a:ea typeface="Menlo"/>
+                <a:cs typeface="Menlo"/>
               </a:rPr>
               <a:t>DECLINE_HOLD before statistical risk</a:t>
             </a:r>
@@ -17459,7 +17660,7 @@
     <p:bg>
       <p:bgPr>
         <a:solidFill xmlns:a="http://schemas.openxmlformats.org/drawingml/2006/main">
-          <a:srgbClr val="F8F7F3"/>
+          <a:srgbClr val="0A0907"/>
         </a:solidFill>
       </p:bgPr>
     </p:bg>
@@ -17507,6 +17708,7 @@
           <a:lstStyle xmlns:a="http://schemas.openxmlformats.org/drawingml/2006/main"/>
           <a:p xmlns:a="http://schemas.openxmlformats.org/drawingml/2006/main">
             <a:pPr algn="l">
+              <a:buNone/>
               <a:defRPr sz="975" b="1">
                 <a:solidFill>
                   <a:srgbClr val="E9652E"/>
@@ -17517,13 +17719,13 @@
               </a:defRPr>
             </a:pPr>
             <a:r>
-              <a:rPr sz="975" b="1">
-                <a:solidFill>
-                  <a:srgbClr val="E9652E"/>
-                </a:solidFill>
-                <a:latin typeface="Arial"/>
-                <a:ea typeface="Arial"/>
-                <a:cs typeface="Arial"/>
+              <a:rPr sz="825" b="1">
+                <a:solidFill>
+                  <a:srgbClr val="F19A68"/>
+                </a:solidFill>
+                <a:latin typeface="Menlo"/>
+                <a:ea typeface="Menlo"/>
+                <a:cs typeface="Menlo"/>
               </a:rPr>
               <a:t>ADAPTIVE PAYMENT ASSURANCE RANGE</a:t>
             </a:r>
@@ -17565,6 +17767,7 @@
           <a:lstStyle xmlns:a="http://schemas.openxmlformats.org/drawingml/2006/main"/>
           <a:p xmlns:a="http://schemas.openxmlformats.org/drawingml/2006/main">
             <a:pPr algn="l">
+              <a:buNone/>
               <a:defRPr sz="2850" b="1">
                 <a:solidFill>
                   <a:srgbClr val="171714"/>
@@ -17575,13 +17778,13 @@
               </a:defRPr>
             </a:pPr>
             <a:r>
-              <a:rPr sz="2850" b="1">
-                <a:solidFill>
-                  <a:srgbClr val="171714"/>
-                </a:solidFill>
-                <a:latin typeface="Arial"/>
-                <a:ea typeface="Arial"/>
-                <a:cs typeface="Arial"/>
+              <a:rPr sz="2925" b="0">
+                <a:solidFill>
+                  <a:srgbClr val="F1E9DC"/>
+                </a:solidFill>
+                <a:latin typeface="Georgia"/>
+                <a:ea typeface="Georgia"/>
+                <a:cs typeface="Georgia"/>
               </a:rPr>
               <a:t>Evidence governance is part of the product</a:t>
             </a:r>
@@ -17618,11 +17821,12 @@
         </p:spPr>
         <p:txBody>
           <a:bodyPr xmlns:a="http://schemas.openxmlformats.org/drawingml/2006/main" anchor="t">
-            <a:normAutofit fontScale="79487"/>
+            <a:normAutofit fontScale="93939"/>
           </a:bodyPr>
           <a:lstStyle xmlns:a="http://schemas.openxmlformats.org/drawingml/2006/main"/>
           <a:p xmlns:a="http://schemas.openxmlformats.org/drawingml/2006/main">
             <a:pPr algn="r">
+              <a:buNone/>
               <a:defRPr sz="975" b="0">
                 <a:solidFill>
                   <a:srgbClr val="686863"/>
@@ -17633,13 +17837,13 @@
               </a:defRPr>
             </a:pPr>
             <a:r>
-              <a:rPr sz="975" b="0">
-                <a:solidFill>
-                  <a:srgbClr val="686863"/>
-                </a:solidFill>
-                <a:latin typeface="Arial"/>
-                <a:ea typeface="Arial"/>
-                <a:cs typeface="Arial"/>
+              <a:rPr sz="825" b="0">
+                <a:solidFill>
+                  <a:srgbClr val="9C9183"/>
+                </a:solidFill>
+                <a:latin typeface="Menlo"/>
+                <a:ea typeface="Menlo"/>
+                <a:cs typeface="Menlo"/>
               </a:rPr>
               <a:t>09</a:t>
             </a:r>
@@ -17669,11 +17873,11 @@
             <a:avLst/>
           </a:prstGeom>
           <a:solidFill xmlns:a="http://schemas.openxmlformats.org/drawingml/2006/main">
-            <a:srgbClr val="D7D6CF"/>
+            <a:srgbClr val="3F382E"/>
           </a:solidFill>
           <a:ln xmlns:a="http://schemas.openxmlformats.org/drawingml/2006/main" w="0">
             <a:solidFill>
-              <a:srgbClr val="D7D6CF"/>
+              <a:srgbClr val="3F382E"/>
             </a:solidFill>
             <a:prstDash val="solid"/>
           </a:ln>
@@ -17704,11 +17908,11 @@
             </a:avLst>
           </a:prstGeom>
           <a:solidFill xmlns:a="http://schemas.openxmlformats.org/drawingml/2006/main">
-            <a:srgbClr val="FFFFFF"/>
+            <a:srgbClr val="14110D"/>
           </a:solidFill>
           <a:ln xmlns:a="http://schemas.openxmlformats.org/drawingml/2006/main" w="9525">
             <a:solidFill>
-              <a:srgbClr val="D7D6CF"/>
+              <a:srgbClr val="6B5F50"/>
             </a:solidFill>
             <a:prstDash val="solid"/>
           </a:ln>
@@ -17744,11 +17948,12 @@
         </p:spPr>
         <p:txBody>
           <a:bodyPr xmlns:a="http://schemas.openxmlformats.org/drawingml/2006/main" anchor="t">
-            <a:normAutofit fontScale="85714"/>
+            <a:normAutofit fontScale="100000"/>
           </a:bodyPr>
           <a:lstStyle xmlns:a="http://schemas.openxmlformats.org/drawingml/2006/main"/>
           <a:p xmlns:a="http://schemas.openxmlformats.org/drawingml/2006/main">
             <a:pPr algn="l">
+              <a:buNone/>
               <a:defRPr sz="1050" b="1">
                 <a:solidFill>
                   <a:srgbClr val="E9652E"/>
@@ -17759,13 +17964,13 @@
               </a:defRPr>
             </a:pPr>
             <a:r>
-              <a:rPr sz="1050" b="1">
-                <a:solidFill>
-                  <a:srgbClr val="E9652E"/>
-                </a:solidFill>
-                <a:latin typeface="Arial"/>
-                <a:ea typeface="Arial"/>
-                <a:cs typeface="Arial"/>
+              <a:rPr sz="825" b="1">
+                <a:solidFill>
+                  <a:srgbClr val="F19A68"/>
+                </a:solidFill>
+                <a:latin typeface="Menlo"/>
+                <a:ea typeface="Menlo"/>
+                <a:cs typeface="Menlo"/>
               </a:rPr>
               <a:t>01</a:t>
             </a:r>
@@ -17802,11 +18007,12 @@
         </p:spPr>
         <p:txBody>
           <a:bodyPr xmlns:a="http://schemas.openxmlformats.org/drawingml/2006/main" anchor="t">
-            <a:normAutofit fontScale="96770"/>
+            <a:normAutofit fontScale="100000"/>
           </a:bodyPr>
           <a:lstStyle xmlns:a="http://schemas.openxmlformats.org/drawingml/2006/main"/>
           <a:p xmlns:a="http://schemas.openxmlformats.org/drawingml/2006/main">
             <a:pPr algn="l">
+              <a:buNone/>
               <a:defRPr sz="1650" b="1">
                 <a:solidFill>
                   <a:srgbClr val="171714"/>
@@ -17817,13 +18023,13 @@
               </a:defRPr>
             </a:pPr>
             <a:r>
-              <a:rPr sz="1650" b="1">
-                <a:solidFill>
-                  <a:srgbClr val="171714"/>
-                </a:solidFill>
-                <a:latin typeface="Arial"/>
-                <a:ea typeface="Arial"/>
-                <a:cs typeface="Arial"/>
+              <a:rPr sz="1500" b="0">
+                <a:solidFill>
+                  <a:srgbClr val="F1E9DC"/>
+                </a:solidFill>
+                <a:latin typeface="Georgia"/>
+                <a:ea typeface="Georgia"/>
+                <a:cs typeface="Georgia"/>
               </a:rPr>
               <a:t>Causal features</a:t>
             </a:r>
@@ -17865,6 +18071,7 @@
           <a:lstStyle xmlns:a="http://schemas.openxmlformats.org/drawingml/2006/main"/>
           <a:p xmlns:a="http://schemas.openxmlformats.org/drawingml/2006/main">
             <a:pPr algn="l">
+              <a:buNone/>
               <a:defRPr sz="1200" b="0">
                 <a:solidFill>
                   <a:srgbClr val="686863"/>
@@ -17877,7 +18084,7 @@
             <a:r>
               <a:rPr sz="1200" b="0">
                 <a:solidFill>
-                  <a:srgbClr val="686863"/>
+                  <a:srgbClr val="C8BDAE"/>
                 </a:solidFill>
                 <a:latin typeface="Arial"/>
                 <a:ea typeface="Arial"/>
@@ -17913,11 +18120,11 @@
             </a:avLst>
           </a:prstGeom>
           <a:solidFill xmlns:a="http://schemas.openxmlformats.org/drawingml/2006/main">
-            <a:srgbClr val="FFFFFF"/>
+            <a:srgbClr val="14110D"/>
           </a:solidFill>
           <a:ln xmlns:a="http://schemas.openxmlformats.org/drawingml/2006/main" w="9525">
             <a:solidFill>
-              <a:srgbClr val="D7D6CF"/>
+              <a:srgbClr val="6B5F50"/>
             </a:solidFill>
             <a:prstDash val="solid"/>
           </a:ln>
@@ -17953,11 +18160,12 @@
         </p:spPr>
         <p:txBody>
           <a:bodyPr xmlns:a="http://schemas.openxmlformats.org/drawingml/2006/main" anchor="t">
-            <a:normAutofit fontScale="85714"/>
+            <a:normAutofit fontScale="100000"/>
           </a:bodyPr>
           <a:lstStyle xmlns:a="http://schemas.openxmlformats.org/drawingml/2006/main"/>
           <a:p xmlns:a="http://schemas.openxmlformats.org/drawingml/2006/main">
             <a:pPr algn="l">
+              <a:buNone/>
               <a:defRPr sz="1050" b="1">
                 <a:solidFill>
                   <a:srgbClr val="E9652E"/>
@@ -17968,13 +18176,13 @@
               </a:defRPr>
             </a:pPr>
             <a:r>
-              <a:rPr sz="1050" b="1">
-                <a:solidFill>
-                  <a:srgbClr val="E9652E"/>
-                </a:solidFill>
-                <a:latin typeface="Arial"/>
-                <a:ea typeface="Arial"/>
-                <a:cs typeface="Arial"/>
+              <a:rPr sz="825" b="1">
+                <a:solidFill>
+                  <a:srgbClr val="F19A68"/>
+                </a:solidFill>
+                <a:latin typeface="Menlo"/>
+                <a:ea typeface="Menlo"/>
+                <a:cs typeface="Menlo"/>
               </a:rPr>
               <a:t>02</a:t>
             </a:r>
@@ -18011,11 +18219,12 @@
         </p:spPr>
         <p:txBody>
           <a:bodyPr xmlns:a="http://schemas.openxmlformats.org/drawingml/2006/main" anchor="t">
-            <a:normAutofit fontScale="87879"/>
+            <a:normAutofit fontScale="100000"/>
           </a:bodyPr>
           <a:lstStyle xmlns:a="http://schemas.openxmlformats.org/drawingml/2006/main"/>
           <a:p xmlns:a="http://schemas.openxmlformats.org/drawingml/2006/main">
             <a:pPr algn="l">
+              <a:buNone/>
               <a:defRPr sz="1650" b="1">
                 <a:solidFill>
                   <a:srgbClr val="171714"/>
@@ -18026,13 +18235,13 @@
               </a:defRPr>
             </a:pPr>
             <a:r>
-              <a:rPr sz="1650" b="1">
-                <a:solidFill>
-                  <a:srgbClr val="171714"/>
-                </a:solidFill>
-                <a:latin typeface="Arial"/>
-                <a:ea typeface="Arial"/>
-                <a:cs typeface="Arial"/>
+              <a:rPr sz="1500" b="0">
+                <a:solidFill>
+                  <a:srgbClr val="F1E9DC"/>
+                </a:solidFill>
+                <a:latin typeface="Georgia"/>
+                <a:ea typeface="Georgia"/>
+                <a:cs typeface="Georgia"/>
               </a:rPr>
               <a:t>Executed controls</a:t>
             </a:r>
@@ -18074,6 +18283,7 @@
           <a:lstStyle xmlns:a="http://schemas.openxmlformats.org/drawingml/2006/main"/>
           <a:p xmlns:a="http://schemas.openxmlformats.org/drawingml/2006/main">
             <a:pPr algn="l">
+              <a:buNone/>
               <a:defRPr sz="1200" b="0">
                 <a:solidFill>
                   <a:srgbClr val="686863"/>
@@ -18086,7 +18296,7 @@
             <a:r>
               <a:rPr sz="1200" b="0">
                 <a:solidFill>
-                  <a:srgbClr val="686863"/>
+                  <a:srgbClr val="C8BDAE"/>
                 </a:solidFill>
                 <a:latin typeface="Arial"/>
                 <a:ea typeface="Arial"/>
@@ -18122,11 +18332,11 @@
             </a:avLst>
           </a:prstGeom>
           <a:solidFill xmlns:a="http://schemas.openxmlformats.org/drawingml/2006/main">
-            <a:srgbClr val="FFFFFF"/>
+            <a:srgbClr val="14110D"/>
           </a:solidFill>
           <a:ln xmlns:a="http://schemas.openxmlformats.org/drawingml/2006/main" w="9525">
             <a:solidFill>
-              <a:srgbClr val="D7D6CF"/>
+              <a:srgbClr val="6B5F50"/>
             </a:solidFill>
             <a:prstDash val="solid"/>
           </a:ln>
@@ -18162,11 +18372,12 @@
         </p:spPr>
         <p:txBody>
           <a:bodyPr xmlns:a="http://schemas.openxmlformats.org/drawingml/2006/main" anchor="t">
-            <a:normAutofit fontScale="85714"/>
+            <a:normAutofit fontScale="100000"/>
           </a:bodyPr>
           <a:lstStyle xmlns:a="http://schemas.openxmlformats.org/drawingml/2006/main"/>
           <a:p xmlns:a="http://schemas.openxmlformats.org/drawingml/2006/main">
             <a:pPr algn="l">
+              <a:buNone/>
               <a:defRPr sz="1050" b="1">
                 <a:solidFill>
                   <a:srgbClr val="E9652E"/>
@@ -18177,13 +18388,13 @@
               </a:defRPr>
             </a:pPr>
             <a:r>
-              <a:rPr sz="1050" b="1">
-                <a:solidFill>
-                  <a:srgbClr val="E9652E"/>
-                </a:solidFill>
-                <a:latin typeface="Arial"/>
-                <a:ea typeface="Arial"/>
-                <a:cs typeface="Arial"/>
+              <a:rPr sz="825" b="1">
+                <a:solidFill>
+                  <a:srgbClr val="F19A68"/>
+                </a:solidFill>
+                <a:latin typeface="Menlo"/>
+                <a:ea typeface="Menlo"/>
+                <a:cs typeface="Menlo"/>
               </a:rPr>
               <a:t>03</a:t>
             </a:r>
@@ -18220,11 +18431,12 @@
         </p:spPr>
         <p:txBody>
           <a:bodyPr xmlns:a="http://schemas.openxmlformats.org/drawingml/2006/main" anchor="t">
-            <a:normAutofit fontScale="87879"/>
+            <a:normAutofit fontScale="96667"/>
           </a:bodyPr>
           <a:lstStyle xmlns:a="http://schemas.openxmlformats.org/drawingml/2006/main"/>
           <a:p xmlns:a="http://schemas.openxmlformats.org/drawingml/2006/main">
             <a:pPr algn="l">
+              <a:buNone/>
               <a:defRPr sz="1650" b="1">
                 <a:solidFill>
                   <a:srgbClr val="171714"/>
@@ -18235,13 +18447,13 @@
               </a:defRPr>
             </a:pPr>
             <a:r>
-              <a:rPr sz="1650" b="1">
-                <a:solidFill>
-                  <a:srgbClr val="171714"/>
-                </a:solidFill>
-                <a:latin typeface="Arial"/>
-                <a:ea typeface="Arial"/>
-                <a:cs typeface="Arial"/>
+              <a:rPr sz="1500" b="0">
+                <a:solidFill>
+                  <a:srgbClr val="F1E9DC"/>
+                </a:solidFill>
+                <a:latin typeface="Georgia"/>
+                <a:ea typeface="Georgia"/>
+                <a:cs typeface="Georgia"/>
               </a:rPr>
               <a:t>Immutable evidence</a:t>
             </a:r>
@@ -18283,6 +18495,7 @@
           <a:lstStyle xmlns:a="http://schemas.openxmlformats.org/drawingml/2006/main"/>
           <a:p xmlns:a="http://schemas.openxmlformats.org/drawingml/2006/main">
             <a:pPr algn="l">
+              <a:buNone/>
               <a:defRPr sz="1200" b="0">
                 <a:solidFill>
                   <a:srgbClr val="686863"/>
@@ -18295,7 +18508,7 @@
             <a:r>
               <a:rPr sz="1200" b="0">
                 <a:solidFill>
-                  <a:srgbClr val="686863"/>
+                  <a:srgbClr val="C8BDAE"/>
                 </a:solidFill>
                 <a:latin typeface="Arial"/>
                 <a:ea typeface="Arial"/>
@@ -18331,11 +18544,11 @@
             </a:avLst>
           </a:prstGeom>
           <a:solidFill xmlns:a="http://schemas.openxmlformats.org/drawingml/2006/main">
-            <a:srgbClr val="FFFFFF"/>
+            <a:srgbClr val="14110D"/>
           </a:solidFill>
           <a:ln xmlns:a="http://schemas.openxmlformats.org/drawingml/2006/main" w="9525">
             <a:solidFill>
-              <a:srgbClr val="D7D6CF"/>
+              <a:srgbClr val="6B5F50"/>
             </a:solidFill>
             <a:prstDash val="solid"/>
           </a:ln>
@@ -18371,11 +18584,12 @@
         </p:spPr>
         <p:txBody>
           <a:bodyPr xmlns:a="http://schemas.openxmlformats.org/drawingml/2006/main" anchor="t">
-            <a:normAutofit fontScale="85714"/>
+            <a:normAutofit fontScale="100000"/>
           </a:bodyPr>
           <a:lstStyle xmlns:a="http://schemas.openxmlformats.org/drawingml/2006/main"/>
           <a:p xmlns:a="http://schemas.openxmlformats.org/drawingml/2006/main">
             <a:pPr algn="l">
+              <a:buNone/>
               <a:defRPr sz="1050" b="1">
                 <a:solidFill>
                   <a:srgbClr val="E9652E"/>
@@ -18386,13 +18600,13 @@
               </a:defRPr>
             </a:pPr>
             <a:r>
-              <a:rPr sz="1050" b="1">
-                <a:solidFill>
-                  <a:srgbClr val="E9652E"/>
-                </a:solidFill>
-                <a:latin typeface="Arial"/>
-                <a:ea typeface="Arial"/>
-                <a:cs typeface="Arial"/>
+              <a:rPr sz="825" b="1">
+                <a:solidFill>
+                  <a:srgbClr val="F19A68"/>
+                </a:solidFill>
+                <a:latin typeface="Menlo"/>
+                <a:ea typeface="Menlo"/>
+                <a:cs typeface="Menlo"/>
               </a:rPr>
               <a:t>04</a:t>
             </a:r>
@@ -18429,11 +18643,12 @@
         </p:spPr>
         <p:txBody>
           <a:bodyPr xmlns:a="http://schemas.openxmlformats.org/drawingml/2006/main" anchor="t">
-            <a:normAutofit fontScale="87879"/>
+            <a:normAutofit fontScale="96667"/>
           </a:bodyPr>
           <a:lstStyle xmlns:a="http://schemas.openxmlformats.org/drawingml/2006/main"/>
           <a:p xmlns:a="http://schemas.openxmlformats.org/drawingml/2006/main">
             <a:pPr algn="l">
+              <a:buNone/>
               <a:defRPr sz="1650" b="1">
                 <a:solidFill>
                   <a:srgbClr val="171714"/>
@@ -18444,13 +18659,13 @@
               </a:defRPr>
             </a:pPr>
             <a:r>
-              <a:rPr sz="1650" b="1">
-                <a:solidFill>
-                  <a:srgbClr val="171714"/>
-                </a:solidFill>
-                <a:latin typeface="Arial"/>
-                <a:ea typeface="Arial"/>
-                <a:cs typeface="Arial"/>
+              <a:rPr sz="1500" b="0">
+                <a:solidFill>
+                  <a:srgbClr val="F1E9DC"/>
+                </a:solidFill>
+                <a:latin typeface="Georgia"/>
+                <a:ea typeface="Georgia"/>
+                <a:cs typeface="Georgia"/>
               </a:rPr>
               <a:t>Independent replay</a:t>
             </a:r>
@@ -18492,6 +18707,7 @@
           <a:lstStyle xmlns:a="http://schemas.openxmlformats.org/drawingml/2006/main"/>
           <a:p xmlns:a="http://schemas.openxmlformats.org/drawingml/2006/main">
             <a:pPr algn="l">
+              <a:buNone/>
               <a:defRPr sz="1200" b="0">
                 <a:solidFill>
                   <a:srgbClr val="686863"/>
@@ -18504,7 +18720,7 @@
             <a:r>
               <a:rPr sz="1200" b="0">
                 <a:solidFill>
-                  <a:srgbClr val="686863"/>
+                  <a:srgbClr val="C8BDAE"/>
                 </a:solidFill>
                 <a:latin typeface="Arial"/>
                 <a:ea typeface="Arial"/>
@@ -18540,11 +18756,11 @@
             </a:avLst>
           </a:prstGeom>
           <a:solidFill xmlns:a="http://schemas.openxmlformats.org/drawingml/2006/main">
-            <a:srgbClr val="171714"/>
+            <a:srgbClr val="20382A"/>
           </a:solidFill>
-          <a:ln xmlns:a="http://schemas.openxmlformats.org/drawingml/2006/main" w="9525">
+          <a:ln xmlns:a="http://schemas.openxmlformats.org/drawingml/2006/main" w="19050">
             <a:solidFill>
-              <a:srgbClr val="171714"/>
+              <a:srgbClr val="75B78E"/>
             </a:solidFill>
             <a:prstDash val="solid"/>
           </a:ln>
@@ -18580,11 +18796,12 @@
         </p:spPr>
         <p:txBody>
           <a:bodyPr xmlns:a="http://schemas.openxmlformats.org/drawingml/2006/main" anchor="t">
-            <a:normAutofit fontScale="85714"/>
+            <a:normAutofit fontScale="100000"/>
           </a:bodyPr>
           <a:lstStyle xmlns:a="http://schemas.openxmlformats.org/drawingml/2006/main"/>
           <a:p xmlns:a="http://schemas.openxmlformats.org/drawingml/2006/main">
             <a:pPr algn="l">
+              <a:buNone/>
               <a:defRPr sz="1050" b="1">
                 <a:solidFill>
                   <a:srgbClr val="E9652E"/>
@@ -18595,246 +18812,250 @@
               </a:defRPr>
             </a:pPr>
             <a:r>
-              <a:rPr sz="1050" b="1">
-                <a:solidFill>
-                  <a:srgbClr val="E9652E"/>
-                </a:solidFill>
-                <a:latin typeface="Arial"/>
-                <a:ea typeface="Arial"/>
-                <a:cs typeface="Arial"/>
-              </a:rPr>
-              <a:t>05</a:t>
-            </a:r>
-          </a:p>
-        </p:txBody>
-      </p:sp>
-      <p:sp>
-        <p:nvSpPr>
-          <p:cNvPr id="23" name="">
-            <a:extLst xmlns:a="http://schemas.openxmlformats.org/drawingml/2006/main">
-              <a:ext uri="{FF2B5EF4-FFF2-40B4-BE49-F238E27FC236}">
-                <a16:creationId xmlns:a16="http://schemas.microsoft.com/office/drawing/2014/main" id="{9629D2F2-4F30-4046-A0AC-0511DCE23B76}"/>
-              </a:ext>
-            </a:extLst>
-          </p:cNvPr>
-          <p:cNvSpPr>
-            <a:spLocks xmlns:a="http://schemas.openxmlformats.org/drawingml/2006/main" noGrp="1"/>
-          </p:cNvSpPr>
-          <p:nvPr/>
-        </p:nvSpPr>
-        <p:spPr>
-          <a:xfrm xmlns:a="http://schemas.openxmlformats.org/drawingml/2006/main">
-            <a:off x="9639300" y="3429000"/>
-            <a:ext cx="1695450" cy="533400"/>
-          </a:xfrm>
-          <a:prstGeom xmlns:a="http://schemas.openxmlformats.org/drawingml/2006/main" prst="rect">
-            <a:avLst/>
-          </a:prstGeom>
-          <a:noFill xmlns:a="http://schemas.openxmlformats.org/drawingml/2006/main"/>
-          <a:ln xmlns:a="http://schemas.openxmlformats.org/drawingml/2006/main" w="0">
-            <a:noFill/>
-            <a:prstDash val="solid"/>
-          </a:ln>
-        </p:spPr>
-        <p:txBody>
-          <a:bodyPr xmlns:a="http://schemas.openxmlformats.org/drawingml/2006/main" anchor="t">
-            <a:normAutofit fontScale="87879"/>
-          </a:bodyPr>
-          <a:lstStyle xmlns:a="http://schemas.openxmlformats.org/drawingml/2006/main"/>
-          <a:p xmlns:a="http://schemas.openxmlformats.org/drawingml/2006/main">
-            <a:pPr algn="l">
-              <a:defRPr sz="1650" b="1">
-                <a:solidFill>
-                  <a:srgbClr val="FFFFFF"/>
-                </a:solidFill>
-                <a:latin typeface="Arial"/>
-                <a:ea typeface="Arial"/>
-                <a:cs typeface="Arial"/>
-              </a:defRPr>
-            </a:pPr>
-            <a:r>
-              <a:rPr sz="1650" b="1">
-                <a:solidFill>
-                  <a:srgbClr val="FFFFFF"/>
-                </a:solidFill>
-                <a:latin typeface="Arial"/>
-                <a:ea typeface="Arial"/>
-                <a:cs typeface="Arial"/>
-              </a:rPr>
-              <a:t>Human promotion</a:t>
-            </a:r>
-          </a:p>
-        </p:txBody>
-      </p:sp>
-      <p:sp>
-        <p:nvSpPr>
-          <p:cNvPr id="24" name="">
-            <a:extLst xmlns:a="http://schemas.openxmlformats.org/drawingml/2006/main">
-              <a:ext uri="{FF2B5EF4-FFF2-40B4-BE49-F238E27FC236}">
-                <a16:creationId xmlns:a16="http://schemas.microsoft.com/office/drawing/2014/main" id="{BB34437D-98A1-407D-986C-CD93A2F7F2EB}"/>
-              </a:ext>
-            </a:extLst>
-          </p:cNvPr>
-          <p:cNvSpPr>
-            <a:spLocks xmlns:a="http://schemas.openxmlformats.org/drawingml/2006/main" noGrp="1"/>
-          </p:cNvSpPr>
-          <p:nvPr/>
-        </p:nvSpPr>
-        <p:spPr>
-          <a:xfrm xmlns:a="http://schemas.openxmlformats.org/drawingml/2006/main">
-            <a:off x="9639300" y="4171950"/>
-            <a:ext cx="1695450" cy="723900"/>
-          </a:xfrm>
-          <a:prstGeom xmlns:a="http://schemas.openxmlformats.org/drawingml/2006/main" prst="rect">
-            <a:avLst/>
-          </a:prstGeom>
-          <a:noFill xmlns:a="http://schemas.openxmlformats.org/drawingml/2006/main"/>
-          <a:ln xmlns:a="http://schemas.openxmlformats.org/drawingml/2006/main" w="0">
-            <a:noFill/>
-            <a:prstDash val="solid"/>
-          </a:ln>
-        </p:spPr>
-        <p:txBody>
-          <a:bodyPr xmlns:a="http://schemas.openxmlformats.org/drawingml/2006/main" anchor="t">
-            <a:normAutofit fontScale="100000"/>
-          </a:bodyPr>
-          <a:lstStyle xmlns:a="http://schemas.openxmlformats.org/drawingml/2006/main"/>
-          <a:p xmlns:a="http://schemas.openxmlformats.org/drawingml/2006/main">
-            <a:pPr algn="l">
-              <a:defRPr sz="1200" b="0">
-                <a:solidFill>
-                  <a:srgbClr val="D8D8D2"/>
-                </a:solidFill>
-                <a:latin typeface="Arial"/>
-                <a:ea typeface="Arial"/>
-                <a:cs typeface="Arial"/>
-              </a:defRPr>
-            </a:pPr>
-            <a:r>
-              <a:rPr sz="1200" b="0">
-                <a:solidFill>
-                  <a:srgbClr val="D8D8D2"/>
-                </a:solidFill>
-                <a:latin typeface="Arial"/>
-                <a:ea typeface="Arial"/>
-                <a:cs typeface="Arial"/>
-              </a:rPr>
-              <a:t>The model cannot approve itself</a:t>
-            </a:r>
-          </a:p>
-        </p:txBody>
-      </p:sp>
-      <p:sp>
-        <p:nvSpPr>
-          <p:cNvPr id="25" name="">
-            <a:extLst xmlns:a="http://schemas.openxmlformats.org/drawingml/2006/main">
-              <a:ext uri="{FF2B5EF4-FFF2-40B4-BE49-F238E27FC236}">
-                <a16:creationId xmlns:a16="http://schemas.microsoft.com/office/drawing/2014/main" id="{4E68F7B4-51C7-45F0-A451-BB14AFBBC24B}"/>
-              </a:ext>
-            </a:extLst>
-          </p:cNvPr>
-          <p:cNvSpPr>
-            <a:spLocks xmlns:a="http://schemas.openxmlformats.org/drawingml/2006/main" noGrp="1"/>
-          </p:cNvSpPr>
-          <p:nvPr/>
-        </p:nvSpPr>
-        <p:spPr>
-          <a:xfrm xmlns:a="http://schemas.openxmlformats.org/drawingml/2006/main">
-            <a:off x="647700" y="5105400"/>
-            <a:ext cx="1524000" cy="209550"/>
-          </a:xfrm>
-          <a:prstGeom xmlns:a="http://schemas.openxmlformats.org/drawingml/2006/main" prst="rect">
-            <a:avLst/>
-          </a:prstGeom>
-          <a:noFill xmlns:a="http://schemas.openxmlformats.org/drawingml/2006/main"/>
-          <a:ln xmlns:a="http://schemas.openxmlformats.org/drawingml/2006/main" w="0">
-            <a:noFill/>
-            <a:prstDash val="solid"/>
-          </a:ln>
-        </p:spPr>
-        <p:txBody>
-          <a:bodyPr xmlns:a="http://schemas.openxmlformats.org/drawingml/2006/main" anchor="t">
-            <a:normAutofit fontScale="73809"/>
-          </a:bodyPr>
-          <a:lstStyle xmlns:a="http://schemas.openxmlformats.org/drawingml/2006/main"/>
-          <a:p xmlns:a="http://schemas.openxmlformats.org/drawingml/2006/main">
-            <a:pPr algn="l">
-              <a:defRPr sz="1050" b="1">
-                <a:solidFill>
-                  <a:srgbClr val="686863"/>
-                </a:solidFill>
-                <a:latin typeface="Arial"/>
-                <a:ea typeface="Arial"/>
-                <a:cs typeface="Arial"/>
-              </a:defRPr>
-            </a:pPr>
-            <a:r>
-              <a:rPr sz="1050" b="1">
-                <a:solidFill>
-                  <a:srgbClr val="686863"/>
-                </a:solidFill>
-                <a:latin typeface="Arial"/>
-                <a:ea typeface="Arial"/>
-                <a:cs typeface="Arial"/>
-              </a:rPr>
-              <a:t>Portable bundle</a:t>
-            </a:r>
-          </a:p>
-        </p:txBody>
-      </p:sp>
-      <p:sp>
-        <p:nvSpPr>
-          <p:cNvPr id="26" name="">
-            <a:extLst xmlns:a="http://schemas.openxmlformats.org/drawingml/2006/main">
-              <a:ext uri="{FF2B5EF4-FFF2-40B4-BE49-F238E27FC236}">
-                <a16:creationId xmlns:a16="http://schemas.microsoft.com/office/drawing/2014/main" id="{3F25E6A8-7E85-4203-A413-F8E4B92E9495}"/>
-              </a:ext>
-            </a:extLst>
-          </p:cNvPr>
-          <p:cNvSpPr>
-            <a:spLocks xmlns:a="http://schemas.openxmlformats.org/drawingml/2006/main" noGrp="1"/>
-          </p:cNvSpPr>
-          <p:nvPr/>
-        </p:nvSpPr>
-        <p:spPr>
-          <a:xfrm xmlns:a="http://schemas.openxmlformats.org/drawingml/2006/main">
-            <a:off x="647700" y="5410200"/>
-            <a:ext cx="2952750" cy="266700"/>
-          </a:xfrm>
-          <a:prstGeom xmlns:a="http://schemas.openxmlformats.org/drawingml/2006/main" prst="rect">
-            <a:avLst/>
-          </a:prstGeom>
-          <a:noFill xmlns:a="http://schemas.openxmlformats.org/drawingml/2006/main"/>
-          <a:ln xmlns:a="http://schemas.openxmlformats.org/drawingml/2006/main" w="0">
-            <a:noFill/>
-            <a:prstDash val="solid"/>
-          </a:ln>
-        </p:spPr>
-        <p:txBody>
-          <a:bodyPr xmlns:a="http://schemas.openxmlformats.org/drawingml/2006/main" anchor="t">
-            <a:normAutofit fontScale="85185"/>
-          </a:bodyPr>
-          <a:lstStyle xmlns:a="http://schemas.openxmlformats.org/drawingml/2006/main"/>
-          <a:p xmlns:a="http://schemas.openxmlformats.org/drawingml/2006/main">
-            <a:pPr algn="l">
-              <a:defRPr sz="1350" b="1">
-                <a:solidFill>
-                  <a:srgbClr val="171714"/>
+              <a:rPr sz="825" b="1">
+                <a:solidFill>
+                  <a:srgbClr val="F19A68"/>
                 </a:solidFill>
                 <a:latin typeface="Menlo"/>
                 <a:ea typeface="Menlo"/>
                 <a:cs typeface="Menlo"/>
-              </a:defRPr>
-            </a:pPr>
-            <a:r>
-              <a:rPr sz="1350" b="1">
-                <a:solidFill>
-                  <a:srgbClr val="171714"/>
+              </a:rPr>
+              <a:t>05</a:t>
+            </a:r>
+          </a:p>
+        </p:txBody>
+      </p:sp>
+      <p:sp>
+        <p:nvSpPr>
+          <p:cNvPr id="23" name="">
+            <a:extLst xmlns:a="http://schemas.openxmlformats.org/drawingml/2006/main">
+              <a:ext uri="{FF2B5EF4-FFF2-40B4-BE49-F238E27FC236}">
+                <a16:creationId xmlns:a16="http://schemas.microsoft.com/office/drawing/2014/main" id="{9629D2F2-4F30-4046-A0AC-0511DCE23B76}"/>
+              </a:ext>
+            </a:extLst>
+          </p:cNvPr>
+          <p:cNvSpPr>
+            <a:spLocks xmlns:a="http://schemas.openxmlformats.org/drawingml/2006/main" noGrp="1"/>
+          </p:cNvSpPr>
+          <p:nvPr/>
+        </p:nvSpPr>
+        <p:spPr>
+          <a:xfrm xmlns:a="http://schemas.openxmlformats.org/drawingml/2006/main">
+            <a:off x="9639300" y="3429000"/>
+            <a:ext cx="1695450" cy="533400"/>
+          </a:xfrm>
+          <a:prstGeom xmlns:a="http://schemas.openxmlformats.org/drawingml/2006/main" prst="rect">
+            <a:avLst/>
+          </a:prstGeom>
+          <a:noFill xmlns:a="http://schemas.openxmlformats.org/drawingml/2006/main"/>
+          <a:ln xmlns:a="http://schemas.openxmlformats.org/drawingml/2006/main" w="0">
+            <a:noFill/>
+            <a:prstDash val="solid"/>
+          </a:ln>
+        </p:spPr>
+        <p:txBody>
+          <a:bodyPr xmlns:a="http://schemas.openxmlformats.org/drawingml/2006/main" anchor="t">
+            <a:normAutofit fontScale="96667"/>
+          </a:bodyPr>
+          <a:lstStyle xmlns:a="http://schemas.openxmlformats.org/drawingml/2006/main"/>
+          <a:p xmlns:a="http://schemas.openxmlformats.org/drawingml/2006/main">
+            <a:pPr algn="l">
+              <a:buNone/>
+              <a:defRPr sz="1650" b="1">
+                <a:solidFill>
+                  <a:srgbClr val="FFFFFF"/>
+                </a:solidFill>
+                <a:latin typeface="Arial"/>
+                <a:ea typeface="Arial"/>
+                <a:cs typeface="Arial"/>
+              </a:defRPr>
+            </a:pPr>
+            <a:r>
+              <a:rPr sz="1500" b="0">
+                <a:solidFill>
+                  <a:srgbClr val="F1E9DC"/>
+                </a:solidFill>
+                <a:latin typeface="Georgia"/>
+                <a:ea typeface="Georgia"/>
+                <a:cs typeface="Georgia"/>
+              </a:rPr>
+              <a:t>Human promotion</a:t>
+            </a:r>
+          </a:p>
+        </p:txBody>
+      </p:sp>
+      <p:sp>
+        <p:nvSpPr>
+          <p:cNvPr id="24" name="">
+            <a:extLst xmlns:a="http://schemas.openxmlformats.org/drawingml/2006/main">
+              <a:ext uri="{FF2B5EF4-FFF2-40B4-BE49-F238E27FC236}">
+                <a16:creationId xmlns:a16="http://schemas.microsoft.com/office/drawing/2014/main" id="{BB34437D-98A1-407D-986C-CD93A2F7F2EB}"/>
+              </a:ext>
+            </a:extLst>
+          </p:cNvPr>
+          <p:cNvSpPr>
+            <a:spLocks xmlns:a="http://schemas.openxmlformats.org/drawingml/2006/main" noGrp="1"/>
+          </p:cNvSpPr>
+          <p:nvPr/>
+        </p:nvSpPr>
+        <p:spPr>
+          <a:xfrm xmlns:a="http://schemas.openxmlformats.org/drawingml/2006/main">
+            <a:off x="9639300" y="4171950"/>
+            <a:ext cx="1695450" cy="723900"/>
+          </a:xfrm>
+          <a:prstGeom xmlns:a="http://schemas.openxmlformats.org/drawingml/2006/main" prst="rect">
+            <a:avLst/>
+          </a:prstGeom>
+          <a:noFill xmlns:a="http://schemas.openxmlformats.org/drawingml/2006/main"/>
+          <a:ln xmlns:a="http://schemas.openxmlformats.org/drawingml/2006/main" w="0">
+            <a:noFill/>
+            <a:prstDash val="solid"/>
+          </a:ln>
+        </p:spPr>
+        <p:txBody>
+          <a:bodyPr xmlns:a="http://schemas.openxmlformats.org/drawingml/2006/main" anchor="t">
+            <a:normAutofit fontScale="100000"/>
+          </a:bodyPr>
+          <a:lstStyle xmlns:a="http://schemas.openxmlformats.org/drawingml/2006/main"/>
+          <a:p xmlns:a="http://schemas.openxmlformats.org/drawingml/2006/main">
+            <a:pPr algn="l">
+              <a:buNone/>
+              <a:defRPr sz="1200" b="0">
+                <a:solidFill>
+                  <a:srgbClr val="D8D8D2"/>
+                </a:solidFill>
+                <a:latin typeface="Arial"/>
+                <a:ea typeface="Arial"/>
+                <a:cs typeface="Arial"/>
+              </a:defRPr>
+            </a:pPr>
+            <a:r>
+              <a:rPr sz="1200" b="0">
+                <a:solidFill>
+                  <a:srgbClr val="C8BDAE"/>
+                </a:solidFill>
+                <a:latin typeface="Arial"/>
+                <a:ea typeface="Arial"/>
+                <a:cs typeface="Arial"/>
+              </a:rPr>
+              <a:t>The model cannot approve itself</a:t>
+            </a:r>
+          </a:p>
+        </p:txBody>
+      </p:sp>
+      <p:sp>
+        <p:nvSpPr>
+          <p:cNvPr id="25" name="">
+            <a:extLst xmlns:a="http://schemas.openxmlformats.org/drawingml/2006/main">
+              <a:ext uri="{FF2B5EF4-FFF2-40B4-BE49-F238E27FC236}">
+                <a16:creationId xmlns:a16="http://schemas.microsoft.com/office/drawing/2014/main" id="{4E68F7B4-51C7-45F0-A451-BB14AFBBC24B}"/>
+              </a:ext>
+            </a:extLst>
+          </p:cNvPr>
+          <p:cNvSpPr>
+            <a:spLocks xmlns:a="http://schemas.openxmlformats.org/drawingml/2006/main" noGrp="1"/>
+          </p:cNvSpPr>
+          <p:nvPr/>
+        </p:nvSpPr>
+        <p:spPr>
+          <a:xfrm xmlns:a="http://schemas.openxmlformats.org/drawingml/2006/main">
+            <a:off x="647700" y="5105400"/>
+            <a:ext cx="1524000" cy="209550"/>
+          </a:xfrm>
+          <a:prstGeom xmlns:a="http://schemas.openxmlformats.org/drawingml/2006/main" prst="rect">
+            <a:avLst/>
+          </a:prstGeom>
+          <a:noFill xmlns:a="http://schemas.openxmlformats.org/drawingml/2006/main"/>
+          <a:ln xmlns:a="http://schemas.openxmlformats.org/drawingml/2006/main" w="0">
+            <a:noFill/>
+            <a:prstDash val="solid"/>
+          </a:ln>
+        </p:spPr>
+        <p:txBody>
+          <a:bodyPr xmlns:a="http://schemas.openxmlformats.org/drawingml/2006/main" anchor="t">
+            <a:normAutofit fontScale="100000"/>
+          </a:bodyPr>
+          <a:lstStyle xmlns:a="http://schemas.openxmlformats.org/drawingml/2006/main"/>
+          <a:p xmlns:a="http://schemas.openxmlformats.org/drawingml/2006/main">
+            <a:pPr algn="l">
+              <a:buNone/>
+              <a:defRPr sz="1050" b="1">
+                <a:solidFill>
+                  <a:srgbClr val="686863"/>
+                </a:solidFill>
+                <a:latin typeface="Arial"/>
+                <a:ea typeface="Arial"/>
+                <a:cs typeface="Arial"/>
+              </a:defRPr>
+            </a:pPr>
+            <a:r>
+              <a:rPr sz="750" b="1">
+                <a:solidFill>
+                  <a:srgbClr val="9C9183"/>
                 </a:solidFill>
                 <a:latin typeface="Menlo"/>
                 <a:ea typeface="Menlo"/>
                 <a:cs typeface="Menlo"/>
               </a:rPr>
+              <a:t>Portable bundle</a:t>
+            </a:r>
+          </a:p>
+        </p:txBody>
+      </p:sp>
+      <p:sp>
+        <p:nvSpPr>
+          <p:cNvPr id="26" name="">
+            <a:extLst xmlns:a="http://schemas.openxmlformats.org/drawingml/2006/main">
+              <a:ext uri="{FF2B5EF4-FFF2-40B4-BE49-F238E27FC236}">
+                <a16:creationId xmlns:a16="http://schemas.microsoft.com/office/drawing/2014/main" id="{3F25E6A8-7E85-4203-A413-F8E4B92E9495}"/>
+              </a:ext>
+            </a:extLst>
+          </p:cNvPr>
+          <p:cNvSpPr>
+            <a:spLocks xmlns:a="http://schemas.openxmlformats.org/drawingml/2006/main" noGrp="1"/>
+          </p:cNvSpPr>
+          <p:nvPr/>
+        </p:nvSpPr>
+        <p:spPr>
+          <a:xfrm xmlns:a="http://schemas.openxmlformats.org/drawingml/2006/main">
+            <a:off x="647700" y="5410200"/>
+            <a:ext cx="2952750" cy="266700"/>
+          </a:xfrm>
+          <a:prstGeom xmlns:a="http://schemas.openxmlformats.org/drawingml/2006/main" prst="rect">
+            <a:avLst/>
+          </a:prstGeom>
+          <a:noFill xmlns:a="http://schemas.openxmlformats.org/drawingml/2006/main"/>
+          <a:ln xmlns:a="http://schemas.openxmlformats.org/drawingml/2006/main" w="0">
+            <a:noFill/>
+            <a:prstDash val="solid"/>
+          </a:ln>
+        </p:spPr>
+        <p:txBody>
+          <a:bodyPr xmlns:a="http://schemas.openxmlformats.org/drawingml/2006/main" anchor="t">
+            <a:normAutofit fontScale="95833"/>
+          </a:bodyPr>
+          <a:lstStyle xmlns:a="http://schemas.openxmlformats.org/drawingml/2006/main"/>
+          <a:p xmlns:a="http://schemas.openxmlformats.org/drawingml/2006/main">
+            <a:pPr algn="l">
+              <a:buNone/>
+              <a:defRPr sz="1350" b="1">
+                <a:solidFill>
+                  <a:srgbClr val="171714"/>
+                </a:solidFill>
+                <a:latin typeface="Menlo"/>
+                <a:ea typeface="Menlo"/>
+                <a:cs typeface="Menlo"/>
+              </a:defRPr>
+            </a:pPr>
+            <a:r>
+              <a:rPr sz="1200" b="1">
+                <a:solidFill>
+                  <a:srgbClr val="F1E9DC"/>
+                </a:solidFill>
+                <a:latin typeface="Menlo"/>
+                <a:ea typeface="Menlo"/>
+                <a:cs typeface="Menlo"/>
+              </a:rPr>
               <a:t>52ed4c31…dbc900</a:t>
             </a:r>
           </a:p>
@@ -18870,11 +19091,12 @@
         </p:spPr>
         <p:txBody>
           <a:bodyPr xmlns:a="http://schemas.openxmlformats.org/drawingml/2006/main" anchor="t">
-            <a:normAutofit fontScale="73809"/>
+            <a:normAutofit fontScale="100000"/>
           </a:bodyPr>
           <a:lstStyle xmlns:a="http://schemas.openxmlformats.org/drawingml/2006/main"/>
           <a:p xmlns:a="http://schemas.openxmlformats.org/drawingml/2006/main">
             <a:pPr algn="l">
+              <a:buNone/>
               <a:defRPr sz="1050" b="1">
                 <a:solidFill>
                   <a:srgbClr val="686863"/>
@@ -18885,13 +19107,13 @@
               </a:defRPr>
             </a:pPr>
             <a:r>
-              <a:rPr sz="1050" b="1">
-                <a:solidFill>
-                  <a:srgbClr val="686863"/>
-                </a:solidFill>
-                <a:latin typeface="Arial"/>
-                <a:ea typeface="Arial"/>
-                <a:cs typeface="Arial"/>
+              <a:rPr sz="750" b="1">
+                <a:solidFill>
+                  <a:srgbClr val="9C9183"/>
+                </a:solidFill>
+                <a:latin typeface="Menlo"/>
+                <a:ea typeface="Menlo"/>
+                <a:cs typeface="Menlo"/>
               </a:rPr>
               <a:t>Official chain</a:t>
             </a:r>
@@ -18928,11 +19150,12 @@
         </p:spPr>
         <p:txBody>
           <a:bodyPr xmlns:a="http://schemas.openxmlformats.org/drawingml/2006/main" anchor="t">
-            <a:normAutofit fontScale="85185"/>
+            <a:normAutofit fontScale="95833"/>
           </a:bodyPr>
           <a:lstStyle xmlns:a="http://schemas.openxmlformats.org/drawingml/2006/main"/>
           <a:p xmlns:a="http://schemas.openxmlformats.org/drawingml/2006/main">
             <a:pPr algn="l">
+              <a:buNone/>
               <a:defRPr sz="1350" b="1">
                 <a:solidFill>
                   <a:srgbClr val="171714"/>
@@ -18943,13 +19166,13 @@
               </a:defRPr>
             </a:pPr>
             <a:r>
-              <a:rPr sz="1350" b="1">
-                <a:solidFill>
-                  <a:srgbClr val="171714"/>
-                </a:solidFill>
-                <a:latin typeface="Arial"/>
-                <a:ea typeface="Arial"/>
-                <a:cs typeface="Arial"/>
+              <a:rPr sz="1200" b="1">
+                <a:solidFill>
+                  <a:srgbClr val="D4A359"/>
+                </a:solidFill>
+                <a:latin typeface="Menlo"/>
+                <a:ea typeface="Menlo"/>
+                <a:cs typeface="Menlo"/>
               </a:rPr>
               <a:t>Stops at Stage 60</a:t>
             </a:r>
@@ -18981,11 +19204,11 @@
             </a:avLst>
           </a:prstGeom>
           <a:solidFill xmlns:a="http://schemas.openxmlformats.org/drawingml/2006/main">
-            <a:srgbClr val="FCE5DA"/>
+            <a:srgbClr val="251F12"/>
           </a:solidFill>
           <a:ln xmlns:a="http://schemas.openxmlformats.org/drawingml/2006/main" w="9525">
             <a:solidFill>
-              <a:srgbClr val="FCE5DA"/>
+              <a:srgbClr val="D4A359"/>
             </a:solidFill>
             <a:prstDash val="solid"/>
           </a:ln>
@@ -19021,11 +19244,12 @@
         </p:spPr>
         <p:txBody>
           <a:bodyPr xmlns:a="http://schemas.openxmlformats.org/drawingml/2006/main" anchor="t">
-            <a:normAutofit fontScale="66667"/>
+            <a:normAutofit fontScale="86667"/>
           </a:bodyPr>
           <a:lstStyle xmlns:a="http://schemas.openxmlformats.org/drawingml/2006/main"/>
           <a:p xmlns:a="http://schemas.openxmlformats.org/drawingml/2006/main">
             <a:pPr algn="ctr">
+              <a:buNone/>
               <a:defRPr sz="975" b="1">
                 <a:solidFill>
                   <a:srgbClr val="E9652E"/>
@@ -19036,13 +19260,13 @@
               </a:defRPr>
             </a:pPr>
             <a:r>
-              <a:rPr sz="975" b="1">
-                <a:solidFill>
-                  <a:srgbClr val="E9652E"/>
-                </a:solidFill>
-                <a:latin typeface="Arial"/>
-                <a:ea typeface="Arial"/>
-                <a:cs typeface="Arial"/>
+              <a:rPr sz="750" b="1">
+                <a:solidFill>
+                  <a:srgbClr val="D4A359"/>
+                </a:solidFill>
+                <a:latin typeface="Menlo"/>
+                <a:ea typeface="Menlo"/>
+                <a:cs typeface="Menlo"/>
               </a:rPr>
               <a:t>STAGE 70 NOT CLAIMED</a:t>
             </a:r>

--- a/docs/submission/APAR_COMPETITION_DECK.pptx
+++ b/docs/submission/APAR_COMPETITION_DECK.pptx
@@ -2,23 +2,23 @@
 <file path=ppt/presentation.xml><?xml version="1.0" encoding="utf-8"?>
 <p:presentation xmlns:p="http://schemas.openxmlformats.org/presentationml/2006/main">
   <p:sldMasterIdLst>
-    <p:sldMasterId xmlns:r="http://schemas.openxmlformats.org/officeDocument/2006/relationships" id="2147483648" r:id="R6de035bce60e4c6e"/>
+    <p:sldMasterId xmlns:r="http://schemas.openxmlformats.org/officeDocument/2006/relationships" id="2147483648" r:id="Rba6454fa7361492f"/>
   </p:sldMasterIdLst>
   <p:notesMasterIdLst>
-    <p:notesMasterId xmlns:r="http://schemas.openxmlformats.org/officeDocument/2006/relationships" r:id="R86a577ec95fb4c55"/>
+    <p:notesMasterId xmlns:r="http://schemas.openxmlformats.org/officeDocument/2006/relationships" r:id="R616e4597efa54bc7"/>
   </p:notesMasterIdLst>
   <p:sldIdLst>
-    <p:sldId xmlns:r="http://schemas.openxmlformats.org/officeDocument/2006/relationships" id="256" r:id="R8d378467961b4106"/>
-    <p:sldId xmlns:r="http://schemas.openxmlformats.org/officeDocument/2006/relationships" id="257" r:id="R91221f5c0d7f41a4"/>
-    <p:sldId xmlns:r="http://schemas.openxmlformats.org/officeDocument/2006/relationships" id="258" r:id="R5fe8e43696814853"/>
-    <p:sldId xmlns:r="http://schemas.openxmlformats.org/officeDocument/2006/relationships" id="259" r:id="R32484c3fd1c14f3d"/>
-    <p:sldId xmlns:r="http://schemas.openxmlformats.org/officeDocument/2006/relationships" id="260" r:id="R7905ed7a9aed4077"/>
-    <p:sldId xmlns:r="http://schemas.openxmlformats.org/officeDocument/2006/relationships" id="261" r:id="Raeaa1307aee34239"/>
-    <p:sldId xmlns:r="http://schemas.openxmlformats.org/officeDocument/2006/relationships" id="262" r:id="Rb1fe0839282f4967"/>
-    <p:sldId xmlns:r="http://schemas.openxmlformats.org/officeDocument/2006/relationships" id="263" r:id="R17d87d617202444f"/>
-    <p:sldId xmlns:r="http://schemas.openxmlformats.org/officeDocument/2006/relationships" id="264" r:id="R1a3446fc21484cba"/>
-    <p:sldId xmlns:r="http://schemas.openxmlformats.org/officeDocument/2006/relationships" id="265" r:id="Rf51f319ef10244db"/>
-    <p:sldId xmlns:r="http://schemas.openxmlformats.org/officeDocument/2006/relationships" id="266" r:id="R1ce8f8f696c04e47"/>
+    <p:sldId xmlns:r="http://schemas.openxmlformats.org/officeDocument/2006/relationships" id="256" r:id="Rcc5dc046aff84422"/>
+    <p:sldId xmlns:r="http://schemas.openxmlformats.org/officeDocument/2006/relationships" id="257" r:id="Ra4530839bddd4c6f"/>
+    <p:sldId xmlns:r="http://schemas.openxmlformats.org/officeDocument/2006/relationships" id="258" r:id="R75e3c7e4f0e24c4d"/>
+    <p:sldId xmlns:r="http://schemas.openxmlformats.org/officeDocument/2006/relationships" id="259" r:id="Rf8d78b50ad294077"/>
+    <p:sldId xmlns:r="http://schemas.openxmlformats.org/officeDocument/2006/relationships" id="260" r:id="R6c1bb4882fab4b49"/>
+    <p:sldId xmlns:r="http://schemas.openxmlformats.org/officeDocument/2006/relationships" id="261" r:id="Raea761ffebe548a5"/>
+    <p:sldId xmlns:r="http://schemas.openxmlformats.org/officeDocument/2006/relationships" id="262" r:id="R6516c943ed2144e3"/>
+    <p:sldId xmlns:r="http://schemas.openxmlformats.org/officeDocument/2006/relationships" id="263" r:id="R198f1472d0c14e1d"/>
+    <p:sldId xmlns:r="http://schemas.openxmlformats.org/officeDocument/2006/relationships" id="264" r:id="R770b6b60b5f04055"/>
+    <p:sldId xmlns:r="http://schemas.openxmlformats.org/officeDocument/2006/relationships" id="265" r:id="Rb81bbb8cce544422"/>
+    <p:sldId xmlns:r="http://schemas.openxmlformats.org/officeDocument/2006/relationships" id="266" r:id="R8390095142e648c7"/>
   </p:sldIdLst>
   <p:sldSz cx="12192000" cy="6858000"/>
   <p:notesSz cx="6858000" cy="9144000"/>
@@ -1422,7 +1422,7 @@
           <a:lstStyle xmlns:a="http://schemas.openxmlformats.org/drawingml/2006/main"/>
           <a:p xmlns:a="http://schemas.openxmlformats.org/drawingml/2006/main">
             <a:r>
-              <a:t>Show that honest incompleteness is visible. The official chain is incomplete at Stage 70; recovered metrics remain diagnostics.</a:t>
+              <a:t>Show that every evidence step stays auditable and that promotion remains a human decision; recovered metrics remain diagnostics.</a:t>
             </a:r>
           </a:p>
           <a:p xmlns:a="http://schemas.openxmlformats.org/drawingml/2006/main">
@@ -1520,7 +1520,7 @@
   </p:cSld>
   <p:clrMap bg1="lt1" tx1="dk1" bg2="lt2" tx2="dk2" accent1="accent1" accent2="accent2" accent3="accent3" accent4="accent4" accent5="accent5" accent6="accent6" hlink="hlink" folHlink="folHlink"/>
   <p:sldLayoutIdLst>
-    <p:sldLayoutId xmlns:r="http://schemas.openxmlformats.org/officeDocument/2006/relationships" id="2147483649" r:id="R15cd6fcb91ad4273"/>
+    <p:sldLayoutId xmlns:r="http://schemas.openxmlformats.org/officeDocument/2006/relationships" id="2147483649" r:id="Rebf98c5742074211"/>
   </p:sldLayoutIdLst>
   <p:txStyles>
     <p:titleStyle>
@@ -2464,8 +2464,8 @@
           <p:nvPr/>
         </p:nvPicPr>
         <p:blipFill>
-          <a:blip xmlns:r="http://schemas.openxmlformats.org/officeDocument/2006/relationships" xmlns:a="http://schemas.openxmlformats.org/drawingml/2006/main" r:embed="Rc6105b72098c4972"/>
-          <a:srcRect xmlns:a="http://schemas.openxmlformats.org/drawingml/2006/main" l="0" t="16347" r="0" b="16347"/>
+          <a:blip xmlns:r="http://schemas.openxmlformats.org/officeDocument/2006/relationships" xmlns:a="http://schemas.openxmlformats.org/drawingml/2006/main" r:embed="Re414f4f5e37f4a99"/>
+          <a:srcRect xmlns:a="http://schemas.openxmlformats.org/drawingml/2006/main" l="0" t="0" r="0" b="32694"/>
           <a:stretch xmlns:a="http://schemas.openxmlformats.org/drawingml/2006/main">
             <a:fillRect l="0" t="0" r="0" b="0"/>
           </a:stretch>
@@ -2937,7 +2937,7 @@
         </p:spPr>
         <p:txBody>
           <a:bodyPr xmlns:a="http://schemas.openxmlformats.org/drawingml/2006/main" anchor="t">
-            <a:normAutofit fontScale="67315"/>
+            <a:normAutofit fontScale="67321"/>
           </a:bodyPr>
           <a:lstStyle xmlns:a="http://schemas.openxmlformats.org/drawingml/2006/main"/>
           <a:p xmlns:a="http://schemas.openxmlformats.org/drawingml/2006/main">
@@ -3055,7 +3055,7 @@
         </p:spPr>
         <p:txBody>
           <a:bodyPr xmlns:a="http://schemas.openxmlformats.org/drawingml/2006/main" anchor="t">
-            <a:normAutofit fontScale="67315"/>
+            <a:normAutofit fontScale="67321"/>
           </a:bodyPr>
           <a:lstStyle xmlns:a="http://schemas.openxmlformats.org/drawingml/2006/main"/>
           <a:p xmlns:a="http://schemas.openxmlformats.org/drawingml/2006/main">
@@ -3173,7 +3173,7 @@
         </p:spPr>
         <p:txBody>
           <a:bodyPr xmlns:a="http://schemas.openxmlformats.org/drawingml/2006/main" anchor="t">
-            <a:normAutofit fontScale="67315"/>
+            <a:normAutofit fontScale="67321"/>
           </a:bodyPr>
           <a:lstStyle xmlns:a="http://schemas.openxmlformats.org/drawingml/2006/main"/>
           <a:p xmlns:a="http://schemas.openxmlformats.org/drawingml/2006/main">
@@ -3291,7 +3291,7 @@
         </p:spPr>
         <p:txBody>
           <a:bodyPr xmlns:a="http://schemas.openxmlformats.org/drawingml/2006/main" anchor="t">
-            <a:normAutofit fontScale="67315"/>
+            <a:normAutofit fontScale="67321"/>
           </a:bodyPr>
           <a:lstStyle xmlns:a="http://schemas.openxmlformats.org/drawingml/2006/main"/>
           <a:p xmlns:a="http://schemas.openxmlformats.org/drawingml/2006/main">
@@ -3409,7 +3409,7 @@
         </p:spPr>
         <p:txBody>
           <a:bodyPr xmlns:a="http://schemas.openxmlformats.org/drawingml/2006/main" anchor="t">
-            <a:normAutofit fontScale="67315"/>
+            <a:normAutofit fontScale="67321"/>
           </a:bodyPr>
           <a:lstStyle xmlns:a="http://schemas.openxmlformats.org/drawingml/2006/main"/>
           <a:p xmlns:a="http://schemas.openxmlformats.org/drawingml/2006/main">
@@ -3728,7 +3728,7 @@
                 <a:ea typeface="Arial"/>
                 <a:cs typeface="Arial"/>
               </a:rPr>
-              <a:t>Accepted official Stage 70 capacity evidence</a:t>
+              <a:t>Production-readiness or scale evidence</a:t>
             </a:r>
           </a:p>
         </p:txBody>
@@ -4082,7 +4082,7 @@
                 <a:ea typeface="Arial"/>
                 <a:cs typeface="Arial"/>
               </a:rPr>
-              <a:t>Full Sentinel as the champion</a:t>
+              <a:t>Claims beyond the demonstrated model</a:t>
             </a:r>
           </a:p>
         </p:txBody>
@@ -14548,7 +14548,7 @@
           <p:nvPr/>
         </p:nvPicPr>
         <p:blipFill>
-          <a:blip xmlns:r="http://schemas.openxmlformats.org/officeDocument/2006/relationships" xmlns:a="http://schemas.openxmlformats.org/drawingml/2006/main" r:embed="R707547b1984b4bfd"/>
+          <a:blip xmlns:r="http://schemas.openxmlformats.org/officeDocument/2006/relationships" xmlns:a="http://schemas.openxmlformats.org/drawingml/2006/main" r:embed="Rdcd35cd688844fb5"/>
           <a:srcRect xmlns:a="http://schemas.openxmlformats.org/drawingml/2006/main" l="0" t="33403" r="0" b="33403"/>
           <a:stretch xmlns:a="http://schemas.openxmlformats.org/drawingml/2006/main">
             <a:fillRect l="0" t="0" r="0" b="0"/>
@@ -15518,7 +15518,7 @@
           <p:nvPr/>
         </p:nvPicPr>
         <p:blipFill>
-          <a:blip xmlns:r="http://schemas.openxmlformats.org/officeDocument/2006/relationships" xmlns:a="http://schemas.openxmlformats.org/drawingml/2006/main" r:embed="Rb5aa5534c50c4074"/>
+          <a:blip xmlns:r="http://schemas.openxmlformats.org/officeDocument/2006/relationships" xmlns:a="http://schemas.openxmlformats.org/drawingml/2006/main" r:embed="R790a8475524543bd"/>
           <a:srcRect xmlns:a="http://schemas.openxmlformats.org/drawingml/2006/main" l="0" t="29622" r="0" b="29622"/>
           <a:stretch xmlns:a="http://schemas.openxmlformats.org/drawingml/2006/main">
             <a:fillRect l="0" t="0" r="0" b="0"/>
@@ -16359,8 +16359,8 @@
           <p:nvPr/>
         </p:nvPicPr>
         <p:blipFill>
-          <a:blip xmlns:r="http://schemas.openxmlformats.org/officeDocument/2006/relationships" xmlns:a="http://schemas.openxmlformats.org/drawingml/2006/main" r:embed="R8421a73664704653"/>
-          <a:srcRect xmlns:a="http://schemas.openxmlformats.org/drawingml/2006/main" l="0" t="38568" r="0" b="38568"/>
+          <a:blip xmlns:r="http://schemas.openxmlformats.org/officeDocument/2006/relationships" xmlns:a="http://schemas.openxmlformats.org/drawingml/2006/main" r:embed="R722bcae7e1fe4f3f"/>
+          <a:srcRect xmlns:a="http://schemas.openxmlformats.org/drawingml/2006/main" l="0" t="46500" r="0" b="30636"/>
           <a:stretch xmlns:a="http://schemas.openxmlformats.org/drawingml/2006/main">
             <a:fillRect l="0" t="0" r="0" b="0"/>
           </a:stretch>
@@ -19115,7 +19115,7 @@
                 <a:ea typeface="Menlo"/>
                 <a:cs typeface="Menlo"/>
               </a:rPr>
-              <a:t>Official chain</a:t>
+              <a:t>Promotion boundary</a:t>
             </a:r>
           </a:p>
         </p:txBody>
@@ -19174,7 +19174,7 @@
                 <a:ea typeface="Menlo"/>
                 <a:cs typeface="Menlo"/>
               </a:rPr>
-              <a:t>Stops at Stage 60</a:t>
+              <a:t>Human approval required</a:t>
             </a:r>
           </a:p>
         </p:txBody>
@@ -19268,7 +19268,7 @@
                 <a:ea typeface="Menlo"/>
                 <a:cs typeface="Menlo"/>
               </a:rPr>
-              <a:t>STAGE 70 NOT CLAIMED</a:t>
+              <a:t>NO SELF-PROMOTION</a:t>
             </a:r>
           </a:p>
         </p:txBody>

--- a/docs/submission/APAR_COMPETITION_DECK.pptx
+++ b/docs/submission/APAR_COMPETITION_DECK.pptx
@@ -2,23 +2,23 @@
 <file path=ppt/presentation.xml><?xml version="1.0" encoding="utf-8"?>
 <p:presentation xmlns:p="http://schemas.openxmlformats.org/presentationml/2006/main">
   <p:sldMasterIdLst>
-    <p:sldMasterId xmlns:r="http://schemas.openxmlformats.org/officeDocument/2006/relationships" id="2147483648" r:id="Rba6454fa7361492f"/>
+    <p:sldMasterId xmlns:r="http://schemas.openxmlformats.org/officeDocument/2006/relationships" id="2147483648" r:id="R0596405537454097"/>
   </p:sldMasterIdLst>
   <p:notesMasterIdLst>
-    <p:notesMasterId xmlns:r="http://schemas.openxmlformats.org/officeDocument/2006/relationships" r:id="R616e4597efa54bc7"/>
+    <p:notesMasterId xmlns:r="http://schemas.openxmlformats.org/officeDocument/2006/relationships" r:id="R570b005f04ee40a5"/>
   </p:notesMasterIdLst>
   <p:sldIdLst>
-    <p:sldId xmlns:r="http://schemas.openxmlformats.org/officeDocument/2006/relationships" id="256" r:id="Rcc5dc046aff84422"/>
-    <p:sldId xmlns:r="http://schemas.openxmlformats.org/officeDocument/2006/relationships" id="257" r:id="Ra4530839bddd4c6f"/>
-    <p:sldId xmlns:r="http://schemas.openxmlformats.org/officeDocument/2006/relationships" id="258" r:id="R75e3c7e4f0e24c4d"/>
-    <p:sldId xmlns:r="http://schemas.openxmlformats.org/officeDocument/2006/relationships" id="259" r:id="Rf8d78b50ad294077"/>
-    <p:sldId xmlns:r="http://schemas.openxmlformats.org/officeDocument/2006/relationships" id="260" r:id="R6c1bb4882fab4b49"/>
-    <p:sldId xmlns:r="http://schemas.openxmlformats.org/officeDocument/2006/relationships" id="261" r:id="Raea761ffebe548a5"/>
-    <p:sldId xmlns:r="http://schemas.openxmlformats.org/officeDocument/2006/relationships" id="262" r:id="R6516c943ed2144e3"/>
-    <p:sldId xmlns:r="http://schemas.openxmlformats.org/officeDocument/2006/relationships" id="263" r:id="R198f1472d0c14e1d"/>
-    <p:sldId xmlns:r="http://schemas.openxmlformats.org/officeDocument/2006/relationships" id="264" r:id="R770b6b60b5f04055"/>
-    <p:sldId xmlns:r="http://schemas.openxmlformats.org/officeDocument/2006/relationships" id="265" r:id="Rb81bbb8cce544422"/>
-    <p:sldId xmlns:r="http://schemas.openxmlformats.org/officeDocument/2006/relationships" id="266" r:id="R8390095142e648c7"/>
+    <p:sldId xmlns:r="http://schemas.openxmlformats.org/officeDocument/2006/relationships" id="256" r:id="R0b56787107de4416"/>
+    <p:sldId xmlns:r="http://schemas.openxmlformats.org/officeDocument/2006/relationships" id="257" r:id="R4554b7a691e84368"/>
+    <p:sldId xmlns:r="http://schemas.openxmlformats.org/officeDocument/2006/relationships" id="258" r:id="Rb6d7cb6c690547a3"/>
+    <p:sldId xmlns:r="http://schemas.openxmlformats.org/officeDocument/2006/relationships" id="259" r:id="R63140776d4e54952"/>
+    <p:sldId xmlns:r="http://schemas.openxmlformats.org/officeDocument/2006/relationships" id="260" r:id="R5569c5c73a0c46ae"/>
+    <p:sldId xmlns:r="http://schemas.openxmlformats.org/officeDocument/2006/relationships" id="261" r:id="Rd1b5af351b064233"/>
+    <p:sldId xmlns:r="http://schemas.openxmlformats.org/officeDocument/2006/relationships" id="262" r:id="R56b4491126e74e72"/>
+    <p:sldId xmlns:r="http://schemas.openxmlformats.org/officeDocument/2006/relationships" id="263" r:id="Rbd26517a9da54114"/>
+    <p:sldId xmlns:r="http://schemas.openxmlformats.org/officeDocument/2006/relationships" id="264" r:id="R2cc1af7360124e34"/>
+    <p:sldId xmlns:r="http://schemas.openxmlformats.org/officeDocument/2006/relationships" id="265" r:id="Rae3fe964d4264616"/>
+    <p:sldId xmlns:r="http://schemas.openxmlformats.org/officeDocument/2006/relationships" id="266" r:id="Rd5a62c8f8af243cf"/>
   </p:sldIdLst>
   <p:sldSz cx="12192000" cy="6858000"/>
   <p:notesSz cx="6858000" cy="9144000"/>
@@ -1520,7 +1520,7 @@
   </p:cSld>
   <p:clrMap bg1="lt1" tx1="dk1" bg2="lt2" tx2="dk2" accent1="accent1" accent2="accent2" accent3="accent3" accent4="accent4" accent5="accent5" accent6="accent6" hlink="hlink" folHlink="folHlink"/>
   <p:sldLayoutIdLst>
-    <p:sldLayoutId xmlns:r="http://schemas.openxmlformats.org/officeDocument/2006/relationships" id="2147483649" r:id="Rebf98c5742074211"/>
+    <p:sldLayoutId xmlns:r="http://schemas.openxmlformats.org/officeDocument/2006/relationships" id="2147483649" r:id="R3c7dbd5bbff44069"/>
   </p:sldLayoutIdLst>
   <p:txStyles>
     <p:titleStyle>
@@ -2284,7 +2284,7 @@
         <p:spPr>
           <a:xfrm xmlns:a="http://schemas.openxmlformats.org/drawingml/2006/main">
             <a:off x="400050" y="4705350"/>
-            <a:ext cx="2743200" cy="304800"/>
+            <a:ext cx="1028700" cy="19050"/>
           </a:xfrm>
           <a:prstGeom xmlns:a="http://schemas.openxmlformats.org/drawingml/2006/main" prst="roundRect">
             <a:avLst>
@@ -2292,9 +2292,9 @@
             </a:avLst>
           </a:prstGeom>
           <a:solidFill xmlns:a="http://schemas.openxmlformats.org/drawingml/2006/main">
-            <a:srgbClr val="211B14"/>
+            <a:srgbClr val="E8793D"/>
           </a:solidFill>
-          <a:ln xmlns:a="http://schemas.openxmlformats.org/drawingml/2006/main" w="9525">
+          <a:ln xmlns:a="http://schemas.openxmlformats.org/drawingml/2006/main" w="0">
             <a:solidFill>
               <a:srgbClr val="E8793D"/>
             </a:solidFill>
@@ -2318,25 +2318,25 @@
         </p:nvSpPr>
         <p:spPr>
           <a:xfrm xmlns:a="http://schemas.openxmlformats.org/drawingml/2006/main">
-            <a:off x="495300" y="4762500"/>
-            <a:ext cx="2552700" cy="190500"/>
-          </a:xfrm>
-          <a:prstGeom xmlns:a="http://schemas.openxmlformats.org/drawingml/2006/main" prst="rect">
-            <a:avLst/>
-          </a:prstGeom>
-          <a:noFill xmlns:a="http://schemas.openxmlformats.org/drawingml/2006/main"/>
-          <a:ln xmlns:a="http://schemas.openxmlformats.org/drawingml/2006/main" w="0">
-            <a:noFill/>
-            <a:prstDash val="solid"/>
-          </a:ln>
-        </p:spPr>
-        <p:txBody>
-          <a:bodyPr xmlns:a="http://schemas.openxmlformats.org/drawingml/2006/main" anchor="t">
-            <a:normAutofit fontScale="78788"/>
-          </a:bodyPr>
-          <a:lstStyle xmlns:a="http://schemas.openxmlformats.org/drawingml/2006/main"/>
-          <a:p xmlns:a="http://schemas.openxmlformats.org/drawingml/2006/main">
-            <a:pPr algn="ctr">
+            <a:off x="400050" y="4838700"/>
+            <a:ext cx="3714750" cy="228600"/>
+          </a:xfrm>
+          <a:prstGeom xmlns:a="http://schemas.openxmlformats.org/drawingml/2006/main" prst="rect">
+            <a:avLst/>
+          </a:prstGeom>
+          <a:noFill xmlns:a="http://schemas.openxmlformats.org/drawingml/2006/main"/>
+          <a:ln xmlns:a="http://schemas.openxmlformats.org/drawingml/2006/main" w="0">
+            <a:noFill/>
+            <a:prstDash val="solid"/>
+          </a:ln>
+        </p:spPr>
+        <p:txBody>
+          <a:bodyPr xmlns:a="http://schemas.openxmlformats.org/drawingml/2006/main" anchor="t">
+            <a:normAutofit fontScale="100000"/>
+          </a:bodyPr>
+          <a:lstStyle xmlns:a="http://schemas.openxmlformats.org/drawingml/2006/main"/>
+          <a:p xmlns:a="http://schemas.openxmlformats.org/drawingml/2006/main">
+            <a:pPr algn="l">
               <a:buNone/>
               <a:defRPr sz="975" b="1">
                 <a:solidFill>
@@ -2444,9 +2444,7 @@
               <a:gd name="adj" fmla="val 2034"/>
             </a:avLst>
           </a:prstGeom>
-          <a:solidFill xmlns:a="http://schemas.openxmlformats.org/drawingml/2006/main">
-            <a:srgbClr val="14110D"/>
-          </a:solidFill>
+          <a:noFill xmlns:a="http://schemas.openxmlformats.org/drawingml/2006/main"/>
           <a:ln xmlns:a="http://schemas.openxmlformats.org/drawingml/2006/main" w="9525">
             <a:solidFill>
               <a:srgbClr val="6B5F50"/>
@@ -2464,7 +2462,7 @@
           <p:nvPr/>
         </p:nvPicPr>
         <p:blipFill>
-          <a:blip xmlns:r="http://schemas.openxmlformats.org/officeDocument/2006/relationships" xmlns:a="http://schemas.openxmlformats.org/drawingml/2006/main" r:embed="Re414f4f5e37f4a99"/>
+          <a:blip xmlns:r="http://schemas.openxmlformats.org/officeDocument/2006/relationships" xmlns:a="http://schemas.openxmlformats.org/drawingml/2006/main" r:embed="Raf2ed721ac014bee"/>
           <a:srcRect xmlns:a="http://schemas.openxmlformats.org/drawingml/2006/main" l="0" t="0" r="0" b="32694"/>
           <a:stretch xmlns:a="http://schemas.openxmlformats.org/drawingml/2006/main">
             <a:fillRect l="0" t="0" r="0" b="0"/>
@@ -2735,8 +2733,8 @@
         </p:nvSpPr>
         <p:spPr>
           <a:xfrm xmlns:a="http://schemas.openxmlformats.org/drawingml/2006/main">
-            <a:off x="400050" y="1619250"/>
-            <a:ext cx="5410200" cy="4171950"/>
+            <a:off x="5905500" y="1790700"/>
+            <a:ext cx="9525" cy="3600450"/>
           </a:xfrm>
           <a:prstGeom xmlns:a="http://schemas.openxmlformats.org/drawingml/2006/main" prst="roundRect">
             <a:avLst>
@@ -2744,11 +2742,11 @@
             </a:avLst>
           </a:prstGeom>
           <a:solidFill xmlns:a="http://schemas.openxmlformats.org/drawingml/2006/main">
-            <a:srgbClr val="20382A"/>
+            <a:srgbClr val="6B5F50"/>
           </a:solidFill>
-          <a:ln xmlns:a="http://schemas.openxmlformats.org/drawingml/2006/main" w="19050">
+          <a:ln xmlns:a="http://schemas.openxmlformats.org/drawingml/2006/main" w="0">
             <a:solidFill>
-              <a:srgbClr val="75B78E"/>
+              <a:srgbClr val="6B5F50"/>
             </a:solidFill>
             <a:prstDash val="solid"/>
           </a:ln>
@@ -2770,8 +2768,8 @@
         </p:nvSpPr>
         <p:spPr>
           <a:xfrm xmlns:a="http://schemas.openxmlformats.org/drawingml/2006/main">
-            <a:off x="6019800" y="1619250"/>
-            <a:ext cx="5772150" cy="4171950"/>
+            <a:off x="400050" y="5657850"/>
+            <a:ext cx="11391900" cy="9525"/>
           </a:xfrm>
           <a:prstGeom xmlns:a="http://schemas.openxmlformats.org/drawingml/2006/main" prst="roundRect">
             <a:avLst>
@@ -2779,11 +2777,11 @@
             </a:avLst>
           </a:prstGeom>
           <a:solidFill xmlns:a="http://schemas.openxmlformats.org/drawingml/2006/main">
-            <a:srgbClr val="2B1512"/>
+            <a:srgbClr val="6B5F50"/>
           </a:solidFill>
-          <a:ln xmlns:a="http://schemas.openxmlformats.org/drawingml/2006/main" w="19050">
+          <a:ln xmlns:a="http://schemas.openxmlformats.org/drawingml/2006/main" w="0">
             <a:solidFill>
-              <a:srgbClr val="E35E54"/>
+              <a:srgbClr val="6B5F50"/>
             </a:solidFill>
             <a:prstDash val="solid"/>
           </a:ln>
@@ -3012,9 +3010,9 @@
               </a:defRPr>
             </a:pPr>
             <a:r>
-              <a:rPr sz="1275" b="1">
-                <a:solidFill>
-                  <a:srgbClr val="F1E9DC"/>
+              <a:rPr sz="1275" b="0">
+                <a:solidFill>
+                  <a:srgbClr val="C8BDAE"/>
                 </a:solidFill>
                 <a:latin typeface="Arial"/>
                 <a:ea typeface="Arial"/>
@@ -3130,9 +3128,9 @@
               </a:defRPr>
             </a:pPr>
             <a:r>
-              <a:rPr sz="1275" b="1">
-                <a:solidFill>
-                  <a:srgbClr val="F1E9DC"/>
+              <a:rPr sz="1275" b="0">
+                <a:solidFill>
+                  <a:srgbClr val="C8BDAE"/>
                 </a:solidFill>
                 <a:latin typeface="Arial"/>
                 <a:ea typeface="Arial"/>
@@ -3248,9 +3246,9 @@
               </a:defRPr>
             </a:pPr>
             <a:r>
-              <a:rPr sz="1275" b="1">
-                <a:solidFill>
-                  <a:srgbClr val="F1E9DC"/>
+              <a:rPr sz="1275" b="0">
+                <a:solidFill>
+                  <a:srgbClr val="C8BDAE"/>
                 </a:solidFill>
                 <a:latin typeface="Arial"/>
                 <a:ea typeface="Arial"/>
@@ -3366,9 +3364,9 @@
               </a:defRPr>
             </a:pPr>
             <a:r>
-              <a:rPr sz="1275" b="1">
-                <a:solidFill>
-                  <a:srgbClr val="F1E9DC"/>
+              <a:rPr sz="1275" b="0">
+                <a:solidFill>
+                  <a:srgbClr val="C8BDAE"/>
                 </a:solidFill>
                 <a:latin typeface="Arial"/>
                 <a:ea typeface="Arial"/>
@@ -3484,9 +3482,9 @@
               </a:defRPr>
             </a:pPr>
             <a:r>
-              <a:rPr sz="1275" b="1">
-                <a:solidFill>
-                  <a:srgbClr val="F1E9DC"/>
+              <a:rPr sz="1275" b="0">
+                <a:solidFill>
+                  <a:srgbClr val="C8BDAE"/>
                 </a:solidFill>
                 <a:latin typeface="Arial"/>
                 <a:ea typeface="Arial"/>
@@ -3602,9 +3600,9 @@
               </a:defRPr>
             </a:pPr>
             <a:r>
-              <a:rPr sz="1275" b="1">
-                <a:solidFill>
-                  <a:srgbClr val="F1E9DC"/>
+              <a:rPr sz="1275" b="0">
+                <a:solidFill>
+                  <a:srgbClr val="C8BDAE"/>
                 </a:solidFill>
                 <a:latin typeface="Arial"/>
                 <a:ea typeface="Arial"/>
@@ -3720,9 +3718,9 @@
               </a:defRPr>
             </a:pPr>
             <a:r>
-              <a:rPr sz="1275" b="1">
-                <a:solidFill>
-                  <a:srgbClr val="F1E9DC"/>
+              <a:rPr sz="1275" b="0">
+                <a:solidFill>
+                  <a:srgbClr val="C8BDAE"/>
                 </a:solidFill>
                 <a:latin typeface="Arial"/>
                 <a:ea typeface="Arial"/>
@@ -3838,9 +3836,9 @@
               </a:defRPr>
             </a:pPr>
             <a:r>
-              <a:rPr sz="1275" b="1">
-                <a:solidFill>
-                  <a:srgbClr val="F1E9DC"/>
+              <a:rPr sz="1275" b="0">
+                <a:solidFill>
+                  <a:srgbClr val="C8BDAE"/>
                 </a:solidFill>
                 <a:latin typeface="Arial"/>
                 <a:ea typeface="Arial"/>
@@ -3956,9 +3954,9 @@
               </a:defRPr>
             </a:pPr>
             <a:r>
-              <a:rPr sz="1275" b="1">
-                <a:solidFill>
-                  <a:srgbClr val="F1E9DC"/>
+              <a:rPr sz="1275" b="0">
+                <a:solidFill>
+                  <a:srgbClr val="C8BDAE"/>
                 </a:solidFill>
                 <a:latin typeface="Arial"/>
                 <a:ea typeface="Arial"/>
@@ -4074,9 +4072,9 @@
               </a:defRPr>
             </a:pPr>
             <a:r>
-              <a:rPr sz="1275" b="1">
-                <a:solidFill>
-                  <a:srgbClr val="F1E9DC"/>
+              <a:rPr sz="1275" b="0">
+                <a:solidFill>
+                  <a:srgbClr val="C8BDAE"/>
                 </a:solidFill>
                 <a:latin typeface="Arial"/>
                 <a:ea typeface="Arial"/>
@@ -4402,7 +4400,7 @@
         <p:spPr>
           <a:xfrm xmlns:a="http://schemas.openxmlformats.org/drawingml/2006/main">
             <a:off x="400050" y="1752600"/>
-            <a:ext cx="2019300" cy="2076450"/>
+            <a:ext cx="2019300" cy="28575"/>
           </a:xfrm>
           <a:prstGeom xmlns:a="http://schemas.openxmlformats.org/drawingml/2006/main" prst="roundRect">
             <a:avLst>
@@ -4410,9 +4408,9 @@
             </a:avLst>
           </a:prstGeom>
           <a:solidFill xmlns:a="http://schemas.openxmlformats.org/drawingml/2006/main">
-            <a:srgbClr val="211B14"/>
+            <a:srgbClr val="E8793D"/>
           </a:solidFill>
-          <a:ln xmlns:a="http://schemas.openxmlformats.org/drawingml/2006/main" w="19050">
+          <a:ln xmlns:a="http://schemas.openxmlformats.org/drawingml/2006/main" w="0">
             <a:solidFill>
               <a:srgbClr val="E8793D"/>
             </a:solidFill>
@@ -4450,89 +4448,89 @@
         </p:spPr>
         <p:txBody>
           <a:bodyPr xmlns:a="http://schemas.openxmlformats.org/drawingml/2006/main" anchor="t">
+            <a:normAutofit fontScale="80702"/>
+          </a:bodyPr>
+          <a:lstStyle xmlns:a="http://schemas.openxmlformats.org/drawingml/2006/main"/>
+          <a:p xmlns:a="http://schemas.openxmlformats.org/drawingml/2006/main">
+            <a:pPr algn="l">
+              <a:buNone/>
+              <a:defRPr sz="1050" b="1">
+                <a:solidFill>
+                  <a:srgbClr val="E9652E"/>
+                </a:solidFill>
+                <a:latin typeface="Arial"/>
+                <a:ea typeface="Arial"/>
+                <a:cs typeface="Arial"/>
+              </a:defRPr>
+            </a:pPr>
+            <a:r>
+              <a:rPr sz="1425" b="0">
+                <a:solidFill>
+                  <a:srgbClr val="F19A68"/>
+                </a:solidFill>
+                <a:latin typeface="Georgia"/>
+                <a:ea typeface="Georgia"/>
+                <a:cs typeface="Georgia"/>
+              </a:rPr>
+              <a:t>1</a:t>
+            </a:r>
+          </a:p>
+        </p:txBody>
+      </p:sp>
+      <p:sp>
+        <p:nvSpPr>
+          <p:cNvPr id="7" name="">
+            <a:extLst xmlns:a="http://schemas.openxmlformats.org/drawingml/2006/main">
+              <a:ext uri="{FF2B5EF4-FFF2-40B4-BE49-F238E27FC236}">
+                <a16:creationId xmlns:a16="http://schemas.microsoft.com/office/drawing/2014/main" id="{D14764A2-81E2-419E-AF5E-563783C03BE4}"/>
+              </a:ext>
+            </a:extLst>
+          </p:cNvPr>
+          <p:cNvSpPr>
+            <a:spLocks xmlns:a="http://schemas.openxmlformats.org/drawingml/2006/main" noGrp="1"/>
+          </p:cNvSpPr>
+          <p:nvPr/>
+        </p:nvSpPr>
+        <p:spPr>
+          <a:xfrm xmlns:a="http://schemas.openxmlformats.org/drawingml/2006/main">
+            <a:off x="571500" y="2457450"/>
+            <a:ext cx="1676400" cy="457200"/>
+          </a:xfrm>
+          <a:prstGeom xmlns:a="http://schemas.openxmlformats.org/drawingml/2006/main" prst="rect">
+            <a:avLst/>
+          </a:prstGeom>
+          <a:noFill xmlns:a="http://schemas.openxmlformats.org/drawingml/2006/main"/>
+          <a:ln xmlns:a="http://schemas.openxmlformats.org/drawingml/2006/main" w="0">
+            <a:noFill/>
+            <a:prstDash val="solid"/>
+          </a:ln>
+        </p:spPr>
+        <p:txBody>
+          <a:bodyPr xmlns:a="http://schemas.openxmlformats.org/drawingml/2006/main" anchor="t">
             <a:normAutofit fontScale="100000"/>
           </a:bodyPr>
           <a:lstStyle xmlns:a="http://schemas.openxmlformats.org/drawingml/2006/main"/>
           <a:p xmlns:a="http://schemas.openxmlformats.org/drawingml/2006/main">
             <a:pPr algn="l">
               <a:buNone/>
-              <a:defRPr sz="1050" b="1">
-                <a:solidFill>
-                  <a:srgbClr val="E9652E"/>
-                </a:solidFill>
-                <a:latin typeface="Arial"/>
-                <a:ea typeface="Arial"/>
-                <a:cs typeface="Arial"/>
-              </a:defRPr>
-            </a:pPr>
-            <a:r>
-              <a:rPr sz="900" b="1">
-                <a:solidFill>
-                  <a:srgbClr val="F19A68"/>
+              <a:defRPr sz="1350" b="1">
+                <a:solidFill>
+                  <a:srgbClr val="171714"/>
+                </a:solidFill>
+                <a:latin typeface="Arial"/>
+                <a:ea typeface="Arial"/>
+                <a:cs typeface="Arial"/>
+              </a:defRPr>
+            </a:pPr>
+            <a:r>
+              <a:rPr sz="975" b="1">
+                <a:solidFill>
+                  <a:srgbClr val="F1E9DC"/>
                 </a:solidFill>
                 <a:latin typeface="Menlo"/>
                 <a:ea typeface="Menlo"/>
                 <a:cs typeface="Menlo"/>
               </a:rPr>
-              <a:t>1</a:t>
-            </a:r>
-          </a:p>
-        </p:txBody>
-      </p:sp>
-      <p:sp>
-        <p:nvSpPr>
-          <p:cNvPr id="7" name="">
-            <a:extLst xmlns:a="http://schemas.openxmlformats.org/drawingml/2006/main">
-              <a:ext uri="{FF2B5EF4-FFF2-40B4-BE49-F238E27FC236}">
-                <a16:creationId xmlns:a16="http://schemas.microsoft.com/office/drawing/2014/main" id="{D14764A2-81E2-419E-AF5E-563783C03BE4}"/>
-              </a:ext>
-            </a:extLst>
-          </p:cNvPr>
-          <p:cNvSpPr>
-            <a:spLocks xmlns:a="http://schemas.openxmlformats.org/drawingml/2006/main" noGrp="1"/>
-          </p:cNvSpPr>
-          <p:nvPr/>
-        </p:nvSpPr>
-        <p:spPr>
-          <a:xfrm xmlns:a="http://schemas.openxmlformats.org/drawingml/2006/main">
-            <a:off x="571500" y="2457450"/>
-            <a:ext cx="1676400" cy="457200"/>
-          </a:xfrm>
-          <a:prstGeom xmlns:a="http://schemas.openxmlformats.org/drawingml/2006/main" prst="rect">
-            <a:avLst/>
-          </a:prstGeom>
-          <a:noFill xmlns:a="http://schemas.openxmlformats.org/drawingml/2006/main"/>
-          <a:ln xmlns:a="http://schemas.openxmlformats.org/drawingml/2006/main" w="0">
-            <a:noFill/>
-            <a:prstDash val="solid"/>
-          </a:ln>
-        </p:spPr>
-        <p:txBody>
-          <a:bodyPr xmlns:a="http://schemas.openxmlformats.org/drawingml/2006/main" anchor="t">
-            <a:normAutofit fontScale="100000"/>
-          </a:bodyPr>
-          <a:lstStyle xmlns:a="http://schemas.openxmlformats.org/drawingml/2006/main"/>
-          <a:p xmlns:a="http://schemas.openxmlformats.org/drawingml/2006/main">
-            <a:pPr algn="l">
-              <a:buNone/>
-              <a:defRPr sz="1350" b="1">
-                <a:solidFill>
-                  <a:srgbClr val="171714"/>
-                </a:solidFill>
-                <a:latin typeface="Arial"/>
-                <a:ea typeface="Arial"/>
-                <a:cs typeface="Arial"/>
-              </a:defRPr>
-            </a:pPr>
-            <a:r>
-              <a:rPr sz="1125" b="1">
-                <a:solidFill>
-                  <a:srgbClr val="F1E9DC"/>
-                </a:solidFill>
-                <a:latin typeface="Menlo"/>
-                <a:ea typeface="Menlo"/>
-                <a:cs typeface="Menlo"/>
-              </a:rPr>
               <a:t>OFFLINE REPLAY</a:t>
             </a:r>
           </a:p>
@@ -4673,7 +4671,7 @@
         <p:spPr>
           <a:xfrm xmlns:a="http://schemas.openxmlformats.org/drawingml/2006/main">
             <a:off x="2667000" y="1752600"/>
-            <a:ext cx="2019300" cy="2076450"/>
+            <a:ext cx="2019300" cy="9525"/>
           </a:xfrm>
           <a:prstGeom xmlns:a="http://schemas.openxmlformats.org/drawingml/2006/main" prst="roundRect">
             <a:avLst>
@@ -4681,9 +4679,9 @@
             </a:avLst>
           </a:prstGeom>
           <a:solidFill xmlns:a="http://schemas.openxmlformats.org/drawingml/2006/main">
-            <a:srgbClr val="14110D"/>
+            <a:srgbClr val="6B5F50"/>
           </a:solidFill>
-          <a:ln xmlns:a="http://schemas.openxmlformats.org/drawingml/2006/main" w="9525">
+          <a:ln xmlns:a="http://schemas.openxmlformats.org/drawingml/2006/main" w="0">
             <a:solidFill>
               <a:srgbClr val="6B5F50"/>
             </a:solidFill>
@@ -4721,89 +4719,89 @@
         </p:spPr>
         <p:txBody>
           <a:bodyPr xmlns:a="http://schemas.openxmlformats.org/drawingml/2006/main" anchor="t">
+            <a:normAutofit fontScale="80702"/>
+          </a:bodyPr>
+          <a:lstStyle xmlns:a="http://schemas.openxmlformats.org/drawingml/2006/main"/>
+          <a:p xmlns:a="http://schemas.openxmlformats.org/drawingml/2006/main">
+            <a:pPr algn="l">
+              <a:buNone/>
+              <a:defRPr sz="1050" b="1">
+                <a:solidFill>
+                  <a:srgbClr val="E9652E"/>
+                </a:solidFill>
+                <a:latin typeface="Arial"/>
+                <a:ea typeface="Arial"/>
+                <a:cs typeface="Arial"/>
+              </a:defRPr>
+            </a:pPr>
+            <a:r>
+              <a:rPr sz="1425" b="0">
+                <a:solidFill>
+                  <a:srgbClr val="F19A68"/>
+                </a:solidFill>
+                <a:latin typeface="Georgia"/>
+                <a:ea typeface="Georgia"/>
+                <a:cs typeface="Georgia"/>
+              </a:rPr>
+              <a:t>2</a:t>
+            </a:r>
+          </a:p>
+        </p:txBody>
+      </p:sp>
+      <p:sp>
+        <p:nvSpPr>
+          <p:cNvPr id="12" name="">
+            <a:extLst xmlns:a="http://schemas.openxmlformats.org/drawingml/2006/main">
+              <a:ext uri="{FF2B5EF4-FFF2-40B4-BE49-F238E27FC236}">
+                <a16:creationId xmlns:a16="http://schemas.microsoft.com/office/drawing/2014/main" id="{52FC7E05-CBF7-41A4-8136-2D767885725A}"/>
+              </a:ext>
+            </a:extLst>
+          </p:cNvPr>
+          <p:cNvSpPr>
+            <a:spLocks xmlns:a="http://schemas.openxmlformats.org/drawingml/2006/main" noGrp="1"/>
+          </p:cNvSpPr>
+          <p:nvPr/>
+        </p:nvSpPr>
+        <p:spPr>
+          <a:xfrm xmlns:a="http://schemas.openxmlformats.org/drawingml/2006/main">
+            <a:off x="2838450" y="2457450"/>
+            <a:ext cx="1676400" cy="457200"/>
+          </a:xfrm>
+          <a:prstGeom xmlns:a="http://schemas.openxmlformats.org/drawingml/2006/main" prst="rect">
+            <a:avLst/>
+          </a:prstGeom>
+          <a:noFill xmlns:a="http://schemas.openxmlformats.org/drawingml/2006/main"/>
+          <a:ln xmlns:a="http://schemas.openxmlformats.org/drawingml/2006/main" w="0">
+            <a:noFill/>
+            <a:prstDash val="solid"/>
+          </a:ln>
+        </p:spPr>
+        <p:txBody>
+          <a:bodyPr xmlns:a="http://schemas.openxmlformats.org/drawingml/2006/main" anchor="t">
             <a:normAutofit fontScale="100000"/>
           </a:bodyPr>
           <a:lstStyle xmlns:a="http://schemas.openxmlformats.org/drawingml/2006/main"/>
           <a:p xmlns:a="http://schemas.openxmlformats.org/drawingml/2006/main">
             <a:pPr algn="l">
               <a:buNone/>
-              <a:defRPr sz="1050" b="1">
-                <a:solidFill>
-                  <a:srgbClr val="E9652E"/>
-                </a:solidFill>
-                <a:latin typeface="Arial"/>
-                <a:ea typeface="Arial"/>
-                <a:cs typeface="Arial"/>
-              </a:defRPr>
-            </a:pPr>
-            <a:r>
-              <a:rPr sz="900" b="1">
-                <a:solidFill>
-                  <a:srgbClr val="F19A68"/>
+              <a:defRPr sz="1350" b="1">
+                <a:solidFill>
+                  <a:srgbClr val="171714"/>
+                </a:solidFill>
+                <a:latin typeface="Arial"/>
+                <a:ea typeface="Arial"/>
+                <a:cs typeface="Arial"/>
+              </a:defRPr>
+            </a:pPr>
+            <a:r>
+              <a:rPr sz="975" b="1">
+                <a:solidFill>
+                  <a:srgbClr val="F1E9DC"/>
                 </a:solidFill>
                 <a:latin typeface="Menlo"/>
                 <a:ea typeface="Menlo"/>
                 <a:cs typeface="Menlo"/>
               </a:rPr>
-              <a:t>2</a:t>
-            </a:r>
-          </a:p>
-        </p:txBody>
-      </p:sp>
-      <p:sp>
-        <p:nvSpPr>
-          <p:cNvPr id="12" name="">
-            <a:extLst xmlns:a="http://schemas.openxmlformats.org/drawingml/2006/main">
-              <a:ext uri="{FF2B5EF4-FFF2-40B4-BE49-F238E27FC236}">
-                <a16:creationId xmlns:a16="http://schemas.microsoft.com/office/drawing/2014/main" id="{52FC7E05-CBF7-41A4-8136-2D767885725A}"/>
-              </a:ext>
-            </a:extLst>
-          </p:cNvPr>
-          <p:cNvSpPr>
-            <a:spLocks xmlns:a="http://schemas.openxmlformats.org/drawingml/2006/main" noGrp="1"/>
-          </p:cNvSpPr>
-          <p:nvPr/>
-        </p:nvSpPr>
-        <p:spPr>
-          <a:xfrm xmlns:a="http://schemas.openxmlformats.org/drawingml/2006/main">
-            <a:off x="2838450" y="2457450"/>
-            <a:ext cx="1676400" cy="457200"/>
-          </a:xfrm>
-          <a:prstGeom xmlns:a="http://schemas.openxmlformats.org/drawingml/2006/main" prst="rect">
-            <a:avLst/>
-          </a:prstGeom>
-          <a:noFill xmlns:a="http://schemas.openxmlformats.org/drawingml/2006/main"/>
-          <a:ln xmlns:a="http://schemas.openxmlformats.org/drawingml/2006/main" w="0">
-            <a:noFill/>
-            <a:prstDash val="solid"/>
-          </a:ln>
-        </p:spPr>
-        <p:txBody>
-          <a:bodyPr xmlns:a="http://schemas.openxmlformats.org/drawingml/2006/main" anchor="t">
-            <a:normAutofit fontScale="100000"/>
-          </a:bodyPr>
-          <a:lstStyle xmlns:a="http://schemas.openxmlformats.org/drawingml/2006/main"/>
-          <a:p xmlns:a="http://schemas.openxmlformats.org/drawingml/2006/main">
-            <a:pPr algn="l">
-              <a:buNone/>
-              <a:defRPr sz="1350" b="1">
-                <a:solidFill>
-                  <a:srgbClr val="171714"/>
-                </a:solidFill>
-                <a:latin typeface="Arial"/>
-                <a:ea typeface="Arial"/>
-                <a:cs typeface="Arial"/>
-              </a:defRPr>
-            </a:pPr>
-            <a:r>
-              <a:rPr sz="1125" b="1">
-                <a:solidFill>
-                  <a:srgbClr val="F1E9DC"/>
-                </a:solidFill>
-                <a:latin typeface="Menlo"/>
-                <a:ea typeface="Menlo"/>
-                <a:cs typeface="Menlo"/>
-              </a:rPr>
               <a:t>SHADOW MODE</a:t>
             </a:r>
           </a:p>
@@ -4944,7 +4942,7 @@
         <p:spPr>
           <a:xfrm xmlns:a="http://schemas.openxmlformats.org/drawingml/2006/main">
             <a:off x="4933950" y="1752600"/>
-            <a:ext cx="2019300" cy="2076450"/>
+            <a:ext cx="2019300" cy="9525"/>
           </a:xfrm>
           <a:prstGeom xmlns:a="http://schemas.openxmlformats.org/drawingml/2006/main" prst="roundRect">
             <a:avLst>
@@ -4952,9 +4950,9 @@
             </a:avLst>
           </a:prstGeom>
           <a:solidFill xmlns:a="http://schemas.openxmlformats.org/drawingml/2006/main">
-            <a:srgbClr val="14110D"/>
+            <a:srgbClr val="6B5F50"/>
           </a:solidFill>
-          <a:ln xmlns:a="http://schemas.openxmlformats.org/drawingml/2006/main" w="9525">
+          <a:ln xmlns:a="http://schemas.openxmlformats.org/drawingml/2006/main" w="0">
             <a:solidFill>
               <a:srgbClr val="6B5F50"/>
             </a:solidFill>
@@ -4992,89 +4990,89 @@
         </p:spPr>
         <p:txBody>
           <a:bodyPr xmlns:a="http://schemas.openxmlformats.org/drawingml/2006/main" anchor="t">
+            <a:normAutofit fontScale="80702"/>
+          </a:bodyPr>
+          <a:lstStyle xmlns:a="http://schemas.openxmlformats.org/drawingml/2006/main"/>
+          <a:p xmlns:a="http://schemas.openxmlformats.org/drawingml/2006/main">
+            <a:pPr algn="l">
+              <a:buNone/>
+              <a:defRPr sz="1050" b="1">
+                <a:solidFill>
+                  <a:srgbClr val="E9652E"/>
+                </a:solidFill>
+                <a:latin typeface="Arial"/>
+                <a:ea typeface="Arial"/>
+                <a:cs typeface="Arial"/>
+              </a:defRPr>
+            </a:pPr>
+            <a:r>
+              <a:rPr sz="1425" b="0">
+                <a:solidFill>
+                  <a:srgbClr val="F19A68"/>
+                </a:solidFill>
+                <a:latin typeface="Georgia"/>
+                <a:ea typeface="Georgia"/>
+                <a:cs typeface="Georgia"/>
+              </a:rPr>
+              <a:t>3</a:t>
+            </a:r>
+          </a:p>
+        </p:txBody>
+      </p:sp>
+      <p:sp>
+        <p:nvSpPr>
+          <p:cNvPr id="17" name="">
+            <a:extLst xmlns:a="http://schemas.openxmlformats.org/drawingml/2006/main">
+              <a:ext uri="{FF2B5EF4-FFF2-40B4-BE49-F238E27FC236}">
+                <a16:creationId xmlns:a16="http://schemas.microsoft.com/office/drawing/2014/main" id="{6D6B16CC-AE1A-44D4-823B-42243301207C}"/>
+              </a:ext>
+            </a:extLst>
+          </p:cNvPr>
+          <p:cNvSpPr>
+            <a:spLocks xmlns:a="http://schemas.openxmlformats.org/drawingml/2006/main" noGrp="1"/>
+          </p:cNvSpPr>
+          <p:nvPr/>
+        </p:nvSpPr>
+        <p:spPr>
+          <a:xfrm xmlns:a="http://schemas.openxmlformats.org/drawingml/2006/main">
+            <a:off x="5105400" y="2457450"/>
+            <a:ext cx="1676400" cy="457200"/>
+          </a:xfrm>
+          <a:prstGeom xmlns:a="http://schemas.openxmlformats.org/drawingml/2006/main" prst="rect">
+            <a:avLst/>
+          </a:prstGeom>
+          <a:noFill xmlns:a="http://schemas.openxmlformats.org/drawingml/2006/main"/>
+          <a:ln xmlns:a="http://schemas.openxmlformats.org/drawingml/2006/main" w="0">
+            <a:noFill/>
+            <a:prstDash val="solid"/>
+          </a:ln>
+        </p:spPr>
+        <p:txBody>
+          <a:bodyPr xmlns:a="http://schemas.openxmlformats.org/drawingml/2006/main" anchor="t">
             <a:normAutofit fontScale="100000"/>
           </a:bodyPr>
           <a:lstStyle xmlns:a="http://schemas.openxmlformats.org/drawingml/2006/main"/>
           <a:p xmlns:a="http://schemas.openxmlformats.org/drawingml/2006/main">
             <a:pPr algn="l">
               <a:buNone/>
-              <a:defRPr sz="1050" b="1">
-                <a:solidFill>
-                  <a:srgbClr val="E9652E"/>
-                </a:solidFill>
-                <a:latin typeface="Arial"/>
-                <a:ea typeface="Arial"/>
-                <a:cs typeface="Arial"/>
-              </a:defRPr>
-            </a:pPr>
-            <a:r>
-              <a:rPr sz="900" b="1">
-                <a:solidFill>
-                  <a:srgbClr val="F19A68"/>
+              <a:defRPr sz="1350" b="1">
+                <a:solidFill>
+                  <a:srgbClr val="171714"/>
+                </a:solidFill>
+                <a:latin typeface="Arial"/>
+                <a:ea typeface="Arial"/>
+                <a:cs typeface="Arial"/>
+              </a:defRPr>
+            </a:pPr>
+            <a:r>
+              <a:rPr sz="975" b="1">
+                <a:solidFill>
+                  <a:srgbClr val="F1E9DC"/>
                 </a:solidFill>
                 <a:latin typeface="Menlo"/>
                 <a:ea typeface="Menlo"/>
                 <a:cs typeface="Menlo"/>
               </a:rPr>
-              <a:t>3</a:t>
-            </a:r>
-          </a:p>
-        </p:txBody>
-      </p:sp>
-      <p:sp>
-        <p:nvSpPr>
-          <p:cNvPr id="17" name="">
-            <a:extLst xmlns:a="http://schemas.openxmlformats.org/drawingml/2006/main">
-              <a:ext uri="{FF2B5EF4-FFF2-40B4-BE49-F238E27FC236}">
-                <a16:creationId xmlns:a16="http://schemas.microsoft.com/office/drawing/2014/main" id="{6D6B16CC-AE1A-44D4-823B-42243301207C}"/>
-              </a:ext>
-            </a:extLst>
-          </p:cNvPr>
-          <p:cNvSpPr>
-            <a:spLocks xmlns:a="http://schemas.openxmlformats.org/drawingml/2006/main" noGrp="1"/>
-          </p:cNvSpPr>
-          <p:nvPr/>
-        </p:nvSpPr>
-        <p:spPr>
-          <a:xfrm xmlns:a="http://schemas.openxmlformats.org/drawingml/2006/main">
-            <a:off x="5105400" y="2457450"/>
-            <a:ext cx="1676400" cy="457200"/>
-          </a:xfrm>
-          <a:prstGeom xmlns:a="http://schemas.openxmlformats.org/drawingml/2006/main" prst="rect">
-            <a:avLst/>
-          </a:prstGeom>
-          <a:noFill xmlns:a="http://schemas.openxmlformats.org/drawingml/2006/main"/>
-          <a:ln xmlns:a="http://schemas.openxmlformats.org/drawingml/2006/main" w="0">
-            <a:noFill/>
-            <a:prstDash val="solid"/>
-          </a:ln>
-        </p:spPr>
-        <p:txBody>
-          <a:bodyPr xmlns:a="http://schemas.openxmlformats.org/drawingml/2006/main" anchor="t">
-            <a:normAutofit fontScale="100000"/>
-          </a:bodyPr>
-          <a:lstStyle xmlns:a="http://schemas.openxmlformats.org/drawingml/2006/main"/>
-          <a:p xmlns:a="http://schemas.openxmlformats.org/drawingml/2006/main">
-            <a:pPr algn="l">
-              <a:buNone/>
-              <a:defRPr sz="1350" b="1">
-                <a:solidFill>
-                  <a:srgbClr val="171714"/>
-                </a:solidFill>
-                <a:latin typeface="Arial"/>
-                <a:ea typeface="Arial"/>
-                <a:cs typeface="Arial"/>
-              </a:defRPr>
-            </a:pPr>
-            <a:r>
-              <a:rPr sz="1125" b="1">
-                <a:solidFill>
-                  <a:srgbClr val="F1E9DC"/>
-                </a:solidFill>
-                <a:latin typeface="Menlo"/>
-                <a:ea typeface="Menlo"/>
-                <a:cs typeface="Menlo"/>
-              </a:rPr>
               <a:t>ASSISTED OPS</a:t>
             </a:r>
           </a:p>
@@ -5215,7 +5213,7 @@
         <p:spPr>
           <a:xfrm xmlns:a="http://schemas.openxmlformats.org/drawingml/2006/main">
             <a:off x="7200900" y="1752600"/>
-            <a:ext cx="2019300" cy="2076450"/>
+            <a:ext cx="2019300" cy="9525"/>
           </a:xfrm>
           <a:prstGeom xmlns:a="http://schemas.openxmlformats.org/drawingml/2006/main" prst="roundRect">
             <a:avLst>
@@ -5223,9 +5221,9 @@
             </a:avLst>
           </a:prstGeom>
           <a:solidFill xmlns:a="http://schemas.openxmlformats.org/drawingml/2006/main">
-            <a:srgbClr val="14110D"/>
+            <a:srgbClr val="6B5F50"/>
           </a:solidFill>
-          <a:ln xmlns:a="http://schemas.openxmlformats.org/drawingml/2006/main" w="9525">
+          <a:ln xmlns:a="http://schemas.openxmlformats.org/drawingml/2006/main" w="0">
             <a:solidFill>
               <a:srgbClr val="6B5F50"/>
             </a:solidFill>
@@ -5263,89 +5261,89 @@
         </p:spPr>
         <p:txBody>
           <a:bodyPr xmlns:a="http://schemas.openxmlformats.org/drawingml/2006/main" anchor="t">
+            <a:normAutofit fontScale="80702"/>
+          </a:bodyPr>
+          <a:lstStyle xmlns:a="http://schemas.openxmlformats.org/drawingml/2006/main"/>
+          <a:p xmlns:a="http://schemas.openxmlformats.org/drawingml/2006/main">
+            <a:pPr algn="l">
+              <a:buNone/>
+              <a:defRPr sz="1050" b="1">
+                <a:solidFill>
+                  <a:srgbClr val="E9652E"/>
+                </a:solidFill>
+                <a:latin typeface="Arial"/>
+                <a:ea typeface="Arial"/>
+                <a:cs typeface="Arial"/>
+              </a:defRPr>
+            </a:pPr>
+            <a:r>
+              <a:rPr sz="1425" b="0">
+                <a:solidFill>
+                  <a:srgbClr val="F19A68"/>
+                </a:solidFill>
+                <a:latin typeface="Georgia"/>
+                <a:ea typeface="Georgia"/>
+                <a:cs typeface="Georgia"/>
+              </a:rPr>
+              <a:t>4</a:t>
+            </a:r>
+          </a:p>
+        </p:txBody>
+      </p:sp>
+      <p:sp>
+        <p:nvSpPr>
+          <p:cNvPr id="22" name="">
+            <a:extLst xmlns:a="http://schemas.openxmlformats.org/drawingml/2006/main">
+              <a:ext uri="{FF2B5EF4-FFF2-40B4-BE49-F238E27FC236}">
+                <a16:creationId xmlns:a16="http://schemas.microsoft.com/office/drawing/2014/main" id="{EF37F518-2174-44F7-8B7A-191E83682030}"/>
+              </a:ext>
+            </a:extLst>
+          </p:cNvPr>
+          <p:cNvSpPr>
+            <a:spLocks xmlns:a="http://schemas.openxmlformats.org/drawingml/2006/main" noGrp="1"/>
+          </p:cNvSpPr>
+          <p:nvPr/>
+        </p:nvSpPr>
+        <p:spPr>
+          <a:xfrm xmlns:a="http://schemas.openxmlformats.org/drawingml/2006/main">
+            <a:off x="7372350" y="2457450"/>
+            <a:ext cx="1676400" cy="457200"/>
+          </a:xfrm>
+          <a:prstGeom xmlns:a="http://schemas.openxmlformats.org/drawingml/2006/main" prst="rect">
+            <a:avLst/>
+          </a:prstGeom>
+          <a:noFill xmlns:a="http://schemas.openxmlformats.org/drawingml/2006/main"/>
+          <a:ln xmlns:a="http://schemas.openxmlformats.org/drawingml/2006/main" w="0">
+            <a:noFill/>
+            <a:prstDash val="solid"/>
+          </a:ln>
+        </p:spPr>
+        <p:txBody>
+          <a:bodyPr xmlns:a="http://schemas.openxmlformats.org/drawingml/2006/main" anchor="t">
             <a:normAutofit fontScale="100000"/>
           </a:bodyPr>
           <a:lstStyle xmlns:a="http://schemas.openxmlformats.org/drawingml/2006/main"/>
           <a:p xmlns:a="http://schemas.openxmlformats.org/drawingml/2006/main">
             <a:pPr algn="l">
               <a:buNone/>
-              <a:defRPr sz="1050" b="1">
-                <a:solidFill>
-                  <a:srgbClr val="E9652E"/>
-                </a:solidFill>
-                <a:latin typeface="Arial"/>
-                <a:ea typeface="Arial"/>
-                <a:cs typeface="Arial"/>
-              </a:defRPr>
-            </a:pPr>
-            <a:r>
-              <a:rPr sz="900" b="1">
-                <a:solidFill>
-                  <a:srgbClr val="F19A68"/>
+              <a:defRPr sz="1350" b="1">
+                <a:solidFill>
+                  <a:srgbClr val="171714"/>
+                </a:solidFill>
+                <a:latin typeface="Arial"/>
+                <a:ea typeface="Arial"/>
+                <a:cs typeface="Arial"/>
+              </a:defRPr>
+            </a:pPr>
+            <a:r>
+              <a:rPr sz="975" b="1">
+                <a:solidFill>
+                  <a:srgbClr val="F1E9DC"/>
                 </a:solidFill>
                 <a:latin typeface="Menlo"/>
                 <a:ea typeface="Menlo"/>
                 <a:cs typeface="Menlo"/>
               </a:rPr>
-              <a:t>4</a:t>
-            </a:r>
-          </a:p>
-        </p:txBody>
-      </p:sp>
-      <p:sp>
-        <p:nvSpPr>
-          <p:cNvPr id="22" name="">
-            <a:extLst xmlns:a="http://schemas.openxmlformats.org/drawingml/2006/main">
-              <a:ext uri="{FF2B5EF4-FFF2-40B4-BE49-F238E27FC236}">
-                <a16:creationId xmlns:a16="http://schemas.microsoft.com/office/drawing/2014/main" id="{EF37F518-2174-44F7-8B7A-191E83682030}"/>
-              </a:ext>
-            </a:extLst>
-          </p:cNvPr>
-          <p:cNvSpPr>
-            <a:spLocks xmlns:a="http://schemas.openxmlformats.org/drawingml/2006/main" noGrp="1"/>
-          </p:cNvSpPr>
-          <p:nvPr/>
-        </p:nvSpPr>
-        <p:spPr>
-          <a:xfrm xmlns:a="http://schemas.openxmlformats.org/drawingml/2006/main">
-            <a:off x="7372350" y="2457450"/>
-            <a:ext cx="1676400" cy="457200"/>
-          </a:xfrm>
-          <a:prstGeom xmlns:a="http://schemas.openxmlformats.org/drawingml/2006/main" prst="rect">
-            <a:avLst/>
-          </a:prstGeom>
-          <a:noFill xmlns:a="http://schemas.openxmlformats.org/drawingml/2006/main"/>
-          <a:ln xmlns:a="http://schemas.openxmlformats.org/drawingml/2006/main" w="0">
-            <a:noFill/>
-            <a:prstDash val="solid"/>
-          </a:ln>
-        </p:spPr>
-        <p:txBody>
-          <a:bodyPr xmlns:a="http://schemas.openxmlformats.org/drawingml/2006/main" anchor="t">
-            <a:normAutofit fontScale="100000"/>
-          </a:bodyPr>
-          <a:lstStyle xmlns:a="http://schemas.openxmlformats.org/drawingml/2006/main"/>
-          <a:p xmlns:a="http://schemas.openxmlformats.org/drawingml/2006/main">
-            <a:pPr algn="l">
-              <a:buNone/>
-              <a:defRPr sz="1350" b="1">
-                <a:solidFill>
-                  <a:srgbClr val="171714"/>
-                </a:solidFill>
-                <a:latin typeface="Arial"/>
-                <a:ea typeface="Arial"/>
-                <a:cs typeface="Arial"/>
-              </a:defRPr>
-            </a:pPr>
-            <a:r>
-              <a:rPr sz="1125" b="1">
-                <a:solidFill>
-                  <a:srgbClr val="F1E9DC"/>
-                </a:solidFill>
-                <a:latin typeface="Menlo"/>
-                <a:ea typeface="Menlo"/>
-                <a:cs typeface="Menlo"/>
-              </a:rPr>
               <a:t>CHALLENGER</a:t>
             </a:r>
           </a:p>
@@ -5486,7 +5484,7 @@
         <p:spPr>
           <a:xfrm xmlns:a="http://schemas.openxmlformats.org/drawingml/2006/main">
             <a:off x="9467850" y="1752600"/>
-            <a:ext cx="2019300" cy="2076450"/>
+            <a:ext cx="2019300" cy="9525"/>
           </a:xfrm>
           <a:prstGeom xmlns:a="http://schemas.openxmlformats.org/drawingml/2006/main" prst="roundRect">
             <a:avLst>
@@ -5494,9 +5492,9 @@
             </a:avLst>
           </a:prstGeom>
           <a:solidFill xmlns:a="http://schemas.openxmlformats.org/drawingml/2006/main">
-            <a:srgbClr val="14110D"/>
+            <a:srgbClr val="6B5F50"/>
           </a:solidFill>
-          <a:ln xmlns:a="http://schemas.openxmlformats.org/drawingml/2006/main" w="9525">
+          <a:ln xmlns:a="http://schemas.openxmlformats.org/drawingml/2006/main" w="0">
             <a:solidFill>
               <a:srgbClr val="6B5F50"/>
             </a:solidFill>
@@ -5534,89 +5532,89 @@
         </p:spPr>
         <p:txBody>
           <a:bodyPr xmlns:a="http://schemas.openxmlformats.org/drawingml/2006/main" anchor="t">
+            <a:normAutofit fontScale="80702"/>
+          </a:bodyPr>
+          <a:lstStyle xmlns:a="http://schemas.openxmlformats.org/drawingml/2006/main"/>
+          <a:p xmlns:a="http://schemas.openxmlformats.org/drawingml/2006/main">
+            <a:pPr algn="l">
+              <a:buNone/>
+              <a:defRPr sz="1050" b="1">
+                <a:solidFill>
+                  <a:srgbClr val="E9652E"/>
+                </a:solidFill>
+                <a:latin typeface="Arial"/>
+                <a:ea typeface="Arial"/>
+                <a:cs typeface="Arial"/>
+              </a:defRPr>
+            </a:pPr>
+            <a:r>
+              <a:rPr sz="1425" b="0">
+                <a:solidFill>
+                  <a:srgbClr val="F19A68"/>
+                </a:solidFill>
+                <a:latin typeface="Georgia"/>
+                <a:ea typeface="Georgia"/>
+                <a:cs typeface="Georgia"/>
+              </a:rPr>
+              <a:t>5</a:t>
+            </a:r>
+          </a:p>
+        </p:txBody>
+      </p:sp>
+      <p:sp>
+        <p:nvSpPr>
+          <p:cNvPr id="27" name="">
+            <a:extLst xmlns:a="http://schemas.openxmlformats.org/drawingml/2006/main">
+              <a:ext uri="{FF2B5EF4-FFF2-40B4-BE49-F238E27FC236}">
+                <a16:creationId xmlns:a16="http://schemas.microsoft.com/office/drawing/2014/main" id="{7EFFC31E-2057-4A71-B953-BE2A90DC0B14}"/>
+              </a:ext>
+            </a:extLst>
+          </p:cNvPr>
+          <p:cNvSpPr>
+            <a:spLocks xmlns:a="http://schemas.openxmlformats.org/drawingml/2006/main" noGrp="1"/>
+          </p:cNvSpPr>
+          <p:nvPr/>
+        </p:nvSpPr>
+        <p:spPr>
+          <a:xfrm xmlns:a="http://schemas.openxmlformats.org/drawingml/2006/main">
+            <a:off x="9639300" y="2457450"/>
+            <a:ext cx="1676400" cy="457200"/>
+          </a:xfrm>
+          <a:prstGeom xmlns:a="http://schemas.openxmlformats.org/drawingml/2006/main" prst="rect">
+            <a:avLst/>
+          </a:prstGeom>
+          <a:noFill xmlns:a="http://schemas.openxmlformats.org/drawingml/2006/main"/>
+          <a:ln xmlns:a="http://schemas.openxmlformats.org/drawingml/2006/main" w="0">
+            <a:noFill/>
+            <a:prstDash val="solid"/>
+          </a:ln>
+        </p:spPr>
+        <p:txBody>
+          <a:bodyPr xmlns:a="http://schemas.openxmlformats.org/drawingml/2006/main" anchor="t">
             <a:normAutofit fontScale="100000"/>
           </a:bodyPr>
           <a:lstStyle xmlns:a="http://schemas.openxmlformats.org/drawingml/2006/main"/>
           <a:p xmlns:a="http://schemas.openxmlformats.org/drawingml/2006/main">
             <a:pPr algn="l">
               <a:buNone/>
-              <a:defRPr sz="1050" b="1">
-                <a:solidFill>
-                  <a:srgbClr val="E9652E"/>
-                </a:solidFill>
-                <a:latin typeface="Arial"/>
-                <a:ea typeface="Arial"/>
-                <a:cs typeface="Arial"/>
-              </a:defRPr>
-            </a:pPr>
-            <a:r>
-              <a:rPr sz="900" b="1">
-                <a:solidFill>
-                  <a:srgbClr val="F19A68"/>
+              <a:defRPr sz="1350" b="1">
+                <a:solidFill>
+                  <a:srgbClr val="171714"/>
+                </a:solidFill>
+                <a:latin typeface="Arial"/>
+                <a:ea typeface="Arial"/>
+                <a:cs typeface="Arial"/>
+              </a:defRPr>
+            </a:pPr>
+            <a:r>
+              <a:rPr sz="975" b="1">
+                <a:solidFill>
+                  <a:srgbClr val="F1E9DC"/>
                 </a:solidFill>
                 <a:latin typeface="Menlo"/>
                 <a:ea typeface="Menlo"/>
                 <a:cs typeface="Menlo"/>
               </a:rPr>
-              <a:t>5</a:t>
-            </a:r>
-          </a:p>
-        </p:txBody>
-      </p:sp>
-      <p:sp>
-        <p:nvSpPr>
-          <p:cNvPr id="27" name="">
-            <a:extLst xmlns:a="http://schemas.openxmlformats.org/drawingml/2006/main">
-              <a:ext uri="{FF2B5EF4-FFF2-40B4-BE49-F238E27FC236}">
-                <a16:creationId xmlns:a16="http://schemas.microsoft.com/office/drawing/2014/main" id="{7EFFC31E-2057-4A71-B953-BE2A90DC0B14}"/>
-              </a:ext>
-            </a:extLst>
-          </p:cNvPr>
-          <p:cNvSpPr>
-            <a:spLocks xmlns:a="http://schemas.openxmlformats.org/drawingml/2006/main" noGrp="1"/>
-          </p:cNvSpPr>
-          <p:nvPr/>
-        </p:nvSpPr>
-        <p:spPr>
-          <a:xfrm xmlns:a="http://schemas.openxmlformats.org/drawingml/2006/main">
-            <a:off x="9639300" y="2457450"/>
-            <a:ext cx="1676400" cy="457200"/>
-          </a:xfrm>
-          <a:prstGeom xmlns:a="http://schemas.openxmlformats.org/drawingml/2006/main" prst="rect">
-            <a:avLst/>
-          </a:prstGeom>
-          <a:noFill xmlns:a="http://schemas.openxmlformats.org/drawingml/2006/main"/>
-          <a:ln xmlns:a="http://schemas.openxmlformats.org/drawingml/2006/main" w="0">
-            <a:noFill/>
-            <a:prstDash val="solid"/>
-          </a:ln>
-        </p:spPr>
-        <p:txBody>
-          <a:bodyPr xmlns:a="http://schemas.openxmlformats.org/drawingml/2006/main" anchor="t">
-            <a:normAutofit fontScale="100000"/>
-          </a:bodyPr>
-          <a:lstStyle xmlns:a="http://schemas.openxmlformats.org/drawingml/2006/main"/>
-          <a:p xmlns:a="http://schemas.openxmlformats.org/drawingml/2006/main">
-            <a:pPr algn="l">
-              <a:buNone/>
-              <a:defRPr sz="1350" b="1">
-                <a:solidFill>
-                  <a:srgbClr val="171714"/>
-                </a:solidFill>
-                <a:latin typeface="Arial"/>
-                <a:ea typeface="Arial"/>
-                <a:cs typeface="Arial"/>
-              </a:defRPr>
-            </a:pPr>
-            <a:r>
-              <a:rPr sz="1125" b="1">
-                <a:solidFill>
-                  <a:srgbClr val="F1E9DC"/>
-                </a:solidFill>
-                <a:latin typeface="Menlo"/>
-                <a:ea typeface="Menlo"/>
-                <a:cs typeface="Menlo"/>
-              </a:rPr>
               <a:t>GOVERNED SCALE</a:t>
             </a:r>
           </a:p>
@@ -5698,7 +5696,7 @@
         <p:spPr>
           <a:xfrm xmlns:a="http://schemas.openxmlformats.org/drawingml/2006/main">
             <a:off x="400050" y="4381500"/>
-            <a:ext cx="11391900" cy="1371600"/>
+            <a:ext cx="11391900" cy="19050"/>
           </a:xfrm>
           <a:prstGeom xmlns:a="http://schemas.openxmlformats.org/drawingml/2006/main" prst="roundRect">
             <a:avLst>
@@ -5706,9 +5704,9 @@
             </a:avLst>
           </a:prstGeom>
           <a:solidFill xmlns:a="http://schemas.openxmlformats.org/drawingml/2006/main">
-            <a:srgbClr val="19150F"/>
+            <a:srgbClr val="6B5F50"/>
           </a:solidFill>
-          <a:ln xmlns:a="http://schemas.openxmlformats.org/drawingml/2006/main" w="9525">
+          <a:ln xmlns:a="http://schemas.openxmlformats.org/drawingml/2006/main" w="0">
             <a:solidFill>
               <a:srgbClr val="6B5F50"/>
             </a:solidFill>
@@ -5882,12 +5880,10 @@
               <a:gd name="adj" fmla="val 50000"/>
             </a:avLst>
           </a:prstGeom>
-          <a:solidFill xmlns:a="http://schemas.openxmlformats.org/drawingml/2006/main">
-            <a:srgbClr val="20382A"/>
-          </a:solidFill>
-          <a:ln xmlns:a="http://schemas.openxmlformats.org/drawingml/2006/main" w="9525">
+          <a:noFill xmlns:a="http://schemas.openxmlformats.org/drawingml/2006/main"/>
+          <a:ln xmlns:a="http://schemas.openxmlformats.org/drawingml/2006/main" w="0">
             <a:solidFill>
-              <a:srgbClr val="75B78E"/>
+              <a:srgbClr val="0A0907"/>
             </a:solidFill>
             <a:prstDash val="solid"/>
           </a:ln>
@@ -6174,21 +6170,21 @@
         </p:nvSpPr>
         <p:spPr>
           <a:xfrm xmlns:a="http://schemas.openxmlformats.org/drawingml/2006/main">
-            <a:off x="11277600" y="342900"/>
-            <a:ext cx="514350" cy="209550"/>
-          </a:xfrm>
-          <a:prstGeom xmlns:a="http://schemas.openxmlformats.org/drawingml/2006/main" prst="rect">
-            <a:avLst/>
-          </a:prstGeom>
-          <a:noFill xmlns:a="http://schemas.openxmlformats.org/drawingml/2006/main"/>
-          <a:ln xmlns:a="http://schemas.openxmlformats.org/drawingml/2006/main" w="0">
-            <a:noFill/>
-            <a:prstDash val="solid"/>
-          </a:ln>
-        </p:spPr>
-        <p:txBody>
-          <a:bodyPr xmlns:a="http://schemas.openxmlformats.org/drawingml/2006/main" anchor="t">
-            <a:normAutofit fontScale="79487"/>
+            <a:off x="11277600" y="1752600"/>
+            <a:ext cx="514350" cy="285750"/>
+          </a:xfrm>
+          <a:prstGeom xmlns:a="http://schemas.openxmlformats.org/drawingml/2006/main" prst="rect">
+            <a:avLst/>
+          </a:prstGeom>
+          <a:noFill xmlns:a="http://schemas.openxmlformats.org/drawingml/2006/main"/>
+          <a:ln xmlns:a="http://schemas.openxmlformats.org/drawingml/2006/main" w="0">
+            <a:noFill/>
+            <a:prstDash val="solid"/>
+          </a:ln>
+        </p:spPr>
+        <p:txBody>
+          <a:bodyPr xmlns:a="http://schemas.openxmlformats.org/drawingml/2006/main" anchor="t">
+            <a:normAutofit fontScale="85000"/>
           </a:bodyPr>
           <a:lstStyle xmlns:a="http://schemas.openxmlformats.org/drawingml/2006/main"/>
           <a:p xmlns:a="http://schemas.openxmlformats.org/drawingml/2006/main">
@@ -6204,13 +6200,13 @@
               </a:defRPr>
             </a:pPr>
             <a:r>
-              <a:rPr sz="975" b="1">
+              <a:rPr sz="1500" b="0">
                 <a:solidFill>
                   <a:srgbClr val="F19A68"/>
                 </a:solidFill>
-                <a:latin typeface="Menlo"/>
-                <a:ea typeface="Menlo"/>
-                <a:cs typeface="Menlo"/>
+                <a:latin typeface="Georgia"/>
+                <a:ea typeface="Georgia"/>
+                <a:cs typeface="Georgia"/>
               </a:rPr>
               <a:t>02</a:t>
             </a:r>
@@ -6266,8 +6262,8 @@
         </p:nvSpPr>
         <p:spPr>
           <a:xfrm xmlns:a="http://schemas.openxmlformats.org/drawingml/2006/main">
-            <a:off x="400050" y="1733550"/>
-            <a:ext cx="2476500" cy="2000250"/>
+            <a:off x="400050" y="1752600"/>
+            <a:ext cx="19050" cy="1962150"/>
           </a:xfrm>
           <a:prstGeom xmlns:a="http://schemas.openxmlformats.org/drawingml/2006/main" prst="roundRect">
             <a:avLst>
@@ -6275,11 +6271,11 @@
             </a:avLst>
           </a:prstGeom>
           <a:solidFill xmlns:a="http://schemas.openxmlformats.org/drawingml/2006/main">
-            <a:srgbClr val="14110D"/>
+            <a:srgbClr val="3F382E"/>
           </a:solidFill>
-          <a:ln xmlns:a="http://schemas.openxmlformats.org/drawingml/2006/main" w="9525">
+          <a:ln xmlns:a="http://schemas.openxmlformats.org/drawingml/2006/main" w="0">
             <a:solidFill>
-              <a:srgbClr val="6B5F50"/>
+              <a:srgbClr val="3F382E"/>
             </a:solidFill>
             <a:prstDash val="solid"/>
           </a:ln>
@@ -6301,8 +6297,67 @@
         </p:nvSpPr>
         <p:spPr>
           <a:xfrm xmlns:a="http://schemas.openxmlformats.org/drawingml/2006/main">
-            <a:off x="590550" y="1924050"/>
-            <a:ext cx="400050" cy="266700"/>
+            <a:off x="590550" y="1752600"/>
+            <a:ext cx="400050" cy="285750"/>
+          </a:xfrm>
+          <a:prstGeom xmlns:a="http://schemas.openxmlformats.org/drawingml/2006/main" prst="rect">
+            <a:avLst/>
+          </a:prstGeom>
+          <a:noFill xmlns:a="http://schemas.openxmlformats.org/drawingml/2006/main"/>
+          <a:ln xmlns:a="http://schemas.openxmlformats.org/drawingml/2006/main" w="0">
+            <a:noFill/>
+            <a:prstDash val="solid"/>
+          </a:ln>
+        </p:spPr>
+        <p:txBody>
+          <a:bodyPr xmlns:a="http://schemas.openxmlformats.org/drawingml/2006/main" anchor="t">
+            <a:normAutofit fontScale="85000"/>
+          </a:bodyPr>
+          <a:lstStyle xmlns:a="http://schemas.openxmlformats.org/drawingml/2006/main"/>
+          <a:p xmlns:a="http://schemas.openxmlformats.org/drawingml/2006/main">
+            <a:pPr algn="l">
+              <a:buNone/>
+              <a:defRPr sz="1125" b="1">
+                <a:solidFill>
+                  <a:srgbClr val="E9652E"/>
+                </a:solidFill>
+                <a:latin typeface="Arial"/>
+                <a:ea typeface="Arial"/>
+                <a:cs typeface="Arial"/>
+              </a:defRPr>
+            </a:pPr>
+            <a:r>
+              <a:rPr sz="1500" b="0">
+                <a:solidFill>
+                  <a:srgbClr val="F19A68"/>
+                </a:solidFill>
+                <a:latin typeface="Georgia"/>
+                <a:ea typeface="Georgia"/>
+                <a:cs typeface="Georgia"/>
+              </a:rPr>
+              <a:t>01</a:t>
+            </a:r>
+          </a:p>
+        </p:txBody>
+      </p:sp>
+      <p:sp>
+        <p:nvSpPr>
+          <p:cNvPr id="7" name="">
+            <a:extLst xmlns:a="http://schemas.openxmlformats.org/drawingml/2006/main">
+              <a:ext uri="{FF2B5EF4-FFF2-40B4-BE49-F238E27FC236}">
+                <a16:creationId xmlns:a16="http://schemas.microsoft.com/office/drawing/2014/main" id="{3E8E157B-2462-4EEE-8F24-EAE16D21583E}"/>
+              </a:ext>
+            </a:extLst>
+          </p:cNvPr>
+          <p:cNvSpPr>
+            <a:spLocks xmlns:a="http://schemas.openxmlformats.org/drawingml/2006/main" noGrp="1"/>
+          </p:cNvSpPr>
+          <p:nvPr/>
+        </p:nvSpPr>
+        <p:spPr>
+          <a:xfrm xmlns:a="http://schemas.openxmlformats.org/drawingml/2006/main">
+            <a:off x="590550" y="2209800"/>
+            <a:ext cx="2095500" cy="361950"/>
           </a:xfrm>
           <a:prstGeom xmlns:a="http://schemas.openxmlformats.org/drawingml/2006/main" prst="rect">
             <a:avLst/>
@@ -6321,47 +6376,47 @@
           <a:p xmlns:a="http://schemas.openxmlformats.org/drawingml/2006/main">
             <a:pPr algn="l">
               <a:buNone/>
-              <a:defRPr sz="1125" b="1">
-                <a:solidFill>
-                  <a:srgbClr val="E9652E"/>
-                </a:solidFill>
-                <a:latin typeface="Arial"/>
-                <a:ea typeface="Arial"/>
-                <a:cs typeface="Arial"/>
-              </a:defRPr>
-            </a:pPr>
-            <a:r>
-              <a:rPr sz="975" b="1">
-                <a:solidFill>
-                  <a:srgbClr val="F19A68"/>
+              <a:defRPr sz="1650" b="1">
+                <a:solidFill>
+                  <a:srgbClr val="171714"/>
+                </a:solidFill>
+                <a:latin typeface="Arial"/>
+                <a:ea typeface="Arial"/>
+                <a:cs typeface="Arial"/>
+              </a:defRPr>
+            </a:pPr>
+            <a:r>
+              <a:rPr sz="1200" b="1">
+                <a:solidFill>
+                  <a:srgbClr val="F1E9DC"/>
                 </a:solidFill>
                 <a:latin typeface="Menlo"/>
                 <a:ea typeface="Menlo"/>
                 <a:cs typeface="Menlo"/>
               </a:rPr>
-              <a:t>01</a:t>
-            </a:r>
-          </a:p>
-        </p:txBody>
-      </p:sp>
-      <p:sp>
-        <p:nvSpPr>
-          <p:cNvPr id="7" name="">
-            <a:extLst xmlns:a="http://schemas.openxmlformats.org/drawingml/2006/main">
-              <a:ext uri="{FF2B5EF4-FFF2-40B4-BE49-F238E27FC236}">
-                <a16:creationId xmlns:a16="http://schemas.microsoft.com/office/drawing/2014/main" id="{3E8E157B-2462-4EEE-8F24-EAE16D21583E}"/>
-              </a:ext>
-            </a:extLst>
-          </p:cNvPr>
-          <p:cNvSpPr>
-            <a:spLocks xmlns:a="http://schemas.openxmlformats.org/drawingml/2006/main" noGrp="1"/>
-          </p:cNvSpPr>
-          <p:nvPr/>
-        </p:nvSpPr>
-        <p:spPr>
-          <a:xfrm xmlns:a="http://schemas.openxmlformats.org/drawingml/2006/main">
-            <a:off x="590550" y="2381250"/>
-            <a:ext cx="2095500" cy="323850"/>
+              <a:t>PERSONALIZE</a:t>
+            </a:r>
+          </a:p>
+        </p:txBody>
+      </p:sp>
+      <p:sp>
+        <p:nvSpPr>
+          <p:cNvPr id="8" name="">
+            <a:extLst xmlns:a="http://schemas.openxmlformats.org/drawingml/2006/main">
+              <a:ext uri="{FF2B5EF4-FFF2-40B4-BE49-F238E27FC236}">
+                <a16:creationId xmlns:a16="http://schemas.microsoft.com/office/drawing/2014/main" id="{C429E8B7-57D3-427B-B722-926E2481C98A}"/>
+              </a:ext>
+            </a:extLst>
+          </p:cNvPr>
+          <p:cNvSpPr>
+            <a:spLocks xmlns:a="http://schemas.openxmlformats.org/drawingml/2006/main" noGrp="1"/>
+          </p:cNvSpPr>
+          <p:nvPr/>
+        </p:nvSpPr>
+        <p:spPr>
+          <a:xfrm xmlns:a="http://schemas.openxmlformats.org/drawingml/2006/main">
+            <a:off x="590550" y="2781300"/>
+            <a:ext cx="2095500" cy="685800"/>
           </a:xfrm>
           <a:prstGeom xmlns:a="http://schemas.openxmlformats.org/drawingml/2006/main" prst="rect">
             <a:avLst/>
@@ -6380,65 +6435,6 @@
           <a:p xmlns:a="http://schemas.openxmlformats.org/drawingml/2006/main">
             <a:pPr algn="l">
               <a:buNone/>
-              <a:defRPr sz="1650" b="1">
-                <a:solidFill>
-                  <a:srgbClr val="171714"/>
-                </a:solidFill>
-                <a:latin typeface="Arial"/>
-                <a:ea typeface="Arial"/>
-                <a:cs typeface="Arial"/>
-              </a:defRPr>
-            </a:pPr>
-            <a:r>
-              <a:rPr sz="1500" b="1">
-                <a:solidFill>
-                  <a:srgbClr val="F1E9DC"/>
-                </a:solidFill>
-                <a:latin typeface="Arial"/>
-                <a:ea typeface="Arial"/>
-                <a:cs typeface="Arial"/>
-              </a:rPr>
-              <a:t>PERSONALIZE</a:t>
-            </a:r>
-          </a:p>
-        </p:txBody>
-      </p:sp>
-      <p:sp>
-        <p:nvSpPr>
-          <p:cNvPr id="8" name="">
-            <a:extLst xmlns:a="http://schemas.openxmlformats.org/drawingml/2006/main">
-              <a:ext uri="{FF2B5EF4-FFF2-40B4-BE49-F238E27FC236}">
-                <a16:creationId xmlns:a16="http://schemas.microsoft.com/office/drawing/2014/main" id="{C429E8B7-57D3-427B-B722-926E2481C98A}"/>
-              </a:ext>
-            </a:extLst>
-          </p:cNvPr>
-          <p:cNvSpPr>
-            <a:spLocks xmlns:a="http://schemas.openxmlformats.org/drawingml/2006/main" noGrp="1"/>
-          </p:cNvSpPr>
-          <p:nvPr/>
-        </p:nvSpPr>
-        <p:spPr>
-          <a:xfrm xmlns:a="http://schemas.openxmlformats.org/drawingml/2006/main">
-            <a:off x="590550" y="2895600"/>
-            <a:ext cx="2095500" cy="685800"/>
-          </a:xfrm>
-          <a:prstGeom xmlns:a="http://schemas.openxmlformats.org/drawingml/2006/main" prst="rect">
-            <a:avLst/>
-          </a:prstGeom>
-          <a:noFill xmlns:a="http://schemas.openxmlformats.org/drawingml/2006/main"/>
-          <a:ln xmlns:a="http://schemas.openxmlformats.org/drawingml/2006/main" w="0">
-            <a:noFill/>
-            <a:prstDash val="solid"/>
-          </a:ln>
-        </p:spPr>
-        <p:txBody>
-          <a:bodyPr xmlns:a="http://schemas.openxmlformats.org/drawingml/2006/main" anchor="t">
-            <a:normAutofit fontScale="100000"/>
-          </a:bodyPr>
-          <a:lstStyle xmlns:a="http://schemas.openxmlformats.org/drawingml/2006/main"/>
-          <a:p xmlns:a="http://schemas.openxmlformats.org/drawingml/2006/main">
-            <a:pPr algn="l">
-              <a:buNone/>
               <a:defRPr sz="1425" b="0">
                 <a:solidFill>
                   <a:srgbClr val="686863"/>
@@ -6449,7 +6445,7 @@
               </a:defRPr>
             </a:pPr>
             <a:r>
-              <a:rPr sz="1275" b="0">
+              <a:rPr sz="1200" b="0">
                 <a:solidFill>
                   <a:srgbClr val="9C9183"/>
                 </a:solidFill>
@@ -6473,7 +6469,7 @@
               </a:defRPr>
             </a:pPr>
             <a:r>
-              <a:rPr sz="1275" b="0">
+              <a:rPr sz="1200" b="0">
                 <a:solidFill>
                   <a:srgbClr val="9C9183"/>
                 </a:solidFill>
@@ -6516,7 +6512,7 @@
         </p:spPr>
         <p:txBody>
           <a:bodyPr xmlns:a="http://schemas.openxmlformats.org/drawingml/2006/main" anchor="t">
-            <a:normAutofit fontScale="53102"/>
+            <a:normAutofit fontScale="70808"/>
           </a:bodyPr>
           <a:lstStyle xmlns:a="http://schemas.openxmlformats.org/drawingml/2006/main"/>
           <a:p xmlns:a="http://schemas.openxmlformats.org/drawingml/2006/main">
@@ -6532,9 +6528,9 @@
               </a:defRPr>
             </a:pPr>
             <a:r>
-              <a:rPr sz="1800" b="1">
-                <a:solidFill>
-                  <a:srgbClr val="E8793D"/>
+              <a:rPr sz="1350" b="0">
+                <a:solidFill>
+                  <a:srgbClr val="6B5F50"/>
                 </a:solidFill>
                 <a:latin typeface="Arial"/>
                 <a:ea typeface="Arial"/>
@@ -6561,8 +6557,8 @@
         </p:nvSpPr>
         <p:spPr>
           <a:xfrm xmlns:a="http://schemas.openxmlformats.org/drawingml/2006/main">
-            <a:off x="3238500" y="1733550"/>
-            <a:ext cx="2476500" cy="2000250"/>
+            <a:off x="3238500" y="1752600"/>
+            <a:ext cx="19050" cy="1962150"/>
           </a:xfrm>
           <a:prstGeom xmlns:a="http://schemas.openxmlformats.org/drawingml/2006/main" prst="roundRect">
             <a:avLst>
@@ -6570,11 +6566,11 @@
             </a:avLst>
           </a:prstGeom>
           <a:solidFill xmlns:a="http://schemas.openxmlformats.org/drawingml/2006/main">
-            <a:srgbClr val="14110D"/>
+            <a:srgbClr val="3F382E"/>
           </a:solidFill>
-          <a:ln xmlns:a="http://schemas.openxmlformats.org/drawingml/2006/main" w="9525">
+          <a:ln xmlns:a="http://schemas.openxmlformats.org/drawingml/2006/main" w="0">
             <a:solidFill>
-              <a:srgbClr val="6B5F50"/>
+              <a:srgbClr val="3F382E"/>
             </a:solidFill>
             <a:prstDash val="solid"/>
           </a:ln>
@@ -6596,8 +6592,67 @@
         </p:nvSpPr>
         <p:spPr>
           <a:xfrm xmlns:a="http://schemas.openxmlformats.org/drawingml/2006/main">
-            <a:off x="3429000" y="1924050"/>
-            <a:ext cx="400050" cy="266700"/>
+            <a:off x="3429000" y="1752600"/>
+            <a:ext cx="400050" cy="285750"/>
+          </a:xfrm>
+          <a:prstGeom xmlns:a="http://schemas.openxmlformats.org/drawingml/2006/main" prst="rect">
+            <a:avLst/>
+          </a:prstGeom>
+          <a:noFill xmlns:a="http://schemas.openxmlformats.org/drawingml/2006/main"/>
+          <a:ln xmlns:a="http://schemas.openxmlformats.org/drawingml/2006/main" w="0">
+            <a:noFill/>
+            <a:prstDash val="solid"/>
+          </a:ln>
+        </p:spPr>
+        <p:txBody>
+          <a:bodyPr xmlns:a="http://schemas.openxmlformats.org/drawingml/2006/main" anchor="t">
+            <a:normAutofit fontScale="85000"/>
+          </a:bodyPr>
+          <a:lstStyle xmlns:a="http://schemas.openxmlformats.org/drawingml/2006/main"/>
+          <a:p xmlns:a="http://schemas.openxmlformats.org/drawingml/2006/main">
+            <a:pPr algn="l">
+              <a:buNone/>
+              <a:defRPr sz="1125" b="1">
+                <a:solidFill>
+                  <a:srgbClr val="E9652E"/>
+                </a:solidFill>
+                <a:latin typeface="Arial"/>
+                <a:ea typeface="Arial"/>
+                <a:cs typeface="Arial"/>
+              </a:defRPr>
+            </a:pPr>
+            <a:r>
+              <a:rPr sz="1500" b="0">
+                <a:solidFill>
+                  <a:srgbClr val="F19A68"/>
+                </a:solidFill>
+                <a:latin typeface="Georgia"/>
+                <a:ea typeface="Georgia"/>
+                <a:cs typeface="Georgia"/>
+              </a:rPr>
+              <a:t>02</a:t>
+            </a:r>
+          </a:p>
+        </p:txBody>
+      </p:sp>
+      <p:sp>
+        <p:nvSpPr>
+          <p:cNvPr id="12" name="">
+            <a:extLst xmlns:a="http://schemas.openxmlformats.org/drawingml/2006/main">
+              <a:ext uri="{FF2B5EF4-FFF2-40B4-BE49-F238E27FC236}">
+                <a16:creationId xmlns:a16="http://schemas.microsoft.com/office/drawing/2014/main" id="{1A20AA15-3BD9-44B8-860A-0E9ABD063467}"/>
+              </a:ext>
+            </a:extLst>
+          </p:cNvPr>
+          <p:cNvSpPr>
+            <a:spLocks xmlns:a="http://schemas.openxmlformats.org/drawingml/2006/main" noGrp="1"/>
+          </p:cNvSpPr>
+          <p:nvPr/>
+        </p:nvSpPr>
+        <p:spPr>
+          <a:xfrm xmlns:a="http://schemas.openxmlformats.org/drawingml/2006/main">
+            <a:off x="3429000" y="2209800"/>
+            <a:ext cx="2095500" cy="361950"/>
           </a:xfrm>
           <a:prstGeom xmlns:a="http://schemas.openxmlformats.org/drawingml/2006/main" prst="rect">
             <a:avLst/>
@@ -6616,47 +6671,47 @@
           <a:p xmlns:a="http://schemas.openxmlformats.org/drawingml/2006/main">
             <a:pPr algn="l">
               <a:buNone/>
-              <a:defRPr sz="1125" b="1">
-                <a:solidFill>
-                  <a:srgbClr val="E9652E"/>
-                </a:solidFill>
-                <a:latin typeface="Arial"/>
-                <a:ea typeface="Arial"/>
-                <a:cs typeface="Arial"/>
-              </a:defRPr>
-            </a:pPr>
-            <a:r>
-              <a:rPr sz="975" b="1">
-                <a:solidFill>
-                  <a:srgbClr val="F19A68"/>
+              <a:defRPr sz="1650" b="1">
+                <a:solidFill>
+                  <a:srgbClr val="171714"/>
+                </a:solidFill>
+                <a:latin typeface="Arial"/>
+                <a:ea typeface="Arial"/>
+                <a:cs typeface="Arial"/>
+              </a:defRPr>
+            </a:pPr>
+            <a:r>
+              <a:rPr sz="1200" b="1">
+                <a:solidFill>
+                  <a:srgbClr val="F1E9DC"/>
                 </a:solidFill>
                 <a:latin typeface="Menlo"/>
                 <a:ea typeface="Menlo"/>
                 <a:cs typeface="Menlo"/>
               </a:rPr>
-              <a:t>02</a:t>
-            </a:r>
-          </a:p>
-        </p:txBody>
-      </p:sp>
-      <p:sp>
-        <p:nvSpPr>
-          <p:cNvPr id="12" name="">
-            <a:extLst xmlns:a="http://schemas.openxmlformats.org/drawingml/2006/main">
-              <a:ext uri="{FF2B5EF4-FFF2-40B4-BE49-F238E27FC236}">
-                <a16:creationId xmlns:a16="http://schemas.microsoft.com/office/drawing/2014/main" id="{1A20AA15-3BD9-44B8-860A-0E9ABD063467}"/>
-              </a:ext>
-            </a:extLst>
-          </p:cNvPr>
-          <p:cNvSpPr>
-            <a:spLocks xmlns:a="http://schemas.openxmlformats.org/drawingml/2006/main" noGrp="1"/>
-          </p:cNvSpPr>
-          <p:nvPr/>
-        </p:nvSpPr>
-        <p:spPr>
-          <a:xfrm xmlns:a="http://schemas.openxmlformats.org/drawingml/2006/main">
-            <a:off x="3429000" y="2381250"/>
-            <a:ext cx="2095500" cy="323850"/>
+              <a:t>ITERATE</a:t>
+            </a:r>
+          </a:p>
+        </p:txBody>
+      </p:sp>
+      <p:sp>
+        <p:nvSpPr>
+          <p:cNvPr id="13" name="">
+            <a:extLst xmlns:a="http://schemas.openxmlformats.org/drawingml/2006/main">
+              <a:ext uri="{FF2B5EF4-FFF2-40B4-BE49-F238E27FC236}">
+                <a16:creationId xmlns:a16="http://schemas.microsoft.com/office/drawing/2014/main" id="{E48F79FE-6BBE-4379-B74B-DF3FB36F7FF9}"/>
+              </a:ext>
+            </a:extLst>
+          </p:cNvPr>
+          <p:cNvSpPr>
+            <a:spLocks xmlns:a="http://schemas.openxmlformats.org/drawingml/2006/main" noGrp="1"/>
+          </p:cNvSpPr>
+          <p:nvPr/>
+        </p:nvSpPr>
+        <p:spPr>
+          <a:xfrm xmlns:a="http://schemas.openxmlformats.org/drawingml/2006/main">
+            <a:off x="3429000" y="2781300"/>
+            <a:ext cx="2095500" cy="685800"/>
           </a:xfrm>
           <a:prstGeom xmlns:a="http://schemas.openxmlformats.org/drawingml/2006/main" prst="rect">
             <a:avLst/>
@@ -6675,65 +6730,6 @@
           <a:p xmlns:a="http://schemas.openxmlformats.org/drawingml/2006/main">
             <a:pPr algn="l">
               <a:buNone/>
-              <a:defRPr sz="1650" b="1">
-                <a:solidFill>
-                  <a:srgbClr val="171714"/>
-                </a:solidFill>
-                <a:latin typeface="Arial"/>
-                <a:ea typeface="Arial"/>
-                <a:cs typeface="Arial"/>
-              </a:defRPr>
-            </a:pPr>
-            <a:r>
-              <a:rPr sz="1500" b="1">
-                <a:solidFill>
-                  <a:srgbClr val="F1E9DC"/>
-                </a:solidFill>
-                <a:latin typeface="Arial"/>
-                <a:ea typeface="Arial"/>
-                <a:cs typeface="Arial"/>
-              </a:rPr>
-              <a:t>ITERATE</a:t>
-            </a:r>
-          </a:p>
-        </p:txBody>
-      </p:sp>
-      <p:sp>
-        <p:nvSpPr>
-          <p:cNvPr id="13" name="">
-            <a:extLst xmlns:a="http://schemas.openxmlformats.org/drawingml/2006/main">
-              <a:ext uri="{FF2B5EF4-FFF2-40B4-BE49-F238E27FC236}">
-                <a16:creationId xmlns:a16="http://schemas.microsoft.com/office/drawing/2014/main" id="{E48F79FE-6BBE-4379-B74B-DF3FB36F7FF9}"/>
-              </a:ext>
-            </a:extLst>
-          </p:cNvPr>
-          <p:cNvSpPr>
-            <a:spLocks xmlns:a="http://schemas.openxmlformats.org/drawingml/2006/main" noGrp="1"/>
-          </p:cNvSpPr>
-          <p:nvPr/>
-        </p:nvSpPr>
-        <p:spPr>
-          <a:xfrm xmlns:a="http://schemas.openxmlformats.org/drawingml/2006/main">
-            <a:off x="3429000" y="2895600"/>
-            <a:ext cx="2095500" cy="685800"/>
-          </a:xfrm>
-          <a:prstGeom xmlns:a="http://schemas.openxmlformats.org/drawingml/2006/main" prst="rect">
-            <a:avLst/>
-          </a:prstGeom>
-          <a:noFill xmlns:a="http://schemas.openxmlformats.org/drawingml/2006/main"/>
-          <a:ln xmlns:a="http://schemas.openxmlformats.org/drawingml/2006/main" w="0">
-            <a:noFill/>
-            <a:prstDash val="solid"/>
-          </a:ln>
-        </p:spPr>
-        <p:txBody>
-          <a:bodyPr xmlns:a="http://schemas.openxmlformats.org/drawingml/2006/main" anchor="t">
-            <a:normAutofit fontScale="100000"/>
-          </a:bodyPr>
-          <a:lstStyle xmlns:a="http://schemas.openxmlformats.org/drawingml/2006/main"/>
-          <a:p xmlns:a="http://schemas.openxmlformats.org/drawingml/2006/main">
-            <a:pPr algn="l">
-              <a:buNone/>
               <a:defRPr sz="1425" b="0">
                 <a:solidFill>
                   <a:srgbClr val="686863"/>
@@ -6744,7 +6740,7 @@
               </a:defRPr>
             </a:pPr>
             <a:r>
-              <a:rPr sz="1275" b="0">
+              <a:rPr sz="1200" b="0">
                 <a:solidFill>
                   <a:srgbClr val="9C9183"/>
                 </a:solidFill>
@@ -6768,7 +6764,7 @@
               </a:defRPr>
             </a:pPr>
             <a:r>
-              <a:rPr sz="1275" b="0">
+              <a:rPr sz="1200" b="0">
                 <a:solidFill>
                   <a:srgbClr val="9C9183"/>
                 </a:solidFill>
@@ -6811,7 +6807,7 @@
         </p:spPr>
         <p:txBody>
           <a:bodyPr xmlns:a="http://schemas.openxmlformats.org/drawingml/2006/main" anchor="t">
-            <a:normAutofit fontScale="53102"/>
+            <a:normAutofit fontScale="70808"/>
           </a:bodyPr>
           <a:lstStyle xmlns:a="http://schemas.openxmlformats.org/drawingml/2006/main"/>
           <a:p xmlns:a="http://schemas.openxmlformats.org/drawingml/2006/main">
@@ -6827,9 +6823,9 @@
               </a:defRPr>
             </a:pPr>
             <a:r>
-              <a:rPr sz="1800" b="1">
-                <a:solidFill>
-                  <a:srgbClr val="E8793D"/>
+              <a:rPr sz="1350" b="0">
+                <a:solidFill>
+                  <a:srgbClr val="6B5F50"/>
                 </a:solidFill>
                 <a:latin typeface="Arial"/>
                 <a:ea typeface="Arial"/>
@@ -6856,8 +6852,8 @@
         </p:nvSpPr>
         <p:spPr>
           <a:xfrm xmlns:a="http://schemas.openxmlformats.org/drawingml/2006/main">
-            <a:off x="6076950" y="1733550"/>
-            <a:ext cx="2476500" cy="2000250"/>
+            <a:off x="6076950" y="1752600"/>
+            <a:ext cx="19050" cy="1962150"/>
           </a:xfrm>
           <a:prstGeom xmlns:a="http://schemas.openxmlformats.org/drawingml/2006/main" prst="roundRect">
             <a:avLst>
@@ -6865,9 +6861,9 @@
             </a:avLst>
           </a:prstGeom>
           <a:solidFill xmlns:a="http://schemas.openxmlformats.org/drawingml/2006/main">
-            <a:srgbClr val="211B14"/>
+            <a:srgbClr val="E8793D"/>
           </a:solidFill>
-          <a:ln xmlns:a="http://schemas.openxmlformats.org/drawingml/2006/main" w="19050">
+          <a:ln xmlns:a="http://schemas.openxmlformats.org/drawingml/2006/main" w="0">
             <a:solidFill>
               <a:srgbClr val="E8793D"/>
             </a:solidFill>
@@ -6891,8 +6887,67 @@
         </p:nvSpPr>
         <p:spPr>
           <a:xfrm xmlns:a="http://schemas.openxmlformats.org/drawingml/2006/main">
-            <a:off x="6267450" y="1924050"/>
-            <a:ext cx="400050" cy="266700"/>
+            <a:off x="6267450" y="1752600"/>
+            <a:ext cx="400050" cy="285750"/>
+          </a:xfrm>
+          <a:prstGeom xmlns:a="http://schemas.openxmlformats.org/drawingml/2006/main" prst="rect">
+            <a:avLst/>
+          </a:prstGeom>
+          <a:noFill xmlns:a="http://schemas.openxmlformats.org/drawingml/2006/main"/>
+          <a:ln xmlns:a="http://schemas.openxmlformats.org/drawingml/2006/main" w="0">
+            <a:noFill/>
+            <a:prstDash val="solid"/>
+          </a:ln>
+        </p:spPr>
+        <p:txBody>
+          <a:bodyPr xmlns:a="http://schemas.openxmlformats.org/drawingml/2006/main" anchor="t">
+            <a:normAutofit fontScale="85000"/>
+          </a:bodyPr>
+          <a:lstStyle xmlns:a="http://schemas.openxmlformats.org/drawingml/2006/main"/>
+          <a:p xmlns:a="http://schemas.openxmlformats.org/drawingml/2006/main">
+            <a:pPr algn="l">
+              <a:buNone/>
+              <a:defRPr sz="1125" b="1">
+                <a:solidFill>
+                  <a:srgbClr val="E9652E"/>
+                </a:solidFill>
+                <a:latin typeface="Arial"/>
+                <a:ea typeface="Arial"/>
+                <a:cs typeface="Arial"/>
+              </a:defRPr>
+            </a:pPr>
+            <a:r>
+              <a:rPr sz="1500" b="0">
+                <a:solidFill>
+                  <a:srgbClr val="F19A68"/>
+                </a:solidFill>
+                <a:latin typeface="Georgia"/>
+                <a:ea typeface="Georgia"/>
+                <a:cs typeface="Georgia"/>
+              </a:rPr>
+              <a:t>03</a:t>
+            </a:r>
+          </a:p>
+        </p:txBody>
+      </p:sp>
+      <p:sp>
+        <p:nvSpPr>
+          <p:cNvPr id="17" name="">
+            <a:extLst xmlns:a="http://schemas.openxmlformats.org/drawingml/2006/main">
+              <a:ext uri="{FF2B5EF4-FFF2-40B4-BE49-F238E27FC236}">
+                <a16:creationId xmlns:a16="http://schemas.microsoft.com/office/drawing/2014/main" id="{00E44172-8B30-48CA-BBEE-7AE0329BF553}"/>
+              </a:ext>
+            </a:extLst>
+          </p:cNvPr>
+          <p:cNvSpPr>
+            <a:spLocks xmlns:a="http://schemas.openxmlformats.org/drawingml/2006/main" noGrp="1"/>
+          </p:cNvSpPr>
+          <p:nvPr/>
+        </p:nvSpPr>
+        <p:spPr>
+          <a:xfrm xmlns:a="http://schemas.openxmlformats.org/drawingml/2006/main">
+            <a:off x="6267450" y="2209800"/>
+            <a:ext cx="2095500" cy="361950"/>
           </a:xfrm>
           <a:prstGeom xmlns:a="http://schemas.openxmlformats.org/drawingml/2006/main" prst="rect">
             <a:avLst/>
@@ -6911,47 +6966,47 @@
           <a:p xmlns:a="http://schemas.openxmlformats.org/drawingml/2006/main">
             <a:pPr algn="l">
               <a:buNone/>
-              <a:defRPr sz="1125" b="1">
-                <a:solidFill>
-                  <a:srgbClr val="E9652E"/>
-                </a:solidFill>
-                <a:latin typeface="Arial"/>
-                <a:ea typeface="Arial"/>
-                <a:cs typeface="Arial"/>
-              </a:defRPr>
-            </a:pPr>
-            <a:r>
-              <a:rPr sz="975" b="1">
-                <a:solidFill>
-                  <a:srgbClr val="F19A68"/>
+              <a:defRPr sz="1650" b="1">
+                <a:solidFill>
+                  <a:srgbClr val="171714"/>
+                </a:solidFill>
+                <a:latin typeface="Arial"/>
+                <a:ea typeface="Arial"/>
+                <a:cs typeface="Arial"/>
+              </a:defRPr>
+            </a:pPr>
+            <a:r>
+              <a:rPr sz="1200" b="1">
+                <a:solidFill>
+                  <a:srgbClr val="F1E9DC"/>
                 </a:solidFill>
                 <a:latin typeface="Menlo"/>
                 <a:ea typeface="Menlo"/>
                 <a:cs typeface="Menlo"/>
               </a:rPr>
-              <a:t>03</a:t>
-            </a:r>
-          </a:p>
-        </p:txBody>
-      </p:sp>
-      <p:sp>
-        <p:nvSpPr>
-          <p:cNvPr id="17" name="">
-            <a:extLst xmlns:a="http://schemas.openxmlformats.org/drawingml/2006/main">
-              <a:ext uri="{FF2B5EF4-FFF2-40B4-BE49-F238E27FC236}">
-                <a16:creationId xmlns:a16="http://schemas.microsoft.com/office/drawing/2014/main" id="{00E44172-8B30-48CA-BBEE-7AE0329BF553}"/>
-              </a:ext>
-            </a:extLst>
-          </p:cNvPr>
-          <p:cNvSpPr>
-            <a:spLocks xmlns:a="http://schemas.openxmlformats.org/drawingml/2006/main" noGrp="1"/>
-          </p:cNvSpPr>
-          <p:nvPr/>
-        </p:nvSpPr>
-        <p:spPr>
-          <a:xfrm xmlns:a="http://schemas.openxmlformats.org/drawingml/2006/main">
-            <a:off x="6267450" y="2381250"/>
-            <a:ext cx="2095500" cy="323850"/>
+              <a:t>COORDINATE</a:t>
+            </a:r>
+          </a:p>
+        </p:txBody>
+      </p:sp>
+      <p:sp>
+        <p:nvSpPr>
+          <p:cNvPr id="18" name="">
+            <a:extLst xmlns:a="http://schemas.openxmlformats.org/drawingml/2006/main">
+              <a:ext uri="{FF2B5EF4-FFF2-40B4-BE49-F238E27FC236}">
+                <a16:creationId xmlns:a16="http://schemas.microsoft.com/office/drawing/2014/main" id="{6DE68EBF-FB23-4351-A305-B1D3FCACAEB2}"/>
+              </a:ext>
+            </a:extLst>
+          </p:cNvPr>
+          <p:cNvSpPr>
+            <a:spLocks xmlns:a="http://schemas.openxmlformats.org/drawingml/2006/main" noGrp="1"/>
+          </p:cNvSpPr>
+          <p:nvPr/>
+        </p:nvSpPr>
+        <p:spPr>
+          <a:xfrm xmlns:a="http://schemas.openxmlformats.org/drawingml/2006/main">
+            <a:off x="6267450" y="2781300"/>
+            <a:ext cx="2095500" cy="685800"/>
           </a:xfrm>
           <a:prstGeom xmlns:a="http://schemas.openxmlformats.org/drawingml/2006/main" prst="rect">
             <a:avLst/>
@@ -6970,65 +7025,6 @@
           <a:p xmlns:a="http://schemas.openxmlformats.org/drawingml/2006/main">
             <a:pPr algn="l">
               <a:buNone/>
-              <a:defRPr sz="1650" b="1">
-                <a:solidFill>
-                  <a:srgbClr val="171714"/>
-                </a:solidFill>
-                <a:latin typeface="Arial"/>
-                <a:ea typeface="Arial"/>
-                <a:cs typeface="Arial"/>
-              </a:defRPr>
-            </a:pPr>
-            <a:r>
-              <a:rPr sz="1500" b="1">
-                <a:solidFill>
-                  <a:srgbClr val="F1E9DC"/>
-                </a:solidFill>
-                <a:latin typeface="Arial"/>
-                <a:ea typeface="Arial"/>
-                <a:cs typeface="Arial"/>
-              </a:rPr>
-              <a:t>COORDINATE</a:t>
-            </a:r>
-          </a:p>
-        </p:txBody>
-      </p:sp>
-      <p:sp>
-        <p:nvSpPr>
-          <p:cNvPr id="18" name="">
-            <a:extLst xmlns:a="http://schemas.openxmlformats.org/drawingml/2006/main">
-              <a:ext uri="{FF2B5EF4-FFF2-40B4-BE49-F238E27FC236}">
-                <a16:creationId xmlns:a16="http://schemas.microsoft.com/office/drawing/2014/main" id="{6DE68EBF-FB23-4351-A305-B1D3FCACAEB2}"/>
-              </a:ext>
-            </a:extLst>
-          </p:cNvPr>
-          <p:cNvSpPr>
-            <a:spLocks xmlns:a="http://schemas.openxmlformats.org/drawingml/2006/main" noGrp="1"/>
-          </p:cNvSpPr>
-          <p:nvPr/>
-        </p:nvSpPr>
-        <p:spPr>
-          <a:xfrm xmlns:a="http://schemas.openxmlformats.org/drawingml/2006/main">
-            <a:off x="6267450" y="2895600"/>
-            <a:ext cx="2095500" cy="685800"/>
-          </a:xfrm>
-          <a:prstGeom xmlns:a="http://schemas.openxmlformats.org/drawingml/2006/main" prst="rect">
-            <a:avLst/>
-          </a:prstGeom>
-          <a:noFill xmlns:a="http://schemas.openxmlformats.org/drawingml/2006/main"/>
-          <a:ln xmlns:a="http://schemas.openxmlformats.org/drawingml/2006/main" w="0">
-            <a:noFill/>
-            <a:prstDash val="solid"/>
-          </a:ln>
-        </p:spPr>
-        <p:txBody>
-          <a:bodyPr xmlns:a="http://schemas.openxmlformats.org/drawingml/2006/main" anchor="t">
-            <a:normAutofit fontScale="100000"/>
-          </a:bodyPr>
-          <a:lstStyle xmlns:a="http://schemas.openxmlformats.org/drawingml/2006/main"/>
-          <a:p xmlns:a="http://schemas.openxmlformats.org/drawingml/2006/main">
-            <a:pPr algn="l">
-              <a:buNone/>
               <a:defRPr sz="1425" b="0">
                 <a:solidFill>
                   <a:srgbClr val="686863"/>
@@ -7039,7 +7035,7 @@
               </a:defRPr>
             </a:pPr>
             <a:r>
-              <a:rPr sz="1275" b="0">
+              <a:rPr sz="1200" b="0">
                 <a:solidFill>
                   <a:srgbClr val="9C9183"/>
                 </a:solidFill>
@@ -7063,7 +7059,7 @@
               </a:defRPr>
             </a:pPr>
             <a:r>
-              <a:rPr sz="1275" b="0">
+              <a:rPr sz="1200" b="0">
                 <a:solidFill>
                   <a:srgbClr val="9C9183"/>
                 </a:solidFill>
@@ -7106,7 +7102,7 @@
         </p:spPr>
         <p:txBody>
           <a:bodyPr xmlns:a="http://schemas.openxmlformats.org/drawingml/2006/main" anchor="t">
-            <a:normAutofit fontScale="53102"/>
+            <a:normAutofit fontScale="70808"/>
           </a:bodyPr>
           <a:lstStyle xmlns:a="http://schemas.openxmlformats.org/drawingml/2006/main"/>
           <a:p xmlns:a="http://schemas.openxmlformats.org/drawingml/2006/main">
@@ -7122,9 +7118,9 @@
               </a:defRPr>
             </a:pPr>
             <a:r>
-              <a:rPr sz="1800" b="1">
-                <a:solidFill>
-                  <a:srgbClr val="E8793D"/>
+              <a:rPr sz="1350" b="0">
+                <a:solidFill>
+                  <a:srgbClr val="6B5F50"/>
                 </a:solidFill>
                 <a:latin typeface="Arial"/>
                 <a:ea typeface="Arial"/>
@@ -7151,8 +7147,8 @@
         </p:nvSpPr>
         <p:spPr>
           <a:xfrm xmlns:a="http://schemas.openxmlformats.org/drawingml/2006/main">
-            <a:off x="8915400" y="1733550"/>
-            <a:ext cx="2476500" cy="2000250"/>
+            <a:off x="8915400" y="1752600"/>
+            <a:ext cx="19050" cy="1962150"/>
           </a:xfrm>
           <a:prstGeom xmlns:a="http://schemas.openxmlformats.org/drawingml/2006/main" prst="roundRect">
             <a:avLst>
@@ -7160,11 +7156,11 @@
             </a:avLst>
           </a:prstGeom>
           <a:solidFill xmlns:a="http://schemas.openxmlformats.org/drawingml/2006/main">
-            <a:srgbClr val="14110D"/>
+            <a:srgbClr val="3F382E"/>
           </a:solidFill>
-          <a:ln xmlns:a="http://schemas.openxmlformats.org/drawingml/2006/main" w="9525">
+          <a:ln xmlns:a="http://schemas.openxmlformats.org/drawingml/2006/main" w="0">
             <a:solidFill>
-              <a:srgbClr val="6B5F50"/>
+              <a:srgbClr val="3F382E"/>
             </a:solidFill>
             <a:prstDash val="solid"/>
           </a:ln>
@@ -7186,8 +7182,67 @@
         </p:nvSpPr>
         <p:spPr>
           <a:xfrm xmlns:a="http://schemas.openxmlformats.org/drawingml/2006/main">
-            <a:off x="9105900" y="1924050"/>
-            <a:ext cx="400050" cy="266700"/>
+            <a:off x="9105900" y="1752600"/>
+            <a:ext cx="400050" cy="285750"/>
+          </a:xfrm>
+          <a:prstGeom xmlns:a="http://schemas.openxmlformats.org/drawingml/2006/main" prst="rect">
+            <a:avLst/>
+          </a:prstGeom>
+          <a:noFill xmlns:a="http://schemas.openxmlformats.org/drawingml/2006/main"/>
+          <a:ln xmlns:a="http://schemas.openxmlformats.org/drawingml/2006/main" w="0">
+            <a:noFill/>
+            <a:prstDash val="solid"/>
+          </a:ln>
+        </p:spPr>
+        <p:txBody>
+          <a:bodyPr xmlns:a="http://schemas.openxmlformats.org/drawingml/2006/main" anchor="t">
+            <a:normAutofit fontScale="85000"/>
+          </a:bodyPr>
+          <a:lstStyle xmlns:a="http://schemas.openxmlformats.org/drawingml/2006/main"/>
+          <a:p xmlns:a="http://schemas.openxmlformats.org/drawingml/2006/main">
+            <a:pPr algn="l">
+              <a:buNone/>
+              <a:defRPr sz="1125" b="1">
+                <a:solidFill>
+                  <a:srgbClr val="E9652E"/>
+                </a:solidFill>
+                <a:latin typeface="Arial"/>
+                <a:ea typeface="Arial"/>
+                <a:cs typeface="Arial"/>
+              </a:defRPr>
+            </a:pPr>
+            <a:r>
+              <a:rPr sz="1500" b="0">
+                <a:solidFill>
+                  <a:srgbClr val="F19A68"/>
+                </a:solidFill>
+                <a:latin typeface="Georgia"/>
+                <a:ea typeface="Georgia"/>
+                <a:cs typeface="Georgia"/>
+              </a:rPr>
+              <a:t>04</a:t>
+            </a:r>
+          </a:p>
+        </p:txBody>
+      </p:sp>
+      <p:sp>
+        <p:nvSpPr>
+          <p:cNvPr id="22" name="">
+            <a:extLst xmlns:a="http://schemas.openxmlformats.org/drawingml/2006/main">
+              <a:ext uri="{FF2B5EF4-FFF2-40B4-BE49-F238E27FC236}">
+                <a16:creationId xmlns:a16="http://schemas.microsoft.com/office/drawing/2014/main" id="{6873C54B-FFF0-4F00-BDE5-63B0F2BBFD5D}"/>
+              </a:ext>
+            </a:extLst>
+          </p:cNvPr>
+          <p:cNvSpPr>
+            <a:spLocks xmlns:a="http://schemas.openxmlformats.org/drawingml/2006/main" noGrp="1"/>
+          </p:cNvSpPr>
+          <p:nvPr/>
+        </p:nvSpPr>
+        <p:spPr>
+          <a:xfrm xmlns:a="http://schemas.openxmlformats.org/drawingml/2006/main">
+            <a:off x="9105900" y="2209800"/>
+            <a:ext cx="2095500" cy="361950"/>
           </a:xfrm>
           <a:prstGeom xmlns:a="http://schemas.openxmlformats.org/drawingml/2006/main" prst="rect">
             <a:avLst/>
@@ -7206,47 +7261,47 @@
           <a:p xmlns:a="http://schemas.openxmlformats.org/drawingml/2006/main">
             <a:pPr algn="l">
               <a:buNone/>
-              <a:defRPr sz="1125" b="1">
-                <a:solidFill>
-                  <a:srgbClr val="E9652E"/>
-                </a:solidFill>
-                <a:latin typeface="Arial"/>
-                <a:ea typeface="Arial"/>
-                <a:cs typeface="Arial"/>
-              </a:defRPr>
-            </a:pPr>
-            <a:r>
-              <a:rPr sz="975" b="1">
-                <a:solidFill>
-                  <a:srgbClr val="F19A68"/>
+              <a:defRPr sz="1650" b="1">
+                <a:solidFill>
+                  <a:srgbClr val="171714"/>
+                </a:solidFill>
+                <a:latin typeface="Arial"/>
+                <a:ea typeface="Arial"/>
+                <a:cs typeface="Arial"/>
+              </a:defRPr>
+            </a:pPr>
+            <a:r>
+              <a:rPr sz="1200" b="1">
+                <a:solidFill>
+                  <a:srgbClr val="F1E9DC"/>
                 </a:solidFill>
                 <a:latin typeface="Menlo"/>
                 <a:ea typeface="Menlo"/>
                 <a:cs typeface="Menlo"/>
               </a:rPr>
-              <a:t>04</a:t>
-            </a:r>
-          </a:p>
-        </p:txBody>
-      </p:sp>
-      <p:sp>
-        <p:nvSpPr>
-          <p:cNvPr id="22" name="">
-            <a:extLst xmlns:a="http://schemas.openxmlformats.org/drawingml/2006/main">
-              <a:ext uri="{FF2B5EF4-FFF2-40B4-BE49-F238E27FC236}">
-                <a16:creationId xmlns:a16="http://schemas.microsoft.com/office/drawing/2014/main" id="{6873C54B-FFF0-4F00-BDE5-63B0F2BBFD5D}"/>
-              </a:ext>
-            </a:extLst>
-          </p:cNvPr>
-          <p:cNvSpPr>
-            <a:spLocks xmlns:a="http://schemas.openxmlformats.org/drawingml/2006/main" noGrp="1"/>
-          </p:cNvSpPr>
-          <p:nvPr/>
-        </p:nvSpPr>
-        <p:spPr>
-          <a:xfrm xmlns:a="http://schemas.openxmlformats.org/drawingml/2006/main">
-            <a:off x="9105900" y="2381250"/>
-            <a:ext cx="2095500" cy="323850"/>
+              <a:t>DELEGATE</a:t>
+            </a:r>
+          </a:p>
+        </p:txBody>
+      </p:sp>
+      <p:sp>
+        <p:nvSpPr>
+          <p:cNvPr id="23" name="">
+            <a:extLst xmlns:a="http://schemas.openxmlformats.org/drawingml/2006/main">
+              <a:ext uri="{FF2B5EF4-FFF2-40B4-BE49-F238E27FC236}">
+                <a16:creationId xmlns:a16="http://schemas.microsoft.com/office/drawing/2014/main" id="{BE478932-5C70-48E0-9539-698D55629580}"/>
+              </a:ext>
+            </a:extLst>
+          </p:cNvPr>
+          <p:cNvSpPr>
+            <a:spLocks xmlns:a="http://schemas.openxmlformats.org/drawingml/2006/main" noGrp="1"/>
+          </p:cNvSpPr>
+          <p:nvPr/>
+        </p:nvSpPr>
+        <p:spPr>
+          <a:xfrm xmlns:a="http://schemas.openxmlformats.org/drawingml/2006/main">
+            <a:off x="9105900" y="2781300"/>
+            <a:ext cx="2095500" cy="685800"/>
           </a:xfrm>
           <a:prstGeom xmlns:a="http://schemas.openxmlformats.org/drawingml/2006/main" prst="rect">
             <a:avLst/>
@@ -7265,65 +7320,6 @@
           <a:p xmlns:a="http://schemas.openxmlformats.org/drawingml/2006/main">
             <a:pPr algn="l">
               <a:buNone/>
-              <a:defRPr sz="1650" b="1">
-                <a:solidFill>
-                  <a:srgbClr val="171714"/>
-                </a:solidFill>
-                <a:latin typeface="Arial"/>
-                <a:ea typeface="Arial"/>
-                <a:cs typeface="Arial"/>
-              </a:defRPr>
-            </a:pPr>
-            <a:r>
-              <a:rPr sz="1500" b="1">
-                <a:solidFill>
-                  <a:srgbClr val="F1E9DC"/>
-                </a:solidFill>
-                <a:latin typeface="Arial"/>
-                <a:ea typeface="Arial"/>
-                <a:cs typeface="Arial"/>
-              </a:rPr>
-              <a:t>DELEGATE</a:t>
-            </a:r>
-          </a:p>
-        </p:txBody>
-      </p:sp>
-      <p:sp>
-        <p:nvSpPr>
-          <p:cNvPr id="23" name="">
-            <a:extLst xmlns:a="http://schemas.openxmlformats.org/drawingml/2006/main">
-              <a:ext uri="{FF2B5EF4-FFF2-40B4-BE49-F238E27FC236}">
-                <a16:creationId xmlns:a16="http://schemas.microsoft.com/office/drawing/2014/main" id="{BE478932-5C70-48E0-9539-698D55629580}"/>
-              </a:ext>
-            </a:extLst>
-          </p:cNvPr>
-          <p:cNvSpPr>
-            <a:spLocks xmlns:a="http://schemas.openxmlformats.org/drawingml/2006/main" noGrp="1"/>
-          </p:cNvSpPr>
-          <p:nvPr/>
-        </p:nvSpPr>
-        <p:spPr>
-          <a:xfrm xmlns:a="http://schemas.openxmlformats.org/drawingml/2006/main">
-            <a:off x="9105900" y="2895600"/>
-            <a:ext cx="2095500" cy="685800"/>
-          </a:xfrm>
-          <a:prstGeom xmlns:a="http://schemas.openxmlformats.org/drawingml/2006/main" prst="rect">
-            <a:avLst/>
-          </a:prstGeom>
-          <a:noFill xmlns:a="http://schemas.openxmlformats.org/drawingml/2006/main"/>
-          <a:ln xmlns:a="http://schemas.openxmlformats.org/drawingml/2006/main" w="0">
-            <a:noFill/>
-            <a:prstDash val="solid"/>
-          </a:ln>
-        </p:spPr>
-        <p:txBody>
-          <a:bodyPr xmlns:a="http://schemas.openxmlformats.org/drawingml/2006/main" anchor="t">
-            <a:normAutofit fontScale="100000"/>
-          </a:bodyPr>
-          <a:lstStyle xmlns:a="http://schemas.openxmlformats.org/drawingml/2006/main"/>
-          <a:p xmlns:a="http://schemas.openxmlformats.org/drawingml/2006/main">
-            <a:pPr algn="l">
-              <a:buNone/>
               <a:defRPr sz="1425" b="0">
                 <a:solidFill>
                   <a:srgbClr val="686863"/>
@@ -7334,7 +7330,7 @@
               </a:defRPr>
             </a:pPr>
             <a:r>
-              <a:rPr sz="1275" b="0">
+              <a:rPr sz="1200" b="0">
                 <a:solidFill>
                   <a:srgbClr val="9C9183"/>
                 </a:solidFill>
@@ -7358,7 +7354,7 @@
               </a:defRPr>
             </a:pPr>
             <a:r>
-              <a:rPr sz="1275" b="0">
+              <a:rPr sz="1200" b="0">
                 <a:solidFill>
                   <a:srgbClr val="9C9183"/>
                 </a:solidFill>
@@ -7387,8 +7383,8 @@
         </p:nvSpPr>
         <p:spPr>
           <a:xfrm xmlns:a="http://schemas.openxmlformats.org/drawingml/2006/main">
-            <a:off x="400050" y="4267200"/>
-            <a:ext cx="11391900" cy="1314450"/>
+            <a:off x="400050" y="4324350"/>
+            <a:ext cx="11391900" cy="19050"/>
           </a:xfrm>
           <a:prstGeom xmlns:a="http://schemas.openxmlformats.org/drawingml/2006/main" prst="roundRect">
             <a:avLst>
@@ -7396,9 +7392,9 @@
             </a:avLst>
           </a:prstGeom>
           <a:solidFill xmlns:a="http://schemas.openxmlformats.org/drawingml/2006/main">
-            <a:srgbClr val="19150F"/>
+            <a:srgbClr val="6B5F50"/>
           </a:solidFill>
-          <a:ln xmlns:a="http://schemas.openxmlformats.org/drawingml/2006/main" w="9525">
+          <a:ln xmlns:a="http://schemas.openxmlformats.org/drawingml/2006/main" w="0">
             <a:solidFill>
               <a:srgbClr val="6B5F50"/>
             </a:solidFill>
@@ -7495,7 +7491,7 @@
         </p:spPr>
         <p:txBody>
           <a:bodyPr xmlns:a="http://schemas.openxmlformats.org/drawingml/2006/main" anchor="t">
-            <a:normAutofit fontScale="91667"/>
+            <a:normAutofit fontScale="100000"/>
           </a:bodyPr>
           <a:lstStyle xmlns:a="http://schemas.openxmlformats.org/drawingml/2006/main"/>
           <a:p xmlns:a="http://schemas.openxmlformats.org/drawingml/2006/main">
@@ -7511,9 +7507,9 @@
               </a:defRPr>
             </a:pPr>
             <a:r>
-              <a:rPr sz="1800" b="1">
-                <a:solidFill>
-                  <a:srgbClr val="E8793D"/>
+              <a:rPr sz="1350" b="0">
+                <a:solidFill>
+                  <a:srgbClr val="6B5F50"/>
                 </a:solidFill>
                 <a:latin typeface="Arial"/>
                 <a:ea typeface="Arial"/>
@@ -7898,7 +7894,7 @@
         <p:spPr>
           <a:xfrm xmlns:a="http://schemas.openxmlformats.org/drawingml/2006/main">
             <a:off x="400050" y="1790700"/>
-            <a:ext cx="2038350" cy="2247900"/>
+            <a:ext cx="2038350" cy="9525"/>
           </a:xfrm>
           <a:prstGeom xmlns:a="http://schemas.openxmlformats.org/drawingml/2006/main" prst="roundRect">
             <a:avLst>
@@ -7906,9 +7902,9 @@
             </a:avLst>
           </a:prstGeom>
           <a:solidFill xmlns:a="http://schemas.openxmlformats.org/drawingml/2006/main">
-            <a:srgbClr val="14110D"/>
+            <a:srgbClr val="6B5F50"/>
           </a:solidFill>
-          <a:ln xmlns:a="http://schemas.openxmlformats.org/drawingml/2006/main" w="9525">
+          <a:ln xmlns:a="http://schemas.openxmlformats.org/drawingml/2006/main" w="0">
             <a:solidFill>
               <a:srgbClr val="6B5F50"/>
             </a:solidFill>
@@ -8021,13 +8017,13 @@
               </a:defRPr>
             </a:pPr>
             <a:r>
-              <a:rPr sz="1500" b="1">
+              <a:rPr sz="1425" b="0">
                 <a:solidFill>
                   <a:srgbClr val="F1E9DC"/>
                 </a:solidFill>
-                <a:latin typeface="Arial"/>
-                <a:ea typeface="Arial"/>
-                <a:cs typeface="Arial"/>
+                <a:latin typeface="Georgia"/>
+                <a:ea typeface="Georgia"/>
+                <a:cs typeface="Georgia"/>
               </a:rPr>
               <a:t>Evidence + sources</a:t>
             </a:r>
@@ -8045,13 +8041,13 @@
               </a:defRPr>
             </a:pPr>
             <a:r>
-              <a:rPr sz="1500" b="1">
+              <a:rPr sz="1425" b="0">
                 <a:solidFill>
                   <a:srgbClr val="F1E9DC"/>
                 </a:solidFill>
-                <a:latin typeface="Arial"/>
-                <a:ea typeface="Arial"/>
-                <a:cs typeface="Arial"/>
+                <a:latin typeface="Georgia"/>
+                <a:ea typeface="Georgia"/>
+                <a:cs typeface="Georgia"/>
               </a:rPr>
               <a:t>threat registry</a:t>
             </a:r>
@@ -8134,7 +8130,7 @@
         <p:spPr>
           <a:xfrm xmlns:a="http://schemas.openxmlformats.org/drawingml/2006/main">
             <a:off x="2705100" y="1790700"/>
-            <a:ext cx="2038350" cy="2247900"/>
+            <a:ext cx="2038350" cy="9525"/>
           </a:xfrm>
           <a:prstGeom xmlns:a="http://schemas.openxmlformats.org/drawingml/2006/main" prst="roundRect">
             <a:avLst>
@@ -8142,9 +8138,9 @@
             </a:avLst>
           </a:prstGeom>
           <a:solidFill xmlns:a="http://schemas.openxmlformats.org/drawingml/2006/main">
-            <a:srgbClr val="14110D"/>
+            <a:srgbClr val="6B5F50"/>
           </a:solidFill>
-          <a:ln xmlns:a="http://schemas.openxmlformats.org/drawingml/2006/main" w="9525">
+          <a:ln xmlns:a="http://schemas.openxmlformats.org/drawingml/2006/main" w="0">
             <a:solidFill>
               <a:srgbClr val="6B5F50"/>
             </a:solidFill>
@@ -8257,13 +8253,13 @@
               </a:defRPr>
             </a:pPr>
             <a:r>
-              <a:rPr sz="1500" b="1">
+              <a:rPr sz="1425" b="0">
                 <a:solidFill>
                   <a:srgbClr val="F1E9DC"/>
                 </a:solidFill>
-                <a:latin typeface="Arial"/>
-                <a:ea typeface="Arial"/>
-                <a:cs typeface="Arial"/>
+                <a:latin typeface="Georgia"/>
+                <a:ea typeface="Georgia"/>
+                <a:cs typeface="Georgia"/>
               </a:rPr>
               <a:t>Rail + ledger-correct</a:t>
             </a:r>
@@ -8281,13 +8277,13 @@
               </a:defRPr>
             </a:pPr>
             <a:r>
-              <a:rPr sz="1500" b="1">
+              <a:rPr sz="1425" b="0">
                 <a:solidFill>
                   <a:srgbClr val="F1E9DC"/>
                 </a:solidFill>
-                <a:latin typeface="Arial"/>
-                <a:ea typeface="Arial"/>
-                <a:cs typeface="Arial"/>
+                <a:latin typeface="Georgia"/>
+                <a:ea typeface="Georgia"/>
+                <a:cs typeface="Georgia"/>
               </a:rPr>
               <a:t>campaigns</a:t>
             </a:r>
@@ -8370,7 +8366,7 @@
         <p:spPr>
           <a:xfrm xmlns:a="http://schemas.openxmlformats.org/drawingml/2006/main">
             <a:off x="5010150" y="1790700"/>
-            <a:ext cx="2038350" cy="2247900"/>
+            <a:ext cx="2038350" cy="28575"/>
           </a:xfrm>
           <a:prstGeom xmlns:a="http://schemas.openxmlformats.org/drawingml/2006/main" prst="roundRect">
             <a:avLst>
@@ -8378,9 +8374,9 @@
             </a:avLst>
           </a:prstGeom>
           <a:solidFill xmlns:a="http://schemas.openxmlformats.org/drawingml/2006/main">
-            <a:srgbClr val="20382A"/>
+            <a:srgbClr val="75B78E"/>
           </a:solidFill>
-          <a:ln xmlns:a="http://schemas.openxmlformats.org/drawingml/2006/main" w="19050">
+          <a:ln xmlns:a="http://schemas.openxmlformats.org/drawingml/2006/main" w="0">
             <a:solidFill>
               <a:srgbClr val="75B78E"/>
             </a:solidFill>
@@ -8493,13 +8489,13 @@
               </a:defRPr>
             </a:pPr>
             <a:r>
-              <a:rPr sz="1500" b="1">
+              <a:rPr sz="1425" b="0">
                 <a:solidFill>
                   <a:srgbClr val="F1E9DC"/>
                 </a:solidFill>
-                <a:latin typeface="Arial"/>
-                <a:ea typeface="Arial"/>
-                <a:cs typeface="Arial"/>
+                <a:latin typeface="Georgia"/>
+                <a:ea typeface="Georgia"/>
+                <a:cs typeface="Georgia"/>
               </a:rPr>
               <a:t>Rules + calibrated</a:t>
             </a:r>
@@ -8517,13 +8513,13 @@
               </a:defRPr>
             </a:pPr>
             <a:r>
-              <a:rPr sz="1500" b="1">
+              <a:rPr sz="1425" b="0">
                 <a:solidFill>
                   <a:srgbClr val="F1E9DC"/>
                 </a:solidFill>
-                <a:latin typeface="Arial"/>
-                <a:ea typeface="Arial"/>
-                <a:cs typeface="Arial"/>
+                <a:latin typeface="Georgia"/>
+                <a:ea typeface="Georgia"/>
+                <a:cs typeface="Georgia"/>
               </a:rPr>
               <a:t>graph ensemble</a:t>
             </a:r>
@@ -8606,7 +8602,7 @@
         <p:spPr>
           <a:xfrm xmlns:a="http://schemas.openxmlformats.org/drawingml/2006/main">
             <a:off x="7315200" y="1790700"/>
-            <a:ext cx="2038350" cy="2247900"/>
+            <a:ext cx="2038350" cy="9525"/>
           </a:xfrm>
           <a:prstGeom xmlns:a="http://schemas.openxmlformats.org/drawingml/2006/main" prst="roundRect">
             <a:avLst>
@@ -8614,9 +8610,9 @@
             </a:avLst>
           </a:prstGeom>
           <a:solidFill xmlns:a="http://schemas.openxmlformats.org/drawingml/2006/main">
-            <a:srgbClr val="14110D"/>
+            <a:srgbClr val="6B5F50"/>
           </a:solidFill>
-          <a:ln xmlns:a="http://schemas.openxmlformats.org/drawingml/2006/main" w="9525">
+          <a:ln xmlns:a="http://schemas.openxmlformats.org/drawingml/2006/main" w="0">
             <a:solidFill>
               <a:srgbClr val="6B5F50"/>
             </a:solidFill>
@@ -8729,13 +8725,13 @@
               </a:defRPr>
             </a:pPr>
             <a:r>
-              <a:rPr sz="1500" b="1">
+              <a:rPr sz="1425" b="0">
                 <a:solidFill>
                   <a:srgbClr val="F1E9DC"/>
                 </a:solidFill>
-                <a:latin typeface="Arial"/>
-                <a:ea typeface="Arial"/>
-                <a:cs typeface="Arial"/>
+                <a:latin typeface="Georgia"/>
+                <a:ea typeface="Georgia"/>
+                <a:cs typeface="Georgia"/>
               </a:rPr>
               <a:t>Identity + intent</a:t>
             </a:r>
@@ -8753,13 +8749,13 @@
               </a:defRPr>
             </a:pPr>
             <a:r>
-              <a:rPr sz="1500" b="1">
+              <a:rPr sz="1425" b="0">
                 <a:solidFill>
                   <a:srgbClr val="F1E9DC"/>
                 </a:solidFill>
-                <a:latin typeface="Arial"/>
-                <a:ea typeface="Arial"/>
-                <a:cs typeface="Arial"/>
+                <a:latin typeface="Georgia"/>
+                <a:ea typeface="Georgia"/>
+                <a:cs typeface="Georgia"/>
               </a:rPr>
               <a:t>integrity</a:t>
             </a:r>
@@ -8842,7 +8838,7 @@
         <p:spPr>
           <a:xfrm xmlns:a="http://schemas.openxmlformats.org/drawingml/2006/main">
             <a:off x="9620250" y="1790700"/>
-            <a:ext cx="2038350" cy="2247900"/>
+            <a:ext cx="2038350" cy="9525"/>
           </a:xfrm>
           <a:prstGeom xmlns:a="http://schemas.openxmlformats.org/drawingml/2006/main" prst="roundRect">
             <a:avLst>
@@ -8850,9 +8846,9 @@
             </a:avLst>
           </a:prstGeom>
           <a:solidFill xmlns:a="http://schemas.openxmlformats.org/drawingml/2006/main">
-            <a:srgbClr val="14110D"/>
+            <a:srgbClr val="6B5F50"/>
           </a:solidFill>
-          <a:ln xmlns:a="http://schemas.openxmlformats.org/drawingml/2006/main" w="9525">
+          <a:ln xmlns:a="http://schemas.openxmlformats.org/drawingml/2006/main" w="0">
             <a:solidFill>
               <a:srgbClr val="6B5F50"/>
             </a:solidFill>
@@ -8965,13 +8961,13 @@
               </a:defRPr>
             </a:pPr>
             <a:r>
-              <a:rPr sz="1500" b="1">
+              <a:rPr sz="1425" b="0">
                 <a:solidFill>
                   <a:srgbClr val="F1E9DC"/>
                 </a:solidFill>
-                <a:latin typeface="Arial"/>
-                <a:ea typeface="Arial"/>
-                <a:cs typeface="Arial"/>
+                <a:latin typeface="Georgia"/>
+                <a:ea typeface="Georgia"/>
+                <a:cs typeface="Georgia"/>
               </a:rPr>
               <a:t>Controls + human</a:t>
             </a:r>
@@ -8989,13 +8985,13 @@
               </a:defRPr>
             </a:pPr>
             <a:r>
-              <a:rPr sz="1500" b="1">
+              <a:rPr sz="1425" b="0">
                 <a:solidFill>
                   <a:srgbClr val="F1E9DC"/>
                 </a:solidFill>
-                <a:latin typeface="Arial"/>
-                <a:ea typeface="Arial"/>
-                <a:cs typeface="Arial"/>
+                <a:latin typeface="Georgia"/>
+                <a:ea typeface="Georgia"/>
+                <a:cs typeface="Georgia"/>
               </a:rPr>
               <a:t>promotion</a:t>
             </a:r>
@@ -9018,8 +9014,8 @@
         </p:nvSpPr>
         <p:spPr>
           <a:xfrm xmlns:a="http://schemas.openxmlformats.org/drawingml/2006/main">
-            <a:off x="1390650" y="4591050"/>
-            <a:ext cx="9410700" cy="28575"/>
+            <a:off x="1390650" y="4600575"/>
+            <a:ext cx="9410700" cy="9525"/>
           </a:xfrm>
           <a:prstGeom xmlns:a="http://schemas.openxmlformats.org/drawingml/2006/main" prst="rect">
             <a:avLst/>
@@ -9051,8 +9047,8 @@
         </p:nvSpPr>
         <p:spPr>
           <a:xfrm xmlns:a="http://schemas.openxmlformats.org/drawingml/2006/main">
-            <a:off x="1323975" y="4524375"/>
-            <a:ext cx="161925" cy="161925"/>
+            <a:off x="1362075" y="4562475"/>
+            <a:ext cx="85725" cy="85725"/>
           </a:xfrm>
           <a:prstGeom xmlns:a="http://schemas.openxmlformats.org/drawingml/2006/main" prst="ellipse">
             <a:avLst/>
@@ -9084,8 +9080,8 @@
         </p:nvSpPr>
         <p:spPr>
           <a:xfrm xmlns:a="http://schemas.openxmlformats.org/drawingml/2006/main">
-            <a:off x="3629025" y="4524375"/>
-            <a:ext cx="161925" cy="161925"/>
+            <a:off x="3667125" y="4562475"/>
+            <a:ext cx="85725" cy="85725"/>
           </a:xfrm>
           <a:prstGeom xmlns:a="http://schemas.openxmlformats.org/drawingml/2006/main" prst="ellipse">
             <a:avLst/>
@@ -9117,8 +9113,8 @@
         </p:nvSpPr>
         <p:spPr>
           <a:xfrm xmlns:a="http://schemas.openxmlformats.org/drawingml/2006/main">
-            <a:off x="5934075" y="4524375"/>
-            <a:ext cx="161925" cy="161925"/>
+            <a:off x="5972175" y="4562475"/>
+            <a:ext cx="85725" cy="85725"/>
           </a:xfrm>
           <a:prstGeom xmlns:a="http://schemas.openxmlformats.org/drawingml/2006/main" prst="ellipse">
             <a:avLst/>
@@ -9150,8 +9146,8 @@
         </p:nvSpPr>
         <p:spPr>
           <a:xfrm xmlns:a="http://schemas.openxmlformats.org/drawingml/2006/main">
-            <a:off x="8239125" y="4524375"/>
-            <a:ext cx="161925" cy="161925"/>
+            <a:off x="8277225" y="4562475"/>
+            <a:ext cx="85725" cy="85725"/>
           </a:xfrm>
           <a:prstGeom xmlns:a="http://schemas.openxmlformats.org/drawingml/2006/main" prst="ellipse">
             <a:avLst/>
@@ -9183,18 +9179,18 @@
         </p:nvSpPr>
         <p:spPr>
           <a:xfrm xmlns:a="http://schemas.openxmlformats.org/drawingml/2006/main">
-            <a:off x="10544175" y="4524375"/>
-            <a:ext cx="161925" cy="161925"/>
+            <a:off x="10582275" y="4562475"/>
+            <a:ext cx="85725" cy="85725"/>
           </a:xfrm>
           <a:prstGeom xmlns:a="http://schemas.openxmlformats.org/drawingml/2006/main" prst="ellipse">
             <a:avLst/>
           </a:prstGeom>
           <a:solidFill xmlns:a="http://schemas.openxmlformats.org/drawingml/2006/main">
-            <a:srgbClr val="E8793D"/>
+            <a:srgbClr val="75B78E"/>
           </a:solidFill>
           <a:ln xmlns:a="http://schemas.openxmlformats.org/drawingml/2006/main" w="0">
             <a:solidFill>
-              <a:srgbClr val="E8793D"/>
+              <a:srgbClr val="75B78E"/>
             </a:solidFill>
             <a:prstDash val="solid"/>
           </a:ln>
@@ -9548,7 +9544,7 @@
         <p:spPr>
           <a:xfrm xmlns:a="http://schemas.openxmlformats.org/drawingml/2006/main">
             <a:off x="552450" y="1581150"/>
-            <a:ext cx="2000250" cy="1371600"/>
+            <a:ext cx="19050" cy="1371600"/>
           </a:xfrm>
           <a:prstGeom xmlns:a="http://schemas.openxmlformats.org/drawingml/2006/main" prst="roundRect">
             <a:avLst>
@@ -9556,9 +9552,9 @@
             </a:avLst>
           </a:prstGeom>
           <a:solidFill xmlns:a="http://schemas.openxmlformats.org/drawingml/2006/main">
-            <a:srgbClr val="14110D"/>
+            <a:srgbClr val="6B5F50"/>
           </a:solidFill>
-          <a:ln xmlns:a="http://schemas.openxmlformats.org/drawingml/2006/main" w="9525">
+          <a:ln xmlns:a="http://schemas.openxmlformats.org/drawingml/2006/main" w="0">
             <a:solidFill>
               <a:srgbClr val="6B5F50"/>
             </a:solidFill>
@@ -9596,7 +9592,7 @@
         </p:spPr>
         <p:txBody>
           <a:bodyPr xmlns:a="http://schemas.openxmlformats.org/drawingml/2006/main" anchor="t">
-            <a:normAutofit fontScale="100000"/>
+            <a:normAutofit fontScale="66667"/>
           </a:bodyPr>
           <a:lstStyle xmlns:a="http://schemas.openxmlformats.org/drawingml/2006/main"/>
           <a:p xmlns:a="http://schemas.openxmlformats.org/drawingml/2006/main">
@@ -9612,13 +9608,13 @@
               </a:defRPr>
             </a:pPr>
             <a:r>
-              <a:rPr sz="900" b="1">
+              <a:rPr sz="1350" b="0">
                 <a:solidFill>
                   <a:srgbClr val="F19A68"/>
                 </a:solidFill>
-                <a:latin typeface="Menlo"/>
-                <a:ea typeface="Menlo"/>
-                <a:cs typeface="Menlo"/>
+                <a:latin typeface="Georgia"/>
+                <a:ea typeface="Georgia"/>
+                <a:cs typeface="Georgia"/>
               </a:rPr>
               <a:t>V1</a:t>
             </a:r>
@@ -9655,7 +9651,7 @@
         </p:spPr>
         <p:txBody>
           <a:bodyPr xmlns:a="http://schemas.openxmlformats.org/drawingml/2006/main" anchor="t">
-            <a:normAutofit fontScale="99015"/>
+            <a:normAutofit fontScale="100000"/>
           </a:bodyPr>
           <a:lstStyle xmlns:a="http://schemas.openxmlformats.org/drawingml/2006/main"/>
           <a:p xmlns:a="http://schemas.openxmlformats.org/drawingml/2006/main">
@@ -9671,13 +9667,13 @@
               </a:defRPr>
             </a:pPr>
             <a:r>
-              <a:rPr sz="1275" b="1">
+              <a:rPr sz="1275" b="0">
                 <a:solidFill>
                   <a:srgbClr val="F1E9DC"/>
                 </a:solidFill>
-                <a:latin typeface="Arial"/>
-                <a:ea typeface="Arial"/>
-                <a:cs typeface="Arial"/>
+                <a:latin typeface="Georgia"/>
+                <a:ea typeface="Georgia"/>
+                <a:cs typeface="Georgia"/>
               </a:rPr>
               <a:t>Workload cap failed</a:t>
             </a:r>
@@ -9783,8 +9779,8 @@
         </p:nvSpPr>
         <p:spPr>
           <a:xfrm xmlns:a="http://schemas.openxmlformats.org/drawingml/2006/main">
-            <a:off x="1476375" y="2924175"/>
-            <a:ext cx="171450" cy="171450"/>
+            <a:off x="1514475" y="2962275"/>
+            <a:ext cx="95250" cy="95250"/>
           </a:xfrm>
           <a:prstGeom xmlns:a="http://schemas.openxmlformats.org/drawingml/2006/main" prst="ellipse">
             <a:avLst/>
@@ -9792,9 +9788,9 @@
           <a:solidFill xmlns:a="http://schemas.openxmlformats.org/drawingml/2006/main">
             <a:srgbClr val="E8793D"/>
           </a:solidFill>
-          <a:ln xmlns:a="http://schemas.openxmlformats.org/drawingml/2006/main" w="19050">
+          <a:ln xmlns:a="http://schemas.openxmlformats.org/drawingml/2006/main" w="0">
             <a:solidFill>
-              <a:srgbClr val="0A0907"/>
+              <a:srgbClr val="E8793D"/>
             </a:solidFill>
             <a:prstDash val="solid"/>
           </a:ln>
@@ -9817,7 +9813,7 @@
         <p:spPr>
           <a:xfrm xmlns:a="http://schemas.openxmlformats.org/drawingml/2006/main">
             <a:off x="2800350" y="3314700"/>
-            <a:ext cx="2000250" cy="1371600"/>
+            <a:ext cx="19050" cy="1371600"/>
           </a:xfrm>
           <a:prstGeom xmlns:a="http://schemas.openxmlformats.org/drawingml/2006/main" prst="roundRect">
             <a:avLst>
@@ -9825,9 +9821,9 @@
             </a:avLst>
           </a:prstGeom>
           <a:solidFill xmlns:a="http://schemas.openxmlformats.org/drawingml/2006/main">
-            <a:srgbClr val="14110D"/>
+            <a:srgbClr val="6B5F50"/>
           </a:solidFill>
-          <a:ln xmlns:a="http://schemas.openxmlformats.org/drawingml/2006/main" w="9525">
+          <a:ln xmlns:a="http://schemas.openxmlformats.org/drawingml/2006/main" w="0">
             <a:solidFill>
               <a:srgbClr val="6B5F50"/>
             </a:solidFill>
@@ -9865,7 +9861,7 @@
         </p:spPr>
         <p:txBody>
           <a:bodyPr xmlns:a="http://schemas.openxmlformats.org/drawingml/2006/main" anchor="t">
-            <a:normAutofit fontScale="100000"/>
+            <a:normAutofit fontScale="66667"/>
           </a:bodyPr>
           <a:lstStyle xmlns:a="http://schemas.openxmlformats.org/drawingml/2006/main"/>
           <a:p xmlns:a="http://schemas.openxmlformats.org/drawingml/2006/main">
@@ -9881,13 +9877,13 @@
               </a:defRPr>
             </a:pPr>
             <a:r>
-              <a:rPr sz="900" b="1">
+              <a:rPr sz="1350" b="0">
                 <a:solidFill>
                   <a:srgbClr val="F19A68"/>
                 </a:solidFill>
-                <a:latin typeface="Menlo"/>
-                <a:ea typeface="Menlo"/>
-                <a:cs typeface="Menlo"/>
+                <a:latin typeface="Georgia"/>
+                <a:ea typeface="Georgia"/>
+                <a:cs typeface="Georgia"/>
               </a:rPr>
               <a:t>V4</a:t>
             </a:r>
@@ -9924,7 +9920,7 @@
         </p:spPr>
         <p:txBody>
           <a:bodyPr xmlns:a="http://schemas.openxmlformats.org/drawingml/2006/main" anchor="t">
-            <a:normAutofit fontScale="69608"/>
+            <a:normAutofit fontScale="73650"/>
           </a:bodyPr>
           <a:lstStyle xmlns:a="http://schemas.openxmlformats.org/drawingml/2006/main"/>
           <a:p xmlns:a="http://schemas.openxmlformats.org/drawingml/2006/main">
@@ -9940,13 +9936,13 @@
               </a:defRPr>
             </a:pPr>
             <a:r>
-              <a:rPr sz="1275" b="1">
+              <a:rPr sz="1275" b="0">
                 <a:solidFill>
                   <a:srgbClr val="F1E9DC"/>
                 </a:solidFill>
-                <a:latin typeface="Arial"/>
-                <a:ea typeface="Arial"/>
-                <a:cs typeface="Arial"/>
+                <a:latin typeface="Georgia"/>
+                <a:ea typeface="Georgia"/>
+                <a:cs typeface="Georgia"/>
               </a:rPr>
               <a:t>Missing metrics failed closed</a:t>
             </a:r>
@@ -10052,8 +10048,8 @@
         </p:nvSpPr>
         <p:spPr>
           <a:xfrm xmlns:a="http://schemas.openxmlformats.org/drawingml/2006/main">
-            <a:off x="3724275" y="2924175"/>
-            <a:ext cx="171450" cy="171450"/>
+            <a:off x="3762375" y="2962275"/>
+            <a:ext cx="95250" cy="95250"/>
           </a:xfrm>
           <a:prstGeom xmlns:a="http://schemas.openxmlformats.org/drawingml/2006/main" prst="ellipse">
             <a:avLst/>
@@ -10061,9 +10057,9 @@
           <a:solidFill xmlns:a="http://schemas.openxmlformats.org/drawingml/2006/main">
             <a:srgbClr val="E8793D"/>
           </a:solidFill>
-          <a:ln xmlns:a="http://schemas.openxmlformats.org/drawingml/2006/main" w="19050">
+          <a:ln xmlns:a="http://schemas.openxmlformats.org/drawingml/2006/main" w="0">
             <a:solidFill>
-              <a:srgbClr val="0A0907"/>
+              <a:srgbClr val="E8793D"/>
             </a:solidFill>
             <a:prstDash val="solid"/>
           </a:ln>
@@ -10086,7 +10082,7 @@
         <p:spPr>
           <a:xfrm xmlns:a="http://schemas.openxmlformats.org/drawingml/2006/main">
             <a:off x="5048250" y="1581150"/>
-            <a:ext cx="2000250" cy="1371600"/>
+            <a:ext cx="19050" cy="1371600"/>
           </a:xfrm>
           <a:prstGeom xmlns:a="http://schemas.openxmlformats.org/drawingml/2006/main" prst="roundRect">
             <a:avLst>
@@ -10094,9 +10090,9 @@
             </a:avLst>
           </a:prstGeom>
           <a:solidFill xmlns:a="http://schemas.openxmlformats.org/drawingml/2006/main">
-            <a:srgbClr val="14110D"/>
+            <a:srgbClr val="6B5F50"/>
           </a:solidFill>
-          <a:ln xmlns:a="http://schemas.openxmlformats.org/drawingml/2006/main" w="9525">
+          <a:ln xmlns:a="http://schemas.openxmlformats.org/drawingml/2006/main" w="0">
             <a:solidFill>
               <a:srgbClr val="6B5F50"/>
             </a:solidFill>
@@ -10134,7 +10130,7 @@
         </p:spPr>
         <p:txBody>
           <a:bodyPr xmlns:a="http://schemas.openxmlformats.org/drawingml/2006/main" anchor="t">
-            <a:normAutofit fontScale="100000"/>
+            <a:normAutofit fontScale="66667"/>
           </a:bodyPr>
           <a:lstStyle xmlns:a="http://schemas.openxmlformats.org/drawingml/2006/main"/>
           <a:p xmlns:a="http://schemas.openxmlformats.org/drawingml/2006/main">
@@ -10150,13 +10146,13 @@
               </a:defRPr>
             </a:pPr>
             <a:r>
-              <a:rPr sz="900" b="1">
+              <a:rPr sz="1350" b="0">
                 <a:solidFill>
                   <a:srgbClr val="F19A68"/>
                 </a:solidFill>
-                <a:latin typeface="Menlo"/>
-                <a:ea typeface="Menlo"/>
-                <a:cs typeface="Menlo"/>
+                <a:latin typeface="Georgia"/>
+                <a:ea typeface="Georgia"/>
+                <a:cs typeface="Georgia"/>
               </a:rPr>
               <a:t>V5a</a:t>
             </a:r>
@@ -10193,7 +10189,7 @@
         </p:spPr>
         <p:txBody>
           <a:bodyPr xmlns:a="http://schemas.openxmlformats.org/drawingml/2006/main" anchor="t">
-            <a:normAutofit fontScale="89050"/>
+            <a:normAutofit fontScale="98815"/>
           </a:bodyPr>
           <a:lstStyle xmlns:a="http://schemas.openxmlformats.org/drawingml/2006/main"/>
           <a:p xmlns:a="http://schemas.openxmlformats.org/drawingml/2006/main">
@@ -10209,13 +10205,13 @@
               </a:defRPr>
             </a:pPr>
             <a:r>
-              <a:rPr sz="1275" b="1">
+              <a:rPr sz="1275" b="0">
                 <a:solidFill>
                   <a:srgbClr val="F1E9DC"/>
                 </a:solidFill>
-                <a:latin typeface="Arial"/>
-                <a:ea typeface="Arial"/>
-                <a:cs typeface="Arial"/>
+                <a:latin typeface="Georgia"/>
+                <a:ea typeface="Georgia"/>
+                <a:cs typeface="Georgia"/>
               </a:rPr>
               <a:t>Perfect score rejected</a:t>
             </a:r>
@@ -10321,8 +10317,8 @@
         </p:nvSpPr>
         <p:spPr>
           <a:xfrm xmlns:a="http://schemas.openxmlformats.org/drawingml/2006/main">
-            <a:off x="5972175" y="2924175"/>
-            <a:ext cx="171450" cy="171450"/>
+            <a:off x="6010275" y="2962275"/>
+            <a:ext cx="95250" cy="95250"/>
           </a:xfrm>
           <a:prstGeom xmlns:a="http://schemas.openxmlformats.org/drawingml/2006/main" prst="ellipse">
             <a:avLst/>
@@ -10330,9 +10326,9 @@
           <a:solidFill xmlns:a="http://schemas.openxmlformats.org/drawingml/2006/main">
             <a:srgbClr val="E8793D"/>
           </a:solidFill>
-          <a:ln xmlns:a="http://schemas.openxmlformats.org/drawingml/2006/main" w="19050">
+          <a:ln xmlns:a="http://schemas.openxmlformats.org/drawingml/2006/main" w="0">
             <a:solidFill>
-              <a:srgbClr val="0A0907"/>
+              <a:srgbClr val="E8793D"/>
             </a:solidFill>
             <a:prstDash val="solid"/>
           </a:ln>
@@ -10355,7 +10351,7 @@
         <p:spPr>
           <a:xfrm xmlns:a="http://schemas.openxmlformats.org/drawingml/2006/main">
             <a:off x="7296150" y="3314700"/>
-            <a:ext cx="2000250" cy="1371600"/>
+            <a:ext cx="19050" cy="1371600"/>
           </a:xfrm>
           <a:prstGeom xmlns:a="http://schemas.openxmlformats.org/drawingml/2006/main" prst="roundRect">
             <a:avLst>
@@ -10363,9 +10359,9 @@
             </a:avLst>
           </a:prstGeom>
           <a:solidFill xmlns:a="http://schemas.openxmlformats.org/drawingml/2006/main">
-            <a:srgbClr val="14110D"/>
+            <a:srgbClr val="6B5F50"/>
           </a:solidFill>
-          <a:ln xmlns:a="http://schemas.openxmlformats.org/drawingml/2006/main" w="9525">
+          <a:ln xmlns:a="http://schemas.openxmlformats.org/drawingml/2006/main" w="0">
             <a:solidFill>
               <a:srgbClr val="6B5F50"/>
             </a:solidFill>
@@ -10403,7 +10399,7 @@
         </p:spPr>
         <p:txBody>
           <a:bodyPr xmlns:a="http://schemas.openxmlformats.org/drawingml/2006/main" anchor="t">
-            <a:normAutofit fontScale="100000"/>
+            <a:normAutofit fontScale="66667"/>
           </a:bodyPr>
           <a:lstStyle xmlns:a="http://schemas.openxmlformats.org/drawingml/2006/main"/>
           <a:p xmlns:a="http://schemas.openxmlformats.org/drawingml/2006/main">
@@ -10419,13 +10415,13 @@
               </a:defRPr>
             </a:pPr>
             <a:r>
-              <a:rPr sz="900" b="1">
+              <a:rPr sz="1350" b="0">
                 <a:solidFill>
                   <a:srgbClr val="F19A68"/>
                 </a:solidFill>
-                <a:latin typeface="Menlo"/>
-                <a:ea typeface="Menlo"/>
-                <a:cs typeface="Menlo"/>
+                <a:latin typeface="Georgia"/>
+                <a:ea typeface="Georgia"/>
+                <a:cs typeface="Georgia"/>
               </a:rPr>
               <a:t>V5b</a:t>
             </a:r>
@@ -10478,13 +10474,13 @@
               </a:defRPr>
             </a:pPr>
             <a:r>
-              <a:rPr sz="1275" b="1">
+              <a:rPr sz="1275" b="0">
                 <a:solidFill>
                   <a:srgbClr val="F1E9DC"/>
                 </a:solidFill>
-                <a:latin typeface="Arial"/>
-                <a:ea typeface="Arial"/>
-                <a:cs typeface="Arial"/>
+                <a:latin typeface="Georgia"/>
+                <a:ea typeface="Georgia"/>
+                <a:cs typeface="Georgia"/>
               </a:rPr>
               <a:t>Real rail evidence</a:t>
             </a:r>
@@ -10590,8 +10586,8 @@
         </p:nvSpPr>
         <p:spPr>
           <a:xfrm xmlns:a="http://schemas.openxmlformats.org/drawingml/2006/main">
-            <a:off x="8220075" y="2924175"/>
-            <a:ext cx="171450" cy="171450"/>
+            <a:off x="8258175" y="2962275"/>
+            <a:ext cx="95250" cy="95250"/>
           </a:xfrm>
           <a:prstGeom xmlns:a="http://schemas.openxmlformats.org/drawingml/2006/main" prst="ellipse">
             <a:avLst/>
@@ -10599,9 +10595,9 @@
           <a:solidFill xmlns:a="http://schemas.openxmlformats.org/drawingml/2006/main">
             <a:srgbClr val="E8793D"/>
           </a:solidFill>
-          <a:ln xmlns:a="http://schemas.openxmlformats.org/drawingml/2006/main" w="19050">
+          <a:ln xmlns:a="http://schemas.openxmlformats.org/drawingml/2006/main" w="0">
             <a:solidFill>
-              <a:srgbClr val="0A0907"/>
+              <a:srgbClr val="E8793D"/>
             </a:solidFill>
             <a:prstDash val="solid"/>
           </a:ln>
@@ -10624,7 +10620,7 @@
         <p:spPr>
           <a:xfrm xmlns:a="http://schemas.openxmlformats.org/drawingml/2006/main">
             <a:off x="9544050" y="1581150"/>
-            <a:ext cx="2000250" cy="1371600"/>
+            <a:ext cx="19050" cy="1371600"/>
           </a:xfrm>
           <a:prstGeom xmlns:a="http://schemas.openxmlformats.org/drawingml/2006/main" prst="roundRect">
             <a:avLst>
@@ -10632,9 +10628,9 @@
             </a:avLst>
           </a:prstGeom>
           <a:solidFill xmlns:a="http://schemas.openxmlformats.org/drawingml/2006/main">
-            <a:srgbClr val="20382A"/>
+            <a:srgbClr val="75B78E"/>
           </a:solidFill>
-          <a:ln xmlns:a="http://schemas.openxmlformats.org/drawingml/2006/main" w="19050">
+          <a:ln xmlns:a="http://schemas.openxmlformats.org/drawingml/2006/main" w="0">
             <a:solidFill>
               <a:srgbClr val="75B78E"/>
             </a:solidFill>
@@ -10672,7 +10668,7 @@
         </p:spPr>
         <p:txBody>
           <a:bodyPr xmlns:a="http://schemas.openxmlformats.org/drawingml/2006/main" anchor="t">
-            <a:normAutofit fontScale="100000"/>
+            <a:normAutofit fontScale="66667"/>
           </a:bodyPr>
           <a:lstStyle xmlns:a="http://schemas.openxmlformats.org/drawingml/2006/main"/>
           <a:p xmlns:a="http://schemas.openxmlformats.org/drawingml/2006/main">
@@ -10688,13 +10684,13 @@
               </a:defRPr>
             </a:pPr>
             <a:r>
-              <a:rPr sz="900" b="1">
+              <a:rPr sz="1350" b="0">
                 <a:solidFill>
                   <a:srgbClr val="75B78E"/>
                 </a:solidFill>
-                <a:latin typeface="Menlo"/>
-                <a:ea typeface="Menlo"/>
-                <a:cs typeface="Menlo"/>
+                <a:latin typeface="Georgia"/>
+                <a:ea typeface="Georgia"/>
+                <a:cs typeface="Georgia"/>
               </a:rPr>
               <a:t>V5c</a:t>
             </a:r>
@@ -10731,7 +10727,7 @@
         </p:spPr>
         <p:txBody>
           <a:bodyPr xmlns:a="http://schemas.openxmlformats.org/drawingml/2006/main" anchor="t">
-            <a:normAutofit fontScale="99797"/>
+            <a:normAutofit fontScale="100000"/>
           </a:bodyPr>
           <a:lstStyle xmlns:a="http://schemas.openxmlformats.org/drawingml/2006/main"/>
           <a:p xmlns:a="http://schemas.openxmlformats.org/drawingml/2006/main">
@@ -10747,13 +10743,13 @@
               </a:defRPr>
             </a:pPr>
             <a:r>
-              <a:rPr sz="1275" b="1">
+              <a:rPr sz="1275" b="0">
                 <a:solidFill>
                   <a:srgbClr val="F1E9DC"/>
                 </a:solidFill>
-                <a:latin typeface="Arial"/>
-                <a:ea typeface="Arial"/>
-                <a:cs typeface="Arial"/>
+                <a:latin typeface="Georgia"/>
+                <a:ea typeface="Georgia"/>
+                <a:cs typeface="Georgia"/>
               </a:rPr>
               <a:t>Graph arm selected</a:t>
             </a:r>
@@ -10859,8 +10855,8 @@
         </p:nvSpPr>
         <p:spPr>
           <a:xfrm xmlns:a="http://schemas.openxmlformats.org/drawingml/2006/main">
-            <a:off x="10467975" y="2924175"/>
-            <a:ext cx="171450" cy="171450"/>
+            <a:off x="10506075" y="2962275"/>
+            <a:ext cx="95250" cy="95250"/>
           </a:xfrm>
           <a:prstGeom xmlns:a="http://schemas.openxmlformats.org/drawingml/2006/main" prst="ellipse">
             <a:avLst/>
@@ -10868,9 +10864,9 @@
           <a:solidFill xmlns:a="http://schemas.openxmlformats.org/drawingml/2006/main">
             <a:srgbClr val="75B78E"/>
           </a:solidFill>
-          <a:ln xmlns:a="http://schemas.openxmlformats.org/drawingml/2006/main" w="19050">
+          <a:ln xmlns:a="http://schemas.openxmlformats.org/drawingml/2006/main" w="0">
             <a:solidFill>
-              <a:srgbClr val="0A0907"/>
+              <a:srgbClr val="75B78E"/>
             </a:solidFill>
             <a:prstDash val="solid"/>
           </a:ln>
@@ -11257,10 +11253,8 @@
               <a:gd name="adj" fmla="val 0"/>
             </a:avLst>
           </a:prstGeom>
-          <a:solidFill xmlns:a="http://schemas.openxmlformats.org/drawingml/2006/main">
-            <a:srgbClr val="211B14"/>
-          </a:solidFill>
-          <a:ln xmlns:a="http://schemas.openxmlformats.org/drawingml/2006/main" w="9525">
+          <a:noFill xmlns:a="http://schemas.openxmlformats.org/drawingml/2006/main"/>
+          <a:ln xmlns:a="http://schemas.openxmlformats.org/drawingml/2006/main" w="5715">
             <a:solidFill>
               <a:srgbClr val="6B5F50"/>
             </a:solidFill>
@@ -11351,10 +11345,8 @@
               <a:gd name="adj" fmla="val 0"/>
             </a:avLst>
           </a:prstGeom>
-          <a:solidFill xmlns:a="http://schemas.openxmlformats.org/drawingml/2006/main">
-            <a:srgbClr val="211B14"/>
-          </a:solidFill>
-          <a:ln xmlns:a="http://schemas.openxmlformats.org/drawingml/2006/main" w="9525">
+          <a:noFill xmlns:a="http://schemas.openxmlformats.org/drawingml/2006/main"/>
+          <a:ln xmlns:a="http://schemas.openxmlformats.org/drawingml/2006/main" w="5715">
             <a:solidFill>
               <a:srgbClr val="6B5F50"/>
             </a:solidFill>
@@ -11445,10 +11437,8 @@
               <a:gd name="adj" fmla="val 0"/>
             </a:avLst>
           </a:prstGeom>
-          <a:solidFill xmlns:a="http://schemas.openxmlformats.org/drawingml/2006/main">
-            <a:srgbClr val="211B14"/>
-          </a:solidFill>
-          <a:ln xmlns:a="http://schemas.openxmlformats.org/drawingml/2006/main" w="9525">
+          <a:noFill xmlns:a="http://schemas.openxmlformats.org/drawingml/2006/main"/>
+          <a:ln xmlns:a="http://schemas.openxmlformats.org/drawingml/2006/main" w="5715">
             <a:solidFill>
               <a:srgbClr val="6B5F50"/>
             </a:solidFill>
@@ -11539,10 +11529,8 @@
               <a:gd name="adj" fmla="val 0"/>
             </a:avLst>
           </a:prstGeom>
-          <a:solidFill xmlns:a="http://schemas.openxmlformats.org/drawingml/2006/main">
-            <a:srgbClr val="211B14"/>
-          </a:solidFill>
-          <a:ln xmlns:a="http://schemas.openxmlformats.org/drawingml/2006/main" w="9525">
+          <a:noFill xmlns:a="http://schemas.openxmlformats.org/drawingml/2006/main"/>
+          <a:ln xmlns:a="http://schemas.openxmlformats.org/drawingml/2006/main" w="5715">
             <a:solidFill>
               <a:srgbClr val="6B5F50"/>
             </a:solidFill>
@@ -11633,10 +11621,8 @@
               <a:gd name="adj" fmla="val 0"/>
             </a:avLst>
           </a:prstGeom>
-          <a:solidFill xmlns:a="http://schemas.openxmlformats.org/drawingml/2006/main">
-            <a:srgbClr val="211B14"/>
-          </a:solidFill>
-          <a:ln xmlns:a="http://schemas.openxmlformats.org/drawingml/2006/main" w="9525">
+          <a:noFill xmlns:a="http://schemas.openxmlformats.org/drawingml/2006/main"/>
+          <a:ln xmlns:a="http://schemas.openxmlformats.org/drawingml/2006/main" w="5715">
             <a:solidFill>
               <a:srgbClr val="6B5F50"/>
             </a:solidFill>
@@ -11727,10 +11713,8 @@
               <a:gd name="adj" fmla="val 0"/>
             </a:avLst>
           </a:prstGeom>
-          <a:solidFill xmlns:a="http://schemas.openxmlformats.org/drawingml/2006/main">
-            <a:srgbClr val="211B14"/>
-          </a:solidFill>
-          <a:ln xmlns:a="http://schemas.openxmlformats.org/drawingml/2006/main" w="9525">
+          <a:noFill xmlns:a="http://schemas.openxmlformats.org/drawingml/2006/main"/>
+          <a:ln xmlns:a="http://schemas.openxmlformats.org/drawingml/2006/main" w="5715">
             <a:solidFill>
               <a:srgbClr val="6B5F50"/>
             </a:solidFill>
@@ -11821,10 +11805,8 @@
               <a:gd name="adj" fmla="val 0"/>
             </a:avLst>
           </a:prstGeom>
-          <a:solidFill xmlns:a="http://schemas.openxmlformats.org/drawingml/2006/main">
-            <a:srgbClr val="100E0B"/>
-          </a:solidFill>
-          <a:ln xmlns:a="http://schemas.openxmlformats.org/drawingml/2006/main" w="9525">
+          <a:noFill xmlns:a="http://schemas.openxmlformats.org/drawingml/2006/main"/>
+          <a:ln xmlns:a="http://schemas.openxmlformats.org/drawingml/2006/main" w="4763">
             <a:solidFill>
               <a:srgbClr val="3F382E"/>
             </a:solidFill>
@@ -11880,7 +11862,7 @@
             <a:r>
               <a:rPr sz="1125" b="0">
                 <a:solidFill>
-                  <a:srgbClr val="F1E9DC"/>
+                  <a:srgbClr val="C8BDAE"/>
                 </a:solidFill>
                 <a:latin typeface="Arial"/>
                 <a:ea typeface="Arial"/>
@@ -11915,10 +11897,8 @@
               <a:gd name="adj" fmla="val 0"/>
             </a:avLst>
           </a:prstGeom>
-          <a:solidFill xmlns:a="http://schemas.openxmlformats.org/drawingml/2006/main">
-            <a:srgbClr val="100E0B"/>
-          </a:solidFill>
-          <a:ln xmlns:a="http://schemas.openxmlformats.org/drawingml/2006/main" w="9525">
+          <a:noFill xmlns:a="http://schemas.openxmlformats.org/drawingml/2006/main"/>
+          <a:ln xmlns:a="http://schemas.openxmlformats.org/drawingml/2006/main" w="4763">
             <a:solidFill>
               <a:srgbClr val="3F382E"/>
             </a:solidFill>
@@ -11974,7 +11954,7 @@
             <a:r>
               <a:rPr sz="1125" b="0">
                 <a:solidFill>
-                  <a:srgbClr val="F1E9DC"/>
+                  <a:srgbClr val="C8BDAE"/>
                 </a:solidFill>
                 <a:latin typeface="Menlo"/>
                 <a:ea typeface="Menlo"/>
@@ -12009,10 +11989,8 @@
               <a:gd name="adj" fmla="val 0"/>
             </a:avLst>
           </a:prstGeom>
-          <a:solidFill xmlns:a="http://schemas.openxmlformats.org/drawingml/2006/main">
-            <a:srgbClr val="100E0B"/>
-          </a:solidFill>
-          <a:ln xmlns:a="http://schemas.openxmlformats.org/drawingml/2006/main" w="9525">
+          <a:noFill xmlns:a="http://schemas.openxmlformats.org/drawingml/2006/main"/>
+          <a:ln xmlns:a="http://schemas.openxmlformats.org/drawingml/2006/main" w="4763">
             <a:solidFill>
               <a:srgbClr val="3F382E"/>
             </a:solidFill>
@@ -12068,7 +12046,7 @@
             <a:r>
               <a:rPr sz="1125" b="0">
                 <a:solidFill>
-                  <a:srgbClr val="F1E9DC"/>
+                  <a:srgbClr val="C8BDAE"/>
                 </a:solidFill>
                 <a:latin typeface="Menlo"/>
                 <a:ea typeface="Menlo"/>
@@ -12103,10 +12081,8 @@
               <a:gd name="adj" fmla="val 0"/>
             </a:avLst>
           </a:prstGeom>
-          <a:solidFill xmlns:a="http://schemas.openxmlformats.org/drawingml/2006/main">
-            <a:srgbClr val="100E0B"/>
-          </a:solidFill>
-          <a:ln xmlns:a="http://schemas.openxmlformats.org/drawingml/2006/main" w="9525">
+          <a:noFill xmlns:a="http://schemas.openxmlformats.org/drawingml/2006/main"/>
+          <a:ln xmlns:a="http://schemas.openxmlformats.org/drawingml/2006/main" w="4763">
             <a:solidFill>
               <a:srgbClr val="3F382E"/>
             </a:solidFill>
@@ -12162,7 +12138,7 @@
             <a:r>
               <a:rPr sz="1125" b="0">
                 <a:solidFill>
-                  <a:srgbClr val="F1E9DC"/>
+                  <a:srgbClr val="C8BDAE"/>
                 </a:solidFill>
                 <a:latin typeface="Menlo"/>
                 <a:ea typeface="Menlo"/>
@@ -12197,10 +12173,8 @@
               <a:gd name="adj" fmla="val 0"/>
             </a:avLst>
           </a:prstGeom>
-          <a:solidFill xmlns:a="http://schemas.openxmlformats.org/drawingml/2006/main">
-            <a:srgbClr val="100E0B"/>
-          </a:solidFill>
-          <a:ln xmlns:a="http://schemas.openxmlformats.org/drawingml/2006/main" w="9525">
+          <a:noFill xmlns:a="http://schemas.openxmlformats.org/drawingml/2006/main"/>
+          <a:ln xmlns:a="http://schemas.openxmlformats.org/drawingml/2006/main" w="4763">
             <a:solidFill>
               <a:srgbClr val="3F382E"/>
             </a:solidFill>
@@ -12256,7 +12230,7 @@
             <a:r>
               <a:rPr sz="1125" b="0">
                 <a:solidFill>
-                  <a:srgbClr val="F1E9DC"/>
+                  <a:srgbClr val="C8BDAE"/>
                 </a:solidFill>
                 <a:latin typeface="Menlo"/>
                 <a:ea typeface="Menlo"/>
@@ -12291,10 +12265,8 @@
               <a:gd name="adj" fmla="val 0"/>
             </a:avLst>
           </a:prstGeom>
-          <a:solidFill xmlns:a="http://schemas.openxmlformats.org/drawingml/2006/main">
-            <a:srgbClr val="100E0B"/>
-          </a:solidFill>
-          <a:ln xmlns:a="http://schemas.openxmlformats.org/drawingml/2006/main" w="9525">
+          <a:noFill xmlns:a="http://schemas.openxmlformats.org/drawingml/2006/main"/>
+          <a:ln xmlns:a="http://schemas.openxmlformats.org/drawingml/2006/main" w="4763">
             <a:solidFill>
               <a:srgbClr val="3F382E"/>
             </a:solidFill>
@@ -12350,7 +12322,7 @@
             <a:r>
               <a:rPr sz="1125" b="0">
                 <a:solidFill>
-                  <a:srgbClr val="F1E9DC"/>
+                  <a:srgbClr val="C8BDAE"/>
                 </a:solidFill>
                 <a:latin typeface="Menlo"/>
                 <a:ea typeface="Menlo"/>
@@ -12385,10 +12357,8 @@
               <a:gd name="adj" fmla="val 0"/>
             </a:avLst>
           </a:prstGeom>
-          <a:solidFill xmlns:a="http://schemas.openxmlformats.org/drawingml/2006/main">
-            <a:srgbClr val="14110D"/>
-          </a:solidFill>
-          <a:ln xmlns:a="http://schemas.openxmlformats.org/drawingml/2006/main" w="9525">
+          <a:noFill xmlns:a="http://schemas.openxmlformats.org/drawingml/2006/main"/>
+          <a:ln xmlns:a="http://schemas.openxmlformats.org/drawingml/2006/main" w="4763">
             <a:solidFill>
               <a:srgbClr val="3F382E"/>
             </a:solidFill>
@@ -12444,7 +12414,7 @@
             <a:r>
               <a:rPr sz="1125" b="0">
                 <a:solidFill>
-                  <a:srgbClr val="F1E9DC"/>
+                  <a:srgbClr val="C8BDAE"/>
                 </a:solidFill>
                 <a:latin typeface="Arial"/>
                 <a:ea typeface="Arial"/>
@@ -12479,10 +12449,8 @@
               <a:gd name="adj" fmla="val 0"/>
             </a:avLst>
           </a:prstGeom>
-          <a:solidFill xmlns:a="http://schemas.openxmlformats.org/drawingml/2006/main">
-            <a:srgbClr val="14110D"/>
-          </a:solidFill>
-          <a:ln xmlns:a="http://schemas.openxmlformats.org/drawingml/2006/main" w="9525">
+          <a:noFill xmlns:a="http://schemas.openxmlformats.org/drawingml/2006/main"/>
+          <a:ln xmlns:a="http://schemas.openxmlformats.org/drawingml/2006/main" w="4763">
             <a:solidFill>
               <a:srgbClr val="3F382E"/>
             </a:solidFill>
@@ -12538,7 +12506,7 @@
             <a:r>
               <a:rPr sz="1125" b="0">
                 <a:solidFill>
-                  <a:srgbClr val="F1E9DC"/>
+                  <a:srgbClr val="C8BDAE"/>
                 </a:solidFill>
                 <a:latin typeface="Menlo"/>
                 <a:ea typeface="Menlo"/>
@@ -12573,10 +12541,8 @@
               <a:gd name="adj" fmla="val 0"/>
             </a:avLst>
           </a:prstGeom>
-          <a:solidFill xmlns:a="http://schemas.openxmlformats.org/drawingml/2006/main">
-            <a:srgbClr val="14110D"/>
-          </a:solidFill>
-          <a:ln xmlns:a="http://schemas.openxmlformats.org/drawingml/2006/main" w="9525">
+          <a:noFill xmlns:a="http://schemas.openxmlformats.org/drawingml/2006/main"/>
+          <a:ln xmlns:a="http://schemas.openxmlformats.org/drawingml/2006/main" w="4763">
             <a:solidFill>
               <a:srgbClr val="3F382E"/>
             </a:solidFill>
@@ -12632,7 +12598,7 @@
             <a:r>
               <a:rPr sz="1125" b="0">
                 <a:solidFill>
-                  <a:srgbClr val="F1E9DC"/>
+                  <a:srgbClr val="C8BDAE"/>
                 </a:solidFill>
                 <a:latin typeface="Menlo"/>
                 <a:ea typeface="Menlo"/>
@@ -12667,10 +12633,8 @@
               <a:gd name="adj" fmla="val 0"/>
             </a:avLst>
           </a:prstGeom>
-          <a:solidFill xmlns:a="http://schemas.openxmlformats.org/drawingml/2006/main">
-            <a:srgbClr val="14110D"/>
-          </a:solidFill>
-          <a:ln xmlns:a="http://schemas.openxmlformats.org/drawingml/2006/main" w="9525">
+          <a:noFill xmlns:a="http://schemas.openxmlformats.org/drawingml/2006/main"/>
+          <a:ln xmlns:a="http://schemas.openxmlformats.org/drawingml/2006/main" w="4763">
             <a:solidFill>
               <a:srgbClr val="3F382E"/>
             </a:solidFill>
@@ -12726,7 +12690,7 @@
             <a:r>
               <a:rPr sz="1125" b="0">
                 <a:solidFill>
-                  <a:srgbClr val="F1E9DC"/>
+                  <a:srgbClr val="C8BDAE"/>
                 </a:solidFill>
                 <a:latin typeface="Menlo"/>
                 <a:ea typeface="Menlo"/>
@@ -12761,10 +12725,8 @@
               <a:gd name="adj" fmla="val 0"/>
             </a:avLst>
           </a:prstGeom>
-          <a:solidFill xmlns:a="http://schemas.openxmlformats.org/drawingml/2006/main">
-            <a:srgbClr val="14110D"/>
-          </a:solidFill>
-          <a:ln xmlns:a="http://schemas.openxmlformats.org/drawingml/2006/main" w="9525">
+          <a:noFill xmlns:a="http://schemas.openxmlformats.org/drawingml/2006/main"/>
+          <a:ln xmlns:a="http://schemas.openxmlformats.org/drawingml/2006/main" w="4763">
             <a:solidFill>
               <a:srgbClr val="3F382E"/>
             </a:solidFill>
@@ -12820,7 +12782,7 @@
             <a:r>
               <a:rPr sz="1125" b="0">
                 <a:solidFill>
-                  <a:srgbClr val="F1E9DC"/>
+                  <a:srgbClr val="C8BDAE"/>
                 </a:solidFill>
                 <a:latin typeface="Menlo"/>
                 <a:ea typeface="Menlo"/>
@@ -12855,10 +12817,8 @@
               <a:gd name="adj" fmla="val 0"/>
             </a:avLst>
           </a:prstGeom>
-          <a:solidFill xmlns:a="http://schemas.openxmlformats.org/drawingml/2006/main">
-            <a:srgbClr val="14110D"/>
-          </a:solidFill>
-          <a:ln xmlns:a="http://schemas.openxmlformats.org/drawingml/2006/main" w="9525">
+          <a:noFill xmlns:a="http://schemas.openxmlformats.org/drawingml/2006/main"/>
+          <a:ln xmlns:a="http://schemas.openxmlformats.org/drawingml/2006/main" w="4763">
             <a:solidFill>
               <a:srgbClr val="3F382E"/>
             </a:solidFill>
@@ -12914,7 +12874,7 @@
             <a:r>
               <a:rPr sz="1125" b="0">
                 <a:solidFill>
-                  <a:srgbClr val="F1E9DC"/>
+                  <a:srgbClr val="C8BDAE"/>
                 </a:solidFill>
                 <a:latin typeface="Menlo"/>
                 <a:ea typeface="Menlo"/>
@@ -12950,9 +12910,9 @@
             </a:avLst>
           </a:prstGeom>
           <a:solidFill xmlns:a="http://schemas.openxmlformats.org/drawingml/2006/main">
-            <a:srgbClr val="20382A"/>
+            <a:srgbClr val="19150F"/>
           </a:solidFill>
-          <a:ln xmlns:a="http://schemas.openxmlformats.org/drawingml/2006/main" w="9525">
+          <a:ln xmlns:a="http://schemas.openxmlformats.org/drawingml/2006/main" w="7620">
             <a:solidFill>
               <a:srgbClr val="75B78E"/>
             </a:solidFill>
@@ -13008,7 +12968,7 @@
             <a:r>
               <a:rPr sz="1125" b="1">
                 <a:solidFill>
-                  <a:srgbClr val="F1E9DC"/>
+                  <a:srgbClr val="75B78E"/>
                 </a:solidFill>
                 <a:latin typeface="Arial"/>
                 <a:ea typeface="Arial"/>
@@ -13044,9 +13004,9 @@
             </a:avLst>
           </a:prstGeom>
           <a:solidFill xmlns:a="http://schemas.openxmlformats.org/drawingml/2006/main">
-            <a:srgbClr val="20382A"/>
+            <a:srgbClr val="19150F"/>
           </a:solidFill>
-          <a:ln xmlns:a="http://schemas.openxmlformats.org/drawingml/2006/main" w="9525">
+          <a:ln xmlns:a="http://schemas.openxmlformats.org/drawingml/2006/main" w="7620">
             <a:solidFill>
               <a:srgbClr val="75B78E"/>
             </a:solidFill>
@@ -13102,7 +13062,7 @@
             <a:r>
               <a:rPr sz="1125" b="1">
                 <a:solidFill>
-                  <a:srgbClr val="F1E9DC"/>
+                  <a:srgbClr val="75B78E"/>
                 </a:solidFill>
                 <a:latin typeface="Menlo"/>
                 <a:ea typeface="Menlo"/>
@@ -13138,9 +13098,9 @@
             </a:avLst>
           </a:prstGeom>
           <a:solidFill xmlns:a="http://schemas.openxmlformats.org/drawingml/2006/main">
-            <a:srgbClr val="20382A"/>
+            <a:srgbClr val="19150F"/>
           </a:solidFill>
-          <a:ln xmlns:a="http://schemas.openxmlformats.org/drawingml/2006/main" w="9525">
+          <a:ln xmlns:a="http://schemas.openxmlformats.org/drawingml/2006/main" w="7620">
             <a:solidFill>
               <a:srgbClr val="75B78E"/>
             </a:solidFill>
@@ -13196,7 +13156,7 @@
             <a:r>
               <a:rPr sz="1125" b="1">
                 <a:solidFill>
-                  <a:srgbClr val="F1E9DC"/>
+                  <a:srgbClr val="75B78E"/>
                 </a:solidFill>
                 <a:latin typeface="Menlo"/>
                 <a:ea typeface="Menlo"/>
@@ -13232,9 +13192,9 @@
             </a:avLst>
           </a:prstGeom>
           <a:solidFill xmlns:a="http://schemas.openxmlformats.org/drawingml/2006/main">
-            <a:srgbClr val="20382A"/>
+            <a:srgbClr val="19150F"/>
           </a:solidFill>
-          <a:ln xmlns:a="http://schemas.openxmlformats.org/drawingml/2006/main" w="9525">
+          <a:ln xmlns:a="http://schemas.openxmlformats.org/drawingml/2006/main" w="7620">
             <a:solidFill>
               <a:srgbClr val="75B78E"/>
             </a:solidFill>
@@ -13290,7 +13250,7 @@
             <a:r>
               <a:rPr sz="1125" b="1">
                 <a:solidFill>
-                  <a:srgbClr val="F1E9DC"/>
+                  <a:srgbClr val="75B78E"/>
                 </a:solidFill>
                 <a:latin typeface="Menlo"/>
                 <a:ea typeface="Menlo"/>
@@ -13326,9 +13286,9 @@
             </a:avLst>
           </a:prstGeom>
           <a:solidFill xmlns:a="http://schemas.openxmlformats.org/drawingml/2006/main">
-            <a:srgbClr val="20382A"/>
+            <a:srgbClr val="19150F"/>
           </a:solidFill>
-          <a:ln xmlns:a="http://schemas.openxmlformats.org/drawingml/2006/main" w="9525">
+          <a:ln xmlns:a="http://schemas.openxmlformats.org/drawingml/2006/main" w="7620">
             <a:solidFill>
               <a:srgbClr val="75B78E"/>
             </a:solidFill>
@@ -13384,7 +13344,7 @@
             <a:r>
               <a:rPr sz="1125" b="1">
                 <a:solidFill>
-                  <a:srgbClr val="F1E9DC"/>
+                  <a:srgbClr val="75B78E"/>
                 </a:solidFill>
                 <a:latin typeface="Menlo"/>
                 <a:ea typeface="Menlo"/>
@@ -13420,9 +13380,9 @@
             </a:avLst>
           </a:prstGeom>
           <a:solidFill xmlns:a="http://schemas.openxmlformats.org/drawingml/2006/main">
-            <a:srgbClr val="20382A"/>
+            <a:srgbClr val="19150F"/>
           </a:solidFill>
-          <a:ln xmlns:a="http://schemas.openxmlformats.org/drawingml/2006/main" w="9525">
+          <a:ln xmlns:a="http://schemas.openxmlformats.org/drawingml/2006/main" w="7620">
             <a:solidFill>
               <a:srgbClr val="75B78E"/>
             </a:solidFill>
@@ -13478,7 +13438,7 @@
             <a:r>
               <a:rPr sz="1125" b="1">
                 <a:solidFill>
-                  <a:srgbClr val="F1E9DC"/>
+                  <a:srgbClr val="75B78E"/>
                 </a:solidFill>
                 <a:latin typeface="Menlo"/>
                 <a:ea typeface="Menlo"/>
@@ -13513,12 +13473,10 @@
               <a:gd name="adj" fmla="val 0"/>
             </a:avLst>
           </a:prstGeom>
-          <a:solidFill xmlns:a="http://schemas.openxmlformats.org/drawingml/2006/main">
-            <a:srgbClr val="2B1512"/>
-          </a:solidFill>
-          <a:ln xmlns:a="http://schemas.openxmlformats.org/drawingml/2006/main" w="9525">
+          <a:noFill xmlns:a="http://schemas.openxmlformats.org/drawingml/2006/main"/>
+          <a:ln xmlns:a="http://schemas.openxmlformats.org/drawingml/2006/main" w="4763">
             <a:solidFill>
-              <a:srgbClr val="E35E54"/>
+              <a:srgbClr val="3F382E"/>
             </a:solidFill>
             <a:prstDash val="solid"/>
           </a:ln>
@@ -13607,12 +13565,10 @@
               <a:gd name="adj" fmla="val 0"/>
             </a:avLst>
           </a:prstGeom>
-          <a:solidFill xmlns:a="http://schemas.openxmlformats.org/drawingml/2006/main">
-            <a:srgbClr val="2B1512"/>
-          </a:solidFill>
-          <a:ln xmlns:a="http://schemas.openxmlformats.org/drawingml/2006/main" w="9525">
+          <a:noFill xmlns:a="http://schemas.openxmlformats.org/drawingml/2006/main"/>
+          <a:ln xmlns:a="http://schemas.openxmlformats.org/drawingml/2006/main" w="4763">
             <a:solidFill>
-              <a:srgbClr val="E35E54"/>
+              <a:srgbClr val="3F382E"/>
             </a:solidFill>
             <a:prstDash val="solid"/>
           </a:ln>
@@ -13701,12 +13657,10 @@
               <a:gd name="adj" fmla="val 0"/>
             </a:avLst>
           </a:prstGeom>
-          <a:solidFill xmlns:a="http://schemas.openxmlformats.org/drawingml/2006/main">
-            <a:srgbClr val="2B1512"/>
-          </a:solidFill>
-          <a:ln xmlns:a="http://schemas.openxmlformats.org/drawingml/2006/main" w="9525">
+          <a:noFill xmlns:a="http://schemas.openxmlformats.org/drawingml/2006/main"/>
+          <a:ln xmlns:a="http://schemas.openxmlformats.org/drawingml/2006/main" w="4763">
             <a:solidFill>
-              <a:srgbClr val="E35E54"/>
+              <a:srgbClr val="3F382E"/>
             </a:solidFill>
             <a:prstDash val="solid"/>
           </a:ln>
@@ -13795,12 +13749,10 @@
               <a:gd name="adj" fmla="val 0"/>
             </a:avLst>
           </a:prstGeom>
-          <a:solidFill xmlns:a="http://schemas.openxmlformats.org/drawingml/2006/main">
-            <a:srgbClr val="2B1512"/>
-          </a:solidFill>
-          <a:ln xmlns:a="http://schemas.openxmlformats.org/drawingml/2006/main" w="9525">
+          <a:noFill xmlns:a="http://schemas.openxmlformats.org/drawingml/2006/main"/>
+          <a:ln xmlns:a="http://schemas.openxmlformats.org/drawingml/2006/main" w="4763">
             <a:solidFill>
-              <a:srgbClr val="E35E54"/>
+              <a:srgbClr val="3F382E"/>
             </a:solidFill>
             <a:prstDash val="solid"/>
           </a:ln>
@@ -13889,12 +13841,10 @@
               <a:gd name="adj" fmla="val 0"/>
             </a:avLst>
           </a:prstGeom>
-          <a:solidFill xmlns:a="http://schemas.openxmlformats.org/drawingml/2006/main">
-            <a:srgbClr val="2B1512"/>
-          </a:solidFill>
-          <a:ln xmlns:a="http://schemas.openxmlformats.org/drawingml/2006/main" w="9525">
+          <a:noFill xmlns:a="http://schemas.openxmlformats.org/drawingml/2006/main"/>
+          <a:ln xmlns:a="http://schemas.openxmlformats.org/drawingml/2006/main" w="4763">
             <a:solidFill>
-              <a:srgbClr val="E35E54"/>
+              <a:srgbClr val="3F382E"/>
             </a:solidFill>
             <a:prstDash val="solid"/>
           </a:ln>
@@ -13983,12 +13933,10 @@
               <a:gd name="adj" fmla="val 0"/>
             </a:avLst>
           </a:prstGeom>
-          <a:solidFill xmlns:a="http://schemas.openxmlformats.org/drawingml/2006/main">
-            <a:srgbClr val="2B1512"/>
-          </a:solidFill>
-          <a:ln xmlns:a="http://schemas.openxmlformats.org/drawingml/2006/main" w="9525">
+          <a:noFill xmlns:a="http://schemas.openxmlformats.org/drawingml/2006/main"/>
+          <a:ln xmlns:a="http://schemas.openxmlformats.org/drawingml/2006/main" w="4763">
             <a:solidFill>
-              <a:srgbClr val="E35E54"/>
+              <a:srgbClr val="3F382E"/>
             </a:solidFill>
             <a:prstDash val="solid"/>
           </a:ln>
@@ -14070,7 +14018,7 @@
         <p:spPr>
           <a:xfrm xmlns:a="http://schemas.openxmlformats.org/drawingml/2006/main">
             <a:off x="400050" y="5219700"/>
-            <a:ext cx="11391900" cy="723900"/>
+            <a:ext cx="11391900" cy="19050"/>
           </a:xfrm>
           <a:prstGeom xmlns:a="http://schemas.openxmlformats.org/drawingml/2006/main" prst="roundRect">
             <a:avLst>
@@ -14078,9 +14026,9 @@
             </a:avLst>
           </a:prstGeom>
           <a:solidFill xmlns:a="http://schemas.openxmlformats.org/drawingml/2006/main">
-            <a:srgbClr val="211B14"/>
+            <a:srgbClr val="E8793D"/>
           </a:solidFill>
-          <a:ln xmlns:a="http://schemas.openxmlformats.org/drawingml/2006/main" w="9525">
+          <a:ln xmlns:a="http://schemas.openxmlformats.org/drawingml/2006/main" w="0">
             <a:solidFill>
               <a:srgbClr val="E8793D"/>
             </a:solidFill>
@@ -14528,9 +14476,7 @@
               <a:gd name="adj" fmla="val 2609"/>
             </a:avLst>
           </a:prstGeom>
-          <a:solidFill xmlns:a="http://schemas.openxmlformats.org/drawingml/2006/main">
-            <a:srgbClr val="14110D"/>
-          </a:solidFill>
+          <a:noFill xmlns:a="http://schemas.openxmlformats.org/drawingml/2006/main"/>
           <a:ln xmlns:a="http://schemas.openxmlformats.org/drawingml/2006/main" w="9525">
             <a:solidFill>
               <a:srgbClr val="6B5F50"/>
@@ -14548,7 +14494,7 @@
           <p:nvPr/>
         </p:nvPicPr>
         <p:blipFill>
-          <a:blip xmlns:r="http://schemas.openxmlformats.org/officeDocument/2006/relationships" xmlns:a="http://schemas.openxmlformats.org/drawingml/2006/main" r:embed="Rdcd35cd688844fb5"/>
+          <a:blip xmlns:r="http://schemas.openxmlformats.org/officeDocument/2006/relationships" xmlns:a="http://schemas.openxmlformats.org/drawingml/2006/main" r:embed="Re7b93f326ffa4926"/>
           <a:srcRect xmlns:a="http://schemas.openxmlformats.org/drawingml/2006/main" l="0" t="33403" r="0" b="33403"/>
           <a:stretch xmlns:a="http://schemas.openxmlformats.org/drawingml/2006/main">
             <a:fillRect l="0" t="0" r="0" b="0"/>
@@ -14581,7 +14527,7 @@
         <p:spPr>
           <a:xfrm xmlns:a="http://schemas.openxmlformats.org/drawingml/2006/main">
             <a:off x="7905750" y="1600200"/>
-            <a:ext cx="3886200" cy="819150"/>
+            <a:ext cx="3886200" cy="9525"/>
           </a:xfrm>
           <a:prstGeom xmlns:a="http://schemas.openxmlformats.org/drawingml/2006/main" prst="roundRect">
             <a:avLst>
@@ -14589,9 +14535,9 @@
             </a:avLst>
           </a:prstGeom>
           <a:solidFill xmlns:a="http://schemas.openxmlformats.org/drawingml/2006/main">
-            <a:srgbClr val="14110D"/>
+            <a:srgbClr val="6B5F50"/>
           </a:solidFill>
-          <a:ln xmlns:a="http://schemas.openxmlformats.org/drawingml/2006/main" w="9525">
+          <a:ln xmlns:a="http://schemas.openxmlformats.org/drawingml/2006/main" w="0">
             <a:solidFill>
               <a:srgbClr val="6B5F50"/>
             </a:solidFill>
@@ -14734,7 +14680,7 @@
         <p:spPr>
           <a:xfrm xmlns:a="http://schemas.openxmlformats.org/drawingml/2006/main">
             <a:off x="7905750" y="2590800"/>
-            <a:ext cx="3886200" cy="819150"/>
+            <a:ext cx="3886200" cy="9525"/>
           </a:xfrm>
           <a:prstGeom xmlns:a="http://schemas.openxmlformats.org/drawingml/2006/main" prst="roundRect">
             <a:avLst>
@@ -14742,9 +14688,9 @@
             </a:avLst>
           </a:prstGeom>
           <a:solidFill xmlns:a="http://schemas.openxmlformats.org/drawingml/2006/main">
-            <a:srgbClr val="14110D"/>
+            <a:srgbClr val="6B5F50"/>
           </a:solidFill>
-          <a:ln xmlns:a="http://schemas.openxmlformats.org/drawingml/2006/main" w="9525">
+          <a:ln xmlns:a="http://schemas.openxmlformats.org/drawingml/2006/main" w="0">
             <a:solidFill>
               <a:srgbClr val="6B5F50"/>
             </a:solidFill>
@@ -14887,7 +14833,7 @@
         <p:spPr>
           <a:xfrm xmlns:a="http://schemas.openxmlformats.org/drawingml/2006/main">
             <a:off x="7905750" y="3581400"/>
-            <a:ext cx="3886200" cy="819150"/>
+            <a:ext cx="3886200" cy="9525"/>
           </a:xfrm>
           <a:prstGeom xmlns:a="http://schemas.openxmlformats.org/drawingml/2006/main" prst="roundRect">
             <a:avLst>
@@ -14895,9 +14841,9 @@
             </a:avLst>
           </a:prstGeom>
           <a:solidFill xmlns:a="http://schemas.openxmlformats.org/drawingml/2006/main">
-            <a:srgbClr val="14110D"/>
+            <a:srgbClr val="6B5F50"/>
           </a:solidFill>
-          <a:ln xmlns:a="http://schemas.openxmlformats.org/drawingml/2006/main" w="9525">
+          <a:ln xmlns:a="http://schemas.openxmlformats.org/drawingml/2006/main" w="0">
             <a:solidFill>
               <a:srgbClr val="6B5F50"/>
             </a:solidFill>
@@ -15040,7 +14986,7 @@
         <p:spPr>
           <a:xfrm xmlns:a="http://schemas.openxmlformats.org/drawingml/2006/main">
             <a:off x="7905750" y="4572000"/>
-            <a:ext cx="3886200" cy="819150"/>
+            <a:ext cx="3886200" cy="19050"/>
           </a:xfrm>
           <a:prstGeom xmlns:a="http://schemas.openxmlformats.org/drawingml/2006/main" prst="roundRect">
             <a:avLst>
@@ -15048,9 +14994,9 @@
             </a:avLst>
           </a:prstGeom>
           <a:solidFill xmlns:a="http://schemas.openxmlformats.org/drawingml/2006/main">
-            <a:srgbClr val="20382A"/>
+            <a:srgbClr val="75B78E"/>
           </a:solidFill>
-          <a:ln xmlns:a="http://schemas.openxmlformats.org/drawingml/2006/main" w="19050">
+          <a:ln xmlns:a="http://schemas.openxmlformats.org/drawingml/2006/main" w="0">
             <a:solidFill>
               <a:srgbClr val="75B78E"/>
             </a:solidFill>
@@ -15498,9 +15444,7 @@
               <a:gd name="adj" fmla="val 2429"/>
             </a:avLst>
           </a:prstGeom>
-          <a:solidFill xmlns:a="http://schemas.openxmlformats.org/drawingml/2006/main">
-            <a:srgbClr val="14110D"/>
-          </a:solidFill>
+          <a:noFill xmlns:a="http://schemas.openxmlformats.org/drawingml/2006/main"/>
           <a:ln xmlns:a="http://schemas.openxmlformats.org/drawingml/2006/main" w="9525">
             <a:solidFill>
               <a:srgbClr val="6B5F50"/>
@@ -15518,7 +15462,7 @@
           <p:nvPr/>
         </p:nvPicPr>
         <p:blipFill>
-          <a:blip xmlns:r="http://schemas.openxmlformats.org/officeDocument/2006/relationships" xmlns:a="http://schemas.openxmlformats.org/drawingml/2006/main" r:embed="R790a8475524543bd"/>
+          <a:blip xmlns:r="http://schemas.openxmlformats.org/officeDocument/2006/relationships" xmlns:a="http://schemas.openxmlformats.org/drawingml/2006/main" r:embed="R9fd001e6212042d1"/>
           <a:srcRect xmlns:a="http://schemas.openxmlformats.org/drawingml/2006/main" l="0" t="29622" r="0" b="29622"/>
           <a:stretch xmlns:a="http://schemas.openxmlformats.org/drawingml/2006/main">
             <a:fillRect l="0" t="0" r="0" b="0"/>
@@ -15550,8 +15494,8 @@
         </p:nvSpPr>
         <p:spPr>
           <a:xfrm xmlns:a="http://schemas.openxmlformats.org/drawingml/2006/main">
-            <a:off x="400050" y="1657350"/>
-            <a:ext cx="1428750" cy="304800"/>
+            <a:off x="400050" y="1981200"/>
+            <a:ext cx="1428750" cy="19050"/>
           </a:xfrm>
           <a:prstGeom xmlns:a="http://schemas.openxmlformats.org/drawingml/2006/main" prst="roundRect">
             <a:avLst>
@@ -15559,9 +15503,9 @@
             </a:avLst>
           </a:prstGeom>
           <a:solidFill xmlns:a="http://schemas.openxmlformats.org/drawingml/2006/main">
-            <a:srgbClr val="20382A"/>
+            <a:srgbClr val="75B78E"/>
           </a:solidFill>
-          <a:ln xmlns:a="http://schemas.openxmlformats.org/drawingml/2006/main" w="9525">
+          <a:ln xmlns:a="http://schemas.openxmlformats.org/drawingml/2006/main" w="0">
             <a:solidFill>
               <a:srgbClr val="75B78E"/>
             </a:solidFill>
@@ -15585,25 +15529,25 @@
         </p:nvSpPr>
         <p:spPr>
           <a:xfrm xmlns:a="http://schemas.openxmlformats.org/drawingml/2006/main">
-            <a:off x="495300" y="1714500"/>
-            <a:ext cx="1238250" cy="190500"/>
-          </a:xfrm>
-          <a:prstGeom xmlns:a="http://schemas.openxmlformats.org/drawingml/2006/main" prst="rect">
-            <a:avLst/>
-          </a:prstGeom>
-          <a:noFill xmlns:a="http://schemas.openxmlformats.org/drawingml/2006/main"/>
-          <a:ln xmlns:a="http://schemas.openxmlformats.org/drawingml/2006/main" w="0">
-            <a:noFill/>
-            <a:prstDash val="solid"/>
-          </a:ln>
-        </p:spPr>
-        <p:txBody>
-          <a:bodyPr xmlns:a="http://schemas.openxmlformats.org/drawingml/2006/main" anchor="t">
-            <a:normAutofit fontScale="86667"/>
-          </a:bodyPr>
-          <a:lstStyle xmlns:a="http://schemas.openxmlformats.org/drawingml/2006/main"/>
-          <a:p xmlns:a="http://schemas.openxmlformats.org/drawingml/2006/main">
-            <a:pPr algn="ctr">
+            <a:off x="400050" y="1676400"/>
+            <a:ext cx="1428750" cy="209550"/>
+          </a:xfrm>
+          <a:prstGeom xmlns:a="http://schemas.openxmlformats.org/drawingml/2006/main" prst="rect">
+            <a:avLst/>
+          </a:prstGeom>
+          <a:noFill xmlns:a="http://schemas.openxmlformats.org/drawingml/2006/main"/>
+          <a:ln xmlns:a="http://schemas.openxmlformats.org/drawingml/2006/main" w="0">
+            <a:noFill/>
+            <a:prstDash val="solid"/>
+          </a:ln>
+        </p:spPr>
+        <p:txBody>
+          <a:bodyPr xmlns:a="http://schemas.openxmlformats.org/drawingml/2006/main" anchor="t">
+            <a:normAutofit fontScale="100000"/>
+          </a:bodyPr>
+          <a:lstStyle xmlns:a="http://schemas.openxmlformats.org/drawingml/2006/main"/>
+          <a:p xmlns:a="http://schemas.openxmlformats.org/drawingml/2006/main">
+            <a:pPr algn="l">
               <a:buNone/>
               <a:defRPr sz="975" b="1">
                 <a:solidFill>
@@ -15999,7 +15943,7 @@
         <p:spPr>
           <a:xfrm xmlns:a="http://schemas.openxmlformats.org/drawingml/2006/main">
             <a:off x="400050" y="5467350"/>
-            <a:ext cx="2895600" cy="609600"/>
+            <a:ext cx="2895600" cy="9525"/>
           </a:xfrm>
           <a:prstGeom xmlns:a="http://schemas.openxmlformats.org/drawingml/2006/main" prst="roundRect">
             <a:avLst>
@@ -16007,9 +15951,9 @@
             </a:avLst>
           </a:prstGeom>
           <a:solidFill xmlns:a="http://schemas.openxmlformats.org/drawingml/2006/main">
-            <a:srgbClr val="211B14"/>
+            <a:srgbClr val="6B5F50"/>
           </a:solidFill>
-          <a:ln xmlns:a="http://schemas.openxmlformats.org/drawingml/2006/main" w="9525">
+          <a:ln xmlns:a="http://schemas.openxmlformats.org/drawingml/2006/main" w="0">
             <a:solidFill>
               <a:srgbClr val="6B5F50"/>
             </a:solidFill>
@@ -16033,25 +15977,25 @@
         </p:nvSpPr>
         <p:spPr>
           <a:xfrm xmlns:a="http://schemas.openxmlformats.org/drawingml/2006/main">
-            <a:off x="552450" y="5657850"/>
-            <a:ext cx="2590800" cy="228600"/>
-          </a:xfrm>
-          <a:prstGeom xmlns:a="http://schemas.openxmlformats.org/drawingml/2006/main" prst="rect">
-            <a:avLst/>
-          </a:prstGeom>
-          <a:noFill xmlns:a="http://schemas.openxmlformats.org/drawingml/2006/main"/>
-          <a:ln xmlns:a="http://schemas.openxmlformats.org/drawingml/2006/main" w="0">
-            <a:noFill/>
-            <a:prstDash val="solid"/>
-          </a:ln>
-        </p:spPr>
-        <p:txBody>
-          <a:bodyPr xmlns:a="http://schemas.openxmlformats.org/drawingml/2006/main" anchor="t">
-            <a:normAutofit fontScale="99468"/>
-          </a:bodyPr>
-          <a:lstStyle xmlns:a="http://schemas.openxmlformats.org/drawingml/2006/main"/>
-          <a:p xmlns:a="http://schemas.openxmlformats.org/drawingml/2006/main">
-            <a:pPr algn="ctr">
+            <a:off x="400050" y="5619750"/>
+            <a:ext cx="2895600" cy="266700"/>
+          </a:xfrm>
+          <a:prstGeom xmlns:a="http://schemas.openxmlformats.org/drawingml/2006/main" prst="rect">
+            <a:avLst/>
+          </a:prstGeom>
+          <a:noFill xmlns:a="http://schemas.openxmlformats.org/drawingml/2006/main"/>
+          <a:ln xmlns:a="http://schemas.openxmlformats.org/drawingml/2006/main" w="0">
+            <a:noFill/>
+            <a:prstDash val="solid"/>
+          </a:ln>
+        </p:spPr>
+        <p:txBody>
+          <a:bodyPr xmlns:a="http://schemas.openxmlformats.org/drawingml/2006/main" anchor="t">
+            <a:normAutofit fontScale="100000"/>
+          </a:bodyPr>
+          <a:lstStyle xmlns:a="http://schemas.openxmlformats.org/drawingml/2006/main"/>
+          <a:p xmlns:a="http://schemas.openxmlformats.org/drawingml/2006/main">
+            <a:pPr algn="l">
               <a:buNone/>
               <a:defRPr sz="1125" b="1">
                 <a:solidFill>
@@ -16339,9 +16283,7 @@
               <a:gd name="adj" fmla="val 4196"/>
             </a:avLst>
           </a:prstGeom>
-          <a:solidFill xmlns:a="http://schemas.openxmlformats.org/drawingml/2006/main">
-            <a:srgbClr val="14110D"/>
-          </a:solidFill>
+          <a:noFill xmlns:a="http://schemas.openxmlformats.org/drawingml/2006/main"/>
           <a:ln xmlns:a="http://schemas.openxmlformats.org/drawingml/2006/main" w="9525">
             <a:solidFill>
               <a:srgbClr val="6B5F50"/>
@@ -16359,7 +16301,7 @@
           <p:nvPr/>
         </p:nvPicPr>
         <p:blipFill>
-          <a:blip xmlns:r="http://schemas.openxmlformats.org/officeDocument/2006/relationships" xmlns:a="http://schemas.openxmlformats.org/drawingml/2006/main" r:embed="R722bcae7e1fe4f3f"/>
+          <a:blip xmlns:r="http://schemas.openxmlformats.org/officeDocument/2006/relationships" xmlns:a="http://schemas.openxmlformats.org/drawingml/2006/main" r:embed="Re83780bd905f456e"/>
           <a:srcRect xmlns:a="http://schemas.openxmlformats.org/drawingml/2006/main" l="0" t="46500" r="0" b="30636"/>
           <a:stretch xmlns:a="http://schemas.openxmlformats.org/drawingml/2006/main">
             <a:fillRect l="0" t="0" r="0" b="0"/>
@@ -16392,7 +16334,7 @@
         <p:spPr>
           <a:xfrm xmlns:a="http://schemas.openxmlformats.org/drawingml/2006/main">
             <a:off x="400050" y="1695450"/>
-            <a:ext cx="3562350" cy="838200"/>
+            <a:ext cx="3562350" cy="9525"/>
           </a:xfrm>
           <a:prstGeom xmlns:a="http://schemas.openxmlformats.org/drawingml/2006/main" prst="roundRect">
             <a:avLst>
@@ -16400,9 +16342,9 @@
             </a:avLst>
           </a:prstGeom>
           <a:solidFill xmlns:a="http://schemas.openxmlformats.org/drawingml/2006/main">
-            <a:srgbClr val="14110D"/>
+            <a:srgbClr val="6B5F50"/>
           </a:solidFill>
-          <a:ln xmlns:a="http://schemas.openxmlformats.org/drawingml/2006/main" w="9525">
+          <a:ln xmlns:a="http://schemas.openxmlformats.org/drawingml/2006/main" w="0">
             <a:solidFill>
               <a:srgbClr val="6B5F50"/>
             </a:solidFill>
@@ -16426,16 +16368,16 @@
         </p:nvSpPr>
         <p:spPr>
           <a:xfrm xmlns:a="http://schemas.openxmlformats.org/drawingml/2006/main">
-            <a:off x="571500" y="1933575"/>
-            <a:ext cx="323850" cy="323850"/>
+            <a:off x="571500" y="2047875"/>
+            <a:ext cx="76200" cy="76200"/>
           </a:xfrm>
           <a:prstGeom xmlns:a="http://schemas.openxmlformats.org/drawingml/2006/main" prst="ellipse">
             <a:avLst/>
           </a:prstGeom>
           <a:solidFill xmlns:a="http://schemas.openxmlformats.org/drawingml/2006/main">
-            <a:srgbClr val="20382A"/>
+            <a:srgbClr val="75B78E"/>
           </a:solidFill>
-          <a:ln xmlns:a="http://schemas.openxmlformats.org/drawingml/2006/main" w="9525">
+          <a:ln xmlns:a="http://schemas.openxmlformats.org/drawingml/2006/main" w="0">
             <a:solidFill>
               <a:srgbClr val="75B78E"/>
             </a:solidFill>
@@ -16473,7 +16415,7 @@
         </p:spPr>
         <p:txBody>
           <a:bodyPr xmlns:a="http://schemas.openxmlformats.org/drawingml/2006/main" anchor="t">
-            <a:normAutofit fontScale="10000"/>
+            <a:normAutofit fontScale="73162"/>
           </a:bodyPr>
           <a:lstStyle xmlns:a="http://schemas.openxmlformats.org/drawingml/2006/main"/>
           <a:p xmlns:a="http://schemas.openxmlformats.org/drawingml/2006/main">
@@ -16489,9 +16431,9 @@
               </a:defRPr>
             </a:pPr>
             <a:r>
-              <a:rPr sz="1200" b="1">
-                <a:solidFill>
-                  <a:srgbClr val="75B78E"/>
+              <a:rPr sz="100" b="0">
+                <a:solidFill>
+                  <a:srgbClr val="0A0907"/>
                 </a:solidFill>
                 <a:latin typeface="Arial"/>
                 <a:ea typeface="Arial"/>
@@ -16518,21 +16460,21 @@
         </p:nvSpPr>
         <p:spPr>
           <a:xfrm xmlns:a="http://schemas.openxmlformats.org/drawingml/2006/main">
-            <a:off x="1047750" y="1952625"/>
-            <a:ext cx="2667000" cy="285750"/>
-          </a:xfrm>
-          <a:prstGeom xmlns:a="http://schemas.openxmlformats.org/drawingml/2006/main" prst="rect">
-            <a:avLst/>
-          </a:prstGeom>
-          <a:noFill xmlns:a="http://schemas.openxmlformats.org/drawingml/2006/main"/>
-          <a:ln xmlns:a="http://schemas.openxmlformats.org/drawingml/2006/main" w="0">
-            <a:noFill/>
-            <a:prstDash val="solid"/>
-          </a:ln>
-        </p:spPr>
-        <p:txBody>
-          <a:bodyPr xmlns:a="http://schemas.openxmlformats.org/drawingml/2006/main" anchor="t">
-            <a:normAutofit fontScale="94444"/>
+            <a:off x="781050" y="1914525"/>
+            <a:ext cx="2933700" cy="342900"/>
+          </a:xfrm>
+          <a:prstGeom xmlns:a="http://schemas.openxmlformats.org/drawingml/2006/main" prst="rect">
+            <a:avLst/>
+          </a:prstGeom>
+          <a:noFill xmlns:a="http://schemas.openxmlformats.org/drawingml/2006/main"/>
+          <a:ln xmlns:a="http://schemas.openxmlformats.org/drawingml/2006/main" w="0">
+            <a:noFill/>
+            <a:prstDash val="solid"/>
+          </a:ln>
+        </p:spPr>
+        <p:txBody>
+          <a:bodyPr xmlns:a="http://schemas.openxmlformats.org/drawingml/2006/main" anchor="t">
+            <a:normAutofit fontScale="100000"/>
           </a:bodyPr>
           <a:lstStyle xmlns:a="http://schemas.openxmlformats.org/drawingml/2006/main"/>
           <a:p xmlns:a="http://schemas.openxmlformats.org/drawingml/2006/main">
@@ -16548,13 +16490,13 @@
               </a:defRPr>
             </a:pPr>
             <a:r>
-              <a:rPr sz="1350" b="1">
+              <a:rPr sz="1425" b="0">
                 <a:solidFill>
                   <a:srgbClr val="F1E9DC"/>
                 </a:solidFill>
-                <a:latin typeface="Arial"/>
-                <a:ea typeface="Arial"/>
-                <a:cs typeface="Arial"/>
+                <a:latin typeface="Georgia"/>
+                <a:ea typeface="Georgia"/>
+                <a:cs typeface="Georgia"/>
               </a:rPr>
               <a:t>Agent identity</a:t>
             </a:r>
@@ -16578,7 +16520,7 @@
         <p:spPr>
           <a:xfrm xmlns:a="http://schemas.openxmlformats.org/drawingml/2006/main">
             <a:off x="400050" y="2838450"/>
-            <a:ext cx="3562350" cy="838200"/>
+            <a:ext cx="3562350" cy="9525"/>
           </a:xfrm>
           <a:prstGeom xmlns:a="http://schemas.openxmlformats.org/drawingml/2006/main" prst="roundRect">
             <a:avLst>
@@ -16586,9 +16528,9 @@
             </a:avLst>
           </a:prstGeom>
           <a:solidFill xmlns:a="http://schemas.openxmlformats.org/drawingml/2006/main">
-            <a:srgbClr val="14110D"/>
+            <a:srgbClr val="6B5F50"/>
           </a:solidFill>
-          <a:ln xmlns:a="http://schemas.openxmlformats.org/drawingml/2006/main" w="9525">
+          <a:ln xmlns:a="http://schemas.openxmlformats.org/drawingml/2006/main" w="0">
             <a:solidFill>
               <a:srgbClr val="6B5F50"/>
             </a:solidFill>
@@ -16612,16 +16554,16 @@
         </p:nvSpPr>
         <p:spPr>
           <a:xfrm xmlns:a="http://schemas.openxmlformats.org/drawingml/2006/main">
-            <a:off x="571500" y="3076575"/>
-            <a:ext cx="323850" cy="323850"/>
+            <a:off x="571500" y="3190875"/>
+            <a:ext cx="76200" cy="76200"/>
           </a:xfrm>
           <a:prstGeom xmlns:a="http://schemas.openxmlformats.org/drawingml/2006/main" prst="ellipse">
             <a:avLst/>
           </a:prstGeom>
           <a:solidFill xmlns:a="http://schemas.openxmlformats.org/drawingml/2006/main">
-            <a:srgbClr val="20382A"/>
+            <a:srgbClr val="75B78E"/>
           </a:solidFill>
-          <a:ln xmlns:a="http://schemas.openxmlformats.org/drawingml/2006/main" w="9525">
+          <a:ln xmlns:a="http://schemas.openxmlformats.org/drawingml/2006/main" w="0">
             <a:solidFill>
               <a:srgbClr val="75B78E"/>
             </a:solidFill>
@@ -16659,7 +16601,7 @@
         </p:spPr>
         <p:txBody>
           <a:bodyPr xmlns:a="http://schemas.openxmlformats.org/drawingml/2006/main" anchor="t">
-            <a:normAutofit fontScale="10000"/>
+            <a:normAutofit fontScale="73162"/>
           </a:bodyPr>
           <a:lstStyle xmlns:a="http://schemas.openxmlformats.org/drawingml/2006/main"/>
           <a:p xmlns:a="http://schemas.openxmlformats.org/drawingml/2006/main">
@@ -16675,9 +16617,9 @@
               </a:defRPr>
             </a:pPr>
             <a:r>
-              <a:rPr sz="1200" b="1">
-                <a:solidFill>
-                  <a:srgbClr val="75B78E"/>
+              <a:rPr sz="100" b="0">
+                <a:solidFill>
+                  <a:srgbClr val="0A0907"/>
                 </a:solidFill>
                 <a:latin typeface="Arial"/>
                 <a:ea typeface="Arial"/>
@@ -16704,21 +16646,21 @@
         </p:nvSpPr>
         <p:spPr>
           <a:xfrm xmlns:a="http://schemas.openxmlformats.org/drawingml/2006/main">
-            <a:off x="1047750" y="3095625"/>
-            <a:ext cx="2667000" cy="285750"/>
-          </a:xfrm>
-          <a:prstGeom xmlns:a="http://schemas.openxmlformats.org/drawingml/2006/main" prst="rect">
-            <a:avLst/>
-          </a:prstGeom>
-          <a:noFill xmlns:a="http://schemas.openxmlformats.org/drawingml/2006/main"/>
-          <a:ln xmlns:a="http://schemas.openxmlformats.org/drawingml/2006/main" w="0">
-            <a:noFill/>
-            <a:prstDash val="solid"/>
-          </a:ln>
-        </p:spPr>
-        <p:txBody>
-          <a:bodyPr xmlns:a="http://schemas.openxmlformats.org/drawingml/2006/main" anchor="t">
-            <a:normAutofit fontScale="94444"/>
+            <a:off x="781050" y="3057525"/>
+            <a:ext cx="2933700" cy="342900"/>
+          </a:xfrm>
+          <a:prstGeom xmlns:a="http://schemas.openxmlformats.org/drawingml/2006/main" prst="rect">
+            <a:avLst/>
+          </a:prstGeom>
+          <a:noFill xmlns:a="http://schemas.openxmlformats.org/drawingml/2006/main"/>
+          <a:ln xmlns:a="http://schemas.openxmlformats.org/drawingml/2006/main" w="0">
+            <a:noFill/>
+            <a:prstDash val="solid"/>
+          </a:ln>
+        </p:spPr>
+        <p:txBody>
+          <a:bodyPr xmlns:a="http://schemas.openxmlformats.org/drawingml/2006/main" anchor="t">
+            <a:normAutofit fontScale="100000"/>
           </a:bodyPr>
           <a:lstStyle xmlns:a="http://schemas.openxmlformats.org/drawingml/2006/main"/>
           <a:p xmlns:a="http://schemas.openxmlformats.org/drawingml/2006/main">
@@ -16734,13 +16676,13 @@
               </a:defRPr>
             </a:pPr>
             <a:r>
-              <a:rPr sz="1350" b="1">
+              <a:rPr sz="1425" b="0">
                 <a:solidFill>
                   <a:srgbClr val="F1E9DC"/>
                 </a:solidFill>
-                <a:latin typeface="Arial"/>
-                <a:ea typeface="Arial"/>
-                <a:cs typeface="Arial"/>
+                <a:latin typeface="Georgia"/>
+                <a:ea typeface="Georgia"/>
+                <a:cs typeface="Georgia"/>
               </a:rPr>
               <a:t>User mandate</a:t>
             </a:r>
@@ -16764,7 +16706,7 @@
         <p:spPr>
           <a:xfrm xmlns:a="http://schemas.openxmlformats.org/drawingml/2006/main">
             <a:off x="400050" y="3981450"/>
-            <a:ext cx="3562350" cy="838200"/>
+            <a:ext cx="3562350" cy="9525"/>
           </a:xfrm>
           <a:prstGeom xmlns:a="http://schemas.openxmlformats.org/drawingml/2006/main" prst="roundRect">
             <a:avLst>
@@ -16772,9 +16714,9 @@
             </a:avLst>
           </a:prstGeom>
           <a:solidFill xmlns:a="http://schemas.openxmlformats.org/drawingml/2006/main">
-            <a:srgbClr val="14110D"/>
+            <a:srgbClr val="6B5F50"/>
           </a:solidFill>
-          <a:ln xmlns:a="http://schemas.openxmlformats.org/drawingml/2006/main" w="9525">
+          <a:ln xmlns:a="http://schemas.openxmlformats.org/drawingml/2006/main" w="0">
             <a:solidFill>
               <a:srgbClr val="6B5F50"/>
             </a:solidFill>
@@ -16798,16 +16740,16 @@
         </p:nvSpPr>
         <p:spPr>
           <a:xfrm xmlns:a="http://schemas.openxmlformats.org/drawingml/2006/main">
-            <a:off x="571500" y="4219575"/>
-            <a:ext cx="323850" cy="323850"/>
+            <a:off x="571500" y="4333875"/>
+            <a:ext cx="76200" cy="76200"/>
           </a:xfrm>
           <a:prstGeom xmlns:a="http://schemas.openxmlformats.org/drawingml/2006/main" prst="ellipse">
             <a:avLst/>
           </a:prstGeom>
           <a:solidFill xmlns:a="http://schemas.openxmlformats.org/drawingml/2006/main">
-            <a:srgbClr val="20382A"/>
+            <a:srgbClr val="75B78E"/>
           </a:solidFill>
-          <a:ln xmlns:a="http://schemas.openxmlformats.org/drawingml/2006/main" w="9525">
+          <a:ln xmlns:a="http://schemas.openxmlformats.org/drawingml/2006/main" w="0">
             <a:solidFill>
               <a:srgbClr val="75B78E"/>
             </a:solidFill>
@@ -16845,7 +16787,7 @@
         </p:spPr>
         <p:txBody>
           <a:bodyPr xmlns:a="http://schemas.openxmlformats.org/drawingml/2006/main" anchor="t">
-            <a:normAutofit fontScale="10000"/>
+            <a:normAutofit fontScale="73162"/>
           </a:bodyPr>
           <a:lstStyle xmlns:a="http://schemas.openxmlformats.org/drawingml/2006/main"/>
           <a:p xmlns:a="http://schemas.openxmlformats.org/drawingml/2006/main">
@@ -16861,9 +16803,9 @@
               </a:defRPr>
             </a:pPr>
             <a:r>
-              <a:rPr sz="1200" b="1">
-                <a:solidFill>
-                  <a:srgbClr val="75B78E"/>
+              <a:rPr sz="100" b="0">
+                <a:solidFill>
+                  <a:srgbClr val="0A0907"/>
                 </a:solidFill>
                 <a:latin typeface="Arial"/>
                 <a:ea typeface="Arial"/>
@@ -16890,21 +16832,21 @@
         </p:nvSpPr>
         <p:spPr>
           <a:xfrm xmlns:a="http://schemas.openxmlformats.org/drawingml/2006/main">
-            <a:off x="1047750" y="4238625"/>
-            <a:ext cx="2667000" cy="285750"/>
-          </a:xfrm>
-          <a:prstGeom xmlns:a="http://schemas.openxmlformats.org/drawingml/2006/main" prst="rect">
-            <a:avLst/>
-          </a:prstGeom>
-          <a:noFill xmlns:a="http://schemas.openxmlformats.org/drawingml/2006/main"/>
-          <a:ln xmlns:a="http://schemas.openxmlformats.org/drawingml/2006/main" w="0">
-            <a:noFill/>
-            <a:prstDash val="solid"/>
-          </a:ln>
-        </p:spPr>
-        <p:txBody>
-          <a:bodyPr xmlns:a="http://schemas.openxmlformats.org/drawingml/2006/main" anchor="t">
-            <a:normAutofit fontScale="94444"/>
+            <a:off x="781050" y="4200525"/>
+            <a:ext cx="2933700" cy="342900"/>
+          </a:xfrm>
+          <a:prstGeom xmlns:a="http://schemas.openxmlformats.org/drawingml/2006/main" prst="rect">
+            <a:avLst/>
+          </a:prstGeom>
+          <a:noFill xmlns:a="http://schemas.openxmlformats.org/drawingml/2006/main"/>
+          <a:ln xmlns:a="http://schemas.openxmlformats.org/drawingml/2006/main" w="0">
+            <a:noFill/>
+            <a:prstDash val="solid"/>
+          </a:ln>
+        </p:spPr>
+        <p:txBody>
+          <a:bodyPr xmlns:a="http://schemas.openxmlformats.org/drawingml/2006/main" anchor="t">
+            <a:normAutofit fontScale="100000"/>
           </a:bodyPr>
           <a:lstStyle xmlns:a="http://schemas.openxmlformats.org/drawingml/2006/main"/>
           <a:p xmlns:a="http://schemas.openxmlformats.org/drawingml/2006/main">
@@ -16920,13 +16862,13 @@
               </a:defRPr>
             </a:pPr>
             <a:r>
-              <a:rPr sz="1350" b="1">
+              <a:rPr sz="1425" b="0">
                 <a:solidFill>
                   <a:srgbClr val="F1E9DC"/>
                 </a:solidFill>
-                <a:latin typeface="Arial"/>
-                <a:ea typeface="Arial"/>
-                <a:cs typeface="Arial"/>
+                <a:latin typeface="Georgia"/>
+                <a:ea typeface="Georgia"/>
+                <a:cs typeface="Georgia"/>
               </a:rPr>
               <a:t>Scope + amount</a:t>
             </a:r>
@@ -16950,7 +16892,7 @@
         <p:spPr>
           <a:xfrm xmlns:a="http://schemas.openxmlformats.org/drawingml/2006/main">
             <a:off x="4305300" y="1695450"/>
-            <a:ext cx="3562350" cy="838200"/>
+            <a:ext cx="3562350" cy="9525"/>
           </a:xfrm>
           <a:prstGeom xmlns:a="http://schemas.openxmlformats.org/drawingml/2006/main" prst="roundRect">
             <a:avLst>
@@ -16958,9 +16900,9 @@
             </a:avLst>
           </a:prstGeom>
           <a:solidFill xmlns:a="http://schemas.openxmlformats.org/drawingml/2006/main">
-            <a:srgbClr val="14110D"/>
+            <a:srgbClr val="6B5F50"/>
           </a:solidFill>
-          <a:ln xmlns:a="http://schemas.openxmlformats.org/drawingml/2006/main" w="9525">
+          <a:ln xmlns:a="http://schemas.openxmlformats.org/drawingml/2006/main" w="0">
             <a:solidFill>
               <a:srgbClr val="6B5F50"/>
             </a:solidFill>
@@ -16984,16 +16926,16 @@
         </p:nvSpPr>
         <p:spPr>
           <a:xfrm xmlns:a="http://schemas.openxmlformats.org/drawingml/2006/main">
-            <a:off x="4476750" y="1933575"/>
-            <a:ext cx="323850" cy="323850"/>
+            <a:off x="4476750" y="2047875"/>
+            <a:ext cx="76200" cy="76200"/>
           </a:xfrm>
           <a:prstGeom xmlns:a="http://schemas.openxmlformats.org/drawingml/2006/main" prst="ellipse">
             <a:avLst/>
           </a:prstGeom>
           <a:solidFill xmlns:a="http://schemas.openxmlformats.org/drawingml/2006/main">
-            <a:srgbClr val="20382A"/>
+            <a:srgbClr val="75B78E"/>
           </a:solidFill>
-          <a:ln xmlns:a="http://schemas.openxmlformats.org/drawingml/2006/main" w="9525">
+          <a:ln xmlns:a="http://schemas.openxmlformats.org/drawingml/2006/main" w="0">
             <a:solidFill>
               <a:srgbClr val="75B78E"/>
             </a:solidFill>
@@ -17031,7 +16973,7 @@
         </p:spPr>
         <p:txBody>
           <a:bodyPr xmlns:a="http://schemas.openxmlformats.org/drawingml/2006/main" anchor="t">
-            <a:normAutofit fontScale="10000"/>
+            <a:normAutofit fontScale="73162"/>
           </a:bodyPr>
           <a:lstStyle xmlns:a="http://schemas.openxmlformats.org/drawingml/2006/main"/>
           <a:p xmlns:a="http://schemas.openxmlformats.org/drawingml/2006/main">
@@ -17047,9 +16989,9 @@
               </a:defRPr>
             </a:pPr>
             <a:r>
-              <a:rPr sz="1200" b="1">
-                <a:solidFill>
-                  <a:srgbClr val="75B78E"/>
+              <a:rPr sz="100" b="0">
+                <a:solidFill>
+                  <a:srgbClr val="0A0907"/>
                 </a:solidFill>
                 <a:latin typeface="Arial"/>
                 <a:ea typeface="Arial"/>
@@ -17076,21 +17018,21 @@
         </p:nvSpPr>
         <p:spPr>
           <a:xfrm xmlns:a="http://schemas.openxmlformats.org/drawingml/2006/main">
-            <a:off x="4953000" y="1952625"/>
-            <a:ext cx="2667000" cy="285750"/>
-          </a:xfrm>
-          <a:prstGeom xmlns:a="http://schemas.openxmlformats.org/drawingml/2006/main" prst="rect">
-            <a:avLst/>
-          </a:prstGeom>
-          <a:noFill xmlns:a="http://schemas.openxmlformats.org/drawingml/2006/main"/>
-          <a:ln xmlns:a="http://schemas.openxmlformats.org/drawingml/2006/main" w="0">
-            <a:noFill/>
-            <a:prstDash val="solid"/>
-          </a:ln>
-        </p:spPr>
-        <p:txBody>
-          <a:bodyPr xmlns:a="http://schemas.openxmlformats.org/drawingml/2006/main" anchor="t">
-            <a:normAutofit fontScale="94444"/>
+            <a:off x="4686300" y="1914525"/>
+            <a:ext cx="2933700" cy="342900"/>
+          </a:xfrm>
+          <a:prstGeom xmlns:a="http://schemas.openxmlformats.org/drawingml/2006/main" prst="rect">
+            <a:avLst/>
+          </a:prstGeom>
+          <a:noFill xmlns:a="http://schemas.openxmlformats.org/drawingml/2006/main"/>
+          <a:ln xmlns:a="http://schemas.openxmlformats.org/drawingml/2006/main" w="0">
+            <a:noFill/>
+            <a:prstDash val="solid"/>
+          </a:ln>
+        </p:spPr>
+        <p:txBody>
+          <a:bodyPr xmlns:a="http://schemas.openxmlformats.org/drawingml/2006/main" anchor="t">
+            <a:normAutofit fontScale="100000"/>
           </a:bodyPr>
           <a:lstStyle xmlns:a="http://schemas.openxmlformats.org/drawingml/2006/main"/>
           <a:p xmlns:a="http://schemas.openxmlformats.org/drawingml/2006/main">
@@ -17106,13 +17048,13 @@
               </a:defRPr>
             </a:pPr>
             <a:r>
-              <a:rPr sz="1350" b="1">
+              <a:rPr sz="1425" b="0">
                 <a:solidFill>
                   <a:srgbClr val="F1E9DC"/>
                 </a:solidFill>
-                <a:latin typeface="Arial"/>
-                <a:ea typeface="Arial"/>
-                <a:cs typeface="Arial"/>
+                <a:latin typeface="Georgia"/>
+                <a:ea typeface="Georgia"/>
+                <a:cs typeface="Georgia"/>
               </a:rPr>
               <a:t>Merchant + cart</a:t>
             </a:r>
@@ -17136,7 +17078,7 @@
         <p:spPr>
           <a:xfrm xmlns:a="http://schemas.openxmlformats.org/drawingml/2006/main">
             <a:off x="4305300" y="2838450"/>
-            <a:ext cx="3562350" cy="838200"/>
+            <a:ext cx="3562350" cy="9525"/>
           </a:xfrm>
           <a:prstGeom xmlns:a="http://schemas.openxmlformats.org/drawingml/2006/main" prst="roundRect">
             <a:avLst>
@@ -17144,9 +17086,9 @@
             </a:avLst>
           </a:prstGeom>
           <a:solidFill xmlns:a="http://schemas.openxmlformats.org/drawingml/2006/main">
-            <a:srgbClr val="14110D"/>
+            <a:srgbClr val="6B5F50"/>
           </a:solidFill>
-          <a:ln xmlns:a="http://schemas.openxmlformats.org/drawingml/2006/main" w="9525">
+          <a:ln xmlns:a="http://schemas.openxmlformats.org/drawingml/2006/main" w="0">
             <a:solidFill>
               <a:srgbClr val="6B5F50"/>
             </a:solidFill>
@@ -17170,16 +17112,16 @@
         </p:nvSpPr>
         <p:spPr>
           <a:xfrm xmlns:a="http://schemas.openxmlformats.org/drawingml/2006/main">
-            <a:off x="4476750" y="3076575"/>
-            <a:ext cx="323850" cy="323850"/>
+            <a:off x="4476750" y="3190875"/>
+            <a:ext cx="76200" cy="76200"/>
           </a:xfrm>
           <a:prstGeom xmlns:a="http://schemas.openxmlformats.org/drawingml/2006/main" prst="ellipse">
             <a:avLst/>
           </a:prstGeom>
           <a:solidFill xmlns:a="http://schemas.openxmlformats.org/drawingml/2006/main">
-            <a:srgbClr val="20382A"/>
+            <a:srgbClr val="75B78E"/>
           </a:solidFill>
-          <a:ln xmlns:a="http://schemas.openxmlformats.org/drawingml/2006/main" w="9525">
+          <a:ln xmlns:a="http://schemas.openxmlformats.org/drawingml/2006/main" w="0">
             <a:solidFill>
               <a:srgbClr val="75B78E"/>
             </a:solidFill>
@@ -17217,7 +17159,7 @@
         </p:spPr>
         <p:txBody>
           <a:bodyPr xmlns:a="http://schemas.openxmlformats.org/drawingml/2006/main" anchor="t">
-            <a:normAutofit fontScale="10000"/>
+            <a:normAutofit fontScale="73162"/>
           </a:bodyPr>
           <a:lstStyle xmlns:a="http://schemas.openxmlformats.org/drawingml/2006/main"/>
           <a:p xmlns:a="http://schemas.openxmlformats.org/drawingml/2006/main">
@@ -17233,9 +17175,9 @@
               </a:defRPr>
             </a:pPr>
             <a:r>
-              <a:rPr sz="1200" b="1">
-                <a:solidFill>
-                  <a:srgbClr val="75B78E"/>
+              <a:rPr sz="100" b="0">
+                <a:solidFill>
+                  <a:srgbClr val="0A0907"/>
                 </a:solidFill>
                 <a:latin typeface="Arial"/>
                 <a:ea typeface="Arial"/>
@@ -17262,21 +17204,21 @@
         </p:nvSpPr>
         <p:spPr>
           <a:xfrm xmlns:a="http://schemas.openxmlformats.org/drawingml/2006/main">
-            <a:off x="4953000" y="3095625"/>
-            <a:ext cx="2667000" cy="285750"/>
-          </a:xfrm>
-          <a:prstGeom xmlns:a="http://schemas.openxmlformats.org/drawingml/2006/main" prst="rect">
-            <a:avLst/>
-          </a:prstGeom>
-          <a:noFill xmlns:a="http://schemas.openxmlformats.org/drawingml/2006/main"/>
-          <a:ln xmlns:a="http://schemas.openxmlformats.org/drawingml/2006/main" w="0">
-            <a:noFill/>
-            <a:prstDash val="solid"/>
-          </a:ln>
-        </p:spPr>
-        <p:txBody>
-          <a:bodyPr xmlns:a="http://schemas.openxmlformats.org/drawingml/2006/main" anchor="t">
-            <a:normAutofit fontScale="94444"/>
+            <a:off x="4686300" y="3057525"/>
+            <a:ext cx="2933700" cy="342900"/>
+          </a:xfrm>
+          <a:prstGeom xmlns:a="http://schemas.openxmlformats.org/drawingml/2006/main" prst="rect">
+            <a:avLst/>
+          </a:prstGeom>
+          <a:noFill xmlns:a="http://schemas.openxmlformats.org/drawingml/2006/main"/>
+          <a:ln xmlns:a="http://schemas.openxmlformats.org/drawingml/2006/main" w="0">
+            <a:noFill/>
+            <a:prstDash val="solid"/>
+          </a:ln>
+        </p:spPr>
+        <p:txBody>
+          <a:bodyPr xmlns:a="http://schemas.openxmlformats.org/drawingml/2006/main" anchor="t">
+            <a:normAutofit fontScale="100000"/>
           </a:bodyPr>
           <a:lstStyle xmlns:a="http://schemas.openxmlformats.org/drawingml/2006/main"/>
           <a:p xmlns:a="http://schemas.openxmlformats.org/drawingml/2006/main">
@@ -17292,13 +17234,13 @@
               </a:defRPr>
             </a:pPr>
             <a:r>
-              <a:rPr sz="1350" b="1">
+              <a:rPr sz="1425" b="0">
                 <a:solidFill>
                   <a:srgbClr val="F1E9DC"/>
                 </a:solidFill>
-                <a:latin typeface="Arial"/>
-                <a:ea typeface="Arial"/>
-                <a:cs typeface="Arial"/>
+                <a:latin typeface="Georgia"/>
+                <a:ea typeface="Georgia"/>
+                <a:cs typeface="Georgia"/>
               </a:rPr>
               <a:t>Expiry + nonce</a:t>
             </a:r>
@@ -17322,7 +17264,7 @@
         <p:spPr>
           <a:xfrm xmlns:a="http://schemas.openxmlformats.org/drawingml/2006/main">
             <a:off x="4305300" y="3981450"/>
-            <a:ext cx="3562350" cy="838200"/>
+            <a:ext cx="3562350" cy="9525"/>
           </a:xfrm>
           <a:prstGeom xmlns:a="http://schemas.openxmlformats.org/drawingml/2006/main" prst="roundRect">
             <a:avLst>
@@ -17330,9 +17272,9 @@
             </a:avLst>
           </a:prstGeom>
           <a:solidFill xmlns:a="http://schemas.openxmlformats.org/drawingml/2006/main">
-            <a:srgbClr val="14110D"/>
+            <a:srgbClr val="6B5F50"/>
           </a:solidFill>
-          <a:ln xmlns:a="http://schemas.openxmlformats.org/drawingml/2006/main" w="9525">
+          <a:ln xmlns:a="http://schemas.openxmlformats.org/drawingml/2006/main" w="0">
             <a:solidFill>
               <a:srgbClr val="6B5F50"/>
             </a:solidFill>
@@ -17356,16 +17298,16 @@
         </p:nvSpPr>
         <p:spPr>
           <a:xfrm xmlns:a="http://schemas.openxmlformats.org/drawingml/2006/main">
-            <a:off x="4476750" y="4219575"/>
-            <a:ext cx="323850" cy="323850"/>
+            <a:off x="4476750" y="4333875"/>
+            <a:ext cx="76200" cy="76200"/>
           </a:xfrm>
           <a:prstGeom xmlns:a="http://schemas.openxmlformats.org/drawingml/2006/main" prst="ellipse">
             <a:avLst/>
           </a:prstGeom>
           <a:solidFill xmlns:a="http://schemas.openxmlformats.org/drawingml/2006/main">
-            <a:srgbClr val="20382A"/>
+            <a:srgbClr val="75B78E"/>
           </a:solidFill>
-          <a:ln xmlns:a="http://schemas.openxmlformats.org/drawingml/2006/main" w="9525">
+          <a:ln xmlns:a="http://schemas.openxmlformats.org/drawingml/2006/main" w="0">
             <a:solidFill>
               <a:srgbClr val="75B78E"/>
             </a:solidFill>
@@ -17403,7 +17345,7 @@
         </p:spPr>
         <p:txBody>
           <a:bodyPr xmlns:a="http://schemas.openxmlformats.org/drawingml/2006/main" anchor="t">
-            <a:normAutofit fontScale="10000"/>
+            <a:normAutofit fontScale="73162"/>
           </a:bodyPr>
           <a:lstStyle xmlns:a="http://schemas.openxmlformats.org/drawingml/2006/main"/>
           <a:p xmlns:a="http://schemas.openxmlformats.org/drawingml/2006/main">
@@ -17419,9 +17361,9 @@
               </a:defRPr>
             </a:pPr>
             <a:r>
-              <a:rPr sz="1200" b="1">
-                <a:solidFill>
-                  <a:srgbClr val="75B78E"/>
+              <a:rPr sz="100" b="0">
+                <a:solidFill>
+                  <a:srgbClr val="0A0907"/>
                 </a:solidFill>
                 <a:latin typeface="Arial"/>
                 <a:ea typeface="Arial"/>
@@ -17448,21 +17390,21 @@
         </p:nvSpPr>
         <p:spPr>
           <a:xfrm xmlns:a="http://schemas.openxmlformats.org/drawingml/2006/main">
-            <a:off x="4953000" y="4238625"/>
-            <a:ext cx="2667000" cy="285750"/>
-          </a:xfrm>
-          <a:prstGeom xmlns:a="http://schemas.openxmlformats.org/drawingml/2006/main" prst="rect">
-            <a:avLst/>
-          </a:prstGeom>
-          <a:noFill xmlns:a="http://schemas.openxmlformats.org/drawingml/2006/main"/>
-          <a:ln xmlns:a="http://schemas.openxmlformats.org/drawingml/2006/main" w="0">
-            <a:noFill/>
-            <a:prstDash val="solid"/>
-          </a:ln>
-        </p:spPr>
-        <p:txBody>
-          <a:bodyPr xmlns:a="http://schemas.openxmlformats.org/drawingml/2006/main" anchor="t">
-            <a:normAutofit fontScale="94444"/>
+            <a:off x="4686300" y="4200525"/>
+            <a:ext cx="2933700" cy="342900"/>
+          </a:xfrm>
+          <a:prstGeom xmlns:a="http://schemas.openxmlformats.org/drawingml/2006/main" prst="rect">
+            <a:avLst/>
+          </a:prstGeom>
+          <a:noFill xmlns:a="http://schemas.openxmlformats.org/drawingml/2006/main"/>
+          <a:ln xmlns:a="http://schemas.openxmlformats.org/drawingml/2006/main" w="0">
+            <a:noFill/>
+            <a:prstDash val="solid"/>
+          </a:ln>
+        </p:spPr>
+        <p:txBody>
+          <a:bodyPr xmlns:a="http://schemas.openxmlformats.org/drawingml/2006/main" anchor="t">
+            <a:normAutofit fontScale="100000"/>
           </a:bodyPr>
           <a:lstStyle xmlns:a="http://schemas.openxmlformats.org/drawingml/2006/main"/>
           <a:p xmlns:a="http://schemas.openxmlformats.org/drawingml/2006/main">
@@ -17478,13 +17420,13 @@
               </a:defRPr>
             </a:pPr>
             <a:r>
-              <a:rPr sz="1350" b="1">
+              <a:rPr sz="1425" b="0">
                 <a:solidFill>
                   <a:srgbClr val="F1E9DC"/>
                 </a:solidFill>
-                <a:latin typeface="Arial"/>
-                <a:ea typeface="Arial"/>
-                <a:cs typeface="Arial"/>
+                <a:latin typeface="Georgia"/>
+                <a:ea typeface="Georgia"/>
+                <a:cs typeface="Georgia"/>
               </a:rPr>
               <a:t>Replay rejection</a:t>
             </a:r>
@@ -17508,7 +17450,7 @@
         <p:spPr>
           <a:xfrm xmlns:a="http://schemas.openxmlformats.org/drawingml/2006/main">
             <a:off x="400050" y="5276850"/>
-            <a:ext cx="7467600" cy="838200"/>
+            <a:ext cx="7467600" cy="19050"/>
           </a:xfrm>
           <a:prstGeom xmlns:a="http://schemas.openxmlformats.org/drawingml/2006/main" prst="roundRect">
             <a:avLst>
@@ -17516,9 +17458,9 @@
             </a:avLst>
           </a:prstGeom>
           <a:solidFill xmlns:a="http://schemas.openxmlformats.org/drawingml/2006/main">
-            <a:srgbClr val="211B14"/>
+            <a:srgbClr val="E35E54"/>
           </a:solidFill>
-          <a:ln xmlns:a="http://schemas.openxmlformats.org/drawingml/2006/main" w="9525">
+          <a:ln xmlns:a="http://schemas.openxmlformats.org/drawingml/2006/main" w="0">
             <a:solidFill>
               <a:srgbClr val="E35E54"/>
             </a:solidFill>
@@ -17900,7 +17842,7 @@
         <p:spPr>
           <a:xfrm xmlns:a="http://schemas.openxmlformats.org/drawingml/2006/main">
             <a:off x="400050" y="1695450"/>
-            <a:ext cx="2038350" cy="2628900"/>
+            <a:ext cx="2038350" cy="9525"/>
           </a:xfrm>
           <a:prstGeom xmlns:a="http://schemas.openxmlformats.org/drawingml/2006/main" prst="roundRect">
             <a:avLst>
@@ -17908,9 +17850,9 @@
             </a:avLst>
           </a:prstGeom>
           <a:solidFill xmlns:a="http://schemas.openxmlformats.org/drawingml/2006/main">
-            <a:srgbClr val="14110D"/>
+            <a:srgbClr val="6B5F50"/>
           </a:solidFill>
-          <a:ln xmlns:a="http://schemas.openxmlformats.org/drawingml/2006/main" w="9525">
+          <a:ln xmlns:a="http://schemas.openxmlformats.org/drawingml/2006/main" w="0">
             <a:solidFill>
               <a:srgbClr val="6B5F50"/>
             </a:solidFill>
@@ -17948,7 +17890,7 @@
         </p:spPr>
         <p:txBody>
           <a:bodyPr xmlns:a="http://schemas.openxmlformats.org/drawingml/2006/main" anchor="t">
-            <a:normAutofit fontScale="100000"/>
+            <a:normAutofit fontScale="66667"/>
           </a:bodyPr>
           <a:lstStyle xmlns:a="http://schemas.openxmlformats.org/drawingml/2006/main"/>
           <a:p xmlns:a="http://schemas.openxmlformats.org/drawingml/2006/main">
@@ -17964,73 +17906,73 @@
               </a:defRPr>
             </a:pPr>
             <a:r>
-              <a:rPr sz="825" b="1">
+              <a:rPr sz="1350" b="0">
                 <a:solidFill>
                   <a:srgbClr val="F19A68"/>
-                </a:solidFill>
-                <a:latin typeface="Menlo"/>
-                <a:ea typeface="Menlo"/>
-                <a:cs typeface="Menlo"/>
-              </a:rPr>
-              <a:t>01</a:t>
-            </a:r>
-          </a:p>
-        </p:txBody>
-      </p:sp>
-      <p:sp>
-        <p:nvSpPr>
-          <p:cNvPr id="7" name="">
-            <a:extLst xmlns:a="http://schemas.openxmlformats.org/drawingml/2006/main">
-              <a:ext uri="{FF2B5EF4-FFF2-40B4-BE49-F238E27FC236}">
-                <a16:creationId xmlns:a16="http://schemas.microsoft.com/office/drawing/2014/main" id="{5B910A1C-2805-4E76-AE96-4BFAE20280D9}"/>
-              </a:ext>
-            </a:extLst>
-          </p:cNvPr>
-          <p:cNvSpPr>
-            <a:spLocks xmlns:a="http://schemas.openxmlformats.org/drawingml/2006/main" noGrp="1"/>
-          </p:cNvSpPr>
-          <p:nvPr/>
-        </p:nvSpPr>
-        <p:spPr>
-          <a:xfrm xmlns:a="http://schemas.openxmlformats.org/drawingml/2006/main">
-            <a:off x="571500" y="2362200"/>
-            <a:ext cx="1695450" cy="533400"/>
-          </a:xfrm>
-          <a:prstGeom xmlns:a="http://schemas.openxmlformats.org/drawingml/2006/main" prst="rect">
-            <a:avLst/>
-          </a:prstGeom>
-          <a:noFill xmlns:a="http://schemas.openxmlformats.org/drawingml/2006/main"/>
-          <a:ln xmlns:a="http://schemas.openxmlformats.org/drawingml/2006/main" w="0">
-            <a:noFill/>
-            <a:prstDash val="solid"/>
-          </a:ln>
-        </p:spPr>
-        <p:txBody>
-          <a:bodyPr xmlns:a="http://schemas.openxmlformats.org/drawingml/2006/main" anchor="t">
-            <a:normAutofit fontScale="100000"/>
-          </a:bodyPr>
-          <a:lstStyle xmlns:a="http://schemas.openxmlformats.org/drawingml/2006/main"/>
-          <a:p xmlns:a="http://schemas.openxmlformats.org/drawingml/2006/main">
-            <a:pPr algn="l">
-              <a:buNone/>
-              <a:defRPr sz="1650" b="1">
-                <a:solidFill>
-                  <a:srgbClr val="171714"/>
-                </a:solidFill>
-                <a:latin typeface="Arial"/>
-                <a:ea typeface="Arial"/>
-                <a:cs typeface="Arial"/>
-              </a:defRPr>
-            </a:pPr>
-            <a:r>
-              <a:rPr sz="1500" b="0">
-                <a:solidFill>
-                  <a:srgbClr val="F1E9DC"/>
                 </a:solidFill>
                 <a:latin typeface="Georgia"/>
                 <a:ea typeface="Georgia"/>
                 <a:cs typeface="Georgia"/>
               </a:rPr>
+              <a:t>01</a:t>
+            </a:r>
+          </a:p>
+        </p:txBody>
+      </p:sp>
+      <p:sp>
+        <p:nvSpPr>
+          <p:cNvPr id="7" name="">
+            <a:extLst xmlns:a="http://schemas.openxmlformats.org/drawingml/2006/main">
+              <a:ext uri="{FF2B5EF4-FFF2-40B4-BE49-F238E27FC236}">
+                <a16:creationId xmlns:a16="http://schemas.microsoft.com/office/drawing/2014/main" id="{5B910A1C-2805-4E76-AE96-4BFAE20280D9}"/>
+              </a:ext>
+            </a:extLst>
+          </p:cNvPr>
+          <p:cNvSpPr>
+            <a:spLocks xmlns:a="http://schemas.openxmlformats.org/drawingml/2006/main" noGrp="1"/>
+          </p:cNvSpPr>
+          <p:nvPr/>
+        </p:nvSpPr>
+        <p:spPr>
+          <a:xfrm xmlns:a="http://schemas.openxmlformats.org/drawingml/2006/main">
+            <a:off x="571500" y="2362200"/>
+            <a:ext cx="1695450" cy="533400"/>
+          </a:xfrm>
+          <a:prstGeom xmlns:a="http://schemas.openxmlformats.org/drawingml/2006/main" prst="rect">
+            <a:avLst/>
+          </a:prstGeom>
+          <a:noFill xmlns:a="http://schemas.openxmlformats.org/drawingml/2006/main"/>
+          <a:ln xmlns:a="http://schemas.openxmlformats.org/drawingml/2006/main" w="0">
+            <a:noFill/>
+            <a:prstDash val="solid"/>
+          </a:ln>
+        </p:spPr>
+        <p:txBody>
+          <a:bodyPr xmlns:a="http://schemas.openxmlformats.org/drawingml/2006/main" anchor="t">
+            <a:normAutofit fontScale="100000"/>
+          </a:bodyPr>
+          <a:lstStyle xmlns:a="http://schemas.openxmlformats.org/drawingml/2006/main"/>
+          <a:p xmlns:a="http://schemas.openxmlformats.org/drawingml/2006/main">
+            <a:pPr algn="l">
+              <a:buNone/>
+              <a:defRPr sz="1650" b="1">
+                <a:solidFill>
+                  <a:srgbClr val="171714"/>
+                </a:solidFill>
+                <a:latin typeface="Arial"/>
+                <a:ea typeface="Arial"/>
+                <a:cs typeface="Arial"/>
+              </a:defRPr>
+            </a:pPr>
+            <a:r>
+              <a:rPr sz="1500" b="0">
+                <a:solidFill>
+                  <a:srgbClr val="F1E9DC"/>
+                </a:solidFill>
+                <a:latin typeface="Georgia"/>
+                <a:ea typeface="Georgia"/>
+                <a:cs typeface="Georgia"/>
+              </a:rPr>
               <a:t>Causal features</a:t>
             </a:r>
           </a:p>
@@ -18112,7 +18054,7 @@
         <p:spPr>
           <a:xfrm xmlns:a="http://schemas.openxmlformats.org/drawingml/2006/main">
             <a:off x="2667000" y="1962150"/>
-            <a:ext cx="2038350" cy="2533650"/>
+            <a:ext cx="2038350" cy="9525"/>
           </a:xfrm>
           <a:prstGeom xmlns:a="http://schemas.openxmlformats.org/drawingml/2006/main" prst="roundRect">
             <a:avLst>
@@ -18120,9 +18062,9 @@
             </a:avLst>
           </a:prstGeom>
           <a:solidFill xmlns:a="http://schemas.openxmlformats.org/drawingml/2006/main">
-            <a:srgbClr val="14110D"/>
+            <a:srgbClr val="6B5F50"/>
           </a:solidFill>
-          <a:ln xmlns:a="http://schemas.openxmlformats.org/drawingml/2006/main" w="9525">
+          <a:ln xmlns:a="http://schemas.openxmlformats.org/drawingml/2006/main" w="0">
             <a:solidFill>
               <a:srgbClr val="6B5F50"/>
             </a:solidFill>
@@ -18160,7 +18102,7 @@
         </p:spPr>
         <p:txBody>
           <a:bodyPr xmlns:a="http://schemas.openxmlformats.org/drawingml/2006/main" anchor="t">
-            <a:normAutofit fontScale="100000"/>
+            <a:normAutofit fontScale="66667"/>
           </a:bodyPr>
           <a:lstStyle xmlns:a="http://schemas.openxmlformats.org/drawingml/2006/main"/>
           <a:p xmlns:a="http://schemas.openxmlformats.org/drawingml/2006/main">
@@ -18176,73 +18118,73 @@
               </a:defRPr>
             </a:pPr>
             <a:r>
-              <a:rPr sz="825" b="1">
+              <a:rPr sz="1350" b="0">
                 <a:solidFill>
                   <a:srgbClr val="F19A68"/>
-                </a:solidFill>
-                <a:latin typeface="Menlo"/>
-                <a:ea typeface="Menlo"/>
-                <a:cs typeface="Menlo"/>
-              </a:rPr>
-              <a:t>02</a:t>
-            </a:r>
-          </a:p>
-        </p:txBody>
-      </p:sp>
-      <p:sp>
-        <p:nvSpPr>
-          <p:cNvPr id="11" name="">
-            <a:extLst xmlns:a="http://schemas.openxmlformats.org/drawingml/2006/main">
-              <a:ext uri="{FF2B5EF4-FFF2-40B4-BE49-F238E27FC236}">
-                <a16:creationId xmlns:a16="http://schemas.microsoft.com/office/drawing/2014/main" id="{BB04E335-F912-48B3-941B-4B430EE7D860}"/>
-              </a:ext>
-            </a:extLst>
-          </p:cNvPr>
-          <p:cNvSpPr>
-            <a:spLocks xmlns:a="http://schemas.openxmlformats.org/drawingml/2006/main" noGrp="1"/>
-          </p:cNvSpPr>
-          <p:nvPr/>
-        </p:nvSpPr>
-        <p:spPr>
-          <a:xfrm xmlns:a="http://schemas.openxmlformats.org/drawingml/2006/main">
-            <a:off x="2838450" y="2628900"/>
-            <a:ext cx="1695450" cy="533400"/>
-          </a:xfrm>
-          <a:prstGeom xmlns:a="http://schemas.openxmlformats.org/drawingml/2006/main" prst="rect">
-            <a:avLst/>
-          </a:prstGeom>
-          <a:noFill xmlns:a="http://schemas.openxmlformats.org/drawingml/2006/main"/>
-          <a:ln xmlns:a="http://schemas.openxmlformats.org/drawingml/2006/main" w="0">
-            <a:noFill/>
-            <a:prstDash val="solid"/>
-          </a:ln>
-        </p:spPr>
-        <p:txBody>
-          <a:bodyPr xmlns:a="http://schemas.openxmlformats.org/drawingml/2006/main" anchor="t">
-            <a:normAutofit fontScale="100000"/>
-          </a:bodyPr>
-          <a:lstStyle xmlns:a="http://schemas.openxmlformats.org/drawingml/2006/main"/>
-          <a:p xmlns:a="http://schemas.openxmlformats.org/drawingml/2006/main">
-            <a:pPr algn="l">
-              <a:buNone/>
-              <a:defRPr sz="1650" b="1">
-                <a:solidFill>
-                  <a:srgbClr val="171714"/>
-                </a:solidFill>
-                <a:latin typeface="Arial"/>
-                <a:ea typeface="Arial"/>
-                <a:cs typeface="Arial"/>
-              </a:defRPr>
-            </a:pPr>
-            <a:r>
-              <a:rPr sz="1500" b="0">
-                <a:solidFill>
-                  <a:srgbClr val="F1E9DC"/>
                 </a:solidFill>
                 <a:latin typeface="Georgia"/>
                 <a:ea typeface="Georgia"/>
                 <a:cs typeface="Georgia"/>
               </a:rPr>
+              <a:t>02</a:t>
+            </a:r>
+          </a:p>
+        </p:txBody>
+      </p:sp>
+      <p:sp>
+        <p:nvSpPr>
+          <p:cNvPr id="11" name="">
+            <a:extLst xmlns:a="http://schemas.openxmlformats.org/drawingml/2006/main">
+              <a:ext uri="{FF2B5EF4-FFF2-40B4-BE49-F238E27FC236}">
+                <a16:creationId xmlns:a16="http://schemas.microsoft.com/office/drawing/2014/main" id="{BB04E335-F912-48B3-941B-4B430EE7D860}"/>
+              </a:ext>
+            </a:extLst>
+          </p:cNvPr>
+          <p:cNvSpPr>
+            <a:spLocks xmlns:a="http://schemas.openxmlformats.org/drawingml/2006/main" noGrp="1"/>
+          </p:cNvSpPr>
+          <p:nvPr/>
+        </p:nvSpPr>
+        <p:spPr>
+          <a:xfrm xmlns:a="http://schemas.openxmlformats.org/drawingml/2006/main">
+            <a:off x="2838450" y="2628900"/>
+            <a:ext cx="1695450" cy="533400"/>
+          </a:xfrm>
+          <a:prstGeom xmlns:a="http://schemas.openxmlformats.org/drawingml/2006/main" prst="rect">
+            <a:avLst/>
+          </a:prstGeom>
+          <a:noFill xmlns:a="http://schemas.openxmlformats.org/drawingml/2006/main"/>
+          <a:ln xmlns:a="http://schemas.openxmlformats.org/drawingml/2006/main" w="0">
+            <a:noFill/>
+            <a:prstDash val="solid"/>
+          </a:ln>
+        </p:spPr>
+        <p:txBody>
+          <a:bodyPr xmlns:a="http://schemas.openxmlformats.org/drawingml/2006/main" anchor="t">
+            <a:normAutofit fontScale="100000"/>
+          </a:bodyPr>
+          <a:lstStyle xmlns:a="http://schemas.openxmlformats.org/drawingml/2006/main"/>
+          <a:p xmlns:a="http://schemas.openxmlformats.org/drawingml/2006/main">
+            <a:pPr algn="l">
+              <a:buNone/>
+              <a:defRPr sz="1650" b="1">
+                <a:solidFill>
+                  <a:srgbClr val="171714"/>
+                </a:solidFill>
+                <a:latin typeface="Arial"/>
+                <a:ea typeface="Arial"/>
+                <a:cs typeface="Arial"/>
+              </a:defRPr>
+            </a:pPr>
+            <a:r>
+              <a:rPr sz="1500" b="0">
+                <a:solidFill>
+                  <a:srgbClr val="F1E9DC"/>
+                </a:solidFill>
+                <a:latin typeface="Georgia"/>
+                <a:ea typeface="Georgia"/>
+                <a:cs typeface="Georgia"/>
+              </a:rPr>
               <a:t>Executed controls</a:t>
             </a:r>
           </a:p>
@@ -18324,7 +18266,7 @@
         <p:spPr>
           <a:xfrm xmlns:a="http://schemas.openxmlformats.org/drawingml/2006/main">
             <a:off x="4933950" y="2228850"/>
-            <a:ext cx="2038350" cy="2438400"/>
+            <a:ext cx="2038350" cy="9525"/>
           </a:xfrm>
           <a:prstGeom xmlns:a="http://schemas.openxmlformats.org/drawingml/2006/main" prst="roundRect">
             <a:avLst>
@@ -18332,9 +18274,9 @@
             </a:avLst>
           </a:prstGeom>
           <a:solidFill xmlns:a="http://schemas.openxmlformats.org/drawingml/2006/main">
-            <a:srgbClr val="14110D"/>
+            <a:srgbClr val="6B5F50"/>
           </a:solidFill>
-          <a:ln xmlns:a="http://schemas.openxmlformats.org/drawingml/2006/main" w="9525">
+          <a:ln xmlns:a="http://schemas.openxmlformats.org/drawingml/2006/main" w="0">
             <a:solidFill>
               <a:srgbClr val="6B5F50"/>
             </a:solidFill>
@@ -18372,7 +18314,7 @@
         </p:spPr>
         <p:txBody>
           <a:bodyPr xmlns:a="http://schemas.openxmlformats.org/drawingml/2006/main" anchor="t">
-            <a:normAutofit fontScale="100000"/>
+            <a:normAutofit fontScale="66667"/>
           </a:bodyPr>
           <a:lstStyle xmlns:a="http://schemas.openxmlformats.org/drawingml/2006/main"/>
           <a:p xmlns:a="http://schemas.openxmlformats.org/drawingml/2006/main">
@@ -18388,73 +18330,73 @@
               </a:defRPr>
             </a:pPr>
             <a:r>
-              <a:rPr sz="825" b="1">
+              <a:rPr sz="1350" b="0">
                 <a:solidFill>
                   <a:srgbClr val="F19A68"/>
-                </a:solidFill>
-                <a:latin typeface="Menlo"/>
-                <a:ea typeface="Menlo"/>
-                <a:cs typeface="Menlo"/>
-              </a:rPr>
-              <a:t>03</a:t>
-            </a:r>
-          </a:p>
-        </p:txBody>
-      </p:sp>
-      <p:sp>
-        <p:nvSpPr>
-          <p:cNvPr id="15" name="">
-            <a:extLst xmlns:a="http://schemas.openxmlformats.org/drawingml/2006/main">
-              <a:ext uri="{FF2B5EF4-FFF2-40B4-BE49-F238E27FC236}">
-                <a16:creationId xmlns:a16="http://schemas.microsoft.com/office/drawing/2014/main" id="{A79C871F-35EF-48D6-9205-D984A73F3E5D}"/>
-              </a:ext>
-            </a:extLst>
-          </p:cNvPr>
-          <p:cNvSpPr>
-            <a:spLocks xmlns:a="http://schemas.openxmlformats.org/drawingml/2006/main" noGrp="1"/>
-          </p:cNvSpPr>
-          <p:nvPr/>
-        </p:nvSpPr>
-        <p:spPr>
-          <a:xfrm xmlns:a="http://schemas.openxmlformats.org/drawingml/2006/main">
-            <a:off x="5105400" y="2895600"/>
-            <a:ext cx="1695450" cy="533400"/>
-          </a:xfrm>
-          <a:prstGeom xmlns:a="http://schemas.openxmlformats.org/drawingml/2006/main" prst="rect">
-            <a:avLst/>
-          </a:prstGeom>
-          <a:noFill xmlns:a="http://schemas.openxmlformats.org/drawingml/2006/main"/>
-          <a:ln xmlns:a="http://schemas.openxmlformats.org/drawingml/2006/main" w="0">
-            <a:noFill/>
-            <a:prstDash val="solid"/>
-          </a:ln>
-        </p:spPr>
-        <p:txBody>
-          <a:bodyPr xmlns:a="http://schemas.openxmlformats.org/drawingml/2006/main" anchor="t">
-            <a:normAutofit fontScale="96667"/>
-          </a:bodyPr>
-          <a:lstStyle xmlns:a="http://schemas.openxmlformats.org/drawingml/2006/main"/>
-          <a:p xmlns:a="http://schemas.openxmlformats.org/drawingml/2006/main">
-            <a:pPr algn="l">
-              <a:buNone/>
-              <a:defRPr sz="1650" b="1">
-                <a:solidFill>
-                  <a:srgbClr val="171714"/>
-                </a:solidFill>
-                <a:latin typeface="Arial"/>
-                <a:ea typeface="Arial"/>
-                <a:cs typeface="Arial"/>
-              </a:defRPr>
-            </a:pPr>
-            <a:r>
-              <a:rPr sz="1500" b="0">
-                <a:solidFill>
-                  <a:srgbClr val="F1E9DC"/>
                 </a:solidFill>
                 <a:latin typeface="Georgia"/>
                 <a:ea typeface="Georgia"/>
                 <a:cs typeface="Georgia"/>
               </a:rPr>
+              <a:t>03</a:t>
+            </a:r>
+          </a:p>
+        </p:txBody>
+      </p:sp>
+      <p:sp>
+        <p:nvSpPr>
+          <p:cNvPr id="15" name="">
+            <a:extLst xmlns:a="http://schemas.openxmlformats.org/drawingml/2006/main">
+              <a:ext uri="{FF2B5EF4-FFF2-40B4-BE49-F238E27FC236}">
+                <a16:creationId xmlns:a16="http://schemas.microsoft.com/office/drawing/2014/main" id="{A79C871F-35EF-48D6-9205-D984A73F3E5D}"/>
+              </a:ext>
+            </a:extLst>
+          </p:cNvPr>
+          <p:cNvSpPr>
+            <a:spLocks xmlns:a="http://schemas.openxmlformats.org/drawingml/2006/main" noGrp="1"/>
+          </p:cNvSpPr>
+          <p:nvPr/>
+        </p:nvSpPr>
+        <p:spPr>
+          <a:xfrm xmlns:a="http://schemas.openxmlformats.org/drawingml/2006/main">
+            <a:off x="5105400" y="2895600"/>
+            <a:ext cx="1695450" cy="533400"/>
+          </a:xfrm>
+          <a:prstGeom xmlns:a="http://schemas.openxmlformats.org/drawingml/2006/main" prst="rect">
+            <a:avLst/>
+          </a:prstGeom>
+          <a:noFill xmlns:a="http://schemas.openxmlformats.org/drawingml/2006/main"/>
+          <a:ln xmlns:a="http://schemas.openxmlformats.org/drawingml/2006/main" w="0">
+            <a:noFill/>
+            <a:prstDash val="solid"/>
+          </a:ln>
+        </p:spPr>
+        <p:txBody>
+          <a:bodyPr xmlns:a="http://schemas.openxmlformats.org/drawingml/2006/main" anchor="t">
+            <a:normAutofit fontScale="96667"/>
+          </a:bodyPr>
+          <a:lstStyle xmlns:a="http://schemas.openxmlformats.org/drawingml/2006/main"/>
+          <a:p xmlns:a="http://schemas.openxmlformats.org/drawingml/2006/main">
+            <a:pPr algn="l">
+              <a:buNone/>
+              <a:defRPr sz="1650" b="1">
+                <a:solidFill>
+                  <a:srgbClr val="171714"/>
+                </a:solidFill>
+                <a:latin typeface="Arial"/>
+                <a:ea typeface="Arial"/>
+                <a:cs typeface="Arial"/>
+              </a:defRPr>
+            </a:pPr>
+            <a:r>
+              <a:rPr sz="1500" b="0">
+                <a:solidFill>
+                  <a:srgbClr val="F1E9DC"/>
+                </a:solidFill>
+                <a:latin typeface="Georgia"/>
+                <a:ea typeface="Georgia"/>
+                <a:cs typeface="Georgia"/>
+              </a:rPr>
               <a:t>Immutable evidence</a:t>
             </a:r>
           </a:p>
@@ -18536,7 +18478,7 @@
         <p:spPr>
           <a:xfrm xmlns:a="http://schemas.openxmlformats.org/drawingml/2006/main">
             <a:off x="7200900" y="2495550"/>
-            <a:ext cx="2038350" cy="2343150"/>
+            <a:ext cx="2038350" cy="9525"/>
           </a:xfrm>
           <a:prstGeom xmlns:a="http://schemas.openxmlformats.org/drawingml/2006/main" prst="roundRect">
             <a:avLst>
@@ -18544,9 +18486,9 @@
             </a:avLst>
           </a:prstGeom>
           <a:solidFill xmlns:a="http://schemas.openxmlformats.org/drawingml/2006/main">
-            <a:srgbClr val="14110D"/>
+            <a:srgbClr val="6B5F50"/>
           </a:solidFill>
-          <a:ln xmlns:a="http://schemas.openxmlformats.org/drawingml/2006/main" w="9525">
+          <a:ln xmlns:a="http://schemas.openxmlformats.org/drawingml/2006/main" w="0">
             <a:solidFill>
               <a:srgbClr val="6B5F50"/>
             </a:solidFill>
@@ -18584,7 +18526,7 @@
         </p:spPr>
         <p:txBody>
           <a:bodyPr xmlns:a="http://schemas.openxmlformats.org/drawingml/2006/main" anchor="t">
-            <a:normAutofit fontScale="100000"/>
+            <a:normAutofit fontScale="66667"/>
           </a:bodyPr>
           <a:lstStyle xmlns:a="http://schemas.openxmlformats.org/drawingml/2006/main"/>
           <a:p xmlns:a="http://schemas.openxmlformats.org/drawingml/2006/main">
@@ -18600,73 +18542,73 @@
               </a:defRPr>
             </a:pPr>
             <a:r>
-              <a:rPr sz="825" b="1">
+              <a:rPr sz="1350" b="0">
                 <a:solidFill>
                   <a:srgbClr val="F19A68"/>
-                </a:solidFill>
-                <a:latin typeface="Menlo"/>
-                <a:ea typeface="Menlo"/>
-                <a:cs typeface="Menlo"/>
-              </a:rPr>
-              <a:t>04</a:t>
-            </a:r>
-          </a:p>
-        </p:txBody>
-      </p:sp>
-      <p:sp>
-        <p:nvSpPr>
-          <p:cNvPr id="19" name="">
-            <a:extLst xmlns:a="http://schemas.openxmlformats.org/drawingml/2006/main">
-              <a:ext uri="{FF2B5EF4-FFF2-40B4-BE49-F238E27FC236}">
-                <a16:creationId xmlns:a16="http://schemas.microsoft.com/office/drawing/2014/main" id="{4D0F5EEE-6FB7-4AF8-86B8-F31E33F1D50F}"/>
-              </a:ext>
-            </a:extLst>
-          </p:cNvPr>
-          <p:cNvSpPr>
-            <a:spLocks xmlns:a="http://schemas.openxmlformats.org/drawingml/2006/main" noGrp="1"/>
-          </p:cNvSpPr>
-          <p:nvPr/>
-        </p:nvSpPr>
-        <p:spPr>
-          <a:xfrm xmlns:a="http://schemas.openxmlformats.org/drawingml/2006/main">
-            <a:off x="7372350" y="3162300"/>
-            <a:ext cx="1695450" cy="533400"/>
-          </a:xfrm>
-          <a:prstGeom xmlns:a="http://schemas.openxmlformats.org/drawingml/2006/main" prst="rect">
-            <a:avLst/>
-          </a:prstGeom>
-          <a:noFill xmlns:a="http://schemas.openxmlformats.org/drawingml/2006/main"/>
-          <a:ln xmlns:a="http://schemas.openxmlformats.org/drawingml/2006/main" w="0">
-            <a:noFill/>
-            <a:prstDash val="solid"/>
-          </a:ln>
-        </p:spPr>
-        <p:txBody>
-          <a:bodyPr xmlns:a="http://schemas.openxmlformats.org/drawingml/2006/main" anchor="t">
-            <a:normAutofit fontScale="96667"/>
-          </a:bodyPr>
-          <a:lstStyle xmlns:a="http://schemas.openxmlformats.org/drawingml/2006/main"/>
-          <a:p xmlns:a="http://schemas.openxmlformats.org/drawingml/2006/main">
-            <a:pPr algn="l">
-              <a:buNone/>
-              <a:defRPr sz="1650" b="1">
-                <a:solidFill>
-                  <a:srgbClr val="171714"/>
-                </a:solidFill>
-                <a:latin typeface="Arial"/>
-                <a:ea typeface="Arial"/>
-                <a:cs typeface="Arial"/>
-              </a:defRPr>
-            </a:pPr>
-            <a:r>
-              <a:rPr sz="1500" b="0">
-                <a:solidFill>
-                  <a:srgbClr val="F1E9DC"/>
                 </a:solidFill>
                 <a:latin typeface="Georgia"/>
                 <a:ea typeface="Georgia"/>
                 <a:cs typeface="Georgia"/>
               </a:rPr>
+              <a:t>04</a:t>
+            </a:r>
+          </a:p>
+        </p:txBody>
+      </p:sp>
+      <p:sp>
+        <p:nvSpPr>
+          <p:cNvPr id="19" name="">
+            <a:extLst xmlns:a="http://schemas.openxmlformats.org/drawingml/2006/main">
+              <a:ext uri="{FF2B5EF4-FFF2-40B4-BE49-F238E27FC236}">
+                <a16:creationId xmlns:a16="http://schemas.microsoft.com/office/drawing/2014/main" id="{4D0F5EEE-6FB7-4AF8-86B8-F31E33F1D50F}"/>
+              </a:ext>
+            </a:extLst>
+          </p:cNvPr>
+          <p:cNvSpPr>
+            <a:spLocks xmlns:a="http://schemas.openxmlformats.org/drawingml/2006/main" noGrp="1"/>
+          </p:cNvSpPr>
+          <p:nvPr/>
+        </p:nvSpPr>
+        <p:spPr>
+          <a:xfrm xmlns:a="http://schemas.openxmlformats.org/drawingml/2006/main">
+            <a:off x="7372350" y="3162300"/>
+            <a:ext cx="1695450" cy="533400"/>
+          </a:xfrm>
+          <a:prstGeom xmlns:a="http://schemas.openxmlformats.org/drawingml/2006/main" prst="rect">
+            <a:avLst/>
+          </a:prstGeom>
+          <a:noFill xmlns:a="http://schemas.openxmlformats.org/drawingml/2006/main"/>
+          <a:ln xmlns:a="http://schemas.openxmlformats.org/drawingml/2006/main" w="0">
+            <a:noFill/>
+            <a:prstDash val="solid"/>
+          </a:ln>
+        </p:spPr>
+        <p:txBody>
+          <a:bodyPr xmlns:a="http://schemas.openxmlformats.org/drawingml/2006/main" anchor="t">
+            <a:normAutofit fontScale="96667"/>
+          </a:bodyPr>
+          <a:lstStyle xmlns:a="http://schemas.openxmlformats.org/drawingml/2006/main"/>
+          <a:p xmlns:a="http://schemas.openxmlformats.org/drawingml/2006/main">
+            <a:pPr algn="l">
+              <a:buNone/>
+              <a:defRPr sz="1650" b="1">
+                <a:solidFill>
+                  <a:srgbClr val="171714"/>
+                </a:solidFill>
+                <a:latin typeface="Arial"/>
+                <a:ea typeface="Arial"/>
+                <a:cs typeface="Arial"/>
+              </a:defRPr>
+            </a:pPr>
+            <a:r>
+              <a:rPr sz="1500" b="0">
+                <a:solidFill>
+                  <a:srgbClr val="F1E9DC"/>
+                </a:solidFill>
+                <a:latin typeface="Georgia"/>
+                <a:ea typeface="Georgia"/>
+                <a:cs typeface="Georgia"/>
+              </a:rPr>
               <a:t>Independent replay</a:t>
             </a:r>
           </a:p>
@@ -18748,7 +18690,7 @@
         <p:spPr>
           <a:xfrm xmlns:a="http://schemas.openxmlformats.org/drawingml/2006/main">
             <a:off x="9467850" y="2762250"/>
-            <a:ext cx="2038350" cy="2247900"/>
+            <a:ext cx="2038350" cy="28575"/>
           </a:xfrm>
           <a:prstGeom xmlns:a="http://schemas.openxmlformats.org/drawingml/2006/main" prst="roundRect">
             <a:avLst>
@@ -18756,9 +18698,9 @@
             </a:avLst>
           </a:prstGeom>
           <a:solidFill xmlns:a="http://schemas.openxmlformats.org/drawingml/2006/main">
-            <a:srgbClr val="20382A"/>
+            <a:srgbClr val="75B78E"/>
           </a:solidFill>
-          <a:ln xmlns:a="http://schemas.openxmlformats.org/drawingml/2006/main" w="19050">
+          <a:ln xmlns:a="http://schemas.openxmlformats.org/drawingml/2006/main" w="0">
             <a:solidFill>
               <a:srgbClr val="75B78E"/>
             </a:solidFill>
@@ -18796,384 +18738,384 @@
         </p:spPr>
         <p:txBody>
           <a:bodyPr xmlns:a="http://schemas.openxmlformats.org/drawingml/2006/main" anchor="t">
+            <a:normAutofit fontScale="66667"/>
+          </a:bodyPr>
+          <a:lstStyle xmlns:a="http://schemas.openxmlformats.org/drawingml/2006/main"/>
+          <a:p xmlns:a="http://schemas.openxmlformats.org/drawingml/2006/main">
+            <a:pPr algn="l">
+              <a:buNone/>
+              <a:defRPr sz="1050" b="1">
+                <a:solidFill>
+                  <a:srgbClr val="E9652E"/>
+                </a:solidFill>
+                <a:latin typeface="Arial"/>
+                <a:ea typeface="Arial"/>
+                <a:cs typeface="Arial"/>
+              </a:defRPr>
+            </a:pPr>
+            <a:r>
+              <a:rPr sz="1350" b="0">
+                <a:solidFill>
+                  <a:srgbClr val="F19A68"/>
+                </a:solidFill>
+                <a:latin typeface="Georgia"/>
+                <a:ea typeface="Georgia"/>
+                <a:cs typeface="Georgia"/>
+              </a:rPr>
+              <a:t>05</a:t>
+            </a:r>
+          </a:p>
+        </p:txBody>
+      </p:sp>
+      <p:sp>
+        <p:nvSpPr>
+          <p:cNvPr id="23" name="">
+            <a:extLst xmlns:a="http://schemas.openxmlformats.org/drawingml/2006/main">
+              <a:ext uri="{FF2B5EF4-FFF2-40B4-BE49-F238E27FC236}">
+                <a16:creationId xmlns:a16="http://schemas.microsoft.com/office/drawing/2014/main" id="{9629D2F2-4F30-4046-A0AC-0511DCE23B76}"/>
+              </a:ext>
+            </a:extLst>
+          </p:cNvPr>
+          <p:cNvSpPr>
+            <a:spLocks xmlns:a="http://schemas.openxmlformats.org/drawingml/2006/main" noGrp="1"/>
+          </p:cNvSpPr>
+          <p:nvPr/>
+        </p:nvSpPr>
+        <p:spPr>
+          <a:xfrm xmlns:a="http://schemas.openxmlformats.org/drawingml/2006/main">
+            <a:off x="9639300" y="3429000"/>
+            <a:ext cx="1695450" cy="533400"/>
+          </a:xfrm>
+          <a:prstGeom xmlns:a="http://schemas.openxmlformats.org/drawingml/2006/main" prst="rect">
+            <a:avLst/>
+          </a:prstGeom>
+          <a:noFill xmlns:a="http://schemas.openxmlformats.org/drawingml/2006/main"/>
+          <a:ln xmlns:a="http://schemas.openxmlformats.org/drawingml/2006/main" w="0">
+            <a:noFill/>
+            <a:prstDash val="solid"/>
+          </a:ln>
+        </p:spPr>
+        <p:txBody>
+          <a:bodyPr xmlns:a="http://schemas.openxmlformats.org/drawingml/2006/main" anchor="t">
+            <a:normAutofit fontScale="96667"/>
+          </a:bodyPr>
+          <a:lstStyle xmlns:a="http://schemas.openxmlformats.org/drawingml/2006/main"/>
+          <a:p xmlns:a="http://schemas.openxmlformats.org/drawingml/2006/main">
+            <a:pPr algn="l">
+              <a:buNone/>
+              <a:defRPr sz="1650" b="1">
+                <a:solidFill>
+                  <a:srgbClr val="FFFFFF"/>
+                </a:solidFill>
+                <a:latin typeface="Arial"/>
+                <a:ea typeface="Arial"/>
+                <a:cs typeface="Arial"/>
+              </a:defRPr>
+            </a:pPr>
+            <a:r>
+              <a:rPr sz="1500" b="0">
+                <a:solidFill>
+                  <a:srgbClr val="F1E9DC"/>
+                </a:solidFill>
+                <a:latin typeface="Georgia"/>
+                <a:ea typeface="Georgia"/>
+                <a:cs typeface="Georgia"/>
+              </a:rPr>
+              <a:t>Human promotion</a:t>
+            </a:r>
+          </a:p>
+        </p:txBody>
+      </p:sp>
+      <p:sp>
+        <p:nvSpPr>
+          <p:cNvPr id="24" name="">
+            <a:extLst xmlns:a="http://schemas.openxmlformats.org/drawingml/2006/main">
+              <a:ext uri="{FF2B5EF4-FFF2-40B4-BE49-F238E27FC236}">
+                <a16:creationId xmlns:a16="http://schemas.microsoft.com/office/drawing/2014/main" id="{BB34437D-98A1-407D-986C-CD93A2F7F2EB}"/>
+              </a:ext>
+            </a:extLst>
+          </p:cNvPr>
+          <p:cNvSpPr>
+            <a:spLocks xmlns:a="http://schemas.openxmlformats.org/drawingml/2006/main" noGrp="1"/>
+          </p:cNvSpPr>
+          <p:nvPr/>
+        </p:nvSpPr>
+        <p:spPr>
+          <a:xfrm xmlns:a="http://schemas.openxmlformats.org/drawingml/2006/main">
+            <a:off x="9639300" y="4171950"/>
+            <a:ext cx="1695450" cy="723900"/>
+          </a:xfrm>
+          <a:prstGeom xmlns:a="http://schemas.openxmlformats.org/drawingml/2006/main" prst="rect">
+            <a:avLst/>
+          </a:prstGeom>
+          <a:noFill xmlns:a="http://schemas.openxmlformats.org/drawingml/2006/main"/>
+          <a:ln xmlns:a="http://schemas.openxmlformats.org/drawingml/2006/main" w="0">
+            <a:noFill/>
+            <a:prstDash val="solid"/>
+          </a:ln>
+        </p:spPr>
+        <p:txBody>
+          <a:bodyPr xmlns:a="http://schemas.openxmlformats.org/drawingml/2006/main" anchor="t">
             <a:normAutofit fontScale="100000"/>
           </a:bodyPr>
           <a:lstStyle xmlns:a="http://schemas.openxmlformats.org/drawingml/2006/main"/>
           <a:p xmlns:a="http://schemas.openxmlformats.org/drawingml/2006/main">
             <a:pPr algn="l">
               <a:buNone/>
+              <a:defRPr sz="1200" b="0">
+                <a:solidFill>
+                  <a:srgbClr val="D8D8D2"/>
+                </a:solidFill>
+                <a:latin typeface="Arial"/>
+                <a:ea typeface="Arial"/>
+                <a:cs typeface="Arial"/>
+              </a:defRPr>
+            </a:pPr>
+            <a:r>
+              <a:rPr sz="1200" b="0">
+                <a:solidFill>
+                  <a:srgbClr val="C8BDAE"/>
+                </a:solidFill>
+                <a:latin typeface="Arial"/>
+                <a:ea typeface="Arial"/>
+                <a:cs typeface="Arial"/>
+              </a:rPr>
+              <a:t>The model cannot approve itself</a:t>
+            </a:r>
+          </a:p>
+        </p:txBody>
+      </p:sp>
+      <p:sp>
+        <p:nvSpPr>
+          <p:cNvPr id="25" name="">
+            <a:extLst xmlns:a="http://schemas.openxmlformats.org/drawingml/2006/main">
+              <a:ext uri="{FF2B5EF4-FFF2-40B4-BE49-F238E27FC236}">
+                <a16:creationId xmlns:a16="http://schemas.microsoft.com/office/drawing/2014/main" id="{4E68F7B4-51C7-45F0-A451-BB14AFBBC24B}"/>
+              </a:ext>
+            </a:extLst>
+          </p:cNvPr>
+          <p:cNvSpPr>
+            <a:spLocks xmlns:a="http://schemas.openxmlformats.org/drawingml/2006/main" noGrp="1"/>
+          </p:cNvSpPr>
+          <p:nvPr/>
+        </p:nvSpPr>
+        <p:spPr>
+          <a:xfrm xmlns:a="http://schemas.openxmlformats.org/drawingml/2006/main">
+            <a:off x="647700" y="5105400"/>
+            <a:ext cx="1524000" cy="209550"/>
+          </a:xfrm>
+          <a:prstGeom xmlns:a="http://schemas.openxmlformats.org/drawingml/2006/main" prst="rect">
+            <a:avLst/>
+          </a:prstGeom>
+          <a:noFill xmlns:a="http://schemas.openxmlformats.org/drawingml/2006/main"/>
+          <a:ln xmlns:a="http://schemas.openxmlformats.org/drawingml/2006/main" w="0">
+            <a:noFill/>
+            <a:prstDash val="solid"/>
+          </a:ln>
+        </p:spPr>
+        <p:txBody>
+          <a:bodyPr xmlns:a="http://schemas.openxmlformats.org/drawingml/2006/main" anchor="t">
+            <a:normAutofit fontScale="100000"/>
+          </a:bodyPr>
+          <a:lstStyle xmlns:a="http://schemas.openxmlformats.org/drawingml/2006/main"/>
+          <a:p xmlns:a="http://schemas.openxmlformats.org/drawingml/2006/main">
+            <a:pPr algn="l">
+              <a:buNone/>
               <a:defRPr sz="1050" b="1">
                 <a:solidFill>
-                  <a:srgbClr val="E9652E"/>
-                </a:solidFill>
-                <a:latin typeface="Arial"/>
-                <a:ea typeface="Arial"/>
-                <a:cs typeface="Arial"/>
-              </a:defRPr>
-            </a:pPr>
-            <a:r>
-              <a:rPr sz="825" b="1">
-                <a:solidFill>
-                  <a:srgbClr val="F19A68"/>
+                  <a:srgbClr val="686863"/>
+                </a:solidFill>
+                <a:latin typeface="Arial"/>
+                <a:ea typeface="Arial"/>
+                <a:cs typeface="Arial"/>
+              </a:defRPr>
+            </a:pPr>
+            <a:r>
+              <a:rPr sz="750" b="1">
+                <a:solidFill>
+                  <a:srgbClr val="9C9183"/>
                 </a:solidFill>
                 <a:latin typeface="Menlo"/>
                 <a:ea typeface="Menlo"/>
                 <a:cs typeface="Menlo"/>
               </a:rPr>
-              <a:t>05</a:t>
-            </a:r>
-          </a:p>
-        </p:txBody>
-      </p:sp>
-      <p:sp>
-        <p:nvSpPr>
-          <p:cNvPr id="23" name="">
-            <a:extLst xmlns:a="http://schemas.openxmlformats.org/drawingml/2006/main">
-              <a:ext uri="{FF2B5EF4-FFF2-40B4-BE49-F238E27FC236}">
-                <a16:creationId xmlns:a16="http://schemas.microsoft.com/office/drawing/2014/main" id="{9629D2F2-4F30-4046-A0AC-0511DCE23B76}"/>
-              </a:ext>
-            </a:extLst>
-          </p:cNvPr>
-          <p:cNvSpPr>
-            <a:spLocks xmlns:a="http://schemas.openxmlformats.org/drawingml/2006/main" noGrp="1"/>
-          </p:cNvSpPr>
-          <p:nvPr/>
-        </p:nvSpPr>
-        <p:spPr>
-          <a:xfrm xmlns:a="http://schemas.openxmlformats.org/drawingml/2006/main">
-            <a:off x="9639300" y="3429000"/>
-            <a:ext cx="1695450" cy="533400"/>
-          </a:xfrm>
-          <a:prstGeom xmlns:a="http://schemas.openxmlformats.org/drawingml/2006/main" prst="rect">
-            <a:avLst/>
-          </a:prstGeom>
-          <a:noFill xmlns:a="http://schemas.openxmlformats.org/drawingml/2006/main"/>
-          <a:ln xmlns:a="http://schemas.openxmlformats.org/drawingml/2006/main" w="0">
-            <a:noFill/>
-            <a:prstDash val="solid"/>
-          </a:ln>
-        </p:spPr>
-        <p:txBody>
-          <a:bodyPr xmlns:a="http://schemas.openxmlformats.org/drawingml/2006/main" anchor="t">
-            <a:normAutofit fontScale="96667"/>
-          </a:bodyPr>
-          <a:lstStyle xmlns:a="http://schemas.openxmlformats.org/drawingml/2006/main"/>
-          <a:p xmlns:a="http://schemas.openxmlformats.org/drawingml/2006/main">
-            <a:pPr algn="l">
-              <a:buNone/>
-              <a:defRPr sz="1650" b="1">
-                <a:solidFill>
-                  <a:srgbClr val="FFFFFF"/>
-                </a:solidFill>
-                <a:latin typeface="Arial"/>
-                <a:ea typeface="Arial"/>
-                <a:cs typeface="Arial"/>
-              </a:defRPr>
-            </a:pPr>
-            <a:r>
-              <a:rPr sz="1500" b="0">
-                <a:solidFill>
-                  <a:srgbClr val="F1E9DC"/>
-                </a:solidFill>
-                <a:latin typeface="Georgia"/>
-                <a:ea typeface="Georgia"/>
-                <a:cs typeface="Georgia"/>
-              </a:rPr>
-              <a:t>Human promotion</a:t>
-            </a:r>
-          </a:p>
-        </p:txBody>
-      </p:sp>
-      <p:sp>
-        <p:nvSpPr>
-          <p:cNvPr id="24" name="">
-            <a:extLst xmlns:a="http://schemas.openxmlformats.org/drawingml/2006/main">
-              <a:ext uri="{FF2B5EF4-FFF2-40B4-BE49-F238E27FC236}">
-                <a16:creationId xmlns:a16="http://schemas.microsoft.com/office/drawing/2014/main" id="{BB34437D-98A1-407D-986C-CD93A2F7F2EB}"/>
-              </a:ext>
-            </a:extLst>
-          </p:cNvPr>
-          <p:cNvSpPr>
-            <a:spLocks xmlns:a="http://schemas.openxmlformats.org/drawingml/2006/main" noGrp="1"/>
-          </p:cNvSpPr>
-          <p:nvPr/>
-        </p:nvSpPr>
-        <p:spPr>
-          <a:xfrm xmlns:a="http://schemas.openxmlformats.org/drawingml/2006/main">
-            <a:off x="9639300" y="4171950"/>
-            <a:ext cx="1695450" cy="723900"/>
-          </a:xfrm>
-          <a:prstGeom xmlns:a="http://schemas.openxmlformats.org/drawingml/2006/main" prst="rect">
-            <a:avLst/>
-          </a:prstGeom>
-          <a:noFill xmlns:a="http://schemas.openxmlformats.org/drawingml/2006/main"/>
-          <a:ln xmlns:a="http://schemas.openxmlformats.org/drawingml/2006/main" w="0">
-            <a:noFill/>
-            <a:prstDash val="solid"/>
-          </a:ln>
-        </p:spPr>
-        <p:txBody>
-          <a:bodyPr xmlns:a="http://schemas.openxmlformats.org/drawingml/2006/main" anchor="t">
-            <a:normAutofit fontScale="100000"/>
-          </a:bodyPr>
-          <a:lstStyle xmlns:a="http://schemas.openxmlformats.org/drawingml/2006/main"/>
-          <a:p xmlns:a="http://schemas.openxmlformats.org/drawingml/2006/main">
-            <a:pPr algn="l">
-              <a:buNone/>
-              <a:defRPr sz="1200" b="0">
-                <a:solidFill>
-                  <a:srgbClr val="D8D8D2"/>
-                </a:solidFill>
-                <a:latin typeface="Arial"/>
-                <a:ea typeface="Arial"/>
-                <a:cs typeface="Arial"/>
-              </a:defRPr>
-            </a:pPr>
-            <a:r>
-              <a:rPr sz="1200" b="0">
-                <a:solidFill>
-                  <a:srgbClr val="C8BDAE"/>
-                </a:solidFill>
-                <a:latin typeface="Arial"/>
-                <a:ea typeface="Arial"/>
-                <a:cs typeface="Arial"/>
-              </a:rPr>
-              <a:t>The model cannot approve itself</a:t>
-            </a:r>
-          </a:p>
-        </p:txBody>
-      </p:sp>
-      <p:sp>
-        <p:nvSpPr>
-          <p:cNvPr id="25" name="">
-            <a:extLst xmlns:a="http://schemas.openxmlformats.org/drawingml/2006/main">
-              <a:ext uri="{FF2B5EF4-FFF2-40B4-BE49-F238E27FC236}">
-                <a16:creationId xmlns:a16="http://schemas.microsoft.com/office/drawing/2014/main" id="{4E68F7B4-51C7-45F0-A451-BB14AFBBC24B}"/>
-              </a:ext>
-            </a:extLst>
-          </p:cNvPr>
-          <p:cNvSpPr>
-            <a:spLocks xmlns:a="http://schemas.openxmlformats.org/drawingml/2006/main" noGrp="1"/>
-          </p:cNvSpPr>
-          <p:nvPr/>
-        </p:nvSpPr>
-        <p:spPr>
-          <a:xfrm xmlns:a="http://schemas.openxmlformats.org/drawingml/2006/main">
-            <a:off x="647700" y="5105400"/>
-            <a:ext cx="1524000" cy="209550"/>
-          </a:xfrm>
-          <a:prstGeom xmlns:a="http://schemas.openxmlformats.org/drawingml/2006/main" prst="rect">
-            <a:avLst/>
-          </a:prstGeom>
-          <a:noFill xmlns:a="http://schemas.openxmlformats.org/drawingml/2006/main"/>
-          <a:ln xmlns:a="http://schemas.openxmlformats.org/drawingml/2006/main" w="0">
-            <a:noFill/>
-            <a:prstDash val="solid"/>
-          </a:ln>
-        </p:spPr>
-        <p:txBody>
-          <a:bodyPr xmlns:a="http://schemas.openxmlformats.org/drawingml/2006/main" anchor="t">
-            <a:normAutofit fontScale="100000"/>
-          </a:bodyPr>
-          <a:lstStyle xmlns:a="http://schemas.openxmlformats.org/drawingml/2006/main"/>
-          <a:p xmlns:a="http://schemas.openxmlformats.org/drawingml/2006/main">
-            <a:pPr algn="l">
-              <a:buNone/>
-              <a:defRPr sz="1050" b="1">
-                <a:solidFill>
-                  <a:srgbClr val="686863"/>
-                </a:solidFill>
-                <a:latin typeface="Arial"/>
-                <a:ea typeface="Arial"/>
-                <a:cs typeface="Arial"/>
-              </a:defRPr>
-            </a:pPr>
-            <a:r>
-              <a:rPr sz="750" b="1">
-                <a:solidFill>
-                  <a:srgbClr val="9C9183"/>
+              <a:t>Portable bundle</a:t>
+            </a:r>
+          </a:p>
+        </p:txBody>
+      </p:sp>
+      <p:sp>
+        <p:nvSpPr>
+          <p:cNvPr id="26" name="">
+            <a:extLst xmlns:a="http://schemas.openxmlformats.org/drawingml/2006/main">
+              <a:ext uri="{FF2B5EF4-FFF2-40B4-BE49-F238E27FC236}">
+                <a16:creationId xmlns:a16="http://schemas.microsoft.com/office/drawing/2014/main" id="{3F25E6A8-7E85-4203-A413-F8E4B92E9495}"/>
+              </a:ext>
+            </a:extLst>
+          </p:cNvPr>
+          <p:cNvSpPr>
+            <a:spLocks xmlns:a="http://schemas.openxmlformats.org/drawingml/2006/main" noGrp="1"/>
+          </p:cNvSpPr>
+          <p:nvPr/>
+        </p:nvSpPr>
+        <p:spPr>
+          <a:xfrm xmlns:a="http://schemas.openxmlformats.org/drawingml/2006/main">
+            <a:off x="647700" y="5410200"/>
+            <a:ext cx="2952750" cy="266700"/>
+          </a:xfrm>
+          <a:prstGeom xmlns:a="http://schemas.openxmlformats.org/drawingml/2006/main" prst="rect">
+            <a:avLst/>
+          </a:prstGeom>
+          <a:noFill xmlns:a="http://schemas.openxmlformats.org/drawingml/2006/main"/>
+          <a:ln xmlns:a="http://schemas.openxmlformats.org/drawingml/2006/main" w="0">
+            <a:noFill/>
+            <a:prstDash val="solid"/>
+          </a:ln>
+        </p:spPr>
+        <p:txBody>
+          <a:bodyPr xmlns:a="http://schemas.openxmlformats.org/drawingml/2006/main" anchor="t">
+            <a:normAutofit fontScale="95833"/>
+          </a:bodyPr>
+          <a:lstStyle xmlns:a="http://schemas.openxmlformats.org/drawingml/2006/main"/>
+          <a:p xmlns:a="http://schemas.openxmlformats.org/drawingml/2006/main">
+            <a:pPr algn="l">
+              <a:buNone/>
+              <a:defRPr sz="1350" b="1">
+                <a:solidFill>
+                  <a:srgbClr val="171714"/>
                 </a:solidFill>
                 <a:latin typeface="Menlo"/>
                 <a:ea typeface="Menlo"/>
                 <a:cs typeface="Menlo"/>
-              </a:rPr>
-              <a:t>Portable bundle</a:t>
-            </a:r>
-          </a:p>
-        </p:txBody>
-      </p:sp>
-      <p:sp>
-        <p:nvSpPr>
-          <p:cNvPr id="26" name="">
-            <a:extLst xmlns:a="http://schemas.openxmlformats.org/drawingml/2006/main">
-              <a:ext uri="{FF2B5EF4-FFF2-40B4-BE49-F238E27FC236}">
-                <a16:creationId xmlns:a16="http://schemas.microsoft.com/office/drawing/2014/main" id="{3F25E6A8-7E85-4203-A413-F8E4B92E9495}"/>
-              </a:ext>
-            </a:extLst>
-          </p:cNvPr>
-          <p:cNvSpPr>
-            <a:spLocks xmlns:a="http://schemas.openxmlformats.org/drawingml/2006/main" noGrp="1"/>
-          </p:cNvSpPr>
-          <p:nvPr/>
-        </p:nvSpPr>
-        <p:spPr>
-          <a:xfrm xmlns:a="http://schemas.openxmlformats.org/drawingml/2006/main">
-            <a:off x="647700" y="5410200"/>
-            <a:ext cx="2952750" cy="266700"/>
-          </a:xfrm>
-          <a:prstGeom xmlns:a="http://schemas.openxmlformats.org/drawingml/2006/main" prst="rect">
-            <a:avLst/>
-          </a:prstGeom>
-          <a:noFill xmlns:a="http://schemas.openxmlformats.org/drawingml/2006/main"/>
-          <a:ln xmlns:a="http://schemas.openxmlformats.org/drawingml/2006/main" w="0">
-            <a:noFill/>
-            <a:prstDash val="solid"/>
-          </a:ln>
-        </p:spPr>
-        <p:txBody>
-          <a:bodyPr xmlns:a="http://schemas.openxmlformats.org/drawingml/2006/main" anchor="t">
-            <a:normAutofit fontScale="95833"/>
-          </a:bodyPr>
-          <a:lstStyle xmlns:a="http://schemas.openxmlformats.org/drawingml/2006/main"/>
-          <a:p xmlns:a="http://schemas.openxmlformats.org/drawingml/2006/main">
-            <a:pPr algn="l">
-              <a:buNone/>
-              <a:defRPr sz="1350" b="1">
-                <a:solidFill>
-                  <a:srgbClr val="171714"/>
+              </a:defRPr>
+            </a:pPr>
+            <a:r>
+              <a:rPr sz="1200" b="1">
+                <a:solidFill>
+                  <a:srgbClr val="F1E9DC"/>
                 </a:solidFill>
                 <a:latin typeface="Menlo"/>
                 <a:ea typeface="Menlo"/>
                 <a:cs typeface="Menlo"/>
-              </a:defRPr>
-            </a:pPr>
-            <a:r>
-              <a:rPr sz="1200" b="1">
-                <a:solidFill>
-                  <a:srgbClr val="F1E9DC"/>
+              </a:rPr>
+              <a:t>52ed4c31…dbc900</a:t>
+            </a:r>
+          </a:p>
+        </p:txBody>
+      </p:sp>
+      <p:sp>
+        <p:nvSpPr>
+          <p:cNvPr id="27" name="">
+            <a:extLst xmlns:a="http://schemas.openxmlformats.org/drawingml/2006/main">
+              <a:ext uri="{FF2B5EF4-FFF2-40B4-BE49-F238E27FC236}">
+                <a16:creationId xmlns:a16="http://schemas.microsoft.com/office/drawing/2014/main" id="{53F60CAA-7CB3-4128-9756-672E51FAA407}"/>
+              </a:ext>
+            </a:extLst>
+          </p:cNvPr>
+          <p:cNvSpPr>
+            <a:spLocks xmlns:a="http://schemas.openxmlformats.org/drawingml/2006/main" noGrp="1"/>
+          </p:cNvSpPr>
+          <p:nvPr/>
+        </p:nvSpPr>
+        <p:spPr>
+          <a:xfrm xmlns:a="http://schemas.openxmlformats.org/drawingml/2006/main">
+            <a:off x="4629150" y="5105400"/>
+            <a:ext cx="1524000" cy="209550"/>
+          </a:xfrm>
+          <a:prstGeom xmlns:a="http://schemas.openxmlformats.org/drawingml/2006/main" prst="rect">
+            <a:avLst/>
+          </a:prstGeom>
+          <a:noFill xmlns:a="http://schemas.openxmlformats.org/drawingml/2006/main"/>
+          <a:ln xmlns:a="http://schemas.openxmlformats.org/drawingml/2006/main" w="0">
+            <a:noFill/>
+            <a:prstDash val="solid"/>
+          </a:ln>
+        </p:spPr>
+        <p:txBody>
+          <a:bodyPr xmlns:a="http://schemas.openxmlformats.org/drawingml/2006/main" anchor="t">
+            <a:normAutofit fontScale="100000"/>
+          </a:bodyPr>
+          <a:lstStyle xmlns:a="http://schemas.openxmlformats.org/drawingml/2006/main"/>
+          <a:p xmlns:a="http://schemas.openxmlformats.org/drawingml/2006/main">
+            <a:pPr algn="l">
+              <a:buNone/>
+              <a:defRPr sz="1050" b="1">
+                <a:solidFill>
+                  <a:srgbClr val="686863"/>
+                </a:solidFill>
+                <a:latin typeface="Arial"/>
+                <a:ea typeface="Arial"/>
+                <a:cs typeface="Arial"/>
+              </a:defRPr>
+            </a:pPr>
+            <a:r>
+              <a:rPr sz="750" b="1">
+                <a:solidFill>
+                  <a:srgbClr val="9C9183"/>
                 </a:solidFill>
                 <a:latin typeface="Menlo"/>
                 <a:ea typeface="Menlo"/>
                 <a:cs typeface="Menlo"/>
               </a:rPr>
-              <a:t>52ed4c31…dbc900</a:t>
-            </a:r>
-          </a:p>
-        </p:txBody>
-      </p:sp>
-      <p:sp>
-        <p:nvSpPr>
-          <p:cNvPr id="27" name="">
-            <a:extLst xmlns:a="http://schemas.openxmlformats.org/drawingml/2006/main">
-              <a:ext uri="{FF2B5EF4-FFF2-40B4-BE49-F238E27FC236}">
-                <a16:creationId xmlns:a16="http://schemas.microsoft.com/office/drawing/2014/main" id="{53F60CAA-7CB3-4128-9756-672E51FAA407}"/>
-              </a:ext>
-            </a:extLst>
-          </p:cNvPr>
-          <p:cNvSpPr>
-            <a:spLocks xmlns:a="http://schemas.openxmlformats.org/drawingml/2006/main" noGrp="1"/>
-          </p:cNvSpPr>
-          <p:nvPr/>
-        </p:nvSpPr>
-        <p:spPr>
-          <a:xfrm xmlns:a="http://schemas.openxmlformats.org/drawingml/2006/main">
-            <a:off x="4629150" y="5105400"/>
-            <a:ext cx="1524000" cy="209550"/>
-          </a:xfrm>
-          <a:prstGeom xmlns:a="http://schemas.openxmlformats.org/drawingml/2006/main" prst="rect">
-            <a:avLst/>
-          </a:prstGeom>
-          <a:noFill xmlns:a="http://schemas.openxmlformats.org/drawingml/2006/main"/>
-          <a:ln xmlns:a="http://schemas.openxmlformats.org/drawingml/2006/main" w="0">
-            <a:noFill/>
-            <a:prstDash val="solid"/>
-          </a:ln>
-        </p:spPr>
-        <p:txBody>
-          <a:bodyPr xmlns:a="http://schemas.openxmlformats.org/drawingml/2006/main" anchor="t">
-            <a:normAutofit fontScale="100000"/>
-          </a:bodyPr>
-          <a:lstStyle xmlns:a="http://schemas.openxmlformats.org/drawingml/2006/main"/>
-          <a:p xmlns:a="http://schemas.openxmlformats.org/drawingml/2006/main">
-            <a:pPr algn="l">
-              <a:buNone/>
-              <a:defRPr sz="1050" b="1">
-                <a:solidFill>
-                  <a:srgbClr val="686863"/>
-                </a:solidFill>
-                <a:latin typeface="Arial"/>
-                <a:ea typeface="Arial"/>
-                <a:cs typeface="Arial"/>
-              </a:defRPr>
-            </a:pPr>
-            <a:r>
-              <a:rPr sz="750" b="1">
-                <a:solidFill>
-                  <a:srgbClr val="9C9183"/>
+              <a:t>Promotion boundary</a:t>
+            </a:r>
+          </a:p>
+        </p:txBody>
+      </p:sp>
+      <p:sp>
+        <p:nvSpPr>
+          <p:cNvPr id="28" name="">
+            <a:extLst xmlns:a="http://schemas.openxmlformats.org/drawingml/2006/main">
+              <a:ext uri="{FF2B5EF4-FFF2-40B4-BE49-F238E27FC236}">
+                <a16:creationId xmlns:a16="http://schemas.microsoft.com/office/drawing/2014/main" id="{7625FA09-4E1D-4BB3-ABCD-4902E573654D}"/>
+              </a:ext>
+            </a:extLst>
+          </p:cNvPr>
+          <p:cNvSpPr>
+            <a:spLocks xmlns:a="http://schemas.openxmlformats.org/drawingml/2006/main" noGrp="1"/>
+          </p:cNvSpPr>
+          <p:nvPr/>
+        </p:nvSpPr>
+        <p:spPr>
+          <a:xfrm xmlns:a="http://schemas.openxmlformats.org/drawingml/2006/main">
+            <a:off x="4629150" y="5410200"/>
+            <a:ext cx="2667000" cy="266700"/>
+          </a:xfrm>
+          <a:prstGeom xmlns:a="http://schemas.openxmlformats.org/drawingml/2006/main" prst="rect">
+            <a:avLst/>
+          </a:prstGeom>
+          <a:noFill xmlns:a="http://schemas.openxmlformats.org/drawingml/2006/main"/>
+          <a:ln xmlns:a="http://schemas.openxmlformats.org/drawingml/2006/main" w="0">
+            <a:noFill/>
+            <a:prstDash val="solid"/>
+          </a:ln>
+        </p:spPr>
+        <p:txBody>
+          <a:bodyPr xmlns:a="http://schemas.openxmlformats.org/drawingml/2006/main" anchor="t">
+            <a:normAutofit fontScale="95833"/>
+          </a:bodyPr>
+          <a:lstStyle xmlns:a="http://schemas.openxmlformats.org/drawingml/2006/main"/>
+          <a:p xmlns:a="http://schemas.openxmlformats.org/drawingml/2006/main">
+            <a:pPr algn="l">
+              <a:buNone/>
+              <a:defRPr sz="1350" b="1">
+                <a:solidFill>
+                  <a:srgbClr val="171714"/>
+                </a:solidFill>
+                <a:latin typeface="Arial"/>
+                <a:ea typeface="Arial"/>
+                <a:cs typeface="Arial"/>
+              </a:defRPr>
+            </a:pPr>
+            <a:r>
+              <a:rPr sz="1200" b="1">
+                <a:solidFill>
+                  <a:srgbClr val="D4A359"/>
                 </a:solidFill>
                 <a:latin typeface="Menlo"/>
                 <a:ea typeface="Menlo"/>
                 <a:cs typeface="Menlo"/>
               </a:rPr>
-              <a:t>Promotion boundary</a:t>
-            </a:r>
-          </a:p>
-        </p:txBody>
-      </p:sp>
-      <p:sp>
-        <p:nvSpPr>
-          <p:cNvPr id="28" name="">
-            <a:extLst xmlns:a="http://schemas.openxmlformats.org/drawingml/2006/main">
-              <a:ext uri="{FF2B5EF4-FFF2-40B4-BE49-F238E27FC236}">
-                <a16:creationId xmlns:a16="http://schemas.microsoft.com/office/drawing/2014/main" id="{7625FA09-4E1D-4BB3-ABCD-4902E573654D}"/>
-              </a:ext>
-            </a:extLst>
-          </p:cNvPr>
-          <p:cNvSpPr>
-            <a:spLocks xmlns:a="http://schemas.openxmlformats.org/drawingml/2006/main" noGrp="1"/>
-          </p:cNvSpPr>
-          <p:nvPr/>
-        </p:nvSpPr>
-        <p:spPr>
-          <a:xfrm xmlns:a="http://schemas.openxmlformats.org/drawingml/2006/main">
-            <a:off x="4629150" y="5410200"/>
-            <a:ext cx="2667000" cy="266700"/>
-          </a:xfrm>
-          <a:prstGeom xmlns:a="http://schemas.openxmlformats.org/drawingml/2006/main" prst="rect">
-            <a:avLst/>
-          </a:prstGeom>
-          <a:noFill xmlns:a="http://schemas.openxmlformats.org/drawingml/2006/main"/>
-          <a:ln xmlns:a="http://schemas.openxmlformats.org/drawingml/2006/main" w="0">
-            <a:noFill/>
-            <a:prstDash val="solid"/>
-          </a:ln>
-        </p:spPr>
-        <p:txBody>
-          <a:bodyPr xmlns:a="http://schemas.openxmlformats.org/drawingml/2006/main" anchor="t">
-            <a:normAutofit fontScale="95833"/>
-          </a:bodyPr>
-          <a:lstStyle xmlns:a="http://schemas.openxmlformats.org/drawingml/2006/main"/>
-          <a:p xmlns:a="http://schemas.openxmlformats.org/drawingml/2006/main">
-            <a:pPr algn="l">
-              <a:buNone/>
-              <a:defRPr sz="1350" b="1">
-                <a:solidFill>
-                  <a:srgbClr val="171714"/>
-                </a:solidFill>
-                <a:latin typeface="Arial"/>
-                <a:ea typeface="Arial"/>
-                <a:cs typeface="Arial"/>
-              </a:defRPr>
-            </a:pPr>
-            <a:r>
-              <a:rPr sz="1200" b="1">
-                <a:solidFill>
-                  <a:srgbClr val="D4A359"/>
-                </a:solidFill>
-                <a:latin typeface="Menlo"/>
-                <a:ea typeface="Menlo"/>
-                <a:cs typeface="Menlo"/>
-              </a:rPr>
               <a:t>Human approval required</a:t>
             </a:r>
           </a:p>
@@ -19195,8 +19137,8 @@
         </p:nvSpPr>
         <p:spPr>
           <a:xfrm xmlns:a="http://schemas.openxmlformats.org/drawingml/2006/main">
-            <a:off x="8686800" y="5238750"/>
-            <a:ext cx="2381250" cy="304800"/>
+            <a:off x="8686800" y="5562600"/>
+            <a:ext cx="2381250" cy="19050"/>
           </a:xfrm>
           <a:prstGeom xmlns:a="http://schemas.openxmlformats.org/drawingml/2006/main" prst="roundRect">
             <a:avLst>
@@ -19204,9 +19146,9 @@
             </a:avLst>
           </a:prstGeom>
           <a:solidFill xmlns:a="http://schemas.openxmlformats.org/drawingml/2006/main">
-            <a:srgbClr val="251F12"/>
+            <a:srgbClr val="D4A359"/>
           </a:solidFill>
-          <a:ln xmlns:a="http://schemas.openxmlformats.org/drawingml/2006/main" w="9525">
+          <a:ln xmlns:a="http://schemas.openxmlformats.org/drawingml/2006/main" w="0">
             <a:solidFill>
               <a:srgbClr val="D4A359"/>
             </a:solidFill>
@@ -19230,25 +19172,25 @@
         </p:nvSpPr>
         <p:spPr>
           <a:xfrm xmlns:a="http://schemas.openxmlformats.org/drawingml/2006/main">
-            <a:off x="8782050" y="5295900"/>
-            <a:ext cx="2190750" cy="190500"/>
-          </a:xfrm>
-          <a:prstGeom xmlns:a="http://schemas.openxmlformats.org/drawingml/2006/main" prst="rect">
-            <a:avLst/>
-          </a:prstGeom>
-          <a:noFill xmlns:a="http://schemas.openxmlformats.org/drawingml/2006/main"/>
-          <a:ln xmlns:a="http://schemas.openxmlformats.org/drawingml/2006/main" w="0">
-            <a:noFill/>
-            <a:prstDash val="solid"/>
-          </a:ln>
-        </p:spPr>
-        <p:txBody>
-          <a:bodyPr xmlns:a="http://schemas.openxmlformats.org/drawingml/2006/main" anchor="t">
-            <a:normAutofit fontScale="86667"/>
-          </a:bodyPr>
-          <a:lstStyle xmlns:a="http://schemas.openxmlformats.org/drawingml/2006/main"/>
-          <a:p xmlns:a="http://schemas.openxmlformats.org/drawingml/2006/main">
-            <a:pPr algn="ctr">
+            <a:off x="8686800" y="5257800"/>
+            <a:ext cx="2381250" cy="209550"/>
+          </a:xfrm>
+          <a:prstGeom xmlns:a="http://schemas.openxmlformats.org/drawingml/2006/main" prst="rect">
+            <a:avLst/>
+          </a:prstGeom>
+          <a:noFill xmlns:a="http://schemas.openxmlformats.org/drawingml/2006/main"/>
+          <a:ln xmlns:a="http://schemas.openxmlformats.org/drawingml/2006/main" w="0">
+            <a:noFill/>
+            <a:prstDash val="solid"/>
+          </a:ln>
+        </p:spPr>
+        <p:txBody>
+          <a:bodyPr xmlns:a="http://schemas.openxmlformats.org/drawingml/2006/main" anchor="t">
+            <a:normAutofit fontScale="100000"/>
+          </a:bodyPr>
+          <a:lstStyle xmlns:a="http://schemas.openxmlformats.org/drawingml/2006/main"/>
+          <a:p xmlns:a="http://schemas.openxmlformats.org/drawingml/2006/main">
+            <a:pPr algn="l">
               <a:buNone/>
               <a:defRPr sz="975" b="1">
                 <a:solidFill>

--- a/docs/submission/APAR_COMPETITION_DECK.pptx
+++ b/docs/submission/APAR_COMPETITION_DECK.pptx
@@ -2,23 +2,23 @@
 <file path=ppt/presentation.xml><?xml version="1.0" encoding="utf-8"?>
 <p:presentation xmlns:p="http://schemas.openxmlformats.org/presentationml/2006/main">
   <p:sldMasterIdLst>
-    <p:sldMasterId xmlns:r="http://schemas.openxmlformats.org/officeDocument/2006/relationships" id="2147483648" r:id="R0596405537454097"/>
+    <p:sldMasterId xmlns:r="http://schemas.openxmlformats.org/officeDocument/2006/relationships" id="2147483648" r:id="R2cd3fc62273843aa"/>
   </p:sldMasterIdLst>
   <p:notesMasterIdLst>
-    <p:notesMasterId xmlns:r="http://schemas.openxmlformats.org/officeDocument/2006/relationships" r:id="R570b005f04ee40a5"/>
+    <p:notesMasterId xmlns:r="http://schemas.openxmlformats.org/officeDocument/2006/relationships" r:id="R351acfcfe1dd4b83"/>
   </p:notesMasterIdLst>
   <p:sldIdLst>
-    <p:sldId xmlns:r="http://schemas.openxmlformats.org/officeDocument/2006/relationships" id="256" r:id="R0b56787107de4416"/>
-    <p:sldId xmlns:r="http://schemas.openxmlformats.org/officeDocument/2006/relationships" id="257" r:id="R4554b7a691e84368"/>
-    <p:sldId xmlns:r="http://schemas.openxmlformats.org/officeDocument/2006/relationships" id="258" r:id="Rb6d7cb6c690547a3"/>
-    <p:sldId xmlns:r="http://schemas.openxmlformats.org/officeDocument/2006/relationships" id="259" r:id="R63140776d4e54952"/>
-    <p:sldId xmlns:r="http://schemas.openxmlformats.org/officeDocument/2006/relationships" id="260" r:id="R5569c5c73a0c46ae"/>
-    <p:sldId xmlns:r="http://schemas.openxmlformats.org/officeDocument/2006/relationships" id="261" r:id="Rd1b5af351b064233"/>
-    <p:sldId xmlns:r="http://schemas.openxmlformats.org/officeDocument/2006/relationships" id="262" r:id="R56b4491126e74e72"/>
-    <p:sldId xmlns:r="http://schemas.openxmlformats.org/officeDocument/2006/relationships" id="263" r:id="Rbd26517a9da54114"/>
-    <p:sldId xmlns:r="http://schemas.openxmlformats.org/officeDocument/2006/relationships" id="264" r:id="R2cc1af7360124e34"/>
-    <p:sldId xmlns:r="http://schemas.openxmlformats.org/officeDocument/2006/relationships" id="265" r:id="Rae3fe964d4264616"/>
-    <p:sldId xmlns:r="http://schemas.openxmlformats.org/officeDocument/2006/relationships" id="266" r:id="Rd5a62c8f8af243cf"/>
+    <p:sldId xmlns:r="http://schemas.openxmlformats.org/officeDocument/2006/relationships" id="256" r:id="R2b30af6436884418"/>
+    <p:sldId xmlns:r="http://schemas.openxmlformats.org/officeDocument/2006/relationships" id="257" r:id="R04449302b2814ddb"/>
+    <p:sldId xmlns:r="http://schemas.openxmlformats.org/officeDocument/2006/relationships" id="258" r:id="R5c5fdd481cea4cbb"/>
+    <p:sldId xmlns:r="http://schemas.openxmlformats.org/officeDocument/2006/relationships" id="259" r:id="R7e85c67bfd3f4de6"/>
+    <p:sldId xmlns:r="http://schemas.openxmlformats.org/officeDocument/2006/relationships" id="260" r:id="R285a23eb0a3247cb"/>
+    <p:sldId xmlns:r="http://schemas.openxmlformats.org/officeDocument/2006/relationships" id="261" r:id="R66a2c03cd2064ed9"/>
+    <p:sldId xmlns:r="http://schemas.openxmlformats.org/officeDocument/2006/relationships" id="262" r:id="Rfee801a008154497"/>
+    <p:sldId xmlns:r="http://schemas.openxmlformats.org/officeDocument/2006/relationships" id="263" r:id="R43c3ef3f1ca245e1"/>
+    <p:sldId xmlns:r="http://schemas.openxmlformats.org/officeDocument/2006/relationships" id="264" r:id="R54b352b5718348c4"/>
+    <p:sldId xmlns:r="http://schemas.openxmlformats.org/officeDocument/2006/relationships" id="265" r:id="Re0e413e67d954abc"/>
+    <p:sldId xmlns:r="http://schemas.openxmlformats.org/officeDocument/2006/relationships" id="266" r:id="R18b2effe0dd942f9"/>
   </p:sldIdLst>
   <p:sldSz cx="12192000" cy="6858000"/>
   <p:notesSz cx="6858000" cy="9144000"/>
@@ -1520,7 +1520,7 @@
   </p:cSld>
   <p:clrMap bg1="lt1" tx1="dk1" bg2="lt2" tx2="dk2" accent1="accent1" accent2="accent2" accent3="accent3" accent4="accent4" accent5="accent5" accent6="accent6" hlink="hlink" folHlink="folHlink"/>
   <p:sldLayoutIdLst>
-    <p:sldLayoutId xmlns:r="http://schemas.openxmlformats.org/officeDocument/2006/relationships" id="2147483649" r:id="R3c7dbd5bbff44069"/>
+    <p:sldLayoutId xmlns:r="http://schemas.openxmlformats.org/officeDocument/2006/relationships" id="2147483649" r:id="R4a9adf1f0f19459a"/>
   </p:sldLayoutIdLst>
   <p:txStyles>
     <p:titleStyle>
@@ -2462,7 +2462,7 @@
           <p:nvPr/>
         </p:nvPicPr>
         <p:blipFill>
-          <a:blip xmlns:r="http://schemas.openxmlformats.org/officeDocument/2006/relationships" xmlns:a="http://schemas.openxmlformats.org/drawingml/2006/main" r:embed="Raf2ed721ac014bee"/>
+          <a:blip xmlns:r="http://schemas.openxmlformats.org/officeDocument/2006/relationships" xmlns:a="http://schemas.openxmlformats.org/drawingml/2006/main" r:embed="Rfb0c5d05412a474f"/>
           <a:srcRect xmlns:a="http://schemas.openxmlformats.org/drawingml/2006/main" l="0" t="0" r="0" b="32694"/>
           <a:stretch xmlns:a="http://schemas.openxmlformats.org/drawingml/2006/main">
             <a:fillRect l="0" t="0" r="0" b="0"/>
@@ -4400,17 +4400,15 @@
         <p:spPr>
           <a:xfrm xmlns:a="http://schemas.openxmlformats.org/drawingml/2006/main">
             <a:off x="400050" y="1752600"/>
-            <a:ext cx="2019300" cy="28575"/>
+            <a:ext cx="2019300" cy="2076450"/>
           </a:xfrm>
           <a:prstGeom xmlns:a="http://schemas.openxmlformats.org/drawingml/2006/main" prst="roundRect">
             <a:avLst>
-              <a:gd name="adj" fmla="val 5660"/>
+              <a:gd name="adj" fmla="val 0"/>
             </a:avLst>
           </a:prstGeom>
-          <a:solidFill xmlns:a="http://schemas.openxmlformats.org/drawingml/2006/main">
-            <a:srgbClr val="E8793D"/>
-          </a:solidFill>
-          <a:ln xmlns:a="http://schemas.openxmlformats.org/drawingml/2006/main" w="0">
+          <a:noFill xmlns:a="http://schemas.openxmlformats.org/drawingml/2006/main"/>
+          <a:ln xmlns:a="http://schemas.openxmlformats.org/drawingml/2006/main" w="11430">
             <a:solidFill>
               <a:srgbClr val="E8793D"/>
             </a:solidFill>
@@ -4448,7 +4446,7 @@
         </p:spPr>
         <p:txBody>
           <a:bodyPr xmlns:a="http://schemas.openxmlformats.org/drawingml/2006/main" anchor="t">
-            <a:normAutofit fontScale="80702"/>
+            <a:normAutofit fontScale="76667"/>
           </a:bodyPr>
           <a:lstStyle xmlns:a="http://schemas.openxmlformats.org/drawingml/2006/main"/>
           <a:p xmlns:a="http://schemas.openxmlformats.org/drawingml/2006/main">
@@ -4464,7 +4462,7 @@
               </a:defRPr>
             </a:pPr>
             <a:r>
-              <a:rPr sz="1425" b="0">
+              <a:rPr sz="1500" b="0">
                 <a:solidFill>
                   <a:srgbClr val="F19A68"/>
                 </a:solidFill>
@@ -4671,19 +4669,17 @@
         <p:spPr>
           <a:xfrm xmlns:a="http://schemas.openxmlformats.org/drawingml/2006/main">
             <a:off x="2667000" y="1752600"/>
-            <a:ext cx="2019300" cy="9525"/>
+            <a:ext cx="2019300" cy="2076450"/>
           </a:xfrm>
           <a:prstGeom xmlns:a="http://schemas.openxmlformats.org/drawingml/2006/main" prst="roundRect">
             <a:avLst>
-              <a:gd name="adj" fmla="val 5660"/>
+              <a:gd name="adj" fmla="val 0"/>
             </a:avLst>
           </a:prstGeom>
-          <a:solidFill xmlns:a="http://schemas.openxmlformats.org/drawingml/2006/main">
-            <a:srgbClr val="6B5F50"/>
-          </a:solidFill>
-          <a:ln xmlns:a="http://schemas.openxmlformats.org/drawingml/2006/main" w="0">
+          <a:noFill xmlns:a="http://schemas.openxmlformats.org/drawingml/2006/main"/>
+          <a:ln xmlns:a="http://schemas.openxmlformats.org/drawingml/2006/main" w="7620">
             <a:solidFill>
-              <a:srgbClr val="6B5F50"/>
+              <a:srgbClr val="3F382E"/>
             </a:solidFill>
             <a:prstDash val="solid"/>
           </a:ln>
@@ -4719,7 +4715,7 @@
         </p:spPr>
         <p:txBody>
           <a:bodyPr xmlns:a="http://schemas.openxmlformats.org/drawingml/2006/main" anchor="t">
-            <a:normAutofit fontScale="80702"/>
+            <a:normAutofit fontScale="76667"/>
           </a:bodyPr>
           <a:lstStyle xmlns:a="http://schemas.openxmlformats.org/drawingml/2006/main"/>
           <a:p xmlns:a="http://schemas.openxmlformats.org/drawingml/2006/main">
@@ -4735,7 +4731,7 @@
               </a:defRPr>
             </a:pPr>
             <a:r>
-              <a:rPr sz="1425" b="0">
+              <a:rPr sz="1500" b="0">
                 <a:solidFill>
                   <a:srgbClr val="F19A68"/>
                 </a:solidFill>
@@ -4942,19 +4938,17 @@
         <p:spPr>
           <a:xfrm xmlns:a="http://schemas.openxmlformats.org/drawingml/2006/main">
             <a:off x="4933950" y="1752600"/>
-            <a:ext cx="2019300" cy="9525"/>
+            <a:ext cx="2019300" cy="2076450"/>
           </a:xfrm>
           <a:prstGeom xmlns:a="http://schemas.openxmlformats.org/drawingml/2006/main" prst="roundRect">
             <a:avLst>
-              <a:gd name="adj" fmla="val 5660"/>
+              <a:gd name="adj" fmla="val 0"/>
             </a:avLst>
           </a:prstGeom>
-          <a:solidFill xmlns:a="http://schemas.openxmlformats.org/drawingml/2006/main">
-            <a:srgbClr val="6B5F50"/>
-          </a:solidFill>
-          <a:ln xmlns:a="http://schemas.openxmlformats.org/drawingml/2006/main" w="0">
+          <a:noFill xmlns:a="http://schemas.openxmlformats.org/drawingml/2006/main"/>
+          <a:ln xmlns:a="http://schemas.openxmlformats.org/drawingml/2006/main" w="7620">
             <a:solidFill>
-              <a:srgbClr val="6B5F50"/>
+              <a:srgbClr val="3F382E"/>
             </a:solidFill>
             <a:prstDash val="solid"/>
           </a:ln>
@@ -4990,7 +4984,7 @@
         </p:spPr>
         <p:txBody>
           <a:bodyPr xmlns:a="http://schemas.openxmlformats.org/drawingml/2006/main" anchor="t">
-            <a:normAutofit fontScale="80702"/>
+            <a:normAutofit fontScale="76667"/>
           </a:bodyPr>
           <a:lstStyle xmlns:a="http://schemas.openxmlformats.org/drawingml/2006/main"/>
           <a:p xmlns:a="http://schemas.openxmlformats.org/drawingml/2006/main">
@@ -5006,7 +5000,7 @@
               </a:defRPr>
             </a:pPr>
             <a:r>
-              <a:rPr sz="1425" b="0">
+              <a:rPr sz="1500" b="0">
                 <a:solidFill>
                   <a:srgbClr val="F19A68"/>
                 </a:solidFill>
@@ -5213,19 +5207,17 @@
         <p:spPr>
           <a:xfrm xmlns:a="http://schemas.openxmlformats.org/drawingml/2006/main">
             <a:off x="7200900" y="1752600"/>
-            <a:ext cx="2019300" cy="9525"/>
+            <a:ext cx="2019300" cy="2076450"/>
           </a:xfrm>
           <a:prstGeom xmlns:a="http://schemas.openxmlformats.org/drawingml/2006/main" prst="roundRect">
             <a:avLst>
-              <a:gd name="adj" fmla="val 5660"/>
+              <a:gd name="adj" fmla="val 0"/>
             </a:avLst>
           </a:prstGeom>
-          <a:solidFill xmlns:a="http://schemas.openxmlformats.org/drawingml/2006/main">
-            <a:srgbClr val="6B5F50"/>
-          </a:solidFill>
-          <a:ln xmlns:a="http://schemas.openxmlformats.org/drawingml/2006/main" w="0">
+          <a:noFill xmlns:a="http://schemas.openxmlformats.org/drawingml/2006/main"/>
+          <a:ln xmlns:a="http://schemas.openxmlformats.org/drawingml/2006/main" w="7620">
             <a:solidFill>
-              <a:srgbClr val="6B5F50"/>
+              <a:srgbClr val="3F382E"/>
             </a:solidFill>
             <a:prstDash val="solid"/>
           </a:ln>
@@ -5261,7 +5253,7 @@
         </p:spPr>
         <p:txBody>
           <a:bodyPr xmlns:a="http://schemas.openxmlformats.org/drawingml/2006/main" anchor="t">
-            <a:normAutofit fontScale="80702"/>
+            <a:normAutofit fontScale="76667"/>
           </a:bodyPr>
           <a:lstStyle xmlns:a="http://schemas.openxmlformats.org/drawingml/2006/main"/>
           <a:p xmlns:a="http://schemas.openxmlformats.org/drawingml/2006/main">
@@ -5277,7 +5269,7 @@
               </a:defRPr>
             </a:pPr>
             <a:r>
-              <a:rPr sz="1425" b="0">
+              <a:rPr sz="1500" b="0">
                 <a:solidFill>
                   <a:srgbClr val="F19A68"/>
                 </a:solidFill>
@@ -5484,19 +5476,17 @@
         <p:spPr>
           <a:xfrm xmlns:a="http://schemas.openxmlformats.org/drawingml/2006/main">
             <a:off x="9467850" y="1752600"/>
-            <a:ext cx="2019300" cy="9525"/>
+            <a:ext cx="2019300" cy="2076450"/>
           </a:xfrm>
           <a:prstGeom xmlns:a="http://schemas.openxmlformats.org/drawingml/2006/main" prst="roundRect">
             <a:avLst>
-              <a:gd name="adj" fmla="val 5660"/>
+              <a:gd name="adj" fmla="val 0"/>
             </a:avLst>
           </a:prstGeom>
-          <a:solidFill xmlns:a="http://schemas.openxmlformats.org/drawingml/2006/main">
-            <a:srgbClr val="6B5F50"/>
-          </a:solidFill>
-          <a:ln xmlns:a="http://schemas.openxmlformats.org/drawingml/2006/main" w="0">
+          <a:noFill xmlns:a="http://schemas.openxmlformats.org/drawingml/2006/main"/>
+          <a:ln xmlns:a="http://schemas.openxmlformats.org/drawingml/2006/main" w="11430">
             <a:solidFill>
-              <a:srgbClr val="6B5F50"/>
+              <a:srgbClr val="75B78E"/>
             </a:solidFill>
             <a:prstDash val="solid"/>
           </a:ln>
@@ -5532,7 +5522,7 @@
         </p:spPr>
         <p:txBody>
           <a:bodyPr xmlns:a="http://schemas.openxmlformats.org/drawingml/2006/main" anchor="t">
-            <a:normAutofit fontScale="80702"/>
+            <a:normAutofit fontScale="76667"/>
           </a:bodyPr>
           <a:lstStyle xmlns:a="http://schemas.openxmlformats.org/drawingml/2006/main"/>
           <a:p xmlns:a="http://schemas.openxmlformats.org/drawingml/2006/main">
@@ -5548,9 +5538,9 @@
               </a:defRPr>
             </a:pPr>
             <a:r>
-              <a:rPr sz="1425" b="0">
-                <a:solidFill>
-                  <a:srgbClr val="F19A68"/>
+              <a:rPr sz="1500" b="0">
+                <a:solidFill>
+                  <a:srgbClr val="75B78E"/>
                 </a:solidFill>
                 <a:latin typeface="Georgia"/>
                 <a:ea typeface="Georgia"/>
@@ -6170,21 +6160,21 @@
         </p:nvSpPr>
         <p:spPr>
           <a:xfrm xmlns:a="http://schemas.openxmlformats.org/drawingml/2006/main">
-            <a:off x="11277600" y="1752600"/>
-            <a:ext cx="514350" cy="285750"/>
-          </a:xfrm>
-          <a:prstGeom xmlns:a="http://schemas.openxmlformats.org/drawingml/2006/main" prst="rect">
-            <a:avLst/>
-          </a:prstGeom>
-          <a:noFill xmlns:a="http://schemas.openxmlformats.org/drawingml/2006/main"/>
-          <a:ln xmlns:a="http://schemas.openxmlformats.org/drawingml/2006/main" w="0">
-            <a:noFill/>
-            <a:prstDash val="solid"/>
-          </a:ln>
-        </p:spPr>
-        <p:txBody>
-          <a:bodyPr xmlns:a="http://schemas.openxmlformats.org/drawingml/2006/main" anchor="t">
-            <a:normAutofit fontScale="85000"/>
+            <a:off x="11277600" y="342900"/>
+            <a:ext cx="514350" cy="209550"/>
+          </a:xfrm>
+          <a:prstGeom xmlns:a="http://schemas.openxmlformats.org/drawingml/2006/main" prst="rect">
+            <a:avLst/>
+          </a:prstGeom>
+          <a:noFill xmlns:a="http://schemas.openxmlformats.org/drawingml/2006/main"/>
+          <a:ln xmlns:a="http://schemas.openxmlformats.org/drawingml/2006/main" w="0">
+            <a:noFill/>
+            <a:prstDash val="solid"/>
+          </a:ln>
+        </p:spPr>
+        <p:txBody>
+          <a:bodyPr xmlns:a="http://schemas.openxmlformats.org/drawingml/2006/main" anchor="t">
+            <a:normAutofit fontScale="93939"/>
           </a:bodyPr>
           <a:lstStyle xmlns:a="http://schemas.openxmlformats.org/drawingml/2006/main"/>
           <a:p xmlns:a="http://schemas.openxmlformats.org/drawingml/2006/main">
@@ -6200,13 +6190,13 @@
               </a:defRPr>
             </a:pPr>
             <a:r>
-              <a:rPr sz="1500" b="0">
-                <a:solidFill>
-                  <a:srgbClr val="F19A68"/>
-                </a:solidFill>
-                <a:latin typeface="Georgia"/>
-                <a:ea typeface="Georgia"/>
-                <a:cs typeface="Georgia"/>
+              <a:rPr sz="825" b="0">
+                <a:solidFill>
+                  <a:srgbClr val="9C9183"/>
+                </a:solidFill>
+                <a:latin typeface="Menlo"/>
+                <a:ea typeface="Menlo"/>
+                <a:cs typeface="Menlo"/>
               </a:rPr>
               <a:t>02</a:t>
             </a:r>
@@ -14494,7 +14484,7 @@
           <p:nvPr/>
         </p:nvPicPr>
         <p:blipFill>
-          <a:blip xmlns:r="http://schemas.openxmlformats.org/officeDocument/2006/relationships" xmlns:a="http://schemas.openxmlformats.org/drawingml/2006/main" r:embed="Re7b93f326ffa4926"/>
+          <a:blip xmlns:r="http://schemas.openxmlformats.org/officeDocument/2006/relationships" xmlns:a="http://schemas.openxmlformats.org/drawingml/2006/main" r:embed="Re775445b32fb4eb8"/>
           <a:srcRect xmlns:a="http://schemas.openxmlformats.org/drawingml/2006/main" l="0" t="33403" r="0" b="33403"/>
           <a:stretch xmlns:a="http://schemas.openxmlformats.org/drawingml/2006/main">
             <a:fillRect l="0" t="0" r="0" b="0"/>
@@ -15441,7 +15431,7 @@
           </a:xfrm>
           <a:prstGeom xmlns:a="http://schemas.openxmlformats.org/drawingml/2006/main" prst="roundRect">
             <a:avLst>
-              <a:gd name="adj" fmla="val 2429"/>
+              <a:gd name="adj" fmla="val 0"/>
             </a:avLst>
           </a:prstGeom>
           <a:noFill xmlns:a="http://schemas.openxmlformats.org/drawingml/2006/main"/>
@@ -15462,7 +15452,7 @@
           <p:nvPr/>
         </p:nvPicPr>
         <p:blipFill>
-          <a:blip xmlns:r="http://schemas.openxmlformats.org/officeDocument/2006/relationships" xmlns:a="http://schemas.openxmlformats.org/drawingml/2006/main" r:embed="R9fd001e6212042d1"/>
+          <a:blip xmlns:r="http://schemas.openxmlformats.org/officeDocument/2006/relationships" xmlns:a="http://schemas.openxmlformats.org/drawingml/2006/main" r:embed="Rffb087988b9f4222"/>
           <a:srcRect xmlns:a="http://schemas.openxmlformats.org/drawingml/2006/main" l="0" t="29622" r="0" b="29622"/>
           <a:stretch xmlns:a="http://schemas.openxmlformats.org/drawingml/2006/main">
             <a:fillRect l="0" t="0" r="0" b="0"/>
@@ -15494,20 +15484,18 @@
         </p:nvSpPr>
         <p:spPr>
           <a:xfrm xmlns:a="http://schemas.openxmlformats.org/drawingml/2006/main">
-            <a:off x="400050" y="1981200"/>
-            <a:ext cx="1428750" cy="19050"/>
+            <a:off x="400050" y="1600200"/>
+            <a:ext cx="2895600" cy="3676650"/>
           </a:xfrm>
           <a:prstGeom xmlns:a="http://schemas.openxmlformats.org/drawingml/2006/main" prst="roundRect">
             <a:avLst>
-              <a:gd name="adj" fmla="val 50000"/>
+              <a:gd name="adj" fmla="val 0"/>
             </a:avLst>
           </a:prstGeom>
-          <a:solidFill xmlns:a="http://schemas.openxmlformats.org/drawingml/2006/main">
-            <a:srgbClr val="75B78E"/>
-          </a:solidFill>
-          <a:ln xmlns:a="http://schemas.openxmlformats.org/drawingml/2006/main" w="0">
+          <a:noFill xmlns:a="http://schemas.openxmlformats.org/drawingml/2006/main"/>
+          <a:ln xmlns:a="http://schemas.openxmlformats.org/drawingml/2006/main" w="7620">
             <a:solidFill>
-              <a:srgbClr val="75B78E"/>
+              <a:srgbClr val="6B5F50"/>
             </a:solidFill>
             <a:prstDash val="solid"/>
           </a:ln>
@@ -15529,8 +15517,8 @@
         </p:nvSpPr>
         <p:spPr>
           <a:xfrm xmlns:a="http://schemas.openxmlformats.org/drawingml/2006/main">
-            <a:off x="400050" y="1676400"/>
-            <a:ext cx="1428750" cy="209550"/>
+            <a:off x="590550" y="1790700"/>
+            <a:ext cx="2381250" cy="209550"/>
           </a:xfrm>
           <a:prstGeom xmlns:a="http://schemas.openxmlformats.org/drawingml/2006/main" prst="rect">
             <a:avLst/>
@@ -15588,21 +15576,21 @@
         </p:nvSpPr>
         <p:spPr>
           <a:xfrm xmlns:a="http://schemas.openxmlformats.org/drawingml/2006/main">
-            <a:off x="400050" y="2228850"/>
-            <a:ext cx="1047750" cy="476250"/>
-          </a:xfrm>
-          <a:prstGeom xmlns:a="http://schemas.openxmlformats.org/drawingml/2006/main" prst="rect">
-            <a:avLst/>
-          </a:prstGeom>
-          <a:noFill xmlns:a="http://schemas.openxmlformats.org/drawingml/2006/main"/>
-          <a:ln xmlns:a="http://schemas.openxmlformats.org/drawingml/2006/main" w="0">
-            <a:noFill/>
-            <a:prstDash val="solid"/>
-          </a:ln>
-        </p:spPr>
-        <p:txBody>
-          <a:bodyPr xmlns:a="http://schemas.openxmlformats.org/drawingml/2006/main" anchor="t">
-            <a:normAutofit fontScale="80159"/>
+            <a:off x="590550" y="2209800"/>
+            <a:ext cx="2381250" cy="438150"/>
+          </a:xfrm>
+          <a:prstGeom xmlns:a="http://schemas.openxmlformats.org/drawingml/2006/main" prst="rect">
+            <a:avLst/>
+          </a:prstGeom>
+          <a:noFill xmlns:a="http://schemas.openxmlformats.org/drawingml/2006/main"/>
+          <a:ln xmlns:a="http://schemas.openxmlformats.org/drawingml/2006/main" w="0">
+            <a:noFill/>
+            <a:prstDash val="solid"/>
+          </a:ln>
+        </p:spPr>
+        <p:txBody>
+          <a:bodyPr xmlns:a="http://schemas.openxmlformats.org/drawingml/2006/main" anchor="t">
+            <a:normAutofit fontScale="79825"/>
           </a:bodyPr>
           <a:lstStyle xmlns:a="http://schemas.openxmlformats.org/drawingml/2006/main"/>
           <a:p xmlns:a="http://schemas.openxmlformats.org/drawingml/2006/main">
@@ -15618,7 +15606,7 @@
               </a:defRPr>
             </a:pPr>
             <a:r>
-              <a:rPr sz="3150" b="0">
+              <a:rPr sz="2850" b="0">
                 <a:solidFill>
                   <a:srgbClr val="F19A68"/>
                 </a:solidFill>
@@ -15647,21 +15635,21 @@
         </p:nvSpPr>
         <p:spPr>
           <a:xfrm xmlns:a="http://schemas.openxmlformats.org/drawingml/2006/main">
-            <a:off x="400050" y="2705100"/>
-            <a:ext cx="1809750" cy="247650"/>
-          </a:xfrm>
-          <a:prstGeom xmlns:a="http://schemas.openxmlformats.org/drawingml/2006/main" prst="rect">
-            <a:avLst/>
-          </a:prstGeom>
-          <a:noFill xmlns:a="http://schemas.openxmlformats.org/drawingml/2006/main"/>
-          <a:ln xmlns:a="http://schemas.openxmlformats.org/drawingml/2006/main" w="0">
-            <a:noFill/>
-            <a:prstDash val="solid"/>
-          </a:ln>
-        </p:spPr>
-        <p:txBody>
-          <a:bodyPr xmlns:a="http://schemas.openxmlformats.org/drawingml/2006/main" anchor="t">
-            <a:normAutofit fontScale="91111"/>
+            <a:off x="590550" y="2647950"/>
+            <a:ext cx="2381250" cy="323850"/>
+          </a:xfrm>
+          <a:prstGeom xmlns:a="http://schemas.openxmlformats.org/drawingml/2006/main" prst="rect">
+            <a:avLst/>
+          </a:prstGeom>
+          <a:noFill xmlns:a="http://schemas.openxmlformats.org/drawingml/2006/main"/>
+          <a:ln xmlns:a="http://schemas.openxmlformats.org/drawingml/2006/main" w="0">
+            <a:noFill/>
+            <a:prstDash val="solid"/>
+          </a:ln>
+        </p:spPr>
+        <p:txBody>
+          <a:bodyPr xmlns:a="http://schemas.openxmlformats.org/drawingml/2006/main" anchor="t">
+            <a:normAutofit fontScale="100000"/>
           </a:bodyPr>
           <a:lstStyle xmlns:a="http://schemas.openxmlformats.org/drawingml/2006/main"/>
           <a:p xmlns:a="http://schemas.openxmlformats.org/drawingml/2006/main">
@@ -15706,21 +15694,21 @@
         </p:nvSpPr>
         <p:spPr>
           <a:xfrm xmlns:a="http://schemas.openxmlformats.org/drawingml/2006/main">
-            <a:off x="400050" y="3257550"/>
-            <a:ext cx="1047750" cy="476250"/>
-          </a:xfrm>
-          <a:prstGeom xmlns:a="http://schemas.openxmlformats.org/drawingml/2006/main" prst="rect">
-            <a:avLst/>
-          </a:prstGeom>
-          <a:noFill xmlns:a="http://schemas.openxmlformats.org/drawingml/2006/main"/>
-          <a:ln xmlns:a="http://schemas.openxmlformats.org/drawingml/2006/main" w="0">
-            <a:noFill/>
-            <a:prstDash val="solid"/>
-          </a:ln>
-        </p:spPr>
-        <p:txBody>
-          <a:bodyPr xmlns:a="http://schemas.openxmlformats.org/drawingml/2006/main" anchor="t">
-            <a:normAutofit fontScale="80159"/>
+            <a:off x="590550" y="3162300"/>
+            <a:ext cx="2381250" cy="438150"/>
+          </a:xfrm>
+          <a:prstGeom xmlns:a="http://schemas.openxmlformats.org/drawingml/2006/main" prst="rect">
+            <a:avLst/>
+          </a:prstGeom>
+          <a:noFill xmlns:a="http://schemas.openxmlformats.org/drawingml/2006/main"/>
+          <a:ln xmlns:a="http://schemas.openxmlformats.org/drawingml/2006/main" w="0">
+            <a:noFill/>
+            <a:prstDash val="solid"/>
+          </a:ln>
+        </p:spPr>
+        <p:txBody>
+          <a:bodyPr xmlns:a="http://schemas.openxmlformats.org/drawingml/2006/main" anchor="t">
+            <a:normAutofit fontScale="79825"/>
           </a:bodyPr>
           <a:lstStyle xmlns:a="http://schemas.openxmlformats.org/drawingml/2006/main"/>
           <a:p xmlns:a="http://schemas.openxmlformats.org/drawingml/2006/main">
@@ -15736,7 +15724,7 @@
               </a:defRPr>
             </a:pPr>
             <a:r>
-              <a:rPr sz="3150" b="0">
+              <a:rPr sz="2850" b="0">
                 <a:solidFill>
                   <a:srgbClr val="F19A68"/>
                 </a:solidFill>
@@ -15765,21 +15753,21 @@
         </p:nvSpPr>
         <p:spPr>
           <a:xfrm xmlns:a="http://schemas.openxmlformats.org/drawingml/2006/main">
-            <a:off x="400050" y="3733800"/>
-            <a:ext cx="1905000" cy="247650"/>
-          </a:xfrm>
-          <a:prstGeom xmlns:a="http://schemas.openxmlformats.org/drawingml/2006/main" prst="rect">
-            <a:avLst/>
-          </a:prstGeom>
-          <a:noFill xmlns:a="http://schemas.openxmlformats.org/drawingml/2006/main"/>
-          <a:ln xmlns:a="http://schemas.openxmlformats.org/drawingml/2006/main" w="0">
-            <a:noFill/>
-            <a:prstDash val="solid"/>
-          </a:ln>
-        </p:spPr>
-        <p:txBody>
-          <a:bodyPr xmlns:a="http://schemas.openxmlformats.org/drawingml/2006/main" anchor="t">
-            <a:normAutofit fontScale="91111"/>
+            <a:off x="590550" y="3600450"/>
+            <a:ext cx="2381250" cy="323850"/>
+          </a:xfrm>
+          <a:prstGeom xmlns:a="http://schemas.openxmlformats.org/drawingml/2006/main" prst="rect">
+            <a:avLst/>
+          </a:prstGeom>
+          <a:noFill xmlns:a="http://schemas.openxmlformats.org/drawingml/2006/main"/>
+          <a:ln xmlns:a="http://schemas.openxmlformats.org/drawingml/2006/main" w="0">
+            <a:noFill/>
+            <a:prstDash val="solid"/>
+          </a:ln>
+        </p:spPr>
+        <p:txBody>
+          <a:bodyPr xmlns:a="http://schemas.openxmlformats.org/drawingml/2006/main" anchor="t">
+            <a:normAutofit fontScale="100000"/>
           </a:bodyPr>
           <a:lstStyle xmlns:a="http://schemas.openxmlformats.org/drawingml/2006/main"/>
           <a:p xmlns:a="http://schemas.openxmlformats.org/drawingml/2006/main">
@@ -15824,21 +15812,21 @@
         </p:nvSpPr>
         <p:spPr>
           <a:xfrm xmlns:a="http://schemas.openxmlformats.org/drawingml/2006/main">
-            <a:off x="400050" y="4305300"/>
-            <a:ext cx="1524000" cy="476250"/>
-          </a:xfrm>
-          <a:prstGeom xmlns:a="http://schemas.openxmlformats.org/drawingml/2006/main" prst="rect">
-            <a:avLst/>
-          </a:prstGeom>
-          <a:noFill xmlns:a="http://schemas.openxmlformats.org/drawingml/2006/main"/>
-          <a:ln xmlns:a="http://schemas.openxmlformats.org/drawingml/2006/main" w="0">
-            <a:noFill/>
-            <a:prstDash val="solid"/>
-          </a:ln>
-        </p:spPr>
-        <p:txBody>
-          <a:bodyPr xmlns:a="http://schemas.openxmlformats.org/drawingml/2006/main" anchor="t">
-            <a:normAutofit fontScale="80159"/>
+            <a:off x="590550" y="4114800"/>
+            <a:ext cx="2381250" cy="438150"/>
+          </a:xfrm>
+          <a:prstGeom xmlns:a="http://schemas.openxmlformats.org/drawingml/2006/main" prst="rect">
+            <a:avLst/>
+          </a:prstGeom>
+          <a:noFill xmlns:a="http://schemas.openxmlformats.org/drawingml/2006/main"/>
+          <a:ln xmlns:a="http://schemas.openxmlformats.org/drawingml/2006/main" w="0">
+            <a:noFill/>
+            <a:prstDash val="solid"/>
+          </a:ln>
+        </p:spPr>
+        <p:txBody>
+          <a:bodyPr xmlns:a="http://schemas.openxmlformats.org/drawingml/2006/main" anchor="t">
+            <a:normAutofit fontScale="79825"/>
           </a:bodyPr>
           <a:lstStyle xmlns:a="http://schemas.openxmlformats.org/drawingml/2006/main"/>
           <a:p xmlns:a="http://schemas.openxmlformats.org/drawingml/2006/main">
@@ -15854,7 +15842,7 @@
               </a:defRPr>
             </a:pPr>
             <a:r>
-              <a:rPr sz="3150" b="0">
+              <a:rPr sz="2850" b="0">
                 <a:solidFill>
                   <a:srgbClr val="F19A68"/>
                 </a:solidFill>
@@ -15883,8 +15871,8 @@
         </p:nvSpPr>
         <p:spPr>
           <a:xfrm xmlns:a="http://schemas.openxmlformats.org/drawingml/2006/main">
-            <a:off x="400050" y="4781550"/>
-            <a:ext cx="2571750" cy="495300"/>
+            <a:off x="590550" y="4552950"/>
+            <a:ext cx="2381250" cy="323850"/>
           </a:xfrm>
           <a:prstGeom xmlns:a="http://schemas.openxmlformats.org/drawingml/2006/main" prst="rect">
             <a:avLst/>
@@ -15942,18 +15930,16 @@
         </p:nvSpPr>
         <p:spPr>
           <a:xfrm xmlns:a="http://schemas.openxmlformats.org/drawingml/2006/main">
-            <a:off x="400050" y="5467350"/>
-            <a:ext cx="2895600" cy="9525"/>
+            <a:off x="400050" y="5429250"/>
+            <a:ext cx="2895600" cy="647700"/>
           </a:xfrm>
           <a:prstGeom xmlns:a="http://schemas.openxmlformats.org/drawingml/2006/main" prst="roundRect">
             <a:avLst>
-              <a:gd name="adj" fmla="val 18750"/>
+              <a:gd name="adj" fmla="val 0"/>
             </a:avLst>
           </a:prstGeom>
-          <a:solidFill xmlns:a="http://schemas.openxmlformats.org/drawingml/2006/main">
-            <a:srgbClr val="6B5F50"/>
-          </a:solidFill>
-          <a:ln xmlns:a="http://schemas.openxmlformats.org/drawingml/2006/main" w="0">
+          <a:noFill xmlns:a="http://schemas.openxmlformats.org/drawingml/2006/main"/>
+          <a:ln xmlns:a="http://schemas.openxmlformats.org/drawingml/2006/main" w="7620">
             <a:solidFill>
               <a:srgbClr val="6B5F50"/>
             </a:solidFill>
@@ -15977,8 +15963,8 @@
         </p:nvSpPr>
         <p:spPr>
           <a:xfrm xmlns:a="http://schemas.openxmlformats.org/drawingml/2006/main">
-            <a:off x="400050" y="5619750"/>
-            <a:ext cx="2895600" cy="266700"/>
+            <a:off x="552450" y="5619750"/>
+            <a:ext cx="2590800" cy="266700"/>
           </a:xfrm>
           <a:prstGeom xmlns:a="http://schemas.openxmlformats.org/drawingml/2006/main" prst="rect">
             <a:avLst/>
@@ -16007,7 +15993,7 @@
               </a:defRPr>
             </a:pPr>
             <a:r>
-              <a:rPr sz="825" b="1">
+              <a:rPr sz="750" b="1">
                 <a:solidFill>
                   <a:srgbClr val="C8BDAE"/>
                 </a:solidFill>
@@ -16301,7 +16287,7 @@
           <p:nvPr/>
         </p:nvPicPr>
         <p:blipFill>
-          <a:blip xmlns:r="http://schemas.openxmlformats.org/officeDocument/2006/relationships" xmlns:a="http://schemas.openxmlformats.org/drawingml/2006/main" r:embed="Re83780bd905f456e"/>
+          <a:blip xmlns:r="http://schemas.openxmlformats.org/officeDocument/2006/relationships" xmlns:a="http://schemas.openxmlformats.org/drawingml/2006/main" r:embed="Rb48bed6b7f7e47b6"/>
           <a:srcRect xmlns:a="http://schemas.openxmlformats.org/drawingml/2006/main" l="0" t="46500" r="0" b="30636"/>
           <a:stretch xmlns:a="http://schemas.openxmlformats.org/drawingml/2006/main">
             <a:fillRect l="0" t="0" r="0" b="0"/>
@@ -17842,19 +17828,17 @@
         <p:spPr>
           <a:xfrm xmlns:a="http://schemas.openxmlformats.org/drawingml/2006/main">
             <a:off x="400050" y="1695450"/>
-            <a:ext cx="2038350" cy="9525"/>
+            <a:ext cx="2038350" cy="2628900"/>
           </a:xfrm>
           <a:prstGeom xmlns:a="http://schemas.openxmlformats.org/drawingml/2006/main" prst="roundRect">
             <a:avLst>
-              <a:gd name="adj" fmla="val 5607"/>
+              <a:gd name="adj" fmla="val 0"/>
             </a:avLst>
           </a:prstGeom>
-          <a:solidFill xmlns:a="http://schemas.openxmlformats.org/drawingml/2006/main">
-            <a:srgbClr val="6B5F50"/>
-          </a:solidFill>
-          <a:ln xmlns:a="http://schemas.openxmlformats.org/drawingml/2006/main" w="0">
+          <a:noFill xmlns:a="http://schemas.openxmlformats.org/drawingml/2006/main"/>
+          <a:ln xmlns:a="http://schemas.openxmlformats.org/drawingml/2006/main" w="11430">
             <a:solidFill>
-              <a:srgbClr val="6B5F50"/>
+              <a:srgbClr val="E8793D"/>
             </a:solidFill>
             <a:prstDash val="solid"/>
           </a:ln>
@@ -18054,19 +18038,17 @@
         <p:spPr>
           <a:xfrm xmlns:a="http://schemas.openxmlformats.org/drawingml/2006/main">
             <a:off x="2667000" y="1962150"/>
-            <a:ext cx="2038350" cy="9525"/>
+            <a:ext cx="2038350" cy="2533650"/>
           </a:xfrm>
           <a:prstGeom xmlns:a="http://schemas.openxmlformats.org/drawingml/2006/main" prst="roundRect">
             <a:avLst>
-              <a:gd name="adj" fmla="val 5607"/>
+              <a:gd name="adj" fmla="val 0"/>
             </a:avLst>
           </a:prstGeom>
-          <a:solidFill xmlns:a="http://schemas.openxmlformats.org/drawingml/2006/main">
-            <a:srgbClr val="6B5F50"/>
-          </a:solidFill>
-          <a:ln xmlns:a="http://schemas.openxmlformats.org/drawingml/2006/main" w="0">
+          <a:noFill xmlns:a="http://schemas.openxmlformats.org/drawingml/2006/main"/>
+          <a:ln xmlns:a="http://schemas.openxmlformats.org/drawingml/2006/main" w="7620">
             <a:solidFill>
-              <a:srgbClr val="6B5F50"/>
+              <a:srgbClr val="3F382E"/>
             </a:solidFill>
             <a:prstDash val="solid"/>
           </a:ln>
@@ -18266,19 +18248,17 @@
         <p:spPr>
           <a:xfrm xmlns:a="http://schemas.openxmlformats.org/drawingml/2006/main">
             <a:off x="4933950" y="2228850"/>
-            <a:ext cx="2038350" cy="9525"/>
+            <a:ext cx="2038350" cy="2438400"/>
           </a:xfrm>
           <a:prstGeom xmlns:a="http://schemas.openxmlformats.org/drawingml/2006/main" prst="roundRect">
             <a:avLst>
-              <a:gd name="adj" fmla="val 5607"/>
+              <a:gd name="adj" fmla="val 0"/>
             </a:avLst>
           </a:prstGeom>
-          <a:solidFill xmlns:a="http://schemas.openxmlformats.org/drawingml/2006/main">
-            <a:srgbClr val="6B5F50"/>
-          </a:solidFill>
-          <a:ln xmlns:a="http://schemas.openxmlformats.org/drawingml/2006/main" w="0">
+          <a:noFill xmlns:a="http://schemas.openxmlformats.org/drawingml/2006/main"/>
+          <a:ln xmlns:a="http://schemas.openxmlformats.org/drawingml/2006/main" w="7620">
             <a:solidFill>
-              <a:srgbClr val="6B5F50"/>
+              <a:srgbClr val="3F382E"/>
             </a:solidFill>
             <a:prstDash val="solid"/>
           </a:ln>
@@ -18478,19 +18458,17 @@
         <p:spPr>
           <a:xfrm xmlns:a="http://schemas.openxmlformats.org/drawingml/2006/main">
             <a:off x="7200900" y="2495550"/>
-            <a:ext cx="2038350" cy="9525"/>
+            <a:ext cx="2038350" cy="2343150"/>
           </a:xfrm>
           <a:prstGeom xmlns:a="http://schemas.openxmlformats.org/drawingml/2006/main" prst="roundRect">
             <a:avLst>
-              <a:gd name="adj" fmla="val 5607"/>
+              <a:gd name="adj" fmla="val 0"/>
             </a:avLst>
           </a:prstGeom>
-          <a:solidFill xmlns:a="http://schemas.openxmlformats.org/drawingml/2006/main">
-            <a:srgbClr val="6B5F50"/>
-          </a:solidFill>
-          <a:ln xmlns:a="http://schemas.openxmlformats.org/drawingml/2006/main" w="0">
+          <a:noFill xmlns:a="http://schemas.openxmlformats.org/drawingml/2006/main"/>
+          <a:ln xmlns:a="http://schemas.openxmlformats.org/drawingml/2006/main" w="7620">
             <a:solidFill>
-              <a:srgbClr val="6B5F50"/>
+              <a:srgbClr val="3F382E"/>
             </a:solidFill>
             <a:prstDash val="solid"/>
           </a:ln>
@@ -18690,17 +18668,15 @@
         <p:spPr>
           <a:xfrm xmlns:a="http://schemas.openxmlformats.org/drawingml/2006/main">
             <a:off x="9467850" y="2762250"/>
-            <a:ext cx="2038350" cy="28575"/>
+            <a:ext cx="2038350" cy="2247900"/>
           </a:xfrm>
           <a:prstGeom xmlns:a="http://schemas.openxmlformats.org/drawingml/2006/main" prst="roundRect">
             <a:avLst>
-              <a:gd name="adj" fmla="val 5607"/>
+              <a:gd name="adj" fmla="val 0"/>
             </a:avLst>
           </a:prstGeom>
-          <a:solidFill xmlns:a="http://schemas.openxmlformats.org/drawingml/2006/main">
-            <a:srgbClr val="75B78E"/>
-          </a:solidFill>
-          <a:ln xmlns:a="http://schemas.openxmlformats.org/drawingml/2006/main" w="0">
+          <a:noFill xmlns:a="http://schemas.openxmlformats.org/drawingml/2006/main"/>
+          <a:ln xmlns:a="http://schemas.openxmlformats.org/drawingml/2006/main" w="11430">
             <a:solidFill>
               <a:srgbClr val="75B78E"/>
             </a:solidFill>

--- a/docs/submission/APAR_COMPETITION_DECK.pptx
+++ b/docs/submission/APAR_COMPETITION_DECK.pptx
@@ -2,23 +2,23 @@
 <file path=ppt/presentation.xml><?xml version="1.0" encoding="utf-8"?>
 <p:presentation xmlns:p="http://schemas.openxmlformats.org/presentationml/2006/main">
   <p:sldMasterIdLst>
-    <p:sldMasterId xmlns:r="http://schemas.openxmlformats.org/officeDocument/2006/relationships" id="2147483648" r:id="R2cd3fc62273843aa"/>
+    <p:sldMasterId xmlns:r="http://schemas.openxmlformats.org/officeDocument/2006/relationships" id="2147483648" r:id="Rf043c89714ca4998"/>
   </p:sldMasterIdLst>
   <p:notesMasterIdLst>
-    <p:notesMasterId xmlns:r="http://schemas.openxmlformats.org/officeDocument/2006/relationships" r:id="R351acfcfe1dd4b83"/>
+    <p:notesMasterId xmlns:r="http://schemas.openxmlformats.org/officeDocument/2006/relationships" r:id="R50e4f95c92964fde"/>
   </p:notesMasterIdLst>
   <p:sldIdLst>
-    <p:sldId xmlns:r="http://schemas.openxmlformats.org/officeDocument/2006/relationships" id="256" r:id="R2b30af6436884418"/>
-    <p:sldId xmlns:r="http://schemas.openxmlformats.org/officeDocument/2006/relationships" id="257" r:id="R04449302b2814ddb"/>
-    <p:sldId xmlns:r="http://schemas.openxmlformats.org/officeDocument/2006/relationships" id="258" r:id="R5c5fdd481cea4cbb"/>
-    <p:sldId xmlns:r="http://schemas.openxmlformats.org/officeDocument/2006/relationships" id="259" r:id="R7e85c67bfd3f4de6"/>
-    <p:sldId xmlns:r="http://schemas.openxmlformats.org/officeDocument/2006/relationships" id="260" r:id="R285a23eb0a3247cb"/>
-    <p:sldId xmlns:r="http://schemas.openxmlformats.org/officeDocument/2006/relationships" id="261" r:id="R66a2c03cd2064ed9"/>
-    <p:sldId xmlns:r="http://schemas.openxmlformats.org/officeDocument/2006/relationships" id="262" r:id="Rfee801a008154497"/>
-    <p:sldId xmlns:r="http://schemas.openxmlformats.org/officeDocument/2006/relationships" id="263" r:id="R43c3ef3f1ca245e1"/>
-    <p:sldId xmlns:r="http://schemas.openxmlformats.org/officeDocument/2006/relationships" id="264" r:id="R54b352b5718348c4"/>
-    <p:sldId xmlns:r="http://schemas.openxmlformats.org/officeDocument/2006/relationships" id="265" r:id="Re0e413e67d954abc"/>
-    <p:sldId xmlns:r="http://schemas.openxmlformats.org/officeDocument/2006/relationships" id="266" r:id="R18b2effe0dd942f9"/>
+    <p:sldId xmlns:r="http://schemas.openxmlformats.org/officeDocument/2006/relationships" id="256" r:id="R38706f60b2704d13"/>
+    <p:sldId xmlns:r="http://schemas.openxmlformats.org/officeDocument/2006/relationships" id="257" r:id="R4ed8a45f1b89410f"/>
+    <p:sldId xmlns:r="http://schemas.openxmlformats.org/officeDocument/2006/relationships" id="258" r:id="R7df392c0eb8846de"/>
+    <p:sldId xmlns:r="http://schemas.openxmlformats.org/officeDocument/2006/relationships" id="259" r:id="Re24c92aa8c2c4916"/>
+    <p:sldId xmlns:r="http://schemas.openxmlformats.org/officeDocument/2006/relationships" id="260" r:id="R7ebb08f8065f4497"/>
+    <p:sldId xmlns:r="http://schemas.openxmlformats.org/officeDocument/2006/relationships" id="261" r:id="Rdef3fb02294c4973"/>
+    <p:sldId xmlns:r="http://schemas.openxmlformats.org/officeDocument/2006/relationships" id="262" r:id="Rd66d7208b90e419a"/>
+    <p:sldId xmlns:r="http://schemas.openxmlformats.org/officeDocument/2006/relationships" id="263" r:id="R5df4f03cf9b44709"/>
+    <p:sldId xmlns:r="http://schemas.openxmlformats.org/officeDocument/2006/relationships" id="264" r:id="R53215c505acd4917"/>
+    <p:sldId xmlns:r="http://schemas.openxmlformats.org/officeDocument/2006/relationships" id="265" r:id="R190aa44d5c8148ec"/>
+    <p:sldId xmlns:r="http://schemas.openxmlformats.org/officeDocument/2006/relationships" id="266" r:id="R164edc439d5a4d65"/>
   </p:sldIdLst>
   <p:sldSz cx="12192000" cy="6858000"/>
   <p:notesSz cx="6858000" cy="9144000"/>
@@ -1520,7 +1520,7 @@
   </p:cSld>
   <p:clrMap bg1="lt1" tx1="dk1" bg2="lt2" tx2="dk2" accent1="accent1" accent2="accent2" accent3="accent3" accent4="accent4" accent5="accent5" accent6="accent6" hlink="hlink" folHlink="folHlink"/>
   <p:sldLayoutIdLst>
-    <p:sldLayoutId xmlns:r="http://schemas.openxmlformats.org/officeDocument/2006/relationships" id="2147483649" r:id="R4a9adf1f0f19459a"/>
+    <p:sldLayoutId xmlns:r="http://schemas.openxmlformats.org/officeDocument/2006/relationships" id="2147483649" r:id="R65fcc1c9cd9f45aa"/>
   </p:sldLayoutIdLst>
   <p:txStyles>
     <p:titleStyle>
@@ -2462,7 +2462,7 @@
           <p:nvPr/>
         </p:nvPicPr>
         <p:blipFill>
-          <a:blip xmlns:r="http://schemas.openxmlformats.org/officeDocument/2006/relationships" xmlns:a="http://schemas.openxmlformats.org/drawingml/2006/main" r:embed="Rfb0c5d05412a474f"/>
+          <a:blip xmlns:r="http://schemas.openxmlformats.org/officeDocument/2006/relationships" xmlns:a="http://schemas.openxmlformats.org/drawingml/2006/main" r:embed="R698f8ec12c554a1d"/>
           <a:srcRect xmlns:a="http://schemas.openxmlformats.org/drawingml/2006/main" l="0" t="0" r="0" b="32694"/>
           <a:stretch xmlns:a="http://schemas.openxmlformats.org/drawingml/2006/main">
             <a:fillRect l="0" t="0" r="0" b="0"/>
@@ -4400,7 +4400,7 @@
         <p:spPr>
           <a:xfrm xmlns:a="http://schemas.openxmlformats.org/drawingml/2006/main">
             <a:off x="400050" y="1752600"/>
-            <a:ext cx="2019300" cy="2076450"/>
+            <a:ext cx="2076450" cy="2076450"/>
           </a:xfrm>
           <a:prstGeom xmlns:a="http://schemas.openxmlformats.org/drawingml/2006/main" prst="roundRect">
             <a:avLst>
@@ -4492,7 +4492,7 @@
         <p:spPr>
           <a:xfrm xmlns:a="http://schemas.openxmlformats.org/drawingml/2006/main">
             <a:off x="571500" y="2457450"/>
-            <a:ext cx="1676400" cy="457200"/>
+            <a:ext cx="1733550" cy="457200"/>
           </a:xfrm>
           <a:prstGeom xmlns:a="http://schemas.openxmlformats.org/drawingml/2006/main" prst="rect">
             <a:avLst/>
@@ -4551,7 +4551,7 @@
         <p:spPr>
           <a:xfrm xmlns:a="http://schemas.openxmlformats.org/drawingml/2006/main">
             <a:off x="571500" y="3105150"/>
-            <a:ext cx="1676400" cy="552450"/>
+            <a:ext cx="1733550" cy="552450"/>
           </a:xfrm>
           <a:prstGeom xmlns:a="http://schemas.openxmlformats.org/drawingml/2006/main" prst="rect">
             <a:avLst/>
@@ -4609,21 +4609,21 @@
         </p:nvSpPr>
         <p:spPr>
           <a:xfrm xmlns:a="http://schemas.openxmlformats.org/drawingml/2006/main">
-            <a:off x="2400300" y="2686050"/>
-            <a:ext cx="266700" cy="304800"/>
-          </a:xfrm>
-          <a:prstGeom xmlns:a="http://schemas.openxmlformats.org/drawingml/2006/main" prst="rect">
-            <a:avLst/>
-          </a:prstGeom>
-          <a:noFill xmlns:a="http://schemas.openxmlformats.org/drawingml/2006/main"/>
-          <a:ln xmlns:a="http://schemas.openxmlformats.org/drawingml/2006/main" w="0">
-            <a:noFill/>
-            <a:prstDash val="solid"/>
-          </a:ln>
-        </p:spPr>
-        <p:txBody>
-          <a:bodyPr xmlns:a="http://schemas.openxmlformats.org/drawingml/2006/main" anchor="t">
-            <a:normAutofit fontScale="39748"/>
+            <a:off x="2476500" y="2686050"/>
+            <a:ext cx="252413" cy="304800"/>
+          </a:xfrm>
+          <a:prstGeom xmlns:a="http://schemas.openxmlformats.org/drawingml/2006/main" prst="rect">
+            <a:avLst/>
+          </a:prstGeom>
+          <a:noFill xmlns:a="http://schemas.openxmlformats.org/drawingml/2006/main"/>
+          <a:ln xmlns:a="http://schemas.openxmlformats.org/drawingml/2006/main" w="0">
+            <a:noFill/>
+            <a:prstDash val="solid"/>
+          </a:ln>
+        </p:spPr>
+        <p:txBody>
+          <a:bodyPr xmlns:a="http://schemas.openxmlformats.org/drawingml/2006/main" anchor="t">
+            <a:normAutofit fontScale="32929"/>
           </a:bodyPr>
           <a:lstStyle xmlns:a="http://schemas.openxmlformats.org/drawingml/2006/main"/>
           <a:p xmlns:a="http://schemas.openxmlformats.org/drawingml/2006/main">
@@ -4668,8 +4668,8 @@
         </p:nvSpPr>
         <p:spPr>
           <a:xfrm xmlns:a="http://schemas.openxmlformats.org/drawingml/2006/main">
-            <a:off x="2667000" y="1752600"/>
-            <a:ext cx="2019300" cy="2076450"/>
+            <a:off x="2728913" y="1752600"/>
+            <a:ext cx="2076450" cy="2076450"/>
           </a:xfrm>
           <a:prstGeom xmlns:a="http://schemas.openxmlformats.org/drawingml/2006/main" prst="roundRect">
             <a:avLst>
@@ -4701,7 +4701,7 @@
         </p:nvSpPr>
         <p:spPr>
           <a:xfrm xmlns:a="http://schemas.openxmlformats.org/drawingml/2006/main">
-            <a:off x="2838450" y="1943100"/>
+            <a:off x="2900363" y="1943100"/>
             <a:ext cx="304800" cy="266700"/>
           </a:xfrm>
           <a:prstGeom xmlns:a="http://schemas.openxmlformats.org/drawingml/2006/main" prst="rect">
@@ -4760,8 +4760,8 @@
         </p:nvSpPr>
         <p:spPr>
           <a:xfrm xmlns:a="http://schemas.openxmlformats.org/drawingml/2006/main">
-            <a:off x="2838450" y="2457450"/>
-            <a:ext cx="1676400" cy="457200"/>
+            <a:off x="2900363" y="2457450"/>
+            <a:ext cx="1733550" cy="457200"/>
           </a:xfrm>
           <a:prstGeom xmlns:a="http://schemas.openxmlformats.org/drawingml/2006/main" prst="rect">
             <a:avLst/>
@@ -4819,8 +4819,8 @@
         </p:nvSpPr>
         <p:spPr>
           <a:xfrm xmlns:a="http://schemas.openxmlformats.org/drawingml/2006/main">
-            <a:off x="2838450" y="3105150"/>
-            <a:ext cx="1676400" cy="552450"/>
+            <a:off x="2900363" y="3105150"/>
+            <a:ext cx="1733550" cy="552450"/>
           </a:xfrm>
           <a:prstGeom xmlns:a="http://schemas.openxmlformats.org/drawingml/2006/main" prst="rect">
             <a:avLst/>
@@ -4878,21 +4878,21 @@
         </p:nvSpPr>
         <p:spPr>
           <a:xfrm xmlns:a="http://schemas.openxmlformats.org/drawingml/2006/main">
-            <a:off x="4667250" y="2686050"/>
-            <a:ext cx="266700" cy="304800"/>
-          </a:xfrm>
-          <a:prstGeom xmlns:a="http://schemas.openxmlformats.org/drawingml/2006/main" prst="rect">
-            <a:avLst/>
-          </a:prstGeom>
-          <a:noFill xmlns:a="http://schemas.openxmlformats.org/drawingml/2006/main"/>
-          <a:ln xmlns:a="http://schemas.openxmlformats.org/drawingml/2006/main" w="0">
-            <a:noFill/>
-            <a:prstDash val="solid"/>
-          </a:ln>
-        </p:spPr>
-        <p:txBody>
-          <a:bodyPr xmlns:a="http://schemas.openxmlformats.org/drawingml/2006/main" anchor="t">
-            <a:normAutofit fontScale="39748"/>
+            <a:off x="4805363" y="2686050"/>
+            <a:ext cx="252413" cy="304800"/>
+          </a:xfrm>
+          <a:prstGeom xmlns:a="http://schemas.openxmlformats.org/drawingml/2006/main" prst="rect">
+            <a:avLst/>
+          </a:prstGeom>
+          <a:noFill xmlns:a="http://schemas.openxmlformats.org/drawingml/2006/main"/>
+          <a:ln xmlns:a="http://schemas.openxmlformats.org/drawingml/2006/main" w="0">
+            <a:noFill/>
+            <a:prstDash val="solid"/>
+          </a:ln>
+        </p:spPr>
+        <p:txBody>
+          <a:bodyPr xmlns:a="http://schemas.openxmlformats.org/drawingml/2006/main" anchor="t">
+            <a:normAutofit fontScale="32929"/>
           </a:bodyPr>
           <a:lstStyle xmlns:a="http://schemas.openxmlformats.org/drawingml/2006/main"/>
           <a:p xmlns:a="http://schemas.openxmlformats.org/drawingml/2006/main">
@@ -4937,8 +4937,8 @@
         </p:nvSpPr>
         <p:spPr>
           <a:xfrm xmlns:a="http://schemas.openxmlformats.org/drawingml/2006/main">
-            <a:off x="4933950" y="1752600"/>
-            <a:ext cx="2019300" cy="2076450"/>
+            <a:off x="5057775" y="1752600"/>
+            <a:ext cx="2076450" cy="2076450"/>
           </a:xfrm>
           <a:prstGeom xmlns:a="http://schemas.openxmlformats.org/drawingml/2006/main" prst="roundRect">
             <a:avLst>
@@ -4970,7 +4970,7 @@
         </p:nvSpPr>
         <p:spPr>
           <a:xfrm xmlns:a="http://schemas.openxmlformats.org/drawingml/2006/main">
-            <a:off x="5105400" y="1943100"/>
+            <a:off x="5229225" y="1943100"/>
             <a:ext cx="304800" cy="266700"/>
           </a:xfrm>
           <a:prstGeom xmlns:a="http://schemas.openxmlformats.org/drawingml/2006/main" prst="rect">
@@ -5029,8 +5029,8 @@
         </p:nvSpPr>
         <p:spPr>
           <a:xfrm xmlns:a="http://schemas.openxmlformats.org/drawingml/2006/main">
-            <a:off x="5105400" y="2457450"/>
-            <a:ext cx="1676400" cy="457200"/>
+            <a:off x="5229225" y="2457450"/>
+            <a:ext cx="1733550" cy="457200"/>
           </a:xfrm>
           <a:prstGeom xmlns:a="http://schemas.openxmlformats.org/drawingml/2006/main" prst="rect">
             <a:avLst/>
@@ -5088,8 +5088,8 @@
         </p:nvSpPr>
         <p:spPr>
           <a:xfrm xmlns:a="http://schemas.openxmlformats.org/drawingml/2006/main">
-            <a:off x="5105400" y="3105150"/>
-            <a:ext cx="1676400" cy="552450"/>
+            <a:off x="5229225" y="3105150"/>
+            <a:ext cx="1733550" cy="552450"/>
           </a:xfrm>
           <a:prstGeom xmlns:a="http://schemas.openxmlformats.org/drawingml/2006/main" prst="rect">
             <a:avLst/>
@@ -5147,21 +5147,21 @@
         </p:nvSpPr>
         <p:spPr>
           <a:xfrm xmlns:a="http://schemas.openxmlformats.org/drawingml/2006/main">
-            <a:off x="6934200" y="2686050"/>
-            <a:ext cx="266700" cy="304800"/>
-          </a:xfrm>
-          <a:prstGeom xmlns:a="http://schemas.openxmlformats.org/drawingml/2006/main" prst="rect">
-            <a:avLst/>
-          </a:prstGeom>
-          <a:noFill xmlns:a="http://schemas.openxmlformats.org/drawingml/2006/main"/>
-          <a:ln xmlns:a="http://schemas.openxmlformats.org/drawingml/2006/main" w="0">
-            <a:noFill/>
-            <a:prstDash val="solid"/>
-          </a:ln>
-        </p:spPr>
-        <p:txBody>
-          <a:bodyPr xmlns:a="http://schemas.openxmlformats.org/drawingml/2006/main" anchor="t">
-            <a:normAutofit fontScale="39748"/>
+            <a:off x="7134225" y="2686050"/>
+            <a:ext cx="252413" cy="304800"/>
+          </a:xfrm>
+          <a:prstGeom xmlns:a="http://schemas.openxmlformats.org/drawingml/2006/main" prst="rect">
+            <a:avLst/>
+          </a:prstGeom>
+          <a:noFill xmlns:a="http://schemas.openxmlformats.org/drawingml/2006/main"/>
+          <a:ln xmlns:a="http://schemas.openxmlformats.org/drawingml/2006/main" w="0">
+            <a:noFill/>
+            <a:prstDash val="solid"/>
+          </a:ln>
+        </p:spPr>
+        <p:txBody>
+          <a:bodyPr xmlns:a="http://schemas.openxmlformats.org/drawingml/2006/main" anchor="t">
+            <a:normAutofit fontScale="32929"/>
           </a:bodyPr>
           <a:lstStyle xmlns:a="http://schemas.openxmlformats.org/drawingml/2006/main"/>
           <a:p xmlns:a="http://schemas.openxmlformats.org/drawingml/2006/main">
@@ -5206,8 +5206,8 @@
         </p:nvSpPr>
         <p:spPr>
           <a:xfrm xmlns:a="http://schemas.openxmlformats.org/drawingml/2006/main">
-            <a:off x="7200900" y="1752600"/>
-            <a:ext cx="2019300" cy="2076450"/>
+            <a:off x="7386638" y="1752600"/>
+            <a:ext cx="2076450" cy="2076450"/>
           </a:xfrm>
           <a:prstGeom xmlns:a="http://schemas.openxmlformats.org/drawingml/2006/main" prst="roundRect">
             <a:avLst>
@@ -5239,7 +5239,7 @@
         </p:nvSpPr>
         <p:spPr>
           <a:xfrm xmlns:a="http://schemas.openxmlformats.org/drawingml/2006/main">
-            <a:off x="7372350" y="1943100"/>
+            <a:off x="7558088" y="1943100"/>
             <a:ext cx="304800" cy="266700"/>
           </a:xfrm>
           <a:prstGeom xmlns:a="http://schemas.openxmlformats.org/drawingml/2006/main" prst="rect">
@@ -5298,8 +5298,8 @@
         </p:nvSpPr>
         <p:spPr>
           <a:xfrm xmlns:a="http://schemas.openxmlformats.org/drawingml/2006/main">
-            <a:off x="7372350" y="2457450"/>
-            <a:ext cx="1676400" cy="457200"/>
+            <a:off x="7558088" y="2457450"/>
+            <a:ext cx="1733550" cy="457200"/>
           </a:xfrm>
           <a:prstGeom xmlns:a="http://schemas.openxmlformats.org/drawingml/2006/main" prst="rect">
             <a:avLst/>
@@ -5357,8 +5357,8 @@
         </p:nvSpPr>
         <p:spPr>
           <a:xfrm xmlns:a="http://schemas.openxmlformats.org/drawingml/2006/main">
-            <a:off x="7372350" y="3105150"/>
-            <a:ext cx="1676400" cy="552450"/>
+            <a:off x="7558088" y="3105150"/>
+            <a:ext cx="1733550" cy="552450"/>
           </a:xfrm>
           <a:prstGeom xmlns:a="http://schemas.openxmlformats.org/drawingml/2006/main" prst="rect">
             <a:avLst/>
@@ -5416,21 +5416,21 @@
         </p:nvSpPr>
         <p:spPr>
           <a:xfrm xmlns:a="http://schemas.openxmlformats.org/drawingml/2006/main">
-            <a:off x="9201150" y="2686050"/>
-            <a:ext cx="266700" cy="304800"/>
-          </a:xfrm>
-          <a:prstGeom xmlns:a="http://schemas.openxmlformats.org/drawingml/2006/main" prst="rect">
-            <a:avLst/>
-          </a:prstGeom>
-          <a:noFill xmlns:a="http://schemas.openxmlformats.org/drawingml/2006/main"/>
-          <a:ln xmlns:a="http://schemas.openxmlformats.org/drawingml/2006/main" w="0">
-            <a:noFill/>
-            <a:prstDash val="solid"/>
-          </a:ln>
-        </p:spPr>
-        <p:txBody>
-          <a:bodyPr xmlns:a="http://schemas.openxmlformats.org/drawingml/2006/main" anchor="t">
-            <a:normAutofit fontScale="39748"/>
+            <a:off x="9463088" y="2686050"/>
+            <a:ext cx="252413" cy="304800"/>
+          </a:xfrm>
+          <a:prstGeom xmlns:a="http://schemas.openxmlformats.org/drawingml/2006/main" prst="rect">
+            <a:avLst/>
+          </a:prstGeom>
+          <a:noFill xmlns:a="http://schemas.openxmlformats.org/drawingml/2006/main"/>
+          <a:ln xmlns:a="http://schemas.openxmlformats.org/drawingml/2006/main" w="0">
+            <a:noFill/>
+            <a:prstDash val="solid"/>
+          </a:ln>
+        </p:spPr>
+        <p:txBody>
+          <a:bodyPr xmlns:a="http://schemas.openxmlformats.org/drawingml/2006/main" anchor="t">
+            <a:normAutofit fontScale="32929"/>
           </a:bodyPr>
           <a:lstStyle xmlns:a="http://schemas.openxmlformats.org/drawingml/2006/main"/>
           <a:p xmlns:a="http://schemas.openxmlformats.org/drawingml/2006/main">
@@ -5475,8 +5475,8 @@
         </p:nvSpPr>
         <p:spPr>
           <a:xfrm xmlns:a="http://schemas.openxmlformats.org/drawingml/2006/main">
-            <a:off x="9467850" y="1752600"/>
-            <a:ext cx="2019300" cy="2076450"/>
+            <a:off x="9715500" y="1752600"/>
+            <a:ext cx="2076450" cy="2076450"/>
           </a:xfrm>
           <a:prstGeom xmlns:a="http://schemas.openxmlformats.org/drawingml/2006/main" prst="roundRect">
             <a:avLst>
@@ -5508,7 +5508,7 @@
         </p:nvSpPr>
         <p:spPr>
           <a:xfrm xmlns:a="http://schemas.openxmlformats.org/drawingml/2006/main">
-            <a:off x="9639300" y="1943100"/>
+            <a:off x="9886950" y="1943100"/>
             <a:ext cx="304800" cy="266700"/>
           </a:xfrm>
           <a:prstGeom xmlns:a="http://schemas.openxmlformats.org/drawingml/2006/main" prst="rect">
@@ -5567,8 +5567,8 @@
         </p:nvSpPr>
         <p:spPr>
           <a:xfrm xmlns:a="http://schemas.openxmlformats.org/drawingml/2006/main">
-            <a:off x="9639300" y="2457450"/>
-            <a:ext cx="1676400" cy="457200"/>
+            <a:off x="9886950" y="2457450"/>
+            <a:ext cx="1733550" cy="457200"/>
           </a:xfrm>
           <a:prstGeom xmlns:a="http://schemas.openxmlformats.org/drawingml/2006/main" prst="rect">
             <a:avLst/>
@@ -5626,8 +5626,8 @@
         </p:nvSpPr>
         <p:spPr>
           <a:xfrm xmlns:a="http://schemas.openxmlformats.org/drawingml/2006/main">
-            <a:off x="9639300" y="3105150"/>
-            <a:ext cx="1676400" cy="552450"/>
+            <a:off x="9886950" y="3105150"/>
+            <a:ext cx="1733550" cy="552450"/>
           </a:xfrm>
           <a:prstGeom xmlns:a="http://schemas.openxmlformats.org/drawingml/2006/main" prst="rect">
             <a:avLst/>
@@ -11328,7 +11328,7 @@
         <p:spPr>
           <a:xfrm xmlns:a="http://schemas.openxmlformats.org/drawingml/2006/main">
             <a:off x="3257550" y="1905000"/>
-            <a:ext cx="1428750" cy="457200"/>
+            <a:ext cx="1619250" cy="457200"/>
           </a:xfrm>
           <a:prstGeom xmlns:a="http://schemas.openxmlformats.org/drawingml/2006/main" prst="roundRect">
             <a:avLst>
@@ -11361,7 +11361,7 @@
         <p:spPr>
           <a:xfrm xmlns:a="http://schemas.openxmlformats.org/drawingml/2006/main">
             <a:off x="3352800" y="2038350"/>
-            <a:ext cx="1238250" cy="190500"/>
+            <a:ext cx="1428750" cy="190500"/>
           </a:xfrm>
           <a:prstGeom xmlns:a="http://schemas.openxmlformats.org/drawingml/2006/main" prst="rect">
             <a:avLst/>
@@ -11419,8 +11419,8 @@
         </p:nvSpPr>
         <p:spPr>
           <a:xfrm xmlns:a="http://schemas.openxmlformats.org/drawingml/2006/main">
-            <a:off x="4686300" y="1905000"/>
-            <a:ext cx="1428750" cy="457200"/>
+            <a:off x="4876800" y="1905000"/>
+            <a:ext cx="1619250" cy="457200"/>
           </a:xfrm>
           <a:prstGeom xmlns:a="http://schemas.openxmlformats.org/drawingml/2006/main" prst="roundRect">
             <a:avLst>
@@ -11452,8 +11452,8 @@
         </p:nvSpPr>
         <p:spPr>
           <a:xfrm xmlns:a="http://schemas.openxmlformats.org/drawingml/2006/main">
-            <a:off x="4781550" y="2038350"/>
-            <a:ext cx="1238250" cy="190500"/>
+            <a:off x="4972050" y="2038350"/>
+            <a:ext cx="1428750" cy="190500"/>
           </a:xfrm>
           <a:prstGeom xmlns:a="http://schemas.openxmlformats.org/drawingml/2006/main" prst="rect">
             <a:avLst/>
@@ -11511,8 +11511,8 @@
         </p:nvSpPr>
         <p:spPr>
           <a:xfrm xmlns:a="http://schemas.openxmlformats.org/drawingml/2006/main">
-            <a:off x="6115050" y="1905000"/>
-            <a:ext cx="1428750" cy="457200"/>
+            <a:off x="6496050" y="1905000"/>
+            <a:ext cx="1619250" cy="457200"/>
           </a:xfrm>
           <a:prstGeom xmlns:a="http://schemas.openxmlformats.org/drawingml/2006/main" prst="roundRect">
             <a:avLst>
@@ -11544,8 +11544,8 @@
         </p:nvSpPr>
         <p:spPr>
           <a:xfrm xmlns:a="http://schemas.openxmlformats.org/drawingml/2006/main">
-            <a:off x="6210300" y="2038350"/>
-            <a:ext cx="1238250" cy="190500"/>
+            <a:off x="6591300" y="2038350"/>
+            <a:ext cx="1428750" cy="190500"/>
           </a:xfrm>
           <a:prstGeom xmlns:a="http://schemas.openxmlformats.org/drawingml/2006/main" prst="rect">
             <a:avLst/>
@@ -11603,8 +11603,8 @@
         </p:nvSpPr>
         <p:spPr>
           <a:xfrm xmlns:a="http://schemas.openxmlformats.org/drawingml/2006/main">
-            <a:off x="7543800" y="1905000"/>
-            <a:ext cx="1809750" cy="457200"/>
+            <a:off x="8115300" y="1905000"/>
+            <a:ext cx="2057400" cy="457200"/>
           </a:xfrm>
           <a:prstGeom xmlns:a="http://schemas.openxmlformats.org/drawingml/2006/main" prst="roundRect">
             <a:avLst>
@@ -11636,8 +11636,8 @@
         </p:nvSpPr>
         <p:spPr>
           <a:xfrm xmlns:a="http://schemas.openxmlformats.org/drawingml/2006/main">
-            <a:off x="7639050" y="2038350"/>
-            <a:ext cx="1619250" cy="190500"/>
+            <a:off x="8210550" y="2038350"/>
+            <a:ext cx="1866900" cy="190500"/>
           </a:xfrm>
           <a:prstGeom xmlns:a="http://schemas.openxmlformats.org/drawingml/2006/main" prst="rect">
             <a:avLst/>
@@ -11695,8 +11695,8 @@
         </p:nvSpPr>
         <p:spPr>
           <a:xfrm xmlns:a="http://schemas.openxmlformats.org/drawingml/2006/main">
-            <a:off x="9353550" y="1905000"/>
-            <a:ext cx="1428750" cy="457200"/>
+            <a:off x="10172700" y="1905000"/>
+            <a:ext cx="1619250" cy="457200"/>
           </a:xfrm>
           <a:prstGeom xmlns:a="http://schemas.openxmlformats.org/drawingml/2006/main" prst="roundRect">
             <a:avLst>
@@ -11728,8 +11728,8 @@
         </p:nvSpPr>
         <p:spPr>
           <a:xfrm xmlns:a="http://schemas.openxmlformats.org/drawingml/2006/main">
-            <a:off x="9448800" y="2038350"/>
-            <a:ext cx="1238250" cy="190500"/>
+            <a:off x="10267950" y="2038350"/>
+            <a:ext cx="1428750" cy="190500"/>
           </a:xfrm>
           <a:prstGeom xmlns:a="http://schemas.openxmlformats.org/drawingml/2006/main" prst="rect">
             <a:avLst/>
@@ -11880,7 +11880,7 @@
         <p:spPr>
           <a:xfrm xmlns:a="http://schemas.openxmlformats.org/drawingml/2006/main">
             <a:off x="3257550" y="2362200"/>
-            <a:ext cx="1428750" cy="628650"/>
+            <a:ext cx="1619250" cy="628650"/>
           </a:xfrm>
           <a:prstGeom xmlns:a="http://schemas.openxmlformats.org/drawingml/2006/main" prst="roundRect">
             <a:avLst>
@@ -11913,7 +11913,7 @@
         <p:spPr>
           <a:xfrm xmlns:a="http://schemas.openxmlformats.org/drawingml/2006/main">
             <a:off x="3352800" y="2562225"/>
-            <a:ext cx="1238250" cy="238125"/>
+            <a:ext cx="1428750" cy="238125"/>
           </a:xfrm>
           <a:prstGeom xmlns:a="http://schemas.openxmlformats.org/drawingml/2006/main" prst="rect">
             <a:avLst/>
@@ -11971,8 +11971,8 @@
         </p:nvSpPr>
         <p:spPr>
           <a:xfrm xmlns:a="http://schemas.openxmlformats.org/drawingml/2006/main">
-            <a:off x="4686300" y="2362200"/>
-            <a:ext cx="1428750" cy="628650"/>
+            <a:off x="4876800" y="2362200"/>
+            <a:ext cx="1619250" cy="628650"/>
           </a:xfrm>
           <a:prstGeom xmlns:a="http://schemas.openxmlformats.org/drawingml/2006/main" prst="roundRect">
             <a:avLst>
@@ -12004,8 +12004,8 @@
         </p:nvSpPr>
         <p:spPr>
           <a:xfrm xmlns:a="http://schemas.openxmlformats.org/drawingml/2006/main">
-            <a:off x="4781550" y="2562225"/>
-            <a:ext cx="1238250" cy="238125"/>
+            <a:off x="4972050" y="2562225"/>
+            <a:ext cx="1428750" cy="238125"/>
           </a:xfrm>
           <a:prstGeom xmlns:a="http://schemas.openxmlformats.org/drawingml/2006/main" prst="rect">
             <a:avLst/>
@@ -12063,8 +12063,8 @@
         </p:nvSpPr>
         <p:spPr>
           <a:xfrm xmlns:a="http://schemas.openxmlformats.org/drawingml/2006/main">
-            <a:off x="6115050" y="2362200"/>
-            <a:ext cx="1428750" cy="628650"/>
+            <a:off x="6496050" y="2362200"/>
+            <a:ext cx="1619250" cy="628650"/>
           </a:xfrm>
           <a:prstGeom xmlns:a="http://schemas.openxmlformats.org/drawingml/2006/main" prst="roundRect">
             <a:avLst>
@@ -12096,8 +12096,8 @@
         </p:nvSpPr>
         <p:spPr>
           <a:xfrm xmlns:a="http://schemas.openxmlformats.org/drawingml/2006/main">
-            <a:off x="6210300" y="2562225"/>
-            <a:ext cx="1238250" cy="238125"/>
+            <a:off x="6591300" y="2562225"/>
+            <a:ext cx="1428750" cy="238125"/>
           </a:xfrm>
           <a:prstGeom xmlns:a="http://schemas.openxmlformats.org/drawingml/2006/main" prst="rect">
             <a:avLst/>
@@ -12155,8 +12155,8 @@
         </p:nvSpPr>
         <p:spPr>
           <a:xfrm xmlns:a="http://schemas.openxmlformats.org/drawingml/2006/main">
-            <a:off x="7543800" y="2362200"/>
-            <a:ext cx="1809750" cy="628650"/>
+            <a:off x="8115300" y="2362200"/>
+            <a:ext cx="2057400" cy="628650"/>
           </a:xfrm>
           <a:prstGeom xmlns:a="http://schemas.openxmlformats.org/drawingml/2006/main" prst="roundRect">
             <a:avLst>
@@ -12188,8 +12188,8 @@
         </p:nvSpPr>
         <p:spPr>
           <a:xfrm xmlns:a="http://schemas.openxmlformats.org/drawingml/2006/main">
-            <a:off x="7639050" y="2562225"/>
-            <a:ext cx="1619250" cy="238125"/>
+            <a:off x="8210550" y="2562225"/>
+            <a:ext cx="1866900" cy="238125"/>
           </a:xfrm>
           <a:prstGeom xmlns:a="http://schemas.openxmlformats.org/drawingml/2006/main" prst="rect">
             <a:avLst/>
@@ -12247,8 +12247,8 @@
         </p:nvSpPr>
         <p:spPr>
           <a:xfrm xmlns:a="http://schemas.openxmlformats.org/drawingml/2006/main">
-            <a:off x="9353550" y="2362200"/>
-            <a:ext cx="1428750" cy="628650"/>
+            <a:off x="10172700" y="2362200"/>
+            <a:ext cx="1619250" cy="628650"/>
           </a:xfrm>
           <a:prstGeom xmlns:a="http://schemas.openxmlformats.org/drawingml/2006/main" prst="roundRect">
             <a:avLst>
@@ -12280,8 +12280,8 @@
         </p:nvSpPr>
         <p:spPr>
           <a:xfrm xmlns:a="http://schemas.openxmlformats.org/drawingml/2006/main">
-            <a:off x="9448800" y="2562225"/>
-            <a:ext cx="1238250" cy="238125"/>
+            <a:off x="10267950" y="2562225"/>
+            <a:ext cx="1428750" cy="238125"/>
           </a:xfrm>
           <a:prstGeom xmlns:a="http://schemas.openxmlformats.org/drawingml/2006/main" prst="rect">
             <a:avLst/>
@@ -12432,7 +12432,7 @@
         <p:spPr>
           <a:xfrm xmlns:a="http://schemas.openxmlformats.org/drawingml/2006/main">
             <a:off x="3257550" y="2990850"/>
-            <a:ext cx="1428750" cy="628650"/>
+            <a:ext cx="1619250" cy="628650"/>
           </a:xfrm>
           <a:prstGeom xmlns:a="http://schemas.openxmlformats.org/drawingml/2006/main" prst="roundRect">
             <a:avLst>
@@ -12465,7 +12465,7 @@
         <p:spPr>
           <a:xfrm xmlns:a="http://schemas.openxmlformats.org/drawingml/2006/main">
             <a:off x="3352800" y="3190875"/>
-            <a:ext cx="1238250" cy="238125"/>
+            <a:ext cx="1428750" cy="238125"/>
           </a:xfrm>
           <a:prstGeom xmlns:a="http://schemas.openxmlformats.org/drawingml/2006/main" prst="rect">
             <a:avLst/>
@@ -12523,8 +12523,8 @@
         </p:nvSpPr>
         <p:spPr>
           <a:xfrm xmlns:a="http://schemas.openxmlformats.org/drawingml/2006/main">
-            <a:off x="4686300" y="2990850"/>
-            <a:ext cx="1428750" cy="628650"/>
+            <a:off x="4876800" y="2990850"/>
+            <a:ext cx="1619250" cy="628650"/>
           </a:xfrm>
           <a:prstGeom xmlns:a="http://schemas.openxmlformats.org/drawingml/2006/main" prst="roundRect">
             <a:avLst>
@@ -12556,8 +12556,8 @@
         </p:nvSpPr>
         <p:spPr>
           <a:xfrm xmlns:a="http://schemas.openxmlformats.org/drawingml/2006/main">
-            <a:off x="4781550" y="3190875"/>
-            <a:ext cx="1238250" cy="238125"/>
+            <a:off x="4972050" y="3190875"/>
+            <a:ext cx="1428750" cy="238125"/>
           </a:xfrm>
           <a:prstGeom xmlns:a="http://schemas.openxmlformats.org/drawingml/2006/main" prst="rect">
             <a:avLst/>
@@ -12615,8 +12615,8 @@
         </p:nvSpPr>
         <p:spPr>
           <a:xfrm xmlns:a="http://schemas.openxmlformats.org/drawingml/2006/main">
-            <a:off x="6115050" y="2990850"/>
-            <a:ext cx="1428750" cy="628650"/>
+            <a:off x="6496050" y="2990850"/>
+            <a:ext cx="1619250" cy="628650"/>
           </a:xfrm>
           <a:prstGeom xmlns:a="http://schemas.openxmlformats.org/drawingml/2006/main" prst="roundRect">
             <a:avLst>
@@ -12648,8 +12648,8 @@
         </p:nvSpPr>
         <p:spPr>
           <a:xfrm xmlns:a="http://schemas.openxmlformats.org/drawingml/2006/main">
-            <a:off x="6210300" y="3190875"/>
-            <a:ext cx="1238250" cy="238125"/>
+            <a:off x="6591300" y="3190875"/>
+            <a:ext cx="1428750" cy="238125"/>
           </a:xfrm>
           <a:prstGeom xmlns:a="http://schemas.openxmlformats.org/drawingml/2006/main" prst="rect">
             <a:avLst/>
@@ -12707,8 +12707,8 @@
         </p:nvSpPr>
         <p:spPr>
           <a:xfrm xmlns:a="http://schemas.openxmlformats.org/drawingml/2006/main">
-            <a:off x="7543800" y="2990850"/>
-            <a:ext cx="1809750" cy="628650"/>
+            <a:off x="8115300" y="2990850"/>
+            <a:ext cx="2057400" cy="628650"/>
           </a:xfrm>
           <a:prstGeom xmlns:a="http://schemas.openxmlformats.org/drawingml/2006/main" prst="roundRect">
             <a:avLst>
@@ -12740,8 +12740,8 @@
         </p:nvSpPr>
         <p:spPr>
           <a:xfrm xmlns:a="http://schemas.openxmlformats.org/drawingml/2006/main">
-            <a:off x="7639050" y="3190875"/>
-            <a:ext cx="1619250" cy="238125"/>
+            <a:off x="8210550" y="3190875"/>
+            <a:ext cx="1866900" cy="238125"/>
           </a:xfrm>
           <a:prstGeom xmlns:a="http://schemas.openxmlformats.org/drawingml/2006/main" prst="rect">
             <a:avLst/>
@@ -12799,8 +12799,8 @@
         </p:nvSpPr>
         <p:spPr>
           <a:xfrm xmlns:a="http://schemas.openxmlformats.org/drawingml/2006/main">
-            <a:off x="9353550" y="2990850"/>
-            <a:ext cx="1428750" cy="628650"/>
+            <a:off x="10172700" y="2990850"/>
+            <a:ext cx="1619250" cy="628650"/>
           </a:xfrm>
           <a:prstGeom xmlns:a="http://schemas.openxmlformats.org/drawingml/2006/main" prst="roundRect">
             <a:avLst>
@@ -12832,8 +12832,8 @@
         </p:nvSpPr>
         <p:spPr>
           <a:xfrm xmlns:a="http://schemas.openxmlformats.org/drawingml/2006/main">
-            <a:off x="9448800" y="3190875"/>
-            <a:ext cx="1238250" cy="238125"/>
+            <a:off x="10267950" y="3190875"/>
+            <a:ext cx="1428750" cy="238125"/>
           </a:xfrm>
           <a:prstGeom xmlns:a="http://schemas.openxmlformats.org/drawingml/2006/main" prst="rect">
             <a:avLst/>
@@ -12986,7 +12986,7 @@
         <p:spPr>
           <a:xfrm xmlns:a="http://schemas.openxmlformats.org/drawingml/2006/main">
             <a:off x="3257550" y="3619500"/>
-            <a:ext cx="1428750" cy="628650"/>
+            <a:ext cx="1619250" cy="628650"/>
           </a:xfrm>
           <a:prstGeom xmlns:a="http://schemas.openxmlformats.org/drawingml/2006/main" prst="roundRect">
             <a:avLst>
@@ -13021,7 +13021,7 @@
         <p:spPr>
           <a:xfrm xmlns:a="http://schemas.openxmlformats.org/drawingml/2006/main">
             <a:off x="3352800" y="3819525"/>
-            <a:ext cx="1238250" cy="238125"/>
+            <a:ext cx="1428750" cy="238125"/>
           </a:xfrm>
           <a:prstGeom xmlns:a="http://schemas.openxmlformats.org/drawingml/2006/main" prst="rect">
             <a:avLst/>
@@ -13079,8 +13079,8 @@
         </p:nvSpPr>
         <p:spPr>
           <a:xfrm xmlns:a="http://schemas.openxmlformats.org/drawingml/2006/main">
-            <a:off x="4686300" y="3619500"/>
-            <a:ext cx="1428750" cy="628650"/>
+            <a:off x="4876800" y="3619500"/>
+            <a:ext cx="1619250" cy="628650"/>
           </a:xfrm>
           <a:prstGeom xmlns:a="http://schemas.openxmlformats.org/drawingml/2006/main" prst="roundRect">
             <a:avLst>
@@ -13114,8 +13114,8 @@
         </p:nvSpPr>
         <p:spPr>
           <a:xfrm xmlns:a="http://schemas.openxmlformats.org/drawingml/2006/main">
-            <a:off x="4781550" y="3819525"/>
-            <a:ext cx="1238250" cy="238125"/>
+            <a:off x="4972050" y="3819525"/>
+            <a:ext cx="1428750" cy="238125"/>
           </a:xfrm>
           <a:prstGeom xmlns:a="http://schemas.openxmlformats.org/drawingml/2006/main" prst="rect">
             <a:avLst/>
@@ -13173,8 +13173,8 @@
         </p:nvSpPr>
         <p:spPr>
           <a:xfrm xmlns:a="http://schemas.openxmlformats.org/drawingml/2006/main">
-            <a:off x="6115050" y="3619500"/>
-            <a:ext cx="1428750" cy="628650"/>
+            <a:off x="6496050" y="3619500"/>
+            <a:ext cx="1619250" cy="628650"/>
           </a:xfrm>
           <a:prstGeom xmlns:a="http://schemas.openxmlformats.org/drawingml/2006/main" prst="roundRect">
             <a:avLst>
@@ -13208,8 +13208,8 @@
         </p:nvSpPr>
         <p:spPr>
           <a:xfrm xmlns:a="http://schemas.openxmlformats.org/drawingml/2006/main">
-            <a:off x="6210300" y="3819525"/>
-            <a:ext cx="1238250" cy="238125"/>
+            <a:off x="6591300" y="3819525"/>
+            <a:ext cx="1428750" cy="238125"/>
           </a:xfrm>
           <a:prstGeom xmlns:a="http://schemas.openxmlformats.org/drawingml/2006/main" prst="rect">
             <a:avLst/>
@@ -13267,8 +13267,8 @@
         </p:nvSpPr>
         <p:spPr>
           <a:xfrm xmlns:a="http://schemas.openxmlformats.org/drawingml/2006/main">
-            <a:off x="7543800" y="3619500"/>
-            <a:ext cx="1809750" cy="628650"/>
+            <a:off x="8115300" y="3619500"/>
+            <a:ext cx="2057400" cy="628650"/>
           </a:xfrm>
           <a:prstGeom xmlns:a="http://schemas.openxmlformats.org/drawingml/2006/main" prst="roundRect">
             <a:avLst>
@@ -13302,8 +13302,8 @@
         </p:nvSpPr>
         <p:spPr>
           <a:xfrm xmlns:a="http://schemas.openxmlformats.org/drawingml/2006/main">
-            <a:off x="7639050" y="3819525"/>
-            <a:ext cx="1619250" cy="238125"/>
+            <a:off x="8210550" y="3819525"/>
+            <a:ext cx="1866900" cy="238125"/>
           </a:xfrm>
           <a:prstGeom xmlns:a="http://schemas.openxmlformats.org/drawingml/2006/main" prst="rect">
             <a:avLst/>
@@ -13361,8 +13361,8 @@
         </p:nvSpPr>
         <p:spPr>
           <a:xfrm xmlns:a="http://schemas.openxmlformats.org/drawingml/2006/main">
-            <a:off x="9353550" y="3619500"/>
-            <a:ext cx="1428750" cy="628650"/>
+            <a:off x="10172700" y="3619500"/>
+            <a:ext cx="1619250" cy="628650"/>
           </a:xfrm>
           <a:prstGeom xmlns:a="http://schemas.openxmlformats.org/drawingml/2006/main" prst="roundRect">
             <a:avLst>
@@ -13396,8 +13396,8 @@
         </p:nvSpPr>
         <p:spPr>
           <a:xfrm xmlns:a="http://schemas.openxmlformats.org/drawingml/2006/main">
-            <a:off x="9448800" y="3819525"/>
-            <a:ext cx="1238250" cy="238125"/>
+            <a:off x="10267950" y="3819525"/>
+            <a:ext cx="1428750" cy="238125"/>
           </a:xfrm>
           <a:prstGeom xmlns:a="http://schemas.openxmlformats.org/drawingml/2006/main" prst="rect">
             <a:avLst/>
@@ -13548,7 +13548,7 @@
         <p:spPr>
           <a:xfrm xmlns:a="http://schemas.openxmlformats.org/drawingml/2006/main">
             <a:off x="3257550" y="4248150"/>
-            <a:ext cx="1428750" cy="628650"/>
+            <a:ext cx="1619250" cy="628650"/>
           </a:xfrm>
           <a:prstGeom xmlns:a="http://schemas.openxmlformats.org/drawingml/2006/main" prst="roundRect">
             <a:avLst>
@@ -13581,7 +13581,7 @@
         <p:spPr>
           <a:xfrm xmlns:a="http://schemas.openxmlformats.org/drawingml/2006/main">
             <a:off x="3352800" y="4448175"/>
-            <a:ext cx="1238250" cy="238125"/>
+            <a:ext cx="1428750" cy="238125"/>
           </a:xfrm>
           <a:prstGeom xmlns:a="http://schemas.openxmlformats.org/drawingml/2006/main" prst="rect">
             <a:avLst/>
@@ -13639,8 +13639,8 @@
         </p:nvSpPr>
         <p:spPr>
           <a:xfrm xmlns:a="http://schemas.openxmlformats.org/drawingml/2006/main">
-            <a:off x="4686300" y="4248150"/>
-            <a:ext cx="1428750" cy="628650"/>
+            <a:off x="4876800" y="4248150"/>
+            <a:ext cx="1619250" cy="628650"/>
           </a:xfrm>
           <a:prstGeom xmlns:a="http://schemas.openxmlformats.org/drawingml/2006/main" prst="roundRect">
             <a:avLst>
@@ -13672,8 +13672,8 @@
         </p:nvSpPr>
         <p:spPr>
           <a:xfrm xmlns:a="http://schemas.openxmlformats.org/drawingml/2006/main">
-            <a:off x="4781550" y="4448175"/>
-            <a:ext cx="1238250" cy="238125"/>
+            <a:off x="4972050" y="4448175"/>
+            <a:ext cx="1428750" cy="238125"/>
           </a:xfrm>
           <a:prstGeom xmlns:a="http://schemas.openxmlformats.org/drawingml/2006/main" prst="rect">
             <a:avLst/>
@@ -13731,8 +13731,8 @@
         </p:nvSpPr>
         <p:spPr>
           <a:xfrm xmlns:a="http://schemas.openxmlformats.org/drawingml/2006/main">
-            <a:off x="6115050" y="4248150"/>
-            <a:ext cx="1428750" cy="628650"/>
+            <a:off x="6496050" y="4248150"/>
+            <a:ext cx="1619250" cy="628650"/>
           </a:xfrm>
           <a:prstGeom xmlns:a="http://schemas.openxmlformats.org/drawingml/2006/main" prst="roundRect">
             <a:avLst>
@@ -13764,8 +13764,8 @@
         </p:nvSpPr>
         <p:spPr>
           <a:xfrm xmlns:a="http://schemas.openxmlformats.org/drawingml/2006/main">
-            <a:off x="6210300" y="4448175"/>
-            <a:ext cx="1238250" cy="238125"/>
+            <a:off x="6591300" y="4448175"/>
+            <a:ext cx="1428750" cy="238125"/>
           </a:xfrm>
           <a:prstGeom xmlns:a="http://schemas.openxmlformats.org/drawingml/2006/main" prst="rect">
             <a:avLst/>
@@ -13823,8 +13823,8 @@
         </p:nvSpPr>
         <p:spPr>
           <a:xfrm xmlns:a="http://schemas.openxmlformats.org/drawingml/2006/main">
-            <a:off x="7543800" y="4248150"/>
-            <a:ext cx="1809750" cy="628650"/>
+            <a:off x="8115300" y="4248150"/>
+            <a:ext cx="2057400" cy="628650"/>
           </a:xfrm>
           <a:prstGeom xmlns:a="http://schemas.openxmlformats.org/drawingml/2006/main" prst="roundRect">
             <a:avLst>
@@ -13856,8 +13856,8 @@
         </p:nvSpPr>
         <p:spPr>
           <a:xfrm xmlns:a="http://schemas.openxmlformats.org/drawingml/2006/main">
-            <a:off x="7639050" y="4448175"/>
-            <a:ext cx="1619250" cy="238125"/>
+            <a:off x="8210550" y="4448175"/>
+            <a:ext cx="1866900" cy="238125"/>
           </a:xfrm>
           <a:prstGeom xmlns:a="http://schemas.openxmlformats.org/drawingml/2006/main" prst="rect">
             <a:avLst/>
@@ -13915,8 +13915,8 @@
         </p:nvSpPr>
         <p:spPr>
           <a:xfrm xmlns:a="http://schemas.openxmlformats.org/drawingml/2006/main">
-            <a:off x="9353550" y="4248150"/>
-            <a:ext cx="1428750" cy="628650"/>
+            <a:off x="10172700" y="4248150"/>
+            <a:ext cx="1619250" cy="628650"/>
           </a:xfrm>
           <a:prstGeom xmlns:a="http://schemas.openxmlformats.org/drawingml/2006/main" prst="roundRect">
             <a:avLst>
@@ -13948,8 +13948,8 @@
         </p:nvSpPr>
         <p:spPr>
           <a:xfrm xmlns:a="http://schemas.openxmlformats.org/drawingml/2006/main">
-            <a:off x="9448800" y="4448175"/>
-            <a:ext cx="1238250" cy="238125"/>
+            <a:off x="10267950" y="4448175"/>
+            <a:ext cx="1428750" cy="238125"/>
           </a:xfrm>
           <a:prstGeom xmlns:a="http://schemas.openxmlformats.org/drawingml/2006/main" prst="rect">
             <a:avLst/>
@@ -14484,7 +14484,7 @@
           <p:nvPr/>
         </p:nvPicPr>
         <p:blipFill>
-          <a:blip xmlns:r="http://schemas.openxmlformats.org/officeDocument/2006/relationships" xmlns:a="http://schemas.openxmlformats.org/drawingml/2006/main" r:embed="Re775445b32fb4eb8"/>
+          <a:blip xmlns:r="http://schemas.openxmlformats.org/officeDocument/2006/relationships" xmlns:a="http://schemas.openxmlformats.org/drawingml/2006/main" r:embed="Rc7dbb6d769864434"/>
           <a:srcRect xmlns:a="http://schemas.openxmlformats.org/drawingml/2006/main" l="0" t="33403" r="0" b="33403"/>
           <a:stretch xmlns:a="http://schemas.openxmlformats.org/drawingml/2006/main">
             <a:fillRect l="0" t="0" r="0" b="0"/>
@@ -15426,8 +15426,8 @@
         </p:nvSpPr>
         <p:spPr>
           <a:xfrm xmlns:a="http://schemas.openxmlformats.org/drawingml/2006/main">
-            <a:off x="3676650" y="1447800"/>
-            <a:ext cx="8191500" cy="4705350"/>
+            <a:off x="3676650" y="1524000"/>
+            <a:ext cx="8191500" cy="4629150"/>
           </a:xfrm>
           <a:prstGeom xmlns:a="http://schemas.openxmlformats.org/drawingml/2006/main" prst="roundRect">
             <a:avLst>
@@ -15452,7 +15452,7 @@
           <p:nvPr/>
         </p:nvPicPr>
         <p:blipFill>
-          <a:blip xmlns:r="http://schemas.openxmlformats.org/officeDocument/2006/relationships" xmlns:a="http://schemas.openxmlformats.org/drawingml/2006/main" r:embed="Rffb087988b9f4222"/>
+          <a:blip xmlns:r="http://schemas.openxmlformats.org/officeDocument/2006/relationships" xmlns:a="http://schemas.openxmlformats.org/drawingml/2006/main" r:embed="R23f38c596c6c42a4"/>
           <a:srcRect xmlns:a="http://schemas.openxmlformats.org/drawingml/2006/main" l="0" t="29622" r="0" b="29622"/>
           <a:stretch xmlns:a="http://schemas.openxmlformats.org/drawingml/2006/main">
             <a:fillRect l="0" t="0" r="0" b="0"/>
@@ -15460,8 +15460,8 @@
         </p:blipFill>
         <p:spPr>
           <a:xfrm xmlns:a="http://schemas.openxmlformats.org/drawingml/2006/main">
-            <a:off x="3752850" y="1524000"/>
-            <a:ext cx="8039100" cy="4552950"/>
+            <a:off x="3752850" y="1600200"/>
+            <a:ext cx="8039100" cy="4476750"/>
           </a:xfrm>
           <a:prstGeom xmlns:a="http://schemas.openxmlformats.org/drawingml/2006/main" prst="rect">
             <a:avLst/>
@@ -16287,7 +16287,7 @@
           <p:nvPr/>
         </p:nvPicPr>
         <p:blipFill>
-          <a:blip xmlns:r="http://schemas.openxmlformats.org/officeDocument/2006/relationships" xmlns:a="http://schemas.openxmlformats.org/drawingml/2006/main" r:embed="Rb48bed6b7f7e47b6"/>
+          <a:blip xmlns:r="http://schemas.openxmlformats.org/officeDocument/2006/relationships" xmlns:a="http://schemas.openxmlformats.org/drawingml/2006/main" r:embed="Rf4d8b212e2014291"/>
           <a:srcRect xmlns:a="http://schemas.openxmlformats.org/drawingml/2006/main" l="0" t="46500" r="0" b="30636"/>
           <a:stretch xmlns:a="http://schemas.openxmlformats.org/drawingml/2006/main">
             <a:fillRect l="0" t="0" r="0" b="0"/>
@@ -17828,7 +17828,7 @@
         <p:spPr>
           <a:xfrm xmlns:a="http://schemas.openxmlformats.org/drawingml/2006/main">
             <a:off x="400050" y="1695450"/>
-            <a:ext cx="2038350" cy="2628900"/>
+            <a:ext cx="2076450" cy="2628900"/>
           </a:xfrm>
           <a:prstGeom xmlns:a="http://schemas.openxmlformats.org/drawingml/2006/main" prst="roundRect">
             <a:avLst>
@@ -17920,7 +17920,7 @@
         <p:spPr>
           <a:xfrm xmlns:a="http://schemas.openxmlformats.org/drawingml/2006/main">
             <a:off x="571500" y="2362200"/>
-            <a:ext cx="1695450" cy="533400"/>
+            <a:ext cx="1733550" cy="533400"/>
           </a:xfrm>
           <a:prstGeom xmlns:a="http://schemas.openxmlformats.org/drawingml/2006/main" prst="rect">
             <a:avLst/>
@@ -17979,7 +17979,7 @@
         <p:spPr>
           <a:xfrm xmlns:a="http://schemas.openxmlformats.org/drawingml/2006/main">
             <a:off x="571500" y="3105150"/>
-            <a:ext cx="1695450" cy="723900"/>
+            <a:ext cx="1733550" cy="723900"/>
           </a:xfrm>
           <a:prstGeom xmlns:a="http://schemas.openxmlformats.org/drawingml/2006/main" prst="rect">
             <a:avLst/>
@@ -18037,8 +18037,8 @@
         </p:nvSpPr>
         <p:spPr>
           <a:xfrm xmlns:a="http://schemas.openxmlformats.org/drawingml/2006/main">
-            <a:off x="2667000" y="1962150"/>
-            <a:ext cx="2038350" cy="2533650"/>
+            <a:off x="2728913" y="1962150"/>
+            <a:ext cx="2076450" cy="2533650"/>
           </a:xfrm>
           <a:prstGeom xmlns:a="http://schemas.openxmlformats.org/drawingml/2006/main" prst="roundRect">
             <a:avLst>
@@ -18070,7 +18070,7 @@
         </p:nvSpPr>
         <p:spPr>
           <a:xfrm xmlns:a="http://schemas.openxmlformats.org/drawingml/2006/main">
-            <a:off x="2838450" y="2152650"/>
+            <a:off x="2900363" y="2152650"/>
             <a:ext cx="419100" cy="228600"/>
           </a:xfrm>
           <a:prstGeom xmlns:a="http://schemas.openxmlformats.org/drawingml/2006/main" prst="rect">
@@ -18129,8 +18129,8 @@
         </p:nvSpPr>
         <p:spPr>
           <a:xfrm xmlns:a="http://schemas.openxmlformats.org/drawingml/2006/main">
-            <a:off x="2838450" y="2628900"/>
-            <a:ext cx="1695450" cy="533400"/>
+            <a:off x="2900363" y="2628900"/>
+            <a:ext cx="1733550" cy="533400"/>
           </a:xfrm>
           <a:prstGeom xmlns:a="http://schemas.openxmlformats.org/drawingml/2006/main" prst="rect">
             <a:avLst/>
@@ -18188,8 +18188,8 @@
         </p:nvSpPr>
         <p:spPr>
           <a:xfrm xmlns:a="http://schemas.openxmlformats.org/drawingml/2006/main">
-            <a:off x="2838450" y="3371850"/>
-            <a:ext cx="1695450" cy="723900"/>
+            <a:off x="2900363" y="3371850"/>
+            <a:ext cx="1733550" cy="723900"/>
           </a:xfrm>
           <a:prstGeom xmlns:a="http://schemas.openxmlformats.org/drawingml/2006/main" prst="rect">
             <a:avLst/>
@@ -18247,8 +18247,8 @@
         </p:nvSpPr>
         <p:spPr>
           <a:xfrm xmlns:a="http://schemas.openxmlformats.org/drawingml/2006/main">
-            <a:off x="4933950" y="2228850"/>
-            <a:ext cx="2038350" cy="2438400"/>
+            <a:off x="5057775" y="2228850"/>
+            <a:ext cx="2076450" cy="2438400"/>
           </a:xfrm>
           <a:prstGeom xmlns:a="http://schemas.openxmlformats.org/drawingml/2006/main" prst="roundRect">
             <a:avLst>
@@ -18280,7 +18280,7 @@
         </p:nvSpPr>
         <p:spPr>
           <a:xfrm xmlns:a="http://schemas.openxmlformats.org/drawingml/2006/main">
-            <a:off x="5105400" y="2419350"/>
+            <a:off x="5229225" y="2419350"/>
             <a:ext cx="419100" cy="228600"/>
           </a:xfrm>
           <a:prstGeom xmlns:a="http://schemas.openxmlformats.org/drawingml/2006/main" prst="rect">
@@ -18339,8 +18339,8 @@
         </p:nvSpPr>
         <p:spPr>
           <a:xfrm xmlns:a="http://schemas.openxmlformats.org/drawingml/2006/main">
-            <a:off x="5105400" y="2895600"/>
-            <a:ext cx="1695450" cy="533400"/>
+            <a:off x="5229225" y="2895600"/>
+            <a:ext cx="1733550" cy="533400"/>
           </a:xfrm>
           <a:prstGeom xmlns:a="http://schemas.openxmlformats.org/drawingml/2006/main" prst="rect">
             <a:avLst/>
@@ -18398,8 +18398,8 @@
         </p:nvSpPr>
         <p:spPr>
           <a:xfrm xmlns:a="http://schemas.openxmlformats.org/drawingml/2006/main">
-            <a:off x="5105400" y="3638550"/>
-            <a:ext cx="1695450" cy="723900"/>
+            <a:off x="5229225" y="3638550"/>
+            <a:ext cx="1733550" cy="723900"/>
           </a:xfrm>
           <a:prstGeom xmlns:a="http://schemas.openxmlformats.org/drawingml/2006/main" prst="rect">
             <a:avLst/>
@@ -18457,8 +18457,8 @@
         </p:nvSpPr>
         <p:spPr>
           <a:xfrm xmlns:a="http://schemas.openxmlformats.org/drawingml/2006/main">
-            <a:off x="7200900" y="2495550"/>
-            <a:ext cx="2038350" cy="2343150"/>
+            <a:off x="7386638" y="2495550"/>
+            <a:ext cx="2076450" cy="2343150"/>
           </a:xfrm>
           <a:prstGeom xmlns:a="http://schemas.openxmlformats.org/drawingml/2006/main" prst="roundRect">
             <a:avLst>
@@ -18490,7 +18490,7 @@
         </p:nvSpPr>
         <p:spPr>
           <a:xfrm xmlns:a="http://schemas.openxmlformats.org/drawingml/2006/main">
-            <a:off x="7372350" y="2686050"/>
+            <a:off x="7558088" y="2686050"/>
             <a:ext cx="419100" cy="228600"/>
           </a:xfrm>
           <a:prstGeom xmlns:a="http://schemas.openxmlformats.org/drawingml/2006/main" prst="rect">
@@ -18549,8 +18549,8 @@
         </p:nvSpPr>
         <p:spPr>
           <a:xfrm xmlns:a="http://schemas.openxmlformats.org/drawingml/2006/main">
-            <a:off x="7372350" y="3162300"/>
-            <a:ext cx="1695450" cy="533400"/>
+            <a:off x="7558088" y="3162300"/>
+            <a:ext cx="1733550" cy="533400"/>
           </a:xfrm>
           <a:prstGeom xmlns:a="http://schemas.openxmlformats.org/drawingml/2006/main" prst="rect">
             <a:avLst/>
@@ -18608,8 +18608,8 @@
         </p:nvSpPr>
         <p:spPr>
           <a:xfrm xmlns:a="http://schemas.openxmlformats.org/drawingml/2006/main">
-            <a:off x="7372350" y="3905250"/>
-            <a:ext cx="1695450" cy="723900"/>
+            <a:off x="7558088" y="3905250"/>
+            <a:ext cx="1733550" cy="723900"/>
           </a:xfrm>
           <a:prstGeom xmlns:a="http://schemas.openxmlformats.org/drawingml/2006/main" prst="rect">
             <a:avLst/>
@@ -18667,8 +18667,8 @@
         </p:nvSpPr>
         <p:spPr>
           <a:xfrm xmlns:a="http://schemas.openxmlformats.org/drawingml/2006/main">
-            <a:off x="9467850" y="2762250"/>
-            <a:ext cx="2038350" cy="2247900"/>
+            <a:off x="9715500" y="2762250"/>
+            <a:ext cx="2076450" cy="2247900"/>
           </a:xfrm>
           <a:prstGeom xmlns:a="http://schemas.openxmlformats.org/drawingml/2006/main" prst="roundRect">
             <a:avLst>
@@ -18700,7 +18700,7 @@
         </p:nvSpPr>
         <p:spPr>
           <a:xfrm xmlns:a="http://schemas.openxmlformats.org/drawingml/2006/main">
-            <a:off x="9639300" y="2952750"/>
+            <a:off x="9886950" y="2952750"/>
             <a:ext cx="419100" cy="228600"/>
           </a:xfrm>
           <a:prstGeom xmlns:a="http://schemas.openxmlformats.org/drawingml/2006/main" prst="rect">
@@ -18759,21 +18759,21 @@
         </p:nvSpPr>
         <p:spPr>
           <a:xfrm xmlns:a="http://schemas.openxmlformats.org/drawingml/2006/main">
-            <a:off x="9639300" y="3429000"/>
-            <a:ext cx="1695450" cy="533400"/>
-          </a:xfrm>
-          <a:prstGeom xmlns:a="http://schemas.openxmlformats.org/drawingml/2006/main" prst="rect">
-            <a:avLst/>
-          </a:prstGeom>
-          <a:noFill xmlns:a="http://schemas.openxmlformats.org/drawingml/2006/main"/>
-          <a:ln xmlns:a="http://schemas.openxmlformats.org/drawingml/2006/main" w="0">
-            <a:noFill/>
-            <a:prstDash val="solid"/>
-          </a:ln>
-        </p:spPr>
-        <p:txBody>
-          <a:bodyPr xmlns:a="http://schemas.openxmlformats.org/drawingml/2006/main" anchor="t">
-            <a:normAutofit fontScale="96667"/>
+            <a:off x="9886950" y="3429000"/>
+            <a:ext cx="1733550" cy="533400"/>
+          </a:xfrm>
+          <a:prstGeom xmlns:a="http://schemas.openxmlformats.org/drawingml/2006/main" prst="rect">
+            <a:avLst/>
+          </a:prstGeom>
+          <a:noFill xmlns:a="http://schemas.openxmlformats.org/drawingml/2006/main"/>
+          <a:ln xmlns:a="http://schemas.openxmlformats.org/drawingml/2006/main" w="0">
+            <a:noFill/>
+            <a:prstDash val="solid"/>
+          </a:ln>
+        </p:spPr>
+        <p:txBody>
+          <a:bodyPr xmlns:a="http://schemas.openxmlformats.org/drawingml/2006/main" anchor="t">
+            <a:normAutofit fontScale="98042"/>
           </a:bodyPr>
           <a:lstStyle xmlns:a="http://schemas.openxmlformats.org/drawingml/2006/main"/>
           <a:p xmlns:a="http://schemas.openxmlformats.org/drawingml/2006/main">
@@ -18818,8 +18818,8 @@
         </p:nvSpPr>
         <p:spPr>
           <a:xfrm xmlns:a="http://schemas.openxmlformats.org/drawingml/2006/main">
-            <a:off x="9639300" y="4171950"/>
-            <a:ext cx="1695450" cy="723900"/>
+            <a:off x="9886950" y="4171950"/>
+            <a:ext cx="1733550" cy="723900"/>
           </a:xfrm>
           <a:prstGeom xmlns:a="http://schemas.openxmlformats.org/drawingml/2006/main" prst="rect">
             <a:avLst/>

--- a/docs/submission/APAR_COMPETITION_DECK.pptx
+++ b/docs/submission/APAR_COMPETITION_DECK.pptx
@@ -2,23 +2,23 @@
 <file path=ppt/presentation.xml><?xml version="1.0" encoding="utf-8"?>
 <p:presentation xmlns:p="http://schemas.openxmlformats.org/presentationml/2006/main">
   <p:sldMasterIdLst>
-    <p:sldMasterId xmlns:r="http://schemas.openxmlformats.org/officeDocument/2006/relationships" id="2147483648" r:id="Rf043c89714ca4998"/>
+    <p:sldMasterId xmlns:r="http://schemas.openxmlformats.org/officeDocument/2006/relationships" id="2147483648" r:id="R8c7f2a85fb3944ec"/>
   </p:sldMasterIdLst>
   <p:notesMasterIdLst>
-    <p:notesMasterId xmlns:r="http://schemas.openxmlformats.org/officeDocument/2006/relationships" r:id="R50e4f95c92964fde"/>
+    <p:notesMasterId xmlns:r="http://schemas.openxmlformats.org/officeDocument/2006/relationships" r:id="Rb7efc0eb4f2140da"/>
   </p:notesMasterIdLst>
   <p:sldIdLst>
-    <p:sldId xmlns:r="http://schemas.openxmlformats.org/officeDocument/2006/relationships" id="256" r:id="R38706f60b2704d13"/>
-    <p:sldId xmlns:r="http://schemas.openxmlformats.org/officeDocument/2006/relationships" id="257" r:id="R4ed8a45f1b89410f"/>
-    <p:sldId xmlns:r="http://schemas.openxmlformats.org/officeDocument/2006/relationships" id="258" r:id="R7df392c0eb8846de"/>
-    <p:sldId xmlns:r="http://schemas.openxmlformats.org/officeDocument/2006/relationships" id="259" r:id="Re24c92aa8c2c4916"/>
-    <p:sldId xmlns:r="http://schemas.openxmlformats.org/officeDocument/2006/relationships" id="260" r:id="R7ebb08f8065f4497"/>
-    <p:sldId xmlns:r="http://schemas.openxmlformats.org/officeDocument/2006/relationships" id="261" r:id="Rdef3fb02294c4973"/>
-    <p:sldId xmlns:r="http://schemas.openxmlformats.org/officeDocument/2006/relationships" id="262" r:id="Rd66d7208b90e419a"/>
-    <p:sldId xmlns:r="http://schemas.openxmlformats.org/officeDocument/2006/relationships" id="263" r:id="R5df4f03cf9b44709"/>
-    <p:sldId xmlns:r="http://schemas.openxmlformats.org/officeDocument/2006/relationships" id="264" r:id="R53215c505acd4917"/>
-    <p:sldId xmlns:r="http://schemas.openxmlformats.org/officeDocument/2006/relationships" id="265" r:id="R190aa44d5c8148ec"/>
-    <p:sldId xmlns:r="http://schemas.openxmlformats.org/officeDocument/2006/relationships" id="266" r:id="R164edc439d5a4d65"/>
+    <p:sldId xmlns:r="http://schemas.openxmlformats.org/officeDocument/2006/relationships" id="256" r:id="R920775ac254944be"/>
+    <p:sldId xmlns:r="http://schemas.openxmlformats.org/officeDocument/2006/relationships" id="257" r:id="R95d2b26dfdcc4a57"/>
+    <p:sldId xmlns:r="http://schemas.openxmlformats.org/officeDocument/2006/relationships" id="258" r:id="R311f544cdb394752"/>
+    <p:sldId xmlns:r="http://schemas.openxmlformats.org/officeDocument/2006/relationships" id="259" r:id="R55f61da1313842a2"/>
+    <p:sldId xmlns:r="http://schemas.openxmlformats.org/officeDocument/2006/relationships" id="260" r:id="Rfb8cbbe325504b15"/>
+    <p:sldId xmlns:r="http://schemas.openxmlformats.org/officeDocument/2006/relationships" id="261" r:id="Rbe3bb513ec214ade"/>
+    <p:sldId xmlns:r="http://schemas.openxmlformats.org/officeDocument/2006/relationships" id="262" r:id="R3afe8a3f1b7a4820"/>
+    <p:sldId xmlns:r="http://schemas.openxmlformats.org/officeDocument/2006/relationships" id="263" r:id="R06f2e2e30bed4a52"/>
+    <p:sldId xmlns:r="http://schemas.openxmlformats.org/officeDocument/2006/relationships" id="264" r:id="R935d950247064033"/>
+    <p:sldId xmlns:r="http://schemas.openxmlformats.org/officeDocument/2006/relationships" id="265" r:id="Ra46eda8018ca44e4"/>
+    <p:sldId xmlns:r="http://schemas.openxmlformats.org/officeDocument/2006/relationships" id="266" r:id="Raa3d54c5740b4a96"/>
   </p:sldIdLst>
   <p:sldSz cx="12192000" cy="6858000"/>
   <p:notesSz cx="6858000" cy="9144000"/>
@@ -1520,7 +1520,7 @@
   </p:cSld>
   <p:clrMap bg1="lt1" tx1="dk1" bg2="lt2" tx2="dk2" accent1="accent1" accent2="accent2" accent3="accent3" accent4="accent4" accent5="accent5" accent6="accent6" hlink="hlink" folHlink="folHlink"/>
   <p:sldLayoutIdLst>
-    <p:sldLayoutId xmlns:r="http://schemas.openxmlformats.org/officeDocument/2006/relationships" id="2147483649" r:id="R65fcc1c9cd9f45aa"/>
+    <p:sldLayoutId xmlns:r="http://schemas.openxmlformats.org/officeDocument/2006/relationships" id="2147483649" r:id="R118f2f902b5c4c43"/>
   </p:sldLayoutIdLst>
   <p:txStyles>
     <p:titleStyle>
@@ -2415,7 +2415,18 @@
                 <a:ea typeface="Arial"/>
                 <a:cs typeface="Arial"/>
               </a:rPr>
-              <a:t>Dylan Moraes  •  Competition submission</a:t>
+              <a:t>Team: LedgerPe Labs</a:t>
+            </a:r>
+            <a:r>
+              <a:rPr sz="1050" b="0">
+                <a:solidFill>
+                  <a:srgbClr val="9C9183"/>
+                </a:solidFill>
+                <a:latin typeface="Arial"/>
+                <a:ea typeface="Arial"/>
+                <a:cs typeface="Arial"/>
+              </a:rPr>
+              <a:t>  •  Competition submission</a:t>
             </a:r>
           </a:p>
         </p:txBody>
@@ -2462,7 +2473,7 @@
           <p:nvPr/>
         </p:nvPicPr>
         <p:blipFill>
-          <a:blip xmlns:r="http://schemas.openxmlformats.org/officeDocument/2006/relationships" xmlns:a="http://schemas.openxmlformats.org/drawingml/2006/main" r:embed="R698f8ec12c554a1d"/>
+          <a:blip xmlns:r="http://schemas.openxmlformats.org/officeDocument/2006/relationships" xmlns:a="http://schemas.openxmlformats.org/drawingml/2006/main" r:embed="R69a758b9ab874a3c"/>
           <a:srcRect xmlns:a="http://schemas.openxmlformats.org/drawingml/2006/main" l="0" t="0" r="0" b="32694"/>
           <a:stretch xmlns:a="http://schemas.openxmlformats.org/drawingml/2006/main">
             <a:fillRect l="0" t="0" r="0" b="0"/>
@@ -5992,7 +6003,18 @@
                 <a:ea typeface="Menlo"/>
                 <a:cs typeface="Menlo"/>
               </a:rPr>
-              <a:t>Adaptive Payment Assurance Range  •  Dylan Moraes</a:t>
+              <a:t>Adaptive Payment Assurance Range  •  </a:t>
+            </a:r>
+            <a:r>
+              <a:rPr sz="825" b="0">
+                <a:solidFill>
+                  <a:srgbClr val="9C9183"/>
+                </a:solidFill>
+                <a:latin typeface="Menlo"/>
+                <a:ea typeface="Menlo"/>
+                <a:cs typeface="Menlo"/>
+              </a:rPr>
+              <a:t>Team: LedgerPe Labs</a:t>
             </a:r>
           </a:p>
         </p:txBody>
@@ -14484,7 +14506,7 @@
           <p:nvPr/>
         </p:nvPicPr>
         <p:blipFill>
-          <a:blip xmlns:r="http://schemas.openxmlformats.org/officeDocument/2006/relationships" xmlns:a="http://schemas.openxmlformats.org/drawingml/2006/main" r:embed="Rc7dbb6d769864434"/>
+          <a:blip xmlns:r="http://schemas.openxmlformats.org/officeDocument/2006/relationships" xmlns:a="http://schemas.openxmlformats.org/drawingml/2006/main" r:embed="R00864de50fae4e5d"/>
           <a:srcRect xmlns:a="http://schemas.openxmlformats.org/drawingml/2006/main" l="0" t="33403" r="0" b="33403"/>
           <a:stretch xmlns:a="http://schemas.openxmlformats.org/drawingml/2006/main">
             <a:fillRect l="0" t="0" r="0" b="0"/>
@@ -15452,7 +15474,7 @@
           <p:nvPr/>
         </p:nvPicPr>
         <p:blipFill>
-          <a:blip xmlns:r="http://schemas.openxmlformats.org/officeDocument/2006/relationships" xmlns:a="http://schemas.openxmlformats.org/drawingml/2006/main" r:embed="R23f38c596c6c42a4"/>
+          <a:blip xmlns:r="http://schemas.openxmlformats.org/officeDocument/2006/relationships" xmlns:a="http://schemas.openxmlformats.org/drawingml/2006/main" r:embed="R9382e78b8b1541bf"/>
           <a:srcRect xmlns:a="http://schemas.openxmlformats.org/drawingml/2006/main" l="0" t="29622" r="0" b="29622"/>
           <a:stretch xmlns:a="http://schemas.openxmlformats.org/drawingml/2006/main">
             <a:fillRect l="0" t="0" r="0" b="0"/>
@@ -16287,7 +16309,7 @@
           <p:nvPr/>
         </p:nvPicPr>
         <p:blipFill>
-          <a:blip xmlns:r="http://schemas.openxmlformats.org/officeDocument/2006/relationships" xmlns:a="http://schemas.openxmlformats.org/drawingml/2006/main" r:embed="Rf4d8b212e2014291"/>
+          <a:blip xmlns:r="http://schemas.openxmlformats.org/officeDocument/2006/relationships" xmlns:a="http://schemas.openxmlformats.org/drawingml/2006/main" r:embed="Rb69b8c48dc214f3d"/>
           <a:srcRect xmlns:a="http://schemas.openxmlformats.org/drawingml/2006/main" l="0" t="46500" r="0" b="30636"/>
           <a:stretch xmlns:a="http://schemas.openxmlformats.org/drawingml/2006/main">
             <a:fillRect l="0" t="0" r="0" b="0"/>
